--- a/Kepfeldolgozas_arcdetektalas_2025.pptx
+++ b/Kepfeldolgozas_arcdetektalas_2025.pptx
@@ -1,42 +1,42 @@
 
 <file path=ppt/presentation.xml><?xml version="1.0" encoding="utf-8"?>
-<p:presentation xmlns:a="http://schemas.openxmlformats.org/drawingml/2006/main" xmlns:r="http://schemas.openxmlformats.org/officeDocument/2006/relationships" xmlns:mc="http://schemas.openxmlformats.org/markup-compatibility/2006" xmlns:mv="urn:schemas-microsoft-com:mac:vml" xmlns:p="http://schemas.openxmlformats.org/presentationml/2006/main" xmlns:c="http://schemas.openxmlformats.org/drawingml/2006/chart" xmlns:dgm="http://schemas.openxmlformats.org/drawingml/2006/diagram" xmlns:o="urn:schemas-microsoft-com:office:office" xmlns:v="urn:schemas-microsoft-com:vml" xmlns:pvml="urn:schemas-microsoft-com:office:powerpoint" xmlns:com="http://schemas.openxmlformats.org/drawingml/2006/compatibility" xmlns:p14="http://schemas.microsoft.com/office/powerpoint/2010/main" xmlns:p15="http://schemas.microsoft.com/office/powerpoint/2012/main" xmlns:ahyp="http://schemas.microsoft.com/office/drawing/2018/hyperlinkcolor" autoCompressPictures="0" embedTrueTypeFonts="1" strictFirstAndLastChars="0" saveSubsetFonts="1">
+<p:presentation xmlns:a="http://schemas.openxmlformats.org/drawingml/2006/main" xmlns:r="http://schemas.openxmlformats.org/officeDocument/2006/relationships" xmlns:p="http://schemas.openxmlformats.org/presentationml/2006/main" strictFirstAndLastChars="0" embedTrueTypeFonts="1" saveSubsetFonts="1" autoCompressPictures="0">
   <p:sldMasterIdLst>
-    <p:sldMasterId id="2147483648" r:id="rId4"/>
+    <p:sldMasterId id="2147483648" r:id="rId1"/>
   </p:sldMasterIdLst>
   <p:notesMasterIdLst>
-    <p:notesMasterId r:id="rId5"/>
+    <p:notesMasterId r:id="rId13"/>
   </p:notesMasterIdLst>
   <p:sldIdLst>
-    <p:sldId id="256" r:id="rId6"/>
-    <p:sldId id="257" r:id="rId7"/>
-    <p:sldId id="258" r:id="rId8"/>
-    <p:sldId id="259" r:id="rId9"/>
-    <p:sldId id="260" r:id="rId10"/>
-    <p:sldId id="261" r:id="rId11"/>
-    <p:sldId id="262" r:id="rId12"/>
-    <p:sldId id="263" r:id="rId13"/>
-    <p:sldId id="264" r:id="rId14"/>
-    <p:sldId id="265" r:id="rId15"/>
-    <p:sldId id="266" r:id="rId16"/>
+    <p:sldId id="256" r:id="rId2"/>
+    <p:sldId id="257" r:id="rId3"/>
+    <p:sldId id="258" r:id="rId4"/>
+    <p:sldId id="259" r:id="rId5"/>
+    <p:sldId id="260" r:id="rId6"/>
+    <p:sldId id="261" r:id="rId7"/>
+    <p:sldId id="262" r:id="rId8"/>
+    <p:sldId id="263" r:id="rId9"/>
+    <p:sldId id="264" r:id="rId10"/>
+    <p:sldId id="265" r:id="rId11"/>
+    <p:sldId id="266" r:id="rId12"/>
   </p:sldIdLst>
-  <p:sldSz cy="5143500" cx="9144000"/>
+  <p:sldSz cx="9144000" cy="5143500" type="screen16x9"/>
   <p:notesSz cx="6858000" cy="9144000"/>
   <p:embeddedFontLst>
     <p:embeddedFont>
-      <p:font typeface="VT323"/>
-      <p:regular r:id="rId17"/>
+      <p:font typeface="Roboto Mono" panose="00000009000000000000" pitchFamily="49" charset="0"/>
+      <p:regular r:id="rId14"/>
+      <p:bold r:id="rId15"/>
+      <p:italic r:id="rId16"/>
+      <p:boldItalic r:id="rId17"/>
     </p:embeddedFont>
     <p:embeddedFont>
-      <p:font typeface="Roboto Mono"/>
+      <p:font typeface="VT323" panose="020B0604020202020204" charset="0"/>
       <p:regular r:id="rId18"/>
-      <p:bold r:id="rId19"/>
-      <p:italic r:id="rId20"/>
-      <p:boldItalic r:id="rId21"/>
     </p:embeddedFont>
   </p:embeddedFontLst>
   <p:defaultTextStyle>
-    <a:defPPr lvl="0" marR="0" rtl="0" algn="l">
+    <a:defPPr marR="0" lvl="0" algn="l" rtl="0">
       <a:lnSpc>
         <a:spcPct val="100000"/>
       </a:lnSpc>
@@ -47,7 +47,7 @@
         <a:spcPts val="0"/>
       </a:spcAft>
     </a:defPPr>
-    <a:lvl1pPr lvl="0" marR="0" rtl="0" algn="l">
+    <a:lvl1pPr marR="0" lvl="0" algn="l" rtl="0">
       <a:lnSpc>
         <a:spcPct val="100000"/>
       </a:lnSpc>
@@ -61,7 +61,7 @@
         <a:srgbClr val="000000"/>
       </a:buClr>
       <a:buFont typeface="Arial"/>
-      <a:defRPr b="0" i="0" sz="1400" u="none" cap="none" strike="noStrike">
+      <a:defRPr sz="1400" b="0" i="0" u="none" strike="noStrike" cap="none">
         <a:solidFill>
           <a:srgbClr val="000000"/>
         </a:solidFill>
@@ -71,7 +71,7 @@
         <a:sym typeface="Arial"/>
       </a:defRPr>
     </a:lvl1pPr>
-    <a:lvl2pPr lvl="1" marR="0" rtl="0" algn="l">
+    <a:lvl2pPr marR="0" lvl="1" algn="l" rtl="0">
       <a:lnSpc>
         <a:spcPct val="100000"/>
       </a:lnSpc>
@@ -85,7 +85,7 @@
         <a:srgbClr val="000000"/>
       </a:buClr>
       <a:buFont typeface="Arial"/>
-      <a:defRPr b="0" i="0" sz="1400" u="none" cap="none" strike="noStrike">
+      <a:defRPr sz="1400" b="0" i="0" u="none" strike="noStrike" cap="none">
         <a:solidFill>
           <a:srgbClr val="000000"/>
         </a:solidFill>
@@ -95,7 +95,7 @@
         <a:sym typeface="Arial"/>
       </a:defRPr>
     </a:lvl2pPr>
-    <a:lvl3pPr lvl="2" marR="0" rtl="0" algn="l">
+    <a:lvl3pPr marR="0" lvl="2" algn="l" rtl="0">
       <a:lnSpc>
         <a:spcPct val="100000"/>
       </a:lnSpc>
@@ -109,7 +109,7 @@
         <a:srgbClr val="000000"/>
       </a:buClr>
       <a:buFont typeface="Arial"/>
-      <a:defRPr b="0" i="0" sz="1400" u="none" cap="none" strike="noStrike">
+      <a:defRPr sz="1400" b="0" i="0" u="none" strike="noStrike" cap="none">
         <a:solidFill>
           <a:srgbClr val="000000"/>
         </a:solidFill>
@@ -119,7 +119,7 @@
         <a:sym typeface="Arial"/>
       </a:defRPr>
     </a:lvl3pPr>
-    <a:lvl4pPr lvl="3" marR="0" rtl="0" algn="l">
+    <a:lvl4pPr marR="0" lvl="3" algn="l" rtl="0">
       <a:lnSpc>
         <a:spcPct val="100000"/>
       </a:lnSpc>
@@ -133,7 +133,7 @@
         <a:srgbClr val="000000"/>
       </a:buClr>
       <a:buFont typeface="Arial"/>
-      <a:defRPr b="0" i="0" sz="1400" u="none" cap="none" strike="noStrike">
+      <a:defRPr sz="1400" b="0" i="0" u="none" strike="noStrike" cap="none">
         <a:solidFill>
           <a:srgbClr val="000000"/>
         </a:solidFill>
@@ -143,7 +143,7 @@
         <a:sym typeface="Arial"/>
       </a:defRPr>
     </a:lvl4pPr>
-    <a:lvl5pPr lvl="4" marR="0" rtl="0" algn="l">
+    <a:lvl5pPr marR="0" lvl="4" algn="l" rtl="0">
       <a:lnSpc>
         <a:spcPct val="100000"/>
       </a:lnSpc>
@@ -157,7 +157,7 @@
         <a:srgbClr val="000000"/>
       </a:buClr>
       <a:buFont typeface="Arial"/>
-      <a:defRPr b="0" i="0" sz="1400" u="none" cap="none" strike="noStrike">
+      <a:defRPr sz="1400" b="0" i="0" u="none" strike="noStrike" cap="none">
         <a:solidFill>
           <a:srgbClr val="000000"/>
         </a:solidFill>
@@ -167,7 +167,7 @@
         <a:sym typeface="Arial"/>
       </a:defRPr>
     </a:lvl5pPr>
-    <a:lvl6pPr lvl="5" marR="0" rtl="0" algn="l">
+    <a:lvl6pPr marR="0" lvl="5" algn="l" rtl="0">
       <a:lnSpc>
         <a:spcPct val="100000"/>
       </a:lnSpc>
@@ -181,7 +181,7 @@
         <a:srgbClr val="000000"/>
       </a:buClr>
       <a:buFont typeface="Arial"/>
-      <a:defRPr b="0" i="0" sz="1400" u="none" cap="none" strike="noStrike">
+      <a:defRPr sz="1400" b="0" i="0" u="none" strike="noStrike" cap="none">
         <a:solidFill>
           <a:srgbClr val="000000"/>
         </a:solidFill>
@@ -191,7 +191,7 @@
         <a:sym typeface="Arial"/>
       </a:defRPr>
     </a:lvl6pPr>
-    <a:lvl7pPr lvl="6" marR="0" rtl="0" algn="l">
+    <a:lvl7pPr marR="0" lvl="6" algn="l" rtl="0">
       <a:lnSpc>
         <a:spcPct val="100000"/>
       </a:lnSpc>
@@ -205,7 +205,7 @@
         <a:srgbClr val="000000"/>
       </a:buClr>
       <a:buFont typeface="Arial"/>
-      <a:defRPr b="0" i="0" sz="1400" u="none" cap="none" strike="noStrike">
+      <a:defRPr sz="1400" b="0" i="0" u="none" strike="noStrike" cap="none">
         <a:solidFill>
           <a:srgbClr val="000000"/>
         </a:solidFill>
@@ -215,7 +215,7 @@
         <a:sym typeface="Arial"/>
       </a:defRPr>
     </a:lvl7pPr>
-    <a:lvl8pPr lvl="7" marR="0" rtl="0" algn="l">
+    <a:lvl8pPr marR="0" lvl="7" algn="l" rtl="0">
       <a:lnSpc>
         <a:spcPct val="100000"/>
       </a:lnSpc>
@@ -229,7 +229,7 @@
         <a:srgbClr val="000000"/>
       </a:buClr>
       <a:buFont typeface="Arial"/>
-      <a:defRPr b="0" i="0" sz="1400" u="none" cap="none" strike="noStrike">
+      <a:defRPr sz="1400" b="0" i="0" u="none" strike="noStrike" cap="none">
         <a:solidFill>
           <a:srgbClr val="000000"/>
         </a:solidFill>
@@ -239,7 +239,7 @@
         <a:sym typeface="Arial"/>
       </a:defRPr>
     </a:lvl8pPr>
-    <a:lvl9pPr lvl="8" marR="0" rtl="0" algn="l">
+    <a:lvl9pPr marR="0" lvl="8" algn="l" rtl="0">
       <a:lnSpc>
         <a:spcPct val="100000"/>
       </a:lnSpc>
@@ -253,7 +253,7 @@
         <a:srgbClr val="000000"/>
       </a:buClr>
       <a:buFont typeface="Arial"/>
-      <a:defRPr b="0" i="0" sz="1400" u="none" cap="none" strike="noStrike">
+      <a:defRPr sz="1400" b="0" i="0" u="none" strike="noStrike" cap="none">
         <a:solidFill>
           <a:srgbClr val="000000"/>
         </a:solidFill>
@@ -266,25 +266,63 @@
   </p:defaultTextStyle>
   <p:extLst>
     <p:ext uri="GoogleSlidesCustomDataVersion2">
-      <go:slidesCustomData xmlns:go="http://customooxmlschemas.google.com/" r:id="rId22" roundtripDataSignature="AMtx7midvaqHSCGY2xx/2se+om9oRLs40w=="/>
+      <go:slidesCustomData xmlns:go="http://customooxmlschemas.google.com/" xmlns:ahyp="http://schemas.microsoft.com/office/drawing/2018/hyperlinkcolor" xmlns:p15="http://schemas.microsoft.com/office/powerpoint/2012/main" xmlns:p14="http://schemas.microsoft.com/office/powerpoint/2010/main" xmlns:com="http://schemas.openxmlformats.org/drawingml/2006/compatibility" xmlns:pvml="urn:schemas-microsoft-com:office:powerpoint" xmlns:v="urn:schemas-microsoft-com:vml" xmlns:o="urn:schemas-microsoft-com:office:office" xmlns:dgm="http://schemas.openxmlformats.org/drawingml/2006/diagram" xmlns:c="http://schemas.openxmlformats.org/drawingml/2006/chart" xmlns:mv="urn:schemas-microsoft-com:mac:vml" xmlns:mc="http://schemas.openxmlformats.org/markup-compatibility/2006" xmlns="" r:id="rId22" roundtripDataSignature="AMtx7midvaqHSCGY2xx/2se+om9oRLs40w=="/>
     </p:ext>
   </p:extLst>
 </p:presentation>
 </file>
 
+<file path=ppt/revisionInfo.xml><?xml version="1.0" encoding="utf-8"?>
+<p1510:revInfo xmlns:a="http://schemas.openxmlformats.org/drawingml/2006/main" xmlns:r="http://schemas.openxmlformats.org/officeDocument/2006/relationships" xmlns:p1510="http://schemas.microsoft.com/office/powerpoint/2015/10/main">
+  <p1510:revLst>
+    <p1510:client id="{2DA720AF-26CB-DD14-7DC2-496CE2FD46D3}" v="27" dt="2025-11-30T14:45:01.519"/>
+  </p1510:revLst>
+</p1510:revInfo>
+</file>
+
+<file path=ppt/changesInfos/changesInfo1.xml><?xml version="1.0" encoding="utf-8"?>
+<pc:chgInfo xmlns:a="http://schemas.openxmlformats.org/drawingml/2006/main" xmlns:r="http://schemas.openxmlformats.org/officeDocument/2006/relationships" xmlns:ac="http://schemas.microsoft.com/office/drawing/2013/main/command" xmlns:pc="http://schemas.microsoft.com/office/powerpoint/2013/main/command">
+  <pc:docChgLst>
+    <pc:chgData name="Előd Kálmán" userId="919d0f6f46e042c3" providerId="Windows Live" clId="Web-{2DA720AF-26CB-DD14-7DC2-496CE2FD46D3}"/>
+    <pc:docChg chg="modSld">
+      <pc:chgData name="Előd Kálmán" userId="919d0f6f46e042c3" providerId="Windows Live" clId="Web-{2DA720AF-26CB-DD14-7DC2-496CE2FD46D3}" dt="2025-11-30T14:45:01.519" v="22" actId="20577"/>
+      <pc:docMkLst>
+        <pc:docMk/>
+      </pc:docMkLst>
+      <pc:sldChg chg="modSp">
+        <pc:chgData name="Előd Kálmán" userId="919d0f6f46e042c3" providerId="Windows Live" clId="Web-{2DA720AF-26CB-DD14-7DC2-496CE2FD46D3}" dt="2025-11-30T14:45:01.519" v="22" actId="20577"/>
+        <pc:sldMkLst>
+          <pc:docMk/>
+          <pc:sldMk cId="0" sldId="259"/>
+        </pc:sldMkLst>
+        <pc:spChg chg="mod">
+          <ac:chgData name="Előd Kálmán" userId="919d0f6f46e042c3" providerId="Windows Live" clId="Web-{2DA720AF-26CB-DD14-7DC2-496CE2FD46D3}" dt="2025-11-30T14:45:01.519" v="22" actId="20577"/>
+          <ac:spMkLst>
+            <pc:docMk/>
+            <pc:sldMk cId="0" sldId="259"/>
+            <ac:spMk id="102" creationId="{00000000-0000-0000-0000-000000000000}"/>
+          </ac:spMkLst>
+        </pc:spChg>
+      </pc:sldChg>
+    </pc:docChg>
+  </pc:docChgLst>
+</pc:chgInfo>
+</file>
+
 <file path=ppt/notesMasters/notesMaster1.xml><?xml version="1.0" encoding="utf-8"?>
-<p:notesMaster xmlns:a="http://schemas.openxmlformats.org/drawingml/2006/main" xmlns:r="http://schemas.openxmlformats.org/officeDocument/2006/relationships" xmlns:mc="http://schemas.openxmlformats.org/markup-compatibility/2006" xmlns:mv="urn:schemas-microsoft-com:mac:vml" xmlns:p="http://schemas.openxmlformats.org/presentationml/2006/main" xmlns:c="http://schemas.openxmlformats.org/drawingml/2006/chart" xmlns:dgm="http://schemas.openxmlformats.org/drawingml/2006/diagram" xmlns:o="urn:schemas-microsoft-com:office:office" xmlns:v="urn:schemas-microsoft-com:vml" xmlns:pvml="urn:schemas-microsoft-com:office:powerpoint" xmlns:com="http://schemas.openxmlformats.org/drawingml/2006/compatibility" xmlns:p14="http://schemas.microsoft.com/office/powerpoint/2010/main" xmlns:p15="http://schemas.microsoft.com/office/powerpoint/2012/main" xmlns:ahyp="http://schemas.microsoft.com/office/drawing/2018/hyperlinkcolor">
+<p:notesMaster xmlns:a="http://schemas.openxmlformats.org/drawingml/2006/main" xmlns:r="http://schemas.openxmlformats.org/officeDocument/2006/relationships" xmlns:p="http://schemas.openxmlformats.org/presentationml/2006/main">
   <p:cSld>
     <p:bg>
       <p:bgPr>
         <a:solidFill>
           <a:schemeClr val="lt1"/>
         </a:solidFill>
+        <a:effectLst/>
       </p:bgPr>
     </p:bg>
     <p:spTree>
       <p:nvGrpSpPr>
-        <p:cNvPr id="2" name="Shape 2"/>
+        <p:cNvPr id="1" name="Shape 2"/>
         <p:cNvGrpSpPr/>
         <p:nvPr/>
       </p:nvGrpSpPr>
@@ -299,9 +337,11 @@
       <p:sp>
         <p:nvSpPr>
           <p:cNvPr id="3" name="Google Shape;3;n"/>
-          <p:cNvSpPr/>
+          <p:cNvSpPr>
+            <a:spLocks noGrp="1" noRot="1" noChangeAspect="1"/>
+          </p:cNvSpPr>
           <p:nvPr>
-            <p:ph idx="2" type="sldImg"/>
+            <p:ph type="sldImg" idx="2"/>
           </p:nvPr>
         </p:nvSpPr>
         <p:spPr>
@@ -310,9 +350,13 @@
             <a:ext cx="6096075" cy="3429000"/>
           </a:xfrm>
           <a:custGeom>
-            <a:rect b="b" l="l" r="r" t="t"/>
+            <a:avLst/>
+            <a:gdLst/>
+            <a:ahLst/>
+            <a:cxnLst/>
+            <a:rect l="l" t="t" r="r" b="b"/>
             <a:pathLst>
-              <a:path extrusionOk="0" h="120000" w="120000">
+              <a:path w="120000" h="120000" extrusionOk="0">
                 <a:moveTo>
                   <a:pt x="0" y="0"/>
                 </a:moveTo>
@@ -330,23 +374,25 @@
             </a:pathLst>
           </a:custGeom>
           <a:noFill/>
-          <a:ln cap="flat" cmpd="sng" w="9525">
+          <a:ln w="9525" cap="flat" cmpd="sng">
             <a:solidFill>
               <a:srgbClr val="000000"/>
             </a:solidFill>
             <a:prstDash val="solid"/>
             <a:round/>
-            <a:headEnd len="sm" w="sm" type="none"/>
-            <a:tailEnd len="sm" w="sm" type="none"/>
+            <a:headEnd type="none" w="sm" len="sm"/>
+            <a:tailEnd type="none" w="sm" len="sm"/>
           </a:ln>
         </p:spPr>
       </p:sp>
       <p:sp>
         <p:nvSpPr>
           <p:cNvPr id="4" name="Google Shape;4;n"/>
-          <p:cNvSpPr txBox="1"/>
+          <p:cNvSpPr txBox="1">
+            <a:spLocks noGrp="1"/>
+          </p:cNvSpPr>
           <p:nvPr>
-            <p:ph idx="1" type="body"/>
+            <p:ph type="body" idx="1"/>
           </p:nvPr>
         </p:nvSpPr>
         <p:spPr>
@@ -363,11 +409,11 @@
           </a:ln>
         </p:spPr>
         <p:txBody>
-          <a:bodyPr anchorCtr="0" anchor="t" bIns="91425" lIns="91425" spcFirstLastPara="1" rIns="91425" wrap="square" tIns="91425">
+          <a:bodyPr spcFirstLastPara="1" wrap="square" lIns="91425" tIns="91425" rIns="91425" bIns="91425" anchor="t" anchorCtr="0">
             <a:noAutofit/>
           </a:bodyPr>
           <a:lstStyle>
-            <a:lvl1pPr indent="-298450" lvl="0" marL="457200" marR="0" rtl="0" algn="l">
+            <a:lvl1pPr marL="457200" marR="0" lvl="0" indent="-298450" algn="l" rtl="0">
               <a:lnSpc>
                 <a:spcPct val="100000"/>
               </a:lnSpc>
@@ -383,7 +429,7 @@
               <a:buSzPts val="1100"/>
               <a:buFont typeface="Arial"/>
               <a:buChar char="●"/>
-              <a:defRPr b="0" i="0" sz="1100" u="none" cap="none" strike="noStrike">
+              <a:defRPr sz="1100" b="0" i="0" u="none" strike="noStrike" cap="none">
                 <a:solidFill>
                   <a:srgbClr val="000000"/>
                 </a:solidFill>
@@ -393,7 +439,7 @@
                 <a:sym typeface="Arial"/>
               </a:defRPr>
             </a:lvl1pPr>
-            <a:lvl2pPr indent="-298450" lvl="1" marL="914400" marR="0" rtl="0" algn="l">
+            <a:lvl2pPr marL="914400" marR="0" lvl="1" indent="-298450" algn="l" rtl="0">
               <a:lnSpc>
                 <a:spcPct val="100000"/>
               </a:lnSpc>
@@ -409,7 +455,7 @@
               <a:buSzPts val="1100"/>
               <a:buFont typeface="Arial"/>
               <a:buChar char="○"/>
-              <a:defRPr b="0" i="0" sz="1100" u="none" cap="none" strike="noStrike">
+              <a:defRPr sz="1100" b="0" i="0" u="none" strike="noStrike" cap="none">
                 <a:solidFill>
                   <a:srgbClr val="000000"/>
                 </a:solidFill>
@@ -419,7 +465,7 @@
                 <a:sym typeface="Arial"/>
               </a:defRPr>
             </a:lvl2pPr>
-            <a:lvl3pPr indent="-298450" lvl="2" marL="1371600" marR="0" rtl="0" algn="l">
+            <a:lvl3pPr marL="1371600" marR="0" lvl="2" indent="-298450" algn="l" rtl="0">
               <a:lnSpc>
                 <a:spcPct val="100000"/>
               </a:lnSpc>
@@ -435,7 +481,7 @@
               <a:buSzPts val="1100"/>
               <a:buFont typeface="Arial"/>
               <a:buChar char="■"/>
-              <a:defRPr b="0" i="0" sz="1100" u="none" cap="none" strike="noStrike">
+              <a:defRPr sz="1100" b="0" i="0" u="none" strike="noStrike" cap="none">
                 <a:solidFill>
                   <a:srgbClr val="000000"/>
                 </a:solidFill>
@@ -445,7 +491,7 @@
                 <a:sym typeface="Arial"/>
               </a:defRPr>
             </a:lvl3pPr>
-            <a:lvl4pPr indent="-298450" lvl="3" marL="1828800" marR="0" rtl="0" algn="l">
+            <a:lvl4pPr marL="1828800" marR="0" lvl="3" indent="-298450" algn="l" rtl="0">
               <a:lnSpc>
                 <a:spcPct val="100000"/>
               </a:lnSpc>
@@ -461,7 +507,7 @@
               <a:buSzPts val="1100"/>
               <a:buFont typeface="Arial"/>
               <a:buChar char="●"/>
-              <a:defRPr b="0" i="0" sz="1100" u="none" cap="none" strike="noStrike">
+              <a:defRPr sz="1100" b="0" i="0" u="none" strike="noStrike" cap="none">
                 <a:solidFill>
                   <a:srgbClr val="000000"/>
                 </a:solidFill>
@@ -471,7 +517,7 @@
                 <a:sym typeface="Arial"/>
               </a:defRPr>
             </a:lvl4pPr>
-            <a:lvl5pPr indent="-298450" lvl="4" marL="2286000" marR="0" rtl="0" algn="l">
+            <a:lvl5pPr marL="2286000" marR="0" lvl="4" indent="-298450" algn="l" rtl="0">
               <a:lnSpc>
                 <a:spcPct val="100000"/>
               </a:lnSpc>
@@ -487,7 +533,7 @@
               <a:buSzPts val="1100"/>
               <a:buFont typeface="Arial"/>
               <a:buChar char="○"/>
-              <a:defRPr b="0" i="0" sz="1100" u="none" cap="none" strike="noStrike">
+              <a:defRPr sz="1100" b="0" i="0" u="none" strike="noStrike" cap="none">
                 <a:solidFill>
                   <a:srgbClr val="000000"/>
                 </a:solidFill>
@@ -497,7 +543,7 @@
                 <a:sym typeface="Arial"/>
               </a:defRPr>
             </a:lvl5pPr>
-            <a:lvl6pPr indent="-298450" lvl="5" marL="2743200" marR="0" rtl="0" algn="l">
+            <a:lvl6pPr marL="2743200" marR="0" lvl="5" indent="-298450" algn="l" rtl="0">
               <a:lnSpc>
                 <a:spcPct val="100000"/>
               </a:lnSpc>
@@ -513,7 +559,7 @@
               <a:buSzPts val="1100"/>
               <a:buFont typeface="Arial"/>
               <a:buChar char="■"/>
-              <a:defRPr b="0" i="0" sz="1100" u="none" cap="none" strike="noStrike">
+              <a:defRPr sz="1100" b="0" i="0" u="none" strike="noStrike" cap="none">
                 <a:solidFill>
                   <a:srgbClr val="000000"/>
                 </a:solidFill>
@@ -523,7 +569,7 @@
                 <a:sym typeface="Arial"/>
               </a:defRPr>
             </a:lvl6pPr>
-            <a:lvl7pPr indent="-298450" lvl="6" marL="3200400" marR="0" rtl="0" algn="l">
+            <a:lvl7pPr marL="3200400" marR="0" lvl="6" indent="-298450" algn="l" rtl="0">
               <a:lnSpc>
                 <a:spcPct val="100000"/>
               </a:lnSpc>
@@ -539,7 +585,7 @@
               <a:buSzPts val="1100"/>
               <a:buFont typeface="Arial"/>
               <a:buChar char="●"/>
-              <a:defRPr b="0" i="0" sz="1100" u="none" cap="none" strike="noStrike">
+              <a:defRPr sz="1100" b="0" i="0" u="none" strike="noStrike" cap="none">
                 <a:solidFill>
                   <a:srgbClr val="000000"/>
                 </a:solidFill>
@@ -549,7 +595,7 @@
                 <a:sym typeface="Arial"/>
               </a:defRPr>
             </a:lvl7pPr>
-            <a:lvl8pPr indent="-298450" lvl="7" marL="3657600" marR="0" rtl="0" algn="l">
+            <a:lvl8pPr marL="3657600" marR="0" lvl="7" indent="-298450" algn="l" rtl="0">
               <a:lnSpc>
                 <a:spcPct val="100000"/>
               </a:lnSpc>
@@ -565,7 +611,7 @@
               <a:buSzPts val="1100"/>
               <a:buFont typeface="Arial"/>
               <a:buChar char="○"/>
-              <a:defRPr b="0" i="0" sz="1100" u="none" cap="none" strike="noStrike">
+              <a:defRPr sz="1100" b="0" i="0" u="none" strike="noStrike" cap="none">
                 <a:solidFill>
                   <a:srgbClr val="000000"/>
                 </a:solidFill>
@@ -575,7 +621,7 @@
                 <a:sym typeface="Arial"/>
               </a:defRPr>
             </a:lvl8pPr>
-            <a:lvl9pPr indent="-298450" lvl="8" marL="4114800" marR="0" rtl="0" algn="l">
+            <a:lvl9pPr marL="4114800" marR="0" lvl="8" indent="-298450" algn="l" rtl="0">
               <a:lnSpc>
                 <a:spcPct val="100000"/>
               </a:lnSpc>
@@ -591,7 +637,7 @@
               <a:buSzPts val="1100"/>
               <a:buFont typeface="Arial"/>
               <a:buChar char="■"/>
-              <a:defRPr b="0" i="0" sz="1100" u="none" cap="none" strike="noStrike">
+              <a:defRPr sz="1100" b="0" i="0" u="none" strike="noStrike" cap="none">
                 <a:solidFill>
                   <a:srgbClr val="000000"/>
                 </a:solidFill>
@@ -602,14 +648,16 @@
               </a:defRPr>
             </a:lvl9pPr>
           </a:lstStyle>
-          <a:p/>
+          <a:p>
+            <a:endParaRPr/>
+          </a:p>
         </p:txBody>
       </p:sp>
     </p:spTree>
   </p:cSld>
-  <p:clrMap accent1="accent1" accent2="accent2" accent3="accent3" accent4="accent4" accent5="accent5" accent6="accent6" bg1="lt1" bg2="dk2" tx1="dk1" tx2="lt2" folHlink="folHlink" hlink="hlink"/>
+  <p:clrMap bg1="lt1" tx1="dk1" bg2="dk2" tx2="lt2" accent1="accent1" accent2="accent2" accent3="accent3" accent4="accent4" accent5="accent5" accent6="accent6" hlink="hlink" folHlink="folHlink"/>
   <p:notesStyle>
-    <a:defPPr lvl="0" marR="0" rtl="0" algn="l">
+    <a:defPPr marR="0" lvl="0" algn="l" rtl="0">
       <a:lnSpc>
         <a:spcPct val="100000"/>
       </a:lnSpc>
@@ -620,7 +668,7 @@
         <a:spcPts val="0"/>
       </a:spcAft>
     </a:defPPr>
-    <a:lvl1pPr lvl="0" marR="0" rtl="0" algn="l">
+    <a:lvl1pPr marR="0" lvl="0" algn="l" rtl="0">
       <a:lnSpc>
         <a:spcPct val="100000"/>
       </a:lnSpc>
@@ -634,7 +682,7 @@
         <a:srgbClr val="000000"/>
       </a:buClr>
       <a:buFont typeface="Arial"/>
-      <a:defRPr b="0" i="0" sz="1400" u="none" cap="none" strike="noStrike">
+      <a:defRPr sz="1400" b="0" i="0" u="none" strike="noStrike" cap="none">
         <a:solidFill>
           <a:srgbClr val="000000"/>
         </a:solidFill>
@@ -644,7 +692,7 @@
         <a:sym typeface="Arial"/>
       </a:defRPr>
     </a:lvl1pPr>
-    <a:lvl2pPr lvl="1" marR="0" rtl="0" algn="l">
+    <a:lvl2pPr marR="0" lvl="1" algn="l" rtl="0">
       <a:lnSpc>
         <a:spcPct val="100000"/>
       </a:lnSpc>
@@ -658,7 +706,7 @@
         <a:srgbClr val="000000"/>
       </a:buClr>
       <a:buFont typeface="Arial"/>
-      <a:defRPr b="0" i="0" sz="1400" u="none" cap="none" strike="noStrike">
+      <a:defRPr sz="1400" b="0" i="0" u="none" strike="noStrike" cap="none">
         <a:solidFill>
           <a:srgbClr val="000000"/>
         </a:solidFill>
@@ -668,7 +716,7 @@
         <a:sym typeface="Arial"/>
       </a:defRPr>
     </a:lvl2pPr>
-    <a:lvl3pPr lvl="2" marR="0" rtl="0" algn="l">
+    <a:lvl3pPr marR="0" lvl="2" algn="l" rtl="0">
       <a:lnSpc>
         <a:spcPct val="100000"/>
       </a:lnSpc>
@@ -682,7 +730,7 @@
         <a:srgbClr val="000000"/>
       </a:buClr>
       <a:buFont typeface="Arial"/>
-      <a:defRPr b="0" i="0" sz="1400" u="none" cap="none" strike="noStrike">
+      <a:defRPr sz="1400" b="0" i="0" u="none" strike="noStrike" cap="none">
         <a:solidFill>
           <a:srgbClr val="000000"/>
         </a:solidFill>
@@ -692,7 +740,7 @@
         <a:sym typeface="Arial"/>
       </a:defRPr>
     </a:lvl3pPr>
-    <a:lvl4pPr lvl="3" marR="0" rtl="0" algn="l">
+    <a:lvl4pPr marR="0" lvl="3" algn="l" rtl="0">
       <a:lnSpc>
         <a:spcPct val="100000"/>
       </a:lnSpc>
@@ -706,7 +754,7 @@
         <a:srgbClr val="000000"/>
       </a:buClr>
       <a:buFont typeface="Arial"/>
-      <a:defRPr b="0" i="0" sz="1400" u="none" cap="none" strike="noStrike">
+      <a:defRPr sz="1400" b="0" i="0" u="none" strike="noStrike" cap="none">
         <a:solidFill>
           <a:srgbClr val="000000"/>
         </a:solidFill>
@@ -716,7 +764,7 @@
         <a:sym typeface="Arial"/>
       </a:defRPr>
     </a:lvl4pPr>
-    <a:lvl5pPr lvl="4" marR="0" rtl="0" algn="l">
+    <a:lvl5pPr marR="0" lvl="4" algn="l" rtl="0">
       <a:lnSpc>
         <a:spcPct val="100000"/>
       </a:lnSpc>
@@ -730,7 +778,7 @@
         <a:srgbClr val="000000"/>
       </a:buClr>
       <a:buFont typeface="Arial"/>
-      <a:defRPr b="0" i="0" sz="1400" u="none" cap="none" strike="noStrike">
+      <a:defRPr sz="1400" b="0" i="0" u="none" strike="noStrike" cap="none">
         <a:solidFill>
           <a:srgbClr val="000000"/>
         </a:solidFill>
@@ -740,7 +788,7 @@
         <a:sym typeface="Arial"/>
       </a:defRPr>
     </a:lvl5pPr>
-    <a:lvl6pPr lvl="5" marR="0" rtl="0" algn="l">
+    <a:lvl6pPr marR="0" lvl="5" algn="l" rtl="0">
       <a:lnSpc>
         <a:spcPct val="100000"/>
       </a:lnSpc>
@@ -754,7 +802,7 @@
         <a:srgbClr val="000000"/>
       </a:buClr>
       <a:buFont typeface="Arial"/>
-      <a:defRPr b="0" i="0" sz="1400" u="none" cap="none" strike="noStrike">
+      <a:defRPr sz="1400" b="0" i="0" u="none" strike="noStrike" cap="none">
         <a:solidFill>
           <a:srgbClr val="000000"/>
         </a:solidFill>
@@ -764,7 +812,7 @@
         <a:sym typeface="Arial"/>
       </a:defRPr>
     </a:lvl6pPr>
-    <a:lvl7pPr lvl="6" marR="0" rtl="0" algn="l">
+    <a:lvl7pPr marR="0" lvl="6" algn="l" rtl="0">
       <a:lnSpc>
         <a:spcPct val="100000"/>
       </a:lnSpc>
@@ -778,7 +826,7 @@
         <a:srgbClr val="000000"/>
       </a:buClr>
       <a:buFont typeface="Arial"/>
-      <a:defRPr b="0" i="0" sz="1400" u="none" cap="none" strike="noStrike">
+      <a:defRPr sz="1400" b="0" i="0" u="none" strike="noStrike" cap="none">
         <a:solidFill>
           <a:srgbClr val="000000"/>
         </a:solidFill>
@@ -788,7 +836,7 @@
         <a:sym typeface="Arial"/>
       </a:defRPr>
     </a:lvl7pPr>
-    <a:lvl8pPr lvl="7" marR="0" rtl="0" algn="l">
+    <a:lvl8pPr marR="0" lvl="7" algn="l" rtl="0">
       <a:lnSpc>
         <a:spcPct val="100000"/>
       </a:lnSpc>
@@ -802,7 +850,7 @@
         <a:srgbClr val="000000"/>
       </a:buClr>
       <a:buFont typeface="Arial"/>
-      <a:defRPr b="0" i="0" sz="1400" u="none" cap="none" strike="noStrike">
+      <a:defRPr sz="1400" b="0" i="0" u="none" strike="noStrike" cap="none">
         <a:solidFill>
           <a:srgbClr val="000000"/>
         </a:solidFill>
@@ -812,7 +860,7 @@
         <a:sym typeface="Arial"/>
       </a:defRPr>
     </a:lvl8pPr>
-    <a:lvl9pPr lvl="8" marR="0" rtl="0" algn="l">
+    <a:lvl9pPr marR="0" lvl="8" algn="l" rtl="0">
       <a:lnSpc>
         <a:spcPct val="100000"/>
       </a:lnSpc>
@@ -826,7 +874,7 @@
         <a:srgbClr val="000000"/>
       </a:buClr>
       <a:buFont typeface="Arial"/>
-      <a:defRPr b="0" i="0" sz="1400" u="none" cap="none" strike="noStrike">
+      <a:defRPr sz="1400" b="0" i="0" u="none" strike="noStrike" cap="none">
         <a:solidFill>
           <a:srgbClr val="000000"/>
         </a:solidFill>
@@ -841,11 +889,11 @@
 </file>
 
 <file path=ppt/notesSlides/notesSlide1.xml><?xml version="1.0" encoding="utf-8"?>
-<p:notes xmlns:a="http://schemas.openxmlformats.org/drawingml/2006/main" xmlns:r="http://schemas.openxmlformats.org/officeDocument/2006/relationships" xmlns:mc="http://schemas.openxmlformats.org/markup-compatibility/2006" xmlns:mv="urn:schemas-microsoft-com:mac:vml" xmlns:p="http://schemas.openxmlformats.org/presentationml/2006/main" xmlns:c="http://schemas.openxmlformats.org/drawingml/2006/chart" xmlns:dgm="http://schemas.openxmlformats.org/drawingml/2006/diagram" xmlns:o="urn:schemas-microsoft-com:office:office" xmlns:v="urn:schemas-microsoft-com:vml" xmlns:pvml="urn:schemas-microsoft-com:office:powerpoint" xmlns:com="http://schemas.openxmlformats.org/drawingml/2006/compatibility" xmlns:p14="http://schemas.microsoft.com/office/powerpoint/2010/main" xmlns:p15="http://schemas.microsoft.com/office/powerpoint/2012/main" xmlns:ahyp="http://schemas.microsoft.com/office/drawing/2018/hyperlinkcolor" showMasterPhAnim="0" showMasterSp="0">
+<p:notes xmlns:a="http://schemas.openxmlformats.org/drawingml/2006/main" xmlns:r="http://schemas.openxmlformats.org/officeDocument/2006/relationships" xmlns:p="http://schemas.openxmlformats.org/presentationml/2006/main" showMasterSp="0" showMasterPhAnim="0">
   <p:cSld>
     <p:spTree>
       <p:nvGrpSpPr>
-        <p:cNvPr id="77" name="Shape 77"/>
+        <p:cNvPr id="1" name="Shape 77"/>
         <p:cNvGrpSpPr/>
         <p:nvPr/>
       </p:nvGrpSpPr>
@@ -860,9 +908,11 @@
       <p:sp>
         <p:nvSpPr>
           <p:cNvPr id="78" name="Google Shape;78;p1:notes"/>
-          <p:cNvSpPr/>
+          <p:cNvSpPr>
+            <a:spLocks noGrp="1" noRot="1" noChangeAspect="1"/>
+          </p:cNvSpPr>
           <p:nvPr>
-            <p:ph idx="2" type="sldImg"/>
+            <p:ph type="sldImg" idx="2"/>
           </p:nvPr>
         </p:nvSpPr>
         <p:spPr>
@@ -871,9 +921,13 @@
             <a:ext cx="6096000" cy="3429000"/>
           </a:xfrm>
           <a:custGeom>
-            <a:rect b="b" l="l" r="r" t="t"/>
+            <a:avLst/>
+            <a:gdLst/>
+            <a:ahLst/>
+            <a:cxnLst/>
+            <a:rect l="l" t="t" r="r" b="b"/>
             <a:pathLst>
-              <a:path extrusionOk="0" h="120000" w="120000">
+              <a:path w="120000" h="120000" extrusionOk="0">
                 <a:moveTo>
                   <a:pt x="0" y="0"/>
                 </a:moveTo>
@@ -891,23 +945,25 @@
             </a:pathLst>
           </a:custGeom>
           <a:noFill/>
-          <a:ln cap="flat" cmpd="sng" w="9525">
+          <a:ln w="9525" cap="flat" cmpd="sng">
             <a:solidFill>
               <a:srgbClr val="000000"/>
             </a:solidFill>
             <a:prstDash val="solid"/>
             <a:round/>
-            <a:headEnd len="sm" w="sm" type="none"/>
-            <a:tailEnd len="sm" w="sm" type="none"/>
+            <a:headEnd type="none" w="sm" len="sm"/>
+            <a:tailEnd type="none" w="sm" len="sm"/>
           </a:ln>
         </p:spPr>
       </p:sp>
       <p:sp>
         <p:nvSpPr>
           <p:cNvPr id="79" name="Google Shape;79;p1:notes"/>
-          <p:cNvSpPr txBox="1"/>
+          <p:cNvSpPr txBox="1">
+            <a:spLocks noGrp="1"/>
+          </p:cNvSpPr>
           <p:nvPr>
-            <p:ph idx="1" type="body"/>
+            <p:ph type="body" idx="1"/>
           </p:nvPr>
         </p:nvSpPr>
         <p:spPr>
@@ -924,12 +980,12 @@
           </a:ln>
         </p:spPr>
         <p:txBody>
-          <a:bodyPr anchorCtr="0" anchor="t" bIns="91425" lIns="91425" spcFirstLastPara="1" rIns="91425" wrap="square" tIns="91425">
+          <a:bodyPr spcFirstLastPara="1" wrap="square" lIns="91425" tIns="91425" rIns="91425" bIns="91425" anchor="t" anchorCtr="0">
             <a:noAutofit/>
           </a:bodyPr>
           <a:lstStyle/>
           <a:p>
-            <a:pPr indent="0" lvl="0" marL="0" rtl="0" algn="l">
+            <a:pPr marL="0" lvl="0" indent="0" algn="l" rtl="0">
               <a:lnSpc>
                 <a:spcPct val="100000"/>
               </a:lnSpc>
@@ -942,9 +998,6 @@
               <a:buSzPts val="1100"/>
               <a:buNone/>
             </a:pPr>
-            <a:r>
-              <a:t/>
-            </a:r>
             <a:endParaRPr/>
           </a:p>
         </p:txBody>
@@ -958,11 +1011,11 @@
 </file>
 
 <file path=ppt/notesSlides/notesSlide10.xml><?xml version="1.0" encoding="utf-8"?>
-<p:notes xmlns:a="http://schemas.openxmlformats.org/drawingml/2006/main" xmlns:r="http://schemas.openxmlformats.org/officeDocument/2006/relationships" xmlns:mc="http://schemas.openxmlformats.org/markup-compatibility/2006" xmlns:mv="urn:schemas-microsoft-com:mac:vml" xmlns:p="http://schemas.openxmlformats.org/presentationml/2006/main" xmlns:c="http://schemas.openxmlformats.org/drawingml/2006/chart" xmlns:dgm="http://schemas.openxmlformats.org/drawingml/2006/diagram" xmlns:o="urn:schemas-microsoft-com:office:office" xmlns:v="urn:schemas-microsoft-com:vml" xmlns:pvml="urn:schemas-microsoft-com:office:powerpoint" xmlns:com="http://schemas.openxmlformats.org/drawingml/2006/compatibility" xmlns:p14="http://schemas.microsoft.com/office/powerpoint/2010/main" xmlns:p15="http://schemas.microsoft.com/office/powerpoint/2012/main" xmlns:ahyp="http://schemas.microsoft.com/office/drawing/2018/hyperlinkcolor" showMasterPhAnim="0" showMasterSp="0">
+<p:notes xmlns:a="http://schemas.openxmlformats.org/drawingml/2006/main" xmlns:r="http://schemas.openxmlformats.org/officeDocument/2006/relationships" xmlns:p="http://schemas.openxmlformats.org/presentationml/2006/main" showMasterSp="0" showMasterPhAnim="0">
   <p:cSld>
     <p:spTree>
       <p:nvGrpSpPr>
-        <p:cNvPr id="144" name="Shape 144"/>
+        <p:cNvPr id="1" name="Shape 144"/>
         <p:cNvGrpSpPr/>
         <p:nvPr/>
       </p:nvGrpSpPr>
@@ -977,9 +1030,11 @@
       <p:sp>
         <p:nvSpPr>
           <p:cNvPr id="145" name="Google Shape;145;p9:notes"/>
-          <p:cNvSpPr txBox="1"/>
+          <p:cNvSpPr txBox="1">
+            <a:spLocks noGrp="1"/>
+          </p:cNvSpPr>
           <p:nvPr>
-            <p:ph idx="1" type="body"/>
+            <p:ph type="body" idx="1"/>
           </p:nvPr>
         </p:nvSpPr>
         <p:spPr>
@@ -992,12 +1047,12 @@
           </a:prstGeom>
         </p:spPr>
         <p:txBody>
-          <a:bodyPr anchorCtr="0" anchor="t" bIns="91425" lIns="91425" spcFirstLastPara="1" rIns="91425" wrap="square" tIns="91425">
+          <a:bodyPr spcFirstLastPara="1" wrap="square" lIns="91425" tIns="91425" rIns="91425" bIns="91425" anchor="t" anchorCtr="0">
             <a:noAutofit/>
           </a:bodyPr>
           <a:lstStyle/>
           <a:p>
-            <a:pPr indent="0" lvl="0" marL="0" rtl="0" algn="l">
+            <a:pPr marL="0" lvl="0" indent="0" algn="l" rtl="0">
               <a:spcBef>
                 <a:spcPts val="0"/>
               </a:spcBef>
@@ -1006,9 +1061,6 @@
               </a:spcAft>
               <a:buNone/>
             </a:pPr>
-            <a:r>
-              <a:t/>
-            </a:r>
             <a:endParaRPr/>
           </a:p>
         </p:txBody>
@@ -1016,20 +1068,26 @@
       <p:sp>
         <p:nvSpPr>
           <p:cNvPr id="146" name="Google Shape;146;p9:notes"/>
-          <p:cNvSpPr/>
+          <p:cNvSpPr>
+            <a:spLocks noGrp="1" noRot="1" noChangeAspect="1"/>
+          </p:cNvSpPr>
           <p:nvPr>
-            <p:ph idx="2" type="sldImg"/>
+            <p:ph type="sldImg" idx="2"/>
           </p:nvPr>
         </p:nvSpPr>
         <p:spPr>
           <a:xfrm>
-            <a:off x="381300" y="685800"/>
-            <a:ext cx="6096075" cy="3429000"/>
+            <a:off x="381000" y="685800"/>
+            <a:ext cx="6096000" cy="3429000"/>
           </a:xfrm>
           <a:custGeom>
-            <a:rect b="b" l="l" r="r" t="t"/>
+            <a:avLst/>
+            <a:gdLst/>
+            <a:ahLst/>
+            <a:cxnLst/>
+            <a:rect l="l" t="t" r="r" b="b"/>
             <a:pathLst>
-              <a:path extrusionOk="0" h="120000" w="120000">
+              <a:path w="120000" h="120000" extrusionOk="0">
                 <a:moveTo>
                   <a:pt x="0" y="0"/>
                 </a:moveTo>
@@ -1057,11 +1115,11 @@
 </file>
 
 <file path=ppt/notesSlides/notesSlide11.xml><?xml version="1.0" encoding="utf-8"?>
-<p:notes xmlns:a="http://schemas.openxmlformats.org/drawingml/2006/main" xmlns:r="http://schemas.openxmlformats.org/officeDocument/2006/relationships" xmlns:mc="http://schemas.openxmlformats.org/markup-compatibility/2006" xmlns:mv="urn:schemas-microsoft-com:mac:vml" xmlns:p="http://schemas.openxmlformats.org/presentationml/2006/main" xmlns:c="http://schemas.openxmlformats.org/drawingml/2006/chart" xmlns:dgm="http://schemas.openxmlformats.org/drawingml/2006/diagram" xmlns:o="urn:schemas-microsoft-com:office:office" xmlns:v="urn:schemas-microsoft-com:vml" xmlns:pvml="urn:schemas-microsoft-com:office:powerpoint" xmlns:com="http://schemas.openxmlformats.org/drawingml/2006/compatibility" xmlns:p14="http://schemas.microsoft.com/office/powerpoint/2010/main" xmlns:p15="http://schemas.microsoft.com/office/powerpoint/2012/main" xmlns:ahyp="http://schemas.microsoft.com/office/drawing/2018/hyperlinkcolor" showMasterPhAnim="0" showMasterSp="0">
+<p:notes xmlns:a="http://schemas.openxmlformats.org/drawingml/2006/main" xmlns:r="http://schemas.openxmlformats.org/officeDocument/2006/relationships" xmlns:p="http://schemas.openxmlformats.org/presentationml/2006/main" showMasterSp="0" showMasterPhAnim="0">
   <p:cSld>
     <p:spTree>
       <p:nvGrpSpPr>
-        <p:cNvPr id="150" name="Shape 150"/>
+        <p:cNvPr id="1" name="Shape 150"/>
         <p:cNvGrpSpPr/>
         <p:nvPr/>
       </p:nvGrpSpPr>
@@ -1076,9 +1134,11 @@
       <p:sp>
         <p:nvSpPr>
           <p:cNvPr id="151" name="Google Shape;151;p10:notes"/>
-          <p:cNvSpPr/>
+          <p:cNvSpPr>
+            <a:spLocks noGrp="1" noRot="1" noChangeAspect="1"/>
+          </p:cNvSpPr>
           <p:nvPr>
-            <p:ph idx="2" type="sldImg"/>
+            <p:ph type="sldImg" idx="2"/>
           </p:nvPr>
         </p:nvSpPr>
         <p:spPr>
@@ -1087,9 +1147,13 @@
             <a:ext cx="6096000" cy="3429000"/>
           </a:xfrm>
           <a:custGeom>
-            <a:rect b="b" l="l" r="r" t="t"/>
+            <a:avLst/>
+            <a:gdLst/>
+            <a:ahLst/>
+            <a:cxnLst/>
+            <a:rect l="l" t="t" r="r" b="b"/>
             <a:pathLst>
-              <a:path extrusionOk="0" h="120000" w="120000">
+              <a:path w="120000" h="120000" extrusionOk="0">
                 <a:moveTo>
                   <a:pt x="0" y="0"/>
                 </a:moveTo>
@@ -1107,23 +1171,25 @@
             </a:pathLst>
           </a:custGeom>
           <a:noFill/>
-          <a:ln cap="flat" cmpd="sng" w="9525">
+          <a:ln w="9525" cap="flat" cmpd="sng">
             <a:solidFill>
               <a:srgbClr val="000000"/>
             </a:solidFill>
             <a:prstDash val="solid"/>
             <a:round/>
-            <a:headEnd len="sm" w="sm" type="none"/>
-            <a:tailEnd len="sm" w="sm" type="none"/>
+            <a:headEnd type="none" w="sm" len="sm"/>
+            <a:tailEnd type="none" w="sm" len="sm"/>
           </a:ln>
         </p:spPr>
       </p:sp>
       <p:sp>
         <p:nvSpPr>
           <p:cNvPr id="152" name="Google Shape;152;p10:notes"/>
-          <p:cNvSpPr txBox="1"/>
+          <p:cNvSpPr txBox="1">
+            <a:spLocks noGrp="1"/>
+          </p:cNvSpPr>
           <p:nvPr>
-            <p:ph idx="1" type="body"/>
+            <p:ph type="body" idx="1"/>
           </p:nvPr>
         </p:nvSpPr>
         <p:spPr>
@@ -1140,12 +1206,12 @@
           </a:ln>
         </p:spPr>
         <p:txBody>
-          <a:bodyPr anchorCtr="0" anchor="t" bIns="91425" lIns="91425" spcFirstLastPara="1" rIns="91425" wrap="square" tIns="91425">
+          <a:bodyPr spcFirstLastPara="1" wrap="square" lIns="91425" tIns="91425" rIns="91425" bIns="91425" anchor="t" anchorCtr="0">
             <a:noAutofit/>
           </a:bodyPr>
           <a:lstStyle/>
           <a:p>
-            <a:pPr indent="0" lvl="0" marL="0" rtl="0" algn="l">
+            <a:pPr marL="0" lvl="0" indent="0" algn="l" rtl="0">
               <a:lnSpc>
                 <a:spcPct val="100000"/>
               </a:lnSpc>
@@ -1158,9 +1224,6 @@
               <a:buSzPts val="1100"/>
               <a:buNone/>
             </a:pPr>
-            <a:r>
-              <a:t/>
-            </a:r>
             <a:endParaRPr/>
           </a:p>
         </p:txBody>
@@ -1174,11 +1237,11 @@
 </file>
 
 <file path=ppt/notesSlides/notesSlide2.xml><?xml version="1.0" encoding="utf-8"?>
-<p:notes xmlns:a="http://schemas.openxmlformats.org/drawingml/2006/main" xmlns:r="http://schemas.openxmlformats.org/officeDocument/2006/relationships" xmlns:mc="http://schemas.openxmlformats.org/markup-compatibility/2006" xmlns:mv="urn:schemas-microsoft-com:mac:vml" xmlns:p="http://schemas.openxmlformats.org/presentationml/2006/main" xmlns:c="http://schemas.openxmlformats.org/drawingml/2006/chart" xmlns:dgm="http://schemas.openxmlformats.org/drawingml/2006/diagram" xmlns:o="urn:schemas-microsoft-com:office:office" xmlns:v="urn:schemas-microsoft-com:vml" xmlns:pvml="urn:schemas-microsoft-com:office:powerpoint" xmlns:com="http://schemas.openxmlformats.org/drawingml/2006/compatibility" xmlns:p14="http://schemas.microsoft.com/office/powerpoint/2010/main" xmlns:p15="http://schemas.microsoft.com/office/powerpoint/2012/main" xmlns:ahyp="http://schemas.microsoft.com/office/drawing/2018/hyperlinkcolor" showMasterPhAnim="0" showMasterSp="0">
+<p:notes xmlns:a="http://schemas.openxmlformats.org/drawingml/2006/main" xmlns:r="http://schemas.openxmlformats.org/officeDocument/2006/relationships" xmlns:p="http://schemas.openxmlformats.org/presentationml/2006/main" showMasterSp="0" showMasterPhAnim="0">
   <p:cSld>
     <p:spTree>
       <p:nvGrpSpPr>
-        <p:cNvPr id="84" name="Shape 84"/>
+        <p:cNvPr id="1" name="Shape 84"/>
         <p:cNvGrpSpPr/>
         <p:nvPr/>
       </p:nvGrpSpPr>
@@ -1193,9 +1256,11 @@
       <p:sp>
         <p:nvSpPr>
           <p:cNvPr id="85" name="Google Shape;85;p2:notes"/>
-          <p:cNvSpPr/>
+          <p:cNvSpPr>
+            <a:spLocks noGrp="1" noRot="1" noChangeAspect="1"/>
+          </p:cNvSpPr>
           <p:nvPr>
-            <p:ph idx="2" type="sldImg"/>
+            <p:ph type="sldImg" idx="2"/>
           </p:nvPr>
         </p:nvSpPr>
         <p:spPr>
@@ -1204,9 +1269,13 @@
             <a:ext cx="6096000" cy="3429000"/>
           </a:xfrm>
           <a:custGeom>
-            <a:rect b="b" l="l" r="r" t="t"/>
+            <a:avLst/>
+            <a:gdLst/>
+            <a:ahLst/>
+            <a:cxnLst/>
+            <a:rect l="l" t="t" r="r" b="b"/>
             <a:pathLst>
-              <a:path extrusionOk="0" h="120000" w="120000">
+              <a:path w="120000" h="120000" extrusionOk="0">
                 <a:moveTo>
                   <a:pt x="0" y="0"/>
                 </a:moveTo>
@@ -1224,23 +1293,25 @@
             </a:pathLst>
           </a:custGeom>
           <a:noFill/>
-          <a:ln cap="flat" cmpd="sng" w="9525">
+          <a:ln w="9525" cap="flat" cmpd="sng">
             <a:solidFill>
               <a:srgbClr val="000000"/>
             </a:solidFill>
             <a:prstDash val="solid"/>
             <a:round/>
-            <a:headEnd len="sm" w="sm" type="none"/>
-            <a:tailEnd len="sm" w="sm" type="none"/>
+            <a:headEnd type="none" w="sm" len="sm"/>
+            <a:tailEnd type="none" w="sm" len="sm"/>
           </a:ln>
         </p:spPr>
       </p:sp>
       <p:sp>
         <p:nvSpPr>
           <p:cNvPr id="86" name="Google Shape;86;p2:notes"/>
-          <p:cNvSpPr txBox="1"/>
+          <p:cNvSpPr txBox="1">
+            <a:spLocks noGrp="1"/>
+          </p:cNvSpPr>
           <p:nvPr>
-            <p:ph idx="1" type="body"/>
+            <p:ph type="body" idx="1"/>
           </p:nvPr>
         </p:nvSpPr>
         <p:spPr>
@@ -1257,12 +1328,12 @@
           </a:ln>
         </p:spPr>
         <p:txBody>
-          <a:bodyPr anchorCtr="0" anchor="t" bIns="91425" lIns="91425" spcFirstLastPara="1" rIns="91425" wrap="square" tIns="91425">
+          <a:bodyPr spcFirstLastPara="1" wrap="square" lIns="91425" tIns="91425" rIns="91425" bIns="91425" anchor="t" anchorCtr="0">
             <a:noAutofit/>
           </a:bodyPr>
           <a:lstStyle/>
           <a:p>
-            <a:pPr indent="0" lvl="0" marL="0" rtl="0" algn="l">
+            <a:pPr marL="0" lvl="0" indent="0" algn="l" rtl="0">
               <a:lnSpc>
                 <a:spcPct val="100000"/>
               </a:lnSpc>
@@ -1275,9 +1346,6 @@
               <a:buSzPts val="1100"/>
               <a:buNone/>
             </a:pPr>
-            <a:r>
-              <a:t/>
-            </a:r>
             <a:endParaRPr/>
           </a:p>
         </p:txBody>
@@ -1291,11 +1359,11 @@
 </file>
 
 <file path=ppt/notesSlides/notesSlide3.xml><?xml version="1.0" encoding="utf-8"?>
-<p:notes xmlns:a="http://schemas.openxmlformats.org/drawingml/2006/main" xmlns:r="http://schemas.openxmlformats.org/officeDocument/2006/relationships" xmlns:mc="http://schemas.openxmlformats.org/markup-compatibility/2006" xmlns:mv="urn:schemas-microsoft-com:mac:vml" xmlns:p="http://schemas.openxmlformats.org/presentationml/2006/main" xmlns:c="http://schemas.openxmlformats.org/drawingml/2006/chart" xmlns:dgm="http://schemas.openxmlformats.org/drawingml/2006/diagram" xmlns:o="urn:schemas-microsoft-com:office:office" xmlns:v="urn:schemas-microsoft-com:vml" xmlns:pvml="urn:schemas-microsoft-com:office:powerpoint" xmlns:com="http://schemas.openxmlformats.org/drawingml/2006/compatibility" xmlns:p14="http://schemas.microsoft.com/office/powerpoint/2010/main" xmlns:p15="http://schemas.microsoft.com/office/powerpoint/2012/main" xmlns:ahyp="http://schemas.microsoft.com/office/drawing/2018/hyperlinkcolor" showMasterPhAnim="0" showMasterSp="0">
+<p:notes xmlns:a="http://schemas.openxmlformats.org/drawingml/2006/main" xmlns:r="http://schemas.openxmlformats.org/officeDocument/2006/relationships" xmlns:p="http://schemas.openxmlformats.org/presentationml/2006/main" showMasterSp="0" showMasterPhAnim="0">
   <p:cSld>
     <p:spTree>
       <p:nvGrpSpPr>
-        <p:cNvPr id="90" name="Shape 90"/>
+        <p:cNvPr id="1" name="Shape 90"/>
         <p:cNvGrpSpPr/>
         <p:nvPr/>
       </p:nvGrpSpPr>
@@ -1310,9 +1378,11 @@
       <p:sp>
         <p:nvSpPr>
           <p:cNvPr id="91" name="Google Shape;91;p3:notes"/>
-          <p:cNvSpPr txBox="1"/>
+          <p:cNvSpPr txBox="1">
+            <a:spLocks noGrp="1"/>
+          </p:cNvSpPr>
           <p:nvPr>
-            <p:ph idx="1" type="body"/>
+            <p:ph type="body" idx="1"/>
           </p:nvPr>
         </p:nvSpPr>
         <p:spPr>
@@ -1325,12 +1395,12 @@
           </a:prstGeom>
         </p:spPr>
         <p:txBody>
-          <a:bodyPr anchorCtr="0" anchor="t" bIns="91425" lIns="91425" spcFirstLastPara="1" rIns="91425" wrap="square" tIns="91425">
+          <a:bodyPr spcFirstLastPara="1" wrap="square" lIns="91425" tIns="91425" rIns="91425" bIns="91425" anchor="t" anchorCtr="0">
             <a:noAutofit/>
           </a:bodyPr>
           <a:lstStyle/>
           <a:p>
-            <a:pPr indent="0" lvl="0" marL="0" rtl="0" algn="l">
+            <a:pPr marL="0" lvl="0" indent="0" algn="l" rtl="0">
               <a:spcBef>
                 <a:spcPts val="0"/>
               </a:spcBef>
@@ -1339,9 +1409,6 @@
               </a:spcAft>
               <a:buNone/>
             </a:pPr>
-            <a:r>
-              <a:t/>
-            </a:r>
             <a:endParaRPr/>
           </a:p>
         </p:txBody>
@@ -1349,9 +1416,11 @@
       <p:sp>
         <p:nvSpPr>
           <p:cNvPr id="92" name="Google Shape;92;p3:notes"/>
-          <p:cNvSpPr/>
+          <p:cNvSpPr>
+            <a:spLocks noGrp="1" noRot="1" noChangeAspect="1"/>
+          </p:cNvSpPr>
           <p:nvPr>
-            <p:ph idx="2" type="sldImg"/>
+            <p:ph type="sldImg" idx="2"/>
           </p:nvPr>
         </p:nvSpPr>
         <p:spPr>
@@ -1360,9 +1429,13 @@
             <a:ext cx="6096075" cy="3429000"/>
           </a:xfrm>
           <a:custGeom>
-            <a:rect b="b" l="l" r="r" t="t"/>
+            <a:avLst/>
+            <a:gdLst/>
+            <a:ahLst/>
+            <a:cxnLst/>
+            <a:rect l="l" t="t" r="r" b="b"/>
             <a:pathLst>
-              <a:path extrusionOk="0" h="120000" w="120000">
+              <a:path w="120000" h="120000" extrusionOk="0">
                 <a:moveTo>
                   <a:pt x="0" y="0"/>
                 </a:moveTo>
@@ -1390,11 +1463,11 @@
 </file>
 
 <file path=ppt/notesSlides/notesSlide4.xml><?xml version="1.0" encoding="utf-8"?>
-<p:notes xmlns:a="http://schemas.openxmlformats.org/drawingml/2006/main" xmlns:r="http://schemas.openxmlformats.org/officeDocument/2006/relationships" xmlns:mc="http://schemas.openxmlformats.org/markup-compatibility/2006" xmlns:mv="urn:schemas-microsoft-com:mac:vml" xmlns:p="http://schemas.openxmlformats.org/presentationml/2006/main" xmlns:c="http://schemas.openxmlformats.org/drawingml/2006/chart" xmlns:dgm="http://schemas.openxmlformats.org/drawingml/2006/diagram" xmlns:o="urn:schemas-microsoft-com:office:office" xmlns:v="urn:schemas-microsoft-com:vml" xmlns:pvml="urn:schemas-microsoft-com:office:powerpoint" xmlns:com="http://schemas.openxmlformats.org/drawingml/2006/compatibility" xmlns:p14="http://schemas.microsoft.com/office/powerpoint/2010/main" xmlns:p15="http://schemas.microsoft.com/office/powerpoint/2012/main" xmlns:ahyp="http://schemas.microsoft.com/office/drawing/2018/hyperlinkcolor" showMasterPhAnim="0" showMasterSp="0">
+<p:notes xmlns:a="http://schemas.openxmlformats.org/drawingml/2006/main" xmlns:r="http://schemas.openxmlformats.org/officeDocument/2006/relationships" xmlns:p="http://schemas.openxmlformats.org/presentationml/2006/main" showMasterSp="0" showMasterPhAnim="0">
   <p:cSld>
     <p:spTree>
       <p:nvGrpSpPr>
-        <p:cNvPr id="96" name="Shape 96"/>
+        <p:cNvPr id="1" name="Shape 96"/>
         <p:cNvGrpSpPr/>
         <p:nvPr/>
       </p:nvGrpSpPr>
@@ -1409,9 +1482,11 @@
       <p:sp>
         <p:nvSpPr>
           <p:cNvPr id="97" name="Google Shape;97;p4:notes"/>
-          <p:cNvSpPr/>
+          <p:cNvSpPr>
+            <a:spLocks noGrp="1" noRot="1" noChangeAspect="1"/>
+          </p:cNvSpPr>
           <p:nvPr>
-            <p:ph idx="2" type="sldImg"/>
+            <p:ph type="sldImg" idx="2"/>
           </p:nvPr>
         </p:nvSpPr>
         <p:spPr>
@@ -1420,9 +1495,13 @@
             <a:ext cx="6096000" cy="3429000"/>
           </a:xfrm>
           <a:custGeom>
-            <a:rect b="b" l="l" r="r" t="t"/>
+            <a:avLst/>
+            <a:gdLst/>
+            <a:ahLst/>
+            <a:cxnLst/>
+            <a:rect l="l" t="t" r="r" b="b"/>
             <a:pathLst>
-              <a:path extrusionOk="0" h="120000" w="120000">
+              <a:path w="120000" h="120000" extrusionOk="0">
                 <a:moveTo>
                   <a:pt x="0" y="0"/>
                 </a:moveTo>
@@ -1440,23 +1519,25 @@
             </a:pathLst>
           </a:custGeom>
           <a:noFill/>
-          <a:ln cap="flat" cmpd="sng" w="9525">
+          <a:ln w="9525" cap="flat" cmpd="sng">
             <a:solidFill>
               <a:srgbClr val="000000"/>
             </a:solidFill>
             <a:prstDash val="solid"/>
             <a:round/>
-            <a:headEnd len="sm" w="sm" type="none"/>
-            <a:tailEnd len="sm" w="sm" type="none"/>
+            <a:headEnd type="none" w="sm" len="sm"/>
+            <a:tailEnd type="none" w="sm" len="sm"/>
           </a:ln>
         </p:spPr>
       </p:sp>
       <p:sp>
         <p:nvSpPr>
           <p:cNvPr id="98" name="Google Shape;98;p4:notes"/>
-          <p:cNvSpPr txBox="1"/>
+          <p:cNvSpPr txBox="1">
+            <a:spLocks noGrp="1"/>
+          </p:cNvSpPr>
           <p:nvPr>
-            <p:ph idx="1" type="body"/>
+            <p:ph type="body" idx="1"/>
           </p:nvPr>
         </p:nvSpPr>
         <p:spPr>
@@ -1473,12 +1554,12 @@
           </a:ln>
         </p:spPr>
         <p:txBody>
-          <a:bodyPr anchorCtr="0" anchor="t" bIns="91425" lIns="91425" spcFirstLastPara="1" rIns="91425" wrap="square" tIns="91425">
+          <a:bodyPr spcFirstLastPara="1" wrap="square" lIns="91425" tIns="91425" rIns="91425" bIns="91425" anchor="t" anchorCtr="0">
             <a:noAutofit/>
           </a:bodyPr>
           <a:lstStyle/>
           <a:p>
-            <a:pPr indent="0" lvl="0" marL="0" rtl="0" algn="l">
+            <a:pPr marL="0" lvl="0" indent="0" algn="l" rtl="0">
               <a:lnSpc>
                 <a:spcPct val="100000"/>
               </a:lnSpc>
@@ -1491,9 +1572,6 @@
               <a:buSzPts val="1100"/>
               <a:buNone/>
             </a:pPr>
-            <a:r>
-              <a:t/>
-            </a:r>
             <a:endParaRPr/>
           </a:p>
         </p:txBody>
@@ -1507,11 +1585,11 @@
 </file>
 
 <file path=ppt/notesSlides/notesSlide5.xml><?xml version="1.0" encoding="utf-8"?>
-<p:notes xmlns:a="http://schemas.openxmlformats.org/drawingml/2006/main" xmlns:r="http://schemas.openxmlformats.org/officeDocument/2006/relationships" xmlns:mc="http://schemas.openxmlformats.org/markup-compatibility/2006" xmlns:mv="urn:schemas-microsoft-com:mac:vml" xmlns:p="http://schemas.openxmlformats.org/presentationml/2006/main" xmlns:c="http://schemas.openxmlformats.org/drawingml/2006/chart" xmlns:dgm="http://schemas.openxmlformats.org/drawingml/2006/diagram" xmlns:o="urn:schemas-microsoft-com:office:office" xmlns:v="urn:schemas-microsoft-com:vml" xmlns:pvml="urn:schemas-microsoft-com:office:powerpoint" xmlns:com="http://schemas.openxmlformats.org/drawingml/2006/compatibility" xmlns:p14="http://schemas.microsoft.com/office/powerpoint/2010/main" xmlns:p15="http://schemas.microsoft.com/office/powerpoint/2012/main" xmlns:ahyp="http://schemas.microsoft.com/office/drawing/2018/hyperlinkcolor" showMasterPhAnim="0" showMasterSp="0">
+<p:notes xmlns:a="http://schemas.openxmlformats.org/drawingml/2006/main" xmlns:r="http://schemas.openxmlformats.org/officeDocument/2006/relationships" xmlns:p="http://schemas.openxmlformats.org/presentationml/2006/main" showMasterSp="0" showMasterPhAnim="0">
   <p:cSld>
     <p:spTree>
       <p:nvGrpSpPr>
-        <p:cNvPr id="106" name="Shape 106"/>
+        <p:cNvPr id="1" name="Shape 106"/>
         <p:cNvGrpSpPr/>
         <p:nvPr/>
       </p:nvGrpSpPr>
@@ -1526,9 +1604,11 @@
       <p:sp>
         <p:nvSpPr>
           <p:cNvPr id="107" name="Google Shape;107;p5:notes"/>
-          <p:cNvSpPr/>
+          <p:cNvSpPr>
+            <a:spLocks noGrp="1" noRot="1" noChangeAspect="1"/>
+          </p:cNvSpPr>
           <p:nvPr>
-            <p:ph idx="2" type="sldImg"/>
+            <p:ph type="sldImg" idx="2"/>
           </p:nvPr>
         </p:nvSpPr>
         <p:spPr>
@@ -1537,9 +1617,13 @@
             <a:ext cx="6096000" cy="3429000"/>
           </a:xfrm>
           <a:custGeom>
-            <a:rect b="b" l="l" r="r" t="t"/>
+            <a:avLst/>
+            <a:gdLst/>
+            <a:ahLst/>
+            <a:cxnLst/>
+            <a:rect l="l" t="t" r="r" b="b"/>
             <a:pathLst>
-              <a:path extrusionOk="0" h="120000" w="120000">
+              <a:path w="120000" h="120000" extrusionOk="0">
                 <a:moveTo>
                   <a:pt x="0" y="0"/>
                 </a:moveTo>
@@ -1557,23 +1641,25 @@
             </a:pathLst>
           </a:custGeom>
           <a:noFill/>
-          <a:ln cap="flat" cmpd="sng" w="9525">
+          <a:ln w="9525" cap="flat" cmpd="sng">
             <a:solidFill>
               <a:srgbClr val="000000"/>
             </a:solidFill>
             <a:prstDash val="solid"/>
             <a:round/>
-            <a:headEnd len="sm" w="sm" type="none"/>
-            <a:tailEnd len="sm" w="sm" type="none"/>
+            <a:headEnd type="none" w="sm" len="sm"/>
+            <a:tailEnd type="none" w="sm" len="sm"/>
           </a:ln>
         </p:spPr>
       </p:sp>
       <p:sp>
         <p:nvSpPr>
           <p:cNvPr id="108" name="Google Shape;108;p5:notes"/>
-          <p:cNvSpPr txBox="1"/>
+          <p:cNvSpPr txBox="1">
+            <a:spLocks noGrp="1"/>
+          </p:cNvSpPr>
           <p:nvPr>
-            <p:ph idx="1" type="body"/>
+            <p:ph type="body" idx="1"/>
           </p:nvPr>
         </p:nvSpPr>
         <p:spPr>
@@ -1590,12 +1676,12 @@
           </a:ln>
         </p:spPr>
         <p:txBody>
-          <a:bodyPr anchorCtr="0" anchor="t" bIns="91425" lIns="91425" spcFirstLastPara="1" rIns="91425" wrap="square" tIns="91425">
+          <a:bodyPr spcFirstLastPara="1" wrap="square" lIns="91425" tIns="91425" rIns="91425" bIns="91425" anchor="t" anchorCtr="0">
             <a:noAutofit/>
           </a:bodyPr>
           <a:lstStyle/>
           <a:p>
-            <a:pPr indent="0" lvl="0" marL="0" rtl="0" algn="l">
+            <a:pPr marL="0" lvl="0" indent="0" algn="l" rtl="0">
               <a:lnSpc>
                 <a:spcPct val="100000"/>
               </a:lnSpc>
@@ -1608,9 +1694,6 @@
               <a:buSzPts val="1100"/>
               <a:buNone/>
             </a:pPr>
-            <a:r>
-              <a:t/>
-            </a:r>
             <a:endParaRPr/>
           </a:p>
         </p:txBody>
@@ -1624,11 +1707,11 @@
 </file>
 
 <file path=ppt/notesSlides/notesSlide6.xml><?xml version="1.0" encoding="utf-8"?>
-<p:notes xmlns:a="http://schemas.openxmlformats.org/drawingml/2006/main" xmlns:r="http://schemas.openxmlformats.org/officeDocument/2006/relationships" xmlns:mc="http://schemas.openxmlformats.org/markup-compatibility/2006" xmlns:mv="urn:schemas-microsoft-com:mac:vml" xmlns:p="http://schemas.openxmlformats.org/presentationml/2006/main" xmlns:c="http://schemas.openxmlformats.org/drawingml/2006/chart" xmlns:dgm="http://schemas.openxmlformats.org/drawingml/2006/diagram" xmlns:o="urn:schemas-microsoft-com:office:office" xmlns:v="urn:schemas-microsoft-com:vml" xmlns:pvml="urn:schemas-microsoft-com:office:powerpoint" xmlns:com="http://schemas.openxmlformats.org/drawingml/2006/compatibility" xmlns:p14="http://schemas.microsoft.com/office/powerpoint/2010/main" xmlns:p15="http://schemas.microsoft.com/office/powerpoint/2012/main" xmlns:ahyp="http://schemas.microsoft.com/office/drawing/2018/hyperlinkcolor" showMasterPhAnim="0" showMasterSp="0">
+<p:notes xmlns:a="http://schemas.openxmlformats.org/drawingml/2006/main" xmlns:r="http://schemas.openxmlformats.org/officeDocument/2006/relationships" xmlns:p="http://schemas.openxmlformats.org/presentationml/2006/main" showMasterSp="0" showMasterPhAnim="0">
   <p:cSld>
     <p:spTree>
       <p:nvGrpSpPr>
-        <p:cNvPr id="116" name="Shape 116"/>
+        <p:cNvPr id="1" name="Shape 116"/>
         <p:cNvGrpSpPr/>
         <p:nvPr/>
       </p:nvGrpSpPr>
@@ -1643,9 +1726,11 @@
       <p:sp>
         <p:nvSpPr>
           <p:cNvPr id="117" name="Google Shape;117;p6:notes"/>
-          <p:cNvSpPr/>
+          <p:cNvSpPr>
+            <a:spLocks noGrp="1" noRot="1" noChangeAspect="1"/>
+          </p:cNvSpPr>
           <p:nvPr>
-            <p:ph idx="2" type="sldImg"/>
+            <p:ph type="sldImg" idx="2"/>
           </p:nvPr>
         </p:nvSpPr>
         <p:spPr>
@@ -1654,9 +1739,13 @@
             <a:ext cx="6096000" cy="3429000"/>
           </a:xfrm>
           <a:custGeom>
-            <a:rect b="b" l="l" r="r" t="t"/>
+            <a:avLst/>
+            <a:gdLst/>
+            <a:ahLst/>
+            <a:cxnLst/>
+            <a:rect l="l" t="t" r="r" b="b"/>
             <a:pathLst>
-              <a:path extrusionOk="0" h="120000" w="120000">
+              <a:path w="120000" h="120000" extrusionOk="0">
                 <a:moveTo>
                   <a:pt x="0" y="0"/>
                 </a:moveTo>
@@ -1674,23 +1763,25 @@
             </a:pathLst>
           </a:custGeom>
           <a:noFill/>
-          <a:ln cap="flat" cmpd="sng" w="9525">
+          <a:ln w="9525" cap="flat" cmpd="sng">
             <a:solidFill>
               <a:srgbClr val="000000"/>
             </a:solidFill>
             <a:prstDash val="solid"/>
             <a:round/>
-            <a:headEnd len="sm" w="sm" type="none"/>
-            <a:tailEnd len="sm" w="sm" type="none"/>
+            <a:headEnd type="none" w="sm" len="sm"/>
+            <a:tailEnd type="none" w="sm" len="sm"/>
           </a:ln>
         </p:spPr>
       </p:sp>
       <p:sp>
         <p:nvSpPr>
           <p:cNvPr id="118" name="Google Shape;118;p6:notes"/>
-          <p:cNvSpPr txBox="1"/>
+          <p:cNvSpPr txBox="1">
+            <a:spLocks noGrp="1"/>
+          </p:cNvSpPr>
           <p:nvPr>
-            <p:ph idx="1" type="body"/>
+            <p:ph type="body" idx="1"/>
           </p:nvPr>
         </p:nvSpPr>
         <p:spPr>
@@ -1707,12 +1798,12 @@
           </a:ln>
         </p:spPr>
         <p:txBody>
-          <a:bodyPr anchorCtr="0" anchor="t" bIns="91425" lIns="91425" spcFirstLastPara="1" rIns="91425" wrap="square" tIns="91425">
+          <a:bodyPr spcFirstLastPara="1" wrap="square" lIns="91425" tIns="91425" rIns="91425" bIns="91425" anchor="t" anchorCtr="0">
             <a:noAutofit/>
           </a:bodyPr>
           <a:lstStyle/>
           <a:p>
-            <a:pPr indent="0" lvl="0" marL="0" rtl="0" algn="l">
+            <a:pPr marL="0" lvl="0" indent="0" algn="l" rtl="0">
               <a:lnSpc>
                 <a:spcPct val="100000"/>
               </a:lnSpc>
@@ -1725,9 +1816,6 @@
               <a:buSzPts val="1100"/>
               <a:buNone/>
             </a:pPr>
-            <a:r>
-              <a:t/>
-            </a:r>
             <a:endParaRPr/>
           </a:p>
         </p:txBody>
@@ -1741,11 +1829,11 @@
 </file>
 
 <file path=ppt/notesSlides/notesSlide7.xml><?xml version="1.0" encoding="utf-8"?>
-<p:notes xmlns:a="http://schemas.openxmlformats.org/drawingml/2006/main" xmlns:r="http://schemas.openxmlformats.org/officeDocument/2006/relationships" xmlns:mc="http://schemas.openxmlformats.org/markup-compatibility/2006" xmlns:mv="urn:schemas-microsoft-com:mac:vml" xmlns:p="http://schemas.openxmlformats.org/presentationml/2006/main" xmlns:c="http://schemas.openxmlformats.org/drawingml/2006/chart" xmlns:dgm="http://schemas.openxmlformats.org/drawingml/2006/diagram" xmlns:o="urn:schemas-microsoft-com:office:office" xmlns:v="urn:schemas-microsoft-com:vml" xmlns:pvml="urn:schemas-microsoft-com:office:powerpoint" xmlns:com="http://schemas.openxmlformats.org/drawingml/2006/compatibility" xmlns:p14="http://schemas.microsoft.com/office/powerpoint/2010/main" xmlns:p15="http://schemas.microsoft.com/office/powerpoint/2012/main" xmlns:ahyp="http://schemas.microsoft.com/office/drawing/2018/hyperlinkcolor" showMasterPhAnim="0" showMasterSp="0">
+<p:notes xmlns:a="http://schemas.openxmlformats.org/drawingml/2006/main" xmlns:r="http://schemas.openxmlformats.org/officeDocument/2006/relationships" xmlns:p="http://schemas.openxmlformats.org/presentationml/2006/main" showMasterSp="0" showMasterPhAnim="0">
   <p:cSld>
     <p:spTree>
       <p:nvGrpSpPr>
-        <p:cNvPr id="126" name="Shape 126"/>
+        <p:cNvPr id="1" name="Shape 126"/>
         <p:cNvGrpSpPr/>
         <p:nvPr/>
       </p:nvGrpSpPr>
@@ -1760,9 +1848,11 @@
       <p:sp>
         <p:nvSpPr>
           <p:cNvPr id="127" name="Google Shape;127;p7:notes"/>
-          <p:cNvSpPr txBox="1"/>
+          <p:cNvSpPr txBox="1">
+            <a:spLocks noGrp="1"/>
+          </p:cNvSpPr>
           <p:nvPr>
-            <p:ph idx="1" type="body"/>
+            <p:ph type="body" idx="1"/>
           </p:nvPr>
         </p:nvSpPr>
         <p:spPr>
@@ -1775,12 +1865,12 @@
           </a:prstGeom>
         </p:spPr>
         <p:txBody>
-          <a:bodyPr anchorCtr="0" anchor="t" bIns="91425" lIns="91425" spcFirstLastPara="1" rIns="91425" wrap="square" tIns="91425">
+          <a:bodyPr spcFirstLastPara="1" wrap="square" lIns="91425" tIns="91425" rIns="91425" bIns="91425" anchor="t" anchorCtr="0">
             <a:noAutofit/>
           </a:bodyPr>
           <a:lstStyle/>
           <a:p>
-            <a:pPr indent="0" lvl="0" marL="0" rtl="0" algn="l">
+            <a:pPr marL="0" lvl="0" indent="0" algn="l" rtl="0">
               <a:spcBef>
                 <a:spcPts val="0"/>
               </a:spcBef>
@@ -1789,9 +1879,6 @@
               </a:spcAft>
               <a:buNone/>
             </a:pPr>
-            <a:r>
-              <a:t/>
-            </a:r>
             <a:endParaRPr/>
           </a:p>
         </p:txBody>
@@ -1799,9 +1886,11 @@
       <p:sp>
         <p:nvSpPr>
           <p:cNvPr id="128" name="Google Shape;128;p7:notes"/>
-          <p:cNvSpPr/>
+          <p:cNvSpPr>
+            <a:spLocks noGrp="1" noRot="1" noChangeAspect="1"/>
+          </p:cNvSpPr>
           <p:nvPr>
-            <p:ph idx="2" type="sldImg"/>
+            <p:ph type="sldImg" idx="2"/>
           </p:nvPr>
         </p:nvSpPr>
         <p:spPr>
@@ -1810,9 +1899,13 @@
             <a:ext cx="6096075" cy="3429000"/>
           </a:xfrm>
           <a:custGeom>
-            <a:rect b="b" l="l" r="r" t="t"/>
+            <a:avLst/>
+            <a:gdLst/>
+            <a:ahLst/>
+            <a:cxnLst/>
+            <a:rect l="l" t="t" r="r" b="b"/>
             <a:pathLst>
-              <a:path extrusionOk="0" h="120000" w="120000">
+              <a:path w="120000" h="120000" extrusionOk="0">
                 <a:moveTo>
                   <a:pt x="0" y="0"/>
                 </a:moveTo>
@@ -1840,11 +1933,11 @@
 </file>
 
 <file path=ppt/notesSlides/notesSlide8.xml><?xml version="1.0" encoding="utf-8"?>
-<p:notes xmlns:a="http://schemas.openxmlformats.org/drawingml/2006/main" xmlns:r="http://schemas.openxmlformats.org/officeDocument/2006/relationships" xmlns:mc="http://schemas.openxmlformats.org/markup-compatibility/2006" xmlns:mv="urn:schemas-microsoft-com:mac:vml" xmlns:p="http://schemas.openxmlformats.org/presentationml/2006/main" xmlns:c="http://schemas.openxmlformats.org/drawingml/2006/chart" xmlns:dgm="http://schemas.openxmlformats.org/drawingml/2006/diagram" xmlns:o="urn:schemas-microsoft-com:office:office" xmlns:v="urn:schemas-microsoft-com:vml" xmlns:pvml="urn:schemas-microsoft-com:office:powerpoint" xmlns:com="http://schemas.openxmlformats.org/drawingml/2006/compatibility" xmlns:p14="http://schemas.microsoft.com/office/powerpoint/2010/main" xmlns:p15="http://schemas.microsoft.com/office/powerpoint/2012/main" xmlns:ahyp="http://schemas.microsoft.com/office/drawing/2018/hyperlinkcolor" showMasterPhAnim="0" showMasterSp="0">
+<p:notes xmlns:a="http://schemas.openxmlformats.org/drawingml/2006/main" xmlns:r="http://schemas.openxmlformats.org/officeDocument/2006/relationships" xmlns:p="http://schemas.openxmlformats.org/presentationml/2006/main" showMasterSp="0" showMasterPhAnim="0">
   <p:cSld>
     <p:spTree>
       <p:nvGrpSpPr>
-        <p:cNvPr id="132" name="Shape 132"/>
+        <p:cNvPr id="1" name="Shape 132"/>
         <p:cNvGrpSpPr/>
         <p:nvPr/>
       </p:nvGrpSpPr>
@@ -1859,9 +1952,11 @@
       <p:sp>
         <p:nvSpPr>
           <p:cNvPr id="133" name="Google Shape;133;p8:notes"/>
-          <p:cNvSpPr txBox="1"/>
+          <p:cNvSpPr txBox="1">
+            <a:spLocks noGrp="1"/>
+          </p:cNvSpPr>
           <p:nvPr>
-            <p:ph idx="1" type="body"/>
+            <p:ph type="body" idx="1"/>
           </p:nvPr>
         </p:nvSpPr>
         <p:spPr>
@@ -1874,12 +1969,12 @@
           </a:prstGeom>
         </p:spPr>
         <p:txBody>
-          <a:bodyPr anchorCtr="0" anchor="t" bIns="91425" lIns="91425" spcFirstLastPara="1" rIns="91425" wrap="square" tIns="91425">
+          <a:bodyPr spcFirstLastPara="1" wrap="square" lIns="91425" tIns="91425" rIns="91425" bIns="91425" anchor="t" anchorCtr="0">
             <a:noAutofit/>
           </a:bodyPr>
           <a:lstStyle/>
           <a:p>
-            <a:pPr indent="0" lvl="0" marL="0" rtl="0" algn="l">
+            <a:pPr marL="0" lvl="0" indent="0" algn="l" rtl="0">
               <a:spcBef>
                 <a:spcPts val="0"/>
               </a:spcBef>
@@ -1888,9 +1983,6 @@
               </a:spcAft>
               <a:buNone/>
             </a:pPr>
-            <a:r>
-              <a:t/>
-            </a:r>
             <a:endParaRPr/>
           </a:p>
         </p:txBody>
@@ -1898,9 +1990,11 @@
       <p:sp>
         <p:nvSpPr>
           <p:cNvPr id="134" name="Google Shape;134;p8:notes"/>
-          <p:cNvSpPr/>
+          <p:cNvSpPr>
+            <a:spLocks noGrp="1" noRot="1" noChangeAspect="1"/>
+          </p:cNvSpPr>
           <p:nvPr>
-            <p:ph idx="2" type="sldImg"/>
+            <p:ph type="sldImg" idx="2"/>
           </p:nvPr>
         </p:nvSpPr>
         <p:spPr>
@@ -1909,9 +2003,13 @@
             <a:ext cx="6096075" cy="3429000"/>
           </a:xfrm>
           <a:custGeom>
-            <a:rect b="b" l="l" r="r" t="t"/>
+            <a:avLst/>
+            <a:gdLst/>
+            <a:ahLst/>
+            <a:cxnLst/>
+            <a:rect l="l" t="t" r="r" b="b"/>
             <a:pathLst>
-              <a:path extrusionOk="0" h="120000" w="120000">
+              <a:path w="120000" h="120000" extrusionOk="0">
                 <a:moveTo>
                   <a:pt x="0" y="0"/>
                 </a:moveTo>
@@ -1939,11 +2037,11 @@
 </file>
 
 <file path=ppt/notesSlides/notesSlide9.xml><?xml version="1.0" encoding="utf-8"?>
-<p:notes xmlns:a="http://schemas.openxmlformats.org/drawingml/2006/main" xmlns:r="http://schemas.openxmlformats.org/officeDocument/2006/relationships" xmlns:mc="http://schemas.openxmlformats.org/markup-compatibility/2006" xmlns:mv="urn:schemas-microsoft-com:mac:vml" xmlns:p="http://schemas.openxmlformats.org/presentationml/2006/main" xmlns:c="http://schemas.openxmlformats.org/drawingml/2006/chart" xmlns:dgm="http://schemas.openxmlformats.org/drawingml/2006/diagram" xmlns:o="urn:schemas-microsoft-com:office:office" xmlns:v="urn:schemas-microsoft-com:vml" xmlns:pvml="urn:schemas-microsoft-com:office:powerpoint" xmlns:com="http://schemas.openxmlformats.org/drawingml/2006/compatibility" xmlns:p14="http://schemas.microsoft.com/office/powerpoint/2010/main" xmlns:p15="http://schemas.microsoft.com/office/powerpoint/2012/main" xmlns:ahyp="http://schemas.microsoft.com/office/drawing/2018/hyperlinkcolor" showMasterPhAnim="0" showMasterSp="0">
+<p:notes xmlns:a="http://schemas.openxmlformats.org/drawingml/2006/main" xmlns:r="http://schemas.openxmlformats.org/officeDocument/2006/relationships" xmlns:p="http://schemas.openxmlformats.org/presentationml/2006/main" showMasterSp="0" showMasterPhAnim="0">
   <p:cSld>
     <p:spTree>
       <p:nvGrpSpPr>
-        <p:cNvPr id="138" name="Shape 138"/>
+        <p:cNvPr id="1" name="Shape 138"/>
         <p:cNvGrpSpPr/>
         <p:nvPr/>
       </p:nvGrpSpPr>
@@ -1958,9 +2056,11 @@
       <p:sp>
         <p:nvSpPr>
           <p:cNvPr id="139" name="Google Shape;139;g3ab975baed4_0_0:notes"/>
-          <p:cNvSpPr/>
+          <p:cNvSpPr>
+            <a:spLocks noGrp="1" noRot="1" noChangeAspect="1"/>
+          </p:cNvSpPr>
           <p:nvPr>
-            <p:ph idx="2" type="sldImg"/>
+            <p:ph type="sldImg" idx="2"/>
           </p:nvPr>
         </p:nvSpPr>
         <p:spPr>
@@ -1969,9 +2069,13 @@
             <a:ext cx="6096000" cy="3429000"/>
           </a:xfrm>
           <a:custGeom>
-            <a:rect b="b" l="l" r="r" t="t"/>
+            <a:avLst/>
+            <a:gdLst/>
+            <a:ahLst/>
+            <a:cxnLst/>
+            <a:rect l="l" t="t" r="r" b="b"/>
             <a:pathLst>
-              <a:path extrusionOk="0" h="120000" w="120000">
+              <a:path w="120000" h="120000" extrusionOk="0">
                 <a:moveTo>
                   <a:pt x="0" y="0"/>
                 </a:moveTo>
@@ -1993,9 +2097,11 @@
       <p:sp>
         <p:nvSpPr>
           <p:cNvPr id="140" name="Google Shape;140;g3ab975baed4_0_0:notes"/>
-          <p:cNvSpPr txBox="1"/>
+          <p:cNvSpPr txBox="1">
+            <a:spLocks noGrp="1"/>
+          </p:cNvSpPr>
           <p:nvPr>
-            <p:ph idx="1" type="body"/>
+            <p:ph type="body" idx="1"/>
           </p:nvPr>
         </p:nvSpPr>
         <p:spPr>
@@ -2008,12 +2114,12 @@
           </a:prstGeom>
         </p:spPr>
         <p:txBody>
-          <a:bodyPr anchorCtr="0" anchor="t" bIns="91425" lIns="91425" spcFirstLastPara="1" rIns="91425" wrap="square" tIns="91425">
+          <a:bodyPr spcFirstLastPara="1" wrap="square" lIns="91425" tIns="91425" rIns="91425" bIns="91425" anchor="t" anchorCtr="0">
             <a:noAutofit/>
           </a:bodyPr>
           <a:lstStyle/>
           <a:p>
-            <a:pPr indent="0" lvl="0" marL="0" rtl="0" algn="l">
+            <a:pPr marL="0" lvl="0" indent="0" algn="l" rtl="0">
               <a:spcBef>
                 <a:spcPts val="0"/>
               </a:spcBef>
@@ -2022,9 +2128,6 @@
               </a:spcAft>
               <a:buNone/>
             </a:pPr>
-            <a:r>
-              <a:t/>
-            </a:r>
             <a:endParaRPr/>
           </a:p>
         </p:txBody>
@@ -2038,11 +2141,11 @@
 </file>
 
 <file path=ppt/slideLayouts/slideLayout1.xml><?xml version="1.0" encoding="utf-8"?>
-<p:sldLayout xmlns:a="http://schemas.openxmlformats.org/drawingml/2006/main" xmlns:r="http://schemas.openxmlformats.org/officeDocument/2006/relationships" xmlns:mc="http://schemas.openxmlformats.org/markup-compatibility/2006" xmlns:mv="urn:schemas-microsoft-com:mac:vml" xmlns:p="http://schemas.openxmlformats.org/presentationml/2006/main" xmlns:c="http://schemas.openxmlformats.org/drawingml/2006/chart" xmlns:dgm="http://schemas.openxmlformats.org/drawingml/2006/diagram" xmlns:o="urn:schemas-microsoft-com:office:office" xmlns:v="urn:schemas-microsoft-com:vml" xmlns:pvml="urn:schemas-microsoft-com:office:powerpoint" xmlns:com="http://schemas.openxmlformats.org/drawingml/2006/compatibility" xmlns:p14="http://schemas.microsoft.com/office/powerpoint/2010/main" xmlns:p15="http://schemas.microsoft.com/office/powerpoint/2012/main" xmlns:ahyp="http://schemas.microsoft.com/office/drawing/2018/hyperlinkcolor" matchingName="Title slide" type="title">
+<p:sldLayout xmlns:a="http://schemas.openxmlformats.org/drawingml/2006/main" xmlns:r="http://schemas.openxmlformats.org/officeDocument/2006/relationships" xmlns:p="http://schemas.openxmlformats.org/presentationml/2006/main" matchingName="Title slide" type="title">
   <p:cSld name="TITLE">
     <p:spTree>
       <p:nvGrpSpPr>
-        <p:cNvPr id="8" name="Shape 8"/>
+        <p:cNvPr id="1" name="Shape 8"/>
         <p:cNvGrpSpPr/>
         <p:nvPr/>
       </p:nvGrpSpPr>
@@ -2078,7 +2181,7 @@
             <a:blip r:embed="rId2">
               <a:alphaModFix/>
             </a:blip>
-            <a:srcRect b="0" l="0" r="0" t="0"/>
+            <a:srcRect/>
             <a:stretch/>
           </p:blipFill>
           <p:spPr>
@@ -2105,7 +2208,7 @@
             <a:blip r:embed="rId3">
               <a:alphaModFix/>
             </a:blip>
-            <a:srcRect b="0" l="0" r="0" t="0"/>
+            <a:srcRect/>
             <a:stretch/>
           </p:blipFill>
           <p:spPr>
@@ -2126,9 +2229,11 @@
       <p:sp>
         <p:nvSpPr>
           <p:cNvPr id="12" name="Google Shape;12;p12"/>
-          <p:cNvSpPr/>
+          <p:cNvSpPr>
+            <a:spLocks noGrp="1"/>
+          </p:cNvSpPr>
           <p:nvPr>
-            <p:ph idx="2" type="pic"/>
+            <p:ph type="pic" idx="2"/>
           </p:nvPr>
         </p:nvSpPr>
         <p:spPr>
@@ -2140,21 +2245,23 @@
             <a:avLst/>
           </a:prstGeom>
           <a:noFill/>
-          <a:ln cap="flat" cmpd="sng" w="19050">
+          <a:ln w="19050" cap="flat" cmpd="sng">
             <a:solidFill>
               <a:schemeClr val="dk2"/>
             </a:solidFill>
             <a:prstDash val="solid"/>
             <a:round/>
-            <a:headEnd len="sm" w="sm" type="none"/>
-            <a:tailEnd len="sm" w="sm" type="none"/>
+            <a:headEnd type="none" w="sm" len="sm"/>
+            <a:tailEnd type="none" w="sm" len="sm"/>
           </a:ln>
         </p:spPr>
       </p:sp>
       <p:sp>
         <p:nvSpPr>
           <p:cNvPr id="13" name="Google Shape;13;p12"/>
-          <p:cNvSpPr txBox="1"/>
+          <p:cNvSpPr txBox="1">
+            <a:spLocks noGrp="1"/>
+          </p:cNvSpPr>
           <p:nvPr>
             <p:ph type="ctrTitle"/>
           </p:nvPr>
@@ -2173,7 +2280,7 @@
           </a:ln>
         </p:spPr>
         <p:txBody>
-          <a:bodyPr anchorCtr="0" anchor="t" bIns="91425" lIns="91425" spcFirstLastPara="1" rIns="91425" wrap="square" tIns="91425">
+          <a:bodyPr spcFirstLastPara="1" wrap="square" lIns="91425" tIns="91425" rIns="91425" bIns="91425" anchor="t" anchorCtr="0">
             <a:noAutofit/>
           </a:bodyPr>
           <a:lstStyle>
@@ -2363,15 +2470,19 @@
               </a:defRPr>
             </a:lvl9pPr>
           </a:lstStyle>
-          <a:p/>
+          <a:p>
+            <a:endParaRPr/>
+          </a:p>
         </p:txBody>
       </p:sp>
       <p:sp>
         <p:nvSpPr>
           <p:cNvPr id="14" name="Google Shape;14;p12"/>
-          <p:cNvSpPr txBox="1"/>
+          <p:cNvSpPr txBox="1">
+            <a:spLocks noGrp="1"/>
+          </p:cNvSpPr>
           <p:nvPr>
-            <p:ph idx="1" type="subTitle"/>
+            <p:ph type="subTitle" idx="1"/>
           </p:nvPr>
         </p:nvSpPr>
         <p:spPr>
@@ -2388,7 +2499,7 @@
           </a:ln>
         </p:spPr>
         <p:txBody>
-          <a:bodyPr anchorCtr="0" anchor="t" bIns="91425" lIns="91425" spcFirstLastPara="1" rIns="91425" wrap="square" tIns="91425">
+          <a:bodyPr spcFirstLastPara="1" wrap="square" lIns="91425" tIns="91425" rIns="91425" bIns="91425" anchor="t" anchorCtr="0">
             <a:noAutofit/>
           </a:bodyPr>
           <a:lstStyle>
@@ -2519,7 +2630,9 @@
               <a:defRPr sz="1800"/>
             </a:lvl9pPr>
           </a:lstStyle>
-          <a:p/>
+          <a:p>
+            <a:endParaRPr/>
+          </a:p>
         </p:txBody>
       </p:sp>
       <p:pic>
@@ -2532,7 +2645,7 @@
           <a:blip r:embed="rId3">
             <a:alphaModFix/>
           </a:blip>
-          <a:srcRect b="0" l="61982" r="0" t="0"/>
+          <a:srcRect l="61982"/>
           <a:stretch/>
         </p:blipFill>
         <p:spPr>
@@ -2544,14 +2657,14 @@
             <a:avLst/>
           </a:prstGeom>
           <a:noFill/>
-          <a:ln cap="flat" cmpd="sng" w="9525">
+          <a:ln w="9525" cap="flat" cmpd="sng">
             <a:solidFill>
               <a:schemeClr val="dk2"/>
             </a:solidFill>
             <a:prstDash val="solid"/>
             <a:round/>
-            <a:headEnd len="sm" w="sm" type="none"/>
-            <a:tailEnd len="sm" w="sm" type="none"/>
+            <a:headEnd type="none" w="sm" len="sm"/>
+            <a:tailEnd type="none" w="sm" len="sm"/>
           </a:ln>
         </p:spPr>
       </p:pic>
@@ -2564,16 +2677,17 @@
 </file>
 
 <file path=ppt/slideLayouts/slideLayout10.xml><?xml version="1.0" encoding="utf-8"?>
-<p:sldLayout xmlns:a="http://schemas.openxmlformats.org/drawingml/2006/main" xmlns:r="http://schemas.openxmlformats.org/officeDocument/2006/relationships" xmlns:mc="http://schemas.openxmlformats.org/markup-compatibility/2006" xmlns:mv="urn:schemas-microsoft-com:mac:vml" xmlns:p="http://schemas.openxmlformats.org/presentationml/2006/main" xmlns:c="http://schemas.openxmlformats.org/drawingml/2006/chart" xmlns:dgm="http://schemas.openxmlformats.org/drawingml/2006/diagram" xmlns:o="urn:schemas-microsoft-com:office:office" xmlns:v="urn:schemas-microsoft-com:vml" xmlns:pvml="urn:schemas-microsoft-com:office:powerpoint" xmlns:com="http://schemas.openxmlformats.org/drawingml/2006/compatibility" xmlns:p14="http://schemas.microsoft.com/office/powerpoint/2010/main" xmlns:p15="http://schemas.microsoft.com/office/powerpoint/2012/main" xmlns:ahyp="http://schemas.microsoft.com/office/drawing/2018/hyperlinkcolor" matchingName="Blank" type="blank">
+<p:sldLayout xmlns:a="http://schemas.openxmlformats.org/drawingml/2006/main" xmlns:r="http://schemas.openxmlformats.org/officeDocument/2006/relationships" xmlns:p="http://schemas.openxmlformats.org/presentationml/2006/main" matchingName="Blank" type="blank">
   <p:cSld name="BLANK">
     <p:bg>
       <p:bgPr>
         <a:noFill/>
+        <a:effectLst/>
       </p:bgPr>
     </p:bg>
     <p:spTree>
       <p:nvGrpSpPr>
-        <p:cNvPr id="66" name="Shape 66"/>
+        <p:cNvPr id="1" name="Shape 66"/>
         <p:cNvGrpSpPr/>
         <p:nvPr/>
       </p:nvGrpSpPr>
@@ -2594,11 +2708,11 @@
 </file>
 
 <file path=ppt/slideLayouts/slideLayout11.xml><?xml version="1.0" encoding="utf-8"?>
-<p:sldLayout xmlns:a="http://schemas.openxmlformats.org/drawingml/2006/main" xmlns:r="http://schemas.openxmlformats.org/officeDocument/2006/relationships" xmlns:mc="http://schemas.openxmlformats.org/markup-compatibility/2006" xmlns:mv="urn:schemas-microsoft-com:mac:vml" xmlns:p="http://schemas.openxmlformats.org/presentationml/2006/main" xmlns:c="http://schemas.openxmlformats.org/drawingml/2006/chart" xmlns:dgm="http://schemas.openxmlformats.org/drawingml/2006/diagram" xmlns:o="urn:schemas-microsoft-com:office:office" xmlns:v="urn:schemas-microsoft-com:vml" xmlns:pvml="urn:schemas-microsoft-com:office:powerpoint" xmlns:com="http://schemas.openxmlformats.org/drawingml/2006/compatibility" xmlns:p14="http://schemas.microsoft.com/office/powerpoint/2010/main" xmlns:p15="http://schemas.microsoft.com/office/powerpoint/2012/main" xmlns:ahyp="http://schemas.microsoft.com/office/drawing/2018/hyperlinkcolor" matchingName="Title only 2">
+<p:sldLayout xmlns:a="http://schemas.openxmlformats.org/drawingml/2006/main" xmlns:r="http://schemas.openxmlformats.org/officeDocument/2006/relationships" xmlns:p="http://schemas.openxmlformats.org/presentationml/2006/main" matchingName="Title only 2">
   <p:cSld name="TITLE_ONLY_2">
     <p:spTree>
       <p:nvGrpSpPr>
-        <p:cNvPr id="67" name="Shape 67"/>
+        <p:cNvPr id="1" name="Shape 67"/>
         <p:cNvGrpSpPr/>
         <p:nvPr/>
       </p:nvGrpSpPr>
@@ -2634,7 +2748,7 @@
             <a:blip r:embed="rId2">
               <a:alphaModFix/>
             </a:blip>
-            <a:srcRect b="0" l="0" r="0" t="0"/>
+            <a:srcRect/>
             <a:stretch/>
           </p:blipFill>
           <p:spPr>
@@ -2661,7 +2775,7 @@
             <a:blip r:embed="rId3">
               <a:alphaModFix/>
             </a:blip>
-            <a:srcRect b="0" l="0" r="0" t="0"/>
+            <a:srcRect/>
             <a:stretch/>
           </p:blipFill>
           <p:spPr>
@@ -2682,7 +2796,9 @@
       <p:sp>
         <p:nvSpPr>
           <p:cNvPr id="71" name="Google Shape;71;p22"/>
-          <p:cNvSpPr txBox="1"/>
+          <p:cNvSpPr txBox="1">
+            <a:spLocks noGrp="1"/>
+          </p:cNvSpPr>
           <p:nvPr>
             <p:ph type="title"/>
           </p:nvPr>
@@ -2701,7 +2817,7 @@
           </a:ln>
         </p:spPr>
         <p:txBody>
-          <a:bodyPr anchorCtr="0" anchor="t" bIns="91425" lIns="91425" spcFirstLastPara="1" rIns="91425" wrap="square" tIns="91425">
+          <a:bodyPr spcFirstLastPara="1" wrap="square" lIns="91425" tIns="91425" rIns="91425" bIns="91425" anchor="t" anchorCtr="0">
             <a:noAutofit/>
           </a:bodyPr>
           <a:lstStyle>
@@ -2832,7 +2948,9 @@
               <a:defRPr/>
             </a:lvl9pPr>
           </a:lstStyle>
-          <a:p/>
+          <a:p>
+            <a:endParaRPr/>
+          </a:p>
         </p:txBody>
       </p:sp>
     </p:spTree>
@@ -2844,11 +2962,11 @@
 </file>
 
 <file path=ppt/slideLayouts/slideLayout12.xml><?xml version="1.0" encoding="utf-8"?>
-<p:sldLayout xmlns:a="http://schemas.openxmlformats.org/drawingml/2006/main" xmlns:r="http://schemas.openxmlformats.org/officeDocument/2006/relationships" xmlns:mc="http://schemas.openxmlformats.org/markup-compatibility/2006" xmlns:mv="urn:schemas-microsoft-com:mac:vml" xmlns:p="http://schemas.openxmlformats.org/presentationml/2006/main" xmlns:c="http://schemas.openxmlformats.org/drawingml/2006/chart" xmlns:dgm="http://schemas.openxmlformats.org/drawingml/2006/diagram" xmlns:o="urn:schemas-microsoft-com:office:office" xmlns:v="urn:schemas-microsoft-com:vml" xmlns:pvml="urn:schemas-microsoft-com:office:powerpoint" xmlns:com="http://schemas.openxmlformats.org/drawingml/2006/compatibility" xmlns:p14="http://schemas.microsoft.com/office/powerpoint/2010/main" xmlns:p15="http://schemas.microsoft.com/office/powerpoint/2012/main" xmlns:ahyp="http://schemas.microsoft.com/office/drawing/2018/hyperlinkcolor" matchingName="Background">
+<p:sldLayout xmlns:a="http://schemas.openxmlformats.org/drawingml/2006/main" xmlns:r="http://schemas.openxmlformats.org/officeDocument/2006/relationships" xmlns:p="http://schemas.openxmlformats.org/presentationml/2006/main" matchingName="Background">
   <p:cSld name="BLANK_1_1_1_1_1_1_1">
     <p:spTree>
       <p:nvGrpSpPr>
-        <p:cNvPr id="72" name="Shape 72"/>
+        <p:cNvPr id="1" name="Shape 72"/>
         <p:cNvGrpSpPr/>
         <p:nvPr/>
       </p:nvGrpSpPr>
@@ -2884,7 +3002,7 @@
             <a:blip r:embed="rId2">
               <a:alphaModFix/>
             </a:blip>
-            <a:srcRect b="0" l="0" r="0" t="0"/>
+            <a:srcRect/>
             <a:stretch/>
           </p:blipFill>
           <p:spPr>
@@ -2911,7 +3029,7 @@
             <a:blip r:embed="rId3">
               <a:alphaModFix/>
             </a:blip>
-            <a:srcRect b="0" l="0" r="0" t="0"/>
+            <a:srcRect/>
             <a:stretch/>
           </p:blipFill>
           <p:spPr>
@@ -2938,11 +3056,11 @@
 </file>
 
 <file path=ppt/slideLayouts/slideLayout13.xml><?xml version="1.0" encoding="utf-8"?>
-<p:sldLayout xmlns:a="http://schemas.openxmlformats.org/drawingml/2006/main" xmlns:r="http://schemas.openxmlformats.org/officeDocument/2006/relationships" xmlns:mc="http://schemas.openxmlformats.org/markup-compatibility/2006" xmlns:mv="urn:schemas-microsoft-com:mac:vml" xmlns:p="http://schemas.openxmlformats.org/presentationml/2006/main" xmlns:c="http://schemas.openxmlformats.org/drawingml/2006/chart" xmlns:dgm="http://schemas.openxmlformats.org/drawingml/2006/diagram" xmlns:o="urn:schemas-microsoft-com:office:office" xmlns:v="urn:schemas-microsoft-com:vml" xmlns:pvml="urn:schemas-microsoft-com:office:powerpoint" xmlns:com="http://schemas.openxmlformats.org/drawingml/2006/compatibility" xmlns:p14="http://schemas.microsoft.com/office/powerpoint/2010/main" xmlns:p15="http://schemas.microsoft.com/office/powerpoint/2012/main" xmlns:ahyp="http://schemas.microsoft.com/office/drawing/2018/hyperlinkcolor" matchingName="Background 1">
+<p:sldLayout xmlns:a="http://schemas.openxmlformats.org/drawingml/2006/main" xmlns:r="http://schemas.openxmlformats.org/officeDocument/2006/relationships" xmlns:p="http://schemas.openxmlformats.org/presentationml/2006/main" matchingName="Background 1">
   <p:cSld name="BLANK_1_1_1_1_1_1_1_1">
     <p:spTree>
       <p:nvGrpSpPr>
-        <p:cNvPr id="76" name="Shape 76"/>
+        <p:cNvPr id="1" name="Shape 76"/>
         <p:cNvGrpSpPr/>
         <p:nvPr/>
       </p:nvGrpSpPr>
@@ -2963,11 +3081,11 @@
 </file>
 
 <file path=ppt/slideLayouts/slideLayout2.xml><?xml version="1.0" encoding="utf-8"?>
-<p:sldLayout xmlns:a="http://schemas.openxmlformats.org/drawingml/2006/main" xmlns:r="http://schemas.openxmlformats.org/officeDocument/2006/relationships" xmlns:mc="http://schemas.openxmlformats.org/markup-compatibility/2006" xmlns:mv="urn:schemas-microsoft-com:mac:vml" xmlns:p="http://schemas.openxmlformats.org/presentationml/2006/main" xmlns:c="http://schemas.openxmlformats.org/drawingml/2006/chart" xmlns:dgm="http://schemas.openxmlformats.org/drawingml/2006/diagram" xmlns:o="urn:schemas-microsoft-com:office:office" xmlns:v="urn:schemas-microsoft-com:vml" xmlns:pvml="urn:schemas-microsoft-com:office:powerpoint" xmlns:com="http://schemas.openxmlformats.org/drawingml/2006/compatibility" xmlns:p14="http://schemas.microsoft.com/office/powerpoint/2010/main" xmlns:p15="http://schemas.microsoft.com/office/powerpoint/2012/main" xmlns:ahyp="http://schemas.microsoft.com/office/drawing/2018/hyperlinkcolor" matchingName="Title and text">
+<p:sldLayout xmlns:a="http://schemas.openxmlformats.org/drawingml/2006/main" xmlns:r="http://schemas.openxmlformats.org/officeDocument/2006/relationships" xmlns:p="http://schemas.openxmlformats.org/presentationml/2006/main" matchingName="Title and text">
   <p:cSld name="CUSTOM">
     <p:spTree>
       <p:nvGrpSpPr>
-        <p:cNvPr id="16" name="Shape 16"/>
+        <p:cNvPr id="1" name="Shape 16"/>
         <p:cNvGrpSpPr/>
         <p:nvPr/>
       </p:nvGrpSpPr>
@@ -2989,7 +3107,7 @@
           <a:blip r:embed="rId2">
             <a:alphaModFix/>
           </a:blip>
-          <a:srcRect b="0" l="0" r="0" t="0"/>
+          <a:srcRect/>
           <a:stretch/>
         </p:blipFill>
         <p:spPr>
@@ -3009,7 +3127,9 @@
       <p:sp>
         <p:nvSpPr>
           <p:cNvPr id="18" name="Google Shape;18;p13"/>
-          <p:cNvSpPr txBox="1"/>
+          <p:cNvSpPr txBox="1">
+            <a:spLocks noGrp="1"/>
+          </p:cNvSpPr>
           <p:nvPr>
             <p:ph type="title"/>
           </p:nvPr>
@@ -3028,7 +3148,7 @@
           </a:ln>
         </p:spPr>
         <p:txBody>
-          <a:bodyPr anchorCtr="0" anchor="t" bIns="91425" lIns="91425" spcFirstLastPara="1" rIns="91425" wrap="square" tIns="91425">
+          <a:bodyPr spcFirstLastPara="1" wrap="square" lIns="91425" tIns="91425" rIns="91425" bIns="91425" anchor="t" anchorCtr="0">
             <a:noAutofit/>
           </a:bodyPr>
           <a:lstStyle>
@@ -3159,15 +3279,19 @@
               <a:defRPr/>
             </a:lvl9pPr>
           </a:lstStyle>
-          <a:p/>
+          <a:p>
+            <a:endParaRPr/>
+          </a:p>
         </p:txBody>
       </p:sp>
       <p:sp>
         <p:nvSpPr>
           <p:cNvPr id="19" name="Google Shape;19;p13"/>
-          <p:cNvSpPr txBox="1"/>
+          <p:cNvSpPr txBox="1">
+            <a:spLocks noGrp="1"/>
+          </p:cNvSpPr>
           <p:nvPr>
-            <p:ph idx="1" type="subTitle"/>
+            <p:ph type="subTitle" idx="1"/>
           </p:nvPr>
         </p:nvSpPr>
         <p:spPr>
@@ -3184,7 +3308,7 @@
           </a:ln>
         </p:spPr>
         <p:txBody>
-          <a:bodyPr anchorCtr="0" anchor="t" bIns="91425" lIns="91425" spcFirstLastPara="1" rIns="91425" wrap="square" tIns="91425">
+          <a:bodyPr spcFirstLastPara="1" wrap="square" lIns="91425" tIns="91425" rIns="91425" bIns="91425" anchor="t" anchorCtr="0">
             <a:noAutofit/>
           </a:bodyPr>
           <a:lstStyle>
@@ -3315,7 +3439,9 @@
               <a:defRPr/>
             </a:lvl9pPr>
           </a:lstStyle>
-          <a:p/>
+          <a:p>
+            <a:endParaRPr/>
+          </a:p>
         </p:txBody>
       </p:sp>
       <p:pic>
@@ -3328,7 +3454,7 @@
           <a:blip r:embed="rId3">
             <a:alphaModFix/>
           </a:blip>
-          <a:srcRect b="0" l="0" r="0" t="0"/>
+          <a:srcRect/>
           <a:stretch/>
         </p:blipFill>
         <p:spPr>
@@ -3354,11 +3480,11 @@
 </file>
 
 <file path=ppt/slideLayouts/slideLayout3.xml><?xml version="1.0" encoding="utf-8"?>
-<p:sldLayout xmlns:a="http://schemas.openxmlformats.org/drawingml/2006/main" xmlns:r="http://schemas.openxmlformats.org/officeDocument/2006/relationships" xmlns:mc="http://schemas.openxmlformats.org/markup-compatibility/2006" xmlns:mv="urn:schemas-microsoft-com:mac:vml" xmlns:p="http://schemas.openxmlformats.org/presentationml/2006/main" xmlns:c="http://schemas.openxmlformats.org/drawingml/2006/chart" xmlns:dgm="http://schemas.openxmlformats.org/drawingml/2006/diagram" xmlns:o="urn:schemas-microsoft-com:office:office" xmlns:v="urn:schemas-microsoft-com:vml" xmlns:pvml="urn:schemas-microsoft-com:office:powerpoint" xmlns:com="http://schemas.openxmlformats.org/drawingml/2006/compatibility" xmlns:p14="http://schemas.microsoft.com/office/powerpoint/2010/main" xmlns:p15="http://schemas.microsoft.com/office/powerpoint/2012/main" xmlns:ahyp="http://schemas.microsoft.com/office/drawing/2018/hyperlinkcolor" matchingName="Title and text 1">
+<p:sldLayout xmlns:a="http://schemas.openxmlformats.org/drawingml/2006/main" xmlns:r="http://schemas.openxmlformats.org/officeDocument/2006/relationships" xmlns:p="http://schemas.openxmlformats.org/presentationml/2006/main" matchingName="Title and text 1">
   <p:cSld name="ONE_COLUMN_TEXT_1">
     <p:spTree>
       <p:nvGrpSpPr>
-        <p:cNvPr id="21" name="Shape 21"/>
+        <p:cNvPr id="1" name="Shape 21"/>
         <p:cNvGrpSpPr/>
         <p:nvPr/>
       </p:nvGrpSpPr>
@@ -3380,7 +3506,7 @@
           <a:blip r:embed="rId2">
             <a:alphaModFix/>
           </a:blip>
-          <a:srcRect b="0" l="0" r="0" t="0"/>
+          <a:srcRect/>
           <a:stretch/>
         </p:blipFill>
         <p:spPr>
@@ -3400,7 +3526,9 @@
       <p:sp>
         <p:nvSpPr>
           <p:cNvPr id="23" name="Google Shape;23;p14"/>
-          <p:cNvSpPr txBox="1"/>
+          <p:cNvSpPr txBox="1">
+            <a:spLocks noGrp="1"/>
+          </p:cNvSpPr>
           <p:nvPr>
             <p:ph type="title"/>
           </p:nvPr>
@@ -3419,7 +3547,7 @@
           </a:ln>
         </p:spPr>
         <p:txBody>
-          <a:bodyPr anchorCtr="0" anchor="t" bIns="91425" lIns="91425" spcFirstLastPara="1" rIns="91425" wrap="square" tIns="91425">
+          <a:bodyPr spcFirstLastPara="1" wrap="square" lIns="91425" tIns="91425" rIns="91425" bIns="91425" anchor="t" anchorCtr="0">
             <a:noAutofit/>
           </a:bodyPr>
           <a:lstStyle>
@@ -3550,15 +3678,19 @@
               <a:defRPr/>
             </a:lvl9pPr>
           </a:lstStyle>
-          <a:p/>
+          <a:p>
+            <a:endParaRPr/>
+          </a:p>
         </p:txBody>
       </p:sp>
       <p:sp>
         <p:nvSpPr>
           <p:cNvPr id="24" name="Google Shape;24;p14"/>
-          <p:cNvSpPr txBox="1"/>
+          <p:cNvSpPr txBox="1">
+            <a:spLocks noGrp="1"/>
+          </p:cNvSpPr>
           <p:nvPr>
-            <p:ph idx="1" type="body"/>
+            <p:ph type="body" idx="1"/>
           </p:nvPr>
         </p:nvSpPr>
         <p:spPr>
@@ -3575,11 +3707,11 @@
           </a:ln>
         </p:spPr>
         <p:txBody>
-          <a:bodyPr anchorCtr="0" anchor="t" bIns="91425" lIns="91425" spcFirstLastPara="1" rIns="91425" wrap="square" tIns="91425">
+          <a:bodyPr spcFirstLastPara="1" wrap="square" lIns="91425" tIns="91425" rIns="91425" bIns="91425" anchor="t" anchorCtr="0">
             <a:noAutofit/>
           </a:bodyPr>
           <a:lstStyle>
-            <a:lvl1pPr indent="-317500" lvl="0" marL="457200" algn="l">
+            <a:lvl1pPr marL="457200" lvl="0" indent="-317500" algn="l">
               <a:lnSpc>
                 <a:spcPct val="100000"/>
               </a:lnSpc>
@@ -3593,7 +3725,7 @@
               <a:buChar char="●"/>
               <a:defRPr sz="1400"/>
             </a:lvl1pPr>
-            <a:lvl2pPr indent="-317500" lvl="1" marL="914400" algn="l">
+            <a:lvl2pPr marL="914400" lvl="1" indent="-317500" algn="l">
               <a:lnSpc>
                 <a:spcPct val="115000"/>
               </a:lnSpc>
@@ -3607,7 +3739,7 @@
               <a:buChar char="○"/>
               <a:defRPr/>
             </a:lvl2pPr>
-            <a:lvl3pPr indent="-317500" lvl="2" marL="1371600" algn="l">
+            <a:lvl3pPr marL="1371600" lvl="2" indent="-317500" algn="l">
               <a:lnSpc>
                 <a:spcPct val="115000"/>
               </a:lnSpc>
@@ -3621,7 +3753,7 @@
               <a:buChar char="■"/>
               <a:defRPr/>
             </a:lvl3pPr>
-            <a:lvl4pPr indent="-317500" lvl="3" marL="1828800" algn="l">
+            <a:lvl4pPr marL="1828800" lvl="3" indent="-317500" algn="l">
               <a:lnSpc>
                 <a:spcPct val="115000"/>
               </a:lnSpc>
@@ -3635,7 +3767,7 @@
               <a:buChar char="●"/>
               <a:defRPr/>
             </a:lvl4pPr>
-            <a:lvl5pPr indent="-317500" lvl="4" marL="2286000" algn="l">
+            <a:lvl5pPr marL="2286000" lvl="4" indent="-317500" algn="l">
               <a:lnSpc>
                 <a:spcPct val="115000"/>
               </a:lnSpc>
@@ -3649,7 +3781,7 @@
               <a:buChar char="○"/>
               <a:defRPr/>
             </a:lvl5pPr>
-            <a:lvl6pPr indent="-317500" lvl="5" marL="2743200" algn="l">
+            <a:lvl6pPr marL="2743200" lvl="5" indent="-317500" algn="l">
               <a:lnSpc>
                 <a:spcPct val="115000"/>
               </a:lnSpc>
@@ -3663,7 +3795,7 @@
               <a:buChar char="■"/>
               <a:defRPr/>
             </a:lvl6pPr>
-            <a:lvl7pPr indent="-317500" lvl="6" marL="3200400" algn="l">
+            <a:lvl7pPr marL="3200400" lvl="6" indent="-317500" algn="l">
               <a:lnSpc>
                 <a:spcPct val="115000"/>
               </a:lnSpc>
@@ -3677,7 +3809,7 @@
               <a:buChar char="●"/>
               <a:defRPr/>
             </a:lvl7pPr>
-            <a:lvl8pPr indent="-317500" lvl="7" marL="3657600" algn="l">
+            <a:lvl8pPr marL="3657600" lvl="7" indent="-317500" algn="l">
               <a:lnSpc>
                 <a:spcPct val="115000"/>
               </a:lnSpc>
@@ -3691,7 +3823,7 @@
               <a:buChar char="○"/>
               <a:defRPr/>
             </a:lvl8pPr>
-            <a:lvl9pPr indent="-317500" lvl="8" marL="4114800" algn="l">
+            <a:lvl9pPr marL="4114800" lvl="8" indent="-317500" algn="l">
               <a:lnSpc>
                 <a:spcPct val="115000"/>
               </a:lnSpc>
@@ -3706,15 +3838,19 @@
               <a:defRPr/>
             </a:lvl9pPr>
           </a:lstStyle>
-          <a:p/>
+          <a:p>
+            <a:endParaRPr/>
+          </a:p>
         </p:txBody>
       </p:sp>
       <p:sp>
         <p:nvSpPr>
           <p:cNvPr id="25" name="Google Shape;25;p14"/>
-          <p:cNvSpPr/>
+          <p:cNvSpPr>
+            <a:spLocks noGrp="1"/>
+          </p:cNvSpPr>
           <p:nvPr>
-            <p:ph idx="2" type="pic"/>
+            <p:ph type="pic" idx="2"/>
           </p:nvPr>
         </p:nvSpPr>
         <p:spPr>
@@ -3726,14 +3862,14 @@
             <a:avLst/>
           </a:prstGeom>
           <a:noFill/>
-          <a:ln cap="flat" cmpd="sng" w="9525">
+          <a:ln w="9525" cap="flat" cmpd="sng">
             <a:solidFill>
               <a:schemeClr val="dk2"/>
             </a:solidFill>
             <a:prstDash val="solid"/>
             <a:round/>
-            <a:headEnd len="sm" w="sm" type="none"/>
-            <a:tailEnd len="sm" w="sm" type="none"/>
+            <a:headEnd type="none" w="sm" len="sm"/>
+            <a:tailEnd type="none" w="sm" len="sm"/>
           </a:ln>
         </p:spPr>
       </p:sp>
@@ -3747,7 +3883,7 @@
           <a:blip r:embed="rId3">
             <a:alphaModFix/>
           </a:blip>
-          <a:srcRect b="0" l="0" r="0" t="0"/>
+          <a:srcRect/>
           <a:stretch/>
         </p:blipFill>
         <p:spPr>
@@ -3773,11 +3909,11 @@
 </file>
 
 <file path=ppt/slideLayouts/slideLayout4.xml><?xml version="1.0" encoding="utf-8"?>
-<p:sldLayout xmlns:a="http://schemas.openxmlformats.org/drawingml/2006/main" xmlns:r="http://schemas.openxmlformats.org/officeDocument/2006/relationships" xmlns:mc="http://schemas.openxmlformats.org/markup-compatibility/2006" xmlns:mv="urn:schemas-microsoft-com:mac:vml" xmlns:p="http://schemas.openxmlformats.org/presentationml/2006/main" xmlns:c="http://schemas.openxmlformats.org/drawingml/2006/chart" xmlns:dgm="http://schemas.openxmlformats.org/drawingml/2006/diagram" xmlns:o="urn:schemas-microsoft-com:office:office" xmlns:v="urn:schemas-microsoft-com:vml" xmlns:pvml="urn:schemas-microsoft-com:office:powerpoint" xmlns:com="http://schemas.openxmlformats.org/drawingml/2006/compatibility" xmlns:p14="http://schemas.microsoft.com/office/powerpoint/2010/main" xmlns:p15="http://schemas.microsoft.com/office/powerpoint/2012/main" xmlns:ahyp="http://schemas.microsoft.com/office/drawing/2018/hyperlinkcolor" matchingName="Thanks">
+<p:sldLayout xmlns:a="http://schemas.openxmlformats.org/drawingml/2006/main" xmlns:r="http://schemas.openxmlformats.org/officeDocument/2006/relationships" xmlns:p="http://schemas.openxmlformats.org/presentationml/2006/main" matchingName="Thanks">
   <p:cSld name="CUSTOM_3_1">
     <p:spTree>
       <p:nvGrpSpPr>
-        <p:cNvPr id="27" name="Shape 27"/>
+        <p:cNvPr id="1" name="Shape 27"/>
         <p:cNvGrpSpPr/>
         <p:nvPr/>
       </p:nvGrpSpPr>
@@ -3813,7 +3949,7 @@
             <a:blip r:embed="rId2">
               <a:alphaModFix/>
             </a:blip>
-            <a:srcRect b="0" l="0" r="0" t="0"/>
+            <a:srcRect/>
             <a:stretch/>
           </p:blipFill>
           <p:spPr>
@@ -3840,7 +3976,7 @@
             <a:blip r:embed="rId3">
               <a:alphaModFix/>
             </a:blip>
-            <a:srcRect b="0" l="0" r="0" t="0"/>
+            <a:srcRect/>
             <a:stretch/>
           </p:blipFill>
           <p:spPr>
@@ -3861,7 +3997,9 @@
       <p:sp>
         <p:nvSpPr>
           <p:cNvPr id="31" name="Google Shape;31;p15"/>
-          <p:cNvSpPr txBox="1"/>
+          <p:cNvSpPr txBox="1">
+            <a:spLocks noGrp="1"/>
+          </p:cNvSpPr>
           <p:nvPr>
             <p:ph type="title"/>
           </p:nvPr>
@@ -3880,7 +4018,7 @@
           </a:ln>
         </p:spPr>
         <p:txBody>
-          <a:bodyPr anchorCtr="0" anchor="ctr" bIns="91425" lIns="91425" spcFirstLastPara="1" rIns="91425" wrap="square" tIns="91425">
+          <a:bodyPr spcFirstLastPara="1" wrap="square" lIns="91425" tIns="91425" rIns="91425" bIns="91425" anchor="ctr" anchorCtr="0">
             <a:noAutofit/>
           </a:bodyPr>
           <a:lstStyle>
@@ -4011,15 +4149,19 @@
               <a:defRPr sz="5000"/>
             </a:lvl9pPr>
           </a:lstStyle>
-          <a:p/>
+          <a:p>
+            <a:endParaRPr/>
+          </a:p>
         </p:txBody>
       </p:sp>
       <p:sp>
         <p:nvSpPr>
           <p:cNvPr id="32" name="Google Shape;32;p15"/>
-          <p:cNvSpPr txBox="1"/>
+          <p:cNvSpPr txBox="1">
+            <a:spLocks noGrp="1"/>
+          </p:cNvSpPr>
           <p:nvPr>
-            <p:ph idx="1" type="subTitle"/>
+            <p:ph type="subTitle" idx="1"/>
           </p:nvPr>
         </p:nvSpPr>
         <p:spPr>
@@ -4036,7 +4178,7 @@
           </a:ln>
         </p:spPr>
         <p:txBody>
-          <a:bodyPr anchorCtr="0" anchor="t" bIns="91425" lIns="91425" spcFirstLastPara="1" rIns="91425" wrap="square" tIns="91425">
+          <a:bodyPr spcFirstLastPara="1" wrap="square" lIns="91425" tIns="91425" rIns="91425" bIns="91425" anchor="t" anchorCtr="0">
             <a:noAutofit/>
           </a:bodyPr>
           <a:lstStyle>
@@ -4167,7 +4309,9 @@
               <a:defRPr/>
             </a:lvl9pPr>
           </a:lstStyle>
-          <a:p/>
+          <a:p>
+            <a:endParaRPr/>
+          </a:p>
         </p:txBody>
       </p:sp>
       <p:pic>
@@ -4180,7 +4324,7 @@
           <a:blip r:embed="rId4">
             <a:alphaModFix/>
           </a:blip>
-          <a:srcRect b="47106" l="19762" r="19445" t="14675"/>
+          <a:srcRect l="19762" t="14675" r="19445" b="47106"/>
           <a:stretch/>
         </p:blipFill>
         <p:spPr>
@@ -4217,12 +4361,12 @@
           </a:ln>
         </p:spPr>
         <p:txBody>
-          <a:bodyPr anchorCtr="0" anchor="t" bIns="91425" lIns="91425" spcFirstLastPara="1" rIns="91425" wrap="square" tIns="91425">
+          <a:bodyPr spcFirstLastPara="1" wrap="square" lIns="91425" tIns="91425" rIns="91425" bIns="91425" anchor="t" anchorCtr="0">
             <a:noAutofit/>
           </a:bodyPr>
           <a:lstStyle/>
           <a:p>
-            <a:pPr indent="0" lvl="0" marL="0" marR="0" rtl="0" algn="l">
+            <a:pPr marL="0" marR="0" lvl="0" indent="0" algn="l" rtl="0">
               <a:lnSpc>
                 <a:spcPct val="100000"/>
               </a:lnSpc>
@@ -4240,7 +4384,7 @@
               <a:buNone/>
             </a:pPr>
             <a:r>
-              <a:rPr b="1" i="0" lang="hu-HU" sz="1000" u="none" cap="none" strike="noStrike">
+              <a:rPr lang="hu-HU" sz="1000" b="1" i="0" u="none" strike="noStrike" cap="none">
                 <a:solidFill>
                   <a:schemeClr val="dk1"/>
                 </a:solidFill>
@@ -4252,7 +4396,7 @@
               <a:t>CREDITS:</a:t>
             </a:r>
             <a:r>
-              <a:rPr b="0" i="0" lang="hu-HU" sz="1000" u="none" cap="none" strike="noStrike">
+              <a:rPr lang="hu-HU" sz="1000" b="0" i="0" u="none" strike="noStrike" cap="none">
                 <a:solidFill>
                   <a:schemeClr val="dk1"/>
                 </a:solidFill>
@@ -4264,7 +4408,7 @@
               <a:t> This presentation template was created by </a:t>
             </a:r>
             <a:r>
-              <a:rPr b="1" i="0" lang="hu-HU" sz="1000" u="none" cap="none" strike="noStrike">
+              <a:rPr lang="hu-HU" sz="1000" b="1" i="0" u="none" strike="noStrike" cap="none">
                 <a:solidFill>
                   <a:schemeClr val="dk1"/>
                 </a:solidFill>
@@ -4278,7 +4422,7 @@
                 <a:hlinkClick r:id="rId5">
                   <a:extLst>
                     <a:ext uri="{A12FA001-AC4F-418D-AE19-62706E023703}">
-                      <ahyp:hlinkClr val="tx"/>
+                      <ahyp:hlinkClr xmlns:ahyp="http://schemas.microsoft.com/office/drawing/2018/hyperlinkcolor" val="tx"/>
                     </a:ext>
                   </a:extLst>
                 </a:hlinkClick>
@@ -4286,7 +4430,7 @@
               <a:t>Slidesgo</a:t>
             </a:r>
             <a:r>
-              <a:rPr b="0" i="0" lang="hu-HU" sz="1000" u="none" cap="none" strike="noStrike">
+              <a:rPr lang="hu-HU" sz="1000" b="0" i="0" u="none" strike="noStrike" cap="none">
                 <a:solidFill>
                   <a:schemeClr val="dk1"/>
                 </a:solidFill>
@@ -4298,7 +4442,7 @@
               <a:t>, and includes icons, infographics &amp; images by </a:t>
             </a:r>
             <a:r>
-              <a:rPr b="1" i="0" lang="hu-HU" sz="1000" u="none" cap="none" strike="noStrike">
+              <a:rPr lang="hu-HU" sz="1000" b="1" i="0" u="none" strike="noStrike" cap="none">
                 <a:solidFill>
                   <a:schemeClr val="dk1"/>
                 </a:solidFill>
@@ -4312,7 +4456,7 @@
                 <a:hlinkClick r:id="rId6">
                   <a:extLst>
                     <a:ext uri="{A12FA001-AC4F-418D-AE19-62706E023703}">
-                      <ahyp:hlinkClr val="tx"/>
+                      <ahyp:hlinkClr xmlns:ahyp="http://schemas.microsoft.com/office/drawing/2018/hyperlinkcolor" val="tx"/>
                     </a:ext>
                   </a:extLst>
                 </a:hlinkClick>
@@ -4320,7 +4464,7 @@
               <a:t>Freepik</a:t>
             </a:r>
             <a:r>
-              <a:rPr b="0" i="0" lang="hu-HU" sz="1000" u="none" cap="none" strike="noStrike">
+              <a:rPr lang="hu-HU" sz="1000" b="0" i="0" u="none" strike="noStrike" cap="none">
                 <a:solidFill>
                   <a:schemeClr val="dk1"/>
                 </a:solidFill>
@@ -4331,7 +4475,7 @@
               </a:rPr>
               <a:t> </a:t>
             </a:r>
-            <a:endParaRPr b="1" i="0" sz="1000" u="sng" cap="none" strike="noStrike">
+            <a:endParaRPr sz="1000" b="1" i="0" u="sng" strike="noStrike" cap="none">
               <a:solidFill>
                 <a:schemeClr val="dk1"/>
               </a:solidFill>
@@ -4352,11 +4496,11 @@
 </file>
 
 <file path=ppt/slideLayouts/slideLayout5.xml><?xml version="1.0" encoding="utf-8"?>
-<p:sldLayout xmlns:a="http://schemas.openxmlformats.org/drawingml/2006/main" xmlns:r="http://schemas.openxmlformats.org/officeDocument/2006/relationships" xmlns:mc="http://schemas.openxmlformats.org/markup-compatibility/2006" xmlns:mv="urn:schemas-microsoft-com:mac:vml" xmlns:p="http://schemas.openxmlformats.org/presentationml/2006/main" xmlns:c="http://schemas.openxmlformats.org/drawingml/2006/chart" xmlns:dgm="http://schemas.openxmlformats.org/drawingml/2006/diagram" xmlns:o="urn:schemas-microsoft-com:office:office" xmlns:v="urn:schemas-microsoft-com:vml" xmlns:pvml="urn:schemas-microsoft-com:office:powerpoint" xmlns:com="http://schemas.openxmlformats.org/drawingml/2006/compatibility" xmlns:p14="http://schemas.microsoft.com/office/powerpoint/2010/main" xmlns:p15="http://schemas.microsoft.com/office/powerpoint/2012/main" xmlns:ahyp="http://schemas.microsoft.com/office/drawing/2018/hyperlinkcolor" matchingName="Title and body" type="tx">
+<p:sldLayout xmlns:a="http://schemas.openxmlformats.org/drawingml/2006/main" xmlns:r="http://schemas.openxmlformats.org/officeDocument/2006/relationships" xmlns:p="http://schemas.openxmlformats.org/presentationml/2006/main" matchingName="Title and body" type="tx">
   <p:cSld name="TITLE_AND_BODY">
     <p:spTree>
       <p:nvGrpSpPr>
-        <p:cNvPr id="35" name="Shape 35"/>
+        <p:cNvPr id="1" name="Shape 35"/>
         <p:cNvGrpSpPr/>
         <p:nvPr/>
       </p:nvGrpSpPr>
@@ -4392,7 +4536,7 @@
             <a:blip r:embed="rId2">
               <a:alphaModFix/>
             </a:blip>
-            <a:srcRect b="0" l="0" r="0" t="0"/>
+            <a:srcRect/>
             <a:stretch/>
           </p:blipFill>
           <p:spPr>
@@ -4419,7 +4563,7 @@
             <a:blip r:embed="rId3">
               <a:alphaModFix/>
             </a:blip>
-            <a:srcRect b="0" l="0" r="0" t="0"/>
+            <a:srcRect/>
             <a:stretch/>
           </p:blipFill>
           <p:spPr>
@@ -4440,7 +4584,9 @@
       <p:sp>
         <p:nvSpPr>
           <p:cNvPr id="39" name="Google Shape;39;p16"/>
-          <p:cNvSpPr txBox="1"/>
+          <p:cNvSpPr txBox="1">
+            <a:spLocks noGrp="1"/>
+          </p:cNvSpPr>
           <p:nvPr>
             <p:ph type="title"/>
           </p:nvPr>
@@ -4459,7 +4605,7 @@
           </a:ln>
         </p:spPr>
         <p:txBody>
-          <a:bodyPr anchorCtr="0" anchor="t" bIns="91425" lIns="91425" spcFirstLastPara="1" rIns="91425" wrap="square" tIns="91425">
+          <a:bodyPr spcFirstLastPara="1" wrap="square" lIns="91425" tIns="91425" rIns="91425" bIns="91425" anchor="t" anchorCtr="0">
             <a:noAutofit/>
           </a:bodyPr>
           <a:lstStyle>
@@ -4590,15 +4736,19 @@
               <a:defRPr sz="2600"/>
             </a:lvl9pPr>
           </a:lstStyle>
-          <a:p/>
+          <a:p>
+            <a:endParaRPr/>
+          </a:p>
         </p:txBody>
       </p:sp>
       <p:sp>
         <p:nvSpPr>
           <p:cNvPr id="40" name="Google Shape;40;p16"/>
-          <p:cNvSpPr txBox="1"/>
+          <p:cNvSpPr txBox="1">
+            <a:spLocks noGrp="1"/>
+          </p:cNvSpPr>
           <p:nvPr>
-            <p:ph idx="1" type="body"/>
+            <p:ph type="body" idx="1"/>
           </p:nvPr>
         </p:nvSpPr>
         <p:spPr>
@@ -4615,11 +4765,11 @@
           </a:ln>
         </p:spPr>
         <p:txBody>
-          <a:bodyPr anchorCtr="0" anchor="t" bIns="91425" lIns="91425" spcFirstLastPara="1" rIns="91425" wrap="square" tIns="91425">
+          <a:bodyPr spcFirstLastPara="1" wrap="square" lIns="91425" tIns="91425" rIns="91425" bIns="91425" anchor="t" anchorCtr="0">
             <a:noAutofit/>
           </a:bodyPr>
           <a:lstStyle>
-            <a:lvl1pPr indent="-342900" lvl="0" marL="457200" algn="l">
+            <a:lvl1pPr marL="457200" lvl="0" indent="-342900" algn="l">
               <a:lnSpc>
                 <a:spcPct val="115000"/>
               </a:lnSpc>
@@ -4641,7 +4791,7 @@
                 </a:solidFill>
               </a:defRPr>
             </a:lvl1pPr>
-            <a:lvl2pPr indent="-317500" lvl="1" marL="914400" algn="l">
+            <a:lvl2pPr marL="914400" lvl="1" indent="-317500" algn="l">
               <a:lnSpc>
                 <a:spcPct val="115000"/>
               </a:lnSpc>
@@ -4663,7 +4813,7 @@
                 </a:solidFill>
               </a:defRPr>
             </a:lvl2pPr>
-            <a:lvl3pPr indent="-317500" lvl="2" marL="1371600" algn="l">
+            <a:lvl3pPr marL="1371600" lvl="2" indent="-317500" algn="l">
               <a:lnSpc>
                 <a:spcPct val="115000"/>
               </a:lnSpc>
@@ -4685,7 +4835,7 @@
                 </a:solidFill>
               </a:defRPr>
             </a:lvl3pPr>
-            <a:lvl4pPr indent="-317500" lvl="3" marL="1828800" algn="l">
+            <a:lvl4pPr marL="1828800" lvl="3" indent="-317500" algn="l">
               <a:lnSpc>
                 <a:spcPct val="115000"/>
               </a:lnSpc>
@@ -4707,7 +4857,7 @@
                 </a:solidFill>
               </a:defRPr>
             </a:lvl4pPr>
-            <a:lvl5pPr indent="-317500" lvl="4" marL="2286000" algn="l">
+            <a:lvl5pPr marL="2286000" lvl="4" indent="-317500" algn="l">
               <a:lnSpc>
                 <a:spcPct val="115000"/>
               </a:lnSpc>
@@ -4729,7 +4879,7 @@
                 </a:solidFill>
               </a:defRPr>
             </a:lvl5pPr>
-            <a:lvl6pPr indent="-317500" lvl="5" marL="2743200" algn="l">
+            <a:lvl6pPr marL="2743200" lvl="5" indent="-317500" algn="l">
               <a:lnSpc>
                 <a:spcPct val="115000"/>
               </a:lnSpc>
@@ -4751,7 +4901,7 @@
                 </a:solidFill>
               </a:defRPr>
             </a:lvl6pPr>
-            <a:lvl7pPr indent="-317500" lvl="6" marL="3200400" algn="l">
+            <a:lvl7pPr marL="3200400" lvl="6" indent="-317500" algn="l">
               <a:lnSpc>
                 <a:spcPct val="115000"/>
               </a:lnSpc>
@@ -4773,7 +4923,7 @@
                 </a:solidFill>
               </a:defRPr>
             </a:lvl7pPr>
-            <a:lvl8pPr indent="-317500" lvl="7" marL="3657600" algn="l">
+            <a:lvl8pPr marL="3657600" lvl="7" indent="-317500" algn="l">
               <a:lnSpc>
                 <a:spcPct val="115000"/>
               </a:lnSpc>
@@ -4795,7 +4945,7 @@
                 </a:solidFill>
               </a:defRPr>
             </a:lvl8pPr>
-            <a:lvl9pPr indent="-317500" lvl="8" marL="4114800" algn="l">
+            <a:lvl9pPr marL="4114800" lvl="8" indent="-317500" algn="l">
               <a:lnSpc>
                 <a:spcPct val="115000"/>
               </a:lnSpc>
@@ -4818,7 +4968,9 @@
               </a:defRPr>
             </a:lvl9pPr>
           </a:lstStyle>
-          <a:p/>
+          <a:p>
+            <a:endParaRPr/>
+          </a:p>
         </p:txBody>
       </p:sp>
     </p:spTree>
@@ -4830,11 +4982,11 @@
 </file>
 
 <file path=ppt/slideLayouts/slideLayout6.xml><?xml version="1.0" encoding="utf-8"?>
-<p:sldLayout xmlns:a="http://schemas.openxmlformats.org/drawingml/2006/main" xmlns:r="http://schemas.openxmlformats.org/officeDocument/2006/relationships" xmlns:mc="http://schemas.openxmlformats.org/markup-compatibility/2006" xmlns:mv="urn:schemas-microsoft-com:mac:vml" xmlns:p="http://schemas.openxmlformats.org/presentationml/2006/main" xmlns:c="http://schemas.openxmlformats.org/drawingml/2006/chart" xmlns:dgm="http://schemas.openxmlformats.org/drawingml/2006/diagram" xmlns:o="urn:schemas-microsoft-com:office:office" xmlns:v="urn:schemas-microsoft-com:vml" xmlns:pvml="urn:schemas-microsoft-com:office:powerpoint" xmlns:com="http://schemas.openxmlformats.org/drawingml/2006/compatibility" xmlns:p14="http://schemas.microsoft.com/office/powerpoint/2010/main" xmlns:p15="http://schemas.microsoft.com/office/powerpoint/2012/main" xmlns:ahyp="http://schemas.microsoft.com/office/drawing/2018/hyperlinkcolor" matchingName="One column text">
+<p:sldLayout xmlns:a="http://schemas.openxmlformats.org/drawingml/2006/main" xmlns:r="http://schemas.openxmlformats.org/officeDocument/2006/relationships" xmlns:p="http://schemas.openxmlformats.org/presentationml/2006/main" matchingName="One column text">
   <p:cSld name="ONE_COLUMN_TEXT">
     <p:spTree>
       <p:nvGrpSpPr>
-        <p:cNvPr id="41" name="Shape 41"/>
+        <p:cNvPr id="1" name="Shape 41"/>
         <p:cNvGrpSpPr/>
         <p:nvPr/>
       </p:nvGrpSpPr>
@@ -4870,7 +5022,7 @@
             <a:blip r:embed="rId2">
               <a:alphaModFix/>
             </a:blip>
-            <a:srcRect b="0" l="0" r="0" t="0"/>
+            <a:srcRect/>
             <a:stretch/>
           </p:blipFill>
           <p:spPr>
@@ -4897,7 +5049,7 @@
             <a:blip r:embed="rId3">
               <a:alphaModFix/>
             </a:blip>
-            <a:srcRect b="0" l="0" r="0" t="0"/>
+            <a:srcRect/>
             <a:stretch/>
           </p:blipFill>
           <p:spPr>
@@ -4918,7 +5070,9 @@
       <p:sp>
         <p:nvSpPr>
           <p:cNvPr id="45" name="Google Shape;45;p17"/>
-          <p:cNvSpPr txBox="1"/>
+          <p:cNvSpPr txBox="1">
+            <a:spLocks noGrp="1"/>
+          </p:cNvSpPr>
           <p:nvPr>
             <p:ph type="title"/>
           </p:nvPr>
@@ -4937,7 +5091,7 @@
           </a:ln>
         </p:spPr>
         <p:txBody>
-          <a:bodyPr anchorCtr="0" anchor="t" bIns="91425" lIns="91425" spcFirstLastPara="1" rIns="91425" wrap="square" tIns="91425">
+          <a:bodyPr spcFirstLastPara="1" wrap="square" lIns="91425" tIns="91425" rIns="91425" bIns="91425" anchor="t" anchorCtr="0">
             <a:noAutofit/>
           </a:bodyPr>
           <a:lstStyle>
@@ -5068,15 +5222,19 @@
               <a:defRPr/>
             </a:lvl9pPr>
           </a:lstStyle>
-          <a:p/>
+          <a:p>
+            <a:endParaRPr/>
+          </a:p>
         </p:txBody>
       </p:sp>
       <p:sp>
         <p:nvSpPr>
           <p:cNvPr id="46" name="Google Shape;46;p17"/>
-          <p:cNvSpPr txBox="1"/>
+          <p:cNvSpPr txBox="1">
+            <a:spLocks noGrp="1"/>
+          </p:cNvSpPr>
           <p:nvPr>
-            <p:ph idx="1" type="body"/>
+            <p:ph type="body" idx="1"/>
           </p:nvPr>
         </p:nvSpPr>
         <p:spPr>
@@ -5093,11 +5251,11 @@
           </a:ln>
         </p:spPr>
         <p:txBody>
-          <a:bodyPr anchorCtr="0" anchor="t" bIns="91425" lIns="91425" spcFirstLastPara="1" rIns="91425" wrap="square" tIns="91425">
+          <a:bodyPr spcFirstLastPara="1" wrap="square" lIns="91425" tIns="91425" rIns="91425" bIns="91425" anchor="t" anchorCtr="0">
             <a:noAutofit/>
           </a:bodyPr>
           <a:lstStyle>
-            <a:lvl1pPr indent="-317500" lvl="0" marL="457200" algn="l">
+            <a:lvl1pPr marL="457200" lvl="0" indent="-317500" algn="l">
               <a:lnSpc>
                 <a:spcPct val="100000"/>
               </a:lnSpc>
@@ -5111,7 +5269,7 @@
               <a:buChar char="●"/>
               <a:defRPr sz="1400"/>
             </a:lvl1pPr>
-            <a:lvl2pPr indent="-317500" lvl="1" marL="914400" algn="l">
+            <a:lvl2pPr marL="914400" lvl="1" indent="-317500" algn="l">
               <a:lnSpc>
                 <a:spcPct val="115000"/>
               </a:lnSpc>
@@ -5125,7 +5283,7 @@
               <a:buChar char="○"/>
               <a:defRPr/>
             </a:lvl2pPr>
-            <a:lvl3pPr indent="-317500" lvl="2" marL="1371600" algn="l">
+            <a:lvl3pPr marL="1371600" lvl="2" indent="-317500" algn="l">
               <a:lnSpc>
                 <a:spcPct val="115000"/>
               </a:lnSpc>
@@ -5139,7 +5297,7 @@
               <a:buChar char="■"/>
               <a:defRPr/>
             </a:lvl3pPr>
-            <a:lvl4pPr indent="-317500" lvl="3" marL="1828800" algn="l">
+            <a:lvl4pPr marL="1828800" lvl="3" indent="-317500" algn="l">
               <a:lnSpc>
                 <a:spcPct val="115000"/>
               </a:lnSpc>
@@ -5153,7 +5311,7 @@
               <a:buChar char="●"/>
               <a:defRPr/>
             </a:lvl4pPr>
-            <a:lvl5pPr indent="-317500" lvl="4" marL="2286000" algn="l">
+            <a:lvl5pPr marL="2286000" lvl="4" indent="-317500" algn="l">
               <a:lnSpc>
                 <a:spcPct val="115000"/>
               </a:lnSpc>
@@ -5167,7 +5325,7 @@
               <a:buChar char="○"/>
               <a:defRPr/>
             </a:lvl5pPr>
-            <a:lvl6pPr indent="-317500" lvl="5" marL="2743200" algn="l">
+            <a:lvl6pPr marL="2743200" lvl="5" indent="-317500" algn="l">
               <a:lnSpc>
                 <a:spcPct val="115000"/>
               </a:lnSpc>
@@ -5181,7 +5339,7 @@
               <a:buChar char="■"/>
               <a:defRPr/>
             </a:lvl6pPr>
-            <a:lvl7pPr indent="-317500" lvl="6" marL="3200400" algn="l">
+            <a:lvl7pPr marL="3200400" lvl="6" indent="-317500" algn="l">
               <a:lnSpc>
                 <a:spcPct val="115000"/>
               </a:lnSpc>
@@ -5195,7 +5353,7 @@
               <a:buChar char="●"/>
               <a:defRPr/>
             </a:lvl7pPr>
-            <a:lvl8pPr indent="-317500" lvl="7" marL="3657600" algn="l">
+            <a:lvl8pPr marL="3657600" lvl="7" indent="-317500" algn="l">
               <a:lnSpc>
                 <a:spcPct val="115000"/>
               </a:lnSpc>
@@ -5209,7 +5367,7 @@
               <a:buChar char="○"/>
               <a:defRPr/>
             </a:lvl8pPr>
-            <a:lvl9pPr indent="-317500" lvl="8" marL="4114800" algn="l">
+            <a:lvl9pPr marL="4114800" lvl="8" indent="-317500" algn="l">
               <a:lnSpc>
                 <a:spcPct val="115000"/>
               </a:lnSpc>
@@ -5224,15 +5382,19 @@
               <a:defRPr/>
             </a:lvl9pPr>
           </a:lstStyle>
-          <a:p/>
+          <a:p>
+            <a:endParaRPr/>
+          </a:p>
         </p:txBody>
       </p:sp>
       <p:sp>
         <p:nvSpPr>
           <p:cNvPr id="47" name="Google Shape;47;p17"/>
-          <p:cNvSpPr/>
+          <p:cNvSpPr>
+            <a:spLocks noGrp="1"/>
+          </p:cNvSpPr>
           <p:nvPr>
-            <p:ph idx="2" type="pic"/>
+            <p:ph type="pic" idx="2"/>
           </p:nvPr>
         </p:nvSpPr>
         <p:spPr>
@@ -5258,11 +5420,11 @@
 </file>
 
 <file path=ppt/slideLayouts/slideLayout7.xml><?xml version="1.0" encoding="utf-8"?>
-<p:sldLayout xmlns:a="http://schemas.openxmlformats.org/drawingml/2006/main" xmlns:r="http://schemas.openxmlformats.org/officeDocument/2006/relationships" xmlns:mc="http://schemas.openxmlformats.org/markup-compatibility/2006" xmlns:mv="urn:schemas-microsoft-com:mac:vml" xmlns:p="http://schemas.openxmlformats.org/presentationml/2006/main" xmlns:c="http://schemas.openxmlformats.org/drawingml/2006/chart" xmlns:dgm="http://schemas.openxmlformats.org/drawingml/2006/diagram" xmlns:o="urn:schemas-microsoft-com:office:office" xmlns:v="urn:schemas-microsoft-com:vml" xmlns:pvml="urn:schemas-microsoft-com:office:powerpoint" xmlns:com="http://schemas.openxmlformats.org/drawingml/2006/compatibility" xmlns:p14="http://schemas.microsoft.com/office/powerpoint/2010/main" xmlns:p15="http://schemas.microsoft.com/office/powerpoint/2012/main" xmlns:ahyp="http://schemas.microsoft.com/office/drawing/2018/hyperlinkcolor" matchingName="Main point">
+<p:sldLayout xmlns:a="http://schemas.openxmlformats.org/drawingml/2006/main" xmlns:r="http://schemas.openxmlformats.org/officeDocument/2006/relationships" xmlns:p="http://schemas.openxmlformats.org/presentationml/2006/main" matchingName="Main point">
   <p:cSld name="MAIN_POINT">
     <p:spTree>
       <p:nvGrpSpPr>
-        <p:cNvPr id="48" name="Shape 48"/>
+        <p:cNvPr id="1" name="Shape 48"/>
         <p:cNvGrpSpPr/>
         <p:nvPr/>
       </p:nvGrpSpPr>
@@ -5298,7 +5460,7 @@
             <a:blip r:embed="rId2">
               <a:alphaModFix/>
             </a:blip>
-            <a:srcRect b="0" l="0" r="0" t="0"/>
+            <a:srcRect/>
             <a:stretch/>
           </p:blipFill>
           <p:spPr>
@@ -5325,7 +5487,7 @@
             <a:blip r:embed="rId3">
               <a:alphaModFix/>
             </a:blip>
-            <a:srcRect b="0" l="0" r="0" t="0"/>
+            <a:srcRect/>
             <a:stretch/>
           </p:blipFill>
           <p:spPr>
@@ -5346,7 +5508,9 @@
       <p:sp>
         <p:nvSpPr>
           <p:cNvPr id="52" name="Google Shape;52;p18"/>
-          <p:cNvSpPr txBox="1"/>
+          <p:cNvSpPr txBox="1">
+            <a:spLocks noGrp="1"/>
+          </p:cNvSpPr>
           <p:nvPr>
             <p:ph type="title"/>
           </p:nvPr>
@@ -5365,7 +5529,7 @@
           </a:ln>
         </p:spPr>
         <p:txBody>
-          <a:bodyPr anchorCtr="0" anchor="ctr" bIns="91425" lIns="91425" spcFirstLastPara="1" rIns="91425" wrap="square" tIns="91425">
+          <a:bodyPr spcFirstLastPara="1" wrap="square" lIns="91425" tIns="91425" rIns="91425" bIns="91425" anchor="ctr" anchorCtr="0">
             <a:noAutofit/>
           </a:bodyPr>
           <a:lstStyle>
@@ -5496,7 +5660,9 @@
               <a:defRPr sz="6000"/>
             </a:lvl9pPr>
           </a:lstStyle>
-          <a:p/>
+          <a:p>
+            <a:endParaRPr/>
+          </a:p>
         </p:txBody>
       </p:sp>
     </p:spTree>
@@ -5508,11 +5674,11 @@
 </file>
 
 <file path=ppt/slideLayouts/slideLayout8.xml><?xml version="1.0" encoding="utf-8"?>
-<p:sldLayout xmlns:a="http://schemas.openxmlformats.org/drawingml/2006/main" xmlns:r="http://schemas.openxmlformats.org/officeDocument/2006/relationships" xmlns:mc="http://schemas.openxmlformats.org/markup-compatibility/2006" xmlns:mv="urn:schemas-microsoft-com:mac:vml" xmlns:p="http://schemas.openxmlformats.org/presentationml/2006/main" xmlns:c="http://schemas.openxmlformats.org/drawingml/2006/chart" xmlns:dgm="http://schemas.openxmlformats.org/drawingml/2006/diagram" xmlns:o="urn:schemas-microsoft-com:office:office" xmlns:v="urn:schemas-microsoft-com:vml" xmlns:pvml="urn:schemas-microsoft-com:office:powerpoint" xmlns:com="http://schemas.openxmlformats.org/drawingml/2006/compatibility" xmlns:p14="http://schemas.microsoft.com/office/powerpoint/2010/main" xmlns:p15="http://schemas.microsoft.com/office/powerpoint/2012/main" xmlns:ahyp="http://schemas.microsoft.com/office/drawing/2018/hyperlinkcolor" matchingName="Section title and description">
+<p:sldLayout xmlns:a="http://schemas.openxmlformats.org/drawingml/2006/main" xmlns:r="http://schemas.openxmlformats.org/officeDocument/2006/relationships" xmlns:p="http://schemas.openxmlformats.org/presentationml/2006/main" matchingName="Section title and description">
   <p:cSld name="SECTION_TITLE_AND_DESCRIPTION">
     <p:spTree>
       <p:nvGrpSpPr>
-        <p:cNvPr id="53" name="Shape 53"/>
+        <p:cNvPr id="1" name="Shape 53"/>
         <p:cNvGrpSpPr/>
         <p:nvPr/>
       </p:nvGrpSpPr>
@@ -5548,7 +5714,7 @@
             <a:blip r:embed="rId2">
               <a:alphaModFix/>
             </a:blip>
-            <a:srcRect b="0" l="0" r="0" t="0"/>
+            <a:srcRect/>
             <a:stretch/>
           </p:blipFill>
           <p:spPr>
@@ -5575,7 +5741,7 @@
             <a:blip r:embed="rId3">
               <a:alphaModFix/>
             </a:blip>
-            <a:srcRect b="0" l="0" r="0" t="0"/>
+            <a:srcRect/>
             <a:stretch/>
           </p:blipFill>
           <p:spPr>
@@ -5596,9 +5762,11 @@
       <p:sp>
         <p:nvSpPr>
           <p:cNvPr id="57" name="Google Shape;57;p19"/>
-          <p:cNvSpPr txBox="1"/>
+          <p:cNvSpPr txBox="1">
+            <a:spLocks noGrp="1"/>
+          </p:cNvSpPr>
           <p:nvPr>
-            <p:ph idx="1" type="subTitle"/>
+            <p:ph type="subTitle" idx="1"/>
           </p:nvPr>
         </p:nvSpPr>
         <p:spPr>
@@ -5615,7 +5783,7 @@
           </a:ln>
         </p:spPr>
         <p:txBody>
-          <a:bodyPr anchorCtr="0" anchor="t" bIns="91425" lIns="91425" spcFirstLastPara="1" rIns="91425" wrap="square" tIns="91425">
+          <a:bodyPr spcFirstLastPara="1" wrap="square" lIns="91425" tIns="91425" rIns="91425" bIns="91425" anchor="t" anchorCtr="0">
             <a:noAutofit/>
           </a:bodyPr>
           <a:lstStyle>
@@ -5746,13 +5914,17 @@
               <a:defRPr/>
             </a:lvl9pPr>
           </a:lstStyle>
-          <a:p/>
+          <a:p>
+            <a:endParaRPr/>
+          </a:p>
         </p:txBody>
       </p:sp>
       <p:sp>
         <p:nvSpPr>
           <p:cNvPr id="58" name="Google Shape;58;p19"/>
-          <p:cNvSpPr txBox="1"/>
+          <p:cNvSpPr txBox="1">
+            <a:spLocks noGrp="1"/>
+          </p:cNvSpPr>
           <p:nvPr>
             <p:ph type="title"/>
           </p:nvPr>
@@ -5771,7 +5943,7 @@
           </a:ln>
         </p:spPr>
         <p:txBody>
-          <a:bodyPr anchorCtr="0" anchor="t" bIns="91425" lIns="91425" spcFirstLastPara="1" rIns="91425" wrap="square" tIns="91425">
+          <a:bodyPr spcFirstLastPara="1" wrap="square" lIns="91425" tIns="91425" rIns="91425" bIns="91425" anchor="t" anchorCtr="0">
             <a:noAutofit/>
           </a:bodyPr>
           <a:lstStyle>
@@ -5902,15 +6074,19 @@
               <a:defRPr/>
             </a:lvl9pPr>
           </a:lstStyle>
-          <a:p/>
+          <a:p>
+            <a:endParaRPr/>
+          </a:p>
         </p:txBody>
       </p:sp>
       <p:sp>
         <p:nvSpPr>
           <p:cNvPr id="59" name="Google Shape;59;p19"/>
-          <p:cNvSpPr txBox="1"/>
+          <p:cNvSpPr txBox="1">
+            <a:spLocks noGrp="1"/>
+          </p:cNvSpPr>
           <p:nvPr>
-            <p:ph idx="2" type="subTitle"/>
+            <p:ph type="subTitle" idx="2"/>
           </p:nvPr>
         </p:nvSpPr>
         <p:spPr>
@@ -5927,7 +6103,7 @@
           </a:ln>
         </p:spPr>
         <p:txBody>
-          <a:bodyPr anchorCtr="0" anchor="t" bIns="91425" lIns="91425" spcFirstLastPara="1" rIns="91425" wrap="square" tIns="91425">
+          <a:bodyPr spcFirstLastPara="1" wrap="square" lIns="91425" tIns="91425" rIns="91425" bIns="91425" anchor="t" anchorCtr="0">
             <a:noAutofit/>
           </a:bodyPr>
           <a:lstStyle>
@@ -6058,7 +6234,9 @@
               <a:defRPr/>
             </a:lvl9pPr>
           </a:lstStyle>
-          <a:p/>
+          <a:p>
+            <a:endParaRPr/>
+          </a:p>
         </p:txBody>
       </p:sp>
     </p:spTree>
@@ -6070,11 +6248,11 @@
 </file>
 
 <file path=ppt/slideLayouts/slideLayout9.xml><?xml version="1.0" encoding="utf-8"?>
-<p:sldLayout xmlns:a="http://schemas.openxmlformats.org/drawingml/2006/main" xmlns:r="http://schemas.openxmlformats.org/officeDocument/2006/relationships" xmlns:mc="http://schemas.openxmlformats.org/markup-compatibility/2006" xmlns:mv="urn:schemas-microsoft-com:mac:vml" xmlns:p="http://schemas.openxmlformats.org/presentationml/2006/main" xmlns:c="http://schemas.openxmlformats.org/drawingml/2006/chart" xmlns:dgm="http://schemas.openxmlformats.org/drawingml/2006/diagram" xmlns:o="urn:schemas-microsoft-com:office:office" xmlns:v="urn:schemas-microsoft-com:vml" xmlns:pvml="urn:schemas-microsoft-com:office:powerpoint" xmlns:com="http://schemas.openxmlformats.org/drawingml/2006/compatibility" xmlns:p14="http://schemas.microsoft.com/office/powerpoint/2010/main" xmlns:p15="http://schemas.microsoft.com/office/powerpoint/2012/main" xmlns:ahyp="http://schemas.microsoft.com/office/drawing/2018/hyperlinkcolor" matchingName="Big number">
+<p:sldLayout xmlns:a="http://schemas.openxmlformats.org/drawingml/2006/main" xmlns:r="http://schemas.openxmlformats.org/officeDocument/2006/relationships" xmlns:p="http://schemas.openxmlformats.org/presentationml/2006/main" matchingName="Big number">
   <p:cSld name="BIG_NUMBER">
     <p:spTree>
       <p:nvGrpSpPr>
-        <p:cNvPr id="60" name="Shape 60"/>
+        <p:cNvPr id="1" name="Shape 60"/>
         <p:cNvGrpSpPr/>
         <p:nvPr/>
       </p:nvGrpSpPr>
@@ -6110,7 +6288,7 @@
             <a:blip r:embed="rId2">
               <a:alphaModFix/>
             </a:blip>
-            <a:srcRect b="0" l="0" r="0" t="0"/>
+            <a:srcRect/>
             <a:stretch/>
           </p:blipFill>
           <p:spPr>
@@ -6137,7 +6315,7 @@
             <a:blip r:embed="rId3">
               <a:alphaModFix/>
             </a:blip>
-            <a:srcRect b="0" l="0" r="0" t="0"/>
+            <a:srcRect/>
             <a:stretch/>
           </p:blipFill>
           <p:spPr>
@@ -6158,9 +6336,11 @@
       <p:sp>
         <p:nvSpPr>
           <p:cNvPr id="64" name="Google Shape;64;p20"/>
-          <p:cNvSpPr txBox="1"/>
+          <p:cNvSpPr txBox="1">
+            <a:spLocks noGrp="1"/>
+          </p:cNvSpPr>
           <p:nvPr>
-            <p:ph hasCustomPrompt="1" type="title"/>
+            <p:ph type="title" hasCustomPrompt="1"/>
           </p:nvPr>
         </p:nvSpPr>
         <p:spPr>
@@ -6177,7 +6357,7 @@
           </a:ln>
         </p:spPr>
         <p:txBody>
-          <a:bodyPr anchorCtr="0" anchor="b" bIns="91425" lIns="91425" spcFirstLastPara="1" rIns="91425" wrap="square" tIns="91425">
+          <a:bodyPr spcFirstLastPara="1" wrap="square" lIns="91425" tIns="91425" rIns="91425" bIns="91425" anchor="b" anchorCtr="0">
             <a:noAutofit/>
           </a:bodyPr>
           <a:lstStyle>
@@ -6322,9 +6502,11 @@
       <p:sp>
         <p:nvSpPr>
           <p:cNvPr id="65" name="Google Shape;65;p20"/>
-          <p:cNvSpPr txBox="1"/>
+          <p:cNvSpPr txBox="1">
+            <a:spLocks noGrp="1"/>
+          </p:cNvSpPr>
           <p:nvPr>
-            <p:ph idx="1" type="subTitle"/>
+            <p:ph type="subTitle" idx="1"/>
           </p:nvPr>
         </p:nvSpPr>
         <p:spPr>
@@ -6341,7 +6523,7 @@
           </a:ln>
         </p:spPr>
         <p:txBody>
-          <a:bodyPr anchorCtr="0" anchor="t" bIns="91425" lIns="91425" spcFirstLastPara="1" rIns="91425" wrap="square" tIns="91425">
+          <a:bodyPr spcFirstLastPara="1" wrap="square" lIns="91425" tIns="91425" rIns="91425" bIns="91425" anchor="t" anchorCtr="0">
             <a:noAutofit/>
           </a:bodyPr>
           <a:lstStyle>
@@ -6472,7 +6654,9 @@
               <a:defRPr sz="1600"/>
             </a:lvl9pPr>
           </a:lstStyle>
-          <a:p/>
+          <a:p>
+            <a:endParaRPr/>
+          </a:p>
         </p:txBody>
       </p:sp>
     </p:spTree>
@@ -6484,18 +6668,19 @@
 </file>
 
 <file path=ppt/slideMasters/slideMaster1.xml><?xml version="1.0" encoding="utf-8"?>
-<p:sldMaster xmlns:a="http://schemas.openxmlformats.org/drawingml/2006/main" xmlns:r="http://schemas.openxmlformats.org/officeDocument/2006/relationships" xmlns:mc="http://schemas.openxmlformats.org/markup-compatibility/2006" xmlns:mv="urn:schemas-microsoft-com:mac:vml" xmlns:p="http://schemas.openxmlformats.org/presentationml/2006/main" xmlns:c="http://schemas.openxmlformats.org/drawingml/2006/chart" xmlns:dgm="http://schemas.openxmlformats.org/drawingml/2006/diagram" xmlns:o="urn:schemas-microsoft-com:office:office" xmlns:v="urn:schemas-microsoft-com:vml" xmlns:pvml="urn:schemas-microsoft-com:office:powerpoint" xmlns:com="http://schemas.openxmlformats.org/drawingml/2006/compatibility" xmlns:p14="http://schemas.microsoft.com/office/powerpoint/2010/main" xmlns:p15="http://schemas.microsoft.com/office/powerpoint/2012/main" xmlns:ahyp="http://schemas.microsoft.com/office/drawing/2018/hyperlinkcolor">
+<p:sldMaster xmlns:a="http://schemas.openxmlformats.org/drawingml/2006/main" xmlns:r="http://schemas.openxmlformats.org/officeDocument/2006/relationships" xmlns:p="http://schemas.openxmlformats.org/presentationml/2006/main">
   <p:cSld name="simple-light-2">
     <p:bg>
       <p:bgPr>
         <a:solidFill>
           <a:schemeClr val="lt1"/>
         </a:solidFill>
+        <a:effectLst/>
       </p:bgPr>
     </p:bg>
     <p:spTree>
       <p:nvGrpSpPr>
-        <p:cNvPr id="5" name="Shape 5"/>
+        <p:cNvPr id="1" name="Shape 5"/>
         <p:cNvGrpSpPr/>
         <p:nvPr/>
       </p:nvGrpSpPr>
@@ -6510,7 +6695,9 @@
       <p:sp>
         <p:nvSpPr>
           <p:cNvPr id="6" name="Google Shape;6;p11"/>
-          <p:cNvSpPr txBox="1"/>
+          <p:cNvSpPr txBox="1">
+            <a:spLocks noGrp="1"/>
+          </p:cNvSpPr>
           <p:nvPr>
             <p:ph type="title"/>
           </p:nvPr>
@@ -6529,11 +6716,11 @@
           </a:ln>
         </p:spPr>
         <p:txBody>
-          <a:bodyPr anchorCtr="0" anchor="t" bIns="91425" lIns="91425" spcFirstLastPara="1" rIns="91425" wrap="square" tIns="91425">
+          <a:bodyPr spcFirstLastPara="1" wrap="square" lIns="91425" tIns="91425" rIns="91425" bIns="91425" anchor="t" anchorCtr="0">
             <a:noAutofit/>
           </a:bodyPr>
           <a:lstStyle>
-            <a:lvl1pPr lvl="0" marR="0" rtl="0" algn="l">
+            <a:lvl1pPr marR="0" lvl="0" algn="l" rtl="0">
               <a:lnSpc>
                 <a:spcPct val="100000"/>
               </a:lnSpc>
@@ -6549,7 +6736,7 @@
               <a:buSzPts val="3200"/>
               <a:buFont typeface="VT323"/>
               <a:buNone/>
-              <a:defRPr b="0" i="0" sz="3200" u="none" cap="none" strike="noStrike">
+              <a:defRPr sz="3200" b="0" i="0" u="none" strike="noStrike" cap="none">
                 <a:solidFill>
                   <a:schemeClr val="dk1"/>
                 </a:solidFill>
@@ -6559,7 +6746,7 @@
                 <a:sym typeface="VT323"/>
               </a:defRPr>
             </a:lvl1pPr>
-            <a:lvl2pPr lvl="1" marR="0" rtl="0" algn="l">
+            <a:lvl2pPr marR="0" lvl="1" algn="l" rtl="0">
               <a:lnSpc>
                 <a:spcPct val="100000"/>
               </a:lnSpc>
@@ -6575,7 +6762,7 @@
               <a:buSzPts val="3200"/>
               <a:buFont typeface="VT323"/>
               <a:buNone/>
-              <a:defRPr b="0" i="0" sz="3200" u="none" cap="none" strike="noStrike">
+              <a:defRPr sz="3200" b="0" i="0" u="none" strike="noStrike" cap="none">
                 <a:solidFill>
                   <a:schemeClr val="dk1"/>
                 </a:solidFill>
@@ -6585,7 +6772,7 @@
                 <a:sym typeface="VT323"/>
               </a:defRPr>
             </a:lvl2pPr>
-            <a:lvl3pPr lvl="2" marR="0" rtl="0" algn="l">
+            <a:lvl3pPr marR="0" lvl="2" algn="l" rtl="0">
               <a:lnSpc>
                 <a:spcPct val="100000"/>
               </a:lnSpc>
@@ -6601,7 +6788,7 @@
               <a:buSzPts val="3200"/>
               <a:buFont typeface="VT323"/>
               <a:buNone/>
-              <a:defRPr b="0" i="0" sz="3200" u="none" cap="none" strike="noStrike">
+              <a:defRPr sz="3200" b="0" i="0" u="none" strike="noStrike" cap="none">
                 <a:solidFill>
                   <a:schemeClr val="dk1"/>
                 </a:solidFill>
@@ -6611,7 +6798,7 @@
                 <a:sym typeface="VT323"/>
               </a:defRPr>
             </a:lvl3pPr>
-            <a:lvl4pPr lvl="3" marR="0" rtl="0" algn="l">
+            <a:lvl4pPr marR="0" lvl="3" algn="l" rtl="0">
               <a:lnSpc>
                 <a:spcPct val="100000"/>
               </a:lnSpc>
@@ -6627,7 +6814,7 @@
               <a:buSzPts val="3200"/>
               <a:buFont typeface="VT323"/>
               <a:buNone/>
-              <a:defRPr b="0" i="0" sz="3200" u="none" cap="none" strike="noStrike">
+              <a:defRPr sz="3200" b="0" i="0" u="none" strike="noStrike" cap="none">
                 <a:solidFill>
                   <a:schemeClr val="dk1"/>
                 </a:solidFill>
@@ -6637,7 +6824,7 @@
                 <a:sym typeface="VT323"/>
               </a:defRPr>
             </a:lvl4pPr>
-            <a:lvl5pPr lvl="4" marR="0" rtl="0" algn="l">
+            <a:lvl5pPr marR="0" lvl="4" algn="l" rtl="0">
               <a:lnSpc>
                 <a:spcPct val="100000"/>
               </a:lnSpc>
@@ -6653,7 +6840,7 @@
               <a:buSzPts val="3200"/>
               <a:buFont typeface="VT323"/>
               <a:buNone/>
-              <a:defRPr b="0" i="0" sz="3200" u="none" cap="none" strike="noStrike">
+              <a:defRPr sz="3200" b="0" i="0" u="none" strike="noStrike" cap="none">
                 <a:solidFill>
                   <a:schemeClr val="dk1"/>
                 </a:solidFill>
@@ -6663,7 +6850,7 @@
                 <a:sym typeface="VT323"/>
               </a:defRPr>
             </a:lvl5pPr>
-            <a:lvl6pPr lvl="5" marR="0" rtl="0" algn="l">
+            <a:lvl6pPr marR="0" lvl="5" algn="l" rtl="0">
               <a:lnSpc>
                 <a:spcPct val="100000"/>
               </a:lnSpc>
@@ -6679,7 +6866,7 @@
               <a:buSzPts val="3200"/>
               <a:buFont typeface="VT323"/>
               <a:buNone/>
-              <a:defRPr b="0" i="0" sz="3200" u="none" cap="none" strike="noStrike">
+              <a:defRPr sz="3200" b="0" i="0" u="none" strike="noStrike" cap="none">
                 <a:solidFill>
                   <a:schemeClr val="dk1"/>
                 </a:solidFill>
@@ -6689,7 +6876,7 @@
                 <a:sym typeface="VT323"/>
               </a:defRPr>
             </a:lvl6pPr>
-            <a:lvl7pPr lvl="6" marR="0" rtl="0" algn="l">
+            <a:lvl7pPr marR="0" lvl="6" algn="l" rtl="0">
               <a:lnSpc>
                 <a:spcPct val="100000"/>
               </a:lnSpc>
@@ -6705,7 +6892,7 @@
               <a:buSzPts val="3200"/>
               <a:buFont typeface="VT323"/>
               <a:buNone/>
-              <a:defRPr b="0" i="0" sz="3200" u="none" cap="none" strike="noStrike">
+              <a:defRPr sz="3200" b="0" i="0" u="none" strike="noStrike" cap="none">
                 <a:solidFill>
                   <a:schemeClr val="dk1"/>
                 </a:solidFill>
@@ -6715,7 +6902,7 @@
                 <a:sym typeface="VT323"/>
               </a:defRPr>
             </a:lvl7pPr>
-            <a:lvl8pPr lvl="7" marR="0" rtl="0" algn="l">
+            <a:lvl8pPr marR="0" lvl="7" algn="l" rtl="0">
               <a:lnSpc>
                 <a:spcPct val="100000"/>
               </a:lnSpc>
@@ -6731,7 +6918,7 @@
               <a:buSzPts val="3200"/>
               <a:buFont typeface="VT323"/>
               <a:buNone/>
-              <a:defRPr b="0" i="0" sz="3200" u="none" cap="none" strike="noStrike">
+              <a:defRPr sz="3200" b="0" i="0" u="none" strike="noStrike" cap="none">
                 <a:solidFill>
                   <a:schemeClr val="dk1"/>
                 </a:solidFill>
@@ -6741,7 +6928,7 @@
                 <a:sym typeface="VT323"/>
               </a:defRPr>
             </a:lvl8pPr>
-            <a:lvl9pPr lvl="8" marR="0" rtl="0" algn="l">
+            <a:lvl9pPr marR="0" lvl="8" algn="l" rtl="0">
               <a:lnSpc>
                 <a:spcPct val="100000"/>
               </a:lnSpc>
@@ -6757,7 +6944,7 @@
               <a:buSzPts val="3200"/>
               <a:buFont typeface="VT323"/>
               <a:buNone/>
-              <a:defRPr b="0" i="0" sz="3200" u="none" cap="none" strike="noStrike">
+              <a:defRPr sz="3200" b="0" i="0" u="none" strike="noStrike" cap="none">
                 <a:solidFill>
                   <a:schemeClr val="dk1"/>
                 </a:solidFill>
@@ -6768,15 +6955,19 @@
               </a:defRPr>
             </a:lvl9pPr>
           </a:lstStyle>
-          <a:p/>
+          <a:p>
+            <a:endParaRPr/>
+          </a:p>
         </p:txBody>
       </p:sp>
       <p:sp>
         <p:nvSpPr>
           <p:cNvPr id="7" name="Google Shape;7;p11"/>
-          <p:cNvSpPr txBox="1"/>
+          <p:cNvSpPr txBox="1">
+            <a:spLocks noGrp="1"/>
+          </p:cNvSpPr>
           <p:nvPr>
-            <p:ph idx="1" type="body"/>
+            <p:ph type="body" idx="1"/>
           </p:nvPr>
         </p:nvSpPr>
         <p:spPr>
@@ -6793,11 +6984,11 @@
           </a:ln>
         </p:spPr>
         <p:txBody>
-          <a:bodyPr anchorCtr="0" anchor="t" bIns="91425" lIns="91425" spcFirstLastPara="1" rIns="91425" wrap="square" tIns="91425">
+          <a:bodyPr spcFirstLastPara="1" wrap="square" lIns="91425" tIns="91425" rIns="91425" bIns="91425" anchor="t" anchorCtr="0">
             <a:noAutofit/>
           </a:bodyPr>
           <a:lstStyle>
-            <a:lvl1pPr indent="-317500" lvl="0" marL="457200" marR="0" rtl="0" algn="l">
+            <a:lvl1pPr marL="457200" marR="0" lvl="0" indent="-317500" algn="l" rtl="0">
               <a:lnSpc>
                 <a:spcPct val="100000"/>
               </a:lnSpc>
@@ -6813,7 +7004,7 @@
               <a:buSzPts val="1400"/>
               <a:buFont typeface="Roboto Mono"/>
               <a:buChar char="●"/>
-              <a:defRPr b="0" i="0" sz="1400" u="none" cap="none" strike="noStrike">
+              <a:defRPr sz="1400" b="0" i="0" u="none" strike="noStrike" cap="none">
                 <a:solidFill>
                   <a:schemeClr val="dk1"/>
                 </a:solidFill>
@@ -6823,7 +7014,7 @@
                 <a:sym typeface="Roboto Mono"/>
               </a:defRPr>
             </a:lvl1pPr>
-            <a:lvl2pPr indent="-317500" lvl="1" marL="914400" marR="0" rtl="0" algn="l">
+            <a:lvl2pPr marL="914400" marR="0" lvl="1" indent="-317500" algn="l" rtl="0">
               <a:lnSpc>
                 <a:spcPct val="100000"/>
               </a:lnSpc>
@@ -6839,7 +7030,7 @@
               <a:buSzPts val="1400"/>
               <a:buFont typeface="Roboto Mono"/>
               <a:buChar char="○"/>
-              <a:defRPr b="0" i="0" sz="1400" u="none" cap="none" strike="noStrike">
+              <a:defRPr sz="1400" b="0" i="0" u="none" strike="noStrike" cap="none">
                 <a:solidFill>
                   <a:schemeClr val="dk1"/>
                 </a:solidFill>
@@ -6849,7 +7040,7 @@
                 <a:sym typeface="Roboto Mono"/>
               </a:defRPr>
             </a:lvl2pPr>
-            <a:lvl3pPr indent="-317500" lvl="2" marL="1371600" marR="0" rtl="0" algn="l">
+            <a:lvl3pPr marL="1371600" marR="0" lvl="2" indent="-317500" algn="l" rtl="0">
               <a:lnSpc>
                 <a:spcPct val="100000"/>
               </a:lnSpc>
@@ -6865,7 +7056,7 @@
               <a:buSzPts val="1400"/>
               <a:buFont typeface="Roboto Mono"/>
               <a:buChar char="■"/>
-              <a:defRPr b="0" i="0" sz="1400" u="none" cap="none" strike="noStrike">
+              <a:defRPr sz="1400" b="0" i="0" u="none" strike="noStrike" cap="none">
                 <a:solidFill>
                   <a:schemeClr val="dk1"/>
                 </a:solidFill>
@@ -6875,7 +7066,7 @@
                 <a:sym typeface="Roboto Mono"/>
               </a:defRPr>
             </a:lvl3pPr>
-            <a:lvl4pPr indent="-317500" lvl="3" marL="1828800" marR="0" rtl="0" algn="l">
+            <a:lvl4pPr marL="1828800" marR="0" lvl="3" indent="-317500" algn="l" rtl="0">
               <a:lnSpc>
                 <a:spcPct val="100000"/>
               </a:lnSpc>
@@ -6891,7 +7082,7 @@
               <a:buSzPts val="1400"/>
               <a:buFont typeface="Roboto Mono"/>
               <a:buChar char="●"/>
-              <a:defRPr b="0" i="0" sz="1400" u="none" cap="none" strike="noStrike">
+              <a:defRPr sz="1400" b="0" i="0" u="none" strike="noStrike" cap="none">
                 <a:solidFill>
                   <a:schemeClr val="dk1"/>
                 </a:solidFill>
@@ -6901,7 +7092,7 @@
                 <a:sym typeface="Roboto Mono"/>
               </a:defRPr>
             </a:lvl4pPr>
-            <a:lvl5pPr indent="-317500" lvl="4" marL="2286000" marR="0" rtl="0" algn="l">
+            <a:lvl5pPr marL="2286000" marR="0" lvl="4" indent="-317500" algn="l" rtl="0">
               <a:lnSpc>
                 <a:spcPct val="100000"/>
               </a:lnSpc>
@@ -6917,7 +7108,7 @@
               <a:buSzPts val="1400"/>
               <a:buFont typeface="Roboto Mono"/>
               <a:buChar char="○"/>
-              <a:defRPr b="0" i="0" sz="1400" u="none" cap="none" strike="noStrike">
+              <a:defRPr sz="1400" b="0" i="0" u="none" strike="noStrike" cap="none">
                 <a:solidFill>
                   <a:schemeClr val="dk1"/>
                 </a:solidFill>
@@ -6927,7 +7118,7 @@
                 <a:sym typeface="Roboto Mono"/>
               </a:defRPr>
             </a:lvl5pPr>
-            <a:lvl6pPr indent="-317500" lvl="5" marL="2743200" marR="0" rtl="0" algn="l">
+            <a:lvl6pPr marL="2743200" marR="0" lvl="5" indent="-317500" algn="l" rtl="0">
               <a:lnSpc>
                 <a:spcPct val="100000"/>
               </a:lnSpc>
@@ -6943,7 +7134,7 @@
               <a:buSzPts val="1400"/>
               <a:buFont typeface="Roboto Mono"/>
               <a:buChar char="■"/>
-              <a:defRPr b="0" i="0" sz="1400" u="none" cap="none" strike="noStrike">
+              <a:defRPr sz="1400" b="0" i="0" u="none" strike="noStrike" cap="none">
                 <a:solidFill>
                   <a:schemeClr val="dk1"/>
                 </a:solidFill>
@@ -6953,7 +7144,7 @@
                 <a:sym typeface="Roboto Mono"/>
               </a:defRPr>
             </a:lvl6pPr>
-            <a:lvl7pPr indent="-317500" lvl="6" marL="3200400" marR="0" rtl="0" algn="l">
+            <a:lvl7pPr marL="3200400" marR="0" lvl="6" indent="-317500" algn="l" rtl="0">
               <a:lnSpc>
                 <a:spcPct val="100000"/>
               </a:lnSpc>
@@ -6969,7 +7160,7 @@
               <a:buSzPts val="1400"/>
               <a:buFont typeface="Roboto Mono"/>
               <a:buChar char="●"/>
-              <a:defRPr b="0" i="0" sz="1400" u="none" cap="none" strike="noStrike">
+              <a:defRPr sz="1400" b="0" i="0" u="none" strike="noStrike" cap="none">
                 <a:solidFill>
                   <a:schemeClr val="dk1"/>
                 </a:solidFill>
@@ -6979,7 +7170,7 @@
                 <a:sym typeface="Roboto Mono"/>
               </a:defRPr>
             </a:lvl7pPr>
-            <a:lvl8pPr indent="-317500" lvl="7" marL="3657600" marR="0" rtl="0" algn="l">
+            <a:lvl8pPr marL="3657600" marR="0" lvl="7" indent="-317500" algn="l" rtl="0">
               <a:lnSpc>
                 <a:spcPct val="100000"/>
               </a:lnSpc>
@@ -6995,7 +7186,7 @@
               <a:buSzPts val="1400"/>
               <a:buFont typeface="Roboto Mono"/>
               <a:buChar char="○"/>
-              <a:defRPr b="0" i="0" sz="1400" u="none" cap="none" strike="noStrike">
+              <a:defRPr sz="1400" b="0" i="0" u="none" strike="noStrike" cap="none">
                 <a:solidFill>
                   <a:schemeClr val="dk1"/>
                 </a:solidFill>
@@ -7005,7 +7196,7 @@
                 <a:sym typeface="Roboto Mono"/>
               </a:defRPr>
             </a:lvl8pPr>
-            <a:lvl9pPr indent="-317500" lvl="8" marL="4114800" marR="0" rtl="0" algn="l">
+            <a:lvl9pPr marL="4114800" marR="0" lvl="8" indent="-317500" algn="l" rtl="0">
               <a:lnSpc>
                 <a:spcPct val="100000"/>
               </a:lnSpc>
@@ -7021,7 +7212,7 @@
               <a:buSzPts val="1400"/>
               <a:buFont typeface="Roboto Mono"/>
               <a:buChar char="■"/>
-              <a:defRPr b="0" i="0" sz="1400" u="none" cap="none" strike="noStrike">
+              <a:defRPr sz="1400" b="0" i="0" u="none" strike="noStrike" cap="none">
                 <a:solidFill>
                   <a:schemeClr val="dk1"/>
                 </a:solidFill>
@@ -7032,12 +7223,14 @@
               </a:defRPr>
             </a:lvl9pPr>
           </a:lstStyle>
-          <a:p/>
+          <a:p>
+            <a:endParaRPr/>
+          </a:p>
         </p:txBody>
       </p:sp>
     </p:spTree>
   </p:cSld>
-  <p:clrMap accent1="accent1" accent2="accent2" accent3="accent3" accent4="accent4" accent5="accent5" accent6="accent6" bg1="lt1" bg2="dk2" tx1="dk1" tx2="lt2" folHlink="folHlink" hlink="hlink"/>
+  <p:clrMap bg1="lt1" tx1="dk1" bg2="dk2" tx2="lt2" accent1="accent1" accent2="accent2" accent3="accent3" accent4="accent4" accent5="accent5" accent6="accent6" hlink="hlink" folHlink="folHlink"/>
   <p:sldLayoutIdLst>
     <p:sldLayoutId id="2147483649" r:id="rId1"/>
     <p:sldLayoutId id="2147483650" r:id="rId2"/>
@@ -7053,10 +7246,10 @@
     <p:sldLayoutId id="2147483660" r:id="rId12"/>
     <p:sldLayoutId id="2147483661" r:id="rId13"/>
   </p:sldLayoutIdLst>
-  <p:hf dt="0" ftr="0" hdr="0"/>
+  <p:hf hdr="0" ftr="0" dt="0"/>
   <p:txStyles>
     <p:titleStyle>
-      <a:defPPr lvl="0" marR="0" rtl="0" algn="l">
+      <a:defPPr marR="0" lvl="0" algn="l" rtl="0">
         <a:lnSpc>
           <a:spcPct val="100000"/>
         </a:lnSpc>
@@ -7067,7 +7260,7 @@
           <a:spcPts val="0"/>
         </a:spcAft>
       </a:defPPr>
-      <a:lvl1pPr lvl="0" marR="0" rtl="0" algn="l">
+      <a:lvl1pPr marR="0" lvl="0" algn="l" rtl="0">
         <a:lnSpc>
           <a:spcPct val="100000"/>
         </a:lnSpc>
@@ -7081,7 +7274,7 @@
           <a:srgbClr val="000000"/>
         </a:buClr>
         <a:buFont typeface="Arial"/>
-        <a:defRPr b="0" i="0" sz="1400" u="none" cap="none" strike="noStrike">
+        <a:defRPr sz="1400" b="0" i="0" u="none" strike="noStrike" cap="none">
           <a:solidFill>
             <a:srgbClr val="000000"/>
           </a:solidFill>
@@ -7091,7 +7284,7 @@
           <a:sym typeface="Arial"/>
         </a:defRPr>
       </a:lvl1pPr>
-      <a:lvl2pPr lvl="1" marR="0" rtl="0" algn="l">
+      <a:lvl2pPr marR="0" lvl="1" algn="l" rtl="0">
         <a:lnSpc>
           <a:spcPct val="100000"/>
         </a:lnSpc>
@@ -7105,7 +7298,7 @@
           <a:srgbClr val="000000"/>
         </a:buClr>
         <a:buFont typeface="Arial"/>
-        <a:defRPr b="0" i="0" sz="1400" u="none" cap="none" strike="noStrike">
+        <a:defRPr sz="1400" b="0" i="0" u="none" strike="noStrike" cap="none">
           <a:solidFill>
             <a:srgbClr val="000000"/>
           </a:solidFill>
@@ -7115,7 +7308,7 @@
           <a:sym typeface="Arial"/>
         </a:defRPr>
       </a:lvl2pPr>
-      <a:lvl3pPr lvl="2" marR="0" rtl="0" algn="l">
+      <a:lvl3pPr marR="0" lvl="2" algn="l" rtl="0">
         <a:lnSpc>
           <a:spcPct val="100000"/>
         </a:lnSpc>
@@ -7129,7 +7322,7 @@
           <a:srgbClr val="000000"/>
         </a:buClr>
         <a:buFont typeface="Arial"/>
-        <a:defRPr b="0" i="0" sz="1400" u="none" cap="none" strike="noStrike">
+        <a:defRPr sz="1400" b="0" i="0" u="none" strike="noStrike" cap="none">
           <a:solidFill>
             <a:srgbClr val="000000"/>
           </a:solidFill>
@@ -7139,7 +7332,7 @@
           <a:sym typeface="Arial"/>
         </a:defRPr>
       </a:lvl3pPr>
-      <a:lvl4pPr lvl="3" marR="0" rtl="0" algn="l">
+      <a:lvl4pPr marR="0" lvl="3" algn="l" rtl="0">
         <a:lnSpc>
           <a:spcPct val="100000"/>
         </a:lnSpc>
@@ -7153,7 +7346,7 @@
           <a:srgbClr val="000000"/>
         </a:buClr>
         <a:buFont typeface="Arial"/>
-        <a:defRPr b="0" i="0" sz="1400" u="none" cap="none" strike="noStrike">
+        <a:defRPr sz="1400" b="0" i="0" u="none" strike="noStrike" cap="none">
           <a:solidFill>
             <a:srgbClr val="000000"/>
           </a:solidFill>
@@ -7163,7 +7356,7 @@
           <a:sym typeface="Arial"/>
         </a:defRPr>
       </a:lvl4pPr>
-      <a:lvl5pPr lvl="4" marR="0" rtl="0" algn="l">
+      <a:lvl5pPr marR="0" lvl="4" algn="l" rtl="0">
         <a:lnSpc>
           <a:spcPct val="100000"/>
         </a:lnSpc>
@@ -7177,7 +7370,7 @@
           <a:srgbClr val="000000"/>
         </a:buClr>
         <a:buFont typeface="Arial"/>
-        <a:defRPr b="0" i="0" sz="1400" u="none" cap="none" strike="noStrike">
+        <a:defRPr sz="1400" b="0" i="0" u="none" strike="noStrike" cap="none">
           <a:solidFill>
             <a:srgbClr val="000000"/>
           </a:solidFill>
@@ -7187,7 +7380,7 @@
           <a:sym typeface="Arial"/>
         </a:defRPr>
       </a:lvl5pPr>
-      <a:lvl6pPr lvl="5" marR="0" rtl="0" algn="l">
+      <a:lvl6pPr marR="0" lvl="5" algn="l" rtl="0">
         <a:lnSpc>
           <a:spcPct val="100000"/>
         </a:lnSpc>
@@ -7201,7 +7394,7 @@
           <a:srgbClr val="000000"/>
         </a:buClr>
         <a:buFont typeface="Arial"/>
-        <a:defRPr b="0" i="0" sz="1400" u="none" cap="none" strike="noStrike">
+        <a:defRPr sz="1400" b="0" i="0" u="none" strike="noStrike" cap="none">
           <a:solidFill>
             <a:srgbClr val="000000"/>
           </a:solidFill>
@@ -7211,7 +7404,7 @@
           <a:sym typeface="Arial"/>
         </a:defRPr>
       </a:lvl6pPr>
-      <a:lvl7pPr lvl="6" marR="0" rtl="0" algn="l">
+      <a:lvl7pPr marR="0" lvl="6" algn="l" rtl="0">
         <a:lnSpc>
           <a:spcPct val="100000"/>
         </a:lnSpc>
@@ -7225,7 +7418,7 @@
           <a:srgbClr val="000000"/>
         </a:buClr>
         <a:buFont typeface="Arial"/>
-        <a:defRPr b="0" i="0" sz="1400" u="none" cap="none" strike="noStrike">
+        <a:defRPr sz="1400" b="0" i="0" u="none" strike="noStrike" cap="none">
           <a:solidFill>
             <a:srgbClr val="000000"/>
           </a:solidFill>
@@ -7235,7 +7428,7 @@
           <a:sym typeface="Arial"/>
         </a:defRPr>
       </a:lvl7pPr>
-      <a:lvl8pPr lvl="7" marR="0" rtl="0" algn="l">
+      <a:lvl8pPr marR="0" lvl="7" algn="l" rtl="0">
         <a:lnSpc>
           <a:spcPct val="100000"/>
         </a:lnSpc>
@@ -7249,7 +7442,7 @@
           <a:srgbClr val="000000"/>
         </a:buClr>
         <a:buFont typeface="Arial"/>
-        <a:defRPr b="0" i="0" sz="1400" u="none" cap="none" strike="noStrike">
+        <a:defRPr sz="1400" b="0" i="0" u="none" strike="noStrike" cap="none">
           <a:solidFill>
             <a:srgbClr val="000000"/>
           </a:solidFill>
@@ -7259,7 +7452,7 @@
           <a:sym typeface="Arial"/>
         </a:defRPr>
       </a:lvl8pPr>
-      <a:lvl9pPr lvl="8" marR="0" rtl="0" algn="l">
+      <a:lvl9pPr marR="0" lvl="8" algn="l" rtl="0">
         <a:lnSpc>
           <a:spcPct val="100000"/>
         </a:lnSpc>
@@ -7273,7 +7466,7 @@
           <a:srgbClr val="000000"/>
         </a:buClr>
         <a:buFont typeface="Arial"/>
-        <a:defRPr b="0" i="0" sz="1400" u="none" cap="none" strike="noStrike">
+        <a:defRPr sz="1400" b="0" i="0" u="none" strike="noStrike" cap="none">
           <a:solidFill>
             <a:srgbClr val="000000"/>
           </a:solidFill>
@@ -7285,7 +7478,7 @@
       </a:lvl9pPr>
     </p:titleStyle>
     <p:bodyStyle>
-      <a:defPPr lvl="0" marR="0" rtl="0" algn="l">
+      <a:defPPr marR="0" lvl="0" algn="l" rtl="0">
         <a:lnSpc>
           <a:spcPct val="100000"/>
         </a:lnSpc>
@@ -7296,7 +7489,7 @@
           <a:spcPts val="0"/>
         </a:spcAft>
       </a:defPPr>
-      <a:lvl1pPr lvl="0" marR="0" rtl="0" algn="l">
+      <a:lvl1pPr marR="0" lvl="0" algn="l" rtl="0">
         <a:lnSpc>
           <a:spcPct val="100000"/>
         </a:lnSpc>
@@ -7310,7 +7503,7 @@
           <a:srgbClr val="000000"/>
         </a:buClr>
         <a:buFont typeface="Arial"/>
-        <a:defRPr b="0" i="0" sz="1400" u="none" cap="none" strike="noStrike">
+        <a:defRPr sz="1400" b="0" i="0" u="none" strike="noStrike" cap="none">
           <a:solidFill>
             <a:srgbClr val="000000"/>
           </a:solidFill>
@@ -7320,7 +7513,7 @@
           <a:sym typeface="Arial"/>
         </a:defRPr>
       </a:lvl1pPr>
-      <a:lvl2pPr lvl="1" marR="0" rtl="0" algn="l">
+      <a:lvl2pPr marR="0" lvl="1" algn="l" rtl="0">
         <a:lnSpc>
           <a:spcPct val="100000"/>
         </a:lnSpc>
@@ -7334,7 +7527,7 @@
           <a:srgbClr val="000000"/>
         </a:buClr>
         <a:buFont typeface="Arial"/>
-        <a:defRPr b="0" i="0" sz="1400" u="none" cap="none" strike="noStrike">
+        <a:defRPr sz="1400" b="0" i="0" u="none" strike="noStrike" cap="none">
           <a:solidFill>
             <a:srgbClr val="000000"/>
           </a:solidFill>
@@ -7344,7 +7537,7 @@
           <a:sym typeface="Arial"/>
         </a:defRPr>
       </a:lvl2pPr>
-      <a:lvl3pPr lvl="2" marR="0" rtl="0" algn="l">
+      <a:lvl3pPr marR="0" lvl="2" algn="l" rtl="0">
         <a:lnSpc>
           <a:spcPct val="100000"/>
         </a:lnSpc>
@@ -7358,7 +7551,7 @@
           <a:srgbClr val="000000"/>
         </a:buClr>
         <a:buFont typeface="Arial"/>
-        <a:defRPr b="0" i="0" sz="1400" u="none" cap="none" strike="noStrike">
+        <a:defRPr sz="1400" b="0" i="0" u="none" strike="noStrike" cap="none">
           <a:solidFill>
             <a:srgbClr val="000000"/>
           </a:solidFill>
@@ -7368,7 +7561,7 @@
           <a:sym typeface="Arial"/>
         </a:defRPr>
       </a:lvl3pPr>
-      <a:lvl4pPr lvl="3" marR="0" rtl="0" algn="l">
+      <a:lvl4pPr marR="0" lvl="3" algn="l" rtl="0">
         <a:lnSpc>
           <a:spcPct val="100000"/>
         </a:lnSpc>
@@ -7382,7 +7575,7 @@
           <a:srgbClr val="000000"/>
         </a:buClr>
         <a:buFont typeface="Arial"/>
-        <a:defRPr b="0" i="0" sz="1400" u="none" cap="none" strike="noStrike">
+        <a:defRPr sz="1400" b="0" i="0" u="none" strike="noStrike" cap="none">
           <a:solidFill>
             <a:srgbClr val="000000"/>
           </a:solidFill>
@@ -7392,7 +7585,7 @@
           <a:sym typeface="Arial"/>
         </a:defRPr>
       </a:lvl4pPr>
-      <a:lvl5pPr lvl="4" marR="0" rtl="0" algn="l">
+      <a:lvl5pPr marR="0" lvl="4" algn="l" rtl="0">
         <a:lnSpc>
           <a:spcPct val="100000"/>
         </a:lnSpc>
@@ -7406,7 +7599,7 @@
           <a:srgbClr val="000000"/>
         </a:buClr>
         <a:buFont typeface="Arial"/>
-        <a:defRPr b="0" i="0" sz="1400" u="none" cap="none" strike="noStrike">
+        <a:defRPr sz="1400" b="0" i="0" u="none" strike="noStrike" cap="none">
           <a:solidFill>
             <a:srgbClr val="000000"/>
           </a:solidFill>
@@ -7416,7 +7609,7 @@
           <a:sym typeface="Arial"/>
         </a:defRPr>
       </a:lvl5pPr>
-      <a:lvl6pPr lvl="5" marR="0" rtl="0" algn="l">
+      <a:lvl6pPr marR="0" lvl="5" algn="l" rtl="0">
         <a:lnSpc>
           <a:spcPct val="100000"/>
         </a:lnSpc>
@@ -7430,7 +7623,7 @@
           <a:srgbClr val="000000"/>
         </a:buClr>
         <a:buFont typeface="Arial"/>
-        <a:defRPr b="0" i="0" sz="1400" u="none" cap="none" strike="noStrike">
+        <a:defRPr sz="1400" b="0" i="0" u="none" strike="noStrike" cap="none">
           <a:solidFill>
             <a:srgbClr val="000000"/>
           </a:solidFill>
@@ -7440,7 +7633,7 @@
           <a:sym typeface="Arial"/>
         </a:defRPr>
       </a:lvl6pPr>
-      <a:lvl7pPr lvl="6" marR="0" rtl="0" algn="l">
+      <a:lvl7pPr marR="0" lvl="6" algn="l" rtl="0">
         <a:lnSpc>
           <a:spcPct val="100000"/>
         </a:lnSpc>
@@ -7454,7 +7647,7 @@
           <a:srgbClr val="000000"/>
         </a:buClr>
         <a:buFont typeface="Arial"/>
-        <a:defRPr b="0" i="0" sz="1400" u="none" cap="none" strike="noStrike">
+        <a:defRPr sz="1400" b="0" i="0" u="none" strike="noStrike" cap="none">
           <a:solidFill>
             <a:srgbClr val="000000"/>
           </a:solidFill>
@@ -7464,7 +7657,7 @@
           <a:sym typeface="Arial"/>
         </a:defRPr>
       </a:lvl7pPr>
-      <a:lvl8pPr lvl="7" marR="0" rtl="0" algn="l">
+      <a:lvl8pPr marR="0" lvl="7" algn="l" rtl="0">
         <a:lnSpc>
           <a:spcPct val="100000"/>
         </a:lnSpc>
@@ -7478,7 +7671,7 @@
           <a:srgbClr val="000000"/>
         </a:buClr>
         <a:buFont typeface="Arial"/>
-        <a:defRPr b="0" i="0" sz="1400" u="none" cap="none" strike="noStrike">
+        <a:defRPr sz="1400" b="0" i="0" u="none" strike="noStrike" cap="none">
           <a:solidFill>
             <a:srgbClr val="000000"/>
           </a:solidFill>
@@ -7488,7 +7681,7 @@
           <a:sym typeface="Arial"/>
         </a:defRPr>
       </a:lvl8pPr>
-      <a:lvl9pPr lvl="8" marR="0" rtl="0" algn="l">
+      <a:lvl9pPr marR="0" lvl="8" algn="l" rtl="0">
         <a:lnSpc>
           <a:spcPct val="100000"/>
         </a:lnSpc>
@@ -7502,7 +7695,7 @@
           <a:srgbClr val="000000"/>
         </a:buClr>
         <a:buFont typeface="Arial"/>
-        <a:defRPr b="0" i="0" sz="1400" u="none" cap="none" strike="noStrike">
+        <a:defRPr sz="1400" b="0" i="0" u="none" strike="noStrike" cap="none">
           <a:solidFill>
             <a:srgbClr val="000000"/>
           </a:solidFill>
@@ -7514,7 +7707,7 @@
       </a:lvl9pPr>
     </p:bodyStyle>
     <p:otherStyle>
-      <a:defPPr lvl="0" marR="0" rtl="0" algn="l">
+      <a:defPPr marR="0" lvl="0" algn="l" rtl="0">
         <a:lnSpc>
           <a:spcPct val="100000"/>
         </a:lnSpc>
@@ -7525,7 +7718,7 @@
           <a:spcPts val="0"/>
         </a:spcAft>
       </a:defPPr>
-      <a:lvl1pPr lvl="0" marR="0" rtl="0" algn="l">
+      <a:lvl1pPr marR="0" lvl="0" algn="l" rtl="0">
         <a:lnSpc>
           <a:spcPct val="100000"/>
         </a:lnSpc>
@@ -7539,7 +7732,7 @@
           <a:srgbClr val="000000"/>
         </a:buClr>
         <a:buFont typeface="Arial"/>
-        <a:defRPr b="0" i="0" sz="1400" u="none" cap="none" strike="noStrike">
+        <a:defRPr sz="1400" b="0" i="0" u="none" strike="noStrike" cap="none">
           <a:solidFill>
             <a:srgbClr val="000000"/>
           </a:solidFill>
@@ -7549,7 +7742,7 @@
           <a:sym typeface="Arial"/>
         </a:defRPr>
       </a:lvl1pPr>
-      <a:lvl2pPr lvl="1" marR="0" rtl="0" algn="l">
+      <a:lvl2pPr marR="0" lvl="1" algn="l" rtl="0">
         <a:lnSpc>
           <a:spcPct val="100000"/>
         </a:lnSpc>
@@ -7563,7 +7756,7 @@
           <a:srgbClr val="000000"/>
         </a:buClr>
         <a:buFont typeface="Arial"/>
-        <a:defRPr b="0" i="0" sz="1400" u="none" cap="none" strike="noStrike">
+        <a:defRPr sz="1400" b="0" i="0" u="none" strike="noStrike" cap="none">
           <a:solidFill>
             <a:srgbClr val="000000"/>
           </a:solidFill>
@@ -7573,7 +7766,7 @@
           <a:sym typeface="Arial"/>
         </a:defRPr>
       </a:lvl2pPr>
-      <a:lvl3pPr lvl="2" marR="0" rtl="0" algn="l">
+      <a:lvl3pPr marR="0" lvl="2" algn="l" rtl="0">
         <a:lnSpc>
           <a:spcPct val="100000"/>
         </a:lnSpc>
@@ -7587,7 +7780,7 @@
           <a:srgbClr val="000000"/>
         </a:buClr>
         <a:buFont typeface="Arial"/>
-        <a:defRPr b="0" i="0" sz="1400" u="none" cap="none" strike="noStrike">
+        <a:defRPr sz="1400" b="0" i="0" u="none" strike="noStrike" cap="none">
           <a:solidFill>
             <a:srgbClr val="000000"/>
           </a:solidFill>
@@ -7597,7 +7790,7 @@
           <a:sym typeface="Arial"/>
         </a:defRPr>
       </a:lvl3pPr>
-      <a:lvl4pPr lvl="3" marR="0" rtl="0" algn="l">
+      <a:lvl4pPr marR="0" lvl="3" algn="l" rtl="0">
         <a:lnSpc>
           <a:spcPct val="100000"/>
         </a:lnSpc>
@@ -7611,7 +7804,7 @@
           <a:srgbClr val="000000"/>
         </a:buClr>
         <a:buFont typeface="Arial"/>
-        <a:defRPr b="0" i="0" sz="1400" u="none" cap="none" strike="noStrike">
+        <a:defRPr sz="1400" b="0" i="0" u="none" strike="noStrike" cap="none">
           <a:solidFill>
             <a:srgbClr val="000000"/>
           </a:solidFill>
@@ -7621,7 +7814,7 @@
           <a:sym typeface="Arial"/>
         </a:defRPr>
       </a:lvl4pPr>
-      <a:lvl5pPr lvl="4" marR="0" rtl="0" algn="l">
+      <a:lvl5pPr marR="0" lvl="4" algn="l" rtl="0">
         <a:lnSpc>
           <a:spcPct val="100000"/>
         </a:lnSpc>
@@ -7635,7 +7828,7 @@
           <a:srgbClr val="000000"/>
         </a:buClr>
         <a:buFont typeface="Arial"/>
-        <a:defRPr b="0" i="0" sz="1400" u="none" cap="none" strike="noStrike">
+        <a:defRPr sz="1400" b="0" i="0" u="none" strike="noStrike" cap="none">
           <a:solidFill>
             <a:srgbClr val="000000"/>
           </a:solidFill>
@@ -7645,7 +7838,7 @@
           <a:sym typeface="Arial"/>
         </a:defRPr>
       </a:lvl5pPr>
-      <a:lvl6pPr lvl="5" marR="0" rtl="0" algn="l">
+      <a:lvl6pPr marR="0" lvl="5" algn="l" rtl="0">
         <a:lnSpc>
           <a:spcPct val="100000"/>
         </a:lnSpc>
@@ -7659,7 +7852,7 @@
           <a:srgbClr val="000000"/>
         </a:buClr>
         <a:buFont typeface="Arial"/>
-        <a:defRPr b="0" i="0" sz="1400" u="none" cap="none" strike="noStrike">
+        <a:defRPr sz="1400" b="0" i="0" u="none" strike="noStrike" cap="none">
           <a:solidFill>
             <a:srgbClr val="000000"/>
           </a:solidFill>
@@ -7669,7 +7862,7 @@
           <a:sym typeface="Arial"/>
         </a:defRPr>
       </a:lvl6pPr>
-      <a:lvl7pPr lvl="6" marR="0" rtl="0" algn="l">
+      <a:lvl7pPr marR="0" lvl="6" algn="l" rtl="0">
         <a:lnSpc>
           <a:spcPct val="100000"/>
         </a:lnSpc>
@@ -7683,7 +7876,7 @@
           <a:srgbClr val="000000"/>
         </a:buClr>
         <a:buFont typeface="Arial"/>
-        <a:defRPr b="0" i="0" sz="1400" u="none" cap="none" strike="noStrike">
+        <a:defRPr sz="1400" b="0" i="0" u="none" strike="noStrike" cap="none">
           <a:solidFill>
             <a:srgbClr val="000000"/>
           </a:solidFill>
@@ -7693,7 +7886,7 @@
           <a:sym typeface="Arial"/>
         </a:defRPr>
       </a:lvl7pPr>
-      <a:lvl8pPr lvl="7" marR="0" rtl="0" algn="l">
+      <a:lvl8pPr marR="0" lvl="7" algn="l" rtl="0">
         <a:lnSpc>
           <a:spcPct val="100000"/>
         </a:lnSpc>
@@ -7707,7 +7900,7 @@
           <a:srgbClr val="000000"/>
         </a:buClr>
         <a:buFont typeface="Arial"/>
-        <a:defRPr b="0" i="0" sz="1400" u="none" cap="none" strike="noStrike">
+        <a:defRPr sz="1400" b="0" i="0" u="none" strike="noStrike" cap="none">
           <a:solidFill>
             <a:srgbClr val="000000"/>
           </a:solidFill>
@@ -7717,7 +7910,7 @@
           <a:sym typeface="Arial"/>
         </a:defRPr>
       </a:lvl8pPr>
-      <a:lvl9pPr lvl="8" marR="0" rtl="0" algn="l">
+      <a:lvl9pPr marR="0" lvl="8" algn="l" rtl="0">
         <a:lnSpc>
           <a:spcPct val="100000"/>
         </a:lnSpc>
@@ -7731,7 +7924,7 @@
           <a:srgbClr val="000000"/>
         </a:buClr>
         <a:buFont typeface="Arial"/>
-        <a:defRPr b="0" i="0" sz="1400" u="none" cap="none" strike="noStrike">
+        <a:defRPr sz="1400" b="0" i="0" u="none" strike="noStrike" cap="none">
           <a:solidFill>
             <a:srgbClr val="000000"/>
           </a:solidFill>
@@ -7747,11 +7940,11 @@
 </file>
 
 <file path=ppt/slides/slide1.xml><?xml version="1.0" encoding="utf-8"?>
-<p:sld xmlns:a="http://schemas.openxmlformats.org/drawingml/2006/main" xmlns:r="http://schemas.openxmlformats.org/officeDocument/2006/relationships" xmlns:mc="http://schemas.openxmlformats.org/markup-compatibility/2006" xmlns:mv="urn:schemas-microsoft-com:mac:vml" xmlns:p="http://schemas.openxmlformats.org/presentationml/2006/main" xmlns:c="http://schemas.openxmlformats.org/drawingml/2006/chart" xmlns:dgm="http://schemas.openxmlformats.org/drawingml/2006/diagram" xmlns:o="urn:schemas-microsoft-com:office:office" xmlns:v="urn:schemas-microsoft-com:vml" xmlns:pvml="urn:schemas-microsoft-com:office:powerpoint" xmlns:com="http://schemas.openxmlformats.org/drawingml/2006/compatibility" xmlns:p14="http://schemas.microsoft.com/office/powerpoint/2010/main" xmlns:p15="http://schemas.microsoft.com/office/powerpoint/2012/main" xmlns:ahyp="http://schemas.microsoft.com/office/drawing/2018/hyperlinkcolor">
+<p:sld xmlns:a="http://schemas.openxmlformats.org/drawingml/2006/main" xmlns:r="http://schemas.openxmlformats.org/officeDocument/2006/relationships" xmlns:p="http://schemas.openxmlformats.org/presentationml/2006/main">
   <p:cSld>
     <p:spTree>
       <p:nvGrpSpPr>
-        <p:cNvPr id="80" name="Shape 80"/>
+        <p:cNvPr id="1" name="Shape 80"/>
         <p:cNvGrpSpPr/>
         <p:nvPr/>
       </p:nvGrpSpPr>
@@ -7766,16 +7959,18 @@
       <p:pic>
         <p:nvPicPr>
           <p:cNvPr id="81" name="Google Shape;81;p1"/>
-          <p:cNvPicPr preferRelativeResize="0"/>
+          <p:cNvPicPr preferRelativeResize="0">
+            <a:picLocks noGrp="1"/>
+          </p:cNvPicPr>
           <p:nvPr>
-            <p:ph idx="2" type="pic"/>
+            <p:ph type="pic" idx="2"/>
           </p:nvPr>
         </p:nvPicPr>
         <p:blipFill rotWithShape="1">
           <a:blip r:embed="rId3">
             <a:alphaModFix/>
           </a:blip>
-          <a:srcRect b="0" l="0" r="0" t="0"/>
+          <a:srcRect/>
           <a:stretch/>
         </p:blipFill>
         <p:spPr>
@@ -7787,21 +7982,23 @@
             <a:avLst/>
           </a:prstGeom>
           <a:noFill/>
-          <a:ln cap="flat" cmpd="sng" w="19050">
+          <a:ln w="19050" cap="flat" cmpd="sng">
             <a:solidFill>
               <a:schemeClr val="dk2"/>
             </a:solidFill>
             <a:prstDash val="solid"/>
             <a:round/>
-            <a:headEnd len="sm" w="sm" type="none"/>
-            <a:tailEnd len="sm" w="sm" type="none"/>
+            <a:headEnd type="none" w="sm" len="sm"/>
+            <a:tailEnd type="none" w="sm" len="sm"/>
           </a:ln>
         </p:spPr>
       </p:pic>
       <p:sp>
         <p:nvSpPr>
           <p:cNvPr id="82" name="Google Shape;82;p1"/>
-          <p:cNvSpPr txBox="1"/>
+          <p:cNvSpPr txBox="1">
+            <a:spLocks noGrp="1"/>
+          </p:cNvSpPr>
           <p:nvPr>
             <p:ph type="ctrTitle"/>
           </p:nvPr>
@@ -7820,12 +8017,12 @@
           </a:ln>
         </p:spPr>
         <p:txBody>
-          <a:bodyPr anchorCtr="0" anchor="t" bIns="91425" lIns="91425" spcFirstLastPara="1" rIns="91425" wrap="square" tIns="91425">
+          <a:bodyPr spcFirstLastPara="1" wrap="square" lIns="91425" tIns="91425" rIns="91425" bIns="91425" anchor="t" anchorCtr="0">
             <a:noAutofit/>
           </a:bodyPr>
           <a:lstStyle/>
           <a:p>
-            <a:pPr indent="0" lvl="0" marL="0" rtl="0" algn="l">
+            <a:pPr marL="0" lvl="0" indent="0" algn="l" rtl="0">
               <a:lnSpc>
                 <a:spcPct val="80000"/>
               </a:lnSpc>
@@ -7866,12 +8063,12 @@
           </a:ln>
         </p:spPr>
         <p:txBody>
-          <a:bodyPr anchorCtr="0" anchor="ctr" bIns="0" lIns="0" spcFirstLastPara="1" rIns="0" wrap="square" tIns="0">
+          <a:bodyPr spcFirstLastPara="1" wrap="square" lIns="0" tIns="0" rIns="0" bIns="0" anchor="ctr" anchorCtr="0">
             <a:noAutofit/>
           </a:bodyPr>
           <a:lstStyle/>
           <a:p>
-            <a:pPr indent="0" lvl="0" marL="0" marR="0" rtl="0" algn="l">
+            <a:pPr marL="0" marR="0" lvl="0" indent="0" algn="l" rtl="0">
               <a:lnSpc>
                 <a:spcPct val="100000"/>
               </a:lnSpc>
@@ -7889,7 +8086,7 @@
               <a:buNone/>
             </a:pPr>
             <a:r>
-              <a:rPr b="0" i="0" lang="hu-HU" sz="1600" u="none" cap="none" strike="noStrike">
+              <a:rPr lang="hu-HU" sz="1600" b="0" i="0" u="none" strike="noStrike" cap="none">
                 <a:solidFill>
                   <a:schemeClr val="dk1"/>
                 </a:solidFill>
@@ -7900,7 +8097,7 @@
               </a:rPr>
               <a:t>Bakos Rózsa Ajándék, Kálmán Előd Arto, Németh Bence Máté, Nyerges Bálint</a:t>
             </a:r>
-            <a:endParaRPr b="0" i="0" sz="1600" u="none" cap="none" strike="noStrike">
+            <a:endParaRPr sz="1600" b="0" i="0" u="none" strike="noStrike" cap="none">
               <a:solidFill>
                 <a:schemeClr val="dk1"/>
               </a:solidFill>
@@ -7921,11 +8118,11 @@
 </file>
 
 <file path=ppt/slides/slide10.xml><?xml version="1.0" encoding="utf-8"?>
-<p:sld xmlns:a="http://schemas.openxmlformats.org/drawingml/2006/main" xmlns:r="http://schemas.openxmlformats.org/officeDocument/2006/relationships" xmlns:mc="http://schemas.openxmlformats.org/markup-compatibility/2006" xmlns:mv="urn:schemas-microsoft-com:mac:vml" xmlns:p="http://schemas.openxmlformats.org/presentationml/2006/main" xmlns:c="http://schemas.openxmlformats.org/drawingml/2006/chart" xmlns:dgm="http://schemas.openxmlformats.org/drawingml/2006/diagram" xmlns:o="urn:schemas-microsoft-com:office:office" xmlns:v="urn:schemas-microsoft-com:vml" xmlns:pvml="urn:schemas-microsoft-com:office:powerpoint" xmlns:com="http://schemas.openxmlformats.org/drawingml/2006/compatibility" xmlns:p14="http://schemas.microsoft.com/office/powerpoint/2010/main" xmlns:p15="http://schemas.microsoft.com/office/powerpoint/2012/main" xmlns:ahyp="http://schemas.microsoft.com/office/drawing/2018/hyperlinkcolor">
+<p:sld xmlns:a="http://schemas.openxmlformats.org/drawingml/2006/main" xmlns:r="http://schemas.openxmlformats.org/officeDocument/2006/relationships" xmlns:p="http://schemas.openxmlformats.org/presentationml/2006/main">
   <p:cSld>
     <p:spTree>
       <p:nvGrpSpPr>
-        <p:cNvPr id="147" name="Shape 147"/>
+        <p:cNvPr id="1" name="Shape 147"/>
         <p:cNvGrpSpPr/>
         <p:nvPr/>
       </p:nvGrpSpPr>
@@ -7940,7 +8137,9 @@
       <p:sp>
         <p:nvSpPr>
           <p:cNvPr id="148" name="Google Shape;148;p9"/>
-          <p:cNvSpPr txBox="1"/>
+          <p:cNvSpPr txBox="1">
+            <a:spLocks noGrp="1"/>
+          </p:cNvSpPr>
           <p:nvPr>
             <p:ph type="title"/>
           </p:nvPr>
@@ -7959,12 +8158,12 @@
           </a:ln>
         </p:spPr>
         <p:txBody>
-          <a:bodyPr anchorCtr="0" anchor="t" bIns="91425" lIns="91425" spcFirstLastPara="1" rIns="91425" wrap="square" tIns="91425">
+          <a:bodyPr spcFirstLastPara="1" wrap="square" lIns="91425" tIns="91425" rIns="91425" bIns="91425" anchor="t" anchorCtr="0">
             <a:noAutofit/>
           </a:bodyPr>
           <a:lstStyle/>
           <a:p>
-            <a:pPr indent="0" lvl="0" marL="0" rtl="0" algn="ctr">
+            <a:pPr marL="0" lvl="0" indent="0" algn="ctr" rtl="0">
               <a:lnSpc>
                 <a:spcPct val="100000"/>
               </a:lnSpc>
@@ -7993,7 +8192,7 @@
         </p:nvGraphicFramePr>
         <p:xfrm>
           <a:off x="638700" y="1493075"/>
-          <a:ext cx="3000000" cy="3000000"/>
+          <a:ext cx="7866600" cy="3139380"/>
         </p:xfrm>
         <a:graphic>
           <a:graphicData uri="http://schemas.openxmlformats.org/drawingml/2006/table">
@@ -8003,8 +8202,20 @@
                 <a:tableStyleId>{C2F0EE53-DDDD-4665-9FFD-D7E5BF6FAD8F}</a:tableStyleId>
               </a:tblPr>
               <a:tblGrid>
-                <a:gridCol w="3933300"/>
-                <a:gridCol w="3933300"/>
+                <a:gridCol w="3933300">
+                  <a:extLst>
+                    <a:ext uri="{9D8B030D-6E8A-4147-A177-3AD203B41FA5}">
+                      <a16:colId xmlns:a16="http://schemas.microsoft.com/office/drawing/2014/main" val="20000"/>
+                    </a:ext>
+                  </a:extLst>
+                </a:gridCol>
+                <a:gridCol w="3933300">
+                  <a:extLst>
+                    <a:ext uri="{9D8B030D-6E8A-4147-A177-3AD203B41FA5}">
+                      <a16:colId xmlns:a16="http://schemas.microsoft.com/office/drawing/2014/main" val="20001"/>
+                    </a:ext>
+                  </a:extLst>
+                </a:gridCol>
               </a:tblGrid>
               <a:tr h="1456625">
                 <a:tc>
@@ -8012,7 +8223,7 @@
                     <a:bodyPr/>
                     <a:lstStyle/>
                     <a:p>
-                      <a:pPr indent="0" lvl="0" marL="0" rtl="0" algn="l">
+                      <a:pPr marL="0" lvl="0" indent="0" algn="l" rtl="0">
                         <a:spcBef>
                           <a:spcPts val="0"/>
                         </a:spcBef>
@@ -8028,7 +8239,7 @@
                       <a:endParaRPr/>
                     </a:p>
                     <a:p>
-                      <a:pPr indent="0" lvl="0" marL="0" rtl="0" algn="l">
+                      <a:pPr marL="0" lvl="0" indent="0" algn="l" rtl="0">
                         <a:spcBef>
                           <a:spcPts val="0"/>
                         </a:spcBef>
@@ -8037,13 +8248,10 @@
                         </a:spcAft>
                         <a:buNone/>
                       </a:pPr>
-                      <a:r>
-                        <a:t/>
-                      </a:r>
                       <a:endParaRPr/>
                     </a:p>
                     <a:p>
-                      <a:pPr indent="0" lvl="0" marL="0" rtl="0" algn="l">
+                      <a:pPr marL="0" lvl="0" indent="0" algn="l" rtl="0">
                         <a:spcBef>
                           <a:spcPts val="0"/>
                         </a:spcBef>
@@ -8059,7 +8267,7 @@
                       <a:endParaRPr/>
                     </a:p>
                     <a:p>
-                      <a:pPr indent="0" lvl="0" marL="0" rtl="0" algn="l">
+                      <a:pPr marL="0" lvl="0" indent="0" algn="l" rtl="0">
                         <a:spcBef>
                           <a:spcPts val="0"/>
                         </a:spcBef>
@@ -8068,13 +8276,10 @@
                         </a:spcAft>
                         <a:buNone/>
                       </a:pPr>
-                      <a:r>
-                        <a:t/>
-                      </a:r>
                       <a:endParaRPr/>
                     </a:p>
                     <a:p>
-                      <a:pPr indent="0" lvl="0" marL="0" rtl="0" algn="l">
+                      <a:pPr marL="0" lvl="0" indent="0" algn="l" rtl="0">
                         <a:spcBef>
                           <a:spcPts val="0"/>
                         </a:spcBef>
@@ -8090,14 +8295,14 @@
                       <a:endParaRPr/>
                     </a:p>
                   </a:txBody>
-                  <a:tcPr marT="91425" marB="91425" marR="91425" marL="91425"/>
+                  <a:tcPr marL="91425" marR="91425" marT="91425" marB="91425"/>
                 </a:tc>
                 <a:tc>
                   <a:txBody>
                     <a:bodyPr/>
                     <a:lstStyle/>
                     <a:p>
-                      <a:pPr indent="0" lvl="0" marL="0" rtl="0" algn="l">
+                      <a:pPr marL="0" lvl="0" indent="0" algn="l" rtl="0">
                         <a:spcBef>
                           <a:spcPts val="0"/>
                         </a:spcBef>
@@ -8113,7 +8318,7 @@
                       <a:endParaRPr/>
                     </a:p>
                     <a:p>
-                      <a:pPr indent="0" lvl="0" marL="0" rtl="0" algn="l">
+                      <a:pPr marL="0" lvl="0" indent="0" algn="l" rtl="0">
                         <a:spcBef>
                           <a:spcPts val="0"/>
                         </a:spcBef>
@@ -8122,13 +8327,10 @@
                         </a:spcAft>
                         <a:buNone/>
                       </a:pPr>
-                      <a:r>
-                        <a:t/>
-                      </a:r>
                       <a:endParaRPr/>
                     </a:p>
                     <a:p>
-                      <a:pPr indent="0" lvl="0" marL="0" rtl="0" algn="l">
+                      <a:pPr marL="0" lvl="0" indent="0" algn="l" rtl="0">
                         <a:spcBef>
                           <a:spcPts val="0"/>
                         </a:spcBef>
@@ -8144,8 +8346,13 @@
                       <a:endParaRPr/>
                     </a:p>
                   </a:txBody>
-                  <a:tcPr marT="91425" marB="91425" marR="91425" marL="91425"/>
+                  <a:tcPr marL="91425" marR="91425" marT="91425" marB="91425"/>
                 </a:tc>
+                <a:extLst>
+                  <a:ext uri="{0D108BD9-81ED-4DB2-BD59-A6C34878D82A}">
+                    <a16:rowId xmlns:a16="http://schemas.microsoft.com/office/drawing/2014/main" val="10000"/>
+                  </a:ext>
+                </a:extLst>
               </a:tr>
               <a:tr h="557900">
                 <a:tc>
@@ -8153,7 +8360,7 @@
                     <a:bodyPr/>
                     <a:lstStyle/>
                     <a:p>
-                      <a:pPr indent="0" lvl="0" marL="0" rtl="0" algn="l">
+                      <a:pPr marL="0" lvl="0" indent="0" algn="l" rtl="0">
                         <a:spcBef>
                           <a:spcPts val="0"/>
                         </a:spcBef>
@@ -8169,7 +8376,7 @@
                       <a:endParaRPr/>
                     </a:p>
                     <a:p>
-                      <a:pPr indent="0" lvl="0" marL="0" rtl="0" algn="l">
+                      <a:pPr marL="0" lvl="0" indent="0" algn="l" rtl="0">
                         <a:spcBef>
                           <a:spcPts val="0"/>
                         </a:spcBef>
@@ -8178,13 +8385,10 @@
                         </a:spcAft>
                         <a:buNone/>
                       </a:pPr>
-                      <a:r>
-                        <a:t/>
-                      </a:r>
                       <a:endParaRPr/>
                     </a:p>
                     <a:p>
-                      <a:pPr indent="0" lvl="0" marL="0" rtl="0" algn="l">
+                      <a:pPr marL="0" lvl="0" indent="0" algn="l" rtl="0">
                         <a:spcBef>
                           <a:spcPts val="0"/>
                         </a:spcBef>
@@ -8200,7 +8404,7 @@
                       <a:endParaRPr/>
                     </a:p>
                     <a:p>
-                      <a:pPr indent="0" lvl="0" marL="0" rtl="0" algn="l">
+                      <a:pPr marL="0" lvl="0" indent="0" algn="l" rtl="0">
                         <a:spcBef>
                           <a:spcPts val="0"/>
                         </a:spcBef>
@@ -8209,13 +8413,10 @@
                         </a:spcAft>
                         <a:buNone/>
                       </a:pPr>
-                      <a:r>
-                        <a:t/>
-                      </a:r>
                       <a:endParaRPr/>
                     </a:p>
                     <a:p>
-                      <a:pPr indent="0" lvl="0" marL="0" rtl="0" algn="l">
+                      <a:pPr marL="0" lvl="0" indent="0" algn="l" rtl="0">
                         <a:spcBef>
                           <a:spcPts val="0"/>
                         </a:spcBef>
@@ -8231,14 +8432,14 @@
                       <a:endParaRPr/>
                     </a:p>
                   </a:txBody>
-                  <a:tcPr marT="91425" marB="91425" marR="91425" marL="91425"/>
+                  <a:tcPr marL="91425" marR="91425" marT="91425" marB="91425"/>
                 </a:tc>
                 <a:tc>
                   <a:txBody>
                     <a:bodyPr/>
                     <a:lstStyle/>
                     <a:p>
-                      <a:pPr indent="0" lvl="0" marL="0" rtl="0" algn="l">
+                      <a:pPr marL="0" lvl="0" indent="0" algn="l" rtl="0">
                         <a:spcBef>
                           <a:spcPts val="0"/>
                         </a:spcBef>
@@ -8254,7 +8455,7 @@
                       <a:endParaRPr/>
                     </a:p>
                     <a:p>
-                      <a:pPr indent="0" lvl="0" marL="0" rtl="0" algn="l">
+                      <a:pPr marL="0" lvl="0" indent="0" algn="l" rtl="0">
                         <a:spcBef>
                           <a:spcPts val="0"/>
                         </a:spcBef>
@@ -8263,13 +8464,10 @@
                         </a:spcAft>
                         <a:buNone/>
                       </a:pPr>
-                      <a:r>
-                        <a:t/>
-                      </a:r>
                       <a:endParaRPr/>
                     </a:p>
                     <a:p>
-                      <a:pPr indent="0" lvl="0" marL="0" rtl="0" algn="l">
+                      <a:pPr marL="0" lvl="0" indent="0" algn="l" rtl="0">
                         <a:spcBef>
                           <a:spcPts val="0"/>
                         </a:spcBef>
@@ -8285,8 +8483,13 @@
                       <a:endParaRPr/>
                     </a:p>
                   </a:txBody>
-                  <a:tcPr marT="91425" marB="91425" marR="91425" marL="91425"/>
+                  <a:tcPr marL="91425" marR="91425" marT="91425" marB="91425"/>
                 </a:tc>
+                <a:extLst>
+                  <a:ext uri="{0D108BD9-81ED-4DB2-BD59-A6C34878D82A}">
+                    <a16:rowId xmlns:a16="http://schemas.microsoft.com/office/drawing/2014/main" val="10001"/>
+                  </a:ext>
+                </a:extLst>
               </a:tr>
             </a:tbl>
           </a:graphicData>
@@ -8301,11 +8504,11 @@
 </file>
 
 <file path=ppt/slides/slide11.xml><?xml version="1.0" encoding="utf-8"?>
-<p:sld xmlns:a="http://schemas.openxmlformats.org/drawingml/2006/main" xmlns:r="http://schemas.openxmlformats.org/officeDocument/2006/relationships" xmlns:mc="http://schemas.openxmlformats.org/markup-compatibility/2006" xmlns:mv="urn:schemas-microsoft-com:mac:vml" xmlns:p="http://schemas.openxmlformats.org/presentationml/2006/main" xmlns:c="http://schemas.openxmlformats.org/drawingml/2006/chart" xmlns:dgm="http://schemas.openxmlformats.org/drawingml/2006/diagram" xmlns:o="urn:schemas-microsoft-com:office:office" xmlns:v="urn:schemas-microsoft-com:vml" xmlns:pvml="urn:schemas-microsoft-com:office:powerpoint" xmlns:com="http://schemas.openxmlformats.org/drawingml/2006/compatibility" xmlns:p14="http://schemas.microsoft.com/office/powerpoint/2010/main" xmlns:p15="http://schemas.microsoft.com/office/powerpoint/2012/main" xmlns:ahyp="http://schemas.microsoft.com/office/drawing/2018/hyperlinkcolor">
+<p:sld xmlns:a="http://schemas.openxmlformats.org/drawingml/2006/main" xmlns:r="http://schemas.openxmlformats.org/officeDocument/2006/relationships" xmlns:p="http://schemas.openxmlformats.org/presentationml/2006/main">
   <p:cSld>
     <p:spTree>
       <p:nvGrpSpPr>
-        <p:cNvPr id="153" name="Shape 153"/>
+        <p:cNvPr id="1" name="Shape 153"/>
         <p:cNvGrpSpPr/>
         <p:nvPr/>
       </p:nvGrpSpPr>
@@ -8320,7 +8523,9 @@
       <p:sp>
         <p:nvSpPr>
           <p:cNvPr id="154" name="Google Shape;154;p10"/>
-          <p:cNvSpPr txBox="1"/>
+          <p:cNvSpPr txBox="1">
+            <a:spLocks noGrp="1"/>
+          </p:cNvSpPr>
           <p:nvPr>
             <p:ph type="title"/>
           </p:nvPr>
@@ -8339,12 +8544,12 @@
           </a:ln>
         </p:spPr>
         <p:txBody>
-          <a:bodyPr anchorCtr="0" anchor="ctr" bIns="91425" lIns="91425" spcFirstLastPara="1" rIns="91425" wrap="square" tIns="91425">
+          <a:bodyPr spcFirstLastPara="1" wrap="square" lIns="91425" tIns="91425" rIns="91425" bIns="91425" anchor="ctr" anchorCtr="0">
             <a:noAutofit/>
           </a:bodyPr>
           <a:lstStyle/>
           <a:p>
-            <a:pPr indent="0" lvl="0" marL="0" rtl="0" algn="l">
+            <a:pPr marL="0" lvl="0" indent="0" algn="l" rtl="0">
               <a:lnSpc>
                 <a:spcPct val="100000"/>
               </a:lnSpc>
@@ -8368,9 +8573,11 @@
       <p:sp>
         <p:nvSpPr>
           <p:cNvPr id="155" name="Google Shape;155;p10"/>
-          <p:cNvSpPr txBox="1"/>
+          <p:cNvSpPr txBox="1">
+            <a:spLocks noGrp="1"/>
+          </p:cNvSpPr>
           <p:nvPr>
-            <p:ph idx="1" type="subTitle"/>
+            <p:ph type="subTitle" idx="1"/>
           </p:nvPr>
         </p:nvSpPr>
         <p:spPr>
@@ -8387,12 +8594,12 @@
           </a:ln>
         </p:spPr>
         <p:txBody>
-          <a:bodyPr anchorCtr="0" anchor="t" bIns="91425" lIns="91425" spcFirstLastPara="1" rIns="91425" wrap="square" tIns="91425">
+          <a:bodyPr spcFirstLastPara="1" wrap="square" lIns="91425" tIns="91425" rIns="91425" bIns="91425" anchor="t" anchorCtr="0">
             <a:noAutofit/>
           </a:bodyPr>
           <a:lstStyle/>
           <a:p>
-            <a:pPr indent="0" lvl="0" marL="0" rtl="0" algn="l">
+            <a:pPr marL="0" lvl="0" indent="0" algn="l" rtl="0">
               <a:lnSpc>
                 <a:spcPct val="100000"/>
               </a:lnSpc>
@@ -8433,12 +8640,12 @@
           </a:ln>
         </p:spPr>
         <p:txBody>
-          <a:bodyPr anchorCtr="0" anchor="ctr" bIns="91425" lIns="91425" spcFirstLastPara="1" rIns="91425" wrap="square" tIns="91425">
+          <a:bodyPr spcFirstLastPara="1" wrap="square" lIns="91425" tIns="91425" rIns="91425" bIns="91425" anchor="ctr" anchorCtr="0">
             <a:noAutofit/>
           </a:bodyPr>
           <a:lstStyle/>
           <a:p>
-            <a:pPr indent="0" lvl="0" marL="0" marR="0" rtl="0" algn="l">
+            <a:pPr marL="0" marR="0" lvl="0" indent="0" algn="l" rtl="0">
               <a:lnSpc>
                 <a:spcPct val="100000"/>
               </a:lnSpc>
@@ -8451,7 +8658,7 @@
               <a:buNone/>
             </a:pPr>
             <a:r>
-              <a:rPr b="0" i="0" lang="hu-HU" sz="1600" u="none" cap="none" strike="noStrike">
+              <a:rPr lang="hu-HU" sz="1600" b="0" i="0" u="none" strike="noStrike" cap="none">
                 <a:solidFill>
                   <a:schemeClr val="dk1"/>
                 </a:solidFill>
@@ -8462,7 +8669,7 @@
               </a:rPr>
               <a:t>Bakos Rózsa Ajándék, Kálmán Előd Arto, Németh Bence Máté, Nyerges Bálint</a:t>
             </a:r>
-            <a:endParaRPr b="0" i="0" sz="1600" u="none" cap="none" strike="noStrike">
+            <a:endParaRPr sz="1600" b="0" i="0" u="none" strike="noStrike" cap="none">
               <a:solidFill>
                 <a:schemeClr val="dk1"/>
               </a:solidFill>
@@ -8483,11 +8690,11 @@
 </file>
 
 <file path=ppt/slides/slide2.xml><?xml version="1.0" encoding="utf-8"?>
-<p:sld xmlns:a="http://schemas.openxmlformats.org/drawingml/2006/main" xmlns:r="http://schemas.openxmlformats.org/officeDocument/2006/relationships" xmlns:mc="http://schemas.openxmlformats.org/markup-compatibility/2006" xmlns:mv="urn:schemas-microsoft-com:mac:vml" xmlns:p="http://schemas.openxmlformats.org/presentationml/2006/main" xmlns:c="http://schemas.openxmlformats.org/drawingml/2006/chart" xmlns:dgm="http://schemas.openxmlformats.org/drawingml/2006/diagram" xmlns:o="urn:schemas-microsoft-com:office:office" xmlns:v="urn:schemas-microsoft-com:vml" xmlns:pvml="urn:schemas-microsoft-com:office:powerpoint" xmlns:com="http://schemas.openxmlformats.org/drawingml/2006/compatibility" xmlns:p14="http://schemas.microsoft.com/office/powerpoint/2010/main" xmlns:p15="http://schemas.microsoft.com/office/powerpoint/2012/main" xmlns:ahyp="http://schemas.microsoft.com/office/drawing/2018/hyperlinkcolor">
+<p:sld xmlns:a="http://schemas.openxmlformats.org/drawingml/2006/main" xmlns:r="http://schemas.openxmlformats.org/officeDocument/2006/relationships" xmlns:p="http://schemas.openxmlformats.org/presentationml/2006/main">
   <p:cSld>
     <p:spTree>
       <p:nvGrpSpPr>
-        <p:cNvPr id="87" name="Shape 87"/>
+        <p:cNvPr id="1" name="Shape 87"/>
         <p:cNvGrpSpPr/>
         <p:nvPr/>
       </p:nvGrpSpPr>
@@ -8502,7 +8709,9 @@
       <p:sp>
         <p:nvSpPr>
           <p:cNvPr id="88" name="Google Shape;88;p2"/>
-          <p:cNvSpPr txBox="1"/>
+          <p:cNvSpPr txBox="1">
+            <a:spLocks noGrp="1"/>
+          </p:cNvSpPr>
           <p:nvPr>
             <p:ph type="title"/>
           </p:nvPr>
@@ -8521,12 +8730,12 @@
           </a:ln>
         </p:spPr>
         <p:txBody>
-          <a:bodyPr anchorCtr="0" anchor="t" bIns="91425" lIns="91425" spcFirstLastPara="1" rIns="91425" wrap="square" tIns="91425">
+          <a:bodyPr spcFirstLastPara="1" wrap="square" lIns="91425" tIns="91425" rIns="91425" bIns="91425" anchor="t" anchorCtr="0">
             <a:noAutofit/>
           </a:bodyPr>
           <a:lstStyle/>
           <a:p>
-            <a:pPr indent="0" lvl="0" marL="0" rtl="0" algn="l">
+            <a:pPr marL="0" lvl="0" indent="0" algn="l" rtl="0">
               <a:lnSpc>
                 <a:spcPct val="100000"/>
               </a:lnSpc>
@@ -8550,9 +8759,11 @@
       <p:sp>
         <p:nvSpPr>
           <p:cNvPr id="89" name="Google Shape;89;p2"/>
-          <p:cNvSpPr txBox="1"/>
+          <p:cNvSpPr txBox="1">
+            <a:spLocks noGrp="1"/>
+          </p:cNvSpPr>
           <p:nvPr>
-            <p:ph idx="1" type="subTitle"/>
+            <p:ph type="subTitle" idx="1"/>
           </p:nvPr>
         </p:nvSpPr>
         <p:spPr>
@@ -8569,12 +8780,12 @@
           </a:ln>
         </p:spPr>
         <p:txBody>
-          <a:bodyPr anchorCtr="0" anchor="t" bIns="91425" lIns="91425" spcFirstLastPara="1" rIns="91425" wrap="square" tIns="91425">
+          <a:bodyPr spcFirstLastPara="1" wrap="square" lIns="91425" tIns="91425" rIns="91425" bIns="91425" anchor="t" anchorCtr="0">
             <a:noAutofit/>
           </a:bodyPr>
           <a:lstStyle/>
           <a:p>
-            <a:pPr indent="-285750" lvl="0" marL="285750" rtl="0" algn="l">
+            <a:pPr marL="285750" lvl="0" indent="-285750" algn="l" rtl="0">
               <a:lnSpc>
                 <a:spcPct val="100000"/>
               </a:lnSpc>
@@ -8595,7 +8806,7 @@
             <a:endParaRPr/>
           </a:p>
           <a:p>
-            <a:pPr indent="-285750" lvl="1" marL="742950" rtl="0" algn="l">
+            <a:pPr marL="742950" lvl="1" indent="-285750" algn="l" rtl="0">
               <a:lnSpc>
                 <a:spcPct val="100000"/>
               </a:lnSpc>
@@ -8616,7 +8827,7 @@
             <a:endParaRPr sz="1600"/>
           </a:p>
           <a:p>
-            <a:pPr indent="-285750" lvl="1" marL="742950" rtl="0" algn="l">
+            <a:pPr marL="742950" lvl="1" indent="-285750" algn="l" rtl="0">
               <a:lnSpc>
                 <a:spcPct val="100000"/>
               </a:lnSpc>
@@ -8637,7 +8848,7 @@
             <a:endParaRPr/>
           </a:p>
           <a:p>
-            <a:pPr indent="-285750" lvl="0" marL="285750" rtl="0" algn="l">
+            <a:pPr marL="285750" lvl="0" indent="-285750" algn="l" rtl="0">
               <a:lnSpc>
                 <a:spcPct val="100000"/>
               </a:lnSpc>
@@ -8668,11 +8879,11 @@
 </file>
 
 <file path=ppt/slides/slide3.xml><?xml version="1.0" encoding="utf-8"?>
-<p:sld xmlns:a="http://schemas.openxmlformats.org/drawingml/2006/main" xmlns:r="http://schemas.openxmlformats.org/officeDocument/2006/relationships" xmlns:mc="http://schemas.openxmlformats.org/markup-compatibility/2006" xmlns:mv="urn:schemas-microsoft-com:mac:vml" xmlns:p="http://schemas.openxmlformats.org/presentationml/2006/main" xmlns:c="http://schemas.openxmlformats.org/drawingml/2006/chart" xmlns:dgm="http://schemas.openxmlformats.org/drawingml/2006/diagram" xmlns:o="urn:schemas-microsoft-com:office:office" xmlns:v="urn:schemas-microsoft-com:vml" xmlns:pvml="urn:schemas-microsoft-com:office:powerpoint" xmlns:com="http://schemas.openxmlformats.org/drawingml/2006/compatibility" xmlns:p14="http://schemas.microsoft.com/office/powerpoint/2010/main" xmlns:p15="http://schemas.microsoft.com/office/powerpoint/2012/main" xmlns:ahyp="http://schemas.microsoft.com/office/drawing/2018/hyperlinkcolor">
+<p:sld xmlns:a="http://schemas.openxmlformats.org/drawingml/2006/main" xmlns:r="http://schemas.openxmlformats.org/officeDocument/2006/relationships" xmlns:p="http://schemas.openxmlformats.org/presentationml/2006/main">
   <p:cSld>
     <p:spTree>
       <p:nvGrpSpPr>
-        <p:cNvPr id="93" name="Shape 93"/>
+        <p:cNvPr id="1" name="Shape 93"/>
         <p:cNvGrpSpPr/>
         <p:nvPr/>
       </p:nvGrpSpPr>
@@ -8687,7 +8898,9 @@
       <p:sp>
         <p:nvSpPr>
           <p:cNvPr id="94" name="Google Shape;94;p3"/>
-          <p:cNvSpPr txBox="1"/>
+          <p:cNvSpPr txBox="1">
+            <a:spLocks noGrp="1"/>
+          </p:cNvSpPr>
           <p:nvPr>
             <p:ph type="title"/>
           </p:nvPr>
@@ -8706,12 +8919,12 @@
           </a:ln>
         </p:spPr>
         <p:txBody>
-          <a:bodyPr anchorCtr="0" anchor="t" bIns="91425" lIns="91425" spcFirstLastPara="1" rIns="91425" wrap="square" tIns="91425">
+          <a:bodyPr spcFirstLastPara="1" wrap="square" lIns="91425" tIns="91425" rIns="91425" bIns="91425" anchor="t" anchorCtr="0">
             <a:noAutofit/>
           </a:bodyPr>
           <a:lstStyle/>
           <a:p>
-            <a:pPr indent="0" lvl="0" marL="0" rtl="0" algn="l">
+            <a:pPr marL="0" lvl="0" indent="0" algn="l" rtl="0">
               <a:lnSpc>
                 <a:spcPct val="100000"/>
               </a:lnSpc>
@@ -8735,9 +8948,11 @@
       <p:sp>
         <p:nvSpPr>
           <p:cNvPr id="95" name="Google Shape;95;p3"/>
-          <p:cNvSpPr txBox="1"/>
+          <p:cNvSpPr txBox="1">
+            <a:spLocks noGrp="1"/>
+          </p:cNvSpPr>
           <p:nvPr>
-            <p:ph idx="1" type="subTitle"/>
+            <p:ph type="subTitle" idx="1"/>
           </p:nvPr>
         </p:nvSpPr>
         <p:spPr>
@@ -8754,12 +8969,12 @@
           </a:ln>
         </p:spPr>
         <p:txBody>
-          <a:bodyPr anchorCtr="0" anchor="t" bIns="91425" lIns="91425" spcFirstLastPara="1" rIns="91425" wrap="square" tIns="91425">
+          <a:bodyPr spcFirstLastPara="1" wrap="square" lIns="91425" tIns="91425" rIns="91425" bIns="91425" anchor="t" anchorCtr="0">
             <a:noAutofit/>
           </a:bodyPr>
           <a:lstStyle/>
           <a:p>
-            <a:pPr indent="-228600" lvl="0" marL="457200" rtl="0" algn="l">
+            <a:pPr marL="457200" lvl="0" indent="-228600" algn="l" rtl="0">
               <a:lnSpc>
                 <a:spcPct val="100000"/>
               </a:lnSpc>
@@ -8773,9 +8988,6 @@
               <a:buFont typeface="Arial"/>
               <a:buNone/>
             </a:pPr>
-            <a:r>
-              <a:t/>
-            </a:r>
             <a:endParaRPr/>
           </a:p>
         </p:txBody>
@@ -8789,11 +9001,11 @@
 </file>
 
 <file path=ppt/slides/slide4.xml><?xml version="1.0" encoding="utf-8"?>
-<p:sld xmlns:a="http://schemas.openxmlformats.org/drawingml/2006/main" xmlns:r="http://schemas.openxmlformats.org/officeDocument/2006/relationships" xmlns:mc="http://schemas.openxmlformats.org/markup-compatibility/2006" xmlns:mv="urn:schemas-microsoft-com:mac:vml" xmlns:p="http://schemas.openxmlformats.org/presentationml/2006/main" xmlns:c="http://schemas.openxmlformats.org/drawingml/2006/chart" xmlns:dgm="http://schemas.openxmlformats.org/drawingml/2006/diagram" xmlns:o="urn:schemas-microsoft-com:office:office" xmlns:v="urn:schemas-microsoft-com:vml" xmlns:pvml="urn:schemas-microsoft-com:office:powerpoint" xmlns:com="http://schemas.openxmlformats.org/drawingml/2006/compatibility" xmlns:p14="http://schemas.microsoft.com/office/powerpoint/2010/main" xmlns:p15="http://schemas.microsoft.com/office/powerpoint/2012/main" xmlns:ahyp="http://schemas.microsoft.com/office/drawing/2018/hyperlinkcolor">
+<p:sld xmlns:a="http://schemas.openxmlformats.org/drawingml/2006/main" xmlns:r="http://schemas.openxmlformats.org/officeDocument/2006/relationships" xmlns:p="http://schemas.openxmlformats.org/presentationml/2006/main">
   <p:cSld>
     <p:spTree>
       <p:nvGrpSpPr>
-        <p:cNvPr id="99" name="Shape 99"/>
+        <p:cNvPr id="1" name="Shape 99"/>
         <p:cNvGrpSpPr/>
         <p:nvPr/>
       </p:nvGrpSpPr>
@@ -8808,16 +9020,18 @@
       <p:pic>
         <p:nvPicPr>
           <p:cNvPr id="100" name="Google Shape;100;p4"/>
-          <p:cNvPicPr preferRelativeResize="0"/>
+          <p:cNvPicPr preferRelativeResize="0">
+            <a:picLocks noGrp="1"/>
+          </p:cNvPicPr>
           <p:nvPr>
-            <p:ph idx="2" type="pic"/>
+            <p:ph type="pic" idx="2"/>
           </p:nvPr>
         </p:nvPicPr>
         <p:blipFill rotWithShape="1">
           <a:blip r:embed="rId3">
             <a:alphaModFix/>
           </a:blip>
-          <a:srcRect b="0" l="0" r="0" t="0"/>
+          <a:srcRect/>
           <a:stretch/>
         </p:blipFill>
         <p:spPr>
@@ -8829,21 +9043,23 @@
             <a:avLst/>
           </a:prstGeom>
           <a:noFill/>
-          <a:ln cap="flat" cmpd="sng" w="9525">
+          <a:ln w="9525" cap="flat" cmpd="sng">
             <a:solidFill>
               <a:schemeClr val="dk2"/>
             </a:solidFill>
             <a:prstDash val="solid"/>
             <a:round/>
-            <a:headEnd len="sm" w="sm" type="none"/>
-            <a:tailEnd len="sm" w="sm" type="none"/>
+            <a:headEnd type="none" w="sm" len="sm"/>
+            <a:tailEnd type="none" w="sm" len="sm"/>
           </a:ln>
         </p:spPr>
       </p:pic>
       <p:sp>
         <p:nvSpPr>
           <p:cNvPr id="101" name="Google Shape;101;p4"/>
-          <p:cNvSpPr txBox="1"/>
+          <p:cNvSpPr txBox="1">
+            <a:spLocks noGrp="1"/>
+          </p:cNvSpPr>
           <p:nvPr>
             <p:ph type="title"/>
           </p:nvPr>
@@ -8862,12 +9078,12 @@
           </a:ln>
         </p:spPr>
         <p:txBody>
-          <a:bodyPr anchorCtr="0" anchor="t" bIns="91425" lIns="91425" spcFirstLastPara="1" rIns="91425" wrap="square" tIns="91425">
+          <a:bodyPr spcFirstLastPara="1" wrap="square" lIns="91425" tIns="91425" rIns="91425" bIns="91425" anchor="t" anchorCtr="0">
             <a:noAutofit/>
           </a:bodyPr>
           <a:lstStyle/>
           <a:p>
-            <a:pPr indent="0" lvl="0" marL="0" rtl="0" algn="l">
+            <a:pPr marL="0" lvl="0" indent="0" algn="l" rtl="0">
               <a:lnSpc>
                 <a:spcPct val="80000"/>
               </a:lnSpc>
@@ -8891,14 +9107,16 @@
       <p:sp>
         <p:nvSpPr>
           <p:cNvPr id="102" name="Google Shape;102;p4"/>
-          <p:cNvSpPr txBox="1"/>
+          <p:cNvSpPr txBox="1">
+            <a:spLocks noGrp="1"/>
+          </p:cNvSpPr>
           <p:nvPr>
-            <p:ph idx="1" type="body"/>
+            <p:ph type="body" idx="1"/>
           </p:nvPr>
         </p:nvSpPr>
         <p:spPr>
           <a:xfrm>
-            <a:off x="3789425" y="2229300"/>
+            <a:off x="3789425" y="1716249"/>
             <a:ext cx="4940100" cy="2532600"/>
           </a:xfrm>
           <a:prstGeom prst="rect">
@@ -8910,32 +9128,299 @@
           </a:ln>
         </p:spPr>
         <p:txBody>
-          <a:bodyPr anchorCtr="0" anchor="t" bIns="91425" lIns="91425" spcFirstLastPara="1" rIns="91425" wrap="square" tIns="91425">
+          <a:bodyPr spcFirstLastPara="1" wrap="square" lIns="91425" tIns="91425" rIns="91425" bIns="91425" anchor="t" anchorCtr="0">
             <a:noAutofit/>
           </a:bodyPr>
           <a:lstStyle/>
           <a:p>
-            <a:pPr indent="0" lvl="0" marL="0" rtl="0" algn="l">
-              <a:lnSpc>
-                <a:spcPct val="100000"/>
-              </a:lnSpc>
-              <a:spcBef>
-                <a:spcPts val="0"/>
-              </a:spcBef>
-              <a:spcAft>
-                <a:spcPts val="0"/>
-              </a:spcAft>
-              <a:buClr>
-                <a:srgbClr val="273D40"/>
-              </a:buClr>
-              <a:buSzPts val="600"/>
+            <a:pPr marL="285750" indent="-285750">
               <a:buFont typeface="Arial"/>
-              <a:buNone/>
+              <a:buChar char="•"/>
             </a:pPr>
             <a:r>
-              <a:t/>
+              <a:rPr lang="en-US" dirty="0"/>
+              <a:t>Sok </a:t>
             </a:r>
-            <a:endParaRPr/>
+            <a:r>
+              <a:rPr lang="en-US" err="1"/>
+              <a:t>kicsi</a:t>
+            </a:r>
+            <a:r>
+              <a:rPr lang="en-US" dirty="0"/>
+              <a:t>, </a:t>
+            </a:r>
+            <a:r>
+              <a:rPr lang="en-US" err="1"/>
+              <a:t>gyorsan</a:t>
+            </a:r>
+            <a:r>
+              <a:rPr lang="en-US" dirty="0"/>
+              <a:t> </a:t>
+            </a:r>
+            <a:r>
+              <a:rPr lang="en-US" err="1"/>
+              <a:t>számolható</a:t>
+            </a:r>
+            <a:r>
+              <a:rPr lang="en-US" dirty="0"/>
+              <a:t> Haar-</a:t>
+            </a:r>
+            <a:r>
+              <a:rPr lang="en-US" err="1"/>
+              <a:t>jellemzőt</a:t>
+            </a:r>
+            <a:r>
+              <a:rPr lang="en-US" dirty="0"/>
+              <a:t> (Haar features) </a:t>
+            </a:r>
+            <a:r>
+              <a:rPr lang="en-US" err="1"/>
+              <a:t>használ</a:t>
+            </a:r>
+            <a:r>
+              <a:rPr lang="en-US" dirty="0"/>
+              <a:t>.</a:t>
+            </a:r>
+            <a:endParaRPr lang="en-US"/>
+          </a:p>
+          <a:p>
+            <a:pPr marL="285750" indent="-285750">
+              <a:buFont typeface="Arial"/>
+              <a:buChar char="•"/>
+            </a:pPr>
+            <a:r>
+              <a:rPr lang="en-US" dirty="0"/>
+              <a:t>Kis </a:t>
+            </a:r>
+            <a:r>
+              <a:rPr lang="en-US" err="1"/>
+              <a:t>fekete-fehér</a:t>
+            </a:r>
+            <a:r>
+              <a:rPr lang="en-US" dirty="0"/>
+              <a:t> </a:t>
+            </a:r>
+            <a:r>
+              <a:rPr lang="en-US" err="1"/>
+              <a:t>téglalapmintákat</a:t>
+            </a:r>
+            <a:r>
+              <a:rPr lang="en-US" dirty="0"/>
+              <a:t> </a:t>
+            </a:r>
+            <a:r>
+              <a:rPr lang="en-US" err="1"/>
+              <a:t>csúsztat</a:t>
+            </a:r>
+            <a:r>
+              <a:rPr lang="en-US" dirty="0"/>
+              <a:t> a </a:t>
+            </a:r>
+            <a:r>
+              <a:rPr lang="en-US" err="1"/>
+              <a:t>képen</a:t>
+            </a:r>
+            <a:r>
+              <a:rPr lang="en-US" dirty="0"/>
+              <a:t>, </a:t>
+            </a:r>
+            <a:r>
+              <a:rPr lang="en-US" err="1"/>
+              <a:t>és</a:t>
+            </a:r>
+            <a:r>
+              <a:rPr lang="en-US" dirty="0"/>
+              <a:t> </a:t>
+            </a:r>
+            <a:r>
+              <a:rPr lang="en-US" err="1"/>
+              <a:t>megnézi</a:t>
+            </a:r>
+            <a:r>
+              <a:rPr lang="en-US" dirty="0"/>
+              <a:t>, </a:t>
+            </a:r>
+            <a:r>
+              <a:rPr lang="en-US" err="1"/>
+              <a:t>hogy</a:t>
+            </a:r>
+            <a:r>
+              <a:rPr lang="en-US" dirty="0"/>
+              <a:t> a </a:t>
+            </a:r>
+            <a:r>
+              <a:rPr lang="en-US" err="1"/>
+              <a:t>világos</a:t>
+            </a:r>
+            <a:r>
+              <a:rPr lang="en-US" dirty="0"/>
+              <a:t>–</a:t>
+            </a:r>
+            <a:r>
+              <a:rPr lang="en-US" err="1"/>
+              <a:t>sötét</a:t>
+            </a:r>
+            <a:r>
+              <a:rPr lang="en-US" dirty="0"/>
+              <a:t> </a:t>
+            </a:r>
+            <a:r>
+              <a:rPr lang="en-US" err="1"/>
+              <a:t>mintázat</a:t>
+            </a:r>
+            <a:r>
+              <a:rPr lang="en-US" dirty="0"/>
+              <a:t> </a:t>
+            </a:r>
+            <a:r>
+              <a:rPr lang="en-US" err="1"/>
+              <a:t>mennyire</a:t>
+            </a:r>
+            <a:r>
+              <a:rPr lang="en-US" dirty="0"/>
+              <a:t> </a:t>
+            </a:r>
+            <a:r>
+              <a:rPr lang="en-US" err="1"/>
+              <a:t>hasonlít</a:t>
+            </a:r>
+            <a:r>
+              <a:rPr lang="en-US" dirty="0"/>
+              <a:t> a </a:t>
+            </a:r>
+            <a:r>
+              <a:rPr lang="en-US" err="1"/>
+              <a:t>tanult</a:t>
+            </a:r>
+            <a:r>
+              <a:rPr lang="en-US" dirty="0"/>
+              <a:t> </a:t>
+            </a:r>
+            <a:r>
+              <a:rPr lang="en-US" err="1"/>
+              <a:t>objektumhoz</a:t>
+            </a:r>
+            <a:r>
+              <a:rPr lang="en-US" dirty="0"/>
+              <a:t>.</a:t>
+            </a:r>
+          </a:p>
+          <a:p>
+            <a:pPr marL="285750" indent="-285750">
+              <a:buFont typeface="Arial"/>
+              <a:buChar char="•"/>
+            </a:pPr>
+            <a:r>
+              <a:rPr lang="en-US" err="1"/>
+              <a:t>Szürkeárnyalatos</a:t>
+            </a:r>
+            <a:r>
+              <a:rPr lang="en-US" dirty="0"/>
+              <a:t> </a:t>
+            </a:r>
+            <a:r>
+              <a:rPr lang="en-US" err="1"/>
+              <a:t>képeken</a:t>
+            </a:r>
+            <a:r>
+              <a:rPr lang="en-US" dirty="0"/>
+              <a:t> </a:t>
+            </a:r>
+            <a:r>
+              <a:rPr lang="en-US" err="1"/>
+              <a:t>dolgozik</a:t>
+            </a:r>
+            <a:r>
+              <a:rPr lang="en-US" dirty="0"/>
+              <a:t>.</a:t>
+            </a:r>
+          </a:p>
+          <a:p>
+            <a:pPr marL="285750" indent="-285750">
+              <a:buFont typeface="Arial"/>
+              <a:buChar char="•"/>
+            </a:pPr>
+            <a:r>
+              <a:rPr lang="en-US" dirty="0" err="1"/>
+              <a:t>Gyors</a:t>
+            </a:r>
+            <a:r>
+              <a:rPr lang="en-US" dirty="0"/>
+              <a:t> </a:t>
+            </a:r>
+            <a:r>
+              <a:rPr lang="en-US" dirty="0" err="1"/>
+              <a:t>és</a:t>
+            </a:r>
+            <a:r>
+              <a:rPr lang="en-US" dirty="0"/>
+              <a:t> </a:t>
+            </a:r>
+            <a:r>
+              <a:rPr lang="en-US" dirty="0" err="1"/>
+              <a:t>egyszerű</a:t>
+            </a:r>
+            <a:r>
+              <a:rPr lang="en-US" dirty="0"/>
+              <a:t> </a:t>
+            </a:r>
+            <a:r>
+              <a:rPr lang="en-US" dirty="0" err="1"/>
+              <a:t>felismerő</a:t>
+            </a:r>
+            <a:r>
+              <a:rPr lang="en-US" dirty="0"/>
+              <a:t>, de ma </a:t>
+            </a:r>
+            <a:r>
+              <a:rPr lang="en-US" dirty="0" err="1"/>
+              <a:t>már</a:t>
+            </a:r>
+            <a:r>
+              <a:rPr lang="en-US" dirty="0"/>
+              <a:t> </a:t>
+            </a:r>
+            <a:r>
+              <a:rPr lang="en-US" dirty="0" err="1"/>
+              <a:t>sokkal</a:t>
+            </a:r>
+            <a:r>
+              <a:rPr lang="en-US" dirty="0"/>
+              <a:t> </a:t>
+            </a:r>
+            <a:r>
+              <a:rPr lang="en-US" dirty="0" err="1"/>
+              <a:t>jobb</a:t>
+            </a:r>
+            <a:r>
+              <a:rPr lang="en-US" dirty="0"/>
+              <a:t>, </a:t>
+            </a:r>
+            <a:r>
+              <a:rPr lang="en-US" dirty="0" err="1"/>
+              <a:t>modernebb</a:t>
+            </a:r>
+            <a:r>
+              <a:rPr lang="en-US" dirty="0"/>
+              <a:t> </a:t>
+            </a:r>
+            <a:r>
+              <a:rPr lang="en-US" dirty="0" err="1"/>
+              <a:t>módszerek</a:t>
+            </a:r>
+            <a:r>
+              <a:rPr lang="en-US" dirty="0"/>
+              <a:t> is </a:t>
+            </a:r>
+            <a:r>
+              <a:rPr lang="en-US" dirty="0" err="1"/>
+              <a:t>léteznek</a:t>
+            </a:r>
+            <a:r>
+              <a:rPr lang="en-US" dirty="0"/>
+              <a:t>.</a:t>
+            </a:r>
+            <a:endParaRPr dirty="0"/>
           </a:p>
         </p:txBody>
       </p:sp>
@@ -8963,7 +9448,7 @@
             <a:blip r:embed="rId4">
               <a:alphaModFix/>
             </a:blip>
-            <a:srcRect b="0" l="60127" r="0" t="0"/>
+            <a:srcRect l="60127"/>
             <a:stretch/>
           </p:blipFill>
           <p:spPr>
@@ -8990,7 +9475,7 @@
             <a:blip r:embed="rId4">
               <a:alphaModFix/>
             </a:blip>
-            <a:srcRect b="0" l="60127" r="0" t="0"/>
+            <a:srcRect l="60127"/>
             <a:stretch/>
           </p:blipFill>
           <p:spPr>
@@ -9017,11 +9502,11 @@
 </file>
 
 <file path=ppt/slides/slide5.xml><?xml version="1.0" encoding="utf-8"?>
-<p:sld xmlns:a="http://schemas.openxmlformats.org/drawingml/2006/main" xmlns:r="http://schemas.openxmlformats.org/officeDocument/2006/relationships" xmlns:mc="http://schemas.openxmlformats.org/markup-compatibility/2006" xmlns:mv="urn:schemas-microsoft-com:mac:vml" xmlns:p="http://schemas.openxmlformats.org/presentationml/2006/main" xmlns:c="http://schemas.openxmlformats.org/drawingml/2006/chart" xmlns:dgm="http://schemas.openxmlformats.org/drawingml/2006/diagram" xmlns:o="urn:schemas-microsoft-com:office:office" xmlns:v="urn:schemas-microsoft-com:vml" xmlns:pvml="urn:schemas-microsoft-com:office:powerpoint" xmlns:com="http://schemas.openxmlformats.org/drawingml/2006/compatibility" xmlns:p14="http://schemas.microsoft.com/office/powerpoint/2010/main" xmlns:p15="http://schemas.microsoft.com/office/powerpoint/2012/main" xmlns:ahyp="http://schemas.microsoft.com/office/drawing/2018/hyperlinkcolor">
+<p:sld xmlns:a="http://schemas.openxmlformats.org/drawingml/2006/main" xmlns:r="http://schemas.openxmlformats.org/officeDocument/2006/relationships" xmlns:p="http://schemas.openxmlformats.org/presentationml/2006/main">
   <p:cSld>
     <p:spTree>
       <p:nvGrpSpPr>
-        <p:cNvPr id="109" name="Shape 109"/>
+        <p:cNvPr id="1" name="Shape 109"/>
         <p:cNvGrpSpPr/>
         <p:nvPr/>
       </p:nvGrpSpPr>
@@ -9036,16 +9521,18 @@
       <p:pic>
         <p:nvPicPr>
           <p:cNvPr id="110" name="Google Shape;110;p5"/>
-          <p:cNvPicPr preferRelativeResize="0"/>
+          <p:cNvPicPr preferRelativeResize="0">
+            <a:picLocks noGrp="1"/>
+          </p:cNvPicPr>
           <p:nvPr>
-            <p:ph idx="2" type="pic"/>
+            <p:ph type="pic" idx="2"/>
           </p:nvPr>
         </p:nvPicPr>
         <p:blipFill rotWithShape="1">
           <a:blip r:embed="rId3">
             <a:alphaModFix/>
           </a:blip>
-          <a:srcRect b="0" l="0" r="0" t="0"/>
+          <a:srcRect/>
           <a:stretch/>
         </p:blipFill>
         <p:spPr>
@@ -9057,21 +9544,23 @@
             <a:avLst/>
           </a:prstGeom>
           <a:noFill/>
-          <a:ln cap="flat" cmpd="sng" w="9525">
+          <a:ln w="9525" cap="flat" cmpd="sng">
             <a:solidFill>
               <a:schemeClr val="dk2"/>
             </a:solidFill>
             <a:prstDash val="solid"/>
             <a:round/>
-            <a:headEnd len="sm" w="sm" type="none"/>
-            <a:tailEnd len="sm" w="sm" type="none"/>
+            <a:headEnd type="none" w="sm" len="sm"/>
+            <a:tailEnd type="none" w="sm" len="sm"/>
           </a:ln>
         </p:spPr>
       </p:pic>
       <p:sp>
         <p:nvSpPr>
           <p:cNvPr id="111" name="Google Shape;111;p5"/>
-          <p:cNvSpPr txBox="1"/>
+          <p:cNvSpPr txBox="1">
+            <a:spLocks noGrp="1"/>
+          </p:cNvSpPr>
           <p:nvPr>
             <p:ph type="title"/>
           </p:nvPr>
@@ -9090,12 +9579,12 @@
           </a:ln>
         </p:spPr>
         <p:txBody>
-          <a:bodyPr anchorCtr="0" anchor="t" bIns="91425" lIns="91425" spcFirstLastPara="1" rIns="91425" wrap="square" tIns="91425">
+          <a:bodyPr spcFirstLastPara="1" wrap="square" lIns="91425" tIns="91425" rIns="91425" bIns="91425" anchor="t" anchorCtr="0">
             <a:noAutofit/>
           </a:bodyPr>
           <a:lstStyle/>
           <a:p>
-            <a:pPr indent="0" lvl="0" marL="0" rtl="0" algn="l">
+            <a:pPr marL="0" lvl="0" indent="0" algn="l" rtl="0">
               <a:lnSpc>
                 <a:spcPct val="80000"/>
               </a:lnSpc>
@@ -9119,9 +9608,11 @@
       <p:sp>
         <p:nvSpPr>
           <p:cNvPr id="112" name="Google Shape;112;p5"/>
-          <p:cNvSpPr txBox="1"/>
+          <p:cNvSpPr txBox="1">
+            <a:spLocks noGrp="1"/>
+          </p:cNvSpPr>
           <p:nvPr>
-            <p:ph idx="1" type="body"/>
+            <p:ph type="body" idx="1"/>
           </p:nvPr>
         </p:nvSpPr>
         <p:spPr>
@@ -9138,12 +9629,12 @@
           </a:ln>
         </p:spPr>
         <p:txBody>
-          <a:bodyPr anchorCtr="0" anchor="t" bIns="91425" lIns="91425" spcFirstLastPara="1" rIns="91425" wrap="square" tIns="91425">
+          <a:bodyPr spcFirstLastPara="1" wrap="square" lIns="91425" tIns="91425" rIns="91425" bIns="91425" anchor="t" anchorCtr="0">
             <a:noAutofit/>
           </a:bodyPr>
           <a:lstStyle/>
           <a:p>
-            <a:pPr indent="-317500" lvl="0" marL="457200" rtl="0" algn="l">
+            <a:pPr marL="457200" lvl="0" indent="-317500" algn="l" rtl="0">
               <a:lnSpc>
                 <a:spcPct val="100000"/>
               </a:lnSpc>
@@ -9164,7 +9655,7 @@
             <a:endParaRPr/>
           </a:p>
           <a:p>
-            <a:pPr indent="-317500" lvl="0" marL="457200" rtl="0" algn="l">
+            <a:pPr marL="457200" lvl="0" indent="-317500" algn="l" rtl="0">
               <a:lnSpc>
                 <a:spcPct val="100000"/>
               </a:lnSpc>
@@ -9185,7 +9676,7 @@
             <a:endParaRPr/>
           </a:p>
           <a:p>
-            <a:pPr indent="-317500" lvl="1" marL="914400" rtl="0" algn="l">
+            <a:pPr marL="914400" lvl="1" indent="-317500" algn="l" rtl="0">
               <a:lnSpc>
                 <a:spcPct val="115000"/>
               </a:lnSpc>
@@ -9206,7 +9697,7 @@
             <a:endParaRPr/>
           </a:p>
           <a:p>
-            <a:pPr indent="-317500" lvl="1" marL="914400" rtl="0" algn="l">
+            <a:pPr marL="914400" lvl="1" indent="-317500" algn="l" rtl="0">
               <a:lnSpc>
                 <a:spcPct val="115000"/>
               </a:lnSpc>
@@ -9227,7 +9718,7 @@
             <a:endParaRPr/>
           </a:p>
           <a:p>
-            <a:pPr indent="-317500" lvl="1" marL="914400" rtl="0" algn="l">
+            <a:pPr marL="914400" lvl="1" indent="-317500" algn="l" rtl="0">
               <a:lnSpc>
                 <a:spcPct val="115000"/>
               </a:lnSpc>
@@ -9248,7 +9739,7 @@
             <a:endParaRPr/>
           </a:p>
           <a:p>
-            <a:pPr indent="-317500" lvl="1" marL="914400" rtl="0" algn="l">
+            <a:pPr marL="914400" lvl="1" indent="-317500" algn="l" rtl="0">
               <a:lnSpc>
                 <a:spcPct val="115000"/>
               </a:lnSpc>
@@ -9294,7 +9785,7 @@
             <a:blip r:embed="rId4">
               <a:alphaModFix/>
             </a:blip>
-            <a:srcRect b="0" l="60127" r="0" t="0"/>
+            <a:srcRect l="60127"/>
             <a:stretch/>
           </p:blipFill>
           <p:spPr>
@@ -9321,7 +9812,7 @@
             <a:blip r:embed="rId4">
               <a:alphaModFix/>
             </a:blip>
-            <a:srcRect b="0" l="60127" r="0" t="0"/>
+            <a:srcRect l="60127"/>
             <a:stretch/>
           </p:blipFill>
           <p:spPr>
@@ -9348,11 +9839,11 @@
 </file>
 
 <file path=ppt/slides/slide6.xml><?xml version="1.0" encoding="utf-8"?>
-<p:sld xmlns:a="http://schemas.openxmlformats.org/drawingml/2006/main" xmlns:r="http://schemas.openxmlformats.org/officeDocument/2006/relationships" xmlns:mc="http://schemas.openxmlformats.org/markup-compatibility/2006" xmlns:mv="urn:schemas-microsoft-com:mac:vml" xmlns:p="http://schemas.openxmlformats.org/presentationml/2006/main" xmlns:c="http://schemas.openxmlformats.org/drawingml/2006/chart" xmlns:dgm="http://schemas.openxmlformats.org/drawingml/2006/diagram" xmlns:o="urn:schemas-microsoft-com:office:office" xmlns:v="urn:schemas-microsoft-com:vml" xmlns:pvml="urn:schemas-microsoft-com:office:powerpoint" xmlns:com="http://schemas.openxmlformats.org/drawingml/2006/compatibility" xmlns:p14="http://schemas.microsoft.com/office/powerpoint/2010/main" xmlns:p15="http://schemas.microsoft.com/office/powerpoint/2012/main" xmlns:ahyp="http://schemas.microsoft.com/office/drawing/2018/hyperlinkcolor">
+<p:sld xmlns:a="http://schemas.openxmlformats.org/drawingml/2006/main" xmlns:r="http://schemas.openxmlformats.org/officeDocument/2006/relationships" xmlns:p="http://schemas.openxmlformats.org/presentationml/2006/main">
   <p:cSld>
     <p:spTree>
       <p:nvGrpSpPr>
-        <p:cNvPr id="119" name="Shape 119"/>
+        <p:cNvPr id="1" name="Shape 119"/>
         <p:cNvGrpSpPr/>
         <p:nvPr/>
       </p:nvGrpSpPr>
@@ -9367,16 +9858,18 @@
       <p:pic>
         <p:nvPicPr>
           <p:cNvPr id="120" name="Google Shape;120;p6"/>
-          <p:cNvPicPr preferRelativeResize="0"/>
+          <p:cNvPicPr preferRelativeResize="0">
+            <a:picLocks noGrp="1"/>
+          </p:cNvPicPr>
           <p:nvPr>
-            <p:ph idx="2" type="pic"/>
+            <p:ph type="pic" idx="2"/>
           </p:nvPr>
         </p:nvPicPr>
         <p:blipFill rotWithShape="1">
           <a:blip r:embed="rId3">
             <a:alphaModFix/>
           </a:blip>
-          <a:srcRect b="0" l="0" r="0" t="0"/>
+          <a:srcRect/>
           <a:stretch/>
         </p:blipFill>
         <p:spPr>
@@ -9388,21 +9881,23 @@
             <a:avLst/>
           </a:prstGeom>
           <a:noFill/>
-          <a:ln cap="flat" cmpd="sng" w="9525">
+          <a:ln w="9525" cap="flat" cmpd="sng">
             <a:solidFill>
               <a:schemeClr val="dk2"/>
             </a:solidFill>
             <a:prstDash val="solid"/>
             <a:round/>
-            <a:headEnd len="sm" w="sm" type="none"/>
-            <a:tailEnd len="sm" w="sm" type="none"/>
+            <a:headEnd type="none" w="sm" len="sm"/>
+            <a:tailEnd type="none" w="sm" len="sm"/>
           </a:ln>
         </p:spPr>
       </p:pic>
       <p:sp>
         <p:nvSpPr>
           <p:cNvPr id="121" name="Google Shape;121;p6"/>
-          <p:cNvSpPr txBox="1"/>
+          <p:cNvSpPr txBox="1">
+            <a:spLocks noGrp="1"/>
+          </p:cNvSpPr>
           <p:nvPr>
             <p:ph type="title"/>
           </p:nvPr>
@@ -9421,12 +9916,12 @@
           </a:ln>
         </p:spPr>
         <p:txBody>
-          <a:bodyPr anchorCtr="0" anchor="t" bIns="91425" lIns="91425" spcFirstLastPara="1" rIns="91425" wrap="square" tIns="91425">
+          <a:bodyPr spcFirstLastPara="1" wrap="square" lIns="91425" tIns="91425" rIns="91425" bIns="91425" anchor="t" anchorCtr="0">
             <a:noAutofit/>
           </a:bodyPr>
           <a:lstStyle/>
           <a:p>
-            <a:pPr indent="0" lvl="0" marL="0" rtl="0" algn="l">
+            <a:pPr marL="0" lvl="0" indent="0" algn="l" rtl="0">
               <a:lnSpc>
                 <a:spcPct val="80000"/>
               </a:lnSpc>
@@ -9450,9 +9945,11 @@
       <p:sp>
         <p:nvSpPr>
           <p:cNvPr id="122" name="Google Shape;122;p6"/>
-          <p:cNvSpPr txBox="1"/>
+          <p:cNvSpPr txBox="1">
+            <a:spLocks noGrp="1"/>
+          </p:cNvSpPr>
           <p:nvPr>
-            <p:ph idx="1" type="body"/>
+            <p:ph type="body" idx="1"/>
           </p:nvPr>
         </p:nvSpPr>
         <p:spPr>
@@ -9469,12 +9966,12 @@
           </a:ln>
         </p:spPr>
         <p:txBody>
-          <a:bodyPr anchorCtr="0" anchor="t" bIns="91425" lIns="91425" spcFirstLastPara="1" rIns="91425" wrap="square" tIns="91425">
+          <a:bodyPr spcFirstLastPara="1" wrap="square" lIns="91425" tIns="91425" rIns="91425" bIns="91425" anchor="t" anchorCtr="0">
             <a:noAutofit/>
           </a:bodyPr>
           <a:lstStyle/>
           <a:p>
-            <a:pPr indent="-317500" lvl="0" marL="457200" rtl="0" algn="l">
+            <a:pPr marL="457200" lvl="0" indent="-317500" algn="l" rtl="0">
               <a:lnSpc>
                 <a:spcPct val="100000"/>
               </a:lnSpc>
@@ -9495,7 +9992,7 @@
             <a:endParaRPr/>
           </a:p>
           <a:p>
-            <a:pPr indent="-317500" lvl="0" marL="457200" rtl="0" algn="l">
+            <a:pPr marL="457200" lvl="0" indent="-317500" algn="l" rtl="0">
               <a:lnSpc>
                 <a:spcPct val="100000"/>
               </a:lnSpc>
@@ -9516,7 +10013,7 @@
             <a:endParaRPr/>
           </a:p>
           <a:p>
-            <a:pPr indent="-317500" lvl="0" marL="457200" rtl="0" algn="l">
+            <a:pPr marL="457200" lvl="0" indent="-317500" algn="l" rtl="0">
               <a:lnSpc>
                 <a:spcPct val="100000"/>
               </a:lnSpc>
@@ -9537,7 +10034,7 @@
             <a:endParaRPr/>
           </a:p>
           <a:p>
-            <a:pPr indent="-317500" lvl="0" marL="457200" rtl="0" algn="l">
+            <a:pPr marL="457200" lvl="0" indent="-317500" algn="l" rtl="0">
               <a:lnSpc>
                 <a:spcPct val="100000"/>
               </a:lnSpc>
@@ -9583,7 +10080,7 @@
             <a:blip r:embed="rId4">
               <a:alphaModFix/>
             </a:blip>
-            <a:srcRect b="0" l="60127" r="0" t="0"/>
+            <a:srcRect l="60127"/>
             <a:stretch/>
           </p:blipFill>
           <p:spPr>
@@ -9610,7 +10107,7 @@
             <a:blip r:embed="rId4">
               <a:alphaModFix/>
             </a:blip>
-            <a:srcRect b="0" l="60127" r="0" t="0"/>
+            <a:srcRect l="60127"/>
             <a:stretch/>
           </p:blipFill>
           <p:spPr>
@@ -9637,11 +10134,11 @@
 </file>
 
 <file path=ppt/slides/slide7.xml><?xml version="1.0" encoding="utf-8"?>
-<p:sld xmlns:a="http://schemas.openxmlformats.org/drawingml/2006/main" xmlns:r="http://schemas.openxmlformats.org/officeDocument/2006/relationships" xmlns:mc="http://schemas.openxmlformats.org/markup-compatibility/2006" xmlns:mv="urn:schemas-microsoft-com:mac:vml" xmlns:p="http://schemas.openxmlformats.org/presentationml/2006/main" xmlns:c="http://schemas.openxmlformats.org/drawingml/2006/chart" xmlns:dgm="http://schemas.openxmlformats.org/drawingml/2006/diagram" xmlns:o="urn:schemas-microsoft-com:office:office" xmlns:v="urn:schemas-microsoft-com:vml" xmlns:pvml="urn:schemas-microsoft-com:office:powerpoint" xmlns:com="http://schemas.openxmlformats.org/drawingml/2006/compatibility" xmlns:p14="http://schemas.microsoft.com/office/powerpoint/2010/main" xmlns:p15="http://schemas.microsoft.com/office/powerpoint/2012/main" xmlns:ahyp="http://schemas.microsoft.com/office/drawing/2018/hyperlinkcolor">
+<p:sld xmlns:a="http://schemas.openxmlformats.org/drawingml/2006/main" xmlns:r="http://schemas.openxmlformats.org/officeDocument/2006/relationships" xmlns:p="http://schemas.openxmlformats.org/presentationml/2006/main">
   <p:cSld>
     <p:spTree>
       <p:nvGrpSpPr>
-        <p:cNvPr id="129" name="Shape 129"/>
+        <p:cNvPr id="1" name="Shape 129"/>
         <p:cNvGrpSpPr/>
         <p:nvPr/>
       </p:nvGrpSpPr>
@@ -9656,7 +10153,9 @@
       <p:sp>
         <p:nvSpPr>
           <p:cNvPr id="130" name="Google Shape;130;p7"/>
-          <p:cNvSpPr txBox="1"/>
+          <p:cNvSpPr txBox="1">
+            <a:spLocks noGrp="1"/>
+          </p:cNvSpPr>
           <p:nvPr>
             <p:ph type="title"/>
           </p:nvPr>
@@ -9675,12 +10174,12 @@
           </a:ln>
         </p:spPr>
         <p:txBody>
-          <a:bodyPr anchorCtr="0" anchor="t" bIns="91425" lIns="91425" spcFirstLastPara="1" rIns="91425" wrap="square" tIns="91425">
+          <a:bodyPr spcFirstLastPara="1" wrap="square" lIns="91425" tIns="91425" rIns="91425" bIns="91425" anchor="t" anchorCtr="0">
             <a:noAutofit/>
           </a:bodyPr>
           <a:lstStyle/>
           <a:p>
-            <a:pPr indent="0" lvl="0" marL="0" rtl="0" algn="l">
+            <a:pPr marL="0" lvl="0" indent="0" algn="l" rtl="0">
               <a:lnSpc>
                 <a:spcPct val="100000"/>
               </a:lnSpc>
@@ -9704,9 +10203,11 @@
       <p:sp>
         <p:nvSpPr>
           <p:cNvPr id="131" name="Google Shape;131;p7"/>
-          <p:cNvSpPr txBox="1"/>
+          <p:cNvSpPr txBox="1">
+            <a:spLocks noGrp="1"/>
+          </p:cNvSpPr>
           <p:nvPr>
-            <p:ph idx="1" type="subTitle"/>
+            <p:ph type="subTitle" idx="1"/>
           </p:nvPr>
         </p:nvSpPr>
         <p:spPr>
@@ -9723,12 +10224,12 @@
           </a:ln>
         </p:spPr>
         <p:txBody>
-          <a:bodyPr anchorCtr="0" anchor="t" bIns="91425" lIns="91425" spcFirstLastPara="1" rIns="91425" wrap="square" tIns="91425">
+          <a:bodyPr spcFirstLastPara="1" wrap="square" lIns="91425" tIns="91425" rIns="91425" bIns="91425" anchor="t" anchorCtr="0">
             <a:noAutofit/>
           </a:bodyPr>
           <a:lstStyle/>
           <a:p>
-            <a:pPr indent="-317500" lvl="0" marL="457200" rtl="0" algn="l">
+            <a:pPr marL="457200" lvl="0" indent="-317500" algn="l" rtl="0">
               <a:lnSpc>
                 <a:spcPct val="100000"/>
               </a:lnSpc>
@@ -9741,9 +10242,6 @@
               <a:buSzPts val="1400"/>
               <a:buNone/>
             </a:pPr>
-            <a:r>
-              <a:t/>
-            </a:r>
             <a:endParaRPr/>
           </a:p>
         </p:txBody>
@@ -9757,11 +10255,11 @@
 </file>
 
 <file path=ppt/slides/slide8.xml><?xml version="1.0" encoding="utf-8"?>
-<p:sld xmlns:a="http://schemas.openxmlformats.org/drawingml/2006/main" xmlns:r="http://schemas.openxmlformats.org/officeDocument/2006/relationships" xmlns:mc="http://schemas.openxmlformats.org/markup-compatibility/2006" xmlns:mv="urn:schemas-microsoft-com:mac:vml" xmlns:p="http://schemas.openxmlformats.org/presentationml/2006/main" xmlns:c="http://schemas.openxmlformats.org/drawingml/2006/chart" xmlns:dgm="http://schemas.openxmlformats.org/drawingml/2006/diagram" xmlns:o="urn:schemas-microsoft-com:office:office" xmlns:v="urn:schemas-microsoft-com:vml" xmlns:pvml="urn:schemas-microsoft-com:office:powerpoint" xmlns:com="http://schemas.openxmlformats.org/drawingml/2006/compatibility" xmlns:p14="http://schemas.microsoft.com/office/powerpoint/2010/main" xmlns:p15="http://schemas.microsoft.com/office/powerpoint/2012/main" xmlns:ahyp="http://schemas.microsoft.com/office/drawing/2018/hyperlinkcolor">
+<p:sld xmlns:a="http://schemas.openxmlformats.org/drawingml/2006/main" xmlns:r="http://schemas.openxmlformats.org/officeDocument/2006/relationships" xmlns:p="http://schemas.openxmlformats.org/presentationml/2006/main">
   <p:cSld>
     <p:spTree>
       <p:nvGrpSpPr>
-        <p:cNvPr id="135" name="Shape 135"/>
+        <p:cNvPr id="1" name="Shape 135"/>
         <p:cNvGrpSpPr/>
         <p:nvPr/>
       </p:nvGrpSpPr>
@@ -9776,7 +10274,9 @@
       <p:sp>
         <p:nvSpPr>
           <p:cNvPr id="136" name="Google Shape;136;p8"/>
-          <p:cNvSpPr txBox="1"/>
+          <p:cNvSpPr txBox="1">
+            <a:spLocks noGrp="1"/>
+          </p:cNvSpPr>
           <p:nvPr>
             <p:ph type="title"/>
           </p:nvPr>
@@ -9795,12 +10295,12 @@
           </a:ln>
         </p:spPr>
         <p:txBody>
-          <a:bodyPr anchorCtr="0" anchor="t" bIns="91425" lIns="91425" spcFirstLastPara="1" rIns="91425" wrap="square" tIns="91425">
+          <a:bodyPr spcFirstLastPara="1" wrap="square" lIns="91425" tIns="91425" rIns="91425" bIns="91425" anchor="t" anchorCtr="0">
             <a:noAutofit/>
           </a:bodyPr>
           <a:lstStyle/>
           <a:p>
-            <a:pPr indent="0" lvl="0" marL="0" rtl="0" algn="l">
+            <a:pPr marL="0" lvl="0" indent="0" algn="l" rtl="0">
               <a:lnSpc>
                 <a:spcPct val="100000"/>
               </a:lnSpc>
@@ -9831,7 +10331,7 @@
           <a:blip r:embed="rId3">
             <a:alphaModFix/>
           </a:blip>
-          <a:srcRect b="0" l="0" r="0" t="0"/>
+          <a:srcRect/>
           <a:stretch/>
         </p:blipFill>
         <p:spPr>
@@ -9857,11 +10357,11 @@
 </file>
 
 <file path=ppt/slides/slide9.xml><?xml version="1.0" encoding="utf-8"?>
-<p:sld xmlns:a="http://schemas.openxmlformats.org/drawingml/2006/main" xmlns:r="http://schemas.openxmlformats.org/officeDocument/2006/relationships" xmlns:mc="http://schemas.openxmlformats.org/markup-compatibility/2006" xmlns:mv="urn:schemas-microsoft-com:mac:vml" xmlns:p="http://schemas.openxmlformats.org/presentationml/2006/main" xmlns:c="http://schemas.openxmlformats.org/drawingml/2006/chart" xmlns:dgm="http://schemas.openxmlformats.org/drawingml/2006/diagram" xmlns:o="urn:schemas-microsoft-com:office:office" xmlns:v="urn:schemas-microsoft-com:vml" xmlns:pvml="urn:schemas-microsoft-com:office:powerpoint" xmlns:com="http://schemas.openxmlformats.org/drawingml/2006/compatibility" xmlns:p14="http://schemas.microsoft.com/office/powerpoint/2010/main" xmlns:p15="http://schemas.microsoft.com/office/powerpoint/2012/main" xmlns:ahyp="http://schemas.microsoft.com/office/drawing/2018/hyperlinkcolor">
+<p:sld xmlns:a="http://schemas.openxmlformats.org/drawingml/2006/main" xmlns:r="http://schemas.openxmlformats.org/officeDocument/2006/relationships" xmlns:p="http://schemas.openxmlformats.org/presentationml/2006/main">
   <p:cSld>
     <p:spTree>
       <p:nvGrpSpPr>
-        <p:cNvPr id="141" name="Shape 141"/>
+        <p:cNvPr id="1" name="Shape 141"/>
         <p:cNvGrpSpPr/>
         <p:nvPr/>
       </p:nvGrpSpPr>
@@ -9876,7 +10376,9 @@
       <p:sp>
         <p:nvSpPr>
           <p:cNvPr id="142" name="Google Shape;142;g3ab975baed4_0_0"/>
-          <p:cNvSpPr txBox="1"/>
+          <p:cNvSpPr txBox="1">
+            <a:spLocks noGrp="1"/>
+          </p:cNvSpPr>
           <p:nvPr>
             <p:ph type="title"/>
           </p:nvPr>
@@ -9891,12 +10393,12 @@
           </a:prstGeom>
         </p:spPr>
         <p:txBody>
-          <a:bodyPr anchorCtr="0" anchor="t" bIns="91425" lIns="91425" spcFirstLastPara="1" rIns="91425" wrap="square" tIns="91425">
+          <a:bodyPr spcFirstLastPara="1" wrap="square" lIns="91425" tIns="91425" rIns="91425" bIns="91425" anchor="t" anchorCtr="0">
             <a:noAutofit/>
           </a:bodyPr>
           <a:lstStyle/>
           <a:p>
-            <a:pPr indent="0" lvl="0" marL="0" rtl="0" algn="ctr">
+            <a:pPr marL="0" lvl="0" indent="0" algn="ctr" rtl="0">
               <a:spcBef>
                 <a:spcPts val="0"/>
               </a:spcBef>
@@ -9950,7 +10452,288 @@
 </file>
 
 <file path=ppt/theme/theme1.xml><?xml version="1.0" encoding="utf-8"?>
-<a:theme xmlns:a="http://schemas.openxmlformats.org/drawingml/2006/main" xmlns:r="http://schemas.openxmlformats.org/officeDocument/2006/relationships">
+<a:theme xmlns:a="http://schemas.openxmlformats.org/drawingml/2006/main" name="My Presentation Template">
+  <a:themeElements>
+    <a:clrScheme name="Simple Light">
+      <a:dk1>
+        <a:srgbClr val="191919"/>
+      </a:dk1>
+      <a:lt1>
+        <a:srgbClr val="EFEFEF"/>
+      </a:lt1>
+      <a:dk2>
+        <a:srgbClr val="707070"/>
+      </a:dk2>
+      <a:lt2>
+        <a:srgbClr val="C1C1BF"/>
+      </a:lt2>
+      <a:accent1>
+        <a:srgbClr val="FFFFFF"/>
+      </a:accent1>
+      <a:accent2>
+        <a:srgbClr val="FFFFFF"/>
+      </a:accent2>
+      <a:accent3>
+        <a:srgbClr val="FFFFFF"/>
+      </a:accent3>
+      <a:accent4>
+        <a:srgbClr val="FFFFFF"/>
+      </a:accent4>
+      <a:accent5>
+        <a:srgbClr val="FFFFFF"/>
+      </a:accent5>
+      <a:accent6>
+        <a:srgbClr val="FFFFFF"/>
+      </a:accent6>
+      <a:hlink>
+        <a:srgbClr val="191919"/>
+      </a:hlink>
+      <a:folHlink>
+        <a:srgbClr val="0097A7"/>
+      </a:folHlink>
+    </a:clrScheme>
+    <a:fontScheme name="Office">
+      <a:majorFont>
+        <a:latin typeface="Arial"/>
+        <a:ea typeface=""/>
+        <a:cs typeface=""/>
+        <a:font script="Jpan" typeface="ＭＳ Ｐゴシック"/>
+        <a:font script="Hang" typeface="맑은 고딕"/>
+        <a:font script="Hans" typeface="宋体"/>
+        <a:font script="Hant" typeface="新細明體"/>
+        <a:font script="Arab" typeface="Times New Roman"/>
+        <a:font script="Hebr" typeface="Times New Roman"/>
+        <a:font script="Thai" typeface="Angsana New"/>
+        <a:font script="Ethi" typeface="Nyala"/>
+        <a:font script="Beng" typeface="Vrinda"/>
+        <a:font script="Gujr" typeface="Shruti"/>
+        <a:font script="Khmr" typeface="MoolBoran"/>
+        <a:font script="Knda" typeface="Tunga"/>
+        <a:font script="Guru" typeface="Raavi"/>
+        <a:font script="Cans" typeface="Euphemia"/>
+        <a:font script="Cher" typeface="Plantagenet Cherokee"/>
+        <a:font script="Yiii" typeface="Microsoft Yi Baiti"/>
+        <a:font script="Tibt" typeface="Microsoft Himalaya"/>
+        <a:font script="Thaa" typeface="MV Boli"/>
+        <a:font script="Deva" typeface="Mangal"/>
+        <a:font script="Telu" typeface="Gautami"/>
+        <a:font script="Taml" typeface="Latha"/>
+        <a:font script="Syrc" typeface="Estrangelo Edessa"/>
+        <a:font script="Orya" typeface="Kalinga"/>
+        <a:font script="Mlym" typeface="Kartika"/>
+        <a:font script="Laoo" typeface="DokChampa"/>
+        <a:font script="Sinh" typeface="Iskoola Pota"/>
+        <a:font script="Mong" typeface="Mongolian Baiti"/>
+        <a:font script="Viet" typeface="Times New Roman"/>
+        <a:font script="Uigh" typeface="Microsoft Uighur"/>
+        <a:font script="Geor" typeface="Sylfaen"/>
+      </a:majorFont>
+      <a:minorFont>
+        <a:latin typeface="Arial"/>
+        <a:ea typeface=""/>
+        <a:cs typeface=""/>
+        <a:font script="Jpan" typeface="ＭＳ Ｐゴシック"/>
+        <a:font script="Hang" typeface="맑은 고딕"/>
+        <a:font script="Hans" typeface="宋体"/>
+        <a:font script="Hant" typeface="新細明體"/>
+        <a:font script="Arab" typeface="Arial"/>
+        <a:font script="Hebr" typeface="Arial"/>
+        <a:font script="Thai" typeface="Cordia New"/>
+        <a:font script="Ethi" typeface="Nyala"/>
+        <a:font script="Beng" typeface="Vrinda"/>
+        <a:font script="Gujr" typeface="Shruti"/>
+        <a:font script="Khmr" typeface="DaunPenh"/>
+        <a:font script="Knda" typeface="Tunga"/>
+        <a:font script="Guru" typeface="Raavi"/>
+        <a:font script="Cans" typeface="Euphemia"/>
+        <a:font script="Cher" typeface="Plantagenet Cherokee"/>
+        <a:font script="Yiii" typeface="Microsoft Yi Baiti"/>
+        <a:font script="Tibt" typeface="Microsoft Himalaya"/>
+        <a:font script="Thaa" typeface="MV Boli"/>
+        <a:font script="Deva" typeface="Mangal"/>
+        <a:font script="Telu" typeface="Gautami"/>
+        <a:font script="Taml" typeface="Latha"/>
+        <a:font script="Syrc" typeface="Estrangelo Edessa"/>
+        <a:font script="Orya" typeface="Kalinga"/>
+        <a:font script="Mlym" typeface="Kartika"/>
+        <a:font script="Laoo" typeface="DokChampa"/>
+        <a:font script="Sinh" typeface="Iskoola Pota"/>
+        <a:font script="Mong" typeface="Mongolian Baiti"/>
+        <a:font script="Viet" typeface="Arial"/>
+        <a:font script="Uigh" typeface="Microsoft Uighur"/>
+        <a:font script="Geor" typeface="Sylfaen"/>
+      </a:minorFont>
+    </a:fontScheme>
+    <a:fmtScheme name="Office">
+      <a:fillStyleLst>
+        <a:solidFill>
+          <a:schemeClr val="phClr"/>
+        </a:solidFill>
+        <a:gradFill rotWithShape="1">
+          <a:gsLst>
+            <a:gs pos="0">
+              <a:schemeClr val="phClr">
+                <a:tint val="50000"/>
+                <a:satMod val="300000"/>
+              </a:schemeClr>
+            </a:gs>
+            <a:gs pos="35000">
+              <a:schemeClr val="phClr">
+                <a:tint val="37000"/>
+                <a:satMod val="300000"/>
+              </a:schemeClr>
+            </a:gs>
+            <a:gs pos="100000">
+              <a:schemeClr val="phClr">
+                <a:tint val="15000"/>
+                <a:satMod val="350000"/>
+              </a:schemeClr>
+            </a:gs>
+          </a:gsLst>
+          <a:lin ang="16200000" scaled="1"/>
+        </a:gradFill>
+        <a:gradFill rotWithShape="1">
+          <a:gsLst>
+            <a:gs pos="0">
+              <a:schemeClr val="phClr">
+                <a:tint val="100000"/>
+                <a:shade val="100000"/>
+                <a:satMod val="130000"/>
+              </a:schemeClr>
+            </a:gs>
+            <a:gs pos="100000">
+              <a:schemeClr val="phClr">
+                <a:tint val="50000"/>
+                <a:shade val="100000"/>
+                <a:satMod val="350000"/>
+              </a:schemeClr>
+            </a:gs>
+          </a:gsLst>
+          <a:lin ang="16200000" scaled="0"/>
+        </a:gradFill>
+      </a:fillStyleLst>
+      <a:lnStyleLst>
+        <a:ln w="9525" cap="flat" cmpd="sng" algn="ctr">
+          <a:solidFill>
+            <a:schemeClr val="phClr">
+              <a:shade val="95000"/>
+              <a:satMod val="105000"/>
+            </a:schemeClr>
+          </a:solidFill>
+          <a:prstDash val="solid"/>
+        </a:ln>
+        <a:ln w="25400" cap="flat" cmpd="sng" algn="ctr">
+          <a:solidFill>
+            <a:schemeClr val="phClr"/>
+          </a:solidFill>
+          <a:prstDash val="solid"/>
+        </a:ln>
+        <a:ln w="38100" cap="flat" cmpd="sng" algn="ctr">
+          <a:solidFill>
+            <a:schemeClr val="phClr"/>
+          </a:solidFill>
+          <a:prstDash val="solid"/>
+        </a:ln>
+      </a:lnStyleLst>
+      <a:effectStyleLst>
+        <a:effectStyle>
+          <a:effectLst>
+            <a:outerShdw blurRad="40000" dist="20000" dir="5400000" rotWithShape="0">
+              <a:srgbClr val="000000">
+                <a:alpha val="38000"/>
+              </a:srgbClr>
+            </a:outerShdw>
+          </a:effectLst>
+        </a:effectStyle>
+        <a:effectStyle>
+          <a:effectLst>
+            <a:outerShdw blurRad="40000" dist="23000" dir="5400000" rotWithShape="0">
+              <a:srgbClr val="000000">
+                <a:alpha val="35000"/>
+              </a:srgbClr>
+            </a:outerShdw>
+          </a:effectLst>
+        </a:effectStyle>
+        <a:effectStyle>
+          <a:effectLst>
+            <a:outerShdw blurRad="40000" dist="23000" dir="5400000" rotWithShape="0">
+              <a:srgbClr val="000000">
+                <a:alpha val="35000"/>
+              </a:srgbClr>
+            </a:outerShdw>
+          </a:effectLst>
+          <a:scene3d>
+            <a:camera prst="orthographicFront">
+              <a:rot lat="0" lon="0" rev="0"/>
+            </a:camera>
+            <a:lightRig rig="threePt" dir="t">
+              <a:rot lat="0" lon="0" rev="1200000"/>
+            </a:lightRig>
+          </a:scene3d>
+          <a:sp3d>
+            <a:bevelT w="63500" h="25400"/>
+          </a:sp3d>
+        </a:effectStyle>
+      </a:effectStyleLst>
+      <a:bgFillStyleLst>
+        <a:solidFill>
+          <a:schemeClr val="phClr"/>
+        </a:solidFill>
+        <a:gradFill rotWithShape="1">
+          <a:gsLst>
+            <a:gs pos="0">
+              <a:schemeClr val="phClr">
+                <a:tint val="40000"/>
+                <a:satMod val="350000"/>
+              </a:schemeClr>
+            </a:gs>
+            <a:gs pos="40000">
+              <a:schemeClr val="phClr">
+                <a:tint val="45000"/>
+                <a:shade val="99000"/>
+                <a:satMod val="350000"/>
+              </a:schemeClr>
+            </a:gs>
+            <a:gs pos="100000">
+              <a:schemeClr val="phClr">
+                <a:shade val="20000"/>
+                <a:satMod val="255000"/>
+              </a:schemeClr>
+            </a:gs>
+          </a:gsLst>
+          <a:path path="circle">
+            <a:fillToRect l="50000" t="-80000" r="50000" b="180000"/>
+          </a:path>
+        </a:gradFill>
+        <a:gradFill rotWithShape="1">
+          <a:gsLst>
+            <a:gs pos="0">
+              <a:schemeClr val="phClr">
+                <a:tint val="80000"/>
+                <a:satMod val="300000"/>
+              </a:schemeClr>
+            </a:gs>
+            <a:gs pos="100000">
+              <a:schemeClr val="phClr">
+                <a:shade val="30000"/>
+                <a:satMod val="200000"/>
+              </a:schemeClr>
+            </a:gs>
+          </a:gsLst>
+          <a:path path="circle">
+            <a:fillToRect l="50000" t="50000" r="50000" b="50000"/>
+          </a:path>
+        </a:gradFill>
+      </a:bgFillStyleLst>
+    </a:fmtScheme>
+  </a:themeElements>
+  <a:objectDefaults/>
+  <a:extraClrSchemeLst/>
+</a:theme>
+</file>
+
+<file path=ppt/theme/theme2.xml><?xml version="1.0" encoding="utf-8"?>
+<a:theme xmlns:a="http://schemas.openxmlformats.org/drawingml/2006/main">
   <a:themeElements>
     <a:clrScheme name="Default">
       <a:dk1>
@@ -10225,284 +11008,7 @@
       </a:bgFillStyleLst>
     </a:fmtScheme>
   </a:themeElements>
-</a:theme>
-</file>
-
-<file path=ppt/theme/theme2.xml><?xml version="1.0" encoding="utf-8"?>
-<a:theme xmlns:a="http://schemas.openxmlformats.org/drawingml/2006/main" xmlns:r="http://schemas.openxmlformats.org/officeDocument/2006/relationships" name="My Presentation Template">
-  <a:themeElements>
-    <a:clrScheme name="Simple Light">
-      <a:dk1>
-        <a:srgbClr val="191919"/>
-      </a:dk1>
-      <a:lt1>
-        <a:srgbClr val="EFEFEF"/>
-      </a:lt1>
-      <a:dk2>
-        <a:srgbClr val="707070"/>
-      </a:dk2>
-      <a:lt2>
-        <a:srgbClr val="C1C1BF"/>
-      </a:lt2>
-      <a:accent1>
-        <a:srgbClr val="FFFFFF"/>
-      </a:accent1>
-      <a:accent2>
-        <a:srgbClr val="FFFFFF"/>
-      </a:accent2>
-      <a:accent3>
-        <a:srgbClr val="FFFFFF"/>
-      </a:accent3>
-      <a:accent4>
-        <a:srgbClr val="FFFFFF"/>
-      </a:accent4>
-      <a:accent5>
-        <a:srgbClr val="FFFFFF"/>
-      </a:accent5>
-      <a:accent6>
-        <a:srgbClr val="FFFFFF"/>
-      </a:accent6>
-      <a:hlink>
-        <a:srgbClr val="191919"/>
-      </a:hlink>
-      <a:folHlink>
-        <a:srgbClr val="0097A7"/>
-      </a:folHlink>
-    </a:clrScheme>
-    <a:fontScheme name="Office">
-      <a:majorFont>
-        <a:latin typeface="Arial"/>
-        <a:ea typeface=""/>
-        <a:cs typeface=""/>
-        <a:font script="Jpan" typeface="ＭＳ Ｐゴシック"/>
-        <a:font script="Hang" typeface="맑은 고딕"/>
-        <a:font script="Hans" typeface="宋体"/>
-        <a:font script="Hant" typeface="新細明體"/>
-        <a:font script="Arab" typeface="Times New Roman"/>
-        <a:font script="Hebr" typeface="Times New Roman"/>
-        <a:font script="Thai" typeface="Angsana New"/>
-        <a:font script="Ethi" typeface="Nyala"/>
-        <a:font script="Beng" typeface="Vrinda"/>
-        <a:font script="Gujr" typeface="Shruti"/>
-        <a:font script="Khmr" typeface="MoolBoran"/>
-        <a:font script="Knda" typeface="Tunga"/>
-        <a:font script="Guru" typeface="Raavi"/>
-        <a:font script="Cans" typeface="Euphemia"/>
-        <a:font script="Cher" typeface="Plantagenet Cherokee"/>
-        <a:font script="Yiii" typeface="Microsoft Yi Baiti"/>
-        <a:font script="Tibt" typeface="Microsoft Himalaya"/>
-        <a:font script="Thaa" typeface="MV Boli"/>
-        <a:font script="Deva" typeface="Mangal"/>
-        <a:font script="Telu" typeface="Gautami"/>
-        <a:font script="Taml" typeface="Latha"/>
-        <a:font script="Syrc" typeface="Estrangelo Edessa"/>
-        <a:font script="Orya" typeface="Kalinga"/>
-        <a:font script="Mlym" typeface="Kartika"/>
-        <a:font script="Laoo" typeface="DokChampa"/>
-        <a:font script="Sinh" typeface="Iskoola Pota"/>
-        <a:font script="Mong" typeface="Mongolian Baiti"/>
-        <a:font script="Viet" typeface="Times New Roman"/>
-        <a:font script="Uigh" typeface="Microsoft Uighur"/>
-        <a:font script="Geor" typeface="Sylfaen"/>
-      </a:majorFont>
-      <a:minorFont>
-        <a:latin typeface="Arial"/>
-        <a:ea typeface=""/>
-        <a:cs typeface=""/>
-        <a:font script="Jpan" typeface="ＭＳ Ｐゴシック"/>
-        <a:font script="Hang" typeface="맑은 고딕"/>
-        <a:font script="Hans" typeface="宋体"/>
-        <a:font script="Hant" typeface="新細明體"/>
-        <a:font script="Arab" typeface="Arial"/>
-        <a:font script="Hebr" typeface="Arial"/>
-        <a:font script="Thai" typeface="Cordia New"/>
-        <a:font script="Ethi" typeface="Nyala"/>
-        <a:font script="Beng" typeface="Vrinda"/>
-        <a:font script="Gujr" typeface="Shruti"/>
-        <a:font script="Khmr" typeface="DaunPenh"/>
-        <a:font script="Knda" typeface="Tunga"/>
-        <a:font script="Guru" typeface="Raavi"/>
-        <a:font script="Cans" typeface="Euphemia"/>
-        <a:font script="Cher" typeface="Plantagenet Cherokee"/>
-        <a:font script="Yiii" typeface="Microsoft Yi Baiti"/>
-        <a:font script="Tibt" typeface="Microsoft Himalaya"/>
-        <a:font script="Thaa" typeface="MV Boli"/>
-        <a:font script="Deva" typeface="Mangal"/>
-        <a:font script="Telu" typeface="Gautami"/>
-        <a:font script="Taml" typeface="Latha"/>
-        <a:font script="Syrc" typeface="Estrangelo Edessa"/>
-        <a:font script="Orya" typeface="Kalinga"/>
-        <a:font script="Mlym" typeface="Kartika"/>
-        <a:font script="Laoo" typeface="DokChampa"/>
-        <a:font script="Sinh" typeface="Iskoola Pota"/>
-        <a:font script="Mong" typeface="Mongolian Baiti"/>
-        <a:font script="Viet" typeface="Arial"/>
-        <a:font script="Uigh" typeface="Microsoft Uighur"/>
-        <a:font script="Geor" typeface="Sylfaen"/>
-      </a:minorFont>
-    </a:fontScheme>
-    <a:fmtScheme name="Office">
-      <a:fillStyleLst>
-        <a:solidFill>
-          <a:schemeClr val="phClr"/>
-        </a:solidFill>
-        <a:gradFill rotWithShape="1">
-          <a:gsLst>
-            <a:gs pos="0">
-              <a:schemeClr val="phClr">
-                <a:tint val="50000"/>
-                <a:satMod val="300000"/>
-              </a:schemeClr>
-            </a:gs>
-            <a:gs pos="35000">
-              <a:schemeClr val="phClr">
-                <a:tint val="37000"/>
-                <a:satMod val="300000"/>
-              </a:schemeClr>
-            </a:gs>
-            <a:gs pos="100000">
-              <a:schemeClr val="phClr">
-                <a:tint val="15000"/>
-                <a:satMod val="350000"/>
-              </a:schemeClr>
-            </a:gs>
-          </a:gsLst>
-          <a:lin ang="16200000" scaled="1"/>
-        </a:gradFill>
-        <a:gradFill rotWithShape="1">
-          <a:gsLst>
-            <a:gs pos="0">
-              <a:schemeClr val="phClr">
-                <a:tint val="100000"/>
-                <a:shade val="100000"/>
-                <a:satMod val="130000"/>
-              </a:schemeClr>
-            </a:gs>
-            <a:gs pos="100000">
-              <a:schemeClr val="phClr">
-                <a:tint val="50000"/>
-                <a:shade val="100000"/>
-                <a:satMod val="350000"/>
-              </a:schemeClr>
-            </a:gs>
-          </a:gsLst>
-          <a:lin ang="16200000" scaled="0"/>
-        </a:gradFill>
-      </a:fillStyleLst>
-      <a:lnStyleLst>
-        <a:ln w="9525" cap="flat" cmpd="sng" algn="ctr">
-          <a:solidFill>
-            <a:schemeClr val="phClr">
-              <a:shade val="95000"/>
-              <a:satMod val="105000"/>
-            </a:schemeClr>
-          </a:solidFill>
-          <a:prstDash val="solid"/>
-        </a:ln>
-        <a:ln w="25400" cap="flat" cmpd="sng" algn="ctr">
-          <a:solidFill>
-            <a:schemeClr val="phClr"/>
-          </a:solidFill>
-          <a:prstDash val="solid"/>
-        </a:ln>
-        <a:ln w="38100" cap="flat" cmpd="sng" algn="ctr">
-          <a:solidFill>
-            <a:schemeClr val="phClr"/>
-          </a:solidFill>
-          <a:prstDash val="solid"/>
-        </a:ln>
-      </a:lnStyleLst>
-      <a:effectStyleLst>
-        <a:effectStyle>
-          <a:effectLst>
-            <a:outerShdw blurRad="40000" dist="20000" dir="5400000" rotWithShape="0">
-              <a:srgbClr val="000000">
-                <a:alpha val="38000"/>
-              </a:srgbClr>
-            </a:outerShdw>
-          </a:effectLst>
-        </a:effectStyle>
-        <a:effectStyle>
-          <a:effectLst>
-            <a:outerShdw blurRad="40000" dist="23000" dir="5400000" rotWithShape="0">
-              <a:srgbClr val="000000">
-                <a:alpha val="35000"/>
-              </a:srgbClr>
-            </a:outerShdw>
-          </a:effectLst>
-        </a:effectStyle>
-        <a:effectStyle>
-          <a:effectLst>
-            <a:outerShdw blurRad="40000" dist="23000" dir="5400000" rotWithShape="0">
-              <a:srgbClr val="000000">
-                <a:alpha val="35000"/>
-              </a:srgbClr>
-            </a:outerShdw>
-          </a:effectLst>
-          <a:scene3d>
-            <a:camera prst="orthographicFront">
-              <a:rot lat="0" lon="0" rev="0"/>
-            </a:camera>
-            <a:lightRig rig="threePt" dir="t">
-              <a:rot lat="0" lon="0" rev="1200000"/>
-            </a:lightRig>
-          </a:scene3d>
-          <a:sp3d>
-            <a:bevelT w="63500" h="25400"/>
-          </a:sp3d>
-        </a:effectStyle>
-      </a:effectStyleLst>
-      <a:bgFillStyleLst>
-        <a:solidFill>
-          <a:schemeClr val="phClr"/>
-        </a:solidFill>
-        <a:gradFill rotWithShape="1">
-          <a:gsLst>
-            <a:gs pos="0">
-              <a:schemeClr val="phClr">
-                <a:tint val="40000"/>
-                <a:satMod val="350000"/>
-              </a:schemeClr>
-            </a:gs>
-            <a:gs pos="40000">
-              <a:schemeClr val="phClr">
-                <a:tint val="45000"/>
-                <a:shade val="99000"/>
-                <a:satMod val="350000"/>
-              </a:schemeClr>
-            </a:gs>
-            <a:gs pos="100000">
-              <a:schemeClr val="phClr">
-                <a:shade val="20000"/>
-                <a:satMod val="255000"/>
-              </a:schemeClr>
-            </a:gs>
-          </a:gsLst>
-          <a:path path="circle">
-            <a:fillToRect l="50000" t="-80000" r="50000" b="180000"/>
-          </a:path>
-        </a:gradFill>
-        <a:gradFill rotWithShape="1">
-          <a:gsLst>
-            <a:gs pos="0">
-              <a:schemeClr val="phClr">
-                <a:tint val="80000"/>
-                <a:satMod val="300000"/>
-              </a:schemeClr>
-            </a:gs>
-            <a:gs pos="100000">
-              <a:schemeClr val="phClr">
-                <a:shade val="30000"/>
-                <a:satMod val="200000"/>
-              </a:schemeClr>
-            </a:gs>
-          </a:gsLst>
-          <a:path path="circle">
-            <a:fillToRect l="50000" t="50000" r="50000" b="50000"/>
-          </a:path>
-        </a:gradFill>
-      </a:bgFillStyleLst>
-    </a:fmtScheme>
-  </a:themeElements>
+  <a:objectDefaults/>
+  <a:extraClrSchemeLst/>
 </a:theme>
 </file>
--- a/Kepfeldolgozas_arcdetektalas_2025.pptx
+++ b/Kepfeldolgozas_arcdetektalas_2025.pptx
@@ -1,42 +1,42 @@
 
 <file path=ppt/presentation.xml><?xml version="1.0" encoding="utf-8"?>
-<p:presentation xmlns:a="http://schemas.openxmlformats.org/drawingml/2006/main" xmlns:r="http://schemas.openxmlformats.org/officeDocument/2006/relationships" xmlns:p="http://schemas.openxmlformats.org/presentationml/2006/main" strictFirstAndLastChars="0" embedTrueTypeFonts="1" saveSubsetFonts="1" autoCompressPictures="0">
+<p:presentation xmlns:a="http://schemas.openxmlformats.org/drawingml/2006/main" xmlns:r="http://schemas.openxmlformats.org/officeDocument/2006/relationships" xmlns:mc="http://schemas.openxmlformats.org/markup-compatibility/2006" xmlns:mv="urn:schemas-microsoft-com:mac:vml" xmlns:p="http://schemas.openxmlformats.org/presentationml/2006/main" xmlns:c="http://schemas.openxmlformats.org/drawingml/2006/chart" xmlns:dgm="http://schemas.openxmlformats.org/drawingml/2006/diagram" xmlns:o="urn:schemas-microsoft-com:office:office" xmlns:v="urn:schemas-microsoft-com:vml" xmlns:pvml="urn:schemas-microsoft-com:office:powerpoint" xmlns:com="http://schemas.openxmlformats.org/drawingml/2006/compatibility" xmlns:p14="http://schemas.microsoft.com/office/powerpoint/2010/main" xmlns:p15="http://schemas.microsoft.com/office/powerpoint/2012/main" xmlns:ahyp="http://schemas.microsoft.com/office/drawing/2018/hyperlinkcolor" autoCompressPictures="0" embedTrueTypeFonts="1" strictFirstAndLastChars="0" saveSubsetFonts="1">
   <p:sldMasterIdLst>
-    <p:sldMasterId id="2147483648" r:id="rId1"/>
+    <p:sldMasterId id="2147483661" r:id="rId4"/>
   </p:sldMasterIdLst>
   <p:notesMasterIdLst>
-    <p:notesMasterId r:id="rId13"/>
+    <p:notesMasterId r:id="rId5"/>
   </p:notesMasterIdLst>
   <p:sldIdLst>
-    <p:sldId id="256" r:id="rId2"/>
-    <p:sldId id="257" r:id="rId3"/>
-    <p:sldId id="258" r:id="rId4"/>
-    <p:sldId id="259" r:id="rId5"/>
-    <p:sldId id="260" r:id="rId6"/>
-    <p:sldId id="261" r:id="rId7"/>
-    <p:sldId id="262" r:id="rId8"/>
-    <p:sldId id="263" r:id="rId9"/>
-    <p:sldId id="264" r:id="rId10"/>
-    <p:sldId id="265" r:id="rId11"/>
-    <p:sldId id="266" r:id="rId12"/>
+    <p:sldId id="256" r:id="rId6"/>
+    <p:sldId id="257" r:id="rId7"/>
+    <p:sldId id="258" r:id="rId8"/>
+    <p:sldId id="259" r:id="rId9"/>
+    <p:sldId id="260" r:id="rId10"/>
+    <p:sldId id="261" r:id="rId11"/>
+    <p:sldId id="262" r:id="rId12"/>
+    <p:sldId id="263" r:id="rId13"/>
+    <p:sldId id="264" r:id="rId14"/>
+    <p:sldId id="265" r:id="rId15"/>
+    <p:sldId id="266" r:id="rId16"/>
   </p:sldIdLst>
-  <p:sldSz cx="9144000" cy="5143500" type="screen16x9"/>
+  <p:sldSz cy="5143500" cx="9144000"/>
   <p:notesSz cx="6858000" cy="9144000"/>
   <p:embeddedFontLst>
     <p:embeddedFont>
-      <p:font typeface="Roboto Mono" panose="00000009000000000000" pitchFamily="49" charset="0"/>
-      <p:regular r:id="rId14"/>
-      <p:bold r:id="rId15"/>
-      <p:italic r:id="rId16"/>
-      <p:boldItalic r:id="rId17"/>
+      <p:font typeface="VT323"/>
+      <p:regular r:id="rId17"/>
     </p:embeddedFont>
     <p:embeddedFont>
-      <p:font typeface="VT323" panose="020B0604020202020204" charset="0"/>
+      <p:font typeface="Roboto Mono"/>
       <p:regular r:id="rId18"/>
+      <p:bold r:id="rId19"/>
+      <p:italic r:id="rId20"/>
+      <p:boldItalic r:id="rId21"/>
     </p:embeddedFont>
   </p:embeddedFontLst>
   <p:defaultTextStyle>
-    <a:defPPr marR="0" lvl="0" algn="l" rtl="0">
+    <a:defPPr lvl="0" marR="0" rtl="0" algn="l">
       <a:lnSpc>
         <a:spcPct val="100000"/>
       </a:lnSpc>
@@ -47,7 +47,7 @@
         <a:spcPts val="0"/>
       </a:spcAft>
     </a:defPPr>
-    <a:lvl1pPr marR="0" lvl="0" algn="l" rtl="0">
+    <a:lvl1pPr lvl="0" marR="0" rtl="0" algn="l">
       <a:lnSpc>
         <a:spcPct val="100000"/>
       </a:lnSpc>
@@ -61,7 +61,7 @@
         <a:srgbClr val="000000"/>
       </a:buClr>
       <a:buFont typeface="Arial"/>
-      <a:defRPr sz="1400" b="0" i="0" u="none" strike="noStrike" cap="none">
+      <a:defRPr b="0" i="0" sz="1400" u="none" cap="none" strike="noStrike">
         <a:solidFill>
           <a:srgbClr val="000000"/>
         </a:solidFill>
@@ -71,7 +71,7 @@
         <a:sym typeface="Arial"/>
       </a:defRPr>
     </a:lvl1pPr>
-    <a:lvl2pPr marR="0" lvl="1" algn="l" rtl="0">
+    <a:lvl2pPr lvl="1" marR="0" rtl="0" algn="l">
       <a:lnSpc>
         <a:spcPct val="100000"/>
       </a:lnSpc>
@@ -85,7 +85,7 @@
         <a:srgbClr val="000000"/>
       </a:buClr>
       <a:buFont typeface="Arial"/>
-      <a:defRPr sz="1400" b="0" i="0" u="none" strike="noStrike" cap="none">
+      <a:defRPr b="0" i="0" sz="1400" u="none" cap="none" strike="noStrike">
         <a:solidFill>
           <a:srgbClr val="000000"/>
         </a:solidFill>
@@ -95,7 +95,7 @@
         <a:sym typeface="Arial"/>
       </a:defRPr>
     </a:lvl2pPr>
-    <a:lvl3pPr marR="0" lvl="2" algn="l" rtl="0">
+    <a:lvl3pPr lvl="2" marR="0" rtl="0" algn="l">
       <a:lnSpc>
         <a:spcPct val="100000"/>
       </a:lnSpc>
@@ -109,7 +109,7 @@
         <a:srgbClr val="000000"/>
       </a:buClr>
       <a:buFont typeface="Arial"/>
-      <a:defRPr sz="1400" b="0" i="0" u="none" strike="noStrike" cap="none">
+      <a:defRPr b="0" i="0" sz="1400" u="none" cap="none" strike="noStrike">
         <a:solidFill>
           <a:srgbClr val="000000"/>
         </a:solidFill>
@@ -119,7 +119,7 @@
         <a:sym typeface="Arial"/>
       </a:defRPr>
     </a:lvl3pPr>
-    <a:lvl4pPr marR="0" lvl="3" algn="l" rtl="0">
+    <a:lvl4pPr lvl="3" marR="0" rtl="0" algn="l">
       <a:lnSpc>
         <a:spcPct val="100000"/>
       </a:lnSpc>
@@ -133,7 +133,7 @@
         <a:srgbClr val="000000"/>
       </a:buClr>
       <a:buFont typeface="Arial"/>
-      <a:defRPr sz="1400" b="0" i="0" u="none" strike="noStrike" cap="none">
+      <a:defRPr b="0" i="0" sz="1400" u="none" cap="none" strike="noStrike">
         <a:solidFill>
           <a:srgbClr val="000000"/>
         </a:solidFill>
@@ -143,7 +143,7 @@
         <a:sym typeface="Arial"/>
       </a:defRPr>
     </a:lvl4pPr>
-    <a:lvl5pPr marR="0" lvl="4" algn="l" rtl="0">
+    <a:lvl5pPr lvl="4" marR="0" rtl="0" algn="l">
       <a:lnSpc>
         <a:spcPct val="100000"/>
       </a:lnSpc>
@@ -157,7 +157,7 @@
         <a:srgbClr val="000000"/>
       </a:buClr>
       <a:buFont typeface="Arial"/>
-      <a:defRPr sz="1400" b="0" i="0" u="none" strike="noStrike" cap="none">
+      <a:defRPr b="0" i="0" sz="1400" u="none" cap="none" strike="noStrike">
         <a:solidFill>
           <a:srgbClr val="000000"/>
         </a:solidFill>
@@ -167,7 +167,7 @@
         <a:sym typeface="Arial"/>
       </a:defRPr>
     </a:lvl5pPr>
-    <a:lvl6pPr marR="0" lvl="5" algn="l" rtl="0">
+    <a:lvl6pPr lvl="5" marR="0" rtl="0" algn="l">
       <a:lnSpc>
         <a:spcPct val="100000"/>
       </a:lnSpc>
@@ -181,7 +181,7 @@
         <a:srgbClr val="000000"/>
       </a:buClr>
       <a:buFont typeface="Arial"/>
-      <a:defRPr sz="1400" b="0" i="0" u="none" strike="noStrike" cap="none">
+      <a:defRPr b="0" i="0" sz="1400" u="none" cap="none" strike="noStrike">
         <a:solidFill>
           <a:srgbClr val="000000"/>
         </a:solidFill>
@@ -191,7 +191,7 @@
         <a:sym typeface="Arial"/>
       </a:defRPr>
     </a:lvl6pPr>
-    <a:lvl7pPr marR="0" lvl="6" algn="l" rtl="0">
+    <a:lvl7pPr lvl="6" marR="0" rtl="0" algn="l">
       <a:lnSpc>
         <a:spcPct val="100000"/>
       </a:lnSpc>
@@ -205,7 +205,7 @@
         <a:srgbClr val="000000"/>
       </a:buClr>
       <a:buFont typeface="Arial"/>
-      <a:defRPr sz="1400" b="0" i="0" u="none" strike="noStrike" cap="none">
+      <a:defRPr b="0" i="0" sz="1400" u="none" cap="none" strike="noStrike">
         <a:solidFill>
           <a:srgbClr val="000000"/>
         </a:solidFill>
@@ -215,7 +215,7 @@
         <a:sym typeface="Arial"/>
       </a:defRPr>
     </a:lvl7pPr>
-    <a:lvl8pPr marR="0" lvl="7" algn="l" rtl="0">
+    <a:lvl8pPr lvl="7" marR="0" rtl="0" algn="l">
       <a:lnSpc>
         <a:spcPct val="100000"/>
       </a:lnSpc>
@@ -229,7 +229,7 @@
         <a:srgbClr val="000000"/>
       </a:buClr>
       <a:buFont typeface="Arial"/>
-      <a:defRPr sz="1400" b="0" i="0" u="none" strike="noStrike" cap="none">
+      <a:defRPr b="0" i="0" sz="1400" u="none" cap="none" strike="noStrike">
         <a:solidFill>
           <a:srgbClr val="000000"/>
         </a:solidFill>
@@ -239,7 +239,7 @@
         <a:sym typeface="Arial"/>
       </a:defRPr>
     </a:lvl8pPr>
-    <a:lvl9pPr marR="0" lvl="8" algn="l" rtl="0">
+    <a:lvl9pPr lvl="8" marR="0" rtl="0" algn="l">
       <a:lnSpc>
         <a:spcPct val="100000"/>
       </a:lnSpc>
@@ -253,7 +253,7 @@
         <a:srgbClr val="000000"/>
       </a:buClr>
       <a:buFont typeface="Arial"/>
-      <a:defRPr sz="1400" b="0" i="0" u="none" strike="noStrike" cap="none">
+      <a:defRPr b="0" i="0" sz="1400" u="none" cap="none" strike="noStrike">
         <a:solidFill>
           <a:srgbClr val="000000"/>
         </a:solidFill>
@@ -264,65 +264,22 @@
       </a:defRPr>
     </a:lvl9pPr>
   </p:defaultTextStyle>
-  <p:extLst>
-    <p:ext uri="GoogleSlidesCustomDataVersion2">
-      <go:slidesCustomData xmlns:go="http://customooxmlschemas.google.com/" xmlns:ahyp="http://schemas.microsoft.com/office/drawing/2018/hyperlinkcolor" xmlns:p15="http://schemas.microsoft.com/office/powerpoint/2012/main" xmlns:p14="http://schemas.microsoft.com/office/powerpoint/2010/main" xmlns:com="http://schemas.openxmlformats.org/drawingml/2006/compatibility" xmlns:pvml="urn:schemas-microsoft-com:office:powerpoint" xmlns:v="urn:schemas-microsoft-com:vml" xmlns:o="urn:schemas-microsoft-com:office:office" xmlns:dgm="http://schemas.openxmlformats.org/drawingml/2006/diagram" xmlns:c="http://schemas.openxmlformats.org/drawingml/2006/chart" xmlns:mv="urn:schemas-microsoft-com:mac:vml" xmlns:mc="http://schemas.openxmlformats.org/markup-compatibility/2006" xmlns="" r:id="rId22" roundtripDataSignature="AMtx7midvaqHSCGY2xx/2se+om9oRLs40w=="/>
-    </p:ext>
-  </p:extLst>
 </p:presentation>
 </file>
 
-<file path=ppt/revisionInfo.xml><?xml version="1.0" encoding="utf-8"?>
-<p1510:revInfo xmlns:a="http://schemas.openxmlformats.org/drawingml/2006/main" xmlns:r="http://schemas.openxmlformats.org/officeDocument/2006/relationships" xmlns:p1510="http://schemas.microsoft.com/office/powerpoint/2015/10/main">
-  <p1510:revLst>
-    <p1510:client id="{2DA720AF-26CB-DD14-7DC2-496CE2FD46D3}" v="27" dt="2025-11-30T14:45:01.519"/>
-  </p1510:revLst>
-</p1510:revInfo>
-</file>
-
-<file path=ppt/changesInfos/changesInfo1.xml><?xml version="1.0" encoding="utf-8"?>
-<pc:chgInfo xmlns:a="http://schemas.openxmlformats.org/drawingml/2006/main" xmlns:r="http://schemas.openxmlformats.org/officeDocument/2006/relationships" xmlns:ac="http://schemas.microsoft.com/office/drawing/2013/main/command" xmlns:pc="http://schemas.microsoft.com/office/powerpoint/2013/main/command">
-  <pc:docChgLst>
-    <pc:chgData name="Előd Kálmán" userId="919d0f6f46e042c3" providerId="Windows Live" clId="Web-{2DA720AF-26CB-DD14-7DC2-496CE2FD46D3}"/>
-    <pc:docChg chg="modSld">
-      <pc:chgData name="Előd Kálmán" userId="919d0f6f46e042c3" providerId="Windows Live" clId="Web-{2DA720AF-26CB-DD14-7DC2-496CE2FD46D3}" dt="2025-11-30T14:45:01.519" v="22" actId="20577"/>
-      <pc:docMkLst>
-        <pc:docMk/>
-      </pc:docMkLst>
-      <pc:sldChg chg="modSp">
-        <pc:chgData name="Előd Kálmán" userId="919d0f6f46e042c3" providerId="Windows Live" clId="Web-{2DA720AF-26CB-DD14-7DC2-496CE2FD46D3}" dt="2025-11-30T14:45:01.519" v="22" actId="20577"/>
-        <pc:sldMkLst>
-          <pc:docMk/>
-          <pc:sldMk cId="0" sldId="259"/>
-        </pc:sldMkLst>
-        <pc:spChg chg="mod">
-          <ac:chgData name="Előd Kálmán" userId="919d0f6f46e042c3" providerId="Windows Live" clId="Web-{2DA720AF-26CB-DD14-7DC2-496CE2FD46D3}" dt="2025-11-30T14:45:01.519" v="22" actId="20577"/>
-          <ac:spMkLst>
-            <pc:docMk/>
-            <pc:sldMk cId="0" sldId="259"/>
-            <ac:spMk id="102" creationId="{00000000-0000-0000-0000-000000000000}"/>
-          </ac:spMkLst>
-        </pc:spChg>
-      </pc:sldChg>
-    </pc:docChg>
-  </pc:docChgLst>
-</pc:chgInfo>
-</file>
-
 <file path=ppt/notesMasters/notesMaster1.xml><?xml version="1.0" encoding="utf-8"?>
-<p:notesMaster xmlns:a="http://schemas.openxmlformats.org/drawingml/2006/main" xmlns:r="http://schemas.openxmlformats.org/officeDocument/2006/relationships" xmlns:p="http://schemas.openxmlformats.org/presentationml/2006/main">
+<p:notesMaster xmlns:a="http://schemas.openxmlformats.org/drawingml/2006/main" xmlns:r="http://schemas.openxmlformats.org/officeDocument/2006/relationships" xmlns:mc="http://schemas.openxmlformats.org/markup-compatibility/2006" xmlns:mv="urn:schemas-microsoft-com:mac:vml" xmlns:p="http://schemas.openxmlformats.org/presentationml/2006/main" xmlns:c="http://schemas.openxmlformats.org/drawingml/2006/chart" xmlns:dgm="http://schemas.openxmlformats.org/drawingml/2006/diagram" xmlns:o="urn:schemas-microsoft-com:office:office" xmlns:v="urn:schemas-microsoft-com:vml" xmlns:pvml="urn:schemas-microsoft-com:office:powerpoint" xmlns:com="http://schemas.openxmlformats.org/drawingml/2006/compatibility" xmlns:p14="http://schemas.microsoft.com/office/powerpoint/2010/main" xmlns:p15="http://schemas.microsoft.com/office/powerpoint/2012/main" xmlns:ahyp="http://schemas.microsoft.com/office/drawing/2018/hyperlinkcolor">
   <p:cSld>
     <p:bg>
       <p:bgPr>
         <a:solidFill>
           <a:schemeClr val="lt1"/>
         </a:solidFill>
-        <a:effectLst/>
       </p:bgPr>
     </p:bg>
     <p:spTree>
       <p:nvGrpSpPr>
-        <p:cNvPr id="1" name="Shape 2"/>
+        <p:cNvPr id="2" name="Shape 2"/>
         <p:cNvGrpSpPr/>
         <p:nvPr/>
       </p:nvGrpSpPr>
@@ -337,11 +294,9 @@
       <p:sp>
         <p:nvSpPr>
           <p:cNvPr id="3" name="Google Shape;3;n"/>
-          <p:cNvSpPr>
-            <a:spLocks noGrp="1" noRot="1" noChangeAspect="1"/>
-          </p:cNvSpPr>
+          <p:cNvSpPr/>
           <p:nvPr>
-            <p:ph type="sldImg" idx="2"/>
+            <p:ph idx="2" type="sldImg"/>
           </p:nvPr>
         </p:nvSpPr>
         <p:spPr>
@@ -350,13 +305,9 @@
             <a:ext cx="6096075" cy="3429000"/>
           </a:xfrm>
           <a:custGeom>
-            <a:avLst/>
-            <a:gdLst/>
-            <a:ahLst/>
-            <a:cxnLst/>
-            <a:rect l="l" t="t" r="r" b="b"/>
+            <a:rect b="b" l="l" r="r" t="t"/>
             <a:pathLst>
-              <a:path w="120000" h="120000" extrusionOk="0">
+              <a:path extrusionOk="0" h="120000" w="120000">
                 <a:moveTo>
                   <a:pt x="0" y="0"/>
                 </a:moveTo>
@@ -374,25 +325,23 @@
             </a:pathLst>
           </a:custGeom>
           <a:noFill/>
-          <a:ln w="9525" cap="flat" cmpd="sng">
+          <a:ln cap="flat" cmpd="sng" w="9525">
             <a:solidFill>
               <a:srgbClr val="000000"/>
             </a:solidFill>
             <a:prstDash val="solid"/>
             <a:round/>
-            <a:headEnd type="none" w="sm" len="sm"/>
-            <a:tailEnd type="none" w="sm" len="sm"/>
+            <a:headEnd len="sm" w="sm" type="none"/>
+            <a:tailEnd len="sm" w="sm" type="none"/>
           </a:ln>
         </p:spPr>
       </p:sp>
       <p:sp>
         <p:nvSpPr>
           <p:cNvPr id="4" name="Google Shape;4;n"/>
-          <p:cNvSpPr txBox="1">
-            <a:spLocks noGrp="1"/>
-          </p:cNvSpPr>
+          <p:cNvSpPr txBox="1"/>
           <p:nvPr>
-            <p:ph type="body" idx="1"/>
+            <p:ph idx="1" type="body"/>
           </p:nvPr>
         </p:nvSpPr>
         <p:spPr>
@@ -409,11 +358,11 @@
           </a:ln>
         </p:spPr>
         <p:txBody>
-          <a:bodyPr spcFirstLastPara="1" wrap="square" lIns="91425" tIns="91425" rIns="91425" bIns="91425" anchor="t" anchorCtr="0">
+          <a:bodyPr anchorCtr="0" anchor="t" bIns="91425" lIns="91425" spcFirstLastPara="1" rIns="91425" wrap="square" tIns="91425">
             <a:noAutofit/>
           </a:bodyPr>
           <a:lstStyle>
-            <a:lvl1pPr marL="457200" marR="0" lvl="0" indent="-298450" algn="l" rtl="0">
+            <a:lvl1pPr indent="-298450" lvl="0" marL="457200" marR="0" rtl="0" algn="l">
               <a:lnSpc>
                 <a:spcPct val="100000"/>
               </a:lnSpc>
@@ -429,7 +378,7 @@
               <a:buSzPts val="1100"/>
               <a:buFont typeface="Arial"/>
               <a:buChar char="●"/>
-              <a:defRPr sz="1100" b="0" i="0" u="none" strike="noStrike" cap="none">
+              <a:defRPr b="0" i="0" sz="1100" u="none" cap="none" strike="noStrike">
                 <a:solidFill>
                   <a:srgbClr val="000000"/>
                 </a:solidFill>
@@ -439,7 +388,7 @@
                 <a:sym typeface="Arial"/>
               </a:defRPr>
             </a:lvl1pPr>
-            <a:lvl2pPr marL="914400" marR="0" lvl="1" indent="-298450" algn="l" rtl="0">
+            <a:lvl2pPr indent="-298450" lvl="1" marL="914400" marR="0" rtl="0" algn="l">
               <a:lnSpc>
                 <a:spcPct val="100000"/>
               </a:lnSpc>
@@ -455,7 +404,7 @@
               <a:buSzPts val="1100"/>
               <a:buFont typeface="Arial"/>
               <a:buChar char="○"/>
-              <a:defRPr sz="1100" b="0" i="0" u="none" strike="noStrike" cap="none">
+              <a:defRPr b="0" i="0" sz="1100" u="none" cap="none" strike="noStrike">
                 <a:solidFill>
                   <a:srgbClr val="000000"/>
                 </a:solidFill>
@@ -465,7 +414,7 @@
                 <a:sym typeface="Arial"/>
               </a:defRPr>
             </a:lvl2pPr>
-            <a:lvl3pPr marL="1371600" marR="0" lvl="2" indent="-298450" algn="l" rtl="0">
+            <a:lvl3pPr indent="-298450" lvl="2" marL="1371600" marR="0" rtl="0" algn="l">
               <a:lnSpc>
                 <a:spcPct val="100000"/>
               </a:lnSpc>
@@ -481,7 +430,7 @@
               <a:buSzPts val="1100"/>
               <a:buFont typeface="Arial"/>
               <a:buChar char="■"/>
-              <a:defRPr sz="1100" b="0" i="0" u="none" strike="noStrike" cap="none">
+              <a:defRPr b="0" i="0" sz="1100" u="none" cap="none" strike="noStrike">
                 <a:solidFill>
                   <a:srgbClr val="000000"/>
                 </a:solidFill>
@@ -491,7 +440,7 @@
                 <a:sym typeface="Arial"/>
               </a:defRPr>
             </a:lvl3pPr>
-            <a:lvl4pPr marL="1828800" marR="0" lvl="3" indent="-298450" algn="l" rtl="0">
+            <a:lvl4pPr indent="-298450" lvl="3" marL="1828800" marR="0" rtl="0" algn="l">
               <a:lnSpc>
                 <a:spcPct val="100000"/>
               </a:lnSpc>
@@ -507,7 +456,7 @@
               <a:buSzPts val="1100"/>
               <a:buFont typeface="Arial"/>
               <a:buChar char="●"/>
-              <a:defRPr sz="1100" b="0" i="0" u="none" strike="noStrike" cap="none">
+              <a:defRPr b="0" i="0" sz="1100" u="none" cap="none" strike="noStrike">
                 <a:solidFill>
                   <a:srgbClr val="000000"/>
                 </a:solidFill>
@@ -517,7 +466,7 @@
                 <a:sym typeface="Arial"/>
               </a:defRPr>
             </a:lvl4pPr>
-            <a:lvl5pPr marL="2286000" marR="0" lvl="4" indent="-298450" algn="l" rtl="0">
+            <a:lvl5pPr indent="-298450" lvl="4" marL="2286000" marR="0" rtl="0" algn="l">
               <a:lnSpc>
                 <a:spcPct val="100000"/>
               </a:lnSpc>
@@ -533,7 +482,7 @@
               <a:buSzPts val="1100"/>
               <a:buFont typeface="Arial"/>
               <a:buChar char="○"/>
-              <a:defRPr sz="1100" b="0" i="0" u="none" strike="noStrike" cap="none">
+              <a:defRPr b="0" i="0" sz="1100" u="none" cap="none" strike="noStrike">
                 <a:solidFill>
                   <a:srgbClr val="000000"/>
                 </a:solidFill>
@@ -543,7 +492,7 @@
                 <a:sym typeface="Arial"/>
               </a:defRPr>
             </a:lvl5pPr>
-            <a:lvl6pPr marL="2743200" marR="0" lvl="5" indent="-298450" algn="l" rtl="0">
+            <a:lvl6pPr indent="-298450" lvl="5" marL="2743200" marR="0" rtl="0" algn="l">
               <a:lnSpc>
                 <a:spcPct val="100000"/>
               </a:lnSpc>
@@ -559,7 +508,7 @@
               <a:buSzPts val="1100"/>
               <a:buFont typeface="Arial"/>
               <a:buChar char="■"/>
-              <a:defRPr sz="1100" b="0" i="0" u="none" strike="noStrike" cap="none">
+              <a:defRPr b="0" i="0" sz="1100" u="none" cap="none" strike="noStrike">
                 <a:solidFill>
                   <a:srgbClr val="000000"/>
                 </a:solidFill>
@@ -569,7 +518,7 @@
                 <a:sym typeface="Arial"/>
               </a:defRPr>
             </a:lvl6pPr>
-            <a:lvl7pPr marL="3200400" marR="0" lvl="6" indent="-298450" algn="l" rtl="0">
+            <a:lvl7pPr indent="-298450" lvl="6" marL="3200400" marR="0" rtl="0" algn="l">
               <a:lnSpc>
                 <a:spcPct val="100000"/>
               </a:lnSpc>
@@ -585,7 +534,7 @@
               <a:buSzPts val="1100"/>
               <a:buFont typeface="Arial"/>
               <a:buChar char="●"/>
-              <a:defRPr sz="1100" b="0" i="0" u="none" strike="noStrike" cap="none">
+              <a:defRPr b="0" i="0" sz="1100" u="none" cap="none" strike="noStrike">
                 <a:solidFill>
                   <a:srgbClr val="000000"/>
                 </a:solidFill>
@@ -595,7 +544,7 @@
                 <a:sym typeface="Arial"/>
               </a:defRPr>
             </a:lvl7pPr>
-            <a:lvl8pPr marL="3657600" marR="0" lvl="7" indent="-298450" algn="l" rtl="0">
+            <a:lvl8pPr indent="-298450" lvl="7" marL="3657600" marR="0" rtl="0" algn="l">
               <a:lnSpc>
                 <a:spcPct val="100000"/>
               </a:lnSpc>
@@ -611,7 +560,7 @@
               <a:buSzPts val="1100"/>
               <a:buFont typeface="Arial"/>
               <a:buChar char="○"/>
-              <a:defRPr sz="1100" b="0" i="0" u="none" strike="noStrike" cap="none">
+              <a:defRPr b="0" i="0" sz="1100" u="none" cap="none" strike="noStrike">
                 <a:solidFill>
                   <a:srgbClr val="000000"/>
                 </a:solidFill>
@@ -621,7 +570,7 @@
                 <a:sym typeface="Arial"/>
               </a:defRPr>
             </a:lvl8pPr>
-            <a:lvl9pPr marL="4114800" marR="0" lvl="8" indent="-298450" algn="l" rtl="0">
+            <a:lvl9pPr indent="-298450" lvl="8" marL="4114800" marR="0" rtl="0" algn="l">
               <a:lnSpc>
                 <a:spcPct val="100000"/>
               </a:lnSpc>
@@ -637,7 +586,7 @@
               <a:buSzPts val="1100"/>
               <a:buFont typeface="Arial"/>
               <a:buChar char="■"/>
-              <a:defRPr sz="1100" b="0" i="0" u="none" strike="noStrike" cap="none">
+              <a:defRPr b="0" i="0" sz="1100" u="none" cap="none" strike="noStrike">
                 <a:solidFill>
                   <a:srgbClr val="000000"/>
                 </a:solidFill>
@@ -648,16 +597,14 @@
               </a:defRPr>
             </a:lvl9pPr>
           </a:lstStyle>
-          <a:p>
-            <a:endParaRPr/>
-          </a:p>
+          <a:p/>
         </p:txBody>
       </p:sp>
     </p:spTree>
   </p:cSld>
-  <p:clrMap bg1="lt1" tx1="dk1" bg2="dk2" tx2="lt2" accent1="accent1" accent2="accent2" accent3="accent3" accent4="accent4" accent5="accent5" accent6="accent6" hlink="hlink" folHlink="folHlink"/>
+  <p:clrMap accent1="accent1" accent2="accent2" accent3="accent3" accent4="accent4" accent5="accent5" accent6="accent6" bg1="lt1" bg2="dk2" tx1="dk1" tx2="lt2" folHlink="folHlink" hlink="hlink"/>
   <p:notesStyle>
-    <a:defPPr marR="0" lvl="0" algn="l" rtl="0">
+    <a:defPPr lvl="0" marR="0" rtl="0" algn="l">
       <a:lnSpc>
         <a:spcPct val="100000"/>
       </a:lnSpc>
@@ -668,7 +615,7 @@
         <a:spcPts val="0"/>
       </a:spcAft>
     </a:defPPr>
-    <a:lvl1pPr marR="0" lvl="0" algn="l" rtl="0">
+    <a:lvl1pPr lvl="0" marR="0" rtl="0" algn="l">
       <a:lnSpc>
         <a:spcPct val="100000"/>
       </a:lnSpc>
@@ -682,7 +629,7 @@
         <a:srgbClr val="000000"/>
       </a:buClr>
       <a:buFont typeface="Arial"/>
-      <a:defRPr sz="1400" b="0" i="0" u="none" strike="noStrike" cap="none">
+      <a:defRPr b="0" i="0" sz="1400" u="none" cap="none" strike="noStrike">
         <a:solidFill>
           <a:srgbClr val="000000"/>
         </a:solidFill>
@@ -692,7 +639,7 @@
         <a:sym typeface="Arial"/>
       </a:defRPr>
     </a:lvl1pPr>
-    <a:lvl2pPr marR="0" lvl="1" algn="l" rtl="0">
+    <a:lvl2pPr lvl="1" marR="0" rtl="0" algn="l">
       <a:lnSpc>
         <a:spcPct val="100000"/>
       </a:lnSpc>
@@ -706,7 +653,7 @@
         <a:srgbClr val="000000"/>
       </a:buClr>
       <a:buFont typeface="Arial"/>
-      <a:defRPr sz="1400" b="0" i="0" u="none" strike="noStrike" cap="none">
+      <a:defRPr b="0" i="0" sz="1400" u="none" cap="none" strike="noStrike">
         <a:solidFill>
           <a:srgbClr val="000000"/>
         </a:solidFill>
@@ -716,7 +663,7 @@
         <a:sym typeface="Arial"/>
       </a:defRPr>
     </a:lvl2pPr>
-    <a:lvl3pPr marR="0" lvl="2" algn="l" rtl="0">
+    <a:lvl3pPr lvl="2" marR="0" rtl="0" algn="l">
       <a:lnSpc>
         <a:spcPct val="100000"/>
       </a:lnSpc>
@@ -730,7 +677,7 @@
         <a:srgbClr val="000000"/>
       </a:buClr>
       <a:buFont typeface="Arial"/>
-      <a:defRPr sz="1400" b="0" i="0" u="none" strike="noStrike" cap="none">
+      <a:defRPr b="0" i="0" sz="1400" u="none" cap="none" strike="noStrike">
         <a:solidFill>
           <a:srgbClr val="000000"/>
         </a:solidFill>
@@ -740,7 +687,7 @@
         <a:sym typeface="Arial"/>
       </a:defRPr>
     </a:lvl3pPr>
-    <a:lvl4pPr marR="0" lvl="3" algn="l" rtl="0">
+    <a:lvl4pPr lvl="3" marR="0" rtl="0" algn="l">
       <a:lnSpc>
         <a:spcPct val="100000"/>
       </a:lnSpc>
@@ -754,7 +701,7 @@
         <a:srgbClr val="000000"/>
       </a:buClr>
       <a:buFont typeface="Arial"/>
-      <a:defRPr sz="1400" b="0" i="0" u="none" strike="noStrike" cap="none">
+      <a:defRPr b="0" i="0" sz="1400" u="none" cap="none" strike="noStrike">
         <a:solidFill>
           <a:srgbClr val="000000"/>
         </a:solidFill>
@@ -764,7 +711,7 @@
         <a:sym typeface="Arial"/>
       </a:defRPr>
     </a:lvl4pPr>
-    <a:lvl5pPr marR="0" lvl="4" algn="l" rtl="0">
+    <a:lvl5pPr lvl="4" marR="0" rtl="0" algn="l">
       <a:lnSpc>
         <a:spcPct val="100000"/>
       </a:lnSpc>
@@ -778,7 +725,7 @@
         <a:srgbClr val="000000"/>
       </a:buClr>
       <a:buFont typeface="Arial"/>
-      <a:defRPr sz="1400" b="0" i="0" u="none" strike="noStrike" cap="none">
+      <a:defRPr b="0" i="0" sz="1400" u="none" cap="none" strike="noStrike">
         <a:solidFill>
           <a:srgbClr val="000000"/>
         </a:solidFill>
@@ -788,7 +735,7 @@
         <a:sym typeface="Arial"/>
       </a:defRPr>
     </a:lvl5pPr>
-    <a:lvl6pPr marR="0" lvl="5" algn="l" rtl="0">
+    <a:lvl6pPr lvl="5" marR="0" rtl="0" algn="l">
       <a:lnSpc>
         <a:spcPct val="100000"/>
       </a:lnSpc>
@@ -802,7 +749,7 @@
         <a:srgbClr val="000000"/>
       </a:buClr>
       <a:buFont typeface="Arial"/>
-      <a:defRPr sz="1400" b="0" i="0" u="none" strike="noStrike" cap="none">
+      <a:defRPr b="0" i="0" sz="1400" u="none" cap="none" strike="noStrike">
         <a:solidFill>
           <a:srgbClr val="000000"/>
         </a:solidFill>
@@ -812,7 +759,7 @@
         <a:sym typeface="Arial"/>
       </a:defRPr>
     </a:lvl6pPr>
-    <a:lvl7pPr marR="0" lvl="6" algn="l" rtl="0">
+    <a:lvl7pPr lvl="6" marR="0" rtl="0" algn="l">
       <a:lnSpc>
         <a:spcPct val="100000"/>
       </a:lnSpc>
@@ -826,7 +773,7 @@
         <a:srgbClr val="000000"/>
       </a:buClr>
       <a:buFont typeface="Arial"/>
-      <a:defRPr sz="1400" b="0" i="0" u="none" strike="noStrike" cap="none">
+      <a:defRPr b="0" i="0" sz="1400" u="none" cap="none" strike="noStrike">
         <a:solidFill>
           <a:srgbClr val="000000"/>
         </a:solidFill>
@@ -836,7 +783,7 @@
         <a:sym typeface="Arial"/>
       </a:defRPr>
     </a:lvl7pPr>
-    <a:lvl8pPr marR="0" lvl="7" algn="l" rtl="0">
+    <a:lvl8pPr lvl="7" marR="0" rtl="0" algn="l">
       <a:lnSpc>
         <a:spcPct val="100000"/>
       </a:lnSpc>
@@ -850,7 +797,7 @@
         <a:srgbClr val="000000"/>
       </a:buClr>
       <a:buFont typeface="Arial"/>
-      <a:defRPr sz="1400" b="0" i="0" u="none" strike="noStrike" cap="none">
+      <a:defRPr b="0" i="0" sz="1400" u="none" cap="none" strike="noStrike">
         <a:solidFill>
           <a:srgbClr val="000000"/>
         </a:solidFill>
@@ -860,7 +807,7 @@
         <a:sym typeface="Arial"/>
       </a:defRPr>
     </a:lvl8pPr>
-    <a:lvl9pPr marR="0" lvl="8" algn="l" rtl="0">
+    <a:lvl9pPr lvl="8" marR="0" rtl="0" algn="l">
       <a:lnSpc>
         <a:spcPct val="100000"/>
       </a:lnSpc>
@@ -874,7 +821,7 @@
         <a:srgbClr val="000000"/>
       </a:buClr>
       <a:buFont typeface="Arial"/>
-      <a:defRPr sz="1400" b="0" i="0" u="none" strike="noStrike" cap="none">
+      <a:defRPr b="0" i="0" sz="1400" u="none" cap="none" strike="noStrike">
         <a:solidFill>
           <a:srgbClr val="000000"/>
         </a:solidFill>
@@ -889,11 +836,11 @@
 </file>
 
 <file path=ppt/notesSlides/notesSlide1.xml><?xml version="1.0" encoding="utf-8"?>
-<p:notes xmlns:a="http://schemas.openxmlformats.org/drawingml/2006/main" xmlns:r="http://schemas.openxmlformats.org/officeDocument/2006/relationships" xmlns:p="http://schemas.openxmlformats.org/presentationml/2006/main" showMasterSp="0" showMasterPhAnim="0">
+<p:notes xmlns:a="http://schemas.openxmlformats.org/drawingml/2006/main" xmlns:r="http://schemas.openxmlformats.org/officeDocument/2006/relationships" xmlns:mc="http://schemas.openxmlformats.org/markup-compatibility/2006" xmlns:mv="urn:schemas-microsoft-com:mac:vml" xmlns:p="http://schemas.openxmlformats.org/presentationml/2006/main" xmlns:c="http://schemas.openxmlformats.org/drawingml/2006/chart" xmlns:dgm="http://schemas.openxmlformats.org/drawingml/2006/diagram" xmlns:o="urn:schemas-microsoft-com:office:office" xmlns:v="urn:schemas-microsoft-com:vml" xmlns:pvml="urn:schemas-microsoft-com:office:powerpoint" xmlns:com="http://schemas.openxmlformats.org/drawingml/2006/compatibility" xmlns:p14="http://schemas.microsoft.com/office/powerpoint/2010/main" xmlns:p15="http://schemas.microsoft.com/office/powerpoint/2012/main" xmlns:ahyp="http://schemas.microsoft.com/office/drawing/2018/hyperlinkcolor" showMasterPhAnim="0" showMasterSp="0">
   <p:cSld>
     <p:spTree>
       <p:nvGrpSpPr>
-        <p:cNvPr id="1" name="Shape 77"/>
+        <p:cNvPr id="77" name="Shape 77"/>
         <p:cNvGrpSpPr/>
         <p:nvPr/>
       </p:nvGrpSpPr>
@@ -908,11 +855,9 @@
       <p:sp>
         <p:nvSpPr>
           <p:cNvPr id="78" name="Google Shape;78;p1:notes"/>
-          <p:cNvSpPr>
-            <a:spLocks noGrp="1" noRot="1" noChangeAspect="1"/>
-          </p:cNvSpPr>
+          <p:cNvSpPr/>
           <p:nvPr>
-            <p:ph type="sldImg" idx="2"/>
+            <p:ph idx="2" type="sldImg"/>
           </p:nvPr>
         </p:nvSpPr>
         <p:spPr>
@@ -921,13 +866,9 @@
             <a:ext cx="6096000" cy="3429000"/>
           </a:xfrm>
           <a:custGeom>
-            <a:avLst/>
-            <a:gdLst/>
-            <a:ahLst/>
-            <a:cxnLst/>
-            <a:rect l="l" t="t" r="r" b="b"/>
+            <a:rect b="b" l="l" r="r" t="t"/>
             <a:pathLst>
-              <a:path w="120000" h="120000" extrusionOk="0">
+              <a:path extrusionOk="0" h="120000" w="120000">
                 <a:moveTo>
                   <a:pt x="0" y="0"/>
                 </a:moveTo>
@@ -945,25 +886,23 @@
             </a:pathLst>
           </a:custGeom>
           <a:noFill/>
-          <a:ln w="9525" cap="flat" cmpd="sng">
+          <a:ln cap="flat" cmpd="sng" w="9525">
             <a:solidFill>
               <a:srgbClr val="000000"/>
             </a:solidFill>
             <a:prstDash val="solid"/>
             <a:round/>
-            <a:headEnd type="none" w="sm" len="sm"/>
-            <a:tailEnd type="none" w="sm" len="sm"/>
+            <a:headEnd len="sm" w="sm" type="none"/>
+            <a:tailEnd len="sm" w="sm" type="none"/>
           </a:ln>
         </p:spPr>
       </p:sp>
       <p:sp>
         <p:nvSpPr>
           <p:cNvPr id="79" name="Google Shape;79;p1:notes"/>
-          <p:cNvSpPr txBox="1">
-            <a:spLocks noGrp="1"/>
-          </p:cNvSpPr>
+          <p:cNvSpPr txBox="1"/>
           <p:nvPr>
-            <p:ph type="body" idx="1"/>
+            <p:ph idx="1" type="body"/>
           </p:nvPr>
         </p:nvSpPr>
         <p:spPr>
@@ -980,12 +919,12 @@
           </a:ln>
         </p:spPr>
         <p:txBody>
-          <a:bodyPr spcFirstLastPara="1" wrap="square" lIns="91425" tIns="91425" rIns="91425" bIns="91425" anchor="t" anchorCtr="0">
+          <a:bodyPr anchorCtr="0" anchor="t" bIns="91425" lIns="91425" spcFirstLastPara="1" rIns="91425" wrap="square" tIns="91425">
             <a:noAutofit/>
           </a:bodyPr>
           <a:lstStyle/>
           <a:p>
-            <a:pPr marL="0" lvl="0" indent="0" algn="l" rtl="0">
+            <a:pPr indent="0" lvl="0" marL="0" rtl="0" algn="l">
               <a:lnSpc>
                 <a:spcPct val="100000"/>
               </a:lnSpc>
@@ -998,6 +937,9 @@
               <a:buSzPts val="1100"/>
               <a:buNone/>
             </a:pPr>
+            <a:r>
+              <a:t/>
+            </a:r>
             <a:endParaRPr/>
           </a:p>
         </p:txBody>
@@ -1011,11 +953,11 @@
 </file>
 
 <file path=ppt/notesSlides/notesSlide10.xml><?xml version="1.0" encoding="utf-8"?>
-<p:notes xmlns:a="http://schemas.openxmlformats.org/drawingml/2006/main" xmlns:r="http://schemas.openxmlformats.org/officeDocument/2006/relationships" xmlns:p="http://schemas.openxmlformats.org/presentationml/2006/main" showMasterSp="0" showMasterPhAnim="0">
+<p:notes xmlns:a="http://schemas.openxmlformats.org/drawingml/2006/main" xmlns:r="http://schemas.openxmlformats.org/officeDocument/2006/relationships" xmlns:mc="http://schemas.openxmlformats.org/markup-compatibility/2006" xmlns:mv="urn:schemas-microsoft-com:mac:vml" xmlns:p="http://schemas.openxmlformats.org/presentationml/2006/main" xmlns:c="http://schemas.openxmlformats.org/drawingml/2006/chart" xmlns:dgm="http://schemas.openxmlformats.org/drawingml/2006/diagram" xmlns:o="urn:schemas-microsoft-com:office:office" xmlns:v="urn:schemas-microsoft-com:vml" xmlns:pvml="urn:schemas-microsoft-com:office:powerpoint" xmlns:com="http://schemas.openxmlformats.org/drawingml/2006/compatibility" xmlns:p14="http://schemas.microsoft.com/office/powerpoint/2010/main" xmlns:p15="http://schemas.microsoft.com/office/powerpoint/2012/main" xmlns:ahyp="http://schemas.microsoft.com/office/drawing/2018/hyperlinkcolor" showMasterPhAnim="0" showMasterSp="0">
   <p:cSld>
     <p:spTree>
       <p:nvGrpSpPr>
-        <p:cNvPr id="1" name="Shape 144"/>
+        <p:cNvPr id="145" name="Shape 145"/>
         <p:cNvGrpSpPr/>
         <p:nvPr/>
       </p:nvGrpSpPr>
@@ -1029,12 +971,10 @@
       </p:grpSpPr>
       <p:sp>
         <p:nvSpPr>
-          <p:cNvPr id="145" name="Google Shape;145;p9:notes"/>
-          <p:cNvSpPr txBox="1">
-            <a:spLocks noGrp="1"/>
-          </p:cNvSpPr>
+          <p:cNvPr id="146" name="Google Shape;146;p10:notes"/>
+          <p:cNvSpPr txBox="1"/>
           <p:nvPr>
-            <p:ph type="body" idx="1"/>
+            <p:ph idx="1" type="body"/>
           </p:nvPr>
         </p:nvSpPr>
         <p:spPr>
@@ -1045,34 +985,43 @@
           <a:prstGeom prst="rect">
             <a:avLst/>
           </a:prstGeom>
+          <a:noFill/>
+          <a:ln>
+            <a:noFill/>
+          </a:ln>
         </p:spPr>
         <p:txBody>
-          <a:bodyPr spcFirstLastPara="1" wrap="square" lIns="91425" tIns="91425" rIns="91425" bIns="91425" anchor="t" anchorCtr="0">
+          <a:bodyPr anchorCtr="0" anchor="t" bIns="91425" lIns="91425" spcFirstLastPara="1" rIns="91425" wrap="square" tIns="91425">
             <a:noAutofit/>
           </a:bodyPr>
           <a:lstStyle/>
           <a:p>
-            <a:pPr marL="0" lvl="0" indent="0" algn="l" rtl="0">
-              <a:spcBef>
-                <a:spcPts val="0"/>
-              </a:spcBef>
-              <a:spcAft>
-                <a:spcPts val="0"/>
-              </a:spcAft>
+            <a:pPr indent="0" lvl="0" marL="0" rtl="0" algn="l">
+              <a:lnSpc>
+                <a:spcPct val="100000"/>
+              </a:lnSpc>
+              <a:spcBef>
+                <a:spcPts val="0"/>
+              </a:spcBef>
+              <a:spcAft>
+                <a:spcPts val="0"/>
+              </a:spcAft>
+              <a:buSzPts val="1100"/>
               <a:buNone/>
             </a:pPr>
+            <a:r>
+              <a:t/>
+            </a:r>
             <a:endParaRPr/>
           </a:p>
         </p:txBody>
       </p:sp>
       <p:sp>
         <p:nvSpPr>
-          <p:cNvPr id="146" name="Google Shape;146;p9:notes"/>
-          <p:cNvSpPr>
-            <a:spLocks noGrp="1" noRot="1" noChangeAspect="1"/>
-          </p:cNvSpPr>
+          <p:cNvPr id="147" name="Google Shape;147;p10:notes"/>
+          <p:cNvSpPr/>
           <p:nvPr>
-            <p:ph type="sldImg" idx="2"/>
+            <p:ph idx="2" type="sldImg"/>
           </p:nvPr>
         </p:nvSpPr>
         <p:spPr>
@@ -1081,79 +1030,9 @@
             <a:ext cx="6096000" cy="3429000"/>
           </a:xfrm>
           <a:custGeom>
-            <a:avLst/>
-            <a:gdLst/>
-            <a:ahLst/>
-            <a:cxnLst/>
-            <a:rect l="l" t="t" r="r" b="b"/>
+            <a:rect b="b" l="l" r="r" t="t"/>
             <a:pathLst>
-              <a:path w="120000" h="120000" extrusionOk="0">
-                <a:moveTo>
-                  <a:pt x="0" y="0"/>
-                </a:moveTo>
-                <a:lnTo>
-                  <a:pt x="120000" y="0"/>
-                </a:lnTo>
-                <a:lnTo>
-                  <a:pt x="120000" y="120000"/>
-                </a:lnTo>
-                <a:lnTo>
-                  <a:pt x="0" y="120000"/>
-                </a:lnTo>
-                <a:close/>
-              </a:path>
-            </a:pathLst>
-          </a:custGeom>
-        </p:spPr>
-      </p:sp>
-    </p:spTree>
-  </p:cSld>
-  <p:clrMapOvr>
-    <a:masterClrMapping/>
-  </p:clrMapOvr>
-</p:notes>
-</file>
-
-<file path=ppt/notesSlides/notesSlide11.xml><?xml version="1.0" encoding="utf-8"?>
-<p:notes xmlns:a="http://schemas.openxmlformats.org/drawingml/2006/main" xmlns:r="http://schemas.openxmlformats.org/officeDocument/2006/relationships" xmlns:p="http://schemas.openxmlformats.org/presentationml/2006/main" showMasterSp="0" showMasterPhAnim="0">
-  <p:cSld>
-    <p:spTree>
-      <p:nvGrpSpPr>
-        <p:cNvPr id="1" name="Shape 150"/>
-        <p:cNvGrpSpPr/>
-        <p:nvPr/>
-      </p:nvGrpSpPr>
-      <p:grpSpPr>
-        <a:xfrm>
-          <a:off x="0" y="0"/>
-          <a:ext cx="0" cy="0"/>
-          <a:chOff x="0" y="0"/>
-          <a:chExt cx="0" cy="0"/>
-        </a:xfrm>
-      </p:grpSpPr>
-      <p:sp>
-        <p:nvSpPr>
-          <p:cNvPr id="151" name="Google Shape;151;p10:notes"/>
-          <p:cNvSpPr>
-            <a:spLocks noGrp="1" noRot="1" noChangeAspect="1"/>
-          </p:cNvSpPr>
-          <p:nvPr>
-            <p:ph type="sldImg" idx="2"/>
-          </p:nvPr>
-        </p:nvSpPr>
-        <p:spPr>
-          <a:xfrm>
-            <a:off x="381000" y="685800"/>
-            <a:ext cx="6096000" cy="3429000"/>
-          </a:xfrm>
-          <a:custGeom>
-            <a:avLst/>
-            <a:gdLst/>
-            <a:ahLst/>
-            <a:cxnLst/>
-            <a:rect l="l" t="t" r="r" b="b"/>
-            <a:pathLst>
-              <a:path w="120000" h="120000" extrusionOk="0">
+              <a:path extrusionOk="0" h="120000" w="120000">
                 <a:moveTo>
                   <a:pt x="0" y="0"/>
                 </a:moveTo>
@@ -1171,62 +1050,16 @@
             </a:pathLst>
           </a:custGeom>
           <a:noFill/>
-          <a:ln w="9525" cap="flat" cmpd="sng">
+          <a:ln cap="flat" cmpd="sng" w="9525">
             <a:solidFill>
               <a:srgbClr val="000000"/>
             </a:solidFill>
             <a:prstDash val="solid"/>
             <a:round/>
-            <a:headEnd type="none" w="sm" len="sm"/>
-            <a:tailEnd type="none" w="sm" len="sm"/>
+            <a:headEnd len="sm" w="sm" type="none"/>
+            <a:tailEnd len="sm" w="sm" type="none"/>
           </a:ln>
         </p:spPr>
-      </p:sp>
-      <p:sp>
-        <p:nvSpPr>
-          <p:cNvPr id="152" name="Google Shape;152;p10:notes"/>
-          <p:cNvSpPr txBox="1">
-            <a:spLocks noGrp="1"/>
-          </p:cNvSpPr>
-          <p:nvPr>
-            <p:ph type="body" idx="1"/>
-          </p:nvPr>
-        </p:nvSpPr>
-        <p:spPr>
-          <a:xfrm>
-            <a:off x="685800" y="4343400"/>
-            <a:ext cx="5486400" cy="4114800"/>
-          </a:xfrm>
-          <a:prstGeom prst="rect">
-            <a:avLst/>
-          </a:prstGeom>
-          <a:noFill/>
-          <a:ln>
-            <a:noFill/>
-          </a:ln>
-        </p:spPr>
-        <p:txBody>
-          <a:bodyPr spcFirstLastPara="1" wrap="square" lIns="91425" tIns="91425" rIns="91425" bIns="91425" anchor="t" anchorCtr="0">
-            <a:noAutofit/>
-          </a:bodyPr>
-          <a:lstStyle/>
-          <a:p>
-            <a:pPr marL="0" lvl="0" indent="0" algn="l" rtl="0">
-              <a:lnSpc>
-                <a:spcPct val="100000"/>
-              </a:lnSpc>
-              <a:spcBef>
-                <a:spcPts val="0"/>
-              </a:spcBef>
-              <a:spcAft>
-                <a:spcPts val="0"/>
-              </a:spcAft>
-              <a:buSzPts val="1100"/>
-              <a:buNone/>
-            </a:pPr>
-            <a:endParaRPr/>
-          </a:p>
-        </p:txBody>
       </p:sp>
     </p:spTree>
   </p:cSld>
@@ -1236,12 +1069,12 @@
 </p:notes>
 </file>
 
-<file path=ppt/notesSlides/notesSlide2.xml><?xml version="1.0" encoding="utf-8"?>
-<p:notes xmlns:a="http://schemas.openxmlformats.org/drawingml/2006/main" xmlns:r="http://schemas.openxmlformats.org/officeDocument/2006/relationships" xmlns:p="http://schemas.openxmlformats.org/presentationml/2006/main" showMasterSp="0" showMasterPhAnim="0">
+<file path=ppt/notesSlides/notesSlide11.xml><?xml version="1.0" encoding="utf-8"?>
+<p:notes xmlns:a="http://schemas.openxmlformats.org/drawingml/2006/main" xmlns:r="http://schemas.openxmlformats.org/officeDocument/2006/relationships" xmlns:mc="http://schemas.openxmlformats.org/markup-compatibility/2006" xmlns:mv="urn:schemas-microsoft-com:mac:vml" xmlns:p="http://schemas.openxmlformats.org/presentationml/2006/main" xmlns:c="http://schemas.openxmlformats.org/drawingml/2006/chart" xmlns:dgm="http://schemas.openxmlformats.org/drawingml/2006/diagram" xmlns:o="urn:schemas-microsoft-com:office:office" xmlns:v="urn:schemas-microsoft-com:vml" xmlns:pvml="urn:schemas-microsoft-com:office:powerpoint" xmlns:com="http://schemas.openxmlformats.org/drawingml/2006/compatibility" xmlns:p14="http://schemas.microsoft.com/office/powerpoint/2010/main" xmlns:p15="http://schemas.microsoft.com/office/powerpoint/2012/main" xmlns:ahyp="http://schemas.microsoft.com/office/drawing/2018/hyperlinkcolor" showMasterPhAnim="0" showMasterSp="0">
   <p:cSld>
     <p:spTree>
       <p:nvGrpSpPr>
-        <p:cNvPr id="1" name="Shape 84"/>
+        <p:cNvPr id="151" name="Shape 151"/>
         <p:cNvGrpSpPr/>
         <p:nvPr/>
       </p:nvGrpSpPr>
@@ -1255,12 +1088,10 @@
       </p:grpSpPr>
       <p:sp>
         <p:nvSpPr>
-          <p:cNvPr id="85" name="Google Shape;85;p2:notes"/>
-          <p:cNvSpPr>
-            <a:spLocks noGrp="1" noRot="1" noChangeAspect="1"/>
-          </p:cNvSpPr>
+          <p:cNvPr id="152" name="Google Shape;152;p11:notes"/>
+          <p:cNvSpPr/>
           <p:nvPr>
-            <p:ph type="sldImg" idx="2"/>
+            <p:ph idx="2" type="sldImg"/>
           </p:nvPr>
         </p:nvSpPr>
         <p:spPr>
@@ -1269,13 +1100,9 @@
             <a:ext cx="6096000" cy="3429000"/>
           </a:xfrm>
           <a:custGeom>
-            <a:avLst/>
-            <a:gdLst/>
-            <a:ahLst/>
-            <a:cxnLst/>
-            <a:rect l="l" t="t" r="r" b="b"/>
+            <a:rect b="b" l="l" r="r" t="t"/>
             <a:pathLst>
-              <a:path w="120000" h="120000" extrusionOk="0">
+              <a:path extrusionOk="0" h="120000" w="120000">
                 <a:moveTo>
                   <a:pt x="0" y="0"/>
                 </a:moveTo>
@@ -1293,25 +1120,23 @@
             </a:pathLst>
           </a:custGeom>
           <a:noFill/>
-          <a:ln w="9525" cap="flat" cmpd="sng">
+          <a:ln cap="flat" cmpd="sng" w="9525">
             <a:solidFill>
               <a:srgbClr val="000000"/>
             </a:solidFill>
             <a:prstDash val="solid"/>
             <a:round/>
-            <a:headEnd type="none" w="sm" len="sm"/>
-            <a:tailEnd type="none" w="sm" len="sm"/>
+            <a:headEnd len="sm" w="sm" type="none"/>
+            <a:tailEnd len="sm" w="sm" type="none"/>
           </a:ln>
         </p:spPr>
       </p:sp>
       <p:sp>
         <p:nvSpPr>
-          <p:cNvPr id="86" name="Google Shape;86;p2:notes"/>
-          <p:cNvSpPr txBox="1">
-            <a:spLocks noGrp="1"/>
-          </p:cNvSpPr>
+          <p:cNvPr id="153" name="Google Shape;153;p11:notes"/>
+          <p:cNvSpPr txBox="1"/>
           <p:nvPr>
-            <p:ph type="body" idx="1"/>
+            <p:ph idx="1" type="body"/>
           </p:nvPr>
         </p:nvSpPr>
         <p:spPr>
@@ -1328,12 +1153,12 @@
           </a:ln>
         </p:spPr>
         <p:txBody>
-          <a:bodyPr spcFirstLastPara="1" wrap="square" lIns="91425" tIns="91425" rIns="91425" bIns="91425" anchor="t" anchorCtr="0">
+          <a:bodyPr anchorCtr="0" anchor="t" bIns="91425" lIns="91425" spcFirstLastPara="1" rIns="91425" wrap="square" tIns="91425">
             <a:noAutofit/>
           </a:bodyPr>
           <a:lstStyle/>
           <a:p>
-            <a:pPr marL="0" lvl="0" indent="0" algn="l" rtl="0">
+            <a:pPr indent="0" lvl="0" marL="0" rtl="0" algn="l">
               <a:lnSpc>
                 <a:spcPct val="100000"/>
               </a:lnSpc>
@@ -1346,6 +1171,9 @@
               <a:buSzPts val="1100"/>
               <a:buNone/>
             </a:pPr>
+            <a:r>
+              <a:t/>
+            </a:r>
             <a:endParaRPr/>
           </a:p>
         </p:txBody>
@@ -1358,12 +1186,12 @@
 </p:notes>
 </file>
 
-<file path=ppt/notesSlides/notesSlide3.xml><?xml version="1.0" encoding="utf-8"?>
-<p:notes xmlns:a="http://schemas.openxmlformats.org/drawingml/2006/main" xmlns:r="http://schemas.openxmlformats.org/officeDocument/2006/relationships" xmlns:p="http://schemas.openxmlformats.org/presentationml/2006/main" showMasterSp="0" showMasterPhAnim="0">
+<file path=ppt/notesSlides/notesSlide2.xml><?xml version="1.0" encoding="utf-8"?>
+<p:notes xmlns:a="http://schemas.openxmlformats.org/drawingml/2006/main" xmlns:r="http://schemas.openxmlformats.org/officeDocument/2006/relationships" xmlns:mc="http://schemas.openxmlformats.org/markup-compatibility/2006" xmlns:mv="urn:schemas-microsoft-com:mac:vml" xmlns:p="http://schemas.openxmlformats.org/presentationml/2006/main" xmlns:c="http://schemas.openxmlformats.org/drawingml/2006/chart" xmlns:dgm="http://schemas.openxmlformats.org/drawingml/2006/diagram" xmlns:o="urn:schemas-microsoft-com:office:office" xmlns:v="urn:schemas-microsoft-com:vml" xmlns:pvml="urn:schemas-microsoft-com:office:powerpoint" xmlns:com="http://schemas.openxmlformats.org/drawingml/2006/compatibility" xmlns:p14="http://schemas.microsoft.com/office/powerpoint/2010/main" xmlns:p15="http://schemas.microsoft.com/office/powerpoint/2012/main" xmlns:ahyp="http://schemas.microsoft.com/office/drawing/2018/hyperlinkcolor" showMasterPhAnim="0" showMasterSp="0">
   <p:cSld>
     <p:spTree>
       <p:nvGrpSpPr>
-        <p:cNvPr id="1" name="Shape 90"/>
+        <p:cNvPr id="84" name="Shape 84"/>
         <p:cNvGrpSpPr/>
         <p:nvPr/>
       </p:nvGrpSpPr>
@@ -1377,116 +1205,10 @@
       </p:grpSpPr>
       <p:sp>
         <p:nvSpPr>
-          <p:cNvPr id="91" name="Google Shape;91;p3:notes"/>
-          <p:cNvSpPr txBox="1">
-            <a:spLocks noGrp="1"/>
-          </p:cNvSpPr>
+          <p:cNvPr id="85" name="Google Shape;85;p2:notes"/>
+          <p:cNvSpPr/>
           <p:nvPr>
-            <p:ph type="body" idx="1"/>
-          </p:nvPr>
-        </p:nvSpPr>
-        <p:spPr>
-          <a:xfrm>
-            <a:off x="685800" y="4343400"/>
-            <a:ext cx="5486400" cy="4114800"/>
-          </a:xfrm>
-          <a:prstGeom prst="rect">
-            <a:avLst/>
-          </a:prstGeom>
-        </p:spPr>
-        <p:txBody>
-          <a:bodyPr spcFirstLastPara="1" wrap="square" lIns="91425" tIns="91425" rIns="91425" bIns="91425" anchor="t" anchorCtr="0">
-            <a:noAutofit/>
-          </a:bodyPr>
-          <a:lstStyle/>
-          <a:p>
-            <a:pPr marL="0" lvl="0" indent="0" algn="l" rtl="0">
-              <a:spcBef>
-                <a:spcPts val="0"/>
-              </a:spcBef>
-              <a:spcAft>
-                <a:spcPts val="0"/>
-              </a:spcAft>
-              <a:buNone/>
-            </a:pPr>
-            <a:endParaRPr/>
-          </a:p>
-        </p:txBody>
-      </p:sp>
-      <p:sp>
-        <p:nvSpPr>
-          <p:cNvPr id="92" name="Google Shape;92;p3:notes"/>
-          <p:cNvSpPr>
-            <a:spLocks noGrp="1" noRot="1" noChangeAspect="1"/>
-          </p:cNvSpPr>
-          <p:nvPr>
-            <p:ph type="sldImg" idx="2"/>
-          </p:nvPr>
-        </p:nvSpPr>
-        <p:spPr>
-          <a:xfrm>
-            <a:off x="381300" y="685800"/>
-            <a:ext cx="6096075" cy="3429000"/>
-          </a:xfrm>
-          <a:custGeom>
-            <a:avLst/>
-            <a:gdLst/>
-            <a:ahLst/>
-            <a:cxnLst/>
-            <a:rect l="l" t="t" r="r" b="b"/>
-            <a:pathLst>
-              <a:path w="120000" h="120000" extrusionOk="0">
-                <a:moveTo>
-                  <a:pt x="0" y="0"/>
-                </a:moveTo>
-                <a:lnTo>
-                  <a:pt x="120000" y="0"/>
-                </a:lnTo>
-                <a:lnTo>
-                  <a:pt x="120000" y="120000"/>
-                </a:lnTo>
-                <a:lnTo>
-                  <a:pt x="0" y="120000"/>
-                </a:lnTo>
-                <a:close/>
-              </a:path>
-            </a:pathLst>
-          </a:custGeom>
-        </p:spPr>
-      </p:sp>
-    </p:spTree>
-  </p:cSld>
-  <p:clrMapOvr>
-    <a:masterClrMapping/>
-  </p:clrMapOvr>
-</p:notes>
-</file>
-
-<file path=ppt/notesSlides/notesSlide4.xml><?xml version="1.0" encoding="utf-8"?>
-<p:notes xmlns:a="http://schemas.openxmlformats.org/drawingml/2006/main" xmlns:r="http://schemas.openxmlformats.org/officeDocument/2006/relationships" xmlns:p="http://schemas.openxmlformats.org/presentationml/2006/main" showMasterSp="0" showMasterPhAnim="0">
-  <p:cSld>
-    <p:spTree>
-      <p:nvGrpSpPr>
-        <p:cNvPr id="1" name="Shape 96"/>
-        <p:cNvGrpSpPr/>
-        <p:nvPr/>
-      </p:nvGrpSpPr>
-      <p:grpSpPr>
-        <a:xfrm>
-          <a:off x="0" y="0"/>
-          <a:ext cx="0" cy="0"/>
-          <a:chOff x="0" y="0"/>
-          <a:chExt cx="0" cy="0"/>
-        </a:xfrm>
-      </p:grpSpPr>
-      <p:sp>
-        <p:nvSpPr>
-          <p:cNvPr id="97" name="Google Shape;97;p4:notes"/>
-          <p:cNvSpPr>
-            <a:spLocks noGrp="1" noRot="1" noChangeAspect="1"/>
-          </p:cNvSpPr>
-          <p:nvPr>
-            <p:ph type="sldImg" idx="2"/>
+            <p:ph idx="2" type="sldImg"/>
           </p:nvPr>
         </p:nvSpPr>
         <p:spPr>
@@ -1495,13 +1217,9 @@
             <a:ext cx="6096000" cy="3429000"/>
           </a:xfrm>
           <a:custGeom>
-            <a:avLst/>
-            <a:gdLst/>
-            <a:ahLst/>
-            <a:cxnLst/>
-            <a:rect l="l" t="t" r="r" b="b"/>
+            <a:rect b="b" l="l" r="r" t="t"/>
             <a:pathLst>
-              <a:path w="120000" h="120000" extrusionOk="0">
+              <a:path extrusionOk="0" h="120000" w="120000">
                 <a:moveTo>
                   <a:pt x="0" y="0"/>
                 </a:moveTo>
@@ -1519,25 +1237,23 @@
             </a:pathLst>
           </a:custGeom>
           <a:noFill/>
-          <a:ln w="9525" cap="flat" cmpd="sng">
+          <a:ln cap="flat" cmpd="sng" w="9525">
             <a:solidFill>
               <a:srgbClr val="000000"/>
             </a:solidFill>
             <a:prstDash val="solid"/>
             <a:round/>
-            <a:headEnd type="none" w="sm" len="sm"/>
-            <a:tailEnd type="none" w="sm" len="sm"/>
+            <a:headEnd len="sm" w="sm" type="none"/>
+            <a:tailEnd len="sm" w="sm" type="none"/>
           </a:ln>
         </p:spPr>
       </p:sp>
       <p:sp>
         <p:nvSpPr>
-          <p:cNvPr id="98" name="Google Shape;98;p4:notes"/>
-          <p:cNvSpPr txBox="1">
-            <a:spLocks noGrp="1"/>
-          </p:cNvSpPr>
+          <p:cNvPr id="86" name="Google Shape;86;p2:notes"/>
+          <p:cNvSpPr txBox="1"/>
           <p:nvPr>
-            <p:ph type="body" idx="1"/>
+            <p:ph idx="1" type="body"/>
           </p:nvPr>
         </p:nvSpPr>
         <p:spPr>
@@ -1554,12 +1270,12 @@
           </a:ln>
         </p:spPr>
         <p:txBody>
-          <a:bodyPr spcFirstLastPara="1" wrap="square" lIns="91425" tIns="91425" rIns="91425" bIns="91425" anchor="t" anchorCtr="0">
+          <a:bodyPr anchorCtr="0" anchor="t" bIns="91425" lIns="91425" spcFirstLastPara="1" rIns="91425" wrap="square" tIns="91425">
             <a:noAutofit/>
           </a:bodyPr>
           <a:lstStyle/>
           <a:p>
-            <a:pPr marL="0" lvl="0" indent="0" algn="l" rtl="0">
+            <a:pPr indent="0" lvl="0" marL="0" rtl="0" algn="l">
               <a:lnSpc>
                 <a:spcPct val="100000"/>
               </a:lnSpc>
@@ -1572,6 +1288,9 @@
               <a:buSzPts val="1100"/>
               <a:buNone/>
             </a:pPr>
+            <a:r>
+              <a:t/>
+            </a:r>
             <a:endParaRPr/>
           </a:p>
         </p:txBody>
@@ -1584,12 +1303,12 @@
 </p:notes>
 </file>
 
-<file path=ppt/notesSlides/notesSlide5.xml><?xml version="1.0" encoding="utf-8"?>
-<p:notes xmlns:a="http://schemas.openxmlformats.org/drawingml/2006/main" xmlns:r="http://schemas.openxmlformats.org/officeDocument/2006/relationships" xmlns:p="http://schemas.openxmlformats.org/presentationml/2006/main" showMasterSp="0" showMasterPhAnim="0">
+<file path=ppt/notesSlides/notesSlide3.xml><?xml version="1.0" encoding="utf-8"?>
+<p:notes xmlns:a="http://schemas.openxmlformats.org/drawingml/2006/main" xmlns:r="http://schemas.openxmlformats.org/officeDocument/2006/relationships" xmlns:mc="http://schemas.openxmlformats.org/markup-compatibility/2006" xmlns:mv="urn:schemas-microsoft-com:mac:vml" xmlns:p="http://schemas.openxmlformats.org/presentationml/2006/main" xmlns:c="http://schemas.openxmlformats.org/drawingml/2006/chart" xmlns:dgm="http://schemas.openxmlformats.org/drawingml/2006/diagram" xmlns:o="urn:schemas-microsoft-com:office:office" xmlns:v="urn:schemas-microsoft-com:vml" xmlns:pvml="urn:schemas-microsoft-com:office:powerpoint" xmlns:com="http://schemas.openxmlformats.org/drawingml/2006/compatibility" xmlns:p14="http://schemas.microsoft.com/office/powerpoint/2010/main" xmlns:p15="http://schemas.microsoft.com/office/powerpoint/2012/main" xmlns:ahyp="http://schemas.microsoft.com/office/drawing/2018/hyperlinkcolor" showMasterPhAnim="0" showMasterSp="0">
   <p:cSld>
     <p:spTree>
       <p:nvGrpSpPr>
-        <p:cNvPr id="1" name="Shape 106"/>
+        <p:cNvPr id="90" name="Shape 90"/>
         <p:cNvGrpSpPr/>
         <p:nvPr/>
       </p:nvGrpSpPr>
@@ -1603,27 +1322,68 @@
       </p:grpSpPr>
       <p:sp>
         <p:nvSpPr>
-          <p:cNvPr id="107" name="Google Shape;107;p5:notes"/>
-          <p:cNvSpPr>
-            <a:spLocks noGrp="1" noRot="1" noChangeAspect="1"/>
-          </p:cNvSpPr>
+          <p:cNvPr id="91" name="Google Shape;91;p3:notes"/>
+          <p:cNvSpPr txBox="1"/>
           <p:nvPr>
-            <p:ph type="sldImg" idx="2"/>
+            <p:ph idx="1" type="body"/>
           </p:nvPr>
         </p:nvSpPr>
         <p:spPr>
           <a:xfrm>
-            <a:off x="381000" y="685800"/>
-            <a:ext cx="6096000" cy="3429000"/>
+            <a:off x="685800" y="4343400"/>
+            <a:ext cx="5486400" cy="4114800"/>
+          </a:xfrm>
+          <a:prstGeom prst="rect">
+            <a:avLst/>
+          </a:prstGeom>
+          <a:noFill/>
+          <a:ln>
+            <a:noFill/>
+          </a:ln>
+        </p:spPr>
+        <p:txBody>
+          <a:bodyPr anchorCtr="0" anchor="t" bIns="91425" lIns="91425" spcFirstLastPara="1" rIns="91425" wrap="square" tIns="91425">
+            <a:noAutofit/>
+          </a:bodyPr>
+          <a:lstStyle/>
+          <a:p>
+            <a:pPr indent="0" lvl="0" marL="0" rtl="0" algn="l">
+              <a:lnSpc>
+                <a:spcPct val="100000"/>
+              </a:lnSpc>
+              <a:spcBef>
+                <a:spcPts val="0"/>
+              </a:spcBef>
+              <a:spcAft>
+                <a:spcPts val="0"/>
+              </a:spcAft>
+              <a:buSzPts val="1100"/>
+              <a:buNone/>
+            </a:pPr>
+            <a:r>
+              <a:t/>
+            </a:r>
+            <a:endParaRPr/>
+          </a:p>
+        </p:txBody>
+      </p:sp>
+      <p:sp>
+        <p:nvSpPr>
+          <p:cNvPr id="92" name="Google Shape;92;p3:notes"/>
+          <p:cNvSpPr/>
+          <p:nvPr>
+            <p:ph idx="2" type="sldImg"/>
+          </p:nvPr>
+        </p:nvSpPr>
+        <p:spPr>
+          <a:xfrm>
+            <a:off x="381300" y="685800"/>
+            <a:ext cx="6096075" cy="3429000"/>
           </a:xfrm>
           <a:custGeom>
-            <a:avLst/>
-            <a:gdLst/>
-            <a:ahLst/>
-            <a:cxnLst/>
-            <a:rect l="l" t="t" r="r" b="b"/>
+            <a:rect b="b" l="l" r="r" t="t"/>
             <a:pathLst>
-              <a:path w="120000" h="120000" extrusionOk="0">
+              <a:path extrusionOk="0" h="120000" w="120000">
                 <a:moveTo>
                   <a:pt x="0" y="0"/>
                 </a:moveTo>
@@ -1641,62 +1401,16 @@
             </a:pathLst>
           </a:custGeom>
           <a:noFill/>
-          <a:ln w="9525" cap="flat" cmpd="sng">
+          <a:ln cap="flat" cmpd="sng" w="9525">
             <a:solidFill>
               <a:srgbClr val="000000"/>
             </a:solidFill>
             <a:prstDash val="solid"/>
             <a:round/>
-            <a:headEnd type="none" w="sm" len="sm"/>
-            <a:tailEnd type="none" w="sm" len="sm"/>
+            <a:headEnd len="sm" w="sm" type="none"/>
+            <a:tailEnd len="sm" w="sm" type="none"/>
           </a:ln>
         </p:spPr>
-      </p:sp>
-      <p:sp>
-        <p:nvSpPr>
-          <p:cNvPr id="108" name="Google Shape;108;p5:notes"/>
-          <p:cNvSpPr txBox="1">
-            <a:spLocks noGrp="1"/>
-          </p:cNvSpPr>
-          <p:nvPr>
-            <p:ph type="body" idx="1"/>
-          </p:nvPr>
-        </p:nvSpPr>
-        <p:spPr>
-          <a:xfrm>
-            <a:off x="685800" y="4343400"/>
-            <a:ext cx="5486400" cy="4114800"/>
-          </a:xfrm>
-          <a:prstGeom prst="rect">
-            <a:avLst/>
-          </a:prstGeom>
-          <a:noFill/>
-          <a:ln>
-            <a:noFill/>
-          </a:ln>
-        </p:spPr>
-        <p:txBody>
-          <a:bodyPr spcFirstLastPara="1" wrap="square" lIns="91425" tIns="91425" rIns="91425" bIns="91425" anchor="t" anchorCtr="0">
-            <a:noAutofit/>
-          </a:bodyPr>
-          <a:lstStyle/>
-          <a:p>
-            <a:pPr marL="0" lvl="0" indent="0" algn="l" rtl="0">
-              <a:lnSpc>
-                <a:spcPct val="100000"/>
-              </a:lnSpc>
-              <a:spcBef>
-                <a:spcPts val="0"/>
-              </a:spcBef>
-              <a:spcAft>
-                <a:spcPts val="0"/>
-              </a:spcAft>
-              <a:buSzPts val="1100"/>
-              <a:buNone/>
-            </a:pPr>
-            <a:endParaRPr/>
-          </a:p>
-        </p:txBody>
       </p:sp>
     </p:spTree>
   </p:cSld>
@@ -1706,12 +1420,12 @@
 </p:notes>
 </file>
 
-<file path=ppt/notesSlides/notesSlide6.xml><?xml version="1.0" encoding="utf-8"?>
-<p:notes xmlns:a="http://schemas.openxmlformats.org/drawingml/2006/main" xmlns:r="http://schemas.openxmlformats.org/officeDocument/2006/relationships" xmlns:p="http://schemas.openxmlformats.org/presentationml/2006/main" showMasterSp="0" showMasterPhAnim="0">
+<file path=ppt/notesSlides/notesSlide4.xml><?xml version="1.0" encoding="utf-8"?>
+<p:notes xmlns:a="http://schemas.openxmlformats.org/drawingml/2006/main" xmlns:r="http://schemas.openxmlformats.org/officeDocument/2006/relationships" xmlns:mc="http://schemas.openxmlformats.org/markup-compatibility/2006" xmlns:mv="urn:schemas-microsoft-com:mac:vml" xmlns:p="http://schemas.openxmlformats.org/presentationml/2006/main" xmlns:c="http://schemas.openxmlformats.org/drawingml/2006/chart" xmlns:dgm="http://schemas.openxmlformats.org/drawingml/2006/diagram" xmlns:o="urn:schemas-microsoft-com:office:office" xmlns:v="urn:schemas-microsoft-com:vml" xmlns:pvml="urn:schemas-microsoft-com:office:powerpoint" xmlns:com="http://schemas.openxmlformats.org/drawingml/2006/compatibility" xmlns:p14="http://schemas.microsoft.com/office/powerpoint/2010/main" xmlns:p15="http://schemas.microsoft.com/office/powerpoint/2012/main" xmlns:ahyp="http://schemas.microsoft.com/office/drawing/2018/hyperlinkcolor" showMasterPhAnim="0" showMasterSp="0">
   <p:cSld>
     <p:spTree>
       <p:nvGrpSpPr>
-        <p:cNvPr id="1" name="Shape 116"/>
+        <p:cNvPr id="96" name="Shape 96"/>
         <p:cNvGrpSpPr/>
         <p:nvPr/>
       </p:nvGrpSpPr>
@@ -1725,12 +1439,10 @@
       </p:grpSpPr>
       <p:sp>
         <p:nvSpPr>
-          <p:cNvPr id="117" name="Google Shape;117;p6:notes"/>
-          <p:cNvSpPr>
-            <a:spLocks noGrp="1" noRot="1" noChangeAspect="1"/>
-          </p:cNvSpPr>
+          <p:cNvPr id="97" name="Google Shape;97;p4:notes"/>
+          <p:cNvSpPr/>
           <p:nvPr>
-            <p:ph type="sldImg" idx="2"/>
+            <p:ph idx="2" type="sldImg"/>
           </p:nvPr>
         </p:nvSpPr>
         <p:spPr>
@@ -1739,13 +1451,9 @@
             <a:ext cx="6096000" cy="3429000"/>
           </a:xfrm>
           <a:custGeom>
-            <a:avLst/>
-            <a:gdLst/>
-            <a:ahLst/>
-            <a:cxnLst/>
-            <a:rect l="l" t="t" r="r" b="b"/>
+            <a:rect b="b" l="l" r="r" t="t"/>
             <a:pathLst>
-              <a:path w="120000" h="120000" extrusionOk="0">
+              <a:path extrusionOk="0" h="120000" w="120000">
                 <a:moveTo>
                   <a:pt x="0" y="0"/>
                 </a:moveTo>
@@ -1763,25 +1471,23 @@
             </a:pathLst>
           </a:custGeom>
           <a:noFill/>
-          <a:ln w="9525" cap="flat" cmpd="sng">
+          <a:ln cap="flat" cmpd="sng" w="9525">
             <a:solidFill>
               <a:srgbClr val="000000"/>
             </a:solidFill>
             <a:prstDash val="solid"/>
             <a:round/>
-            <a:headEnd type="none" w="sm" len="sm"/>
-            <a:tailEnd type="none" w="sm" len="sm"/>
+            <a:headEnd len="sm" w="sm" type="none"/>
+            <a:tailEnd len="sm" w="sm" type="none"/>
           </a:ln>
         </p:spPr>
       </p:sp>
       <p:sp>
         <p:nvSpPr>
-          <p:cNvPr id="118" name="Google Shape;118;p6:notes"/>
-          <p:cNvSpPr txBox="1">
-            <a:spLocks noGrp="1"/>
-          </p:cNvSpPr>
+          <p:cNvPr id="98" name="Google Shape;98;p4:notes"/>
+          <p:cNvSpPr txBox="1"/>
           <p:nvPr>
-            <p:ph type="body" idx="1"/>
+            <p:ph idx="1" type="body"/>
           </p:nvPr>
         </p:nvSpPr>
         <p:spPr>
@@ -1798,12 +1504,12 @@
           </a:ln>
         </p:spPr>
         <p:txBody>
-          <a:bodyPr spcFirstLastPara="1" wrap="square" lIns="91425" tIns="91425" rIns="91425" bIns="91425" anchor="t" anchorCtr="0">
+          <a:bodyPr anchorCtr="0" anchor="t" bIns="91425" lIns="91425" spcFirstLastPara="1" rIns="91425" wrap="square" tIns="91425">
             <a:noAutofit/>
           </a:bodyPr>
           <a:lstStyle/>
           <a:p>
-            <a:pPr marL="0" lvl="0" indent="0" algn="l" rtl="0">
+            <a:pPr indent="0" lvl="0" marL="0" rtl="0" algn="l">
               <a:lnSpc>
                 <a:spcPct val="100000"/>
               </a:lnSpc>
@@ -1816,6 +1522,9 @@
               <a:buSzPts val="1100"/>
               <a:buNone/>
             </a:pPr>
+            <a:r>
+              <a:t/>
+            </a:r>
             <a:endParaRPr/>
           </a:p>
         </p:txBody>
@@ -1828,12 +1537,12 @@
 </p:notes>
 </file>
 
-<file path=ppt/notesSlides/notesSlide7.xml><?xml version="1.0" encoding="utf-8"?>
-<p:notes xmlns:a="http://schemas.openxmlformats.org/drawingml/2006/main" xmlns:r="http://schemas.openxmlformats.org/officeDocument/2006/relationships" xmlns:p="http://schemas.openxmlformats.org/presentationml/2006/main" showMasterSp="0" showMasterPhAnim="0">
+<file path=ppt/notesSlides/notesSlide5.xml><?xml version="1.0" encoding="utf-8"?>
+<p:notes xmlns:a="http://schemas.openxmlformats.org/drawingml/2006/main" xmlns:r="http://schemas.openxmlformats.org/officeDocument/2006/relationships" xmlns:mc="http://schemas.openxmlformats.org/markup-compatibility/2006" xmlns:mv="urn:schemas-microsoft-com:mac:vml" xmlns:p="http://schemas.openxmlformats.org/presentationml/2006/main" xmlns:c="http://schemas.openxmlformats.org/drawingml/2006/chart" xmlns:dgm="http://schemas.openxmlformats.org/drawingml/2006/diagram" xmlns:o="urn:schemas-microsoft-com:office:office" xmlns:v="urn:schemas-microsoft-com:vml" xmlns:pvml="urn:schemas-microsoft-com:office:powerpoint" xmlns:com="http://schemas.openxmlformats.org/drawingml/2006/compatibility" xmlns:p14="http://schemas.microsoft.com/office/powerpoint/2010/main" xmlns:p15="http://schemas.microsoft.com/office/powerpoint/2012/main" xmlns:ahyp="http://schemas.microsoft.com/office/drawing/2018/hyperlinkcolor" showMasterPhAnim="0" showMasterSp="0">
   <p:cSld>
     <p:spTree>
       <p:nvGrpSpPr>
-        <p:cNvPr id="1" name="Shape 126"/>
+        <p:cNvPr id="106" name="Shape 106"/>
         <p:cNvGrpSpPr/>
         <p:nvPr/>
       </p:nvGrpSpPr>
@@ -1847,65 +1556,21 @@
       </p:grpSpPr>
       <p:sp>
         <p:nvSpPr>
-          <p:cNvPr id="127" name="Google Shape;127;p7:notes"/>
-          <p:cNvSpPr txBox="1">
-            <a:spLocks noGrp="1"/>
-          </p:cNvSpPr>
+          <p:cNvPr id="107" name="Google Shape;107;p5:notes"/>
+          <p:cNvSpPr/>
           <p:nvPr>
-            <p:ph type="body" idx="1"/>
+            <p:ph idx="2" type="sldImg"/>
           </p:nvPr>
         </p:nvSpPr>
         <p:spPr>
           <a:xfrm>
-            <a:off x="685800" y="4343400"/>
-            <a:ext cx="5486400" cy="4114800"/>
-          </a:xfrm>
-          <a:prstGeom prst="rect">
-            <a:avLst/>
-          </a:prstGeom>
-        </p:spPr>
-        <p:txBody>
-          <a:bodyPr spcFirstLastPara="1" wrap="square" lIns="91425" tIns="91425" rIns="91425" bIns="91425" anchor="t" anchorCtr="0">
-            <a:noAutofit/>
-          </a:bodyPr>
-          <a:lstStyle/>
-          <a:p>
-            <a:pPr marL="0" lvl="0" indent="0" algn="l" rtl="0">
-              <a:spcBef>
-                <a:spcPts val="0"/>
-              </a:spcBef>
-              <a:spcAft>
-                <a:spcPts val="0"/>
-              </a:spcAft>
-              <a:buNone/>
-            </a:pPr>
-            <a:endParaRPr/>
-          </a:p>
-        </p:txBody>
-      </p:sp>
-      <p:sp>
-        <p:nvSpPr>
-          <p:cNvPr id="128" name="Google Shape;128;p7:notes"/>
-          <p:cNvSpPr>
-            <a:spLocks noGrp="1" noRot="1" noChangeAspect="1"/>
-          </p:cNvSpPr>
-          <p:nvPr>
-            <p:ph type="sldImg" idx="2"/>
-          </p:nvPr>
-        </p:nvSpPr>
-        <p:spPr>
-          <a:xfrm>
-            <a:off x="381300" y="685800"/>
-            <a:ext cx="6096075" cy="3429000"/>
+            <a:off x="381000" y="685800"/>
+            <a:ext cx="6096000" cy="3429000"/>
           </a:xfrm>
           <a:custGeom>
-            <a:avLst/>
-            <a:gdLst/>
-            <a:ahLst/>
-            <a:cxnLst/>
-            <a:rect l="l" t="t" r="r" b="b"/>
+            <a:rect b="b" l="l" r="r" t="t"/>
             <a:pathLst>
-              <a:path w="120000" h="120000" extrusionOk="0">
+              <a:path extrusionOk="0" h="120000" w="120000">
                 <a:moveTo>
                   <a:pt x="0" y="0"/>
                 </a:moveTo>
@@ -1922,7 +1587,64 @@
               </a:path>
             </a:pathLst>
           </a:custGeom>
+          <a:noFill/>
+          <a:ln cap="flat" cmpd="sng" w="9525">
+            <a:solidFill>
+              <a:srgbClr val="000000"/>
+            </a:solidFill>
+            <a:prstDash val="solid"/>
+            <a:round/>
+            <a:headEnd len="sm" w="sm" type="none"/>
+            <a:tailEnd len="sm" w="sm" type="none"/>
+          </a:ln>
         </p:spPr>
+      </p:sp>
+      <p:sp>
+        <p:nvSpPr>
+          <p:cNvPr id="108" name="Google Shape;108;p5:notes"/>
+          <p:cNvSpPr txBox="1"/>
+          <p:nvPr>
+            <p:ph idx="1" type="body"/>
+          </p:nvPr>
+        </p:nvSpPr>
+        <p:spPr>
+          <a:xfrm>
+            <a:off x="685800" y="4343400"/>
+            <a:ext cx="5486400" cy="4114800"/>
+          </a:xfrm>
+          <a:prstGeom prst="rect">
+            <a:avLst/>
+          </a:prstGeom>
+          <a:noFill/>
+          <a:ln>
+            <a:noFill/>
+          </a:ln>
+        </p:spPr>
+        <p:txBody>
+          <a:bodyPr anchorCtr="0" anchor="t" bIns="91425" lIns="91425" spcFirstLastPara="1" rIns="91425" wrap="square" tIns="91425">
+            <a:noAutofit/>
+          </a:bodyPr>
+          <a:lstStyle/>
+          <a:p>
+            <a:pPr indent="0" lvl="0" marL="0" rtl="0" algn="l">
+              <a:lnSpc>
+                <a:spcPct val="100000"/>
+              </a:lnSpc>
+              <a:spcBef>
+                <a:spcPts val="0"/>
+              </a:spcBef>
+              <a:spcAft>
+                <a:spcPts val="0"/>
+              </a:spcAft>
+              <a:buSzPts val="1100"/>
+              <a:buNone/>
+            </a:pPr>
+            <a:r>
+              <a:t/>
+            </a:r>
+            <a:endParaRPr/>
+          </a:p>
+        </p:txBody>
       </p:sp>
     </p:spTree>
   </p:cSld>
@@ -1932,12 +1654,12 @@
 </p:notes>
 </file>
 
-<file path=ppt/notesSlides/notesSlide8.xml><?xml version="1.0" encoding="utf-8"?>
-<p:notes xmlns:a="http://schemas.openxmlformats.org/drawingml/2006/main" xmlns:r="http://schemas.openxmlformats.org/officeDocument/2006/relationships" xmlns:p="http://schemas.openxmlformats.org/presentationml/2006/main" showMasterSp="0" showMasterPhAnim="0">
+<file path=ppt/notesSlides/notesSlide6.xml><?xml version="1.0" encoding="utf-8"?>
+<p:notes xmlns:a="http://schemas.openxmlformats.org/drawingml/2006/main" xmlns:r="http://schemas.openxmlformats.org/officeDocument/2006/relationships" xmlns:mc="http://schemas.openxmlformats.org/markup-compatibility/2006" xmlns:mv="urn:schemas-microsoft-com:mac:vml" xmlns:p="http://schemas.openxmlformats.org/presentationml/2006/main" xmlns:c="http://schemas.openxmlformats.org/drawingml/2006/chart" xmlns:dgm="http://schemas.openxmlformats.org/drawingml/2006/diagram" xmlns:o="urn:schemas-microsoft-com:office:office" xmlns:v="urn:schemas-microsoft-com:vml" xmlns:pvml="urn:schemas-microsoft-com:office:powerpoint" xmlns:com="http://schemas.openxmlformats.org/drawingml/2006/compatibility" xmlns:p14="http://schemas.microsoft.com/office/powerpoint/2010/main" xmlns:p15="http://schemas.microsoft.com/office/powerpoint/2012/main" xmlns:ahyp="http://schemas.microsoft.com/office/drawing/2018/hyperlinkcolor" showMasterPhAnim="0" showMasterSp="0">
   <p:cSld>
     <p:spTree>
       <p:nvGrpSpPr>
-        <p:cNvPr id="1" name="Shape 132"/>
+        <p:cNvPr id="116" name="Shape 116"/>
         <p:cNvGrpSpPr/>
         <p:nvPr/>
       </p:nvGrpSpPr>
@@ -1951,65 +1673,21 @@
       </p:grpSpPr>
       <p:sp>
         <p:nvSpPr>
-          <p:cNvPr id="133" name="Google Shape;133;p8:notes"/>
-          <p:cNvSpPr txBox="1">
-            <a:spLocks noGrp="1"/>
-          </p:cNvSpPr>
+          <p:cNvPr id="117" name="Google Shape;117;p6:notes"/>
+          <p:cNvSpPr/>
           <p:nvPr>
-            <p:ph type="body" idx="1"/>
+            <p:ph idx="2" type="sldImg"/>
           </p:nvPr>
         </p:nvSpPr>
         <p:spPr>
           <a:xfrm>
-            <a:off x="685800" y="4343400"/>
-            <a:ext cx="5486400" cy="4114800"/>
-          </a:xfrm>
-          <a:prstGeom prst="rect">
-            <a:avLst/>
-          </a:prstGeom>
-        </p:spPr>
-        <p:txBody>
-          <a:bodyPr spcFirstLastPara="1" wrap="square" lIns="91425" tIns="91425" rIns="91425" bIns="91425" anchor="t" anchorCtr="0">
-            <a:noAutofit/>
-          </a:bodyPr>
-          <a:lstStyle/>
-          <a:p>
-            <a:pPr marL="0" lvl="0" indent="0" algn="l" rtl="0">
-              <a:spcBef>
-                <a:spcPts val="0"/>
-              </a:spcBef>
-              <a:spcAft>
-                <a:spcPts val="0"/>
-              </a:spcAft>
-              <a:buNone/>
-            </a:pPr>
-            <a:endParaRPr/>
-          </a:p>
-        </p:txBody>
-      </p:sp>
-      <p:sp>
-        <p:nvSpPr>
-          <p:cNvPr id="134" name="Google Shape;134;p8:notes"/>
-          <p:cNvSpPr>
-            <a:spLocks noGrp="1" noRot="1" noChangeAspect="1"/>
-          </p:cNvSpPr>
-          <p:nvPr>
-            <p:ph type="sldImg" idx="2"/>
-          </p:nvPr>
-        </p:nvSpPr>
-        <p:spPr>
-          <a:xfrm>
-            <a:off x="381300" y="685800"/>
-            <a:ext cx="6096075" cy="3429000"/>
+            <a:off x="381000" y="685800"/>
+            <a:ext cx="6096000" cy="3429000"/>
           </a:xfrm>
           <a:custGeom>
-            <a:avLst/>
-            <a:gdLst/>
-            <a:ahLst/>
-            <a:cxnLst/>
-            <a:rect l="l" t="t" r="r" b="b"/>
+            <a:rect b="b" l="l" r="r" t="t"/>
             <a:pathLst>
-              <a:path w="120000" h="120000" extrusionOk="0">
+              <a:path extrusionOk="0" h="120000" w="120000">
                 <a:moveTo>
                   <a:pt x="0" y="0"/>
                 </a:moveTo>
@@ -2026,7 +1704,64 @@
               </a:path>
             </a:pathLst>
           </a:custGeom>
+          <a:noFill/>
+          <a:ln cap="flat" cmpd="sng" w="9525">
+            <a:solidFill>
+              <a:srgbClr val="000000"/>
+            </a:solidFill>
+            <a:prstDash val="solid"/>
+            <a:round/>
+            <a:headEnd len="sm" w="sm" type="none"/>
+            <a:tailEnd len="sm" w="sm" type="none"/>
+          </a:ln>
         </p:spPr>
+      </p:sp>
+      <p:sp>
+        <p:nvSpPr>
+          <p:cNvPr id="118" name="Google Shape;118;p6:notes"/>
+          <p:cNvSpPr txBox="1"/>
+          <p:nvPr>
+            <p:ph idx="1" type="body"/>
+          </p:nvPr>
+        </p:nvSpPr>
+        <p:spPr>
+          <a:xfrm>
+            <a:off x="685800" y="4343400"/>
+            <a:ext cx="5486400" cy="4114800"/>
+          </a:xfrm>
+          <a:prstGeom prst="rect">
+            <a:avLst/>
+          </a:prstGeom>
+          <a:noFill/>
+          <a:ln>
+            <a:noFill/>
+          </a:ln>
+        </p:spPr>
+        <p:txBody>
+          <a:bodyPr anchorCtr="0" anchor="t" bIns="91425" lIns="91425" spcFirstLastPara="1" rIns="91425" wrap="square" tIns="91425">
+            <a:noAutofit/>
+          </a:bodyPr>
+          <a:lstStyle/>
+          <a:p>
+            <a:pPr indent="0" lvl="0" marL="0" rtl="0" algn="l">
+              <a:lnSpc>
+                <a:spcPct val="100000"/>
+              </a:lnSpc>
+              <a:spcBef>
+                <a:spcPts val="0"/>
+              </a:spcBef>
+              <a:spcAft>
+                <a:spcPts val="0"/>
+              </a:spcAft>
+              <a:buSzPts val="1100"/>
+              <a:buNone/>
+            </a:pPr>
+            <a:r>
+              <a:t/>
+            </a:r>
+            <a:endParaRPr/>
+          </a:p>
+        </p:txBody>
       </p:sp>
     </p:spTree>
   </p:cSld>
@@ -2036,12 +1771,12 @@
 </p:notes>
 </file>
 
-<file path=ppt/notesSlides/notesSlide9.xml><?xml version="1.0" encoding="utf-8"?>
-<p:notes xmlns:a="http://schemas.openxmlformats.org/drawingml/2006/main" xmlns:r="http://schemas.openxmlformats.org/officeDocument/2006/relationships" xmlns:p="http://schemas.openxmlformats.org/presentationml/2006/main" showMasterSp="0" showMasterPhAnim="0">
+<file path=ppt/notesSlides/notesSlide7.xml><?xml version="1.0" encoding="utf-8"?>
+<p:notes xmlns:a="http://schemas.openxmlformats.org/drawingml/2006/main" xmlns:r="http://schemas.openxmlformats.org/officeDocument/2006/relationships" xmlns:mc="http://schemas.openxmlformats.org/markup-compatibility/2006" xmlns:mv="urn:schemas-microsoft-com:mac:vml" xmlns:p="http://schemas.openxmlformats.org/presentationml/2006/main" xmlns:c="http://schemas.openxmlformats.org/drawingml/2006/chart" xmlns:dgm="http://schemas.openxmlformats.org/drawingml/2006/diagram" xmlns:o="urn:schemas-microsoft-com:office:office" xmlns:v="urn:schemas-microsoft-com:vml" xmlns:pvml="urn:schemas-microsoft-com:office:powerpoint" xmlns:com="http://schemas.openxmlformats.org/drawingml/2006/compatibility" xmlns:p14="http://schemas.microsoft.com/office/powerpoint/2010/main" xmlns:p15="http://schemas.microsoft.com/office/powerpoint/2012/main" xmlns:ahyp="http://schemas.microsoft.com/office/drawing/2018/hyperlinkcolor" showMasterPhAnim="0" showMasterSp="0">
   <p:cSld>
     <p:spTree>
       <p:nvGrpSpPr>
-        <p:cNvPr id="1" name="Shape 138"/>
+        <p:cNvPr id="126" name="Shape 126"/>
         <p:cNvGrpSpPr/>
         <p:nvPr/>
       </p:nvGrpSpPr>
@@ -2055,27 +1790,68 @@
       </p:grpSpPr>
       <p:sp>
         <p:nvSpPr>
-          <p:cNvPr id="139" name="Google Shape;139;g3ab975baed4_0_0:notes"/>
-          <p:cNvSpPr>
-            <a:spLocks noGrp="1" noRot="1" noChangeAspect="1"/>
-          </p:cNvSpPr>
+          <p:cNvPr id="127" name="Google Shape;127;p7:notes"/>
+          <p:cNvSpPr txBox="1"/>
           <p:nvPr>
-            <p:ph type="sldImg" idx="2"/>
+            <p:ph idx="1" type="body"/>
+          </p:nvPr>
+        </p:nvSpPr>
+        <p:spPr>
+          <a:xfrm>
+            <a:off x="685800" y="4343400"/>
+            <a:ext cx="5486400" cy="4114800"/>
+          </a:xfrm>
+          <a:prstGeom prst="rect">
+            <a:avLst/>
+          </a:prstGeom>
+          <a:noFill/>
+          <a:ln>
+            <a:noFill/>
+          </a:ln>
+        </p:spPr>
+        <p:txBody>
+          <a:bodyPr anchorCtr="0" anchor="t" bIns="91425" lIns="91425" spcFirstLastPara="1" rIns="91425" wrap="square" tIns="91425">
+            <a:noAutofit/>
+          </a:bodyPr>
+          <a:lstStyle/>
+          <a:p>
+            <a:pPr indent="0" lvl="0" marL="0" rtl="0" algn="l">
+              <a:lnSpc>
+                <a:spcPct val="100000"/>
+              </a:lnSpc>
+              <a:spcBef>
+                <a:spcPts val="0"/>
+              </a:spcBef>
+              <a:spcAft>
+                <a:spcPts val="0"/>
+              </a:spcAft>
+              <a:buSzPts val="1100"/>
+              <a:buNone/>
+            </a:pPr>
+            <a:r>
+              <a:t/>
+            </a:r>
+            <a:endParaRPr/>
+          </a:p>
+        </p:txBody>
+      </p:sp>
+      <p:sp>
+        <p:nvSpPr>
+          <p:cNvPr id="128" name="Google Shape;128;p7:notes"/>
+          <p:cNvSpPr/>
+          <p:nvPr>
+            <p:ph idx="2" type="sldImg"/>
           </p:nvPr>
         </p:nvSpPr>
         <p:spPr>
           <a:xfrm>
             <a:off x="381300" y="685800"/>
-            <a:ext cx="6096000" cy="3429000"/>
+            <a:ext cx="6096075" cy="3429000"/>
           </a:xfrm>
           <a:custGeom>
-            <a:avLst/>
-            <a:gdLst/>
-            <a:ahLst/>
-            <a:cxnLst/>
-            <a:rect l="l" t="t" r="r" b="b"/>
+            <a:rect b="b" l="l" r="r" t="t"/>
             <a:pathLst>
-              <a:path w="120000" h="120000" extrusionOk="0">
+              <a:path extrusionOk="0" h="120000" w="120000">
                 <a:moveTo>
                   <a:pt x="0" y="0"/>
                 </a:moveTo>
@@ -2092,16 +1868,49 @@
               </a:path>
             </a:pathLst>
           </a:custGeom>
+          <a:noFill/>
+          <a:ln cap="flat" cmpd="sng" w="9525">
+            <a:solidFill>
+              <a:srgbClr val="000000"/>
+            </a:solidFill>
+            <a:prstDash val="solid"/>
+            <a:round/>
+            <a:headEnd len="sm" w="sm" type="none"/>
+            <a:tailEnd len="sm" w="sm" type="none"/>
+          </a:ln>
         </p:spPr>
       </p:sp>
+    </p:spTree>
+  </p:cSld>
+  <p:clrMapOvr>
+    <a:masterClrMapping/>
+  </p:clrMapOvr>
+</p:notes>
+</file>
+
+<file path=ppt/notesSlides/notesSlide8.xml><?xml version="1.0" encoding="utf-8"?>
+<p:notes xmlns:a="http://schemas.openxmlformats.org/drawingml/2006/main" xmlns:r="http://schemas.openxmlformats.org/officeDocument/2006/relationships" xmlns:mc="http://schemas.openxmlformats.org/markup-compatibility/2006" xmlns:mv="urn:schemas-microsoft-com:mac:vml" xmlns:p="http://schemas.openxmlformats.org/presentationml/2006/main" xmlns:c="http://schemas.openxmlformats.org/drawingml/2006/chart" xmlns:dgm="http://schemas.openxmlformats.org/drawingml/2006/diagram" xmlns:o="urn:schemas-microsoft-com:office:office" xmlns:v="urn:schemas-microsoft-com:vml" xmlns:pvml="urn:schemas-microsoft-com:office:powerpoint" xmlns:com="http://schemas.openxmlformats.org/drawingml/2006/compatibility" xmlns:p14="http://schemas.microsoft.com/office/powerpoint/2010/main" xmlns:p15="http://schemas.microsoft.com/office/powerpoint/2012/main" xmlns:ahyp="http://schemas.microsoft.com/office/drawing/2018/hyperlinkcolor" showMasterPhAnim="0" showMasterSp="0">
+  <p:cSld>
+    <p:spTree>
+      <p:nvGrpSpPr>
+        <p:cNvPr id="133" name="Shape 133"/>
+        <p:cNvGrpSpPr/>
+        <p:nvPr/>
+      </p:nvGrpSpPr>
+      <p:grpSpPr>
+        <a:xfrm>
+          <a:off x="0" y="0"/>
+          <a:ext cx="0" cy="0"/>
+          <a:chOff x="0" y="0"/>
+          <a:chExt cx="0" cy="0"/>
+        </a:xfrm>
+      </p:grpSpPr>
       <p:sp>
         <p:nvSpPr>
-          <p:cNvPr id="140" name="Google Shape;140;g3ab975baed4_0_0:notes"/>
-          <p:cNvSpPr txBox="1">
-            <a:spLocks noGrp="1"/>
-          </p:cNvSpPr>
+          <p:cNvPr id="134" name="Google Shape;134;p8:notes"/>
+          <p:cNvSpPr txBox="1"/>
           <p:nvPr>
-            <p:ph type="body" idx="1"/>
+            <p:ph idx="1" type="body"/>
           </p:nvPr>
         </p:nvSpPr>
         <p:spPr>
@@ -2112,22 +1921,195 @@
           <a:prstGeom prst="rect">
             <a:avLst/>
           </a:prstGeom>
+          <a:noFill/>
+          <a:ln>
+            <a:noFill/>
+          </a:ln>
         </p:spPr>
         <p:txBody>
-          <a:bodyPr spcFirstLastPara="1" wrap="square" lIns="91425" tIns="91425" rIns="91425" bIns="91425" anchor="t" anchorCtr="0">
+          <a:bodyPr anchorCtr="0" anchor="t" bIns="91425" lIns="91425" spcFirstLastPara="1" rIns="91425" wrap="square" tIns="91425">
             <a:noAutofit/>
           </a:bodyPr>
           <a:lstStyle/>
           <a:p>
-            <a:pPr marL="0" lvl="0" indent="0" algn="l" rtl="0">
-              <a:spcBef>
-                <a:spcPts val="0"/>
-              </a:spcBef>
-              <a:spcAft>
-                <a:spcPts val="0"/>
-              </a:spcAft>
+            <a:pPr indent="0" lvl="0" marL="0" rtl="0" algn="l">
+              <a:lnSpc>
+                <a:spcPct val="100000"/>
+              </a:lnSpc>
+              <a:spcBef>
+                <a:spcPts val="0"/>
+              </a:spcBef>
+              <a:spcAft>
+                <a:spcPts val="0"/>
+              </a:spcAft>
+              <a:buSzPts val="1100"/>
               <a:buNone/>
             </a:pPr>
+            <a:r>
+              <a:t/>
+            </a:r>
+            <a:endParaRPr/>
+          </a:p>
+        </p:txBody>
+      </p:sp>
+      <p:sp>
+        <p:nvSpPr>
+          <p:cNvPr id="135" name="Google Shape;135;p8:notes"/>
+          <p:cNvSpPr/>
+          <p:nvPr>
+            <p:ph idx="2" type="sldImg"/>
+          </p:nvPr>
+        </p:nvSpPr>
+        <p:spPr>
+          <a:xfrm>
+            <a:off x="381300" y="685800"/>
+            <a:ext cx="6096075" cy="3429000"/>
+          </a:xfrm>
+          <a:custGeom>
+            <a:rect b="b" l="l" r="r" t="t"/>
+            <a:pathLst>
+              <a:path extrusionOk="0" h="120000" w="120000">
+                <a:moveTo>
+                  <a:pt x="0" y="0"/>
+                </a:moveTo>
+                <a:lnTo>
+                  <a:pt x="120000" y="0"/>
+                </a:lnTo>
+                <a:lnTo>
+                  <a:pt x="120000" y="120000"/>
+                </a:lnTo>
+                <a:lnTo>
+                  <a:pt x="0" y="120000"/>
+                </a:lnTo>
+                <a:close/>
+              </a:path>
+            </a:pathLst>
+          </a:custGeom>
+          <a:noFill/>
+          <a:ln cap="flat" cmpd="sng" w="9525">
+            <a:solidFill>
+              <a:srgbClr val="000000"/>
+            </a:solidFill>
+            <a:prstDash val="solid"/>
+            <a:round/>
+            <a:headEnd len="sm" w="sm" type="none"/>
+            <a:tailEnd len="sm" w="sm" type="none"/>
+          </a:ln>
+        </p:spPr>
+      </p:sp>
+    </p:spTree>
+  </p:cSld>
+  <p:clrMapOvr>
+    <a:masterClrMapping/>
+  </p:clrMapOvr>
+</p:notes>
+</file>
+
+<file path=ppt/notesSlides/notesSlide9.xml><?xml version="1.0" encoding="utf-8"?>
+<p:notes xmlns:a="http://schemas.openxmlformats.org/drawingml/2006/main" xmlns:r="http://schemas.openxmlformats.org/officeDocument/2006/relationships" xmlns:mc="http://schemas.openxmlformats.org/markup-compatibility/2006" xmlns:mv="urn:schemas-microsoft-com:mac:vml" xmlns:p="http://schemas.openxmlformats.org/presentationml/2006/main" xmlns:c="http://schemas.openxmlformats.org/drawingml/2006/chart" xmlns:dgm="http://schemas.openxmlformats.org/drawingml/2006/diagram" xmlns:o="urn:schemas-microsoft-com:office:office" xmlns:v="urn:schemas-microsoft-com:vml" xmlns:pvml="urn:schemas-microsoft-com:office:powerpoint" xmlns:com="http://schemas.openxmlformats.org/drawingml/2006/compatibility" xmlns:p14="http://schemas.microsoft.com/office/powerpoint/2010/main" xmlns:p15="http://schemas.microsoft.com/office/powerpoint/2012/main" xmlns:ahyp="http://schemas.microsoft.com/office/drawing/2018/hyperlinkcolor" showMasterPhAnim="0" showMasterSp="0">
+  <p:cSld>
+    <p:spTree>
+      <p:nvGrpSpPr>
+        <p:cNvPr id="139" name="Shape 139"/>
+        <p:cNvGrpSpPr/>
+        <p:nvPr/>
+      </p:nvGrpSpPr>
+      <p:grpSpPr>
+        <a:xfrm>
+          <a:off x="0" y="0"/>
+          <a:ext cx="0" cy="0"/>
+          <a:chOff x="0" y="0"/>
+          <a:chExt cx="0" cy="0"/>
+        </a:xfrm>
+      </p:grpSpPr>
+      <p:sp>
+        <p:nvSpPr>
+          <p:cNvPr id="140" name="Google Shape;140;p9:notes"/>
+          <p:cNvSpPr/>
+          <p:nvPr>
+            <p:ph idx="2" type="sldImg"/>
+          </p:nvPr>
+        </p:nvSpPr>
+        <p:spPr>
+          <a:xfrm>
+            <a:off x="381300" y="685800"/>
+            <a:ext cx="6096000" cy="3429000"/>
+          </a:xfrm>
+          <a:custGeom>
+            <a:rect b="b" l="l" r="r" t="t"/>
+            <a:pathLst>
+              <a:path extrusionOk="0" h="120000" w="120000">
+                <a:moveTo>
+                  <a:pt x="0" y="0"/>
+                </a:moveTo>
+                <a:lnTo>
+                  <a:pt x="120000" y="0"/>
+                </a:lnTo>
+                <a:lnTo>
+                  <a:pt x="120000" y="120000"/>
+                </a:lnTo>
+                <a:lnTo>
+                  <a:pt x="0" y="120000"/>
+                </a:lnTo>
+                <a:close/>
+              </a:path>
+            </a:pathLst>
+          </a:custGeom>
+          <a:noFill/>
+          <a:ln cap="flat" cmpd="sng" w="9525">
+            <a:solidFill>
+              <a:srgbClr val="000000"/>
+            </a:solidFill>
+            <a:prstDash val="solid"/>
+            <a:round/>
+            <a:headEnd len="sm" w="sm" type="none"/>
+            <a:tailEnd len="sm" w="sm" type="none"/>
+          </a:ln>
+        </p:spPr>
+      </p:sp>
+      <p:sp>
+        <p:nvSpPr>
+          <p:cNvPr id="141" name="Google Shape;141;p9:notes"/>
+          <p:cNvSpPr txBox="1"/>
+          <p:nvPr>
+            <p:ph idx="1" type="body"/>
+          </p:nvPr>
+        </p:nvSpPr>
+        <p:spPr>
+          <a:xfrm>
+            <a:off x="685800" y="4343400"/>
+            <a:ext cx="5486400" cy="4114800"/>
+          </a:xfrm>
+          <a:prstGeom prst="rect">
+            <a:avLst/>
+          </a:prstGeom>
+          <a:noFill/>
+          <a:ln>
+            <a:noFill/>
+          </a:ln>
+        </p:spPr>
+        <p:txBody>
+          <a:bodyPr anchorCtr="0" anchor="t" bIns="91425" lIns="91425" spcFirstLastPara="1" rIns="91425" wrap="square" tIns="91425">
+            <a:noAutofit/>
+          </a:bodyPr>
+          <a:lstStyle/>
+          <a:p>
+            <a:pPr indent="0" lvl="0" marL="0" rtl="0" algn="l">
+              <a:lnSpc>
+                <a:spcPct val="100000"/>
+              </a:lnSpc>
+              <a:spcBef>
+                <a:spcPts val="0"/>
+              </a:spcBef>
+              <a:spcAft>
+                <a:spcPts val="0"/>
+              </a:spcAft>
+              <a:buSzPts val="1100"/>
+              <a:buNone/>
+            </a:pPr>
+            <a:r>
+              <a:t/>
+            </a:r>
             <a:endParaRPr/>
           </a:p>
         </p:txBody>
@@ -2141,11 +2123,11 @@
 </file>
 
 <file path=ppt/slideLayouts/slideLayout1.xml><?xml version="1.0" encoding="utf-8"?>
-<p:sldLayout xmlns:a="http://schemas.openxmlformats.org/drawingml/2006/main" xmlns:r="http://schemas.openxmlformats.org/officeDocument/2006/relationships" xmlns:p="http://schemas.openxmlformats.org/presentationml/2006/main" matchingName="Title slide" type="title">
+<p:sldLayout xmlns:a="http://schemas.openxmlformats.org/drawingml/2006/main" xmlns:r="http://schemas.openxmlformats.org/officeDocument/2006/relationships" xmlns:mc="http://schemas.openxmlformats.org/markup-compatibility/2006" xmlns:mv="urn:schemas-microsoft-com:mac:vml" xmlns:p="http://schemas.openxmlformats.org/presentationml/2006/main" xmlns:c="http://schemas.openxmlformats.org/drawingml/2006/chart" xmlns:dgm="http://schemas.openxmlformats.org/drawingml/2006/diagram" xmlns:o="urn:schemas-microsoft-com:office:office" xmlns:v="urn:schemas-microsoft-com:vml" xmlns:pvml="urn:schemas-microsoft-com:office:powerpoint" xmlns:com="http://schemas.openxmlformats.org/drawingml/2006/compatibility" xmlns:p14="http://schemas.microsoft.com/office/powerpoint/2010/main" xmlns:p15="http://schemas.microsoft.com/office/powerpoint/2012/main" xmlns:ahyp="http://schemas.microsoft.com/office/drawing/2018/hyperlinkcolor" matchingName="Title slide" type="title">
   <p:cSld name="TITLE">
     <p:spTree>
       <p:nvGrpSpPr>
-        <p:cNvPr id="1" name="Shape 8"/>
+        <p:cNvPr id="8" name="Shape 8"/>
         <p:cNvGrpSpPr/>
         <p:nvPr/>
       </p:nvGrpSpPr>
@@ -2159,7 +2141,7 @@
       </p:grpSpPr>
       <p:grpSp>
         <p:nvGrpSpPr>
-          <p:cNvPr id="9" name="Google Shape;9;p12"/>
+          <p:cNvPr id="9" name="Google Shape;9;p2"/>
           <p:cNvGrpSpPr/>
           <p:nvPr/>
         </p:nvGrpSpPr>
@@ -2173,7 +2155,7 @@
         </p:grpSpPr>
         <p:pic>
           <p:nvPicPr>
-            <p:cNvPr id="10" name="Google Shape;10;p12" title="Sin título-7.png"/>
+            <p:cNvPr id="10" name="Google Shape;10;p2" title="Sin título-7.png"/>
             <p:cNvPicPr preferRelativeResize="0"/>
             <p:nvPr/>
           </p:nvPicPr>
@@ -2181,7 +2163,7 @@
             <a:blip r:embed="rId2">
               <a:alphaModFix/>
             </a:blip>
-            <a:srcRect/>
+            <a:srcRect b="0" l="0" r="0" t="0"/>
             <a:stretch/>
           </p:blipFill>
           <p:spPr>
@@ -2200,7 +2182,7 @@
         </p:pic>
         <p:pic>
           <p:nvPicPr>
-            <p:cNvPr id="11" name="Google Shape;11;p12" title="Sin título-2.png"/>
+            <p:cNvPr id="11" name="Google Shape;11;p2" title="Sin título-2.png"/>
             <p:cNvPicPr preferRelativeResize="0"/>
             <p:nvPr/>
           </p:nvPicPr>
@@ -2208,7 +2190,7 @@
             <a:blip r:embed="rId3">
               <a:alphaModFix/>
             </a:blip>
-            <a:srcRect/>
+            <a:srcRect b="0" l="0" r="0" t="0"/>
             <a:stretch/>
           </p:blipFill>
           <p:spPr>
@@ -2228,12 +2210,10 @@
       </p:grpSp>
       <p:sp>
         <p:nvSpPr>
-          <p:cNvPr id="12" name="Google Shape;12;p12"/>
-          <p:cNvSpPr>
-            <a:spLocks noGrp="1"/>
-          </p:cNvSpPr>
+          <p:cNvPr id="12" name="Google Shape;12;p2"/>
+          <p:cNvSpPr/>
           <p:nvPr>
-            <p:ph type="pic" idx="2"/>
+            <p:ph idx="2" type="pic"/>
           </p:nvPr>
         </p:nvSpPr>
         <p:spPr>
@@ -2245,23 +2225,21 @@
             <a:avLst/>
           </a:prstGeom>
           <a:noFill/>
-          <a:ln w="19050" cap="flat" cmpd="sng">
+          <a:ln cap="flat" cmpd="sng" w="19050">
             <a:solidFill>
               <a:schemeClr val="dk2"/>
             </a:solidFill>
             <a:prstDash val="solid"/>
             <a:round/>
-            <a:headEnd type="none" w="sm" len="sm"/>
-            <a:tailEnd type="none" w="sm" len="sm"/>
+            <a:headEnd len="sm" w="sm" type="none"/>
+            <a:tailEnd len="sm" w="sm" type="none"/>
           </a:ln>
         </p:spPr>
       </p:sp>
       <p:sp>
         <p:nvSpPr>
-          <p:cNvPr id="13" name="Google Shape;13;p12"/>
-          <p:cNvSpPr txBox="1">
-            <a:spLocks noGrp="1"/>
-          </p:cNvSpPr>
+          <p:cNvPr id="13" name="Google Shape;13;p2"/>
+          <p:cNvSpPr txBox="1"/>
           <p:nvPr>
             <p:ph type="ctrTitle"/>
           </p:nvPr>
@@ -2280,7 +2258,7 @@
           </a:ln>
         </p:spPr>
         <p:txBody>
-          <a:bodyPr spcFirstLastPara="1" wrap="square" lIns="91425" tIns="91425" rIns="91425" bIns="91425" anchor="t" anchorCtr="0">
+          <a:bodyPr anchorCtr="0" anchor="t" bIns="91425" lIns="91425" spcFirstLastPara="1" rIns="91425" wrap="square" tIns="91425">
             <a:noAutofit/>
           </a:bodyPr>
           <a:lstStyle>
@@ -2470,19 +2448,15 @@
               </a:defRPr>
             </a:lvl9pPr>
           </a:lstStyle>
-          <a:p>
-            <a:endParaRPr/>
-          </a:p>
+          <a:p/>
         </p:txBody>
       </p:sp>
       <p:sp>
         <p:nvSpPr>
-          <p:cNvPr id="14" name="Google Shape;14;p12"/>
-          <p:cNvSpPr txBox="1">
-            <a:spLocks noGrp="1"/>
-          </p:cNvSpPr>
+          <p:cNvPr id="14" name="Google Shape;14;p2"/>
+          <p:cNvSpPr txBox="1"/>
           <p:nvPr>
-            <p:ph type="subTitle" idx="1"/>
+            <p:ph idx="1" type="subTitle"/>
           </p:nvPr>
         </p:nvSpPr>
         <p:spPr>
@@ -2499,7 +2473,7 @@
           </a:ln>
         </p:spPr>
         <p:txBody>
-          <a:bodyPr spcFirstLastPara="1" wrap="square" lIns="91425" tIns="91425" rIns="91425" bIns="91425" anchor="t" anchorCtr="0">
+          <a:bodyPr anchorCtr="0" anchor="t" bIns="91425" lIns="91425" spcFirstLastPara="1" rIns="91425" wrap="square" tIns="91425">
             <a:noAutofit/>
           </a:bodyPr>
           <a:lstStyle>
@@ -2630,14 +2604,12 @@
               <a:defRPr sz="1800"/>
             </a:lvl9pPr>
           </a:lstStyle>
-          <a:p>
-            <a:endParaRPr/>
-          </a:p>
+          <a:p/>
         </p:txBody>
       </p:sp>
       <p:pic>
         <p:nvPicPr>
-          <p:cNvPr id="15" name="Google Shape;15;p12" title="Sin título-2.png"/>
+          <p:cNvPr id="15" name="Google Shape;15;p2" title="Sin título-2.png"/>
           <p:cNvPicPr preferRelativeResize="0"/>
           <p:nvPr/>
         </p:nvPicPr>
@@ -2645,7 +2617,7 @@
           <a:blip r:embed="rId3">
             <a:alphaModFix/>
           </a:blip>
-          <a:srcRect l="61982"/>
+          <a:srcRect b="0" l="61982" r="0" t="0"/>
           <a:stretch/>
         </p:blipFill>
         <p:spPr>
@@ -2657,14 +2629,14 @@
             <a:avLst/>
           </a:prstGeom>
           <a:noFill/>
-          <a:ln w="9525" cap="flat" cmpd="sng">
+          <a:ln cap="flat" cmpd="sng" w="9525">
             <a:solidFill>
               <a:schemeClr val="dk2"/>
             </a:solidFill>
             <a:prstDash val="solid"/>
             <a:round/>
-            <a:headEnd type="none" w="sm" len="sm"/>
-            <a:tailEnd type="none" w="sm" len="sm"/>
+            <a:headEnd len="sm" w="sm" type="none"/>
+            <a:tailEnd len="sm" w="sm" type="none"/>
           </a:ln>
         </p:spPr>
       </p:pic>
@@ -2677,17 +2649,16 @@
 </file>
 
 <file path=ppt/slideLayouts/slideLayout10.xml><?xml version="1.0" encoding="utf-8"?>
-<p:sldLayout xmlns:a="http://schemas.openxmlformats.org/drawingml/2006/main" xmlns:r="http://schemas.openxmlformats.org/officeDocument/2006/relationships" xmlns:p="http://schemas.openxmlformats.org/presentationml/2006/main" matchingName="Blank" type="blank">
+<p:sldLayout xmlns:a="http://schemas.openxmlformats.org/drawingml/2006/main" xmlns:r="http://schemas.openxmlformats.org/officeDocument/2006/relationships" xmlns:mc="http://schemas.openxmlformats.org/markup-compatibility/2006" xmlns:mv="urn:schemas-microsoft-com:mac:vml" xmlns:p="http://schemas.openxmlformats.org/presentationml/2006/main" xmlns:c="http://schemas.openxmlformats.org/drawingml/2006/chart" xmlns:dgm="http://schemas.openxmlformats.org/drawingml/2006/diagram" xmlns:o="urn:schemas-microsoft-com:office:office" xmlns:v="urn:schemas-microsoft-com:vml" xmlns:pvml="urn:schemas-microsoft-com:office:powerpoint" xmlns:com="http://schemas.openxmlformats.org/drawingml/2006/compatibility" xmlns:p14="http://schemas.microsoft.com/office/powerpoint/2010/main" xmlns:p15="http://schemas.microsoft.com/office/powerpoint/2012/main" xmlns:ahyp="http://schemas.microsoft.com/office/drawing/2018/hyperlinkcolor" matchingName="Blank" type="blank">
   <p:cSld name="BLANK">
     <p:bg>
       <p:bgPr>
         <a:noFill/>
-        <a:effectLst/>
       </p:bgPr>
     </p:bg>
     <p:spTree>
       <p:nvGrpSpPr>
-        <p:cNvPr id="1" name="Shape 66"/>
+        <p:cNvPr id="66" name="Shape 66"/>
         <p:cNvGrpSpPr/>
         <p:nvPr/>
       </p:nvGrpSpPr>
@@ -2708,11 +2679,11 @@
 </file>
 
 <file path=ppt/slideLayouts/slideLayout11.xml><?xml version="1.0" encoding="utf-8"?>
-<p:sldLayout xmlns:a="http://schemas.openxmlformats.org/drawingml/2006/main" xmlns:r="http://schemas.openxmlformats.org/officeDocument/2006/relationships" xmlns:p="http://schemas.openxmlformats.org/presentationml/2006/main" matchingName="Title only 2">
+<p:sldLayout xmlns:a="http://schemas.openxmlformats.org/drawingml/2006/main" xmlns:r="http://schemas.openxmlformats.org/officeDocument/2006/relationships" xmlns:mc="http://schemas.openxmlformats.org/markup-compatibility/2006" xmlns:mv="urn:schemas-microsoft-com:mac:vml" xmlns:p="http://schemas.openxmlformats.org/presentationml/2006/main" xmlns:c="http://schemas.openxmlformats.org/drawingml/2006/chart" xmlns:dgm="http://schemas.openxmlformats.org/drawingml/2006/diagram" xmlns:o="urn:schemas-microsoft-com:office:office" xmlns:v="urn:schemas-microsoft-com:vml" xmlns:pvml="urn:schemas-microsoft-com:office:powerpoint" xmlns:com="http://schemas.openxmlformats.org/drawingml/2006/compatibility" xmlns:p14="http://schemas.microsoft.com/office/powerpoint/2010/main" xmlns:p15="http://schemas.microsoft.com/office/powerpoint/2012/main" xmlns:ahyp="http://schemas.microsoft.com/office/drawing/2018/hyperlinkcolor" matchingName="Title only 2">
   <p:cSld name="TITLE_ONLY_2">
     <p:spTree>
       <p:nvGrpSpPr>
-        <p:cNvPr id="1" name="Shape 67"/>
+        <p:cNvPr id="67" name="Shape 67"/>
         <p:cNvGrpSpPr/>
         <p:nvPr/>
       </p:nvGrpSpPr>
@@ -2726,7 +2697,7 @@
       </p:grpSpPr>
       <p:grpSp>
         <p:nvGrpSpPr>
-          <p:cNvPr id="68" name="Google Shape;68;p22"/>
+          <p:cNvPr id="68" name="Google Shape;68;p12"/>
           <p:cNvGrpSpPr/>
           <p:nvPr/>
         </p:nvGrpSpPr>
@@ -2740,7 +2711,7 @@
         </p:grpSpPr>
         <p:pic>
           <p:nvPicPr>
-            <p:cNvPr id="69" name="Google Shape;69;p22" title="Sin título-7.png"/>
+            <p:cNvPr id="69" name="Google Shape;69;p12" title="Sin título-7.png"/>
             <p:cNvPicPr preferRelativeResize="0"/>
             <p:nvPr/>
           </p:nvPicPr>
@@ -2748,7 +2719,7 @@
             <a:blip r:embed="rId2">
               <a:alphaModFix/>
             </a:blip>
-            <a:srcRect/>
+            <a:srcRect b="0" l="0" r="0" t="0"/>
             <a:stretch/>
           </p:blipFill>
           <p:spPr>
@@ -2767,7 +2738,7 @@
         </p:pic>
         <p:pic>
           <p:nvPicPr>
-            <p:cNvPr id="70" name="Google Shape;70;p22" title="Sin título-2.png"/>
+            <p:cNvPr id="70" name="Google Shape;70;p12" title="Sin título-2.png"/>
             <p:cNvPicPr preferRelativeResize="0"/>
             <p:nvPr/>
           </p:nvPicPr>
@@ -2775,7 +2746,7 @@
             <a:blip r:embed="rId3">
               <a:alphaModFix/>
             </a:blip>
-            <a:srcRect/>
+            <a:srcRect b="0" l="0" r="0" t="0"/>
             <a:stretch/>
           </p:blipFill>
           <p:spPr>
@@ -2795,10 +2766,8 @@
       </p:grpSp>
       <p:sp>
         <p:nvSpPr>
-          <p:cNvPr id="71" name="Google Shape;71;p22"/>
-          <p:cNvSpPr txBox="1">
-            <a:spLocks noGrp="1"/>
-          </p:cNvSpPr>
+          <p:cNvPr id="71" name="Google Shape;71;p12"/>
+          <p:cNvSpPr txBox="1"/>
           <p:nvPr>
             <p:ph type="title"/>
           </p:nvPr>
@@ -2817,7 +2786,7 @@
           </a:ln>
         </p:spPr>
         <p:txBody>
-          <a:bodyPr spcFirstLastPara="1" wrap="square" lIns="91425" tIns="91425" rIns="91425" bIns="91425" anchor="t" anchorCtr="0">
+          <a:bodyPr anchorCtr="0" anchor="t" bIns="91425" lIns="91425" spcFirstLastPara="1" rIns="91425" wrap="square" tIns="91425">
             <a:noAutofit/>
           </a:bodyPr>
           <a:lstStyle>
@@ -2948,9 +2917,7 @@
               <a:defRPr/>
             </a:lvl9pPr>
           </a:lstStyle>
-          <a:p>
-            <a:endParaRPr/>
-          </a:p>
+          <a:p/>
         </p:txBody>
       </p:sp>
     </p:spTree>
@@ -2962,11 +2929,11 @@
 </file>
 
 <file path=ppt/slideLayouts/slideLayout12.xml><?xml version="1.0" encoding="utf-8"?>
-<p:sldLayout xmlns:a="http://schemas.openxmlformats.org/drawingml/2006/main" xmlns:r="http://schemas.openxmlformats.org/officeDocument/2006/relationships" xmlns:p="http://schemas.openxmlformats.org/presentationml/2006/main" matchingName="Background">
+<p:sldLayout xmlns:a="http://schemas.openxmlformats.org/drawingml/2006/main" xmlns:r="http://schemas.openxmlformats.org/officeDocument/2006/relationships" xmlns:mc="http://schemas.openxmlformats.org/markup-compatibility/2006" xmlns:mv="urn:schemas-microsoft-com:mac:vml" xmlns:p="http://schemas.openxmlformats.org/presentationml/2006/main" xmlns:c="http://schemas.openxmlformats.org/drawingml/2006/chart" xmlns:dgm="http://schemas.openxmlformats.org/drawingml/2006/diagram" xmlns:o="urn:schemas-microsoft-com:office:office" xmlns:v="urn:schemas-microsoft-com:vml" xmlns:pvml="urn:schemas-microsoft-com:office:powerpoint" xmlns:com="http://schemas.openxmlformats.org/drawingml/2006/compatibility" xmlns:p14="http://schemas.microsoft.com/office/powerpoint/2010/main" xmlns:p15="http://schemas.microsoft.com/office/powerpoint/2012/main" xmlns:ahyp="http://schemas.microsoft.com/office/drawing/2018/hyperlinkcolor" matchingName="Background">
   <p:cSld name="BLANK_1_1_1_1_1_1_1">
     <p:spTree>
       <p:nvGrpSpPr>
-        <p:cNvPr id="1" name="Shape 72"/>
+        <p:cNvPr id="72" name="Shape 72"/>
         <p:cNvGrpSpPr/>
         <p:nvPr/>
       </p:nvGrpSpPr>
@@ -2980,7 +2947,7 @@
       </p:grpSpPr>
       <p:grpSp>
         <p:nvGrpSpPr>
-          <p:cNvPr id="73" name="Google Shape;73;p23"/>
+          <p:cNvPr id="73" name="Google Shape;73;p13"/>
           <p:cNvGrpSpPr/>
           <p:nvPr/>
         </p:nvGrpSpPr>
@@ -2994,7 +2961,7 @@
         </p:grpSpPr>
         <p:pic>
           <p:nvPicPr>
-            <p:cNvPr id="74" name="Google Shape;74;p23" title="Sin título-7.png"/>
+            <p:cNvPr id="74" name="Google Shape;74;p13" title="Sin título-7.png"/>
             <p:cNvPicPr preferRelativeResize="0"/>
             <p:nvPr/>
           </p:nvPicPr>
@@ -3002,7 +2969,7 @@
             <a:blip r:embed="rId2">
               <a:alphaModFix/>
             </a:blip>
-            <a:srcRect/>
+            <a:srcRect b="0" l="0" r="0" t="0"/>
             <a:stretch/>
           </p:blipFill>
           <p:spPr>
@@ -3021,7 +2988,7 @@
         </p:pic>
         <p:pic>
           <p:nvPicPr>
-            <p:cNvPr id="75" name="Google Shape;75;p23" title="Sin título-2.png"/>
+            <p:cNvPr id="75" name="Google Shape;75;p13" title="Sin título-2.png"/>
             <p:cNvPicPr preferRelativeResize="0"/>
             <p:nvPr/>
           </p:nvPicPr>
@@ -3029,7 +2996,7 @@
             <a:blip r:embed="rId3">
               <a:alphaModFix/>
             </a:blip>
-            <a:srcRect/>
+            <a:srcRect b="0" l="0" r="0" t="0"/>
             <a:stretch/>
           </p:blipFill>
           <p:spPr>
@@ -3056,11 +3023,11 @@
 </file>
 
 <file path=ppt/slideLayouts/slideLayout13.xml><?xml version="1.0" encoding="utf-8"?>
-<p:sldLayout xmlns:a="http://schemas.openxmlformats.org/drawingml/2006/main" xmlns:r="http://schemas.openxmlformats.org/officeDocument/2006/relationships" xmlns:p="http://schemas.openxmlformats.org/presentationml/2006/main" matchingName="Background 1">
+<p:sldLayout xmlns:a="http://schemas.openxmlformats.org/drawingml/2006/main" xmlns:r="http://schemas.openxmlformats.org/officeDocument/2006/relationships" xmlns:mc="http://schemas.openxmlformats.org/markup-compatibility/2006" xmlns:mv="urn:schemas-microsoft-com:mac:vml" xmlns:p="http://schemas.openxmlformats.org/presentationml/2006/main" xmlns:c="http://schemas.openxmlformats.org/drawingml/2006/chart" xmlns:dgm="http://schemas.openxmlformats.org/drawingml/2006/diagram" xmlns:o="urn:schemas-microsoft-com:office:office" xmlns:v="urn:schemas-microsoft-com:vml" xmlns:pvml="urn:schemas-microsoft-com:office:powerpoint" xmlns:com="http://schemas.openxmlformats.org/drawingml/2006/compatibility" xmlns:p14="http://schemas.microsoft.com/office/powerpoint/2010/main" xmlns:p15="http://schemas.microsoft.com/office/powerpoint/2012/main" xmlns:ahyp="http://schemas.microsoft.com/office/drawing/2018/hyperlinkcolor" matchingName="Background 1">
   <p:cSld name="BLANK_1_1_1_1_1_1_1_1">
     <p:spTree>
       <p:nvGrpSpPr>
-        <p:cNvPr id="1" name="Shape 76"/>
+        <p:cNvPr id="76" name="Shape 76"/>
         <p:cNvGrpSpPr/>
         <p:nvPr/>
       </p:nvGrpSpPr>
@@ -3081,11 +3048,11 @@
 </file>
 
 <file path=ppt/slideLayouts/slideLayout2.xml><?xml version="1.0" encoding="utf-8"?>
-<p:sldLayout xmlns:a="http://schemas.openxmlformats.org/drawingml/2006/main" xmlns:r="http://schemas.openxmlformats.org/officeDocument/2006/relationships" xmlns:p="http://schemas.openxmlformats.org/presentationml/2006/main" matchingName="Title and text">
+<p:sldLayout xmlns:a="http://schemas.openxmlformats.org/drawingml/2006/main" xmlns:r="http://schemas.openxmlformats.org/officeDocument/2006/relationships" xmlns:mc="http://schemas.openxmlformats.org/markup-compatibility/2006" xmlns:mv="urn:schemas-microsoft-com:mac:vml" xmlns:p="http://schemas.openxmlformats.org/presentationml/2006/main" xmlns:c="http://schemas.openxmlformats.org/drawingml/2006/chart" xmlns:dgm="http://schemas.openxmlformats.org/drawingml/2006/diagram" xmlns:o="urn:schemas-microsoft-com:office:office" xmlns:v="urn:schemas-microsoft-com:vml" xmlns:pvml="urn:schemas-microsoft-com:office:powerpoint" xmlns:com="http://schemas.openxmlformats.org/drawingml/2006/compatibility" xmlns:p14="http://schemas.microsoft.com/office/powerpoint/2010/main" xmlns:p15="http://schemas.microsoft.com/office/powerpoint/2012/main" xmlns:ahyp="http://schemas.microsoft.com/office/drawing/2018/hyperlinkcolor" matchingName="Title and text">
   <p:cSld name="CUSTOM">
     <p:spTree>
       <p:nvGrpSpPr>
-        <p:cNvPr id="1" name="Shape 16"/>
+        <p:cNvPr id="16" name="Shape 16"/>
         <p:cNvGrpSpPr/>
         <p:nvPr/>
       </p:nvGrpSpPr>
@@ -3099,7 +3066,7 @@
       </p:grpSpPr>
       <p:pic>
         <p:nvPicPr>
-          <p:cNvPr id="17" name="Google Shape;17;p13" title="Sin título-7.png"/>
+          <p:cNvPr id="17" name="Google Shape;17;p3" title="Sin título-7.png"/>
           <p:cNvPicPr preferRelativeResize="0"/>
           <p:nvPr/>
         </p:nvPicPr>
@@ -3107,7 +3074,7 @@
           <a:blip r:embed="rId2">
             <a:alphaModFix/>
           </a:blip>
-          <a:srcRect/>
+          <a:srcRect b="0" l="0" r="0" t="0"/>
           <a:stretch/>
         </p:blipFill>
         <p:spPr>
@@ -3126,10 +3093,8 @@
       </p:pic>
       <p:sp>
         <p:nvSpPr>
-          <p:cNvPr id="18" name="Google Shape;18;p13"/>
-          <p:cNvSpPr txBox="1">
-            <a:spLocks noGrp="1"/>
-          </p:cNvSpPr>
+          <p:cNvPr id="18" name="Google Shape;18;p3"/>
+          <p:cNvSpPr txBox="1"/>
           <p:nvPr>
             <p:ph type="title"/>
           </p:nvPr>
@@ -3148,7 +3113,7 @@
           </a:ln>
         </p:spPr>
         <p:txBody>
-          <a:bodyPr spcFirstLastPara="1" wrap="square" lIns="91425" tIns="91425" rIns="91425" bIns="91425" anchor="t" anchorCtr="0">
+          <a:bodyPr anchorCtr="0" anchor="t" bIns="91425" lIns="91425" spcFirstLastPara="1" rIns="91425" wrap="square" tIns="91425">
             <a:noAutofit/>
           </a:bodyPr>
           <a:lstStyle>
@@ -3279,19 +3244,15 @@
               <a:defRPr/>
             </a:lvl9pPr>
           </a:lstStyle>
-          <a:p>
-            <a:endParaRPr/>
-          </a:p>
+          <a:p/>
         </p:txBody>
       </p:sp>
       <p:sp>
         <p:nvSpPr>
-          <p:cNvPr id="19" name="Google Shape;19;p13"/>
-          <p:cNvSpPr txBox="1">
-            <a:spLocks noGrp="1"/>
-          </p:cNvSpPr>
+          <p:cNvPr id="19" name="Google Shape;19;p3"/>
+          <p:cNvSpPr txBox="1"/>
           <p:nvPr>
-            <p:ph type="subTitle" idx="1"/>
+            <p:ph idx="1" type="subTitle"/>
           </p:nvPr>
         </p:nvSpPr>
         <p:spPr>
@@ -3308,7 +3269,7 @@
           </a:ln>
         </p:spPr>
         <p:txBody>
-          <a:bodyPr spcFirstLastPara="1" wrap="square" lIns="91425" tIns="91425" rIns="91425" bIns="91425" anchor="t" anchorCtr="0">
+          <a:bodyPr anchorCtr="0" anchor="t" bIns="91425" lIns="91425" spcFirstLastPara="1" rIns="91425" wrap="square" tIns="91425">
             <a:noAutofit/>
           </a:bodyPr>
           <a:lstStyle>
@@ -3439,14 +3400,12 @@
               <a:defRPr/>
             </a:lvl9pPr>
           </a:lstStyle>
-          <a:p>
-            <a:endParaRPr/>
-          </a:p>
+          <a:p/>
         </p:txBody>
       </p:sp>
       <p:pic>
         <p:nvPicPr>
-          <p:cNvPr id="20" name="Google Shape;20;p13" title="Sin título-2.png"/>
+          <p:cNvPr id="20" name="Google Shape;20;p3" title="Sin título-2.png"/>
           <p:cNvPicPr preferRelativeResize="0"/>
           <p:nvPr/>
         </p:nvPicPr>
@@ -3454,7 +3413,7 @@
           <a:blip r:embed="rId3">
             <a:alphaModFix/>
           </a:blip>
-          <a:srcRect/>
+          <a:srcRect b="0" l="0" r="0" t="0"/>
           <a:stretch/>
         </p:blipFill>
         <p:spPr>
@@ -3480,11 +3439,11 @@
 </file>
 
 <file path=ppt/slideLayouts/slideLayout3.xml><?xml version="1.0" encoding="utf-8"?>
-<p:sldLayout xmlns:a="http://schemas.openxmlformats.org/drawingml/2006/main" xmlns:r="http://schemas.openxmlformats.org/officeDocument/2006/relationships" xmlns:p="http://schemas.openxmlformats.org/presentationml/2006/main" matchingName="Title and text 1">
+<p:sldLayout xmlns:a="http://schemas.openxmlformats.org/drawingml/2006/main" xmlns:r="http://schemas.openxmlformats.org/officeDocument/2006/relationships" xmlns:mc="http://schemas.openxmlformats.org/markup-compatibility/2006" xmlns:mv="urn:schemas-microsoft-com:mac:vml" xmlns:p="http://schemas.openxmlformats.org/presentationml/2006/main" xmlns:c="http://schemas.openxmlformats.org/drawingml/2006/chart" xmlns:dgm="http://schemas.openxmlformats.org/drawingml/2006/diagram" xmlns:o="urn:schemas-microsoft-com:office:office" xmlns:v="urn:schemas-microsoft-com:vml" xmlns:pvml="urn:schemas-microsoft-com:office:powerpoint" xmlns:com="http://schemas.openxmlformats.org/drawingml/2006/compatibility" xmlns:p14="http://schemas.microsoft.com/office/powerpoint/2010/main" xmlns:p15="http://schemas.microsoft.com/office/powerpoint/2012/main" xmlns:ahyp="http://schemas.microsoft.com/office/drawing/2018/hyperlinkcolor" matchingName="Title and text 1">
   <p:cSld name="ONE_COLUMN_TEXT_1">
     <p:spTree>
       <p:nvGrpSpPr>
-        <p:cNvPr id="1" name="Shape 21"/>
+        <p:cNvPr id="21" name="Shape 21"/>
         <p:cNvGrpSpPr/>
         <p:nvPr/>
       </p:nvGrpSpPr>
@@ -3498,7 +3457,7 @@
       </p:grpSpPr>
       <p:pic>
         <p:nvPicPr>
-          <p:cNvPr id="22" name="Google Shape;22;p14" title="Sin título-7.png"/>
+          <p:cNvPr id="22" name="Google Shape;22;p4" title="Sin título-7.png"/>
           <p:cNvPicPr preferRelativeResize="0"/>
           <p:nvPr/>
         </p:nvPicPr>
@@ -3506,7 +3465,7 @@
           <a:blip r:embed="rId2">
             <a:alphaModFix/>
           </a:blip>
-          <a:srcRect/>
+          <a:srcRect b="0" l="0" r="0" t="0"/>
           <a:stretch/>
         </p:blipFill>
         <p:spPr>
@@ -3525,10 +3484,8 @@
       </p:pic>
       <p:sp>
         <p:nvSpPr>
-          <p:cNvPr id="23" name="Google Shape;23;p14"/>
-          <p:cNvSpPr txBox="1">
-            <a:spLocks noGrp="1"/>
-          </p:cNvSpPr>
+          <p:cNvPr id="23" name="Google Shape;23;p4"/>
+          <p:cNvSpPr txBox="1"/>
           <p:nvPr>
             <p:ph type="title"/>
           </p:nvPr>
@@ -3547,7 +3504,7 @@
           </a:ln>
         </p:spPr>
         <p:txBody>
-          <a:bodyPr spcFirstLastPara="1" wrap="square" lIns="91425" tIns="91425" rIns="91425" bIns="91425" anchor="t" anchorCtr="0">
+          <a:bodyPr anchorCtr="0" anchor="t" bIns="91425" lIns="91425" spcFirstLastPara="1" rIns="91425" wrap="square" tIns="91425">
             <a:noAutofit/>
           </a:bodyPr>
           <a:lstStyle>
@@ -3678,19 +3635,15 @@
               <a:defRPr/>
             </a:lvl9pPr>
           </a:lstStyle>
-          <a:p>
-            <a:endParaRPr/>
-          </a:p>
+          <a:p/>
         </p:txBody>
       </p:sp>
       <p:sp>
         <p:nvSpPr>
-          <p:cNvPr id="24" name="Google Shape;24;p14"/>
-          <p:cNvSpPr txBox="1">
-            <a:spLocks noGrp="1"/>
-          </p:cNvSpPr>
+          <p:cNvPr id="24" name="Google Shape;24;p4"/>
+          <p:cNvSpPr txBox="1"/>
           <p:nvPr>
-            <p:ph type="body" idx="1"/>
+            <p:ph idx="1" type="body"/>
           </p:nvPr>
         </p:nvSpPr>
         <p:spPr>
@@ -3707,11 +3660,11 @@
           </a:ln>
         </p:spPr>
         <p:txBody>
-          <a:bodyPr spcFirstLastPara="1" wrap="square" lIns="91425" tIns="91425" rIns="91425" bIns="91425" anchor="t" anchorCtr="0">
+          <a:bodyPr anchorCtr="0" anchor="t" bIns="91425" lIns="91425" spcFirstLastPara="1" rIns="91425" wrap="square" tIns="91425">
             <a:noAutofit/>
           </a:bodyPr>
           <a:lstStyle>
-            <a:lvl1pPr marL="457200" lvl="0" indent="-317500" algn="l">
+            <a:lvl1pPr indent="-317500" lvl="0" marL="457200" algn="l">
               <a:lnSpc>
                 <a:spcPct val="100000"/>
               </a:lnSpc>
@@ -3725,7 +3678,7 @@
               <a:buChar char="●"/>
               <a:defRPr sz="1400"/>
             </a:lvl1pPr>
-            <a:lvl2pPr marL="914400" lvl="1" indent="-317500" algn="l">
+            <a:lvl2pPr indent="-317500" lvl="1" marL="914400" algn="l">
               <a:lnSpc>
                 <a:spcPct val="115000"/>
               </a:lnSpc>
@@ -3739,7 +3692,7 @@
               <a:buChar char="○"/>
               <a:defRPr/>
             </a:lvl2pPr>
-            <a:lvl3pPr marL="1371600" lvl="2" indent="-317500" algn="l">
+            <a:lvl3pPr indent="-317500" lvl="2" marL="1371600" algn="l">
               <a:lnSpc>
                 <a:spcPct val="115000"/>
               </a:lnSpc>
@@ -3753,7 +3706,7 @@
               <a:buChar char="■"/>
               <a:defRPr/>
             </a:lvl3pPr>
-            <a:lvl4pPr marL="1828800" lvl="3" indent="-317500" algn="l">
+            <a:lvl4pPr indent="-317500" lvl="3" marL="1828800" algn="l">
               <a:lnSpc>
                 <a:spcPct val="115000"/>
               </a:lnSpc>
@@ -3767,7 +3720,7 @@
               <a:buChar char="●"/>
               <a:defRPr/>
             </a:lvl4pPr>
-            <a:lvl5pPr marL="2286000" lvl="4" indent="-317500" algn="l">
+            <a:lvl5pPr indent="-317500" lvl="4" marL="2286000" algn="l">
               <a:lnSpc>
                 <a:spcPct val="115000"/>
               </a:lnSpc>
@@ -3781,7 +3734,7 @@
               <a:buChar char="○"/>
               <a:defRPr/>
             </a:lvl5pPr>
-            <a:lvl6pPr marL="2743200" lvl="5" indent="-317500" algn="l">
+            <a:lvl6pPr indent="-317500" lvl="5" marL="2743200" algn="l">
               <a:lnSpc>
                 <a:spcPct val="115000"/>
               </a:lnSpc>
@@ -3795,7 +3748,7 @@
               <a:buChar char="■"/>
               <a:defRPr/>
             </a:lvl6pPr>
-            <a:lvl7pPr marL="3200400" lvl="6" indent="-317500" algn="l">
+            <a:lvl7pPr indent="-317500" lvl="6" marL="3200400" algn="l">
               <a:lnSpc>
                 <a:spcPct val="115000"/>
               </a:lnSpc>
@@ -3809,7 +3762,7 @@
               <a:buChar char="●"/>
               <a:defRPr/>
             </a:lvl7pPr>
-            <a:lvl8pPr marL="3657600" lvl="7" indent="-317500" algn="l">
+            <a:lvl8pPr indent="-317500" lvl="7" marL="3657600" algn="l">
               <a:lnSpc>
                 <a:spcPct val="115000"/>
               </a:lnSpc>
@@ -3823,7 +3776,7 @@
               <a:buChar char="○"/>
               <a:defRPr/>
             </a:lvl8pPr>
-            <a:lvl9pPr marL="4114800" lvl="8" indent="-317500" algn="l">
+            <a:lvl9pPr indent="-317500" lvl="8" marL="4114800" algn="l">
               <a:lnSpc>
                 <a:spcPct val="115000"/>
               </a:lnSpc>
@@ -3838,19 +3791,15 @@
               <a:defRPr/>
             </a:lvl9pPr>
           </a:lstStyle>
-          <a:p>
-            <a:endParaRPr/>
-          </a:p>
+          <a:p/>
         </p:txBody>
       </p:sp>
       <p:sp>
         <p:nvSpPr>
-          <p:cNvPr id="25" name="Google Shape;25;p14"/>
-          <p:cNvSpPr>
-            <a:spLocks noGrp="1"/>
-          </p:cNvSpPr>
+          <p:cNvPr id="25" name="Google Shape;25;p4"/>
+          <p:cNvSpPr/>
           <p:nvPr>
-            <p:ph type="pic" idx="2"/>
+            <p:ph idx="2" type="pic"/>
           </p:nvPr>
         </p:nvSpPr>
         <p:spPr>
@@ -3862,20 +3811,20 @@
             <a:avLst/>
           </a:prstGeom>
           <a:noFill/>
-          <a:ln w="9525" cap="flat" cmpd="sng">
+          <a:ln cap="flat" cmpd="sng" w="9525">
             <a:solidFill>
               <a:schemeClr val="dk2"/>
             </a:solidFill>
             <a:prstDash val="solid"/>
             <a:round/>
-            <a:headEnd type="none" w="sm" len="sm"/>
-            <a:tailEnd type="none" w="sm" len="sm"/>
+            <a:headEnd len="sm" w="sm" type="none"/>
+            <a:tailEnd len="sm" w="sm" type="none"/>
           </a:ln>
         </p:spPr>
       </p:sp>
       <p:pic>
         <p:nvPicPr>
-          <p:cNvPr id="26" name="Google Shape;26;p14" title="Sin título-2.png"/>
+          <p:cNvPr id="26" name="Google Shape;26;p4" title="Sin título-2.png"/>
           <p:cNvPicPr preferRelativeResize="0"/>
           <p:nvPr/>
         </p:nvPicPr>
@@ -3883,7 +3832,7 @@
           <a:blip r:embed="rId3">
             <a:alphaModFix/>
           </a:blip>
-          <a:srcRect/>
+          <a:srcRect b="0" l="0" r="0" t="0"/>
           <a:stretch/>
         </p:blipFill>
         <p:spPr>
@@ -3909,11 +3858,11 @@
 </file>
 
 <file path=ppt/slideLayouts/slideLayout4.xml><?xml version="1.0" encoding="utf-8"?>
-<p:sldLayout xmlns:a="http://schemas.openxmlformats.org/drawingml/2006/main" xmlns:r="http://schemas.openxmlformats.org/officeDocument/2006/relationships" xmlns:p="http://schemas.openxmlformats.org/presentationml/2006/main" matchingName="Thanks">
+<p:sldLayout xmlns:a="http://schemas.openxmlformats.org/drawingml/2006/main" xmlns:r="http://schemas.openxmlformats.org/officeDocument/2006/relationships" xmlns:mc="http://schemas.openxmlformats.org/markup-compatibility/2006" xmlns:mv="urn:schemas-microsoft-com:mac:vml" xmlns:p="http://schemas.openxmlformats.org/presentationml/2006/main" xmlns:c="http://schemas.openxmlformats.org/drawingml/2006/chart" xmlns:dgm="http://schemas.openxmlformats.org/drawingml/2006/diagram" xmlns:o="urn:schemas-microsoft-com:office:office" xmlns:v="urn:schemas-microsoft-com:vml" xmlns:pvml="urn:schemas-microsoft-com:office:powerpoint" xmlns:com="http://schemas.openxmlformats.org/drawingml/2006/compatibility" xmlns:p14="http://schemas.microsoft.com/office/powerpoint/2010/main" xmlns:p15="http://schemas.microsoft.com/office/powerpoint/2012/main" xmlns:ahyp="http://schemas.microsoft.com/office/drawing/2018/hyperlinkcolor" matchingName="Thanks">
   <p:cSld name="CUSTOM_3_1">
     <p:spTree>
       <p:nvGrpSpPr>
-        <p:cNvPr id="1" name="Shape 27"/>
+        <p:cNvPr id="27" name="Shape 27"/>
         <p:cNvGrpSpPr/>
         <p:nvPr/>
       </p:nvGrpSpPr>
@@ -3927,7 +3876,7 @@
       </p:grpSpPr>
       <p:grpSp>
         <p:nvGrpSpPr>
-          <p:cNvPr id="28" name="Google Shape;28;p15"/>
+          <p:cNvPr id="28" name="Google Shape;28;p5"/>
           <p:cNvGrpSpPr/>
           <p:nvPr/>
         </p:nvGrpSpPr>
@@ -3941,7 +3890,7 @@
         </p:grpSpPr>
         <p:pic>
           <p:nvPicPr>
-            <p:cNvPr id="29" name="Google Shape;29;p15" title="Sin título-7.png"/>
+            <p:cNvPr id="29" name="Google Shape;29;p5" title="Sin título-7.png"/>
             <p:cNvPicPr preferRelativeResize="0"/>
             <p:nvPr/>
           </p:nvPicPr>
@@ -3949,7 +3898,7 @@
             <a:blip r:embed="rId2">
               <a:alphaModFix/>
             </a:blip>
-            <a:srcRect/>
+            <a:srcRect b="0" l="0" r="0" t="0"/>
             <a:stretch/>
           </p:blipFill>
           <p:spPr>
@@ -3968,7 +3917,7 @@
         </p:pic>
         <p:pic>
           <p:nvPicPr>
-            <p:cNvPr id="30" name="Google Shape;30;p15" title="Sin título-2.png"/>
+            <p:cNvPr id="30" name="Google Shape;30;p5" title="Sin título-2.png"/>
             <p:cNvPicPr preferRelativeResize="0"/>
             <p:nvPr/>
           </p:nvPicPr>
@@ -3976,7 +3925,7 @@
             <a:blip r:embed="rId3">
               <a:alphaModFix/>
             </a:blip>
-            <a:srcRect/>
+            <a:srcRect b="0" l="0" r="0" t="0"/>
             <a:stretch/>
           </p:blipFill>
           <p:spPr>
@@ -3996,10 +3945,8 @@
       </p:grpSp>
       <p:sp>
         <p:nvSpPr>
-          <p:cNvPr id="31" name="Google Shape;31;p15"/>
-          <p:cNvSpPr txBox="1">
-            <a:spLocks noGrp="1"/>
-          </p:cNvSpPr>
+          <p:cNvPr id="31" name="Google Shape;31;p5"/>
+          <p:cNvSpPr txBox="1"/>
           <p:nvPr>
             <p:ph type="title"/>
           </p:nvPr>
@@ -4018,7 +3965,7 @@
           </a:ln>
         </p:spPr>
         <p:txBody>
-          <a:bodyPr spcFirstLastPara="1" wrap="square" lIns="91425" tIns="91425" rIns="91425" bIns="91425" anchor="ctr" anchorCtr="0">
+          <a:bodyPr anchorCtr="0" anchor="ctr" bIns="91425" lIns="91425" spcFirstLastPara="1" rIns="91425" wrap="square" tIns="91425">
             <a:noAutofit/>
           </a:bodyPr>
           <a:lstStyle>
@@ -4149,19 +4096,15 @@
               <a:defRPr sz="5000"/>
             </a:lvl9pPr>
           </a:lstStyle>
-          <a:p>
-            <a:endParaRPr/>
-          </a:p>
+          <a:p/>
         </p:txBody>
       </p:sp>
       <p:sp>
         <p:nvSpPr>
-          <p:cNvPr id="32" name="Google Shape;32;p15"/>
-          <p:cNvSpPr txBox="1">
-            <a:spLocks noGrp="1"/>
-          </p:cNvSpPr>
+          <p:cNvPr id="32" name="Google Shape;32;p5"/>
+          <p:cNvSpPr txBox="1"/>
           <p:nvPr>
-            <p:ph type="subTitle" idx="1"/>
+            <p:ph idx="1" type="subTitle"/>
           </p:nvPr>
         </p:nvSpPr>
         <p:spPr>
@@ -4178,7 +4121,7 @@
           </a:ln>
         </p:spPr>
         <p:txBody>
-          <a:bodyPr spcFirstLastPara="1" wrap="square" lIns="91425" tIns="91425" rIns="91425" bIns="91425" anchor="t" anchorCtr="0">
+          <a:bodyPr anchorCtr="0" anchor="t" bIns="91425" lIns="91425" spcFirstLastPara="1" rIns="91425" wrap="square" tIns="91425">
             <a:noAutofit/>
           </a:bodyPr>
           <a:lstStyle>
@@ -4309,14 +4252,12 @@
               <a:defRPr/>
             </a:lvl9pPr>
           </a:lstStyle>
-          <a:p>
-            <a:endParaRPr/>
-          </a:p>
+          <a:p/>
         </p:txBody>
       </p:sp>
       <p:pic>
         <p:nvPicPr>
-          <p:cNvPr id="33" name="Google Shape;33;p15" title="Sin título-9.png"/>
+          <p:cNvPr id="33" name="Google Shape;33;p5" title="Sin título-9.png"/>
           <p:cNvPicPr preferRelativeResize="0"/>
           <p:nvPr/>
         </p:nvPicPr>
@@ -4324,7 +4265,7 @@
           <a:blip r:embed="rId4">
             <a:alphaModFix/>
           </a:blip>
-          <a:srcRect l="19762" t="14675" r="19445" b="47106"/>
+          <a:srcRect b="47106" l="19762" r="19445" t="14675"/>
           <a:stretch/>
         </p:blipFill>
         <p:spPr>
@@ -4343,7 +4284,7 @@
       </p:pic>
       <p:sp>
         <p:nvSpPr>
-          <p:cNvPr id="34" name="Google Shape;34;p15"/>
+          <p:cNvPr id="34" name="Google Shape;34;p5"/>
           <p:cNvSpPr txBox="1"/>
           <p:nvPr/>
         </p:nvSpPr>
@@ -4361,12 +4302,12 @@
           </a:ln>
         </p:spPr>
         <p:txBody>
-          <a:bodyPr spcFirstLastPara="1" wrap="square" lIns="91425" tIns="91425" rIns="91425" bIns="91425" anchor="t" anchorCtr="0">
+          <a:bodyPr anchorCtr="0" anchor="t" bIns="91425" lIns="91425" spcFirstLastPara="1" rIns="91425" wrap="square" tIns="91425">
             <a:noAutofit/>
           </a:bodyPr>
           <a:lstStyle/>
           <a:p>
-            <a:pPr marL="0" marR="0" lvl="0" indent="0" algn="l" rtl="0">
+            <a:pPr indent="0" lvl="0" marL="0" marR="0" rtl="0" algn="l">
               <a:lnSpc>
                 <a:spcPct val="100000"/>
               </a:lnSpc>
@@ -4384,7 +4325,7 @@
               <a:buNone/>
             </a:pPr>
             <a:r>
-              <a:rPr lang="hu-HU" sz="1000" b="1" i="0" u="none" strike="noStrike" cap="none">
+              <a:rPr b="1" i="0" lang="en-US" sz="1000" u="none" cap="none" strike="noStrike">
                 <a:solidFill>
                   <a:schemeClr val="dk1"/>
                 </a:solidFill>
@@ -4396,7 +4337,7 @@
               <a:t>CREDITS:</a:t>
             </a:r>
             <a:r>
-              <a:rPr lang="hu-HU" sz="1000" b="0" i="0" u="none" strike="noStrike" cap="none">
+              <a:rPr b="0" i="0" lang="en-US" sz="1000" u="none" cap="none" strike="noStrike">
                 <a:solidFill>
                   <a:schemeClr val="dk1"/>
                 </a:solidFill>
@@ -4408,9 +4349,9 @@
               <a:t> This presentation template was created by </a:t>
             </a:r>
             <a:r>
-              <a:rPr lang="hu-HU" sz="1000" b="1" i="0" u="none" strike="noStrike" cap="none">
+              <a:rPr b="1" i="0" lang="en-US" sz="1000" u="none" cap="none" strike="noStrike">
                 <a:solidFill>
-                  <a:schemeClr val="dk1"/>
+                  <a:schemeClr val="hlink"/>
                 </a:solidFill>
                 <a:uFill>
                   <a:noFill/>
@@ -4419,18 +4360,12 @@
                 <a:ea typeface="Roboto Mono"/>
                 <a:cs typeface="Roboto Mono"/>
                 <a:sym typeface="Roboto Mono"/>
-                <a:hlinkClick r:id="rId5">
-                  <a:extLst>
-                    <a:ext uri="{A12FA001-AC4F-418D-AE19-62706E023703}">
-                      <ahyp:hlinkClr xmlns:ahyp="http://schemas.microsoft.com/office/drawing/2018/hyperlinkcolor" val="tx"/>
-                    </a:ext>
-                  </a:extLst>
-                </a:hlinkClick>
+                <a:hlinkClick r:id="rId5"/>
               </a:rPr>
               <a:t>Slidesgo</a:t>
             </a:r>
             <a:r>
-              <a:rPr lang="hu-HU" sz="1000" b="0" i="0" u="none" strike="noStrike" cap="none">
+              <a:rPr b="0" i="0" lang="en-US" sz="1000" u="none" cap="none" strike="noStrike">
                 <a:solidFill>
                   <a:schemeClr val="dk1"/>
                 </a:solidFill>
@@ -4442,9 +4377,9 @@
               <a:t>, and includes icons, infographics &amp; images by </a:t>
             </a:r>
             <a:r>
-              <a:rPr lang="hu-HU" sz="1000" b="1" i="0" u="none" strike="noStrike" cap="none">
+              <a:rPr b="1" i="0" lang="en-US" sz="1000" u="none" cap="none" strike="noStrike">
                 <a:solidFill>
-                  <a:schemeClr val="dk1"/>
+                  <a:schemeClr val="hlink"/>
                 </a:solidFill>
                 <a:uFill>
                   <a:noFill/>
@@ -4453,18 +4388,12 @@
                 <a:ea typeface="Roboto Mono"/>
                 <a:cs typeface="Roboto Mono"/>
                 <a:sym typeface="Roboto Mono"/>
-                <a:hlinkClick r:id="rId6">
-                  <a:extLst>
-                    <a:ext uri="{A12FA001-AC4F-418D-AE19-62706E023703}">
-                      <ahyp:hlinkClr xmlns:ahyp="http://schemas.microsoft.com/office/drawing/2018/hyperlinkcolor" val="tx"/>
-                    </a:ext>
-                  </a:extLst>
-                </a:hlinkClick>
+                <a:hlinkClick r:id="rId6"/>
               </a:rPr>
               <a:t>Freepik</a:t>
             </a:r>
             <a:r>
-              <a:rPr lang="hu-HU" sz="1000" b="0" i="0" u="none" strike="noStrike" cap="none">
+              <a:rPr b="0" i="0" lang="en-US" sz="1000" u="none" cap="none" strike="noStrike">
                 <a:solidFill>
                   <a:schemeClr val="dk1"/>
                 </a:solidFill>
@@ -4475,7 +4404,7 @@
               </a:rPr>
               <a:t> </a:t>
             </a:r>
-            <a:endParaRPr sz="1000" b="1" i="0" u="sng" strike="noStrike" cap="none">
+            <a:endParaRPr b="1" i="0" sz="1000" u="sng" cap="none" strike="noStrike">
               <a:solidFill>
                 <a:schemeClr val="dk1"/>
               </a:solidFill>
@@ -4496,11 +4425,11 @@
 </file>
 
 <file path=ppt/slideLayouts/slideLayout5.xml><?xml version="1.0" encoding="utf-8"?>
-<p:sldLayout xmlns:a="http://schemas.openxmlformats.org/drawingml/2006/main" xmlns:r="http://schemas.openxmlformats.org/officeDocument/2006/relationships" xmlns:p="http://schemas.openxmlformats.org/presentationml/2006/main" matchingName="Title and body" type="tx">
+<p:sldLayout xmlns:a="http://schemas.openxmlformats.org/drawingml/2006/main" xmlns:r="http://schemas.openxmlformats.org/officeDocument/2006/relationships" xmlns:mc="http://schemas.openxmlformats.org/markup-compatibility/2006" xmlns:mv="urn:schemas-microsoft-com:mac:vml" xmlns:p="http://schemas.openxmlformats.org/presentationml/2006/main" xmlns:c="http://schemas.openxmlformats.org/drawingml/2006/chart" xmlns:dgm="http://schemas.openxmlformats.org/drawingml/2006/diagram" xmlns:o="urn:schemas-microsoft-com:office:office" xmlns:v="urn:schemas-microsoft-com:vml" xmlns:pvml="urn:schemas-microsoft-com:office:powerpoint" xmlns:com="http://schemas.openxmlformats.org/drawingml/2006/compatibility" xmlns:p14="http://schemas.microsoft.com/office/powerpoint/2010/main" xmlns:p15="http://schemas.microsoft.com/office/powerpoint/2012/main" xmlns:ahyp="http://schemas.microsoft.com/office/drawing/2018/hyperlinkcolor" matchingName="Title and body" type="tx">
   <p:cSld name="TITLE_AND_BODY">
     <p:spTree>
       <p:nvGrpSpPr>
-        <p:cNvPr id="1" name="Shape 35"/>
+        <p:cNvPr id="35" name="Shape 35"/>
         <p:cNvGrpSpPr/>
         <p:nvPr/>
       </p:nvGrpSpPr>
@@ -4514,7 +4443,7 @@
       </p:grpSpPr>
       <p:grpSp>
         <p:nvGrpSpPr>
-          <p:cNvPr id="36" name="Google Shape;36;p16"/>
+          <p:cNvPr id="36" name="Google Shape;36;p6"/>
           <p:cNvGrpSpPr/>
           <p:nvPr/>
         </p:nvGrpSpPr>
@@ -4528,7 +4457,7 @@
         </p:grpSpPr>
         <p:pic>
           <p:nvPicPr>
-            <p:cNvPr id="37" name="Google Shape;37;p16" title="Sin título-7.png"/>
+            <p:cNvPr id="37" name="Google Shape;37;p6" title="Sin título-7.png"/>
             <p:cNvPicPr preferRelativeResize="0"/>
             <p:nvPr/>
           </p:nvPicPr>
@@ -4536,7 +4465,7 @@
             <a:blip r:embed="rId2">
               <a:alphaModFix/>
             </a:blip>
-            <a:srcRect/>
+            <a:srcRect b="0" l="0" r="0" t="0"/>
             <a:stretch/>
           </p:blipFill>
           <p:spPr>
@@ -4555,7 +4484,7 @@
         </p:pic>
         <p:pic>
           <p:nvPicPr>
-            <p:cNvPr id="38" name="Google Shape;38;p16" title="Sin título-2.png"/>
+            <p:cNvPr id="38" name="Google Shape;38;p6" title="Sin título-2.png"/>
             <p:cNvPicPr preferRelativeResize="0"/>
             <p:nvPr/>
           </p:nvPicPr>
@@ -4563,7 +4492,7 @@
             <a:blip r:embed="rId3">
               <a:alphaModFix/>
             </a:blip>
-            <a:srcRect/>
+            <a:srcRect b="0" l="0" r="0" t="0"/>
             <a:stretch/>
           </p:blipFill>
           <p:spPr>
@@ -4583,10 +4512,8 @@
       </p:grpSp>
       <p:sp>
         <p:nvSpPr>
-          <p:cNvPr id="39" name="Google Shape;39;p16"/>
-          <p:cNvSpPr txBox="1">
-            <a:spLocks noGrp="1"/>
-          </p:cNvSpPr>
+          <p:cNvPr id="39" name="Google Shape;39;p6"/>
+          <p:cNvSpPr txBox="1"/>
           <p:nvPr>
             <p:ph type="title"/>
           </p:nvPr>
@@ -4605,7 +4532,7 @@
           </a:ln>
         </p:spPr>
         <p:txBody>
-          <a:bodyPr spcFirstLastPara="1" wrap="square" lIns="91425" tIns="91425" rIns="91425" bIns="91425" anchor="t" anchorCtr="0">
+          <a:bodyPr anchorCtr="0" anchor="t" bIns="91425" lIns="91425" spcFirstLastPara="1" rIns="91425" wrap="square" tIns="91425">
             <a:noAutofit/>
           </a:bodyPr>
           <a:lstStyle>
@@ -4736,19 +4663,15 @@
               <a:defRPr sz="2600"/>
             </a:lvl9pPr>
           </a:lstStyle>
-          <a:p>
-            <a:endParaRPr/>
-          </a:p>
+          <a:p/>
         </p:txBody>
       </p:sp>
       <p:sp>
         <p:nvSpPr>
-          <p:cNvPr id="40" name="Google Shape;40;p16"/>
-          <p:cNvSpPr txBox="1">
-            <a:spLocks noGrp="1"/>
-          </p:cNvSpPr>
+          <p:cNvPr id="40" name="Google Shape;40;p6"/>
+          <p:cNvSpPr txBox="1"/>
           <p:nvPr>
-            <p:ph type="body" idx="1"/>
+            <p:ph idx="1" type="body"/>
           </p:nvPr>
         </p:nvSpPr>
         <p:spPr>
@@ -4765,11 +4688,11 @@
           </a:ln>
         </p:spPr>
         <p:txBody>
-          <a:bodyPr spcFirstLastPara="1" wrap="square" lIns="91425" tIns="91425" rIns="91425" bIns="91425" anchor="t" anchorCtr="0">
+          <a:bodyPr anchorCtr="0" anchor="t" bIns="91425" lIns="91425" spcFirstLastPara="1" rIns="91425" wrap="square" tIns="91425">
             <a:noAutofit/>
           </a:bodyPr>
           <a:lstStyle>
-            <a:lvl1pPr marL="457200" lvl="0" indent="-342900" algn="l">
+            <a:lvl1pPr indent="-342900" lvl="0" marL="457200" algn="l">
               <a:lnSpc>
                 <a:spcPct val="115000"/>
               </a:lnSpc>
@@ -4791,7 +4714,7 @@
                 </a:solidFill>
               </a:defRPr>
             </a:lvl1pPr>
-            <a:lvl2pPr marL="914400" lvl="1" indent="-317500" algn="l">
+            <a:lvl2pPr indent="-317500" lvl="1" marL="914400" algn="l">
               <a:lnSpc>
                 <a:spcPct val="115000"/>
               </a:lnSpc>
@@ -4813,7 +4736,7 @@
                 </a:solidFill>
               </a:defRPr>
             </a:lvl2pPr>
-            <a:lvl3pPr marL="1371600" lvl="2" indent="-317500" algn="l">
+            <a:lvl3pPr indent="-317500" lvl="2" marL="1371600" algn="l">
               <a:lnSpc>
                 <a:spcPct val="115000"/>
               </a:lnSpc>
@@ -4835,7 +4758,7 @@
                 </a:solidFill>
               </a:defRPr>
             </a:lvl3pPr>
-            <a:lvl4pPr marL="1828800" lvl="3" indent="-317500" algn="l">
+            <a:lvl4pPr indent="-317500" lvl="3" marL="1828800" algn="l">
               <a:lnSpc>
                 <a:spcPct val="115000"/>
               </a:lnSpc>
@@ -4857,7 +4780,7 @@
                 </a:solidFill>
               </a:defRPr>
             </a:lvl4pPr>
-            <a:lvl5pPr marL="2286000" lvl="4" indent="-317500" algn="l">
+            <a:lvl5pPr indent="-317500" lvl="4" marL="2286000" algn="l">
               <a:lnSpc>
                 <a:spcPct val="115000"/>
               </a:lnSpc>
@@ -4879,7 +4802,7 @@
                 </a:solidFill>
               </a:defRPr>
             </a:lvl5pPr>
-            <a:lvl6pPr marL="2743200" lvl="5" indent="-317500" algn="l">
+            <a:lvl6pPr indent="-317500" lvl="5" marL="2743200" algn="l">
               <a:lnSpc>
                 <a:spcPct val="115000"/>
               </a:lnSpc>
@@ -4901,7 +4824,7 @@
                 </a:solidFill>
               </a:defRPr>
             </a:lvl6pPr>
-            <a:lvl7pPr marL="3200400" lvl="6" indent="-317500" algn="l">
+            <a:lvl7pPr indent="-317500" lvl="6" marL="3200400" algn="l">
               <a:lnSpc>
                 <a:spcPct val="115000"/>
               </a:lnSpc>
@@ -4923,7 +4846,7 @@
                 </a:solidFill>
               </a:defRPr>
             </a:lvl7pPr>
-            <a:lvl8pPr marL="3657600" lvl="7" indent="-317500" algn="l">
+            <a:lvl8pPr indent="-317500" lvl="7" marL="3657600" algn="l">
               <a:lnSpc>
                 <a:spcPct val="115000"/>
               </a:lnSpc>
@@ -4945,7 +4868,7 @@
                 </a:solidFill>
               </a:defRPr>
             </a:lvl8pPr>
-            <a:lvl9pPr marL="4114800" lvl="8" indent="-317500" algn="l">
+            <a:lvl9pPr indent="-317500" lvl="8" marL="4114800" algn="l">
               <a:lnSpc>
                 <a:spcPct val="115000"/>
               </a:lnSpc>
@@ -4968,9 +4891,7 @@
               </a:defRPr>
             </a:lvl9pPr>
           </a:lstStyle>
-          <a:p>
-            <a:endParaRPr/>
-          </a:p>
+          <a:p/>
         </p:txBody>
       </p:sp>
     </p:spTree>
@@ -4982,11 +4903,11 @@
 </file>
 
 <file path=ppt/slideLayouts/slideLayout6.xml><?xml version="1.0" encoding="utf-8"?>
-<p:sldLayout xmlns:a="http://schemas.openxmlformats.org/drawingml/2006/main" xmlns:r="http://schemas.openxmlformats.org/officeDocument/2006/relationships" xmlns:p="http://schemas.openxmlformats.org/presentationml/2006/main" matchingName="One column text">
+<p:sldLayout xmlns:a="http://schemas.openxmlformats.org/drawingml/2006/main" xmlns:r="http://schemas.openxmlformats.org/officeDocument/2006/relationships" xmlns:mc="http://schemas.openxmlformats.org/markup-compatibility/2006" xmlns:mv="urn:schemas-microsoft-com:mac:vml" xmlns:p="http://schemas.openxmlformats.org/presentationml/2006/main" xmlns:c="http://schemas.openxmlformats.org/drawingml/2006/chart" xmlns:dgm="http://schemas.openxmlformats.org/drawingml/2006/diagram" xmlns:o="urn:schemas-microsoft-com:office:office" xmlns:v="urn:schemas-microsoft-com:vml" xmlns:pvml="urn:schemas-microsoft-com:office:powerpoint" xmlns:com="http://schemas.openxmlformats.org/drawingml/2006/compatibility" xmlns:p14="http://schemas.microsoft.com/office/powerpoint/2010/main" xmlns:p15="http://schemas.microsoft.com/office/powerpoint/2012/main" xmlns:ahyp="http://schemas.microsoft.com/office/drawing/2018/hyperlinkcolor" matchingName="One column text">
   <p:cSld name="ONE_COLUMN_TEXT">
     <p:spTree>
       <p:nvGrpSpPr>
-        <p:cNvPr id="1" name="Shape 41"/>
+        <p:cNvPr id="41" name="Shape 41"/>
         <p:cNvGrpSpPr/>
         <p:nvPr/>
       </p:nvGrpSpPr>
@@ -5000,7 +4921,7 @@
       </p:grpSpPr>
       <p:grpSp>
         <p:nvGrpSpPr>
-          <p:cNvPr id="42" name="Google Shape;42;p17"/>
+          <p:cNvPr id="42" name="Google Shape;42;p7"/>
           <p:cNvGrpSpPr/>
           <p:nvPr/>
         </p:nvGrpSpPr>
@@ -5014,7 +4935,7 @@
         </p:grpSpPr>
         <p:pic>
           <p:nvPicPr>
-            <p:cNvPr id="43" name="Google Shape;43;p17" title="Sin título-7.png"/>
+            <p:cNvPr id="43" name="Google Shape;43;p7" title="Sin título-7.png"/>
             <p:cNvPicPr preferRelativeResize="0"/>
             <p:nvPr/>
           </p:nvPicPr>
@@ -5022,7 +4943,7 @@
             <a:blip r:embed="rId2">
               <a:alphaModFix/>
             </a:blip>
-            <a:srcRect/>
+            <a:srcRect b="0" l="0" r="0" t="0"/>
             <a:stretch/>
           </p:blipFill>
           <p:spPr>
@@ -5041,7 +4962,7 @@
         </p:pic>
         <p:pic>
           <p:nvPicPr>
-            <p:cNvPr id="44" name="Google Shape;44;p17" title="Sin título-2.png"/>
+            <p:cNvPr id="44" name="Google Shape;44;p7" title="Sin título-2.png"/>
             <p:cNvPicPr preferRelativeResize="0"/>
             <p:nvPr/>
           </p:nvPicPr>
@@ -5049,7 +4970,7 @@
             <a:blip r:embed="rId3">
               <a:alphaModFix/>
             </a:blip>
-            <a:srcRect/>
+            <a:srcRect b="0" l="0" r="0" t="0"/>
             <a:stretch/>
           </p:blipFill>
           <p:spPr>
@@ -5069,10 +4990,8 @@
       </p:grpSp>
       <p:sp>
         <p:nvSpPr>
-          <p:cNvPr id="45" name="Google Shape;45;p17"/>
-          <p:cNvSpPr txBox="1">
-            <a:spLocks noGrp="1"/>
-          </p:cNvSpPr>
+          <p:cNvPr id="45" name="Google Shape;45;p7"/>
+          <p:cNvSpPr txBox="1"/>
           <p:nvPr>
             <p:ph type="title"/>
           </p:nvPr>
@@ -5091,7 +5010,7 @@
           </a:ln>
         </p:spPr>
         <p:txBody>
-          <a:bodyPr spcFirstLastPara="1" wrap="square" lIns="91425" tIns="91425" rIns="91425" bIns="91425" anchor="t" anchorCtr="0">
+          <a:bodyPr anchorCtr="0" anchor="t" bIns="91425" lIns="91425" spcFirstLastPara="1" rIns="91425" wrap="square" tIns="91425">
             <a:noAutofit/>
           </a:bodyPr>
           <a:lstStyle>
@@ -5222,19 +5141,15 @@
               <a:defRPr/>
             </a:lvl9pPr>
           </a:lstStyle>
-          <a:p>
-            <a:endParaRPr/>
-          </a:p>
+          <a:p/>
         </p:txBody>
       </p:sp>
       <p:sp>
         <p:nvSpPr>
-          <p:cNvPr id="46" name="Google Shape;46;p17"/>
-          <p:cNvSpPr txBox="1">
-            <a:spLocks noGrp="1"/>
-          </p:cNvSpPr>
+          <p:cNvPr id="46" name="Google Shape;46;p7"/>
+          <p:cNvSpPr txBox="1"/>
           <p:nvPr>
-            <p:ph type="body" idx="1"/>
+            <p:ph idx="1" type="body"/>
           </p:nvPr>
         </p:nvSpPr>
         <p:spPr>
@@ -5251,11 +5166,11 @@
           </a:ln>
         </p:spPr>
         <p:txBody>
-          <a:bodyPr spcFirstLastPara="1" wrap="square" lIns="91425" tIns="91425" rIns="91425" bIns="91425" anchor="t" anchorCtr="0">
+          <a:bodyPr anchorCtr="0" anchor="t" bIns="91425" lIns="91425" spcFirstLastPara="1" rIns="91425" wrap="square" tIns="91425">
             <a:noAutofit/>
           </a:bodyPr>
           <a:lstStyle>
-            <a:lvl1pPr marL="457200" lvl="0" indent="-317500" algn="l">
+            <a:lvl1pPr indent="-317500" lvl="0" marL="457200" algn="l">
               <a:lnSpc>
                 <a:spcPct val="100000"/>
               </a:lnSpc>
@@ -5269,7 +5184,7 @@
               <a:buChar char="●"/>
               <a:defRPr sz="1400"/>
             </a:lvl1pPr>
-            <a:lvl2pPr marL="914400" lvl="1" indent="-317500" algn="l">
+            <a:lvl2pPr indent="-317500" lvl="1" marL="914400" algn="l">
               <a:lnSpc>
                 <a:spcPct val="115000"/>
               </a:lnSpc>
@@ -5283,7 +5198,7 @@
               <a:buChar char="○"/>
               <a:defRPr/>
             </a:lvl2pPr>
-            <a:lvl3pPr marL="1371600" lvl="2" indent="-317500" algn="l">
+            <a:lvl3pPr indent="-317500" lvl="2" marL="1371600" algn="l">
               <a:lnSpc>
                 <a:spcPct val="115000"/>
               </a:lnSpc>
@@ -5297,7 +5212,7 @@
               <a:buChar char="■"/>
               <a:defRPr/>
             </a:lvl3pPr>
-            <a:lvl4pPr marL="1828800" lvl="3" indent="-317500" algn="l">
+            <a:lvl4pPr indent="-317500" lvl="3" marL="1828800" algn="l">
               <a:lnSpc>
                 <a:spcPct val="115000"/>
               </a:lnSpc>
@@ -5311,7 +5226,7 @@
               <a:buChar char="●"/>
               <a:defRPr/>
             </a:lvl4pPr>
-            <a:lvl5pPr marL="2286000" lvl="4" indent="-317500" algn="l">
+            <a:lvl5pPr indent="-317500" lvl="4" marL="2286000" algn="l">
               <a:lnSpc>
                 <a:spcPct val="115000"/>
               </a:lnSpc>
@@ -5325,7 +5240,7 @@
               <a:buChar char="○"/>
               <a:defRPr/>
             </a:lvl5pPr>
-            <a:lvl6pPr marL="2743200" lvl="5" indent="-317500" algn="l">
+            <a:lvl6pPr indent="-317500" lvl="5" marL="2743200" algn="l">
               <a:lnSpc>
                 <a:spcPct val="115000"/>
               </a:lnSpc>
@@ -5339,7 +5254,7 @@
               <a:buChar char="■"/>
               <a:defRPr/>
             </a:lvl6pPr>
-            <a:lvl7pPr marL="3200400" lvl="6" indent="-317500" algn="l">
+            <a:lvl7pPr indent="-317500" lvl="6" marL="3200400" algn="l">
               <a:lnSpc>
                 <a:spcPct val="115000"/>
               </a:lnSpc>
@@ -5353,7 +5268,7 @@
               <a:buChar char="●"/>
               <a:defRPr/>
             </a:lvl7pPr>
-            <a:lvl8pPr marL="3657600" lvl="7" indent="-317500" algn="l">
+            <a:lvl8pPr indent="-317500" lvl="7" marL="3657600" algn="l">
               <a:lnSpc>
                 <a:spcPct val="115000"/>
               </a:lnSpc>
@@ -5367,7 +5282,7 @@
               <a:buChar char="○"/>
               <a:defRPr/>
             </a:lvl8pPr>
-            <a:lvl9pPr marL="4114800" lvl="8" indent="-317500" algn="l">
+            <a:lvl9pPr indent="-317500" lvl="8" marL="4114800" algn="l">
               <a:lnSpc>
                 <a:spcPct val="115000"/>
               </a:lnSpc>
@@ -5382,19 +5297,15 @@
               <a:defRPr/>
             </a:lvl9pPr>
           </a:lstStyle>
-          <a:p>
-            <a:endParaRPr/>
-          </a:p>
+          <a:p/>
         </p:txBody>
       </p:sp>
       <p:sp>
         <p:nvSpPr>
-          <p:cNvPr id="47" name="Google Shape;47;p17"/>
-          <p:cNvSpPr>
-            <a:spLocks noGrp="1"/>
-          </p:cNvSpPr>
+          <p:cNvPr id="47" name="Google Shape;47;p7"/>
+          <p:cNvSpPr/>
           <p:nvPr>
-            <p:ph type="pic" idx="2"/>
+            <p:ph idx="2" type="pic"/>
           </p:nvPr>
         </p:nvSpPr>
         <p:spPr>
@@ -5420,11 +5331,11 @@
 </file>
 
 <file path=ppt/slideLayouts/slideLayout7.xml><?xml version="1.0" encoding="utf-8"?>
-<p:sldLayout xmlns:a="http://schemas.openxmlformats.org/drawingml/2006/main" xmlns:r="http://schemas.openxmlformats.org/officeDocument/2006/relationships" xmlns:p="http://schemas.openxmlformats.org/presentationml/2006/main" matchingName="Main point">
+<p:sldLayout xmlns:a="http://schemas.openxmlformats.org/drawingml/2006/main" xmlns:r="http://schemas.openxmlformats.org/officeDocument/2006/relationships" xmlns:mc="http://schemas.openxmlformats.org/markup-compatibility/2006" xmlns:mv="urn:schemas-microsoft-com:mac:vml" xmlns:p="http://schemas.openxmlformats.org/presentationml/2006/main" xmlns:c="http://schemas.openxmlformats.org/drawingml/2006/chart" xmlns:dgm="http://schemas.openxmlformats.org/drawingml/2006/diagram" xmlns:o="urn:schemas-microsoft-com:office:office" xmlns:v="urn:schemas-microsoft-com:vml" xmlns:pvml="urn:schemas-microsoft-com:office:powerpoint" xmlns:com="http://schemas.openxmlformats.org/drawingml/2006/compatibility" xmlns:p14="http://schemas.microsoft.com/office/powerpoint/2010/main" xmlns:p15="http://schemas.microsoft.com/office/powerpoint/2012/main" xmlns:ahyp="http://schemas.microsoft.com/office/drawing/2018/hyperlinkcolor" matchingName="Main point">
   <p:cSld name="MAIN_POINT">
     <p:spTree>
       <p:nvGrpSpPr>
-        <p:cNvPr id="1" name="Shape 48"/>
+        <p:cNvPr id="48" name="Shape 48"/>
         <p:cNvGrpSpPr/>
         <p:nvPr/>
       </p:nvGrpSpPr>
@@ -5438,7 +5349,7 @@
       </p:grpSpPr>
       <p:grpSp>
         <p:nvGrpSpPr>
-          <p:cNvPr id="49" name="Google Shape;49;p18"/>
+          <p:cNvPr id="49" name="Google Shape;49;p8"/>
           <p:cNvGrpSpPr/>
           <p:nvPr/>
         </p:nvGrpSpPr>
@@ -5452,7 +5363,7 @@
         </p:grpSpPr>
         <p:pic>
           <p:nvPicPr>
-            <p:cNvPr id="50" name="Google Shape;50;p18" title="Sin título-7.png"/>
+            <p:cNvPr id="50" name="Google Shape;50;p8" title="Sin título-7.png"/>
             <p:cNvPicPr preferRelativeResize="0"/>
             <p:nvPr/>
           </p:nvPicPr>
@@ -5460,7 +5371,7 @@
             <a:blip r:embed="rId2">
               <a:alphaModFix/>
             </a:blip>
-            <a:srcRect/>
+            <a:srcRect b="0" l="0" r="0" t="0"/>
             <a:stretch/>
           </p:blipFill>
           <p:spPr>
@@ -5479,7 +5390,7 @@
         </p:pic>
         <p:pic>
           <p:nvPicPr>
-            <p:cNvPr id="51" name="Google Shape;51;p18" title="Sin título-2.png"/>
+            <p:cNvPr id="51" name="Google Shape;51;p8" title="Sin título-2.png"/>
             <p:cNvPicPr preferRelativeResize="0"/>
             <p:nvPr/>
           </p:nvPicPr>
@@ -5487,7 +5398,7 @@
             <a:blip r:embed="rId3">
               <a:alphaModFix/>
             </a:blip>
-            <a:srcRect/>
+            <a:srcRect b="0" l="0" r="0" t="0"/>
             <a:stretch/>
           </p:blipFill>
           <p:spPr>
@@ -5507,10 +5418,8 @@
       </p:grpSp>
       <p:sp>
         <p:nvSpPr>
-          <p:cNvPr id="52" name="Google Shape;52;p18"/>
-          <p:cNvSpPr txBox="1">
-            <a:spLocks noGrp="1"/>
-          </p:cNvSpPr>
+          <p:cNvPr id="52" name="Google Shape;52;p8"/>
+          <p:cNvSpPr txBox="1"/>
           <p:nvPr>
             <p:ph type="title"/>
           </p:nvPr>
@@ -5529,7 +5438,7 @@
           </a:ln>
         </p:spPr>
         <p:txBody>
-          <a:bodyPr spcFirstLastPara="1" wrap="square" lIns="91425" tIns="91425" rIns="91425" bIns="91425" anchor="ctr" anchorCtr="0">
+          <a:bodyPr anchorCtr="0" anchor="ctr" bIns="91425" lIns="91425" spcFirstLastPara="1" rIns="91425" wrap="square" tIns="91425">
             <a:noAutofit/>
           </a:bodyPr>
           <a:lstStyle>
@@ -5660,9 +5569,7 @@
               <a:defRPr sz="6000"/>
             </a:lvl9pPr>
           </a:lstStyle>
-          <a:p>
-            <a:endParaRPr/>
-          </a:p>
+          <a:p/>
         </p:txBody>
       </p:sp>
     </p:spTree>
@@ -5674,11 +5581,11 @@
 </file>
 
 <file path=ppt/slideLayouts/slideLayout8.xml><?xml version="1.0" encoding="utf-8"?>
-<p:sldLayout xmlns:a="http://schemas.openxmlformats.org/drawingml/2006/main" xmlns:r="http://schemas.openxmlformats.org/officeDocument/2006/relationships" xmlns:p="http://schemas.openxmlformats.org/presentationml/2006/main" matchingName="Section title and description">
+<p:sldLayout xmlns:a="http://schemas.openxmlformats.org/drawingml/2006/main" xmlns:r="http://schemas.openxmlformats.org/officeDocument/2006/relationships" xmlns:mc="http://schemas.openxmlformats.org/markup-compatibility/2006" xmlns:mv="urn:schemas-microsoft-com:mac:vml" xmlns:p="http://schemas.openxmlformats.org/presentationml/2006/main" xmlns:c="http://schemas.openxmlformats.org/drawingml/2006/chart" xmlns:dgm="http://schemas.openxmlformats.org/drawingml/2006/diagram" xmlns:o="urn:schemas-microsoft-com:office:office" xmlns:v="urn:schemas-microsoft-com:vml" xmlns:pvml="urn:schemas-microsoft-com:office:powerpoint" xmlns:com="http://schemas.openxmlformats.org/drawingml/2006/compatibility" xmlns:p14="http://schemas.microsoft.com/office/powerpoint/2010/main" xmlns:p15="http://schemas.microsoft.com/office/powerpoint/2012/main" xmlns:ahyp="http://schemas.microsoft.com/office/drawing/2018/hyperlinkcolor" matchingName="Section title and description">
   <p:cSld name="SECTION_TITLE_AND_DESCRIPTION">
     <p:spTree>
       <p:nvGrpSpPr>
-        <p:cNvPr id="1" name="Shape 53"/>
+        <p:cNvPr id="53" name="Shape 53"/>
         <p:cNvGrpSpPr/>
         <p:nvPr/>
       </p:nvGrpSpPr>
@@ -5692,7 +5599,7 @@
       </p:grpSpPr>
       <p:grpSp>
         <p:nvGrpSpPr>
-          <p:cNvPr id="54" name="Google Shape;54;p19"/>
+          <p:cNvPr id="54" name="Google Shape;54;p9"/>
           <p:cNvGrpSpPr/>
           <p:nvPr/>
         </p:nvGrpSpPr>
@@ -5706,7 +5613,7 @@
         </p:grpSpPr>
         <p:pic>
           <p:nvPicPr>
-            <p:cNvPr id="55" name="Google Shape;55;p19" title="Sin título-7.png"/>
+            <p:cNvPr id="55" name="Google Shape;55;p9" title="Sin título-7.png"/>
             <p:cNvPicPr preferRelativeResize="0"/>
             <p:nvPr/>
           </p:nvPicPr>
@@ -5714,7 +5621,7 @@
             <a:blip r:embed="rId2">
               <a:alphaModFix/>
             </a:blip>
-            <a:srcRect/>
+            <a:srcRect b="0" l="0" r="0" t="0"/>
             <a:stretch/>
           </p:blipFill>
           <p:spPr>
@@ -5733,7 +5640,7 @@
         </p:pic>
         <p:pic>
           <p:nvPicPr>
-            <p:cNvPr id="56" name="Google Shape;56;p19" title="Sin título-2.png"/>
+            <p:cNvPr id="56" name="Google Shape;56;p9" title="Sin título-2.png"/>
             <p:cNvPicPr preferRelativeResize="0"/>
             <p:nvPr/>
           </p:nvPicPr>
@@ -5741,7 +5648,7 @@
             <a:blip r:embed="rId3">
               <a:alphaModFix/>
             </a:blip>
-            <a:srcRect/>
+            <a:srcRect b="0" l="0" r="0" t="0"/>
             <a:stretch/>
           </p:blipFill>
           <p:spPr>
@@ -5761,12 +5668,10 @@
       </p:grpSp>
       <p:sp>
         <p:nvSpPr>
-          <p:cNvPr id="57" name="Google Shape;57;p19"/>
-          <p:cNvSpPr txBox="1">
-            <a:spLocks noGrp="1"/>
-          </p:cNvSpPr>
+          <p:cNvPr id="57" name="Google Shape;57;p9"/>
+          <p:cNvSpPr txBox="1"/>
           <p:nvPr>
-            <p:ph type="subTitle" idx="1"/>
+            <p:ph idx="1" type="subTitle"/>
           </p:nvPr>
         </p:nvSpPr>
         <p:spPr>
@@ -5783,7 +5688,7 @@
           </a:ln>
         </p:spPr>
         <p:txBody>
-          <a:bodyPr spcFirstLastPara="1" wrap="square" lIns="91425" tIns="91425" rIns="91425" bIns="91425" anchor="t" anchorCtr="0">
+          <a:bodyPr anchorCtr="0" anchor="t" bIns="91425" lIns="91425" spcFirstLastPara="1" rIns="91425" wrap="square" tIns="91425">
             <a:noAutofit/>
           </a:bodyPr>
           <a:lstStyle>
@@ -5914,17 +5819,13 @@
               <a:defRPr/>
             </a:lvl9pPr>
           </a:lstStyle>
-          <a:p>
-            <a:endParaRPr/>
-          </a:p>
+          <a:p/>
         </p:txBody>
       </p:sp>
       <p:sp>
         <p:nvSpPr>
-          <p:cNvPr id="58" name="Google Shape;58;p19"/>
-          <p:cNvSpPr txBox="1">
-            <a:spLocks noGrp="1"/>
-          </p:cNvSpPr>
+          <p:cNvPr id="58" name="Google Shape;58;p9"/>
+          <p:cNvSpPr txBox="1"/>
           <p:nvPr>
             <p:ph type="title"/>
           </p:nvPr>
@@ -5943,7 +5844,7 @@
           </a:ln>
         </p:spPr>
         <p:txBody>
-          <a:bodyPr spcFirstLastPara="1" wrap="square" lIns="91425" tIns="91425" rIns="91425" bIns="91425" anchor="t" anchorCtr="0">
+          <a:bodyPr anchorCtr="0" anchor="t" bIns="91425" lIns="91425" spcFirstLastPara="1" rIns="91425" wrap="square" tIns="91425">
             <a:noAutofit/>
           </a:bodyPr>
           <a:lstStyle>
@@ -6074,19 +5975,15 @@
               <a:defRPr/>
             </a:lvl9pPr>
           </a:lstStyle>
-          <a:p>
-            <a:endParaRPr/>
-          </a:p>
+          <a:p/>
         </p:txBody>
       </p:sp>
       <p:sp>
         <p:nvSpPr>
-          <p:cNvPr id="59" name="Google Shape;59;p19"/>
-          <p:cNvSpPr txBox="1">
-            <a:spLocks noGrp="1"/>
-          </p:cNvSpPr>
+          <p:cNvPr id="59" name="Google Shape;59;p9"/>
+          <p:cNvSpPr txBox="1"/>
           <p:nvPr>
-            <p:ph type="subTitle" idx="2"/>
+            <p:ph idx="2" type="subTitle"/>
           </p:nvPr>
         </p:nvSpPr>
         <p:spPr>
@@ -6103,7 +6000,7 @@
           </a:ln>
         </p:spPr>
         <p:txBody>
-          <a:bodyPr spcFirstLastPara="1" wrap="square" lIns="91425" tIns="91425" rIns="91425" bIns="91425" anchor="t" anchorCtr="0">
+          <a:bodyPr anchorCtr="0" anchor="t" bIns="91425" lIns="91425" spcFirstLastPara="1" rIns="91425" wrap="square" tIns="91425">
             <a:noAutofit/>
           </a:bodyPr>
           <a:lstStyle>
@@ -6234,9 +6131,7 @@
               <a:defRPr/>
             </a:lvl9pPr>
           </a:lstStyle>
-          <a:p>
-            <a:endParaRPr/>
-          </a:p>
+          <a:p/>
         </p:txBody>
       </p:sp>
     </p:spTree>
@@ -6248,11 +6143,11 @@
 </file>
 
 <file path=ppt/slideLayouts/slideLayout9.xml><?xml version="1.0" encoding="utf-8"?>
-<p:sldLayout xmlns:a="http://schemas.openxmlformats.org/drawingml/2006/main" xmlns:r="http://schemas.openxmlformats.org/officeDocument/2006/relationships" xmlns:p="http://schemas.openxmlformats.org/presentationml/2006/main" matchingName="Big number">
+<p:sldLayout xmlns:a="http://schemas.openxmlformats.org/drawingml/2006/main" xmlns:r="http://schemas.openxmlformats.org/officeDocument/2006/relationships" xmlns:mc="http://schemas.openxmlformats.org/markup-compatibility/2006" xmlns:mv="urn:schemas-microsoft-com:mac:vml" xmlns:p="http://schemas.openxmlformats.org/presentationml/2006/main" xmlns:c="http://schemas.openxmlformats.org/drawingml/2006/chart" xmlns:dgm="http://schemas.openxmlformats.org/drawingml/2006/diagram" xmlns:o="urn:schemas-microsoft-com:office:office" xmlns:v="urn:schemas-microsoft-com:vml" xmlns:pvml="urn:schemas-microsoft-com:office:powerpoint" xmlns:com="http://schemas.openxmlformats.org/drawingml/2006/compatibility" xmlns:p14="http://schemas.microsoft.com/office/powerpoint/2010/main" xmlns:p15="http://schemas.microsoft.com/office/powerpoint/2012/main" xmlns:ahyp="http://schemas.microsoft.com/office/drawing/2018/hyperlinkcolor" matchingName="Big number">
   <p:cSld name="BIG_NUMBER">
     <p:spTree>
       <p:nvGrpSpPr>
-        <p:cNvPr id="1" name="Shape 60"/>
+        <p:cNvPr id="60" name="Shape 60"/>
         <p:cNvGrpSpPr/>
         <p:nvPr/>
       </p:nvGrpSpPr>
@@ -6266,7 +6161,7 @@
       </p:grpSpPr>
       <p:grpSp>
         <p:nvGrpSpPr>
-          <p:cNvPr id="61" name="Google Shape;61;p20"/>
+          <p:cNvPr id="61" name="Google Shape;61;p10"/>
           <p:cNvGrpSpPr/>
           <p:nvPr/>
         </p:nvGrpSpPr>
@@ -6280,7 +6175,7 @@
         </p:grpSpPr>
         <p:pic>
           <p:nvPicPr>
-            <p:cNvPr id="62" name="Google Shape;62;p20" title="Sin título-7.png"/>
+            <p:cNvPr id="62" name="Google Shape;62;p10" title="Sin título-7.png"/>
             <p:cNvPicPr preferRelativeResize="0"/>
             <p:nvPr/>
           </p:nvPicPr>
@@ -6288,7 +6183,7 @@
             <a:blip r:embed="rId2">
               <a:alphaModFix/>
             </a:blip>
-            <a:srcRect/>
+            <a:srcRect b="0" l="0" r="0" t="0"/>
             <a:stretch/>
           </p:blipFill>
           <p:spPr>
@@ -6307,7 +6202,7 @@
         </p:pic>
         <p:pic>
           <p:nvPicPr>
-            <p:cNvPr id="63" name="Google Shape;63;p20" title="Sin título-2.png"/>
+            <p:cNvPr id="63" name="Google Shape;63;p10" title="Sin título-2.png"/>
             <p:cNvPicPr preferRelativeResize="0"/>
             <p:nvPr/>
           </p:nvPicPr>
@@ -6315,7 +6210,7 @@
             <a:blip r:embed="rId3">
               <a:alphaModFix/>
             </a:blip>
-            <a:srcRect/>
+            <a:srcRect b="0" l="0" r="0" t="0"/>
             <a:stretch/>
           </p:blipFill>
           <p:spPr>
@@ -6335,12 +6230,10 @@
       </p:grpSp>
       <p:sp>
         <p:nvSpPr>
-          <p:cNvPr id="64" name="Google Shape;64;p20"/>
-          <p:cNvSpPr txBox="1">
-            <a:spLocks noGrp="1"/>
-          </p:cNvSpPr>
+          <p:cNvPr id="64" name="Google Shape;64;p10"/>
+          <p:cNvSpPr txBox="1"/>
           <p:nvPr>
-            <p:ph type="title" hasCustomPrompt="1"/>
+            <p:ph hasCustomPrompt="1" type="title"/>
           </p:nvPr>
         </p:nvSpPr>
         <p:spPr>
@@ -6357,7 +6250,7 @@
           </a:ln>
         </p:spPr>
         <p:txBody>
-          <a:bodyPr spcFirstLastPara="1" wrap="square" lIns="91425" tIns="91425" rIns="91425" bIns="91425" anchor="b" anchorCtr="0">
+          <a:bodyPr anchorCtr="0" anchor="b" bIns="91425" lIns="91425" spcFirstLastPara="1" rIns="91425" wrap="square" tIns="91425">
             <a:noAutofit/>
           </a:bodyPr>
           <a:lstStyle>
@@ -6501,12 +6394,10 @@
       </p:sp>
       <p:sp>
         <p:nvSpPr>
-          <p:cNvPr id="65" name="Google Shape;65;p20"/>
-          <p:cNvSpPr txBox="1">
-            <a:spLocks noGrp="1"/>
-          </p:cNvSpPr>
+          <p:cNvPr id="65" name="Google Shape;65;p10"/>
+          <p:cNvSpPr txBox="1"/>
           <p:nvPr>
-            <p:ph type="subTitle" idx="1"/>
+            <p:ph idx="1" type="subTitle"/>
           </p:nvPr>
         </p:nvSpPr>
         <p:spPr>
@@ -6523,7 +6414,7 @@
           </a:ln>
         </p:spPr>
         <p:txBody>
-          <a:bodyPr spcFirstLastPara="1" wrap="square" lIns="91425" tIns="91425" rIns="91425" bIns="91425" anchor="t" anchorCtr="0">
+          <a:bodyPr anchorCtr="0" anchor="t" bIns="91425" lIns="91425" spcFirstLastPara="1" rIns="91425" wrap="square" tIns="91425">
             <a:noAutofit/>
           </a:bodyPr>
           <a:lstStyle>
@@ -6654,9 +6545,7 @@
               <a:defRPr sz="1600"/>
             </a:lvl9pPr>
           </a:lstStyle>
-          <a:p>
-            <a:endParaRPr/>
-          </a:p>
+          <a:p/>
         </p:txBody>
       </p:sp>
     </p:spTree>
@@ -6668,19 +6557,18 @@
 </file>
 
 <file path=ppt/slideMasters/slideMaster1.xml><?xml version="1.0" encoding="utf-8"?>
-<p:sldMaster xmlns:a="http://schemas.openxmlformats.org/drawingml/2006/main" xmlns:r="http://schemas.openxmlformats.org/officeDocument/2006/relationships" xmlns:p="http://schemas.openxmlformats.org/presentationml/2006/main">
+<p:sldMaster xmlns:a="http://schemas.openxmlformats.org/drawingml/2006/main" xmlns:r="http://schemas.openxmlformats.org/officeDocument/2006/relationships" xmlns:mc="http://schemas.openxmlformats.org/markup-compatibility/2006" xmlns:mv="urn:schemas-microsoft-com:mac:vml" xmlns:p="http://schemas.openxmlformats.org/presentationml/2006/main" xmlns:c="http://schemas.openxmlformats.org/drawingml/2006/chart" xmlns:dgm="http://schemas.openxmlformats.org/drawingml/2006/diagram" xmlns:o="urn:schemas-microsoft-com:office:office" xmlns:v="urn:schemas-microsoft-com:vml" xmlns:pvml="urn:schemas-microsoft-com:office:powerpoint" xmlns:com="http://schemas.openxmlformats.org/drawingml/2006/compatibility" xmlns:p14="http://schemas.microsoft.com/office/powerpoint/2010/main" xmlns:p15="http://schemas.microsoft.com/office/powerpoint/2012/main" xmlns:ahyp="http://schemas.microsoft.com/office/drawing/2018/hyperlinkcolor">
   <p:cSld name="simple-light-2">
     <p:bg>
       <p:bgPr>
         <a:solidFill>
           <a:schemeClr val="lt1"/>
         </a:solidFill>
-        <a:effectLst/>
       </p:bgPr>
     </p:bg>
     <p:spTree>
       <p:nvGrpSpPr>
-        <p:cNvPr id="1" name="Shape 5"/>
+        <p:cNvPr id="5" name="Shape 5"/>
         <p:cNvGrpSpPr/>
         <p:nvPr/>
       </p:nvGrpSpPr>
@@ -6694,10 +6582,8 @@
       </p:grpSpPr>
       <p:sp>
         <p:nvSpPr>
-          <p:cNvPr id="6" name="Google Shape;6;p11"/>
-          <p:cNvSpPr txBox="1">
-            <a:spLocks noGrp="1"/>
-          </p:cNvSpPr>
+          <p:cNvPr id="6" name="Google Shape;6;p1"/>
+          <p:cNvSpPr txBox="1"/>
           <p:nvPr>
             <p:ph type="title"/>
           </p:nvPr>
@@ -6716,11 +6602,11 @@
           </a:ln>
         </p:spPr>
         <p:txBody>
-          <a:bodyPr spcFirstLastPara="1" wrap="square" lIns="91425" tIns="91425" rIns="91425" bIns="91425" anchor="t" anchorCtr="0">
+          <a:bodyPr anchorCtr="0" anchor="t" bIns="91425" lIns="91425" spcFirstLastPara="1" rIns="91425" wrap="square" tIns="91425">
             <a:noAutofit/>
           </a:bodyPr>
           <a:lstStyle>
-            <a:lvl1pPr marR="0" lvl="0" algn="l" rtl="0">
+            <a:lvl1pPr lvl="0" marR="0" rtl="0" algn="l">
               <a:lnSpc>
                 <a:spcPct val="100000"/>
               </a:lnSpc>
@@ -6736,7 +6622,7 @@
               <a:buSzPts val="3200"/>
               <a:buFont typeface="VT323"/>
               <a:buNone/>
-              <a:defRPr sz="3200" b="0" i="0" u="none" strike="noStrike" cap="none">
+              <a:defRPr b="0" i="0" sz="3200" u="none" cap="none" strike="noStrike">
                 <a:solidFill>
                   <a:schemeClr val="dk1"/>
                 </a:solidFill>
@@ -6746,7 +6632,7 @@
                 <a:sym typeface="VT323"/>
               </a:defRPr>
             </a:lvl1pPr>
-            <a:lvl2pPr marR="0" lvl="1" algn="l" rtl="0">
+            <a:lvl2pPr lvl="1" marR="0" rtl="0" algn="l">
               <a:lnSpc>
                 <a:spcPct val="100000"/>
               </a:lnSpc>
@@ -6762,7 +6648,7 @@
               <a:buSzPts val="3200"/>
               <a:buFont typeface="VT323"/>
               <a:buNone/>
-              <a:defRPr sz="3200" b="0" i="0" u="none" strike="noStrike" cap="none">
+              <a:defRPr b="0" i="0" sz="3200" u="none" cap="none" strike="noStrike">
                 <a:solidFill>
                   <a:schemeClr val="dk1"/>
                 </a:solidFill>
@@ -6772,7 +6658,7 @@
                 <a:sym typeface="VT323"/>
               </a:defRPr>
             </a:lvl2pPr>
-            <a:lvl3pPr marR="0" lvl="2" algn="l" rtl="0">
+            <a:lvl3pPr lvl="2" marR="0" rtl="0" algn="l">
               <a:lnSpc>
                 <a:spcPct val="100000"/>
               </a:lnSpc>
@@ -6788,7 +6674,7 @@
               <a:buSzPts val="3200"/>
               <a:buFont typeface="VT323"/>
               <a:buNone/>
-              <a:defRPr sz="3200" b="0" i="0" u="none" strike="noStrike" cap="none">
+              <a:defRPr b="0" i="0" sz="3200" u="none" cap="none" strike="noStrike">
                 <a:solidFill>
                   <a:schemeClr val="dk1"/>
                 </a:solidFill>
@@ -6798,7 +6684,7 @@
                 <a:sym typeface="VT323"/>
               </a:defRPr>
             </a:lvl3pPr>
-            <a:lvl4pPr marR="0" lvl="3" algn="l" rtl="0">
+            <a:lvl4pPr lvl="3" marR="0" rtl="0" algn="l">
               <a:lnSpc>
                 <a:spcPct val="100000"/>
               </a:lnSpc>
@@ -6814,7 +6700,7 @@
               <a:buSzPts val="3200"/>
               <a:buFont typeface="VT323"/>
               <a:buNone/>
-              <a:defRPr sz="3200" b="0" i="0" u="none" strike="noStrike" cap="none">
+              <a:defRPr b="0" i="0" sz="3200" u="none" cap="none" strike="noStrike">
                 <a:solidFill>
                   <a:schemeClr val="dk1"/>
                 </a:solidFill>
@@ -6824,7 +6710,7 @@
                 <a:sym typeface="VT323"/>
               </a:defRPr>
             </a:lvl4pPr>
-            <a:lvl5pPr marR="0" lvl="4" algn="l" rtl="0">
+            <a:lvl5pPr lvl="4" marR="0" rtl="0" algn="l">
               <a:lnSpc>
                 <a:spcPct val="100000"/>
               </a:lnSpc>
@@ -6840,7 +6726,7 @@
               <a:buSzPts val="3200"/>
               <a:buFont typeface="VT323"/>
               <a:buNone/>
-              <a:defRPr sz="3200" b="0" i="0" u="none" strike="noStrike" cap="none">
+              <a:defRPr b="0" i="0" sz="3200" u="none" cap="none" strike="noStrike">
                 <a:solidFill>
                   <a:schemeClr val="dk1"/>
                 </a:solidFill>
@@ -6850,7 +6736,7 @@
                 <a:sym typeface="VT323"/>
               </a:defRPr>
             </a:lvl5pPr>
-            <a:lvl6pPr marR="0" lvl="5" algn="l" rtl="0">
+            <a:lvl6pPr lvl="5" marR="0" rtl="0" algn="l">
               <a:lnSpc>
                 <a:spcPct val="100000"/>
               </a:lnSpc>
@@ -6866,7 +6752,7 @@
               <a:buSzPts val="3200"/>
               <a:buFont typeface="VT323"/>
               <a:buNone/>
-              <a:defRPr sz="3200" b="0" i="0" u="none" strike="noStrike" cap="none">
+              <a:defRPr b="0" i="0" sz="3200" u="none" cap="none" strike="noStrike">
                 <a:solidFill>
                   <a:schemeClr val="dk1"/>
                 </a:solidFill>
@@ -6876,7 +6762,7 @@
                 <a:sym typeface="VT323"/>
               </a:defRPr>
             </a:lvl6pPr>
-            <a:lvl7pPr marR="0" lvl="6" algn="l" rtl="0">
+            <a:lvl7pPr lvl="6" marR="0" rtl="0" algn="l">
               <a:lnSpc>
                 <a:spcPct val="100000"/>
               </a:lnSpc>
@@ -6892,7 +6778,7 @@
               <a:buSzPts val="3200"/>
               <a:buFont typeface="VT323"/>
               <a:buNone/>
-              <a:defRPr sz="3200" b="0" i="0" u="none" strike="noStrike" cap="none">
+              <a:defRPr b="0" i="0" sz="3200" u="none" cap="none" strike="noStrike">
                 <a:solidFill>
                   <a:schemeClr val="dk1"/>
                 </a:solidFill>
@@ -6902,7 +6788,7 @@
                 <a:sym typeface="VT323"/>
               </a:defRPr>
             </a:lvl7pPr>
-            <a:lvl8pPr marR="0" lvl="7" algn="l" rtl="0">
+            <a:lvl8pPr lvl="7" marR="0" rtl="0" algn="l">
               <a:lnSpc>
                 <a:spcPct val="100000"/>
               </a:lnSpc>
@@ -6918,7 +6804,7 @@
               <a:buSzPts val="3200"/>
               <a:buFont typeface="VT323"/>
               <a:buNone/>
-              <a:defRPr sz="3200" b="0" i="0" u="none" strike="noStrike" cap="none">
+              <a:defRPr b="0" i="0" sz="3200" u="none" cap="none" strike="noStrike">
                 <a:solidFill>
                   <a:schemeClr val="dk1"/>
                 </a:solidFill>
@@ -6928,7 +6814,7 @@
                 <a:sym typeface="VT323"/>
               </a:defRPr>
             </a:lvl8pPr>
-            <a:lvl9pPr marR="0" lvl="8" algn="l" rtl="0">
+            <a:lvl9pPr lvl="8" marR="0" rtl="0" algn="l">
               <a:lnSpc>
                 <a:spcPct val="100000"/>
               </a:lnSpc>
@@ -6944,7 +6830,7 @@
               <a:buSzPts val="3200"/>
               <a:buFont typeface="VT323"/>
               <a:buNone/>
-              <a:defRPr sz="3200" b="0" i="0" u="none" strike="noStrike" cap="none">
+              <a:defRPr b="0" i="0" sz="3200" u="none" cap="none" strike="noStrike">
                 <a:solidFill>
                   <a:schemeClr val="dk1"/>
                 </a:solidFill>
@@ -6955,19 +6841,15 @@
               </a:defRPr>
             </a:lvl9pPr>
           </a:lstStyle>
-          <a:p>
-            <a:endParaRPr/>
-          </a:p>
+          <a:p/>
         </p:txBody>
       </p:sp>
       <p:sp>
         <p:nvSpPr>
-          <p:cNvPr id="7" name="Google Shape;7;p11"/>
-          <p:cNvSpPr txBox="1">
-            <a:spLocks noGrp="1"/>
-          </p:cNvSpPr>
+          <p:cNvPr id="7" name="Google Shape;7;p1"/>
+          <p:cNvSpPr txBox="1"/>
           <p:nvPr>
-            <p:ph type="body" idx="1"/>
+            <p:ph idx="1" type="body"/>
           </p:nvPr>
         </p:nvSpPr>
         <p:spPr>
@@ -6984,11 +6866,11 @@
           </a:ln>
         </p:spPr>
         <p:txBody>
-          <a:bodyPr spcFirstLastPara="1" wrap="square" lIns="91425" tIns="91425" rIns="91425" bIns="91425" anchor="t" anchorCtr="0">
+          <a:bodyPr anchorCtr="0" anchor="t" bIns="91425" lIns="91425" spcFirstLastPara="1" rIns="91425" wrap="square" tIns="91425">
             <a:noAutofit/>
           </a:bodyPr>
           <a:lstStyle>
-            <a:lvl1pPr marL="457200" marR="0" lvl="0" indent="-317500" algn="l" rtl="0">
+            <a:lvl1pPr indent="-317500" lvl="0" marL="457200" marR="0" rtl="0" algn="l">
               <a:lnSpc>
                 <a:spcPct val="100000"/>
               </a:lnSpc>
@@ -7004,7 +6886,7 @@
               <a:buSzPts val="1400"/>
               <a:buFont typeface="Roboto Mono"/>
               <a:buChar char="●"/>
-              <a:defRPr sz="1400" b="0" i="0" u="none" strike="noStrike" cap="none">
+              <a:defRPr b="0" i="0" sz="1400" u="none" cap="none" strike="noStrike">
                 <a:solidFill>
                   <a:schemeClr val="dk1"/>
                 </a:solidFill>
@@ -7014,7 +6896,7 @@
                 <a:sym typeface="Roboto Mono"/>
               </a:defRPr>
             </a:lvl1pPr>
-            <a:lvl2pPr marL="914400" marR="0" lvl="1" indent="-317500" algn="l" rtl="0">
+            <a:lvl2pPr indent="-317500" lvl="1" marL="914400" marR="0" rtl="0" algn="l">
               <a:lnSpc>
                 <a:spcPct val="100000"/>
               </a:lnSpc>
@@ -7030,7 +6912,7 @@
               <a:buSzPts val="1400"/>
               <a:buFont typeface="Roboto Mono"/>
               <a:buChar char="○"/>
-              <a:defRPr sz="1400" b="0" i="0" u="none" strike="noStrike" cap="none">
+              <a:defRPr b="0" i="0" sz="1400" u="none" cap="none" strike="noStrike">
                 <a:solidFill>
                   <a:schemeClr val="dk1"/>
                 </a:solidFill>
@@ -7040,7 +6922,7 @@
                 <a:sym typeface="Roboto Mono"/>
               </a:defRPr>
             </a:lvl2pPr>
-            <a:lvl3pPr marL="1371600" marR="0" lvl="2" indent="-317500" algn="l" rtl="0">
+            <a:lvl3pPr indent="-317500" lvl="2" marL="1371600" marR="0" rtl="0" algn="l">
               <a:lnSpc>
                 <a:spcPct val="100000"/>
               </a:lnSpc>
@@ -7056,7 +6938,7 @@
               <a:buSzPts val="1400"/>
               <a:buFont typeface="Roboto Mono"/>
               <a:buChar char="■"/>
-              <a:defRPr sz="1400" b="0" i="0" u="none" strike="noStrike" cap="none">
+              <a:defRPr b="0" i="0" sz="1400" u="none" cap="none" strike="noStrike">
                 <a:solidFill>
                   <a:schemeClr val="dk1"/>
                 </a:solidFill>
@@ -7066,7 +6948,7 @@
                 <a:sym typeface="Roboto Mono"/>
               </a:defRPr>
             </a:lvl3pPr>
-            <a:lvl4pPr marL="1828800" marR="0" lvl="3" indent="-317500" algn="l" rtl="0">
+            <a:lvl4pPr indent="-317500" lvl="3" marL="1828800" marR="0" rtl="0" algn="l">
               <a:lnSpc>
                 <a:spcPct val="100000"/>
               </a:lnSpc>
@@ -7082,7 +6964,7 @@
               <a:buSzPts val="1400"/>
               <a:buFont typeface="Roboto Mono"/>
               <a:buChar char="●"/>
-              <a:defRPr sz="1400" b="0" i="0" u="none" strike="noStrike" cap="none">
+              <a:defRPr b="0" i="0" sz="1400" u="none" cap="none" strike="noStrike">
                 <a:solidFill>
                   <a:schemeClr val="dk1"/>
                 </a:solidFill>
@@ -7092,7 +6974,7 @@
                 <a:sym typeface="Roboto Mono"/>
               </a:defRPr>
             </a:lvl4pPr>
-            <a:lvl5pPr marL="2286000" marR="0" lvl="4" indent="-317500" algn="l" rtl="0">
+            <a:lvl5pPr indent="-317500" lvl="4" marL="2286000" marR="0" rtl="0" algn="l">
               <a:lnSpc>
                 <a:spcPct val="100000"/>
               </a:lnSpc>
@@ -7108,7 +6990,7 @@
               <a:buSzPts val="1400"/>
               <a:buFont typeface="Roboto Mono"/>
               <a:buChar char="○"/>
-              <a:defRPr sz="1400" b="0" i="0" u="none" strike="noStrike" cap="none">
+              <a:defRPr b="0" i="0" sz="1400" u="none" cap="none" strike="noStrike">
                 <a:solidFill>
                   <a:schemeClr val="dk1"/>
                 </a:solidFill>
@@ -7118,7 +7000,7 @@
                 <a:sym typeface="Roboto Mono"/>
               </a:defRPr>
             </a:lvl5pPr>
-            <a:lvl6pPr marL="2743200" marR="0" lvl="5" indent="-317500" algn="l" rtl="0">
+            <a:lvl6pPr indent="-317500" lvl="5" marL="2743200" marR="0" rtl="0" algn="l">
               <a:lnSpc>
                 <a:spcPct val="100000"/>
               </a:lnSpc>
@@ -7134,7 +7016,7 @@
               <a:buSzPts val="1400"/>
               <a:buFont typeface="Roboto Mono"/>
               <a:buChar char="■"/>
-              <a:defRPr sz="1400" b="0" i="0" u="none" strike="noStrike" cap="none">
+              <a:defRPr b="0" i="0" sz="1400" u="none" cap="none" strike="noStrike">
                 <a:solidFill>
                   <a:schemeClr val="dk1"/>
                 </a:solidFill>
@@ -7144,7 +7026,7 @@
                 <a:sym typeface="Roboto Mono"/>
               </a:defRPr>
             </a:lvl6pPr>
-            <a:lvl7pPr marL="3200400" marR="0" lvl="6" indent="-317500" algn="l" rtl="0">
+            <a:lvl7pPr indent="-317500" lvl="6" marL="3200400" marR="0" rtl="0" algn="l">
               <a:lnSpc>
                 <a:spcPct val="100000"/>
               </a:lnSpc>
@@ -7160,7 +7042,7 @@
               <a:buSzPts val="1400"/>
               <a:buFont typeface="Roboto Mono"/>
               <a:buChar char="●"/>
-              <a:defRPr sz="1400" b="0" i="0" u="none" strike="noStrike" cap="none">
+              <a:defRPr b="0" i="0" sz="1400" u="none" cap="none" strike="noStrike">
                 <a:solidFill>
                   <a:schemeClr val="dk1"/>
                 </a:solidFill>
@@ -7170,7 +7052,7 @@
                 <a:sym typeface="Roboto Mono"/>
               </a:defRPr>
             </a:lvl7pPr>
-            <a:lvl8pPr marL="3657600" marR="0" lvl="7" indent="-317500" algn="l" rtl="0">
+            <a:lvl8pPr indent="-317500" lvl="7" marL="3657600" marR="0" rtl="0" algn="l">
               <a:lnSpc>
                 <a:spcPct val="100000"/>
               </a:lnSpc>
@@ -7186,7 +7068,7 @@
               <a:buSzPts val="1400"/>
               <a:buFont typeface="Roboto Mono"/>
               <a:buChar char="○"/>
-              <a:defRPr sz="1400" b="0" i="0" u="none" strike="noStrike" cap="none">
+              <a:defRPr b="0" i="0" sz="1400" u="none" cap="none" strike="noStrike">
                 <a:solidFill>
                   <a:schemeClr val="dk1"/>
                 </a:solidFill>
@@ -7196,7 +7078,7 @@
                 <a:sym typeface="Roboto Mono"/>
               </a:defRPr>
             </a:lvl8pPr>
-            <a:lvl9pPr marL="4114800" marR="0" lvl="8" indent="-317500" algn="l" rtl="0">
+            <a:lvl9pPr indent="-317500" lvl="8" marL="4114800" marR="0" rtl="0" algn="l">
               <a:lnSpc>
                 <a:spcPct val="100000"/>
               </a:lnSpc>
@@ -7212,7 +7094,7 @@
               <a:buSzPts val="1400"/>
               <a:buFont typeface="Roboto Mono"/>
               <a:buChar char="■"/>
-              <a:defRPr sz="1400" b="0" i="0" u="none" strike="noStrike" cap="none">
+              <a:defRPr b="0" i="0" sz="1400" u="none" cap="none" strike="noStrike">
                 <a:solidFill>
                   <a:schemeClr val="dk1"/>
                 </a:solidFill>
@@ -7223,33 +7105,31 @@
               </a:defRPr>
             </a:lvl9pPr>
           </a:lstStyle>
-          <a:p>
-            <a:endParaRPr/>
-          </a:p>
+          <a:p/>
         </p:txBody>
       </p:sp>
     </p:spTree>
   </p:cSld>
-  <p:clrMap bg1="lt1" tx1="dk1" bg2="dk2" tx2="lt2" accent1="accent1" accent2="accent2" accent3="accent3" accent4="accent4" accent5="accent5" accent6="accent6" hlink="hlink" folHlink="folHlink"/>
+  <p:clrMap accent1="accent1" accent2="accent2" accent3="accent3" accent4="accent4" accent5="accent5" accent6="accent6" bg1="lt1" bg2="dk2" tx1="dk1" tx2="lt2" folHlink="folHlink" hlink="hlink"/>
   <p:sldLayoutIdLst>
-    <p:sldLayoutId id="2147483649" r:id="rId1"/>
-    <p:sldLayoutId id="2147483650" r:id="rId2"/>
-    <p:sldLayoutId id="2147483651" r:id="rId3"/>
-    <p:sldLayoutId id="2147483652" r:id="rId4"/>
-    <p:sldLayoutId id="2147483653" r:id="rId5"/>
-    <p:sldLayoutId id="2147483654" r:id="rId6"/>
-    <p:sldLayoutId id="2147483655" r:id="rId7"/>
-    <p:sldLayoutId id="2147483656" r:id="rId8"/>
-    <p:sldLayoutId id="2147483657" r:id="rId9"/>
-    <p:sldLayoutId id="2147483658" r:id="rId10"/>
-    <p:sldLayoutId id="2147483659" r:id="rId11"/>
-    <p:sldLayoutId id="2147483660" r:id="rId12"/>
-    <p:sldLayoutId id="2147483661" r:id="rId13"/>
+    <p:sldLayoutId id="2147483648" r:id="rId1"/>
+    <p:sldLayoutId id="2147483649" r:id="rId2"/>
+    <p:sldLayoutId id="2147483650" r:id="rId3"/>
+    <p:sldLayoutId id="2147483651" r:id="rId4"/>
+    <p:sldLayoutId id="2147483652" r:id="rId5"/>
+    <p:sldLayoutId id="2147483653" r:id="rId6"/>
+    <p:sldLayoutId id="2147483654" r:id="rId7"/>
+    <p:sldLayoutId id="2147483655" r:id="rId8"/>
+    <p:sldLayoutId id="2147483656" r:id="rId9"/>
+    <p:sldLayoutId id="2147483657" r:id="rId10"/>
+    <p:sldLayoutId id="2147483658" r:id="rId11"/>
+    <p:sldLayoutId id="2147483659" r:id="rId12"/>
+    <p:sldLayoutId id="2147483660" r:id="rId13"/>
   </p:sldLayoutIdLst>
-  <p:hf hdr="0" ftr="0" dt="0"/>
+  <p:hf dt="0" ftr="0" hdr="0"/>
   <p:txStyles>
     <p:titleStyle>
-      <a:defPPr marR="0" lvl="0" algn="l" rtl="0">
+      <a:defPPr lvl="0" marR="0" rtl="0" algn="l">
         <a:lnSpc>
           <a:spcPct val="100000"/>
         </a:lnSpc>
@@ -7260,7 +7140,7 @@
           <a:spcPts val="0"/>
         </a:spcAft>
       </a:defPPr>
-      <a:lvl1pPr marR="0" lvl="0" algn="l" rtl="0">
+      <a:lvl1pPr lvl="0" marR="0" rtl="0" algn="l">
         <a:lnSpc>
           <a:spcPct val="100000"/>
         </a:lnSpc>
@@ -7274,7 +7154,7 @@
           <a:srgbClr val="000000"/>
         </a:buClr>
         <a:buFont typeface="Arial"/>
-        <a:defRPr sz="1400" b="0" i="0" u="none" strike="noStrike" cap="none">
+        <a:defRPr b="0" i="0" sz="1400" u="none" cap="none" strike="noStrike">
           <a:solidFill>
             <a:srgbClr val="000000"/>
           </a:solidFill>
@@ -7284,7 +7164,7 @@
           <a:sym typeface="Arial"/>
         </a:defRPr>
       </a:lvl1pPr>
-      <a:lvl2pPr marR="0" lvl="1" algn="l" rtl="0">
+      <a:lvl2pPr lvl="1" marR="0" rtl="0" algn="l">
         <a:lnSpc>
           <a:spcPct val="100000"/>
         </a:lnSpc>
@@ -7298,7 +7178,7 @@
           <a:srgbClr val="000000"/>
         </a:buClr>
         <a:buFont typeface="Arial"/>
-        <a:defRPr sz="1400" b="0" i="0" u="none" strike="noStrike" cap="none">
+        <a:defRPr b="0" i="0" sz="1400" u="none" cap="none" strike="noStrike">
           <a:solidFill>
             <a:srgbClr val="000000"/>
           </a:solidFill>
@@ -7308,7 +7188,7 @@
           <a:sym typeface="Arial"/>
         </a:defRPr>
       </a:lvl2pPr>
-      <a:lvl3pPr marR="0" lvl="2" algn="l" rtl="0">
+      <a:lvl3pPr lvl="2" marR="0" rtl="0" algn="l">
         <a:lnSpc>
           <a:spcPct val="100000"/>
         </a:lnSpc>
@@ -7322,7 +7202,7 @@
           <a:srgbClr val="000000"/>
         </a:buClr>
         <a:buFont typeface="Arial"/>
-        <a:defRPr sz="1400" b="0" i="0" u="none" strike="noStrike" cap="none">
+        <a:defRPr b="0" i="0" sz="1400" u="none" cap="none" strike="noStrike">
           <a:solidFill>
             <a:srgbClr val="000000"/>
           </a:solidFill>
@@ -7332,7 +7212,7 @@
           <a:sym typeface="Arial"/>
         </a:defRPr>
       </a:lvl3pPr>
-      <a:lvl4pPr marR="0" lvl="3" algn="l" rtl="0">
+      <a:lvl4pPr lvl="3" marR="0" rtl="0" algn="l">
         <a:lnSpc>
           <a:spcPct val="100000"/>
         </a:lnSpc>
@@ -7346,7 +7226,7 @@
           <a:srgbClr val="000000"/>
         </a:buClr>
         <a:buFont typeface="Arial"/>
-        <a:defRPr sz="1400" b="0" i="0" u="none" strike="noStrike" cap="none">
+        <a:defRPr b="0" i="0" sz="1400" u="none" cap="none" strike="noStrike">
           <a:solidFill>
             <a:srgbClr val="000000"/>
           </a:solidFill>
@@ -7356,7 +7236,7 @@
           <a:sym typeface="Arial"/>
         </a:defRPr>
       </a:lvl4pPr>
-      <a:lvl5pPr marR="0" lvl="4" algn="l" rtl="0">
+      <a:lvl5pPr lvl="4" marR="0" rtl="0" algn="l">
         <a:lnSpc>
           <a:spcPct val="100000"/>
         </a:lnSpc>
@@ -7370,7 +7250,7 @@
           <a:srgbClr val="000000"/>
         </a:buClr>
         <a:buFont typeface="Arial"/>
-        <a:defRPr sz="1400" b="0" i="0" u="none" strike="noStrike" cap="none">
+        <a:defRPr b="0" i="0" sz="1400" u="none" cap="none" strike="noStrike">
           <a:solidFill>
             <a:srgbClr val="000000"/>
           </a:solidFill>
@@ -7380,7 +7260,7 @@
           <a:sym typeface="Arial"/>
         </a:defRPr>
       </a:lvl5pPr>
-      <a:lvl6pPr marR="0" lvl="5" algn="l" rtl="0">
+      <a:lvl6pPr lvl="5" marR="0" rtl="0" algn="l">
         <a:lnSpc>
           <a:spcPct val="100000"/>
         </a:lnSpc>
@@ -7394,7 +7274,7 @@
           <a:srgbClr val="000000"/>
         </a:buClr>
         <a:buFont typeface="Arial"/>
-        <a:defRPr sz="1400" b="0" i="0" u="none" strike="noStrike" cap="none">
+        <a:defRPr b="0" i="0" sz="1400" u="none" cap="none" strike="noStrike">
           <a:solidFill>
             <a:srgbClr val="000000"/>
           </a:solidFill>
@@ -7404,7 +7284,7 @@
           <a:sym typeface="Arial"/>
         </a:defRPr>
       </a:lvl6pPr>
-      <a:lvl7pPr marR="0" lvl="6" algn="l" rtl="0">
+      <a:lvl7pPr lvl="6" marR="0" rtl="0" algn="l">
         <a:lnSpc>
           <a:spcPct val="100000"/>
         </a:lnSpc>
@@ -7418,7 +7298,7 @@
           <a:srgbClr val="000000"/>
         </a:buClr>
         <a:buFont typeface="Arial"/>
-        <a:defRPr sz="1400" b="0" i="0" u="none" strike="noStrike" cap="none">
+        <a:defRPr b="0" i="0" sz="1400" u="none" cap="none" strike="noStrike">
           <a:solidFill>
             <a:srgbClr val="000000"/>
           </a:solidFill>
@@ -7428,7 +7308,7 @@
           <a:sym typeface="Arial"/>
         </a:defRPr>
       </a:lvl7pPr>
-      <a:lvl8pPr marR="0" lvl="7" algn="l" rtl="0">
+      <a:lvl8pPr lvl="7" marR="0" rtl="0" algn="l">
         <a:lnSpc>
           <a:spcPct val="100000"/>
         </a:lnSpc>
@@ -7442,7 +7322,7 @@
           <a:srgbClr val="000000"/>
         </a:buClr>
         <a:buFont typeface="Arial"/>
-        <a:defRPr sz="1400" b="0" i="0" u="none" strike="noStrike" cap="none">
+        <a:defRPr b="0" i="0" sz="1400" u="none" cap="none" strike="noStrike">
           <a:solidFill>
             <a:srgbClr val="000000"/>
           </a:solidFill>
@@ -7452,7 +7332,7 @@
           <a:sym typeface="Arial"/>
         </a:defRPr>
       </a:lvl8pPr>
-      <a:lvl9pPr marR="0" lvl="8" algn="l" rtl="0">
+      <a:lvl9pPr lvl="8" marR="0" rtl="0" algn="l">
         <a:lnSpc>
           <a:spcPct val="100000"/>
         </a:lnSpc>
@@ -7466,7 +7346,7 @@
           <a:srgbClr val="000000"/>
         </a:buClr>
         <a:buFont typeface="Arial"/>
-        <a:defRPr sz="1400" b="0" i="0" u="none" strike="noStrike" cap="none">
+        <a:defRPr b="0" i="0" sz="1400" u="none" cap="none" strike="noStrike">
           <a:solidFill>
             <a:srgbClr val="000000"/>
           </a:solidFill>
@@ -7478,7 +7358,7 @@
       </a:lvl9pPr>
     </p:titleStyle>
     <p:bodyStyle>
-      <a:defPPr marR="0" lvl="0" algn="l" rtl="0">
+      <a:defPPr lvl="0" marR="0" rtl="0" algn="l">
         <a:lnSpc>
           <a:spcPct val="100000"/>
         </a:lnSpc>
@@ -7489,7 +7369,7 @@
           <a:spcPts val="0"/>
         </a:spcAft>
       </a:defPPr>
-      <a:lvl1pPr marR="0" lvl="0" algn="l" rtl="0">
+      <a:lvl1pPr lvl="0" marR="0" rtl="0" algn="l">
         <a:lnSpc>
           <a:spcPct val="100000"/>
         </a:lnSpc>
@@ -7503,7 +7383,7 @@
           <a:srgbClr val="000000"/>
         </a:buClr>
         <a:buFont typeface="Arial"/>
-        <a:defRPr sz="1400" b="0" i="0" u="none" strike="noStrike" cap="none">
+        <a:defRPr b="0" i="0" sz="1400" u="none" cap="none" strike="noStrike">
           <a:solidFill>
             <a:srgbClr val="000000"/>
           </a:solidFill>
@@ -7513,7 +7393,7 @@
           <a:sym typeface="Arial"/>
         </a:defRPr>
       </a:lvl1pPr>
-      <a:lvl2pPr marR="0" lvl="1" algn="l" rtl="0">
+      <a:lvl2pPr lvl="1" marR="0" rtl="0" algn="l">
         <a:lnSpc>
           <a:spcPct val="100000"/>
         </a:lnSpc>
@@ -7527,7 +7407,7 @@
           <a:srgbClr val="000000"/>
         </a:buClr>
         <a:buFont typeface="Arial"/>
-        <a:defRPr sz="1400" b="0" i="0" u="none" strike="noStrike" cap="none">
+        <a:defRPr b="0" i="0" sz="1400" u="none" cap="none" strike="noStrike">
           <a:solidFill>
             <a:srgbClr val="000000"/>
           </a:solidFill>
@@ -7537,7 +7417,7 @@
           <a:sym typeface="Arial"/>
         </a:defRPr>
       </a:lvl2pPr>
-      <a:lvl3pPr marR="0" lvl="2" algn="l" rtl="0">
+      <a:lvl3pPr lvl="2" marR="0" rtl="0" algn="l">
         <a:lnSpc>
           <a:spcPct val="100000"/>
         </a:lnSpc>
@@ -7551,7 +7431,7 @@
           <a:srgbClr val="000000"/>
         </a:buClr>
         <a:buFont typeface="Arial"/>
-        <a:defRPr sz="1400" b="0" i="0" u="none" strike="noStrike" cap="none">
+        <a:defRPr b="0" i="0" sz="1400" u="none" cap="none" strike="noStrike">
           <a:solidFill>
             <a:srgbClr val="000000"/>
           </a:solidFill>
@@ -7561,7 +7441,7 @@
           <a:sym typeface="Arial"/>
         </a:defRPr>
       </a:lvl3pPr>
-      <a:lvl4pPr marR="0" lvl="3" algn="l" rtl="0">
+      <a:lvl4pPr lvl="3" marR="0" rtl="0" algn="l">
         <a:lnSpc>
           <a:spcPct val="100000"/>
         </a:lnSpc>
@@ -7575,7 +7455,7 @@
           <a:srgbClr val="000000"/>
         </a:buClr>
         <a:buFont typeface="Arial"/>
-        <a:defRPr sz="1400" b="0" i="0" u="none" strike="noStrike" cap="none">
+        <a:defRPr b="0" i="0" sz="1400" u="none" cap="none" strike="noStrike">
           <a:solidFill>
             <a:srgbClr val="000000"/>
           </a:solidFill>
@@ -7585,7 +7465,7 @@
           <a:sym typeface="Arial"/>
         </a:defRPr>
       </a:lvl4pPr>
-      <a:lvl5pPr marR="0" lvl="4" algn="l" rtl="0">
+      <a:lvl5pPr lvl="4" marR="0" rtl="0" algn="l">
         <a:lnSpc>
           <a:spcPct val="100000"/>
         </a:lnSpc>
@@ -7599,7 +7479,7 @@
           <a:srgbClr val="000000"/>
         </a:buClr>
         <a:buFont typeface="Arial"/>
-        <a:defRPr sz="1400" b="0" i="0" u="none" strike="noStrike" cap="none">
+        <a:defRPr b="0" i="0" sz="1400" u="none" cap="none" strike="noStrike">
           <a:solidFill>
             <a:srgbClr val="000000"/>
           </a:solidFill>
@@ -7609,7 +7489,7 @@
           <a:sym typeface="Arial"/>
         </a:defRPr>
       </a:lvl5pPr>
-      <a:lvl6pPr marR="0" lvl="5" algn="l" rtl="0">
+      <a:lvl6pPr lvl="5" marR="0" rtl="0" algn="l">
         <a:lnSpc>
           <a:spcPct val="100000"/>
         </a:lnSpc>
@@ -7623,7 +7503,7 @@
           <a:srgbClr val="000000"/>
         </a:buClr>
         <a:buFont typeface="Arial"/>
-        <a:defRPr sz="1400" b="0" i="0" u="none" strike="noStrike" cap="none">
+        <a:defRPr b="0" i="0" sz="1400" u="none" cap="none" strike="noStrike">
           <a:solidFill>
             <a:srgbClr val="000000"/>
           </a:solidFill>
@@ -7633,7 +7513,7 @@
           <a:sym typeface="Arial"/>
         </a:defRPr>
       </a:lvl6pPr>
-      <a:lvl7pPr marR="0" lvl="6" algn="l" rtl="0">
+      <a:lvl7pPr lvl="6" marR="0" rtl="0" algn="l">
         <a:lnSpc>
           <a:spcPct val="100000"/>
         </a:lnSpc>
@@ -7647,7 +7527,7 @@
           <a:srgbClr val="000000"/>
         </a:buClr>
         <a:buFont typeface="Arial"/>
-        <a:defRPr sz="1400" b="0" i="0" u="none" strike="noStrike" cap="none">
+        <a:defRPr b="0" i="0" sz="1400" u="none" cap="none" strike="noStrike">
           <a:solidFill>
             <a:srgbClr val="000000"/>
           </a:solidFill>
@@ -7657,7 +7537,7 @@
           <a:sym typeface="Arial"/>
         </a:defRPr>
       </a:lvl7pPr>
-      <a:lvl8pPr marR="0" lvl="7" algn="l" rtl="0">
+      <a:lvl8pPr lvl="7" marR="0" rtl="0" algn="l">
         <a:lnSpc>
           <a:spcPct val="100000"/>
         </a:lnSpc>
@@ -7671,7 +7551,7 @@
           <a:srgbClr val="000000"/>
         </a:buClr>
         <a:buFont typeface="Arial"/>
-        <a:defRPr sz="1400" b="0" i="0" u="none" strike="noStrike" cap="none">
+        <a:defRPr b="0" i="0" sz="1400" u="none" cap="none" strike="noStrike">
           <a:solidFill>
             <a:srgbClr val="000000"/>
           </a:solidFill>
@@ -7681,7 +7561,7 @@
           <a:sym typeface="Arial"/>
         </a:defRPr>
       </a:lvl8pPr>
-      <a:lvl9pPr marR="0" lvl="8" algn="l" rtl="0">
+      <a:lvl9pPr lvl="8" marR="0" rtl="0" algn="l">
         <a:lnSpc>
           <a:spcPct val="100000"/>
         </a:lnSpc>
@@ -7695,7 +7575,7 @@
           <a:srgbClr val="000000"/>
         </a:buClr>
         <a:buFont typeface="Arial"/>
-        <a:defRPr sz="1400" b="0" i="0" u="none" strike="noStrike" cap="none">
+        <a:defRPr b="0" i="0" sz="1400" u="none" cap="none" strike="noStrike">
           <a:solidFill>
             <a:srgbClr val="000000"/>
           </a:solidFill>
@@ -7707,7 +7587,7 @@
       </a:lvl9pPr>
     </p:bodyStyle>
     <p:otherStyle>
-      <a:defPPr marR="0" lvl="0" algn="l" rtl="0">
+      <a:defPPr lvl="0" marR="0" rtl="0" algn="l">
         <a:lnSpc>
           <a:spcPct val="100000"/>
         </a:lnSpc>
@@ -7718,7 +7598,7 @@
           <a:spcPts val="0"/>
         </a:spcAft>
       </a:defPPr>
-      <a:lvl1pPr marR="0" lvl="0" algn="l" rtl="0">
+      <a:lvl1pPr lvl="0" marR="0" rtl="0" algn="l">
         <a:lnSpc>
           <a:spcPct val="100000"/>
         </a:lnSpc>
@@ -7732,7 +7612,7 @@
           <a:srgbClr val="000000"/>
         </a:buClr>
         <a:buFont typeface="Arial"/>
-        <a:defRPr sz="1400" b="0" i="0" u="none" strike="noStrike" cap="none">
+        <a:defRPr b="0" i="0" sz="1400" u="none" cap="none" strike="noStrike">
           <a:solidFill>
             <a:srgbClr val="000000"/>
           </a:solidFill>
@@ -7742,7 +7622,7 @@
           <a:sym typeface="Arial"/>
         </a:defRPr>
       </a:lvl1pPr>
-      <a:lvl2pPr marR="0" lvl="1" algn="l" rtl="0">
+      <a:lvl2pPr lvl="1" marR="0" rtl="0" algn="l">
         <a:lnSpc>
           <a:spcPct val="100000"/>
         </a:lnSpc>
@@ -7756,7 +7636,7 @@
           <a:srgbClr val="000000"/>
         </a:buClr>
         <a:buFont typeface="Arial"/>
-        <a:defRPr sz="1400" b="0" i="0" u="none" strike="noStrike" cap="none">
+        <a:defRPr b="0" i="0" sz="1400" u="none" cap="none" strike="noStrike">
           <a:solidFill>
             <a:srgbClr val="000000"/>
           </a:solidFill>
@@ -7766,7 +7646,7 @@
           <a:sym typeface="Arial"/>
         </a:defRPr>
       </a:lvl2pPr>
-      <a:lvl3pPr marR="0" lvl="2" algn="l" rtl="0">
+      <a:lvl3pPr lvl="2" marR="0" rtl="0" algn="l">
         <a:lnSpc>
           <a:spcPct val="100000"/>
         </a:lnSpc>
@@ -7780,7 +7660,7 @@
           <a:srgbClr val="000000"/>
         </a:buClr>
         <a:buFont typeface="Arial"/>
-        <a:defRPr sz="1400" b="0" i="0" u="none" strike="noStrike" cap="none">
+        <a:defRPr b="0" i="0" sz="1400" u="none" cap="none" strike="noStrike">
           <a:solidFill>
             <a:srgbClr val="000000"/>
           </a:solidFill>
@@ -7790,7 +7670,7 @@
           <a:sym typeface="Arial"/>
         </a:defRPr>
       </a:lvl3pPr>
-      <a:lvl4pPr marR="0" lvl="3" algn="l" rtl="0">
+      <a:lvl4pPr lvl="3" marR="0" rtl="0" algn="l">
         <a:lnSpc>
           <a:spcPct val="100000"/>
         </a:lnSpc>
@@ -7804,7 +7684,7 @@
           <a:srgbClr val="000000"/>
         </a:buClr>
         <a:buFont typeface="Arial"/>
-        <a:defRPr sz="1400" b="0" i="0" u="none" strike="noStrike" cap="none">
+        <a:defRPr b="0" i="0" sz="1400" u="none" cap="none" strike="noStrike">
           <a:solidFill>
             <a:srgbClr val="000000"/>
           </a:solidFill>
@@ -7814,7 +7694,7 @@
           <a:sym typeface="Arial"/>
         </a:defRPr>
       </a:lvl4pPr>
-      <a:lvl5pPr marR="0" lvl="4" algn="l" rtl="0">
+      <a:lvl5pPr lvl="4" marR="0" rtl="0" algn="l">
         <a:lnSpc>
           <a:spcPct val="100000"/>
         </a:lnSpc>
@@ -7828,7 +7708,7 @@
           <a:srgbClr val="000000"/>
         </a:buClr>
         <a:buFont typeface="Arial"/>
-        <a:defRPr sz="1400" b="0" i="0" u="none" strike="noStrike" cap="none">
+        <a:defRPr b="0" i="0" sz="1400" u="none" cap="none" strike="noStrike">
           <a:solidFill>
             <a:srgbClr val="000000"/>
           </a:solidFill>
@@ -7838,7 +7718,7 @@
           <a:sym typeface="Arial"/>
         </a:defRPr>
       </a:lvl5pPr>
-      <a:lvl6pPr marR="0" lvl="5" algn="l" rtl="0">
+      <a:lvl6pPr lvl="5" marR="0" rtl="0" algn="l">
         <a:lnSpc>
           <a:spcPct val="100000"/>
         </a:lnSpc>
@@ -7852,7 +7732,7 @@
           <a:srgbClr val="000000"/>
         </a:buClr>
         <a:buFont typeface="Arial"/>
-        <a:defRPr sz="1400" b="0" i="0" u="none" strike="noStrike" cap="none">
+        <a:defRPr b="0" i="0" sz="1400" u="none" cap="none" strike="noStrike">
           <a:solidFill>
             <a:srgbClr val="000000"/>
           </a:solidFill>
@@ -7862,7 +7742,7 @@
           <a:sym typeface="Arial"/>
         </a:defRPr>
       </a:lvl6pPr>
-      <a:lvl7pPr marR="0" lvl="6" algn="l" rtl="0">
+      <a:lvl7pPr lvl="6" marR="0" rtl="0" algn="l">
         <a:lnSpc>
           <a:spcPct val="100000"/>
         </a:lnSpc>
@@ -7876,7 +7756,7 @@
           <a:srgbClr val="000000"/>
         </a:buClr>
         <a:buFont typeface="Arial"/>
-        <a:defRPr sz="1400" b="0" i="0" u="none" strike="noStrike" cap="none">
+        <a:defRPr b="0" i="0" sz="1400" u="none" cap="none" strike="noStrike">
           <a:solidFill>
             <a:srgbClr val="000000"/>
           </a:solidFill>
@@ -7886,7 +7766,7 @@
           <a:sym typeface="Arial"/>
         </a:defRPr>
       </a:lvl7pPr>
-      <a:lvl8pPr marR="0" lvl="7" algn="l" rtl="0">
+      <a:lvl8pPr lvl="7" marR="0" rtl="0" algn="l">
         <a:lnSpc>
           <a:spcPct val="100000"/>
         </a:lnSpc>
@@ -7900,7 +7780,7 @@
           <a:srgbClr val="000000"/>
         </a:buClr>
         <a:buFont typeface="Arial"/>
-        <a:defRPr sz="1400" b="0" i="0" u="none" strike="noStrike" cap="none">
+        <a:defRPr b="0" i="0" sz="1400" u="none" cap="none" strike="noStrike">
           <a:solidFill>
             <a:srgbClr val="000000"/>
           </a:solidFill>
@@ -7910,7 +7790,7 @@
           <a:sym typeface="Arial"/>
         </a:defRPr>
       </a:lvl8pPr>
-      <a:lvl9pPr marR="0" lvl="8" algn="l" rtl="0">
+      <a:lvl9pPr lvl="8" marR="0" rtl="0" algn="l">
         <a:lnSpc>
           <a:spcPct val="100000"/>
         </a:lnSpc>
@@ -7924,7 +7804,7 @@
           <a:srgbClr val="000000"/>
         </a:buClr>
         <a:buFont typeface="Arial"/>
-        <a:defRPr sz="1400" b="0" i="0" u="none" strike="noStrike" cap="none">
+        <a:defRPr b="0" i="0" sz="1400" u="none" cap="none" strike="noStrike">
           <a:solidFill>
             <a:srgbClr val="000000"/>
           </a:solidFill>
@@ -7940,11 +7820,11 @@
 </file>
 
 <file path=ppt/slides/slide1.xml><?xml version="1.0" encoding="utf-8"?>
-<p:sld xmlns:a="http://schemas.openxmlformats.org/drawingml/2006/main" xmlns:r="http://schemas.openxmlformats.org/officeDocument/2006/relationships" xmlns:p="http://schemas.openxmlformats.org/presentationml/2006/main">
+<p:sld xmlns:a="http://schemas.openxmlformats.org/drawingml/2006/main" xmlns:r="http://schemas.openxmlformats.org/officeDocument/2006/relationships" xmlns:mc="http://schemas.openxmlformats.org/markup-compatibility/2006" xmlns:mv="urn:schemas-microsoft-com:mac:vml" xmlns:p="http://schemas.openxmlformats.org/presentationml/2006/main" xmlns:c="http://schemas.openxmlformats.org/drawingml/2006/chart" xmlns:dgm="http://schemas.openxmlformats.org/drawingml/2006/diagram" xmlns:o="urn:schemas-microsoft-com:office:office" xmlns:v="urn:schemas-microsoft-com:vml" xmlns:pvml="urn:schemas-microsoft-com:office:powerpoint" xmlns:com="http://schemas.openxmlformats.org/drawingml/2006/compatibility" xmlns:p14="http://schemas.microsoft.com/office/powerpoint/2010/main" xmlns:p15="http://schemas.microsoft.com/office/powerpoint/2012/main" xmlns:ahyp="http://schemas.microsoft.com/office/drawing/2018/hyperlinkcolor">
   <p:cSld>
     <p:spTree>
       <p:nvGrpSpPr>
-        <p:cNvPr id="1" name="Shape 80"/>
+        <p:cNvPr id="80" name="Shape 80"/>
         <p:cNvGrpSpPr/>
         <p:nvPr/>
       </p:nvGrpSpPr>
@@ -7958,19 +7838,17 @@
       </p:grpSpPr>
       <p:pic>
         <p:nvPicPr>
-          <p:cNvPr id="81" name="Google Shape;81;p1"/>
-          <p:cNvPicPr preferRelativeResize="0">
-            <a:picLocks noGrp="1"/>
-          </p:cNvPicPr>
+          <p:cNvPr id="81" name="Google Shape;81;p15"/>
+          <p:cNvPicPr preferRelativeResize="0"/>
           <p:nvPr>
-            <p:ph type="pic" idx="2"/>
+            <p:ph idx="2" type="pic"/>
           </p:nvPr>
         </p:nvPicPr>
         <p:blipFill rotWithShape="1">
           <a:blip r:embed="rId3">
             <a:alphaModFix/>
           </a:blip>
-          <a:srcRect/>
+          <a:srcRect b="0" l="0" r="0" t="0"/>
           <a:stretch/>
         </p:blipFill>
         <p:spPr>
@@ -7982,23 +7860,21 @@
             <a:avLst/>
           </a:prstGeom>
           <a:noFill/>
-          <a:ln w="19050" cap="flat" cmpd="sng">
+          <a:ln cap="flat" cmpd="sng" w="19050">
             <a:solidFill>
               <a:schemeClr val="dk2"/>
             </a:solidFill>
             <a:prstDash val="solid"/>
             <a:round/>
-            <a:headEnd type="none" w="sm" len="sm"/>
-            <a:tailEnd type="none" w="sm" len="sm"/>
+            <a:headEnd len="sm" w="sm" type="none"/>
+            <a:tailEnd len="sm" w="sm" type="none"/>
           </a:ln>
         </p:spPr>
       </p:pic>
       <p:sp>
         <p:nvSpPr>
-          <p:cNvPr id="82" name="Google Shape;82;p1"/>
-          <p:cNvSpPr txBox="1">
-            <a:spLocks noGrp="1"/>
-          </p:cNvSpPr>
+          <p:cNvPr id="82" name="Google Shape;82;p15"/>
+          <p:cNvSpPr txBox="1"/>
           <p:nvPr>
             <p:ph type="ctrTitle"/>
           </p:nvPr>
@@ -8017,12 +7893,12 @@
           </a:ln>
         </p:spPr>
         <p:txBody>
-          <a:bodyPr spcFirstLastPara="1" wrap="square" lIns="91425" tIns="91425" rIns="91425" bIns="91425" anchor="t" anchorCtr="0">
+          <a:bodyPr anchorCtr="0" anchor="t" bIns="91425" lIns="91425" spcFirstLastPara="1" rIns="91425" wrap="square" tIns="91425">
             <a:noAutofit/>
           </a:bodyPr>
           <a:lstStyle/>
           <a:p>
-            <a:pPr marL="0" lvl="0" indent="0" algn="l" rtl="0">
+            <a:pPr indent="0" lvl="0" marL="0" rtl="0" algn="l">
               <a:lnSpc>
                 <a:spcPct val="80000"/>
               </a:lnSpc>
@@ -8036,7 +7912,7 @@
               <a:buNone/>
             </a:pPr>
             <a:r>
-              <a:rPr lang="hu-HU"/>
+              <a:rPr lang="en-US"/>
               <a:t>Arcdetektálás</a:t>
             </a:r>
             <a:endParaRPr/>
@@ -8045,7 +7921,7 @@
       </p:sp>
       <p:sp>
         <p:nvSpPr>
-          <p:cNvPr id="83" name="Google Shape;83;p1"/>
+          <p:cNvPr id="83" name="Google Shape;83;p15"/>
           <p:cNvSpPr txBox="1"/>
           <p:nvPr/>
         </p:nvSpPr>
@@ -8063,12 +7939,12 @@
           </a:ln>
         </p:spPr>
         <p:txBody>
-          <a:bodyPr spcFirstLastPara="1" wrap="square" lIns="0" tIns="0" rIns="0" bIns="0" anchor="ctr" anchorCtr="0">
+          <a:bodyPr anchorCtr="0" anchor="ctr" bIns="0" lIns="0" spcFirstLastPara="1" rIns="0" wrap="square" tIns="0">
             <a:noAutofit/>
           </a:bodyPr>
           <a:lstStyle/>
           <a:p>
-            <a:pPr marL="0" marR="0" lvl="0" indent="0" algn="l" rtl="0">
+            <a:pPr indent="0" lvl="0" marL="0" marR="0" rtl="0" algn="l">
               <a:lnSpc>
                 <a:spcPct val="100000"/>
               </a:lnSpc>
@@ -8086,7 +7962,7 @@
               <a:buNone/>
             </a:pPr>
             <a:r>
-              <a:rPr lang="hu-HU" sz="1600" b="0" i="0" u="none" strike="noStrike" cap="none">
+              <a:rPr b="0" i="0" lang="en-US" sz="1600" u="none" cap="none" strike="noStrike">
                 <a:solidFill>
                   <a:schemeClr val="dk1"/>
                 </a:solidFill>
@@ -8097,7 +7973,7 @@
               </a:rPr>
               <a:t>Bakos Rózsa Ajándék, Kálmán Előd Arto, Németh Bence Máté, Nyerges Bálint</a:t>
             </a:r>
-            <a:endParaRPr sz="1600" b="0" i="0" u="none" strike="noStrike" cap="none">
+            <a:endParaRPr b="0" i="0" sz="1600" u="none" cap="none" strike="noStrike">
               <a:solidFill>
                 <a:schemeClr val="dk1"/>
               </a:solidFill>
@@ -8118,11 +7994,11 @@
 </file>
 
 <file path=ppt/slides/slide10.xml><?xml version="1.0" encoding="utf-8"?>
-<p:sld xmlns:a="http://schemas.openxmlformats.org/drawingml/2006/main" xmlns:r="http://schemas.openxmlformats.org/officeDocument/2006/relationships" xmlns:p="http://schemas.openxmlformats.org/presentationml/2006/main">
+<p:sld xmlns:a="http://schemas.openxmlformats.org/drawingml/2006/main" xmlns:r="http://schemas.openxmlformats.org/officeDocument/2006/relationships" xmlns:mc="http://schemas.openxmlformats.org/markup-compatibility/2006" xmlns:mv="urn:schemas-microsoft-com:mac:vml" xmlns:p="http://schemas.openxmlformats.org/presentationml/2006/main" xmlns:c="http://schemas.openxmlformats.org/drawingml/2006/chart" xmlns:dgm="http://schemas.openxmlformats.org/drawingml/2006/diagram" xmlns:o="urn:schemas-microsoft-com:office:office" xmlns:v="urn:schemas-microsoft-com:vml" xmlns:pvml="urn:schemas-microsoft-com:office:powerpoint" xmlns:com="http://schemas.openxmlformats.org/drawingml/2006/compatibility" xmlns:p14="http://schemas.microsoft.com/office/powerpoint/2010/main" xmlns:p15="http://schemas.microsoft.com/office/powerpoint/2012/main" xmlns:ahyp="http://schemas.microsoft.com/office/drawing/2018/hyperlinkcolor">
   <p:cSld>
     <p:spTree>
       <p:nvGrpSpPr>
-        <p:cNvPr id="1" name="Shape 147"/>
+        <p:cNvPr id="148" name="Shape 148"/>
         <p:cNvGrpSpPr/>
         <p:nvPr/>
       </p:nvGrpSpPr>
@@ -8136,10 +8012,8 @@
       </p:grpSpPr>
       <p:sp>
         <p:nvSpPr>
-          <p:cNvPr id="148" name="Google Shape;148;p9"/>
-          <p:cNvSpPr txBox="1">
-            <a:spLocks noGrp="1"/>
-          </p:cNvSpPr>
+          <p:cNvPr id="149" name="Google Shape;149;p24"/>
+          <p:cNvSpPr txBox="1"/>
           <p:nvPr>
             <p:ph type="title"/>
           </p:nvPr>
@@ -8158,12 +8032,12 @@
           </a:ln>
         </p:spPr>
         <p:txBody>
-          <a:bodyPr spcFirstLastPara="1" wrap="square" lIns="91425" tIns="91425" rIns="91425" bIns="91425" anchor="t" anchorCtr="0">
+          <a:bodyPr anchorCtr="0" anchor="t" bIns="91425" lIns="91425" spcFirstLastPara="1" rIns="91425" wrap="square" tIns="91425">
             <a:noAutofit/>
           </a:bodyPr>
           <a:lstStyle/>
           <a:p>
-            <a:pPr marL="0" lvl="0" indent="0" algn="ctr" rtl="0">
+            <a:pPr indent="0" lvl="0" marL="0" rtl="0" algn="ctr">
               <a:lnSpc>
                 <a:spcPct val="100000"/>
               </a:lnSpc>
@@ -8177,7 +8051,7 @@
               <a:buNone/>
             </a:pPr>
             <a:r>
-              <a:rPr lang="hu-HU"/>
+              <a:rPr lang="en-US"/>
               <a:t>Eredményeké és összehasonlítás</a:t>
             </a:r>
             <a:endParaRPr/>
@@ -8186,36 +8060,24 @@
       </p:sp>
       <p:graphicFrame>
         <p:nvGraphicFramePr>
-          <p:cNvPr id="149" name="Google Shape;149;p9"/>
+          <p:cNvPr id="150" name="Google Shape;150;p24"/>
           <p:cNvGraphicFramePr/>
           <p:nvPr/>
         </p:nvGraphicFramePr>
         <p:xfrm>
           <a:off x="638700" y="1493075"/>
-          <a:ext cx="7866600" cy="3139380"/>
+          <a:ext cx="3000000" cy="3000000"/>
         </p:xfrm>
         <a:graphic>
           <a:graphicData uri="http://schemas.openxmlformats.org/drawingml/2006/table">
             <a:tbl>
               <a:tblPr>
                 <a:noFill/>
-                <a:tableStyleId>{C2F0EE53-DDDD-4665-9FFD-D7E5BF6FAD8F}</a:tableStyleId>
+                <a:tableStyleId>{3479EEE4-8326-451E-9463-3B67C47A2025}</a:tableStyleId>
               </a:tblPr>
               <a:tblGrid>
-                <a:gridCol w="3933300">
-                  <a:extLst>
-                    <a:ext uri="{9D8B030D-6E8A-4147-A177-3AD203B41FA5}">
-                      <a16:colId xmlns:a16="http://schemas.microsoft.com/office/drawing/2014/main" val="20000"/>
-                    </a:ext>
-                  </a:extLst>
-                </a:gridCol>
-                <a:gridCol w="3933300">
-                  <a:extLst>
-                    <a:ext uri="{9D8B030D-6E8A-4147-A177-3AD203B41FA5}">
-                      <a16:colId xmlns:a16="http://schemas.microsoft.com/office/drawing/2014/main" val="20001"/>
-                    </a:ext>
-                  </a:extLst>
-                </a:gridCol>
+                <a:gridCol w="3933300"/>
+                <a:gridCol w="3933300"/>
               </a:tblGrid>
               <a:tr h="1456625">
                 <a:tc>
@@ -8223,136 +8085,204 @@
                     <a:bodyPr/>
                     <a:lstStyle/>
                     <a:p>
-                      <a:pPr marL="0" lvl="0" indent="0" algn="l" rtl="0">
+                      <a:pPr indent="0" lvl="0" marL="0" marR="0" rtl="0" algn="l">
+                        <a:lnSpc>
+                          <a:spcPct val="100000"/>
+                        </a:lnSpc>
                         <a:spcBef>
                           <a:spcPts val="0"/>
                         </a:spcBef>
                         <a:spcAft>
                           <a:spcPts val="0"/>
                         </a:spcAft>
+                        <a:buClr>
+                          <a:srgbClr val="000000"/>
+                        </a:buClr>
+                        <a:buSzPts val="1400"/>
+                        <a:buFont typeface="Arial"/>
                         <a:buNone/>
                       </a:pPr>
                       <a:r>
-                        <a:rPr lang="hu-HU"/>
+                        <a:rPr lang="en-US" sz="1400" u="none" cap="none" strike="noStrike"/>
                         <a:t>YuNet (A leghatékonyabb):</a:t>
                       </a:r>
-                      <a:endParaRPr/>
+                      <a:endParaRPr sz="1400" u="none" cap="none" strike="noStrike"/>
                     </a:p>
                     <a:p>
-                      <a:pPr marL="0" lvl="0" indent="0" algn="l" rtl="0">
+                      <a:pPr indent="0" lvl="0" marL="0" marR="0" rtl="0" algn="l">
+                        <a:lnSpc>
+                          <a:spcPct val="100000"/>
+                        </a:lnSpc>
                         <a:spcBef>
                           <a:spcPts val="0"/>
                         </a:spcBef>
                         <a:spcAft>
                           <a:spcPts val="0"/>
                         </a:spcAft>
+                        <a:buClr>
+                          <a:srgbClr val="000000"/>
+                        </a:buClr>
+                        <a:buSzPts val="1400"/>
+                        <a:buFont typeface="Arial"/>
                         <a:buNone/>
                       </a:pPr>
-                      <a:endParaRPr/>
+                      <a:r>
+                        <a:t/>
+                      </a:r>
+                      <a:endParaRPr sz="1400" u="none" cap="none" strike="noStrike"/>
                     </a:p>
                     <a:p>
-                      <a:pPr marL="0" lvl="0" indent="0" algn="l" rtl="0">
+                      <a:pPr indent="0" lvl="0" marL="0" marR="0" rtl="0" algn="l">
+                        <a:lnSpc>
+                          <a:spcPct val="100000"/>
+                        </a:lnSpc>
                         <a:spcBef>
                           <a:spcPts val="0"/>
                         </a:spcBef>
                         <a:spcAft>
                           <a:spcPts val="0"/>
                         </a:spcAft>
+                        <a:buClr>
+                          <a:srgbClr val="000000"/>
+                        </a:buClr>
+                        <a:buSzPts val="1400"/>
+                        <a:buFont typeface="Arial"/>
                         <a:buNone/>
                       </a:pPr>
                       <a:r>
-                        <a:rPr lang="hu-HU"/>
+                        <a:rPr lang="en-US" sz="1400" u="none" cap="none" strike="noStrike"/>
                         <a:t>Legpontosabb: 71,34% (Arclétszám) és 88,42% (Bounding Box).</a:t>
                       </a:r>
-                      <a:endParaRPr/>
+                      <a:endParaRPr sz="1400" u="none" cap="none" strike="noStrike"/>
                     </a:p>
                     <a:p>
-                      <a:pPr marL="0" lvl="0" indent="0" algn="l" rtl="0">
+                      <a:pPr indent="0" lvl="0" marL="0" marR="0" rtl="0" algn="l">
+                        <a:lnSpc>
+                          <a:spcPct val="100000"/>
+                        </a:lnSpc>
                         <a:spcBef>
                           <a:spcPts val="0"/>
                         </a:spcBef>
                         <a:spcAft>
                           <a:spcPts val="0"/>
                         </a:spcAft>
+                        <a:buClr>
+                          <a:srgbClr val="000000"/>
+                        </a:buClr>
+                        <a:buSzPts val="1400"/>
+                        <a:buFont typeface="Arial"/>
                         <a:buNone/>
                       </a:pPr>
-                      <a:endParaRPr/>
+                      <a:r>
+                        <a:t/>
+                      </a:r>
+                      <a:endParaRPr sz="1400" u="none" cap="none" strike="noStrike"/>
                     </a:p>
                     <a:p>
-                      <a:pPr marL="0" lvl="0" indent="0" algn="l" rtl="0">
+                      <a:pPr indent="0" lvl="0" marL="0" marR="0" rtl="0" algn="l">
+                        <a:lnSpc>
+                          <a:spcPct val="100000"/>
+                        </a:lnSpc>
                         <a:spcBef>
                           <a:spcPts val="0"/>
                         </a:spcBef>
                         <a:spcAft>
                           <a:spcPts val="0"/>
                         </a:spcAft>
+                        <a:buClr>
+                          <a:srgbClr val="000000"/>
+                        </a:buClr>
+                        <a:buSzPts val="1400"/>
+                        <a:buFont typeface="Arial"/>
                         <a:buNone/>
                       </a:pPr>
                       <a:r>
-                        <a:rPr lang="hu-HU"/>
+                        <a:rPr lang="en-US" sz="1400" u="none" cap="none" strike="noStrike"/>
                         <a:t>Legtöbb találat: 24 461 detektált arc.</a:t>
                       </a:r>
-                      <a:endParaRPr/>
+                      <a:endParaRPr sz="1400" u="none" cap="none" strike="noStrike"/>
                     </a:p>
                   </a:txBody>
-                  <a:tcPr marL="91425" marR="91425" marT="91425" marB="91425"/>
+                  <a:tcPr marT="91425" marB="91425" marR="91425" marL="91425"/>
                 </a:tc>
                 <a:tc>
                   <a:txBody>
                     <a:bodyPr/>
                     <a:lstStyle/>
                     <a:p>
-                      <a:pPr marL="0" lvl="0" indent="0" algn="l" rtl="0">
+                      <a:pPr indent="0" lvl="0" marL="0" marR="0" rtl="0" algn="l">
+                        <a:lnSpc>
+                          <a:spcPct val="100000"/>
+                        </a:lnSpc>
                         <a:spcBef>
                           <a:spcPts val="0"/>
                         </a:spcBef>
                         <a:spcAft>
                           <a:spcPts val="0"/>
                         </a:spcAft>
+                        <a:buClr>
+                          <a:srgbClr val="000000"/>
+                        </a:buClr>
+                        <a:buSzPts val="1400"/>
+                        <a:buFont typeface="Arial"/>
                         <a:buNone/>
                       </a:pPr>
                       <a:r>
-                        <a:rPr lang="hu-HU"/>
+                        <a:rPr lang="en-US" sz="1400" u="none" cap="none" strike="noStrike"/>
                         <a:t>DNN (A legmegbízhatóbb):</a:t>
                       </a:r>
-                      <a:endParaRPr/>
+                      <a:endParaRPr sz="1400" u="none" cap="none" strike="noStrike"/>
                     </a:p>
                     <a:p>
-                      <a:pPr marL="0" lvl="0" indent="0" algn="l" rtl="0">
+                      <a:pPr indent="0" lvl="0" marL="0" marR="0" rtl="0" algn="l">
+                        <a:lnSpc>
+                          <a:spcPct val="100000"/>
+                        </a:lnSpc>
                         <a:spcBef>
                           <a:spcPts val="0"/>
                         </a:spcBef>
                         <a:spcAft>
                           <a:spcPts val="0"/>
                         </a:spcAft>
+                        <a:buClr>
+                          <a:srgbClr val="000000"/>
+                        </a:buClr>
+                        <a:buSzPts val="1400"/>
+                        <a:buFont typeface="Arial"/>
                         <a:buNone/>
                       </a:pPr>
-                      <a:endParaRPr/>
+                      <a:r>
+                        <a:t/>
+                      </a:r>
+                      <a:endParaRPr sz="1400" u="none" cap="none" strike="noStrike"/>
                     </a:p>
                     <a:p>
-                      <a:pPr marL="0" lvl="0" indent="0" algn="l" rtl="0">
+                      <a:pPr indent="0" lvl="0" marL="0" marR="0" rtl="0" algn="l">
+                        <a:lnSpc>
+                          <a:spcPct val="100000"/>
+                        </a:lnSpc>
                         <a:spcBef>
                           <a:spcPts val="0"/>
                         </a:spcBef>
                         <a:spcAft>
                           <a:spcPts val="0"/>
                         </a:spcAft>
+                        <a:buClr>
+                          <a:srgbClr val="000000"/>
+                        </a:buClr>
+                        <a:buSzPts val="1400"/>
+                        <a:buFont typeface="Arial"/>
                         <a:buNone/>
                       </a:pPr>
                       <a:r>
-                        <a:rPr lang="hu-HU"/>
+                        <a:rPr lang="en-US" sz="1400" u="none" cap="none" strike="noStrike"/>
                         <a:t>Minimális hiba: Mindössze 26 db téves ("túl sok") detektálás, ami kiemelkedően tiszta működést jelent.</a:t>
                       </a:r>
-                      <a:endParaRPr/>
+                      <a:endParaRPr sz="1400" u="none" cap="none" strike="noStrike"/>
                     </a:p>
                   </a:txBody>
-                  <a:tcPr marL="91425" marR="91425" marT="91425" marB="91425"/>
+                  <a:tcPr marT="91425" marB="91425" marR="91425" marL="91425"/>
                 </a:tc>
-                <a:extLst>
-                  <a:ext uri="{0D108BD9-81ED-4DB2-BD59-A6C34878D82A}">
-                    <a16:rowId xmlns:a16="http://schemas.microsoft.com/office/drawing/2014/main" val="10000"/>
-                  </a:ext>
-                </a:extLst>
               </a:tr>
               <a:tr h="557900">
                 <a:tc>
@@ -8360,136 +8290,204 @@
                     <a:bodyPr/>
                     <a:lstStyle/>
                     <a:p>
-                      <a:pPr marL="0" lvl="0" indent="0" algn="l" rtl="0">
+                      <a:pPr indent="0" lvl="0" marL="0" marR="0" rtl="0" algn="l">
+                        <a:lnSpc>
+                          <a:spcPct val="100000"/>
+                        </a:lnSpc>
                         <a:spcBef>
                           <a:spcPts val="0"/>
                         </a:spcBef>
                         <a:spcAft>
                           <a:spcPts val="0"/>
                         </a:spcAft>
+                        <a:buClr>
+                          <a:srgbClr val="000000"/>
+                        </a:buClr>
+                        <a:buSzPts val="1400"/>
+                        <a:buFont typeface="Arial"/>
                         <a:buNone/>
                       </a:pPr>
                       <a:r>
-                        <a:rPr lang="hu-HU"/>
+                        <a:rPr lang="en-US" sz="1400" u="none" cap="none" strike="noStrike"/>
                         <a:t>Saját CNN:</a:t>
                       </a:r>
-                      <a:endParaRPr/>
+                      <a:endParaRPr sz="1400" u="none" cap="none" strike="noStrike"/>
                     </a:p>
                     <a:p>
-                      <a:pPr marL="0" lvl="0" indent="0" algn="l" rtl="0">
+                      <a:pPr indent="0" lvl="0" marL="0" marR="0" rtl="0" algn="l">
+                        <a:lnSpc>
+                          <a:spcPct val="100000"/>
+                        </a:lnSpc>
                         <a:spcBef>
                           <a:spcPts val="0"/>
                         </a:spcBef>
                         <a:spcAft>
                           <a:spcPts val="0"/>
                         </a:spcAft>
+                        <a:buClr>
+                          <a:srgbClr val="000000"/>
+                        </a:buClr>
+                        <a:buSzPts val="1400"/>
+                        <a:buFont typeface="Arial"/>
                         <a:buNone/>
                       </a:pPr>
-                      <a:endParaRPr/>
+                      <a:r>
+                        <a:t/>
+                      </a:r>
+                      <a:endParaRPr sz="1400" u="none" cap="none" strike="noStrike"/>
                     </a:p>
                     <a:p>
-                      <a:pPr marL="0" lvl="0" indent="0" algn="l" rtl="0">
+                      <a:pPr indent="0" lvl="0" marL="0" marR="0" rtl="0" algn="l">
+                        <a:lnSpc>
+                          <a:spcPct val="100000"/>
+                        </a:lnSpc>
                         <a:spcBef>
                           <a:spcPts val="0"/>
                         </a:spcBef>
                         <a:spcAft>
                           <a:spcPts val="0"/>
                         </a:spcAft>
+                        <a:buClr>
+                          <a:srgbClr val="000000"/>
+                        </a:buClr>
+                        <a:buSzPts val="1400"/>
+                        <a:buFont typeface="Arial"/>
                         <a:buNone/>
                       </a:pPr>
                       <a:r>
-                        <a:rPr lang="hu-HU"/>
+                        <a:rPr lang="en-US" sz="1400" u="none" cap="none" strike="noStrike"/>
                         <a:t>Magas érzékenység (23 242 találat), de alacsony pontosság (11,59% BBox).</a:t>
                       </a:r>
-                      <a:endParaRPr/>
+                      <a:endParaRPr sz="1400" u="none" cap="none" strike="noStrike"/>
                     </a:p>
                     <a:p>
-                      <a:pPr marL="0" lvl="0" indent="0" algn="l" rtl="0">
+                      <a:pPr indent="0" lvl="0" marL="0" marR="0" rtl="0" algn="l">
+                        <a:lnSpc>
+                          <a:spcPct val="100000"/>
+                        </a:lnSpc>
                         <a:spcBef>
                           <a:spcPts val="0"/>
                         </a:spcBef>
                         <a:spcAft>
                           <a:spcPts val="0"/>
                         </a:spcAft>
+                        <a:buClr>
+                          <a:srgbClr val="000000"/>
+                        </a:buClr>
+                        <a:buSzPts val="1400"/>
+                        <a:buFont typeface="Arial"/>
                         <a:buNone/>
                       </a:pPr>
-                      <a:endParaRPr/>
+                      <a:r>
+                        <a:t/>
+                      </a:r>
+                      <a:endParaRPr sz="1400" u="none" cap="none" strike="noStrike"/>
                     </a:p>
                     <a:p>
-                      <a:pPr marL="0" lvl="0" indent="0" algn="l" rtl="0">
+                      <a:pPr indent="0" lvl="0" marL="0" marR="0" rtl="0" algn="l">
+                        <a:lnSpc>
+                          <a:spcPct val="100000"/>
+                        </a:lnSpc>
                         <a:spcBef>
                           <a:spcPts val="0"/>
                         </a:spcBef>
                         <a:spcAft>
                           <a:spcPts val="0"/>
                         </a:spcAft>
+                        <a:buClr>
+                          <a:srgbClr val="000000"/>
+                        </a:buClr>
+                        <a:buSzPts val="1400"/>
+                        <a:buFont typeface="Arial"/>
                         <a:buNone/>
                       </a:pPr>
                       <a:r>
-                        <a:rPr lang="hu-HU"/>
+                        <a:rPr lang="en-US" sz="1400" u="none" cap="none" strike="noStrike"/>
                         <a:t>Sok a téves riasztás (2359 db "túl sok" hiba), így a modell még finomhangolásra szorul.</a:t>
                       </a:r>
-                      <a:endParaRPr/>
+                      <a:endParaRPr sz="1400" u="none" cap="none" strike="noStrike"/>
                     </a:p>
                   </a:txBody>
-                  <a:tcPr marL="91425" marR="91425" marT="91425" marB="91425"/>
+                  <a:tcPr marT="91425" marB="91425" marR="91425" marL="91425"/>
                 </a:tc>
                 <a:tc>
                   <a:txBody>
                     <a:bodyPr/>
                     <a:lstStyle/>
                     <a:p>
-                      <a:pPr marL="0" lvl="0" indent="0" algn="l" rtl="0">
+                      <a:pPr indent="0" lvl="0" marL="0" marR="0" rtl="0" algn="l">
+                        <a:lnSpc>
+                          <a:spcPct val="100000"/>
+                        </a:lnSpc>
                         <a:spcBef>
                           <a:spcPts val="0"/>
                         </a:spcBef>
                         <a:spcAft>
                           <a:spcPts val="0"/>
                         </a:spcAft>
+                        <a:buClr>
+                          <a:srgbClr val="000000"/>
+                        </a:buClr>
+                        <a:buSzPts val="1400"/>
+                        <a:buFont typeface="Arial"/>
                         <a:buNone/>
                       </a:pPr>
                       <a:r>
-                        <a:rPr lang="hu-HU"/>
+                        <a:rPr lang="en-US" sz="1400" u="none" cap="none" strike="noStrike"/>
                         <a:t>Haar Cascade:</a:t>
                       </a:r>
-                      <a:endParaRPr/>
+                      <a:endParaRPr sz="1400" u="none" cap="none" strike="noStrike"/>
                     </a:p>
                     <a:p>
-                      <a:pPr marL="0" lvl="0" indent="0" algn="l" rtl="0">
+                      <a:pPr indent="0" lvl="0" marL="0" marR="0" rtl="0" algn="l">
+                        <a:lnSpc>
+                          <a:spcPct val="100000"/>
+                        </a:lnSpc>
                         <a:spcBef>
                           <a:spcPts val="0"/>
                         </a:spcBef>
                         <a:spcAft>
                           <a:spcPts val="0"/>
                         </a:spcAft>
+                        <a:buClr>
+                          <a:srgbClr val="000000"/>
+                        </a:buClr>
+                        <a:buSzPts val="1400"/>
+                        <a:buFont typeface="Arial"/>
                         <a:buNone/>
                       </a:pPr>
-                      <a:endParaRPr/>
+                      <a:r>
+                        <a:t/>
+                      </a:r>
+                      <a:endParaRPr sz="1400" u="none" cap="none" strike="noStrike"/>
                     </a:p>
                     <a:p>
-                      <a:pPr marL="0" lvl="0" indent="0" algn="l" rtl="0">
+                      <a:pPr indent="0" lvl="0" marL="0" marR="0" rtl="0" algn="l">
+                        <a:lnSpc>
+                          <a:spcPct val="100000"/>
+                        </a:lnSpc>
                         <a:spcBef>
                           <a:spcPts val="0"/>
                         </a:spcBef>
                         <a:spcAft>
                           <a:spcPts val="0"/>
                         </a:spcAft>
+                        <a:buClr>
+                          <a:srgbClr val="000000"/>
+                        </a:buClr>
+                        <a:buSzPts val="1400"/>
+                        <a:buFont typeface="Arial"/>
                         <a:buNone/>
                       </a:pPr>
                       <a:r>
-                        <a:rPr lang="hu-HU"/>
+                        <a:rPr lang="en-US" sz="1400" u="none" cap="none" strike="noStrike"/>
                         <a:t>Elavult technológia, alacsony hatékonysággal (19,07% pontosság).</a:t>
                       </a:r>
-                      <a:endParaRPr/>
+                      <a:endParaRPr sz="1400" u="none" cap="none" strike="noStrike"/>
                     </a:p>
                   </a:txBody>
-                  <a:tcPr marL="91425" marR="91425" marT="91425" marB="91425"/>
+                  <a:tcPr marT="91425" marB="91425" marR="91425" marL="91425"/>
                 </a:tc>
-                <a:extLst>
-                  <a:ext uri="{0D108BD9-81ED-4DB2-BD59-A6C34878D82A}">
-                    <a16:rowId xmlns:a16="http://schemas.microsoft.com/office/drawing/2014/main" val="10001"/>
-                  </a:ext>
-                </a:extLst>
               </a:tr>
             </a:tbl>
           </a:graphicData>
@@ -8504,11 +8502,11 @@
 </file>
 
 <file path=ppt/slides/slide11.xml><?xml version="1.0" encoding="utf-8"?>
-<p:sld xmlns:a="http://schemas.openxmlformats.org/drawingml/2006/main" xmlns:r="http://schemas.openxmlformats.org/officeDocument/2006/relationships" xmlns:p="http://schemas.openxmlformats.org/presentationml/2006/main">
+<p:sld xmlns:a="http://schemas.openxmlformats.org/drawingml/2006/main" xmlns:r="http://schemas.openxmlformats.org/officeDocument/2006/relationships" xmlns:mc="http://schemas.openxmlformats.org/markup-compatibility/2006" xmlns:mv="urn:schemas-microsoft-com:mac:vml" xmlns:p="http://schemas.openxmlformats.org/presentationml/2006/main" xmlns:c="http://schemas.openxmlformats.org/drawingml/2006/chart" xmlns:dgm="http://schemas.openxmlformats.org/drawingml/2006/diagram" xmlns:o="urn:schemas-microsoft-com:office:office" xmlns:v="urn:schemas-microsoft-com:vml" xmlns:pvml="urn:schemas-microsoft-com:office:powerpoint" xmlns:com="http://schemas.openxmlformats.org/drawingml/2006/compatibility" xmlns:p14="http://schemas.microsoft.com/office/powerpoint/2010/main" xmlns:p15="http://schemas.microsoft.com/office/powerpoint/2012/main" xmlns:ahyp="http://schemas.microsoft.com/office/drawing/2018/hyperlinkcolor">
   <p:cSld>
     <p:spTree>
       <p:nvGrpSpPr>
-        <p:cNvPr id="1" name="Shape 153"/>
+        <p:cNvPr id="154" name="Shape 154"/>
         <p:cNvGrpSpPr/>
         <p:nvPr/>
       </p:nvGrpSpPr>
@@ -8522,10 +8520,8 @@
       </p:grpSpPr>
       <p:sp>
         <p:nvSpPr>
-          <p:cNvPr id="154" name="Google Shape;154;p10"/>
-          <p:cNvSpPr txBox="1">
-            <a:spLocks noGrp="1"/>
-          </p:cNvSpPr>
+          <p:cNvPr id="155" name="Google Shape;155;p25"/>
+          <p:cNvSpPr txBox="1"/>
           <p:nvPr>
             <p:ph type="title"/>
           </p:nvPr>
@@ -8544,12 +8540,12 @@
           </a:ln>
         </p:spPr>
         <p:txBody>
-          <a:bodyPr spcFirstLastPara="1" wrap="square" lIns="91425" tIns="91425" rIns="91425" bIns="91425" anchor="ctr" anchorCtr="0">
+          <a:bodyPr anchorCtr="0" anchor="ctr" bIns="91425" lIns="91425" spcFirstLastPara="1" rIns="91425" wrap="square" tIns="91425">
             <a:noAutofit/>
           </a:bodyPr>
           <a:lstStyle/>
           <a:p>
-            <a:pPr marL="0" lvl="0" indent="0" algn="l" rtl="0">
+            <a:pPr indent="0" lvl="0" marL="0" rtl="0" algn="l">
               <a:lnSpc>
                 <a:spcPct val="100000"/>
               </a:lnSpc>
@@ -8563,7 +8559,7 @@
               <a:buNone/>
             </a:pPr>
             <a:r>
-              <a:rPr lang="hu-HU" sz="4000"/>
+              <a:rPr lang="en-US" sz="4000"/>
               <a:t>Köszönjük a figyelmet!</a:t>
             </a:r>
             <a:endParaRPr sz="4000"/>
@@ -8572,12 +8568,10 @@
       </p:sp>
       <p:sp>
         <p:nvSpPr>
-          <p:cNvPr id="155" name="Google Shape;155;p10"/>
-          <p:cNvSpPr txBox="1">
-            <a:spLocks noGrp="1"/>
-          </p:cNvSpPr>
+          <p:cNvPr id="156" name="Google Shape;156;p25"/>
+          <p:cNvSpPr txBox="1"/>
           <p:nvPr>
-            <p:ph type="subTitle" idx="1"/>
+            <p:ph idx="1" type="subTitle"/>
           </p:nvPr>
         </p:nvSpPr>
         <p:spPr>
@@ -8594,12 +8588,12 @@
           </a:ln>
         </p:spPr>
         <p:txBody>
-          <a:bodyPr spcFirstLastPara="1" wrap="square" lIns="91425" tIns="91425" rIns="91425" bIns="91425" anchor="t" anchorCtr="0">
+          <a:bodyPr anchorCtr="0" anchor="t" bIns="91425" lIns="91425" spcFirstLastPara="1" rIns="91425" wrap="square" tIns="91425">
             <a:noAutofit/>
           </a:bodyPr>
           <a:lstStyle/>
           <a:p>
-            <a:pPr marL="0" lvl="0" indent="0" algn="l" rtl="0">
+            <a:pPr indent="0" lvl="0" marL="0" rtl="0" algn="l">
               <a:lnSpc>
                 <a:spcPct val="100000"/>
               </a:lnSpc>
@@ -8613,7 +8607,7 @@
               <a:buNone/>
             </a:pPr>
             <a:r>
-              <a:rPr lang="hu-HU"/>
+              <a:rPr lang="en-US"/>
               <a:t>Kérdések?</a:t>
             </a:r>
             <a:endParaRPr/>
@@ -8622,7 +8616,7 @@
       </p:sp>
       <p:sp>
         <p:nvSpPr>
-          <p:cNvPr id="156" name="Google Shape;156;p10"/>
+          <p:cNvPr id="157" name="Google Shape;157;p25"/>
           <p:cNvSpPr txBox="1"/>
           <p:nvPr/>
         </p:nvSpPr>
@@ -8640,25 +8634,30 @@
           </a:ln>
         </p:spPr>
         <p:txBody>
-          <a:bodyPr spcFirstLastPara="1" wrap="square" lIns="91425" tIns="91425" rIns="91425" bIns="91425" anchor="ctr" anchorCtr="0">
+          <a:bodyPr anchorCtr="0" anchor="ctr" bIns="91425" lIns="91425" spcFirstLastPara="1" rIns="91425" wrap="square" tIns="91425">
             <a:noAutofit/>
           </a:bodyPr>
           <a:lstStyle/>
           <a:p>
-            <a:pPr marL="0" marR="0" lvl="0" indent="0" algn="l" rtl="0">
-              <a:lnSpc>
-                <a:spcPct val="100000"/>
-              </a:lnSpc>
-              <a:spcBef>
-                <a:spcPts val="0"/>
-              </a:spcBef>
-              <a:spcAft>
-                <a:spcPts val="0"/>
-              </a:spcAft>
+            <a:pPr indent="0" lvl="0" marL="0" marR="0" rtl="0" algn="l">
+              <a:lnSpc>
+                <a:spcPct val="100000"/>
+              </a:lnSpc>
+              <a:spcBef>
+                <a:spcPts val="0"/>
+              </a:spcBef>
+              <a:spcAft>
+                <a:spcPts val="0"/>
+              </a:spcAft>
+              <a:buClr>
+                <a:srgbClr val="000000"/>
+              </a:buClr>
+              <a:buSzPts val="1600"/>
+              <a:buFont typeface="Arial"/>
               <a:buNone/>
             </a:pPr>
             <a:r>
-              <a:rPr lang="hu-HU" sz="1600" b="0" i="0" u="none" strike="noStrike" cap="none">
+              <a:rPr b="0" i="0" lang="en-US" sz="1600" u="none" cap="none" strike="noStrike">
                 <a:solidFill>
                   <a:schemeClr val="dk1"/>
                 </a:solidFill>
@@ -8669,7 +8668,7 @@
               </a:rPr>
               <a:t>Bakos Rózsa Ajándék, Kálmán Előd Arto, Németh Bence Máté, Nyerges Bálint</a:t>
             </a:r>
-            <a:endParaRPr sz="1600" b="0" i="0" u="none" strike="noStrike" cap="none">
+            <a:endParaRPr b="0" i="0" sz="1600" u="none" cap="none" strike="noStrike">
               <a:solidFill>
                 <a:schemeClr val="dk1"/>
               </a:solidFill>
@@ -8690,11 +8689,11 @@
 </file>
 
 <file path=ppt/slides/slide2.xml><?xml version="1.0" encoding="utf-8"?>
-<p:sld xmlns:a="http://schemas.openxmlformats.org/drawingml/2006/main" xmlns:r="http://schemas.openxmlformats.org/officeDocument/2006/relationships" xmlns:p="http://schemas.openxmlformats.org/presentationml/2006/main">
+<p:sld xmlns:a="http://schemas.openxmlformats.org/drawingml/2006/main" xmlns:r="http://schemas.openxmlformats.org/officeDocument/2006/relationships" xmlns:mc="http://schemas.openxmlformats.org/markup-compatibility/2006" xmlns:mv="urn:schemas-microsoft-com:mac:vml" xmlns:p="http://schemas.openxmlformats.org/presentationml/2006/main" xmlns:c="http://schemas.openxmlformats.org/drawingml/2006/chart" xmlns:dgm="http://schemas.openxmlformats.org/drawingml/2006/diagram" xmlns:o="urn:schemas-microsoft-com:office:office" xmlns:v="urn:schemas-microsoft-com:vml" xmlns:pvml="urn:schemas-microsoft-com:office:powerpoint" xmlns:com="http://schemas.openxmlformats.org/drawingml/2006/compatibility" xmlns:p14="http://schemas.microsoft.com/office/powerpoint/2010/main" xmlns:p15="http://schemas.microsoft.com/office/powerpoint/2012/main" xmlns:ahyp="http://schemas.microsoft.com/office/drawing/2018/hyperlinkcolor">
   <p:cSld>
     <p:spTree>
       <p:nvGrpSpPr>
-        <p:cNvPr id="1" name="Shape 87"/>
+        <p:cNvPr id="87" name="Shape 87"/>
         <p:cNvGrpSpPr/>
         <p:nvPr/>
       </p:nvGrpSpPr>
@@ -8708,10 +8707,8 @@
       </p:grpSpPr>
       <p:sp>
         <p:nvSpPr>
-          <p:cNvPr id="88" name="Google Shape;88;p2"/>
-          <p:cNvSpPr txBox="1">
-            <a:spLocks noGrp="1"/>
-          </p:cNvSpPr>
+          <p:cNvPr id="88" name="Google Shape;88;p16"/>
+          <p:cNvSpPr txBox="1"/>
           <p:nvPr>
             <p:ph type="title"/>
           </p:nvPr>
@@ -8730,12 +8727,12 @@
           </a:ln>
         </p:spPr>
         <p:txBody>
-          <a:bodyPr spcFirstLastPara="1" wrap="square" lIns="91425" tIns="91425" rIns="91425" bIns="91425" anchor="t" anchorCtr="0">
+          <a:bodyPr anchorCtr="0" anchor="t" bIns="91425" lIns="91425" spcFirstLastPara="1" rIns="91425" wrap="square" tIns="91425">
             <a:noAutofit/>
           </a:bodyPr>
           <a:lstStyle/>
           <a:p>
-            <a:pPr marL="0" lvl="0" indent="0" algn="l" rtl="0">
+            <a:pPr indent="0" lvl="0" marL="0" rtl="0" algn="l">
               <a:lnSpc>
                 <a:spcPct val="100000"/>
               </a:lnSpc>
@@ -8749,7 +8746,7 @@
               <a:buNone/>
             </a:pPr>
             <a:r>
-              <a:rPr lang="hu-HU"/>
+              <a:rPr lang="en-US"/>
               <a:t>Projekt Célja</a:t>
             </a:r>
             <a:endParaRPr/>
@@ -8758,12 +8755,10 @@
       </p:sp>
       <p:sp>
         <p:nvSpPr>
-          <p:cNvPr id="89" name="Google Shape;89;p2"/>
-          <p:cNvSpPr txBox="1">
-            <a:spLocks noGrp="1"/>
-          </p:cNvSpPr>
+          <p:cNvPr id="89" name="Google Shape;89;p16"/>
+          <p:cNvSpPr txBox="1"/>
           <p:nvPr>
-            <p:ph type="subTitle" idx="1"/>
+            <p:ph idx="1" type="subTitle"/>
           </p:nvPr>
         </p:nvSpPr>
         <p:spPr>
@@ -8780,12 +8775,12 @@
           </a:ln>
         </p:spPr>
         <p:txBody>
-          <a:bodyPr spcFirstLastPara="1" wrap="square" lIns="91425" tIns="91425" rIns="91425" bIns="91425" anchor="t" anchorCtr="0">
+          <a:bodyPr anchorCtr="0" anchor="t" bIns="91425" lIns="91425" spcFirstLastPara="1" rIns="91425" wrap="square" tIns="91425">
             <a:noAutofit/>
           </a:bodyPr>
           <a:lstStyle/>
           <a:p>
-            <a:pPr marL="285750" lvl="0" indent="-285750" algn="l" rtl="0">
+            <a:pPr indent="-285750" lvl="0" marL="285750" rtl="0" algn="l">
               <a:lnSpc>
                 <a:spcPct val="100000"/>
               </a:lnSpc>
@@ -8800,13 +8795,13 @@
               <a:buChar char="•"/>
             </a:pPr>
             <a:r>
-              <a:rPr lang="hu-HU" sz="1600"/>
+              <a:rPr lang="en-US" sz="1600"/>
               <a:t>Átfogóan megvizsgáljuk, hogyan fejlődött az arcdetektálás</a:t>
             </a:r>
             <a:endParaRPr/>
           </a:p>
           <a:p>
-            <a:pPr marL="742950" lvl="1" indent="-285750" algn="l" rtl="0">
+            <a:pPr indent="-285750" lvl="1" marL="742950" rtl="0" algn="l">
               <a:lnSpc>
                 <a:spcPct val="100000"/>
               </a:lnSpc>
@@ -8821,13 +8816,13 @@
               <a:buChar char="•"/>
             </a:pPr>
             <a:r>
-              <a:rPr lang="hu-HU" sz="1600"/>
+              <a:rPr lang="en-US" sz="1600"/>
               <a:t>Haar Cascade</a:t>
             </a:r>
             <a:endParaRPr sz="1600"/>
           </a:p>
           <a:p>
-            <a:pPr marL="742950" lvl="1" indent="-285750" algn="l" rtl="0">
+            <a:pPr indent="-285750" lvl="1" marL="742950" rtl="0" algn="l">
               <a:lnSpc>
                 <a:spcPct val="100000"/>
               </a:lnSpc>
@@ -8842,13 +8837,13 @@
               <a:buChar char="•"/>
             </a:pPr>
             <a:r>
-              <a:rPr lang="hu-HU" sz="1600"/>
+              <a:rPr lang="en-US" sz="1600"/>
               <a:t>Modern, neurális háló alapú megoldások(Caffe és a YuNet)</a:t>
             </a:r>
             <a:endParaRPr/>
           </a:p>
           <a:p>
-            <a:pPr marL="285750" lvl="0" indent="-285750" algn="l" rtl="0">
+            <a:pPr indent="-285750" lvl="0" marL="285750" rtl="0" algn="l">
               <a:lnSpc>
                 <a:spcPct val="100000"/>
               </a:lnSpc>
@@ -8863,7 +8858,7 @@
               <a:buChar char="•"/>
             </a:pPr>
             <a:r>
-              <a:rPr lang="hu-HU" sz="1600"/>
+              <a:rPr lang="en-US" sz="1600"/>
               <a:t>Ezt ne parancssorból kelljen futtatni, hanem egy felhasználóbarát grafikus felületen keresztül lehessen vezérelni és összehasonlítani az eredményeket</a:t>
             </a:r>
             <a:endParaRPr sz="1600"/>
@@ -8879,11 +8874,11 @@
 </file>
 
 <file path=ppt/slides/slide3.xml><?xml version="1.0" encoding="utf-8"?>
-<p:sld xmlns:a="http://schemas.openxmlformats.org/drawingml/2006/main" xmlns:r="http://schemas.openxmlformats.org/officeDocument/2006/relationships" xmlns:p="http://schemas.openxmlformats.org/presentationml/2006/main">
+<p:sld xmlns:a="http://schemas.openxmlformats.org/drawingml/2006/main" xmlns:r="http://schemas.openxmlformats.org/officeDocument/2006/relationships" xmlns:mc="http://schemas.openxmlformats.org/markup-compatibility/2006" xmlns:mv="urn:schemas-microsoft-com:mac:vml" xmlns:p="http://schemas.openxmlformats.org/presentationml/2006/main" xmlns:c="http://schemas.openxmlformats.org/drawingml/2006/chart" xmlns:dgm="http://schemas.openxmlformats.org/drawingml/2006/diagram" xmlns:o="urn:schemas-microsoft-com:office:office" xmlns:v="urn:schemas-microsoft-com:vml" xmlns:pvml="urn:schemas-microsoft-com:office:powerpoint" xmlns:com="http://schemas.openxmlformats.org/drawingml/2006/compatibility" xmlns:p14="http://schemas.microsoft.com/office/powerpoint/2010/main" xmlns:p15="http://schemas.microsoft.com/office/powerpoint/2012/main" xmlns:ahyp="http://schemas.microsoft.com/office/drawing/2018/hyperlinkcolor">
   <p:cSld>
     <p:spTree>
       <p:nvGrpSpPr>
-        <p:cNvPr id="1" name="Shape 93"/>
+        <p:cNvPr id="93" name="Shape 93"/>
         <p:cNvGrpSpPr/>
         <p:nvPr/>
       </p:nvGrpSpPr>
@@ -8897,10 +8892,8 @@
       </p:grpSpPr>
       <p:sp>
         <p:nvSpPr>
-          <p:cNvPr id="94" name="Google Shape;94;p3"/>
-          <p:cNvSpPr txBox="1">
-            <a:spLocks noGrp="1"/>
-          </p:cNvSpPr>
+          <p:cNvPr id="94" name="Google Shape;94;p17"/>
+          <p:cNvSpPr txBox="1"/>
           <p:nvPr>
             <p:ph type="title"/>
           </p:nvPr>
@@ -8919,12 +8912,12 @@
           </a:ln>
         </p:spPr>
         <p:txBody>
-          <a:bodyPr spcFirstLastPara="1" wrap="square" lIns="91425" tIns="91425" rIns="91425" bIns="91425" anchor="t" anchorCtr="0">
+          <a:bodyPr anchorCtr="0" anchor="t" bIns="91425" lIns="91425" spcFirstLastPara="1" rIns="91425" wrap="square" tIns="91425">
             <a:noAutofit/>
           </a:bodyPr>
           <a:lstStyle/>
           <a:p>
-            <a:pPr marL="0" lvl="0" indent="0" algn="l" rtl="0">
+            <a:pPr indent="0" lvl="0" marL="0" rtl="0" algn="l">
               <a:lnSpc>
                 <a:spcPct val="100000"/>
               </a:lnSpc>
@@ -8938,7 +8931,7 @@
               <a:buNone/>
             </a:pPr>
             <a:r>
-              <a:rPr lang="hu-HU"/>
+              <a:rPr lang="en-US"/>
               <a:t>Feladat és eszközök</a:t>
             </a:r>
             <a:endParaRPr/>
@@ -8947,12 +8940,10 @@
       </p:sp>
       <p:sp>
         <p:nvSpPr>
-          <p:cNvPr id="95" name="Google Shape;95;p3"/>
-          <p:cNvSpPr txBox="1">
-            <a:spLocks noGrp="1"/>
-          </p:cNvSpPr>
+          <p:cNvPr id="95" name="Google Shape;95;p17"/>
+          <p:cNvSpPr txBox="1"/>
           <p:nvPr>
-            <p:ph type="subTitle" idx="1"/>
+            <p:ph idx="1" type="subTitle"/>
           </p:nvPr>
         </p:nvSpPr>
         <p:spPr>
@@ -8969,12 +8960,12 @@
           </a:ln>
         </p:spPr>
         <p:txBody>
-          <a:bodyPr spcFirstLastPara="1" wrap="square" lIns="91425" tIns="91425" rIns="91425" bIns="91425" anchor="t" anchorCtr="0">
+          <a:bodyPr anchorCtr="0" anchor="t" bIns="91425" lIns="91425" spcFirstLastPara="1" rIns="91425" wrap="square" tIns="91425">
             <a:noAutofit/>
           </a:bodyPr>
           <a:lstStyle/>
           <a:p>
-            <a:pPr marL="457200" lvl="0" indent="-228600" algn="l" rtl="0">
+            <a:pPr indent="-228600" lvl="0" marL="457200" rtl="0" algn="l">
               <a:lnSpc>
                 <a:spcPct val="100000"/>
               </a:lnSpc>
@@ -8988,6 +8979,9 @@
               <a:buFont typeface="Arial"/>
               <a:buNone/>
             </a:pPr>
+            <a:r>
+              <a:t/>
+            </a:r>
             <a:endParaRPr/>
           </a:p>
         </p:txBody>
@@ -9001,11 +8995,11 @@
 </file>
 
 <file path=ppt/slides/slide4.xml><?xml version="1.0" encoding="utf-8"?>
-<p:sld xmlns:a="http://schemas.openxmlformats.org/drawingml/2006/main" xmlns:r="http://schemas.openxmlformats.org/officeDocument/2006/relationships" xmlns:p="http://schemas.openxmlformats.org/presentationml/2006/main">
+<p:sld xmlns:a="http://schemas.openxmlformats.org/drawingml/2006/main" xmlns:r="http://schemas.openxmlformats.org/officeDocument/2006/relationships" xmlns:mc="http://schemas.openxmlformats.org/markup-compatibility/2006" xmlns:mv="urn:schemas-microsoft-com:mac:vml" xmlns:p="http://schemas.openxmlformats.org/presentationml/2006/main" xmlns:c="http://schemas.openxmlformats.org/drawingml/2006/chart" xmlns:dgm="http://schemas.openxmlformats.org/drawingml/2006/diagram" xmlns:o="urn:schemas-microsoft-com:office:office" xmlns:v="urn:schemas-microsoft-com:vml" xmlns:pvml="urn:schemas-microsoft-com:office:powerpoint" xmlns:com="http://schemas.openxmlformats.org/drawingml/2006/compatibility" xmlns:p14="http://schemas.microsoft.com/office/powerpoint/2010/main" xmlns:p15="http://schemas.microsoft.com/office/powerpoint/2012/main" xmlns:ahyp="http://schemas.microsoft.com/office/drawing/2018/hyperlinkcolor">
   <p:cSld>
     <p:spTree>
       <p:nvGrpSpPr>
-        <p:cNvPr id="1" name="Shape 99"/>
+        <p:cNvPr id="99" name="Shape 99"/>
         <p:cNvGrpSpPr/>
         <p:nvPr/>
       </p:nvGrpSpPr>
@@ -9019,19 +9013,17 @@
       </p:grpSpPr>
       <p:pic>
         <p:nvPicPr>
-          <p:cNvPr id="100" name="Google Shape;100;p4"/>
-          <p:cNvPicPr preferRelativeResize="0">
-            <a:picLocks noGrp="1"/>
-          </p:cNvPicPr>
+          <p:cNvPr id="100" name="Google Shape;100;p18"/>
+          <p:cNvPicPr preferRelativeResize="0"/>
           <p:nvPr>
-            <p:ph type="pic" idx="2"/>
+            <p:ph idx="2" type="pic"/>
           </p:nvPr>
         </p:nvPicPr>
         <p:blipFill rotWithShape="1">
           <a:blip r:embed="rId3">
             <a:alphaModFix/>
           </a:blip>
-          <a:srcRect/>
+          <a:srcRect b="0" l="0" r="0" t="0"/>
           <a:stretch/>
         </p:blipFill>
         <p:spPr>
@@ -9043,23 +9035,21 @@
             <a:avLst/>
           </a:prstGeom>
           <a:noFill/>
-          <a:ln w="9525" cap="flat" cmpd="sng">
+          <a:ln cap="flat" cmpd="sng" w="9525">
             <a:solidFill>
               <a:schemeClr val="dk2"/>
             </a:solidFill>
             <a:prstDash val="solid"/>
             <a:round/>
-            <a:headEnd type="none" w="sm" len="sm"/>
-            <a:tailEnd type="none" w="sm" len="sm"/>
+            <a:headEnd len="sm" w="sm" type="none"/>
+            <a:tailEnd len="sm" w="sm" type="none"/>
           </a:ln>
         </p:spPr>
       </p:pic>
       <p:sp>
         <p:nvSpPr>
-          <p:cNvPr id="101" name="Google Shape;101;p4"/>
-          <p:cNvSpPr txBox="1">
-            <a:spLocks noGrp="1"/>
-          </p:cNvSpPr>
+          <p:cNvPr id="101" name="Google Shape;101;p18"/>
+          <p:cNvSpPr txBox="1"/>
           <p:nvPr>
             <p:ph type="title"/>
           </p:nvPr>
@@ -9078,12 +9068,12 @@
           </a:ln>
         </p:spPr>
         <p:txBody>
-          <a:bodyPr spcFirstLastPara="1" wrap="square" lIns="91425" tIns="91425" rIns="91425" bIns="91425" anchor="t" anchorCtr="0">
+          <a:bodyPr anchorCtr="0" anchor="t" bIns="91425" lIns="91425" spcFirstLastPara="1" rIns="91425" wrap="square" tIns="91425">
             <a:noAutofit/>
           </a:bodyPr>
           <a:lstStyle/>
           <a:p>
-            <a:pPr marL="0" lvl="0" indent="0" algn="l" rtl="0">
+            <a:pPr indent="0" lvl="0" marL="0" rtl="0" algn="l">
               <a:lnSpc>
                 <a:spcPct val="80000"/>
               </a:lnSpc>
@@ -9097,7 +9087,7 @@
               <a:buNone/>
             </a:pPr>
             <a:r>
-              <a:rPr lang="hu-HU"/>
+              <a:rPr lang="en-US"/>
               <a:t>Megközelítés – Haar Cascade</a:t>
             </a:r>
             <a:endParaRPr/>
@@ -9106,12 +9096,10 @@
       </p:sp>
       <p:sp>
         <p:nvSpPr>
-          <p:cNvPr id="102" name="Google Shape;102;p4"/>
-          <p:cNvSpPr txBox="1">
-            <a:spLocks noGrp="1"/>
-          </p:cNvSpPr>
+          <p:cNvPr id="102" name="Google Shape;102;p18"/>
+          <p:cNvSpPr txBox="1"/>
           <p:nvPr>
-            <p:ph type="body" idx="1"/>
+            <p:ph idx="1" type="body"/>
           </p:nvPr>
         </p:nvSpPr>
         <p:spPr>
@@ -9128,305 +9116,99 @@
           </a:ln>
         </p:spPr>
         <p:txBody>
-          <a:bodyPr spcFirstLastPara="1" wrap="square" lIns="91425" tIns="91425" rIns="91425" bIns="91425" anchor="t" anchorCtr="0">
+          <a:bodyPr anchorCtr="0" anchor="t" bIns="91425" lIns="91425" spcFirstLastPara="1" rIns="91425" wrap="square" tIns="91425">
             <a:noAutofit/>
           </a:bodyPr>
           <a:lstStyle/>
           <a:p>
-            <a:pPr marL="285750" indent="-285750">
+            <a:pPr indent="-285750" lvl="0" marL="285750" rtl="0" algn="l">
+              <a:lnSpc>
+                <a:spcPct val="100000"/>
+              </a:lnSpc>
+              <a:spcBef>
+                <a:spcPts val="0"/>
+              </a:spcBef>
+              <a:spcAft>
+                <a:spcPts val="0"/>
+              </a:spcAft>
+              <a:buSzPts val="1400"/>
               <a:buFont typeface="Arial"/>
               <a:buChar char="•"/>
             </a:pPr>
             <a:r>
-              <a:rPr lang="en-US" dirty="0"/>
-              <a:t>Sok </a:t>
+              <a:rPr lang="en-US"/>
+              <a:t>Sok kicsi, gyorsan számolható Haar-jellemzőt (Haar features) használ.</a:t>
             </a:r>
-            <a:r>
-              <a:rPr lang="en-US" err="1"/>
-              <a:t>kicsi</a:t>
-            </a:r>
-            <a:r>
-              <a:rPr lang="en-US" dirty="0"/>
-              <a:t>, </a:t>
-            </a:r>
-            <a:r>
-              <a:rPr lang="en-US" err="1"/>
-              <a:t>gyorsan</a:t>
-            </a:r>
-            <a:r>
-              <a:rPr lang="en-US" dirty="0"/>
-              <a:t> </a:t>
-            </a:r>
-            <a:r>
-              <a:rPr lang="en-US" err="1"/>
-              <a:t>számolható</a:t>
-            </a:r>
-            <a:r>
-              <a:rPr lang="en-US" dirty="0"/>
-              <a:t> Haar-</a:t>
-            </a:r>
-            <a:r>
-              <a:rPr lang="en-US" err="1"/>
-              <a:t>jellemzőt</a:t>
-            </a:r>
-            <a:r>
-              <a:rPr lang="en-US" dirty="0"/>
-              <a:t> (Haar features) </a:t>
-            </a:r>
-            <a:r>
-              <a:rPr lang="en-US" err="1"/>
-              <a:t>használ</a:t>
-            </a:r>
-            <a:r>
-              <a:rPr lang="en-US" dirty="0"/>
-              <a:t>.</a:t>
-            </a:r>
-            <a:endParaRPr lang="en-US"/>
+            <a:endParaRPr/>
           </a:p>
           <a:p>
-            <a:pPr marL="285750" indent="-285750">
+            <a:pPr indent="-285750" lvl="0" marL="285750" rtl="0" algn="l">
+              <a:lnSpc>
+                <a:spcPct val="100000"/>
+              </a:lnSpc>
+              <a:spcBef>
+                <a:spcPts val="0"/>
+              </a:spcBef>
+              <a:spcAft>
+                <a:spcPts val="0"/>
+              </a:spcAft>
+              <a:buSzPts val="1400"/>
               <a:buFont typeface="Arial"/>
               <a:buChar char="•"/>
             </a:pPr>
             <a:r>
-              <a:rPr lang="en-US" dirty="0"/>
-              <a:t>Kis </a:t>
+              <a:rPr lang="en-US"/>
+              <a:t>Kis fekete-fehér téglalapmintákat csúsztat a képen, és megnézi, hogy a világos–sötét mintázat mennyire hasonlít a tanult objektumhoz.</a:t>
             </a:r>
-            <a:r>
-              <a:rPr lang="en-US" err="1"/>
-              <a:t>fekete-fehér</a:t>
-            </a:r>
-            <a:r>
-              <a:rPr lang="en-US" dirty="0"/>
-              <a:t> </a:t>
-            </a:r>
-            <a:r>
-              <a:rPr lang="en-US" err="1"/>
-              <a:t>téglalapmintákat</a:t>
-            </a:r>
-            <a:r>
-              <a:rPr lang="en-US" dirty="0"/>
-              <a:t> </a:t>
-            </a:r>
-            <a:r>
-              <a:rPr lang="en-US" err="1"/>
-              <a:t>csúsztat</a:t>
-            </a:r>
-            <a:r>
-              <a:rPr lang="en-US" dirty="0"/>
-              <a:t> a </a:t>
-            </a:r>
-            <a:r>
-              <a:rPr lang="en-US" err="1"/>
-              <a:t>képen</a:t>
-            </a:r>
-            <a:r>
-              <a:rPr lang="en-US" dirty="0"/>
-              <a:t>, </a:t>
-            </a:r>
-            <a:r>
-              <a:rPr lang="en-US" err="1"/>
-              <a:t>és</a:t>
-            </a:r>
-            <a:r>
-              <a:rPr lang="en-US" dirty="0"/>
-              <a:t> </a:t>
-            </a:r>
-            <a:r>
-              <a:rPr lang="en-US" err="1"/>
-              <a:t>megnézi</a:t>
-            </a:r>
-            <a:r>
-              <a:rPr lang="en-US" dirty="0"/>
-              <a:t>, </a:t>
-            </a:r>
-            <a:r>
-              <a:rPr lang="en-US" err="1"/>
-              <a:t>hogy</a:t>
-            </a:r>
-            <a:r>
-              <a:rPr lang="en-US" dirty="0"/>
-              <a:t> a </a:t>
-            </a:r>
-            <a:r>
-              <a:rPr lang="en-US" err="1"/>
-              <a:t>világos</a:t>
-            </a:r>
-            <a:r>
-              <a:rPr lang="en-US" dirty="0"/>
-              <a:t>–</a:t>
-            </a:r>
-            <a:r>
-              <a:rPr lang="en-US" err="1"/>
-              <a:t>sötét</a:t>
-            </a:r>
-            <a:r>
-              <a:rPr lang="en-US" dirty="0"/>
-              <a:t> </a:t>
-            </a:r>
-            <a:r>
-              <a:rPr lang="en-US" err="1"/>
-              <a:t>mintázat</a:t>
-            </a:r>
-            <a:r>
-              <a:rPr lang="en-US" dirty="0"/>
-              <a:t> </a:t>
-            </a:r>
-            <a:r>
-              <a:rPr lang="en-US" err="1"/>
-              <a:t>mennyire</a:t>
-            </a:r>
-            <a:r>
-              <a:rPr lang="en-US" dirty="0"/>
-              <a:t> </a:t>
-            </a:r>
-            <a:r>
-              <a:rPr lang="en-US" err="1"/>
-              <a:t>hasonlít</a:t>
-            </a:r>
-            <a:r>
-              <a:rPr lang="en-US" dirty="0"/>
-              <a:t> a </a:t>
-            </a:r>
-            <a:r>
-              <a:rPr lang="en-US" err="1"/>
-              <a:t>tanult</a:t>
-            </a:r>
-            <a:r>
-              <a:rPr lang="en-US" dirty="0"/>
-              <a:t> </a:t>
-            </a:r>
-            <a:r>
-              <a:rPr lang="en-US" err="1"/>
-              <a:t>objektumhoz</a:t>
-            </a:r>
-            <a:r>
-              <a:rPr lang="en-US" dirty="0"/>
-              <a:t>.</a:t>
-            </a:r>
+            <a:endParaRPr/>
           </a:p>
           <a:p>
-            <a:pPr marL="285750" indent="-285750">
+            <a:pPr indent="-285750" lvl="0" marL="285750" rtl="0" algn="l">
+              <a:lnSpc>
+                <a:spcPct val="100000"/>
+              </a:lnSpc>
+              <a:spcBef>
+                <a:spcPts val="0"/>
+              </a:spcBef>
+              <a:spcAft>
+                <a:spcPts val="0"/>
+              </a:spcAft>
+              <a:buSzPts val="1400"/>
               <a:buFont typeface="Arial"/>
               <a:buChar char="•"/>
             </a:pPr>
             <a:r>
-              <a:rPr lang="en-US" err="1"/>
-              <a:t>Szürkeárnyalatos</a:t>
+              <a:rPr lang="en-US"/>
+              <a:t>Szürkeárnyalatos képeken dolgozik.</a:t>
             </a:r>
-            <a:r>
-              <a:rPr lang="en-US" dirty="0"/>
-              <a:t> </a:t>
-            </a:r>
-            <a:r>
-              <a:rPr lang="en-US" err="1"/>
-              <a:t>képeken</a:t>
-            </a:r>
-            <a:r>
-              <a:rPr lang="en-US" dirty="0"/>
-              <a:t> </a:t>
-            </a:r>
-            <a:r>
-              <a:rPr lang="en-US" err="1"/>
-              <a:t>dolgozik</a:t>
-            </a:r>
-            <a:r>
-              <a:rPr lang="en-US" dirty="0"/>
-              <a:t>.</a:t>
-            </a:r>
+            <a:endParaRPr/>
           </a:p>
           <a:p>
-            <a:pPr marL="285750" indent="-285750">
+            <a:pPr indent="-285750" lvl="0" marL="285750" rtl="0" algn="l">
+              <a:lnSpc>
+                <a:spcPct val="100000"/>
+              </a:lnSpc>
+              <a:spcBef>
+                <a:spcPts val="0"/>
+              </a:spcBef>
+              <a:spcAft>
+                <a:spcPts val="0"/>
+              </a:spcAft>
+              <a:buSzPts val="1400"/>
               <a:buFont typeface="Arial"/>
               <a:buChar char="•"/>
             </a:pPr>
             <a:r>
-              <a:rPr lang="en-US" dirty="0" err="1"/>
-              <a:t>Gyors</a:t>
+              <a:rPr lang="en-US"/>
+              <a:t>Gyors és egyszerű felismerő, de ma már sokkal jobb, modernebb módszerek is léteznek.</a:t>
             </a:r>
-            <a:r>
-              <a:rPr lang="en-US" dirty="0"/>
-              <a:t> </a:t>
-            </a:r>
-            <a:r>
-              <a:rPr lang="en-US" dirty="0" err="1"/>
-              <a:t>és</a:t>
-            </a:r>
-            <a:r>
-              <a:rPr lang="en-US" dirty="0"/>
-              <a:t> </a:t>
-            </a:r>
-            <a:r>
-              <a:rPr lang="en-US" dirty="0" err="1"/>
-              <a:t>egyszerű</a:t>
-            </a:r>
-            <a:r>
-              <a:rPr lang="en-US" dirty="0"/>
-              <a:t> </a:t>
-            </a:r>
-            <a:r>
-              <a:rPr lang="en-US" dirty="0" err="1"/>
-              <a:t>felismerő</a:t>
-            </a:r>
-            <a:r>
-              <a:rPr lang="en-US" dirty="0"/>
-              <a:t>, de ma </a:t>
-            </a:r>
-            <a:r>
-              <a:rPr lang="en-US" dirty="0" err="1"/>
-              <a:t>már</a:t>
-            </a:r>
-            <a:r>
-              <a:rPr lang="en-US" dirty="0"/>
-              <a:t> </a:t>
-            </a:r>
-            <a:r>
-              <a:rPr lang="en-US" dirty="0" err="1"/>
-              <a:t>sokkal</a:t>
-            </a:r>
-            <a:r>
-              <a:rPr lang="en-US" dirty="0"/>
-              <a:t> </a:t>
-            </a:r>
-            <a:r>
-              <a:rPr lang="en-US" dirty="0" err="1"/>
-              <a:t>jobb</a:t>
-            </a:r>
-            <a:r>
-              <a:rPr lang="en-US" dirty="0"/>
-              <a:t>, </a:t>
-            </a:r>
-            <a:r>
-              <a:rPr lang="en-US" dirty="0" err="1"/>
-              <a:t>modernebb</a:t>
-            </a:r>
-            <a:r>
-              <a:rPr lang="en-US" dirty="0"/>
-              <a:t> </a:t>
-            </a:r>
-            <a:r>
-              <a:rPr lang="en-US" dirty="0" err="1"/>
-              <a:t>módszerek</a:t>
-            </a:r>
-            <a:r>
-              <a:rPr lang="en-US" dirty="0"/>
-              <a:t> is </a:t>
-            </a:r>
-            <a:r>
-              <a:rPr lang="en-US" dirty="0" err="1"/>
-              <a:t>léteznek</a:t>
-            </a:r>
-            <a:r>
-              <a:rPr lang="en-US" dirty="0"/>
-              <a:t>.</a:t>
-            </a:r>
-            <a:endParaRPr dirty="0"/>
+            <a:endParaRPr/>
           </a:p>
         </p:txBody>
       </p:sp>
       <p:grpSp>
         <p:nvGrpSpPr>
-          <p:cNvPr id="103" name="Google Shape;103;p4"/>
+          <p:cNvPr id="103" name="Google Shape;103;p18"/>
           <p:cNvGrpSpPr/>
           <p:nvPr/>
         </p:nvGrpSpPr>
@@ -9440,7 +9222,7 @@
         </p:grpSpPr>
         <p:pic>
           <p:nvPicPr>
-            <p:cNvPr id="104" name="Google Shape;104;p4" title="Sin título-2.png"/>
+            <p:cNvPr id="104" name="Google Shape;104;p18" title="Sin título-2.png"/>
             <p:cNvPicPr preferRelativeResize="0"/>
             <p:nvPr/>
           </p:nvPicPr>
@@ -9448,7 +9230,7 @@
             <a:blip r:embed="rId4">
               <a:alphaModFix/>
             </a:blip>
-            <a:srcRect l="60127"/>
+            <a:srcRect b="0" l="60127" r="0" t="0"/>
             <a:stretch/>
           </p:blipFill>
           <p:spPr>
@@ -9467,7 +9249,7 @@
         </p:pic>
         <p:pic>
           <p:nvPicPr>
-            <p:cNvPr id="105" name="Google Shape;105;p4" title="Sin título-2.png"/>
+            <p:cNvPr id="105" name="Google Shape;105;p18" title="Sin título-2.png"/>
             <p:cNvPicPr preferRelativeResize="0"/>
             <p:nvPr/>
           </p:nvPicPr>
@@ -9475,7 +9257,7 @@
             <a:blip r:embed="rId4">
               <a:alphaModFix/>
             </a:blip>
-            <a:srcRect l="60127"/>
+            <a:srcRect b="0" l="60127" r="0" t="0"/>
             <a:stretch/>
           </p:blipFill>
           <p:spPr>
@@ -9502,11 +9284,11 @@
 </file>
 
 <file path=ppt/slides/slide5.xml><?xml version="1.0" encoding="utf-8"?>
-<p:sld xmlns:a="http://schemas.openxmlformats.org/drawingml/2006/main" xmlns:r="http://schemas.openxmlformats.org/officeDocument/2006/relationships" xmlns:p="http://schemas.openxmlformats.org/presentationml/2006/main">
+<p:sld xmlns:a="http://schemas.openxmlformats.org/drawingml/2006/main" xmlns:r="http://schemas.openxmlformats.org/officeDocument/2006/relationships" xmlns:mc="http://schemas.openxmlformats.org/markup-compatibility/2006" xmlns:mv="urn:schemas-microsoft-com:mac:vml" xmlns:p="http://schemas.openxmlformats.org/presentationml/2006/main" xmlns:c="http://schemas.openxmlformats.org/drawingml/2006/chart" xmlns:dgm="http://schemas.openxmlformats.org/drawingml/2006/diagram" xmlns:o="urn:schemas-microsoft-com:office:office" xmlns:v="urn:schemas-microsoft-com:vml" xmlns:pvml="urn:schemas-microsoft-com:office:powerpoint" xmlns:com="http://schemas.openxmlformats.org/drawingml/2006/compatibility" xmlns:p14="http://schemas.microsoft.com/office/powerpoint/2010/main" xmlns:p15="http://schemas.microsoft.com/office/powerpoint/2012/main" xmlns:ahyp="http://schemas.microsoft.com/office/drawing/2018/hyperlinkcolor">
   <p:cSld>
     <p:spTree>
       <p:nvGrpSpPr>
-        <p:cNvPr id="1" name="Shape 109"/>
+        <p:cNvPr id="109" name="Shape 109"/>
         <p:cNvGrpSpPr/>
         <p:nvPr/>
       </p:nvGrpSpPr>
@@ -9520,19 +9302,17 @@
       </p:grpSpPr>
       <p:pic>
         <p:nvPicPr>
-          <p:cNvPr id="110" name="Google Shape;110;p5"/>
-          <p:cNvPicPr preferRelativeResize="0">
-            <a:picLocks noGrp="1"/>
-          </p:cNvPicPr>
+          <p:cNvPr id="110" name="Google Shape;110;p19"/>
+          <p:cNvPicPr preferRelativeResize="0"/>
           <p:nvPr>
-            <p:ph type="pic" idx="2"/>
+            <p:ph idx="2" type="pic"/>
           </p:nvPr>
         </p:nvPicPr>
         <p:blipFill rotWithShape="1">
           <a:blip r:embed="rId3">
             <a:alphaModFix/>
           </a:blip>
-          <a:srcRect/>
+          <a:srcRect b="0" l="0" r="0" t="0"/>
           <a:stretch/>
         </p:blipFill>
         <p:spPr>
@@ -9544,23 +9324,21 @@
             <a:avLst/>
           </a:prstGeom>
           <a:noFill/>
-          <a:ln w="9525" cap="flat" cmpd="sng">
+          <a:ln cap="flat" cmpd="sng" w="9525">
             <a:solidFill>
               <a:schemeClr val="dk2"/>
             </a:solidFill>
             <a:prstDash val="solid"/>
             <a:round/>
-            <a:headEnd type="none" w="sm" len="sm"/>
-            <a:tailEnd type="none" w="sm" len="sm"/>
+            <a:headEnd len="sm" w="sm" type="none"/>
+            <a:tailEnd len="sm" w="sm" type="none"/>
           </a:ln>
         </p:spPr>
       </p:pic>
       <p:sp>
         <p:nvSpPr>
-          <p:cNvPr id="111" name="Google Shape;111;p5"/>
-          <p:cNvSpPr txBox="1">
-            <a:spLocks noGrp="1"/>
-          </p:cNvSpPr>
+          <p:cNvPr id="111" name="Google Shape;111;p19"/>
+          <p:cNvSpPr txBox="1"/>
           <p:nvPr>
             <p:ph type="title"/>
           </p:nvPr>
@@ -9579,12 +9357,12 @@
           </a:ln>
         </p:spPr>
         <p:txBody>
-          <a:bodyPr spcFirstLastPara="1" wrap="square" lIns="91425" tIns="91425" rIns="91425" bIns="91425" anchor="t" anchorCtr="0">
+          <a:bodyPr anchorCtr="0" anchor="t" bIns="91425" lIns="91425" spcFirstLastPara="1" rIns="91425" wrap="square" tIns="91425">
             <a:noAutofit/>
           </a:bodyPr>
           <a:lstStyle/>
           <a:p>
-            <a:pPr marL="0" lvl="0" indent="0" algn="l" rtl="0">
+            <a:pPr indent="0" lvl="0" marL="0" rtl="0" algn="l">
               <a:lnSpc>
                 <a:spcPct val="80000"/>
               </a:lnSpc>
@@ -9598,7 +9376,7 @@
               <a:buNone/>
             </a:pPr>
             <a:r>
-              <a:rPr lang="hu-HU"/>
+              <a:rPr lang="en-US"/>
               <a:t>Megközelítés – DNN</a:t>
             </a:r>
             <a:endParaRPr/>
@@ -9607,12 +9385,10 @@
       </p:sp>
       <p:sp>
         <p:nvSpPr>
-          <p:cNvPr id="112" name="Google Shape;112;p5"/>
-          <p:cNvSpPr txBox="1">
-            <a:spLocks noGrp="1"/>
-          </p:cNvSpPr>
+          <p:cNvPr id="112" name="Google Shape;112;p19"/>
+          <p:cNvSpPr txBox="1"/>
           <p:nvPr>
-            <p:ph type="body" idx="1"/>
+            <p:ph idx="1" type="body"/>
           </p:nvPr>
         </p:nvSpPr>
         <p:spPr>
@@ -9629,12 +9405,12 @@
           </a:ln>
         </p:spPr>
         <p:txBody>
-          <a:bodyPr spcFirstLastPara="1" wrap="square" lIns="91425" tIns="91425" rIns="91425" bIns="91425" anchor="t" anchorCtr="0">
+          <a:bodyPr anchorCtr="0" anchor="t" bIns="91425" lIns="91425" spcFirstLastPara="1" rIns="91425" wrap="square" tIns="91425">
             <a:noAutofit/>
           </a:bodyPr>
           <a:lstStyle/>
           <a:p>
-            <a:pPr marL="457200" lvl="0" indent="-317500" algn="l" rtl="0">
+            <a:pPr indent="-317500" lvl="0" marL="457200" rtl="0" algn="l">
               <a:lnSpc>
                 <a:spcPct val="100000"/>
               </a:lnSpc>
@@ -9649,13 +9425,13 @@
               <a:buChar char="•"/>
             </a:pPr>
             <a:r>
-              <a:rPr lang="hu-HU"/>
+              <a:rPr lang="en-US"/>
               <a:t>A modern arcfelismerés már neurális hálókat használ</a:t>
             </a:r>
             <a:endParaRPr/>
           </a:p>
           <a:p>
-            <a:pPr marL="457200" lvl="0" indent="-317500" algn="l" rtl="0">
+            <a:pPr indent="-317500" lvl="0" marL="457200" rtl="0" algn="l">
               <a:lnSpc>
                 <a:spcPct val="100000"/>
               </a:lnSpc>
@@ -9670,13 +9446,13 @@
               <a:buChar char="•"/>
             </a:pPr>
             <a:r>
-              <a:rPr lang="hu-HU"/>
+              <a:rPr lang="en-US"/>
               <a:t>Caffe alapú DNN modell</a:t>
             </a:r>
             <a:endParaRPr/>
           </a:p>
           <a:p>
-            <a:pPr marL="914400" lvl="1" indent="-317500" algn="l" rtl="0">
+            <a:pPr indent="-317500" lvl="1" marL="914400" rtl="0" algn="l">
               <a:lnSpc>
                 <a:spcPct val="115000"/>
               </a:lnSpc>
@@ -9691,13 +9467,13 @@
               <a:buChar char="•"/>
             </a:pPr>
             <a:r>
-              <a:rPr lang="hu-HU"/>
+              <a:rPr lang="en-US"/>
               <a:t>SSD (Single Shot Detector) architektúrát használ, ResNet-10 alapon</a:t>
             </a:r>
             <a:endParaRPr/>
           </a:p>
           <a:p>
-            <a:pPr marL="914400" lvl="1" indent="-317500" algn="l" rtl="0">
+            <a:pPr indent="-317500" lvl="1" marL="914400" rtl="0" algn="l">
               <a:lnSpc>
                 <a:spcPct val="115000"/>
               </a:lnSpc>
@@ -9712,13 +9488,13 @@
               <a:buChar char="•"/>
             </a:pPr>
             <a:r>
-              <a:rPr lang="hu-HU"/>
+              <a:rPr lang="en-US"/>
               <a:t>Színes képeken dolgozik</a:t>
             </a:r>
             <a:endParaRPr/>
           </a:p>
           <a:p>
-            <a:pPr marL="914400" lvl="1" indent="-317500" algn="l" rtl="0">
+            <a:pPr indent="-317500" lvl="1" marL="914400" rtl="0" algn="l">
               <a:lnSpc>
                 <a:spcPct val="115000"/>
               </a:lnSpc>
@@ -9733,13 +9509,13 @@
               <a:buChar char="•"/>
             </a:pPr>
             <a:r>
-              <a:rPr lang="hu-HU"/>
+              <a:rPr lang="en-US"/>
               <a:t>Pixel-szintű mintázatok helyett komplexebb vonásokat keres</a:t>
             </a:r>
             <a:endParaRPr/>
           </a:p>
           <a:p>
-            <a:pPr marL="914400" lvl="1" indent="-317500" algn="l" rtl="0">
+            <a:pPr indent="-317500" lvl="1" marL="914400" rtl="0" algn="l">
               <a:lnSpc>
                 <a:spcPct val="115000"/>
               </a:lnSpc>
@@ -9754,7 +9530,7 @@
               <a:buChar char="•"/>
             </a:pPr>
             <a:r>
-              <a:rPr lang="hu-HU"/>
+              <a:rPr lang="en-US"/>
               <a:t>Sokkal stabilabb változó fényviszonyok között is</a:t>
             </a:r>
             <a:endParaRPr/>
@@ -9763,7 +9539,7 @@
       </p:sp>
       <p:grpSp>
         <p:nvGrpSpPr>
-          <p:cNvPr id="113" name="Google Shape;113;p5"/>
+          <p:cNvPr id="113" name="Google Shape;113;p19"/>
           <p:cNvGrpSpPr/>
           <p:nvPr/>
         </p:nvGrpSpPr>
@@ -9777,7 +9553,7 @@
         </p:grpSpPr>
         <p:pic>
           <p:nvPicPr>
-            <p:cNvPr id="114" name="Google Shape;114;p5" title="Sin título-2.png"/>
+            <p:cNvPr id="114" name="Google Shape;114;p19" title="Sin título-2.png"/>
             <p:cNvPicPr preferRelativeResize="0"/>
             <p:nvPr/>
           </p:nvPicPr>
@@ -9785,7 +9561,7 @@
             <a:blip r:embed="rId4">
               <a:alphaModFix/>
             </a:blip>
-            <a:srcRect l="60127"/>
+            <a:srcRect b="0" l="60127" r="0" t="0"/>
             <a:stretch/>
           </p:blipFill>
           <p:spPr>
@@ -9804,7 +9580,7 @@
         </p:pic>
         <p:pic>
           <p:nvPicPr>
-            <p:cNvPr id="115" name="Google Shape;115;p5" title="Sin título-2.png"/>
+            <p:cNvPr id="115" name="Google Shape;115;p19" title="Sin título-2.png"/>
             <p:cNvPicPr preferRelativeResize="0"/>
             <p:nvPr/>
           </p:nvPicPr>
@@ -9812,7 +9588,7 @@
             <a:blip r:embed="rId4">
               <a:alphaModFix/>
             </a:blip>
-            <a:srcRect l="60127"/>
+            <a:srcRect b="0" l="60127" r="0" t="0"/>
             <a:stretch/>
           </p:blipFill>
           <p:spPr>
@@ -9839,11 +9615,11 @@
 </file>
 
 <file path=ppt/slides/slide6.xml><?xml version="1.0" encoding="utf-8"?>
-<p:sld xmlns:a="http://schemas.openxmlformats.org/drawingml/2006/main" xmlns:r="http://schemas.openxmlformats.org/officeDocument/2006/relationships" xmlns:p="http://schemas.openxmlformats.org/presentationml/2006/main">
+<p:sld xmlns:a="http://schemas.openxmlformats.org/drawingml/2006/main" xmlns:r="http://schemas.openxmlformats.org/officeDocument/2006/relationships" xmlns:mc="http://schemas.openxmlformats.org/markup-compatibility/2006" xmlns:mv="urn:schemas-microsoft-com:mac:vml" xmlns:p="http://schemas.openxmlformats.org/presentationml/2006/main" xmlns:c="http://schemas.openxmlformats.org/drawingml/2006/chart" xmlns:dgm="http://schemas.openxmlformats.org/drawingml/2006/diagram" xmlns:o="urn:schemas-microsoft-com:office:office" xmlns:v="urn:schemas-microsoft-com:vml" xmlns:pvml="urn:schemas-microsoft-com:office:powerpoint" xmlns:com="http://schemas.openxmlformats.org/drawingml/2006/compatibility" xmlns:p14="http://schemas.microsoft.com/office/powerpoint/2010/main" xmlns:p15="http://schemas.microsoft.com/office/powerpoint/2012/main" xmlns:ahyp="http://schemas.microsoft.com/office/drawing/2018/hyperlinkcolor">
   <p:cSld>
     <p:spTree>
       <p:nvGrpSpPr>
-        <p:cNvPr id="1" name="Shape 119"/>
+        <p:cNvPr id="119" name="Shape 119"/>
         <p:cNvGrpSpPr/>
         <p:nvPr/>
       </p:nvGrpSpPr>
@@ -9857,19 +9633,17 @@
       </p:grpSpPr>
       <p:pic>
         <p:nvPicPr>
-          <p:cNvPr id="120" name="Google Shape;120;p6"/>
-          <p:cNvPicPr preferRelativeResize="0">
-            <a:picLocks noGrp="1"/>
-          </p:cNvPicPr>
+          <p:cNvPr id="120" name="Google Shape;120;p20"/>
+          <p:cNvPicPr preferRelativeResize="0"/>
           <p:nvPr>
-            <p:ph type="pic" idx="2"/>
+            <p:ph idx="2" type="pic"/>
           </p:nvPr>
         </p:nvPicPr>
         <p:blipFill rotWithShape="1">
           <a:blip r:embed="rId3">
             <a:alphaModFix/>
           </a:blip>
-          <a:srcRect/>
+          <a:srcRect b="0" l="0" r="0" t="0"/>
           <a:stretch/>
         </p:blipFill>
         <p:spPr>
@@ -9881,23 +9655,21 @@
             <a:avLst/>
           </a:prstGeom>
           <a:noFill/>
-          <a:ln w="9525" cap="flat" cmpd="sng">
+          <a:ln cap="flat" cmpd="sng" w="9525">
             <a:solidFill>
               <a:schemeClr val="dk2"/>
             </a:solidFill>
             <a:prstDash val="solid"/>
             <a:round/>
-            <a:headEnd type="none" w="sm" len="sm"/>
-            <a:tailEnd type="none" w="sm" len="sm"/>
+            <a:headEnd len="sm" w="sm" type="none"/>
+            <a:tailEnd len="sm" w="sm" type="none"/>
           </a:ln>
         </p:spPr>
       </p:pic>
       <p:sp>
         <p:nvSpPr>
-          <p:cNvPr id="121" name="Google Shape;121;p6"/>
-          <p:cNvSpPr txBox="1">
-            <a:spLocks noGrp="1"/>
-          </p:cNvSpPr>
+          <p:cNvPr id="121" name="Google Shape;121;p20"/>
+          <p:cNvSpPr txBox="1"/>
           <p:nvPr>
             <p:ph type="title"/>
           </p:nvPr>
@@ -9916,12 +9688,12 @@
           </a:ln>
         </p:spPr>
         <p:txBody>
-          <a:bodyPr spcFirstLastPara="1" wrap="square" lIns="91425" tIns="91425" rIns="91425" bIns="91425" anchor="t" anchorCtr="0">
+          <a:bodyPr anchorCtr="0" anchor="t" bIns="91425" lIns="91425" spcFirstLastPara="1" rIns="91425" wrap="square" tIns="91425">
             <a:noAutofit/>
           </a:bodyPr>
           <a:lstStyle/>
           <a:p>
-            <a:pPr marL="0" lvl="0" indent="0" algn="l" rtl="0">
+            <a:pPr indent="0" lvl="0" marL="0" rtl="0" algn="l">
               <a:lnSpc>
                 <a:spcPct val="80000"/>
               </a:lnSpc>
@@ -9935,7 +9707,7 @@
               <a:buNone/>
             </a:pPr>
             <a:r>
-              <a:rPr lang="hu-HU"/>
+              <a:rPr lang="en-US"/>
               <a:t>Megközelítés - YuNet</a:t>
             </a:r>
             <a:endParaRPr/>
@@ -9944,12 +9716,10 @@
       </p:sp>
       <p:sp>
         <p:nvSpPr>
-          <p:cNvPr id="122" name="Google Shape;122;p6"/>
-          <p:cNvSpPr txBox="1">
-            <a:spLocks noGrp="1"/>
-          </p:cNvSpPr>
+          <p:cNvPr id="122" name="Google Shape;122;p20"/>
+          <p:cNvSpPr txBox="1"/>
           <p:nvPr>
-            <p:ph type="body" idx="1"/>
+            <p:ph idx="1" type="body"/>
           </p:nvPr>
         </p:nvSpPr>
         <p:spPr>
@@ -9966,12 +9736,12 @@
           </a:ln>
         </p:spPr>
         <p:txBody>
-          <a:bodyPr spcFirstLastPara="1" wrap="square" lIns="91425" tIns="91425" rIns="91425" bIns="91425" anchor="t" anchorCtr="0">
+          <a:bodyPr anchorCtr="0" anchor="t" bIns="91425" lIns="91425" spcFirstLastPara="1" rIns="91425" wrap="square" tIns="91425">
             <a:noAutofit/>
           </a:bodyPr>
           <a:lstStyle/>
           <a:p>
-            <a:pPr marL="457200" lvl="0" indent="-317500" algn="l" rtl="0">
+            <a:pPr indent="-317500" lvl="0" marL="457200" rtl="0" algn="l">
               <a:lnSpc>
                 <a:spcPct val="100000"/>
               </a:lnSpc>
@@ -9986,13 +9756,13 @@
               <a:buChar char="•"/>
             </a:pPr>
             <a:r>
-              <a:rPr lang="hu-HU"/>
+              <a:rPr lang="en-US"/>
               <a:t>Legmodernebb megoldás</a:t>
             </a:r>
             <a:endParaRPr/>
           </a:p>
           <a:p>
-            <a:pPr marL="457200" lvl="0" indent="-317500" algn="l" rtl="0">
+            <a:pPr indent="-317500" lvl="0" marL="457200" rtl="0" algn="l">
               <a:lnSpc>
                 <a:spcPct val="100000"/>
               </a:lnSpc>
@@ -10007,13 +9777,13 @@
               <a:buChar char="•"/>
             </a:pPr>
             <a:r>
-              <a:rPr lang="hu-HU"/>
+              <a:rPr lang="en-US"/>
               <a:t>OpenCV Zoo-ból integrált, .onnx formátumban</a:t>
             </a:r>
             <a:endParaRPr/>
           </a:p>
           <a:p>
-            <a:pPr marL="457200" lvl="0" indent="-317500" algn="l" rtl="0">
+            <a:pPr indent="-317500" lvl="0" marL="457200" rtl="0" algn="l">
               <a:lnSpc>
                 <a:spcPct val="100000"/>
               </a:lnSpc>
@@ -10028,13 +9798,13 @@
               <a:buChar char="•"/>
             </a:pPr>
             <a:r>
-              <a:rPr lang="hu-HU"/>
+              <a:rPr lang="en-US"/>
               <a:t>Rendkívül kicsi és gyors</a:t>
             </a:r>
             <a:endParaRPr/>
           </a:p>
           <a:p>
-            <a:pPr marL="457200" lvl="0" indent="-317500" algn="l" rtl="0">
+            <a:pPr indent="-317500" lvl="0" marL="457200" rtl="0" algn="l">
               <a:lnSpc>
                 <a:spcPct val="100000"/>
               </a:lnSpc>
@@ -10049,7 +9819,7 @@
               <a:buChar char="•"/>
             </a:pPr>
             <a:r>
-              <a:rPr lang="hu-HU"/>
+              <a:rPr lang="en-US"/>
               <a:t>Képes megtalálni azokat az arcokat is, amik profilból látszanak, vagy részben takarásban vannak(ahol a klasszikus algoritmusok kudarcot vallanak)</a:t>
             </a:r>
             <a:endParaRPr/>
@@ -10058,7 +9828,7 @@
       </p:sp>
       <p:grpSp>
         <p:nvGrpSpPr>
-          <p:cNvPr id="123" name="Google Shape;123;p6"/>
+          <p:cNvPr id="123" name="Google Shape;123;p20"/>
           <p:cNvGrpSpPr/>
           <p:nvPr/>
         </p:nvGrpSpPr>
@@ -10072,7 +9842,7 @@
         </p:grpSpPr>
         <p:pic>
           <p:nvPicPr>
-            <p:cNvPr id="124" name="Google Shape;124;p6" title="Sin título-2.png"/>
+            <p:cNvPr id="124" name="Google Shape;124;p20" title="Sin título-2.png"/>
             <p:cNvPicPr preferRelativeResize="0"/>
             <p:nvPr/>
           </p:nvPicPr>
@@ -10080,7 +9850,7 @@
             <a:blip r:embed="rId4">
               <a:alphaModFix/>
             </a:blip>
-            <a:srcRect l="60127"/>
+            <a:srcRect b="0" l="60127" r="0" t="0"/>
             <a:stretch/>
           </p:blipFill>
           <p:spPr>
@@ -10099,7 +9869,7 @@
         </p:pic>
         <p:pic>
           <p:nvPicPr>
-            <p:cNvPr id="125" name="Google Shape;125;p6" title="Sin título-2.png"/>
+            <p:cNvPr id="125" name="Google Shape;125;p20" title="Sin título-2.png"/>
             <p:cNvPicPr preferRelativeResize="0"/>
             <p:nvPr/>
           </p:nvPicPr>
@@ -10107,7 +9877,7 @@
             <a:blip r:embed="rId4">
               <a:alphaModFix/>
             </a:blip>
-            <a:srcRect l="60127"/>
+            <a:srcRect b="0" l="60127" r="0" t="0"/>
             <a:stretch/>
           </p:blipFill>
           <p:spPr>
@@ -10134,11 +9904,11 @@
 </file>
 
 <file path=ppt/slides/slide7.xml><?xml version="1.0" encoding="utf-8"?>
-<p:sld xmlns:a="http://schemas.openxmlformats.org/drawingml/2006/main" xmlns:r="http://schemas.openxmlformats.org/officeDocument/2006/relationships" xmlns:p="http://schemas.openxmlformats.org/presentationml/2006/main">
+<p:sld xmlns:a="http://schemas.openxmlformats.org/drawingml/2006/main" xmlns:r="http://schemas.openxmlformats.org/officeDocument/2006/relationships" xmlns:mc="http://schemas.openxmlformats.org/markup-compatibility/2006" xmlns:mv="urn:schemas-microsoft-com:mac:vml" xmlns:p="http://schemas.openxmlformats.org/presentationml/2006/main" xmlns:c="http://schemas.openxmlformats.org/drawingml/2006/chart" xmlns:dgm="http://schemas.openxmlformats.org/drawingml/2006/diagram" xmlns:o="urn:schemas-microsoft-com:office:office" xmlns:v="urn:schemas-microsoft-com:vml" xmlns:pvml="urn:schemas-microsoft-com:office:powerpoint" xmlns:com="http://schemas.openxmlformats.org/drawingml/2006/compatibility" xmlns:p14="http://schemas.microsoft.com/office/powerpoint/2010/main" xmlns:p15="http://schemas.microsoft.com/office/powerpoint/2012/main" xmlns:ahyp="http://schemas.microsoft.com/office/drawing/2018/hyperlinkcolor">
   <p:cSld>
     <p:spTree>
       <p:nvGrpSpPr>
-        <p:cNvPr id="1" name="Shape 129"/>
+        <p:cNvPr id="129" name="Shape 129"/>
         <p:cNvGrpSpPr/>
         <p:nvPr/>
       </p:nvGrpSpPr>
@@ -10152,10 +9922,8 @@
       </p:grpSpPr>
       <p:sp>
         <p:nvSpPr>
-          <p:cNvPr id="130" name="Google Shape;130;p7"/>
-          <p:cNvSpPr txBox="1">
-            <a:spLocks noGrp="1"/>
-          </p:cNvSpPr>
+          <p:cNvPr id="130" name="Google Shape;130;p21"/>
+          <p:cNvSpPr txBox="1"/>
           <p:nvPr>
             <p:ph type="title"/>
           </p:nvPr>
@@ -10174,12 +9942,12 @@
           </a:ln>
         </p:spPr>
         <p:txBody>
-          <a:bodyPr spcFirstLastPara="1" wrap="square" lIns="91425" tIns="91425" rIns="91425" bIns="91425" anchor="t" anchorCtr="0">
+          <a:bodyPr anchorCtr="0" anchor="t" bIns="91425" lIns="91425" spcFirstLastPara="1" rIns="91425" wrap="square" tIns="91425">
             <a:noAutofit/>
           </a:bodyPr>
           <a:lstStyle/>
           <a:p>
-            <a:pPr marL="0" lvl="0" indent="0" algn="l" rtl="0">
+            <a:pPr indent="0" lvl="0" marL="0" rtl="0" algn="l">
               <a:lnSpc>
                 <a:spcPct val="100000"/>
               </a:lnSpc>
@@ -10193,7 +9961,7 @@
               <a:buNone/>
             </a:pPr>
             <a:r>
-              <a:rPr lang="hu-HU"/>
+              <a:rPr lang="en-US"/>
               <a:t>Megközelítés – Saját megoldás</a:t>
             </a:r>
             <a:endParaRPr/>
@@ -10202,18 +9970,16 @@
       </p:sp>
       <p:sp>
         <p:nvSpPr>
-          <p:cNvPr id="131" name="Google Shape;131;p7"/>
-          <p:cNvSpPr txBox="1">
-            <a:spLocks noGrp="1"/>
-          </p:cNvSpPr>
+          <p:cNvPr id="131" name="Google Shape;131;p21"/>
+          <p:cNvSpPr txBox="1"/>
           <p:nvPr>
-            <p:ph type="subTitle" idx="1"/>
+            <p:ph idx="1" type="subTitle"/>
           </p:nvPr>
         </p:nvSpPr>
         <p:spPr>
           <a:xfrm>
-            <a:off x="1522850" y="1816950"/>
-            <a:ext cx="6918600" cy="2538900"/>
+            <a:off x="4029575" y="1816950"/>
+            <a:ext cx="4411800" cy="2538900"/>
           </a:xfrm>
           <a:prstGeom prst="rect">
             <a:avLst/>
@@ -10224,12 +9990,12 @@
           </a:ln>
         </p:spPr>
         <p:txBody>
-          <a:bodyPr spcFirstLastPara="1" wrap="square" lIns="91425" tIns="91425" rIns="91425" bIns="91425" anchor="t" anchorCtr="0">
+          <a:bodyPr anchorCtr="0" anchor="t" bIns="91425" lIns="91425" spcFirstLastPara="1" rIns="91425" wrap="square" tIns="91425">
             <a:noAutofit/>
           </a:bodyPr>
           <a:lstStyle/>
           <a:p>
-            <a:pPr marL="457200" lvl="0" indent="-317500" algn="l" rtl="0">
+            <a:pPr indent="-317500" lvl="0" marL="457200" rtl="0" algn="l">
               <a:lnSpc>
                 <a:spcPct val="100000"/>
               </a:lnSpc>
@@ -10240,12 +10006,204 @@
                 <a:spcPts val="0"/>
               </a:spcAft>
               <a:buSzPts val="1400"/>
-              <a:buNone/>
+              <a:buChar char="●"/>
             </a:pPr>
+            <a:r>
+              <a:rPr lang="en-US"/>
+              <a:t>Regressziós feladat</a:t>
+            </a:r>
+            <a:endParaRPr/>
+          </a:p>
+          <a:p>
+            <a:pPr indent="-317500" lvl="0" marL="457200" rtl="0" algn="l">
+              <a:lnSpc>
+                <a:spcPct val="100000"/>
+              </a:lnSpc>
+              <a:spcBef>
+                <a:spcPts val="0"/>
+              </a:spcBef>
+              <a:spcAft>
+                <a:spcPts val="0"/>
+              </a:spcAft>
+              <a:buSzPts val="1400"/>
+              <a:buChar char="●"/>
+            </a:pPr>
+            <a:r>
+              <a:rPr lang="en-US"/>
+              <a:t>3 rétegű CNN maxpool-okkal</a:t>
+            </a:r>
+            <a:endParaRPr/>
+          </a:p>
+          <a:p>
+            <a:pPr indent="-317500" lvl="0" marL="457200" rtl="0" algn="l">
+              <a:lnSpc>
+                <a:spcPct val="100000"/>
+              </a:lnSpc>
+              <a:spcBef>
+                <a:spcPts val="0"/>
+              </a:spcBef>
+              <a:spcAft>
+                <a:spcPts val="0"/>
+              </a:spcAft>
+              <a:buSzPts val="1400"/>
+              <a:buChar char="●"/>
+            </a:pPr>
+            <a:r>
+              <a:rPr lang="en-US"/>
+              <a:t>Vizsgáltam még:</a:t>
+            </a:r>
+            <a:endParaRPr/>
+          </a:p>
+          <a:p>
+            <a:pPr indent="-317500" lvl="1" marL="914400" rtl="0" algn="l">
+              <a:lnSpc>
+                <a:spcPct val="100000"/>
+              </a:lnSpc>
+              <a:spcBef>
+                <a:spcPts val="0"/>
+              </a:spcBef>
+              <a:spcAft>
+                <a:spcPts val="0"/>
+              </a:spcAft>
+              <a:buSzPts val="1400"/>
+              <a:buChar char="○"/>
+            </a:pPr>
+            <a:r>
+              <a:rPr lang="en-US"/>
+              <a:t>Tradicionális ML megoldások</a:t>
+            </a:r>
+            <a:endParaRPr/>
+          </a:p>
+          <a:p>
+            <a:pPr indent="-317500" lvl="1" marL="914400" rtl="0" algn="l">
+              <a:lnSpc>
+                <a:spcPct val="100000"/>
+              </a:lnSpc>
+              <a:spcBef>
+                <a:spcPts val="0"/>
+              </a:spcBef>
+              <a:spcAft>
+                <a:spcPts val="0"/>
+              </a:spcAft>
+              <a:buSzPts val="1400"/>
+              <a:buChar char="○"/>
+            </a:pPr>
+            <a:r>
+              <a:rPr lang="en-US"/>
+              <a:t>Egyszerű NN</a:t>
+            </a:r>
+            <a:endParaRPr/>
+          </a:p>
+          <a:p>
+            <a:pPr indent="-317500" lvl="1" marL="914400" rtl="0" algn="l">
+              <a:lnSpc>
+                <a:spcPct val="100000"/>
+              </a:lnSpc>
+              <a:spcBef>
+                <a:spcPts val="0"/>
+              </a:spcBef>
+              <a:spcAft>
+                <a:spcPts val="0"/>
+              </a:spcAft>
+              <a:buSzPts val="1400"/>
+              <a:buChar char="○"/>
+            </a:pPr>
+            <a:r>
+              <a:rPr lang="en-US"/>
+              <a:t>Klasszifikációs feladatként</a:t>
+            </a:r>
+            <a:endParaRPr/>
+          </a:p>
+          <a:p>
+            <a:pPr indent="-317500" lvl="0" marL="457200" rtl="0" algn="l">
+              <a:lnSpc>
+                <a:spcPct val="100000"/>
+              </a:lnSpc>
+              <a:spcBef>
+                <a:spcPts val="0"/>
+              </a:spcBef>
+              <a:spcAft>
+                <a:spcPts val="0"/>
+              </a:spcAft>
+              <a:buSzPts val="1400"/>
+              <a:buChar char="●"/>
+            </a:pPr>
+            <a:r>
+              <a:rPr lang="en-US"/>
+              <a:t>MSE</a:t>
+            </a:r>
+            <a:endParaRPr/>
+          </a:p>
+          <a:p>
+            <a:pPr indent="-317500" lvl="1" marL="914400" rtl="0" algn="l">
+              <a:lnSpc>
+                <a:spcPct val="100000"/>
+              </a:lnSpc>
+              <a:spcBef>
+                <a:spcPts val="0"/>
+              </a:spcBef>
+              <a:spcAft>
+                <a:spcPts val="0"/>
+              </a:spcAft>
+              <a:buSzPts val="1400"/>
+              <a:buChar char="○"/>
+            </a:pPr>
+            <a:r>
+              <a:rPr lang="en-US"/>
+              <a:t>~0.3 (+/-1 arc képenként)</a:t>
+            </a:r>
+            <a:endParaRPr/>
+          </a:p>
+          <a:p>
+            <a:pPr indent="-317500" lvl="0" marL="457200" rtl="0" algn="l">
+              <a:lnSpc>
+                <a:spcPct val="100000"/>
+              </a:lnSpc>
+              <a:spcBef>
+                <a:spcPts val="0"/>
+              </a:spcBef>
+              <a:spcAft>
+                <a:spcPts val="0"/>
+              </a:spcAft>
+              <a:buSzPts val="1400"/>
+              <a:buChar char="●"/>
+            </a:pPr>
+            <a:r>
+              <a:rPr lang="en-US"/>
+              <a:t>Arcszámlálásban ügyes, azok megtalálásában kevésbé</a:t>
+            </a:r>
             <a:endParaRPr/>
           </a:p>
         </p:txBody>
       </p:sp>
+      <p:pic>
+        <p:nvPicPr>
+          <p:cNvPr id="132" name="Google Shape;132;p21"/>
+          <p:cNvPicPr preferRelativeResize="0"/>
+          <p:nvPr/>
+        </p:nvPicPr>
+        <p:blipFill>
+          <a:blip r:embed="rId3">
+            <a:alphaModFix/>
+          </a:blip>
+          <a:stretch>
+            <a:fillRect/>
+          </a:stretch>
+        </p:blipFill>
+        <p:spPr>
+          <a:xfrm>
+            <a:off x="679225" y="1493075"/>
+            <a:ext cx="3132413" cy="2862775"/>
+          </a:xfrm>
+          <a:prstGeom prst="rect">
+            <a:avLst/>
+          </a:prstGeom>
+          <a:noFill/>
+          <a:ln>
+            <a:noFill/>
+          </a:ln>
+        </p:spPr>
+      </p:pic>
     </p:spTree>
   </p:cSld>
   <p:clrMapOvr>
@@ -10255,11 +10213,11 @@
 </file>
 
 <file path=ppt/slides/slide8.xml><?xml version="1.0" encoding="utf-8"?>
-<p:sld xmlns:a="http://schemas.openxmlformats.org/drawingml/2006/main" xmlns:r="http://schemas.openxmlformats.org/officeDocument/2006/relationships" xmlns:p="http://schemas.openxmlformats.org/presentationml/2006/main">
+<p:sld xmlns:a="http://schemas.openxmlformats.org/drawingml/2006/main" xmlns:r="http://schemas.openxmlformats.org/officeDocument/2006/relationships" xmlns:mc="http://schemas.openxmlformats.org/markup-compatibility/2006" xmlns:mv="urn:schemas-microsoft-com:mac:vml" xmlns:p="http://schemas.openxmlformats.org/presentationml/2006/main" xmlns:c="http://schemas.openxmlformats.org/drawingml/2006/chart" xmlns:dgm="http://schemas.openxmlformats.org/drawingml/2006/diagram" xmlns:o="urn:schemas-microsoft-com:office:office" xmlns:v="urn:schemas-microsoft-com:vml" xmlns:pvml="urn:schemas-microsoft-com:office:powerpoint" xmlns:com="http://schemas.openxmlformats.org/drawingml/2006/compatibility" xmlns:p14="http://schemas.microsoft.com/office/powerpoint/2010/main" xmlns:p15="http://schemas.microsoft.com/office/powerpoint/2012/main" xmlns:ahyp="http://schemas.microsoft.com/office/drawing/2018/hyperlinkcolor">
   <p:cSld>
     <p:spTree>
       <p:nvGrpSpPr>
-        <p:cNvPr id="1" name="Shape 135"/>
+        <p:cNvPr id="136" name="Shape 136"/>
         <p:cNvGrpSpPr/>
         <p:nvPr/>
       </p:nvGrpSpPr>
@@ -10273,10 +10231,8 @@
       </p:grpSpPr>
       <p:sp>
         <p:nvSpPr>
-          <p:cNvPr id="136" name="Google Shape;136;p8"/>
-          <p:cNvSpPr txBox="1">
-            <a:spLocks noGrp="1"/>
-          </p:cNvSpPr>
+          <p:cNvPr id="137" name="Google Shape;137;p22"/>
+          <p:cNvSpPr txBox="1"/>
           <p:nvPr>
             <p:ph type="title"/>
           </p:nvPr>
@@ -10295,12 +10251,12 @@
           </a:ln>
         </p:spPr>
         <p:txBody>
-          <a:bodyPr spcFirstLastPara="1" wrap="square" lIns="91425" tIns="91425" rIns="91425" bIns="91425" anchor="t" anchorCtr="0">
+          <a:bodyPr anchorCtr="0" anchor="t" bIns="91425" lIns="91425" spcFirstLastPara="1" rIns="91425" wrap="square" tIns="91425">
             <a:noAutofit/>
           </a:bodyPr>
           <a:lstStyle/>
           <a:p>
-            <a:pPr marL="0" lvl="0" indent="0" algn="l" rtl="0">
+            <a:pPr indent="0" lvl="0" marL="0" rtl="0" algn="l">
               <a:lnSpc>
                 <a:spcPct val="100000"/>
               </a:lnSpc>
@@ -10314,7 +10270,7 @@
               <a:buNone/>
             </a:pPr>
             <a:r>
-              <a:rPr lang="hu-HU"/>
+              <a:rPr lang="en-US"/>
               <a:t>GUI</a:t>
             </a:r>
             <a:endParaRPr/>
@@ -10323,7 +10279,7 @@
       </p:sp>
       <p:pic>
         <p:nvPicPr>
-          <p:cNvPr id="137" name="Google Shape;137;p8"/>
+          <p:cNvPr id="138" name="Google Shape;138;p22"/>
           <p:cNvPicPr preferRelativeResize="0"/>
           <p:nvPr/>
         </p:nvPicPr>
@@ -10331,7 +10287,7 @@
           <a:blip r:embed="rId3">
             <a:alphaModFix/>
           </a:blip>
-          <a:srcRect/>
+          <a:srcRect b="0" l="0" r="0" t="0"/>
           <a:stretch/>
         </p:blipFill>
         <p:spPr>
@@ -10357,11 +10313,11 @@
 </file>
 
 <file path=ppt/slides/slide9.xml><?xml version="1.0" encoding="utf-8"?>
-<p:sld xmlns:a="http://schemas.openxmlformats.org/drawingml/2006/main" xmlns:r="http://schemas.openxmlformats.org/officeDocument/2006/relationships" xmlns:p="http://schemas.openxmlformats.org/presentationml/2006/main">
+<p:sld xmlns:a="http://schemas.openxmlformats.org/drawingml/2006/main" xmlns:r="http://schemas.openxmlformats.org/officeDocument/2006/relationships" xmlns:mc="http://schemas.openxmlformats.org/markup-compatibility/2006" xmlns:mv="urn:schemas-microsoft-com:mac:vml" xmlns:p="http://schemas.openxmlformats.org/presentationml/2006/main" xmlns:c="http://schemas.openxmlformats.org/drawingml/2006/chart" xmlns:dgm="http://schemas.openxmlformats.org/drawingml/2006/diagram" xmlns:o="urn:schemas-microsoft-com:office:office" xmlns:v="urn:schemas-microsoft-com:vml" xmlns:pvml="urn:schemas-microsoft-com:office:powerpoint" xmlns:com="http://schemas.openxmlformats.org/drawingml/2006/compatibility" xmlns:p14="http://schemas.microsoft.com/office/powerpoint/2010/main" xmlns:p15="http://schemas.microsoft.com/office/powerpoint/2012/main" xmlns:ahyp="http://schemas.microsoft.com/office/drawing/2018/hyperlinkcolor">
   <p:cSld>
     <p:spTree>
       <p:nvGrpSpPr>
-        <p:cNvPr id="1" name="Shape 141"/>
+        <p:cNvPr id="142" name="Shape 142"/>
         <p:cNvGrpSpPr/>
         <p:nvPr/>
       </p:nvGrpSpPr>
@@ -10375,10 +10331,8 @@
       </p:grpSpPr>
       <p:sp>
         <p:nvSpPr>
-          <p:cNvPr id="142" name="Google Shape;142;g3ab975baed4_0_0"/>
-          <p:cNvSpPr txBox="1">
-            <a:spLocks noGrp="1"/>
-          </p:cNvSpPr>
+          <p:cNvPr id="143" name="Google Shape;143;p23"/>
+          <p:cNvSpPr txBox="1"/>
           <p:nvPr>
             <p:ph type="title"/>
           </p:nvPr>
@@ -10391,24 +10345,32 @@
           <a:prstGeom prst="rect">
             <a:avLst/>
           </a:prstGeom>
+          <a:noFill/>
+          <a:ln>
+            <a:noFill/>
+          </a:ln>
         </p:spPr>
         <p:txBody>
-          <a:bodyPr spcFirstLastPara="1" wrap="square" lIns="91425" tIns="91425" rIns="91425" bIns="91425" anchor="t" anchorCtr="0">
+          <a:bodyPr anchorCtr="0" anchor="t" bIns="91425" lIns="91425" spcFirstLastPara="1" rIns="91425" wrap="square" tIns="91425">
             <a:noAutofit/>
           </a:bodyPr>
           <a:lstStyle/>
           <a:p>
-            <a:pPr marL="0" lvl="0" indent="0" algn="ctr" rtl="0">
-              <a:spcBef>
-                <a:spcPts val="0"/>
-              </a:spcBef>
-              <a:spcAft>
-                <a:spcPts val="0"/>
-              </a:spcAft>
+            <a:pPr indent="0" lvl="0" marL="0" rtl="0" algn="ctr">
+              <a:lnSpc>
+                <a:spcPct val="100000"/>
+              </a:lnSpc>
+              <a:spcBef>
+                <a:spcPts val="0"/>
+              </a:spcBef>
+              <a:spcAft>
+                <a:spcPts val="0"/>
+              </a:spcAft>
+              <a:buSzPts val="3200"/>
               <a:buNone/>
             </a:pPr>
             <a:r>
-              <a:rPr lang="hu-HU" sz="3800"/>
+              <a:rPr lang="en-US" sz="3800"/>
               <a:t>Algoritmusok összehasonlítása GUI</a:t>
             </a:r>
             <a:endParaRPr sz="3800"/>
@@ -10417,17 +10379,16 @@
       </p:sp>
       <p:pic>
         <p:nvPicPr>
-          <p:cNvPr id="143" name="Google Shape;143;g3ab975baed4_0_0"/>
+          <p:cNvPr id="144" name="Google Shape;144;p23"/>
           <p:cNvPicPr preferRelativeResize="0"/>
           <p:nvPr/>
         </p:nvPicPr>
-        <p:blipFill>
+        <p:blipFill rotWithShape="1">
           <a:blip r:embed="rId3">
             <a:alphaModFix/>
           </a:blip>
-          <a:stretch>
-            <a:fillRect/>
-          </a:stretch>
+          <a:srcRect b="0" l="0" r="0" t="0"/>
+          <a:stretch/>
         </p:blipFill>
         <p:spPr>
           <a:xfrm>
@@ -10452,7 +10413,286 @@
 </file>
 
 <file path=ppt/theme/theme1.xml><?xml version="1.0" encoding="utf-8"?>
-<a:theme xmlns:a="http://schemas.openxmlformats.org/drawingml/2006/main" name="My Presentation Template">
+<a:theme xmlns:a="http://schemas.openxmlformats.org/drawingml/2006/main" xmlns:r="http://schemas.openxmlformats.org/officeDocument/2006/relationships">
+  <a:themeElements>
+    <a:clrScheme name="Default">
+      <a:dk1>
+        <a:srgbClr val="000000"/>
+      </a:dk1>
+      <a:lt1>
+        <a:srgbClr val="FFFFFF"/>
+      </a:lt1>
+      <a:dk2>
+        <a:srgbClr val="158158"/>
+      </a:dk2>
+      <a:lt2>
+        <a:srgbClr val="F3F3F3"/>
+      </a:lt2>
+      <a:accent1>
+        <a:srgbClr val="058DC7"/>
+      </a:accent1>
+      <a:accent2>
+        <a:srgbClr val="50B432"/>
+      </a:accent2>
+      <a:accent3>
+        <a:srgbClr val="ED561B"/>
+      </a:accent3>
+      <a:accent4>
+        <a:srgbClr val="EDEF00"/>
+      </a:accent4>
+      <a:accent5>
+        <a:srgbClr val="24CBE5"/>
+      </a:accent5>
+      <a:accent6>
+        <a:srgbClr val="64E572"/>
+      </a:accent6>
+      <a:hlink>
+        <a:srgbClr val="2200CC"/>
+      </a:hlink>
+      <a:folHlink>
+        <a:srgbClr val="551A8B"/>
+      </a:folHlink>
+    </a:clrScheme>
+    <a:fontScheme name="Office">
+      <a:majorFont>
+        <a:latin typeface="Arial"/>
+        <a:ea typeface=""/>
+        <a:cs typeface=""/>
+        <a:font script="Jpan" typeface="ＭＳ Ｐゴシック"/>
+        <a:font script="Hang" typeface="맑은 고딕"/>
+        <a:font script="Hans" typeface="宋体"/>
+        <a:font script="Hant" typeface="新細明體"/>
+        <a:font script="Arab" typeface="Times New Roman"/>
+        <a:font script="Hebr" typeface="Times New Roman"/>
+        <a:font script="Thai" typeface="Angsana New"/>
+        <a:font script="Ethi" typeface="Nyala"/>
+        <a:font script="Beng" typeface="Vrinda"/>
+        <a:font script="Gujr" typeface="Shruti"/>
+        <a:font script="Khmr" typeface="MoolBoran"/>
+        <a:font script="Knda" typeface="Tunga"/>
+        <a:font script="Guru" typeface="Raavi"/>
+        <a:font script="Cans" typeface="Euphemia"/>
+        <a:font script="Cher" typeface="Plantagenet Cherokee"/>
+        <a:font script="Yiii" typeface="Microsoft Yi Baiti"/>
+        <a:font script="Tibt" typeface="Microsoft Himalaya"/>
+        <a:font script="Thaa" typeface="MV Boli"/>
+        <a:font script="Deva" typeface="Mangal"/>
+        <a:font script="Telu" typeface="Gautami"/>
+        <a:font script="Taml" typeface="Latha"/>
+        <a:font script="Syrc" typeface="Estrangelo Edessa"/>
+        <a:font script="Orya" typeface="Kalinga"/>
+        <a:font script="Mlym" typeface="Kartika"/>
+        <a:font script="Laoo" typeface="DokChampa"/>
+        <a:font script="Sinh" typeface="Iskoola Pota"/>
+        <a:font script="Mong" typeface="Mongolian Baiti"/>
+        <a:font script="Viet" typeface="Times New Roman"/>
+        <a:font script="Uigh" typeface="Microsoft Uighur"/>
+        <a:font script="Geor" typeface="Sylfaen"/>
+      </a:majorFont>
+      <a:minorFont>
+        <a:latin typeface="Arial"/>
+        <a:ea typeface=""/>
+        <a:cs typeface=""/>
+        <a:font script="Jpan" typeface="ＭＳ Ｐゴシック"/>
+        <a:font script="Hang" typeface="맑은 고딕"/>
+        <a:font script="Hans" typeface="宋体"/>
+        <a:font script="Hant" typeface="新細明體"/>
+        <a:font script="Arab" typeface="Arial"/>
+        <a:font script="Hebr" typeface="Arial"/>
+        <a:font script="Thai" typeface="Cordia New"/>
+        <a:font script="Ethi" typeface="Nyala"/>
+        <a:font script="Beng" typeface="Vrinda"/>
+        <a:font script="Gujr" typeface="Shruti"/>
+        <a:font script="Khmr" typeface="DaunPenh"/>
+        <a:font script="Knda" typeface="Tunga"/>
+        <a:font script="Guru" typeface="Raavi"/>
+        <a:font script="Cans" typeface="Euphemia"/>
+        <a:font script="Cher" typeface="Plantagenet Cherokee"/>
+        <a:font script="Yiii" typeface="Microsoft Yi Baiti"/>
+        <a:font script="Tibt" typeface="Microsoft Himalaya"/>
+        <a:font script="Thaa" typeface="MV Boli"/>
+        <a:font script="Deva" typeface="Mangal"/>
+        <a:font script="Telu" typeface="Gautami"/>
+        <a:font script="Taml" typeface="Latha"/>
+        <a:font script="Syrc" typeface="Estrangelo Edessa"/>
+        <a:font script="Orya" typeface="Kalinga"/>
+        <a:font script="Mlym" typeface="Kartika"/>
+        <a:font script="Laoo" typeface="DokChampa"/>
+        <a:font script="Sinh" typeface="Iskoola Pota"/>
+        <a:font script="Mong" typeface="Mongolian Baiti"/>
+        <a:font script="Viet" typeface="Arial"/>
+        <a:font script="Uigh" typeface="Microsoft Uighur"/>
+        <a:font script="Geor" typeface="Sylfaen"/>
+      </a:minorFont>
+    </a:fontScheme>
+    <a:fmtScheme name="Office">
+      <a:fillStyleLst>
+        <a:solidFill>
+          <a:schemeClr val="phClr"/>
+        </a:solidFill>
+        <a:gradFill rotWithShape="1">
+          <a:gsLst>
+            <a:gs pos="0">
+              <a:schemeClr val="phClr">
+                <a:tint val="50000"/>
+                <a:satMod val="300000"/>
+              </a:schemeClr>
+            </a:gs>
+            <a:gs pos="35000">
+              <a:schemeClr val="phClr">
+                <a:tint val="37000"/>
+                <a:satMod val="300000"/>
+              </a:schemeClr>
+            </a:gs>
+            <a:gs pos="100000">
+              <a:schemeClr val="phClr">
+                <a:tint val="15000"/>
+                <a:satMod val="350000"/>
+              </a:schemeClr>
+            </a:gs>
+          </a:gsLst>
+          <a:lin ang="16200000" scaled="1"/>
+        </a:gradFill>
+        <a:gradFill rotWithShape="1">
+          <a:gsLst>
+            <a:gs pos="0">
+              <a:schemeClr val="phClr">
+                <a:tint val="100000"/>
+                <a:shade val="100000"/>
+                <a:satMod val="130000"/>
+              </a:schemeClr>
+            </a:gs>
+            <a:gs pos="100000">
+              <a:schemeClr val="phClr">
+                <a:tint val="50000"/>
+                <a:shade val="100000"/>
+                <a:satMod val="350000"/>
+              </a:schemeClr>
+            </a:gs>
+          </a:gsLst>
+          <a:lin ang="16200000" scaled="0"/>
+        </a:gradFill>
+      </a:fillStyleLst>
+      <a:lnStyleLst>
+        <a:ln w="9525" cap="flat" cmpd="sng" algn="ctr">
+          <a:solidFill>
+            <a:schemeClr val="phClr">
+              <a:shade val="95000"/>
+              <a:satMod val="105000"/>
+            </a:schemeClr>
+          </a:solidFill>
+          <a:prstDash val="solid"/>
+        </a:ln>
+        <a:ln w="25400" cap="flat" cmpd="sng" algn="ctr">
+          <a:solidFill>
+            <a:schemeClr val="phClr"/>
+          </a:solidFill>
+          <a:prstDash val="solid"/>
+        </a:ln>
+        <a:ln w="38100" cap="flat" cmpd="sng" algn="ctr">
+          <a:solidFill>
+            <a:schemeClr val="phClr"/>
+          </a:solidFill>
+          <a:prstDash val="solid"/>
+        </a:ln>
+      </a:lnStyleLst>
+      <a:effectStyleLst>
+        <a:effectStyle>
+          <a:effectLst>
+            <a:outerShdw blurRad="40000" dist="20000" dir="5400000" rotWithShape="0">
+              <a:srgbClr val="000000">
+                <a:alpha val="38000"/>
+              </a:srgbClr>
+            </a:outerShdw>
+          </a:effectLst>
+        </a:effectStyle>
+        <a:effectStyle>
+          <a:effectLst>
+            <a:outerShdw blurRad="40000" dist="23000" dir="5400000" rotWithShape="0">
+              <a:srgbClr val="000000">
+                <a:alpha val="35000"/>
+              </a:srgbClr>
+            </a:outerShdw>
+          </a:effectLst>
+        </a:effectStyle>
+        <a:effectStyle>
+          <a:effectLst>
+            <a:outerShdw blurRad="40000" dist="23000" dir="5400000" rotWithShape="0">
+              <a:srgbClr val="000000">
+                <a:alpha val="35000"/>
+              </a:srgbClr>
+            </a:outerShdw>
+          </a:effectLst>
+          <a:scene3d>
+            <a:camera prst="orthographicFront">
+              <a:rot lat="0" lon="0" rev="0"/>
+            </a:camera>
+            <a:lightRig rig="threePt" dir="t">
+              <a:rot lat="0" lon="0" rev="1200000"/>
+            </a:lightRig>
+          </a:scene3d>
+          <a:sp3d>
+            <a:bevelT w="63500" h="25400"/>
+          </a:sp3d>
+        </a:effectStyle>
+      </a:effectStyleLst>
+      <a:bgFillStyleLst>
+        <a:solidFill>
+          <a:schemeClr val="phClr"/>
+        </a:solidFill>
+        <a:gradFill rotWithShape="1">
+          <a:gsLst>
+            <a:gs pos="0">
+              <a:schemeClr val="phClr">
+                <a:tint val="40000"/>
+                <a:satMod val="350000"/>
+              </a:schemeClr>
+            </a:gs>
+            <a:gs pos="40000">
+              <a:schemeClr val="phClr">
+                <a:tint val="45000"/>
+                <a:shade val="99000"/>
+                <a:satMod val="350000"/>
+              </a:schemeClr>
+            </a:gs>
+            <a:gs pos="100000">
+              <a:schemeClr val="phClr">
+                <a:shade val="20000"/>
+                <a:satMod val="255000"/>
+              </a:schemeClr>
+            </a:gs>
+          </a:gsLst>
+          <a:path path="circle">
+            <a:fillToRect l="50000" t="-80000" r="50000" b="180000"/>
+          </a:path>
+        </a:gradFill>
+        <a:gradFill rotWithShape="1">
+          <a:gsLst>
+            <a:gs pos="0">
+              <a:schemeClr val="phClr">
+                <a:tint val="80000"/>
+                <a:satMod val="300000"/>
+              </a:schemeClr>
+            </a:gs>
+            <a:gs pos="100000">
+              <a:schemeClr val="phClr">
+                <a:shade val="30000"/>
+                <a:satMod val="200000"/>
+              </a:schemeClr>
+            </a:gs>
+          </a:gsLst>
+          <a:path path="circle">
+            <a:fillToRect l="50000" t="50000" r="50000" b="50000"/>
+          </a:path>
+        </a:gradFill>
+      </a:bgFillStyleLst>
+    </a:fmtScheme>
+  </a:themeElements>
+</a:theme>
+</file>
+
+<file path=ppt/theme/theme2.xml><?xml version="1.0" encoding="utf-8"?>
+<a:theme xmlns:a="http://schemas.openxmlformats.org/drawingml/2006/main" xmlns:r="http://schemas.openxmlformats.org/officeDocument/2006/relationships" name="My Presentation Template">
   <a:themeElements>
     <a:clrScheme name="Simple Light">
       <a:dk1>
@@ -10727,288 +10967,5 @@
       </a:bgFillStyleLst>
     </a:fmtScheme>
   </a:themeElements>
-  <a:objectDefaults/>
-  <a:extraClrSchemeLst/>
-</a:theme>
-</file>
-
-<file path=ppt/theme/theme2.xml><?xml version="1.0" encoding="utf-8"?>
-<a:theme xmlns:a="http://schemas.openxmlformats.org/drawingml/2006/main">
-  <a:themeElements>
-    <a:clrScheme name="Default">
-      <a:dk1>
-        <a:srgbClr val="000000"/>
-      </a:dk1>
-      <a:lt1>
-        <a:srgbClr val="FFFFFF"/>
-      </a:lt1>
-      <a:dk2>
-        <a:srgbClr val="158158"/>
-      </a:dk2>
-      <a:lt2>
-        <a:srgbClr val="F3F3F3"/>
-      </a:lt2>
-      <a:accent1>
-        <a:srgbClr val="058DC7"/>
-      </a:accent1>
-      <a:accent2>
-        <a:srgbClr val="50B432"/>
-      </a:accent2>
-      <a:accent3>
-        <a:srgbClr val="ED561B"/>
-      </a:accent3>
-      <a:accent4>
-        <a:srgbClr val="EDEF00"/>
-      </a:accent4>
-      <a:accent5>
-        <a:srgbClr val="24CBE5"/>
-      </a:accent5>
-      <a:accent6>
-        <a:srgbClr val="64E572"/>
-      </a:accent6>
-      <a:hlink>
-        <a:srgbClr val="2200CC"/>
-      </a:hlink>
-      <a:folHlink>
-        <a:srgbClr val="551A8B"/>
-      </a:folHlink>
-    </a:clrScheme>
-    <a:fontScheme name="Office">
-      <a:majorFont>
-        <a:latin typeface="Arial"/>
-        <a:ea typeface=""/>
-        <a:cs typeface=""/>
-        <a:font script="Jpan" typeface="ＭＳ Ｐゴシック"/>
-        <a:font script="Hang" typeface="맑은 고딕"/>
-        <a:font script="Hans" typeface="宋体"/>
-        <a:font script="Hant" typeface="新細明體"/>
-        <a:font script="Arab" typeface="Times New Roman"/>
-        <a:font script="Hebr" typeface="Times New Roman"/>
-        <a:font script="Thai" typeface="Angsana New"/>
-        <a:font script="Ethi" typeface="Nyala"/>
-        <a:font script="Beng" typeface="Vrinda"/>
-        <a:font script="Gujr" typeface="Shruti"/>
-        <a:font script="Khmr" typeface="MoolBoran"/>
-        <a:font script="Knda" typeface="Tunga"/>
-        <a:font script="Guru" typeface="Raavi"/>
-        <a:font script="Cans" typeface="Euphemia"/>
-        <a:font script="Cher" typeface="Plantagenet Cherokee"/>
-        <a:font script="Yiii" typeface="Microsoft Yi Baiti"/>
-        <a:font script="Tibt" typeface="Microsoft Himalaya"/>
-        <a:font script="Thaa" typeface="MV Boli"/>
-        <a:font script="Deva" typeface="Mangal"/>
-        <a:font script="Telu" typeface="Gautami"/>
-        <a:font script="Taml" typeface="Latha"/>
-        <a:font script="Syrc" typeface="Estrangelo Edessa"/>
-        <a:font script="Orya" typeface="Kalinga"/>
-        <a:font script="Mlym" typeface="Kartika"/>
-        <a:font script="Laoo" typeface="DokChampa"/>
-        <a:font script="Sinh" typeface="Iskoola Pota"/>
-        <a:font script="Mong" typeface="Mongolian Baiti"/>
-        <a:font script="Viet" typeface="Times New Roman"/>
-        <a:font script="Uigh" typeface="Microsoft Uighur"/>
-        <a:font script="Geor" typeface="Sylfaen"/>
-      </a:majorFont>
-      <a:minorFont>
-        <a:latin typeface="Arial"/>
-        <a:ea typeface=""/>
-        <a:cs typeface=""/>
-        <a:font script="Jpan" typeface="ＭＳ Ｐゴシック"/>
-        <a:font script="Hang" typeface="맑은 고딕"/>
-        <a:font script="Hans" typeface="宋体"/>
-        <a:font script="Hant" typeface="新細明體"/>
-        <a:font script="Arab" typeface="Arial"/>
-        <a:font script="Hebr" typeface="Arial"/>
-        <a:font script="Thai" typeface="Cordia New"/>
-        <a:font script="Ethi" typeface="Nyala"/>
-        <a:font script="Beng" typeface="Vrinda"/>
-        <a:font script="Gujr" typeface="Shruti"/>
-        <a:font script="Khmr" typeface="DaunPenh"/>
-        <a:font script="Knda" typeface="Tunga"/>
-        <a:font script="Guru" typeface="Raavi"/>
-        <a:font script="Cans" typeface="Euphemia"/>
-        <a:font script="Cher" typeface="Plantagenet Cherokee"/>
-        <a:font script="Yiii" typeface="Microsoft Yi Baiti"/>
-        <a:font script="Tibt" typeface="Microsoft Himalaya"/>
-        <a:font script="Thaa" typeface="MV Boli"/>
-        <a:font script="Deva" typeface="Mangal"/>
-        <a:font script="Telu" typeface="Gautami"/>
-        <a:font script="Taml" typeface="Latha"/>
-        <a:font script="Syrc" typeface="Estrangelo Edessa"/>
-        <a:font script="Orya" typeface="Kalinga"/>
-        <a:font script="Mlym" typeface="Kartika"/>
-        <a:font script="Laoo" typeface="DokChampa"/>
-        <a:font script="Sinh" typeface="Iskoola Pota"/>
-        <a:font script="Mong" typeface="Mongolian Baiti"/>
-        <a:font script="Viet" typeface="Arial"/>
-        <a:font script="Uigh" typeface="Microsoft Uighur"/>
-        <a:font script="Geor" typeface="Sylfaen"/>
-      </a:minorFont>
-    </a:fontScheme>
-    <a:fmtScheme name="Office">
-      <a:fillStyleLst>
-        <a:solidFill>
-          <a:schemeClr val="phClr"/>
-        </a:solidFill>
-        <a:gradFill rotWithShape="1">
-          <a:gsLst>
-            <a:gs pos="0">
-              <a:schemeClr val="phClr">
-                <a:tint val="50000"/>
-                <a:satMod val="300000"/>
-              </a:schemeClr>
-            </a:gs>
-            <a:gs pos="35000">
-              <a:schemeClr val="phClr">
-                <a:tint val="37000"/>
-                <a:satMod val="300000"/>
-              </a:schemeClr>
-            </a:gs>
-            <a:gs pos="100000">
-              <a:schemeClr val="phClr">
-                <a:tint val="15000"/>
-                <a:satMod val="350000"/>
-              </a:schemeClr>
-            </a:gs>
-          </a:gsLst>
-          <a:lin ang="16200000" scaled="1"/>
-        </a:gradFill>
-        <a:gradFill rotWithShape="1">
-          <a:gsLst>
-            <a:gs pos="0">
-              <a:schemeClr val="phClr">
-                <a:tint val="100000"/>
-                <a:shade val="100000"/>
-                <a:satMod val="130000"/>
-              </a:schemeClr>
-            </a:gs>
-            <a:gs pos="100000">
-              <a:schemeClr val="phClr">
-                <a:tint val="50000"/>
-                <a:shade val="100000"/>
-                <a:satMod val="350000"/>
-              </a:schemeClr>
-            </a:gs>
-          </a:gsLst>
-          <a:lin ang="16200000" scaled="0"/>
-        </a:gradFill>
-      </a:fillStyleLst>
-      <a:lnStyleLst>
-        <a:ln w="9525" cap="flat" cmpd="sng" algn="ctr">
-          <a:solidFill>
-            <a:schemeClr val="phClr">
-              <a:shade val="95000"/>
-              <a:satMod val="105000"/>
-            </a:schemeClr>
-          </a:solidFill>
-          <a:prstDash val="solid"/>
-        </a:ln>
-        <a:ln w="25400" cap="flat" cmpd="sng" algn="ctr">
-          <a:solidFill>
-            <a:schemeClr val="phClr"/>
-          </a:solidFill>
-          <a:prstDash val="solid"/>
-        </a:ln>
-        <a:ln w="38100" cap="flat" cmpd="sng" algn="ctr">
-          <a:solidFill>
-            <a:schemeClr val="phClr"/>
-          </a:solidFill>
-          <a:prstDash val="solid"/>
-        </a:ln>
-      </a:lnStyleLst>
-      <a:effectStyleLst>
-        <a:effectStyle>
-          <a:effectLst>
-            <a:outerShdw blurRad="40000" dist="20000" dir="5400000" rotWithShape="0">
-              <a:srgbClr val="000000">
-                <a:alpha val="38000"/>
-              </a:srgbClr>
-            </a:outerShdw>
-          </a:effectLst>
-        </a:effectStyle>
-        <a:effectStyle>
-          <a:effectLst>
-            <a:outerShdw blurRad="40000" dist="23000" dir="5400000" rotWithShape="0">
-              <a:srgbClr val="000000">
-                <a:alpha val="35000"/>
-              </a:srgbClr>
-            </a:outerShdw>
-          </a:effectLst>
-        </a:effectStyle>
-        <a:effectStyle>
-          <a:effectLst>
-            <a:outerShdw blurRad="40000" dist="23000" dir="5400000" rotWithShape="0">
-              <a:srgbClr val="000000">
-                <a:alpha val="35000"/>
-              </a:srgbClr>
-            </a:outerShdw>
-          </a:effectLst>
-          <a:scene3d>
-            <a:camera prst="orthographicFront">
-              <a:rot lat="0" lon="0" rev="0"/>
-            </a:camera>
-            <a:lightRig rig="threePt" dir="t">
-              <a:rot lat="0" lon="0" rev="1200000"/>
-            </a:lightRig>
-          </a:scene3d>
-          <a:sp3d>
-            <a:bevelT w="63500" h="25400"/>
-          </a:sp3d>
-        </a:effectStyle>
-      </a:effectStyleLst>
-      <a:bgFillStyleLst>
-        <a:solidFill>
-          <a:schemeClr val="phClr"/>
-        </a:solidFill>
-        <a:gradFill rotWithShape="1">
-          <a:gsLst>
-            <a:gs pos="0">
-              <a:schemeClr val="phClr">
-                <a:tint val="40000"/>
-                <a:satMod val="350000"/>
-              </a:schemeClr>
-            </a:gs>
-            <a:gs pos="40000">
-              <a:schemeClr val="phClr">
-                <a:tint val="45000"/>
-                <a:shade val="99000"/>
-                <a:satMod val="350000"/>
-              </a:schemeClr>
-            </a:gs>
-            <a:gs pos="100000">
-              <a:schemeClr val="phClr">
-                <a:shade val="20000"/>
-                <a:satMod val="255000"/>
-              </a:schemeClr>
-            </a:gs>
-          </a:gsLst>
-          <a:path path="circle">
-            <a:fillToRect l="50000" t="-80000" r="50000" b="180000"/>
-          </a:path>
-        </a:gradFill>
-        <a:gradFill rotWithShape="1">
-          <a:gsLst>
-            <a:gs pos="0">
-              <a:schemeClr val="phClr">
-                <a:tint val="80000"/>
-                <a:satMod val="300000"/>
-              </a:schemeClr>
-            </a:gs>
-            <a:gs pos="100000">
-              <a:schemeClr val="phClr">
-                <a:shade val="30000"/>
-                <a:satMod val="200000"/>
-              </a:schemeClr>
-            </a:gs>
-          </a:gsLst>
-          <a:path path="circle">
-            <a:fillToRect l="50000" t="50000" r="50000" b="50000"/>
-          </a:path>
-        </a:gradFill>
-      </a:bgFillStyleLst>
-    </a:fmtScheme>
-  </a:themeElements>
-  <a:objectDefaults/>
-  <a:extraClrSchemeLst/>
 </a:theme>
 </file>
--- a/Kepfeldolgozas_arcdetektalas_2025.pptx
+++ b/Kepfeldolgozas_arcdetektalas_2025.pptx
@@ -1,42 +1,41 @@
 
 <file path=ppt/presentation.xml><?xml version="1.0" encoding="utf-8"?>
-<p:presentation xmlns:a="http://schemas.openxmlformats.org/drawingml/2006/main" xmlns:r="http://schemas.openxmlformats.org/officeDocument/2006/relationships" xmlns:mc="http://schemas.openxmlformats.org/markup-compatibility/2006" xmlns:mv="urn:schemas-microsoft-com:mac:vml" xmlns:p="http://schemas.openxmlformats.org/presentationml/2006/main" xmlns:c="http://schemas.openxmlformats.org/drawingml/2006/chart" xmlns:dgm="http://schemas.openxmlformats.org/drawingml/2006/diagram" xmlns:o="urn:schemas-microsoft-com:office:office" xmlns:v="urn:schemas-microsoft-com:vml" xmlns:pvml="urn:schemas-microsoft-com:office:powerpoint" xmlns:com="http://schemas.openxmlformats.org/drawingml/2006/compatibility" xmlns:p14="http://schemas.microsoft.com/office/powerpoint/2010/main" xmlns:p15="http://schemas.microsoft.com/office/powerpoint/2012/main" xmlns:ahyp="http://schemas.microsoft.com/office/drawing/2018/hyperlinkcolor" autoCompressPictures="0" embedTrueTypeFonts="1" strictFirstAndLastChars="0" saveSubsetFonts="1">
+<p:presentation xmlns:a="http://schemas.openxmlformats.org/drawingml/2006/main" xmlns:r="http://schemas.openxmlformats.org/officeDocument/2006/relationships" xmlns:p="http://schemas.openxmlformats.org/presentationml/2006/main" strictFirstAndLastChars="0" embedTrueTypeFonts="1" saveSubsetFonts="1" autoCompressPictures="0">
   <p:sldMasterIdLst>
-    <p:sldMasterId id="2147483661" r:id="rId4"/>
+    <p:sldMasterId id="2147483661" r:id="rId1"/>
   </p:sldMasterIdLst>
   <p:notesMasterIdLst>
-    <p:notesMasterId r:id="rId5"/>
+    <p:notesMasterId r:id="rId12"/>
   </p:notesMasterIdLst>
   <p:sldIdLst>
-    <p:sldId id="256" r:id="rId6"/>
-    <p:sldId id="257" r:id="rId7"/>
-    <p:sldId id="258" r:id="rId8"/>
-    <p:sldId id="259" r:id="rId9"/>
-    <p:sldId id="260" r:id="rId10"/>
-    <p:sldId id="261" r:id="rId11"/>
-    <p:sldId id="262" r:id="rId12"/>
-    <p:sldId id="263" r:id="rId13"/>
-    <p:sldId id="264" r:id="rId14"/>
-    <p:sldId id="265" r:id="rId15"/>
-    <p:sldId id="266" r:id="rId16"/>
+    <p:sldId id="256" r:id="rId2"/>
+    <p:sldId id="257" r:id="rId3"/>
+    <p:sldId id="259" r:id="rId4"/>
+    <p:sldId id="260" r:id="rId5"/>
+    <p:sldId id="261" r:id="rId6"/>
+    <p:sldId id="262" r:id="rId7"/>
+    <p:sldId id="263" r:id="rId8"/>
+    <p:sldId id="264" r:id="rId9"/>
+    <p:sldId id="265" r:id="rId10"/>
+    <p:sldId id="266" r:id="rId11"/>
   </p:sldIdLst>
-  <p:sldSz cy="5143500" cx="9144000"/>
+  <p:sldSz cx="9144000" cy="5143500" type="screen16x9"/>
   <p:notesSz cx="6858000" cy="9144000"/>
   <p:embeddedFontLst>
     <p:embeddedFont>
-      <p:font typeface="VT323"/>
-      <p:regular r:id="rId17"/>
+      <p:font typeface="VT323" panose="020B0604020202020204" charset="-18"/>
+      <p:regular r:id="rId13"/>
     </p:embeddedFont>
     <p:embeddedFont>
-      <p:font typeface="Roboto Mono"/>
-      <p:regular r:id="rId18"/>
-      <p:bold r:id="rId19"/>
-      <p:italic r:id="rId20"/>
-      <p:boldItalic r:id="rId21"/>
+      <p:font typeface="Roboto Mono" panose="020B0604020202020204" charset="0"/>
+      <p:regular r:id="rId14"/>
+      <p:bold r:id="rId15"/>
+      <p:italic r:id="rId16"/>
+      <p:boldItalic r:id="rId17"/>
     </p:embeddedFont>
   </p:embeddedFontLst>
   <p:defaultTextStyle>
-    <a:defPPr lvl="0" marR="0" rtl="0" algn="l">
+    <a:defPPr marR="0" lvl="0" algn="l" rtl="0">
       <a:lnSpc>
         <a:spcPct val="100000"/>
       </a:lnSpc>
@@ -47,7 +46,7 @@
         <a:spcPts val="0"/>
       </a:spcAft>
     </a:defPPr>
-    <a:lvl1pPr lvl="0" marR="0" rtl="0" algn="l">
+    <a:lvl1pPr marR="0" lvl="0" algn="l" rtl="0">
       <a:lnSpc>
         <a:spcPct val="100000"/>
       </a:lnSpc>
@@ -61,7 +60,7 @@
         <a:srgbClr val="000000"/>
       </a:buClr>
       <a:buFont typeface="Arial"/>
-      <a:defRPr b="0" i="0" sz="1400" u="none" cap="none" strike="noStrike">
+      <a:defRPr sz="1400" b="0" i="0" u="none" strike="noStrike" cap="none">
         <a:solidFill>
           <a:srgbClr val="000000"/>
         </a:solidFill>
@@ -71,7 +70,7 @@
         <a:sym typeface="Arial"/>
       </a:defRPr>
     </a:lvl1pPr>
-    <a:lvl2pPr lvl="1" marR="0" rtl="0" algn="l">
+    <a:lvl2pPr marR="0" lvl="1" algn="l" rtl="0">
       <a:lnSpc>
         <a:spcPct val="100000"/>
       </a:lnSpc>
@@ -85,7 +84,7 @@
         <a:srgbClr val="000000"/>
       </a:buClr>
       <a:buFont typeface="Arial"/>
-      <a:defRPr b="0" i="0" sz="1400" u="none" cap="none" strike="noStrike">
+      <a:defRPr sz="1400" b="0" i="0" u="none" strike="noStrike" cap="none">
         <a:solidFill>
           <a:srgbClr val="000000"/>
         </a:solidFill>
@@ -95,7 +94,7 @@
         <a:sym typeface="Arial"/>
       </a:defRPr>
     </a:lvl2pPr>
-    <a:lvl3pPr lvl="2" marR="0" rtl="0" algn="l">
+    <a:lvl3pPr marR="0" lvl="2" algn="l" rtl="0">
       <a:lnSpc>
         <a:spcPct val="100000"/>
       </a:lnSpc>
@@ -109,7 +108,7 @@
         <a:srgbClr val="000000"/>
       </a:buClr>
       <a:buFont typeface="Arial"/>
-      <a:defRPr b="0" i="0" sz="1400" u="none" cap="none" strike="noStrike">
+      <a:defRPr sz="1400" b="0" i="0" u="none" strike="noStrike" cap="none">
         <a:solidFill>
           <a:srgbClr val="000000"/>
         </a:solidFill>
@@ -119,7 +118,7 @@
         <a:sym typeface="Arial"/>
       </a:defRPr>
     </a:lvl3pPr>
-    <a:lvl4pPr lvl="3" marR="0" rtl="0" algn="l">
+    <a:lvl4pPr marR="0" lvl="3" algn="l" rtl="0">
       <a:lnSpc>
         <a:spcPct val="100000"/>
       </a:lnSpc>
@@ -133,7 +132,7 @@
         <a:srgbClr val="000000"/>
       </a:buClr>
       <a:buFont typeface="Arial"/>
-      <a:defRPr b="0" i="0" sz="1400" u="none" cap="none" strike="noStrike">
+      <a:defRPr sz="1400" b="0" i="0" u="none" strike="noStrike" cap="none">
         <a:solidFill>
           <a:srgbClr val="000000"/>
         </a:solidFill>
@@ -143,7 +142,7 @@
         <a:sym typeface="Arial"/>
       </a:defRPr>
     </a:lvl4pPr>
-    <a:lvl5pPr lvl="4" marR="0" rtl="0" algn="l">
+    <a:lvl5pPr marR="0" lvl="4" algn="l" rtl="0">
       <a:lnSpc>
         <a:spcPct val="100000"/>
       </a:lnSpc>
@@ -157,7 +156,7 @@
         <a:srgbClr val="000000"/>
       </a:buClr>
       <a:buFont typeface="Arial"/>
-      <a:defRPr b="0" i="0" sz="1400" u="none" cap="none" strike="noStrike">
+      <a:defRPr sz="1400" b="0" i="0" u="none" strike="noStrike" cap="none">
         <a:solidFill>
           <a:srgbClr val="000000"/>
         </a:solidFill>
@@ -167,7 +166,7 @@
         <a:sym typeface="Arial"/>
       </a:defRPr>
     </a:lvl5pPr>
-    <a:lvl6pPr lvl="5" marR="0" rtl="0" algn="l">
+    <a:lvl6pPr marR="0" lvl="5" algn="l" rtl="0">
       <a:lnSpc>
         <a:spcPct val="100000"/>
       </a:lnSpc>
@@ -181,7 +180,7 @@
         <a:srgbClr val="000000"/>
       </a:buClr>
       <a:buFont typeface="Arial"/>
-      <a:defRPr b="0" i="0" sz="1400" u="none" cap="none" strike="noStrike">
+      <a:defRPr sz="1400" b="0" i="0" u="none" strike="noStrike" cap="none">
         <a:solidFill>
           <a:srgbClr val="000000"/>
         </a:solidFill>
@@ -191,7 +190,7 @@
         <a:sym typeface="Arial"/>
       </a:defRPr>
     </a:lvl6pPr>
-    <a:lvl7pPr lvl="6" marR="0" rtl="0" algn="l">
+    <a:lvl7pPr marR="0" lvl="6" algn="l" rtl="0">
       <a:lnSpc>
         <a:spcPct val="100000"/>
       </a:lnSpc>
@@ -205,7 +204,7 @@
         <a:srgbClr val="000000"/>
       </a:buClr>
       <a:buFont typeface="Arial"/>
-      <a:defRPr b="0" i="0" sz="1400" u="none" cap="none" strike="noStrike">
+      <a:defRPr sz="1400" b="0" i="0" u="none" strike="noStrike" cap="none">
         <a:solidFill>
           <a:srgbClr val="000000"/>
         </a:solidFill>
@@ -215,7 +214,7 @@
         <a:sym typeface="Arial"/>
       </a:defRPr>
     </a:lvl7pPr>
-    <a:lvl8pPr lvl="7" marR="0" rtl="0" algn="l">
+    <a:lvl8pPr marR="0" lvl="7" algn="l" rtl="0">
       <a:lnSpc>
         <a:spcPct val="100000"/>
       </a:lnSpc>
@@ -229,7 +228,7 @@
         <a:srgbClr val="000000"/>
       </a:buClr>
       <a:buFont typeface="Arial"/>
-      <a:defRPr b="0" i="0" sz="1400" u="none" cap="none" strike="noStrike">
+      <a:defRPr sz="1400" b="0" i="0" u="none" strike="noStrike" cap="none">
         <a:solidFill>
           <a:srgbClr val="000000"/>
         </a:solidFill>
@@ -239,7 +238,7 @@
         <a:sym typeface="Arial"/>
       </a:defRPr>
     </a:lvl8pPr>
-    <a:lvl9pPr lvl="8" marR="0" rtl="0" algn="l">
+    <a:lvl9pPr marR="0" lvl="8" algn="l" rtl="0">
       <a:lnSpc>
         <a:spcPct val="100000"/>
       </a:lnSpc>
@@ -253,7 +252,7 @@
         <a:srgbClr val="000000"/>
       </a:buClr>
       <a:buFont typeface="Arial"/>
-      <a:defRPr b="0" i="0" sz="1400" u="none" cap="none" strike="noStrike">
+      <a:defRPr sz="1400" b="0" i="0" u="none" strike="noStrike" cap="none">
         <a:solidFill>
           <a:srgbClr val="000000"/>
         </a:solidFill>
@@ -268,18 +267,19 @@
 </file>
 
 <file path=ppt/notesMasters/notesMaster1.xml><?xml version="1.0" encoding="utf-8"?>
-<p:notesMaster xmlns:a="http://schemas.openxmlformats.org/drawingml/2006/main" xmlns:r="http://schemas.openxmlformats.org/officeDocument/2006/relationships" xmlns:mc="http://schemas.openxmlformats.org/markup-compatibility/2006" xmlns:mv="urn:schemas-microsoft-com:mac:vml" xmlns:p="http://schemas.openxmlformats.org/presentationml/2006/main" xmlns:c="http://schemas.openxmlformats.org/drawingml/2006/chart" xmlns:dgm="http://schemas.openxmlformats.org/drawingml/2006/diagram" xmlns:o="urn:schemas-microsoft-com:office:office" xmlns:v="urn:schemas-microsoft-com:vml" xmlns:pvml="urn:schemas-microsoft-com:office:powerpoint" xmlns:com="http://schemas.openxmlformats.org/drawingml/2006/compatibility" xmlns:p14="http://schemas.microsoft.com/office/powerpoint/2010/main" xmlns:p15="http://schemas.microsoft.com/office/powerpoint/2012/main" xmlns:ahyp="http://schemas.microsoft.com/office/drawing/2018/hyperlinkcolor">
+<p:notesMaster xmlns:a="http://schemas.openxmlformats.org/drawingml/2006/main" xmlns:r="http://schemas.openxmlformats.org/officeDocument/2006/relationships" xmlns:p="http://schemas.openxmlformats.org/presentationml/2006/main">
   <p:cSld>
     <p:bg>
       <p:bgPr>
         <a:solidFill>
           <a:schemeClr val="lt1"/>
         </a:solidFill>
+        <a:effectLst/>
       </p:bgPr>
     </p:bg>
     <p:spTree>
       <p:nvGrpSpPr>
-        <p:cNvPr id="2" name="Shape 2"/>
+        <p:cNvPr id="1" name="Shape 2"/>
         <p:cNvGrpSpPr/>
         <p:nvPr/>
       </p:nvGrpSpPr>
@@ -294,9 +294,11 @@
       <p:sp>
         <p:nvSpPr>
           <p:cNvPr id="3" name="Google Shape;3;n"/>
-          <p:cNvSpPr/>
+          <p:cNvSpPr>
+            <a:spLocks noGrp="1" noRot="1" noChangeAspect="1"/>
+          </p:cNvSpPr>
           <p:nvPr>
-            <p:ph idx="2" type="sldImg"/>
+            <p:ph type="sldImg" idx="2"/>
           </p:nvPr>
         </p:nvSpPr>
         <p:spPr>
@@ -305,9 +307,13 @@
             <a:ext cx="6096075" cy="3429000"/>
           </a:xfrm>
           <a:custGeom>
-            <a:rect b="b" l="l" r="r" t="t"/>
+            <a:avLst/>
+            <a:gdLst/>
+            <a:ahLst/>
+            <a:cxnLst/>
+            <a:rect l="l" t="t" r="r" b="b"/>
             <a:pathLst>
-              <a:path extrusionOk="0" h="120000" w="120000">
+              <a:path w="120000" h="120000" extrusionOk="0">
                 <a:moveTo>
                   <a:pt x="0" y="0"/>
                 </a:moveTo>
@@ -325,23 +331,25 @@
             </a:pathLst>
           </a:custGeom>
           <a:noFill/>
-          <a:ln cap="flat" cmpd="sng" w="9525">
+          <a:ln w="9525" cap="flat" cmpd="sng">
             <a:solidFill>
               <a:srgbClr val="000000"/>
             </a:solidFill>
             <a:prstDash val="solid"/>
             <a:round/>
-            <a:headEnd len="sm" w="sm" type="none"/>
-            <a:tailEnd len="sm" w="sm" type="none"/>
+            <a:headEnd type="none" w="sm" len="sm"/>
+            <a:tailEnd type="none" w="sm" len="sm"/>
           </a:ln>
         </p:spPr>
       </p:sp>
       <p:sp>
         <p:nvSpPr>
           <p:cNvPr id="4" name="Google Shape;4;n"/>
-          <p:cNvSpPr txBox="1"/>
+          <p:cNvSpPr txBox="1">
+            <a:spLocks noGrp="1"/>
+          </p:cNvSpPr>
           <p:nvPr>
-            <p:ph idx="1" type="body"/>
+            <p:ph type="body" idx="1"/>
           </p:nvPr>
         </p:nvSpPr>
         <p:spPr>
@@ -358,11 +366,11 @@
           </a:ln>
         </p:spPr>
         <p:txBody>
-          <a:bodyPr anchorCtr="0" anchor="t" bIns="91425" lIns="91425" spcFirstLastPara="1" rIns="91425" wrap="square" tIns="91425">
+          <a:bodyPr spcFirstLastPara="1" wrap="square" lIns="91425" tIns="91425" rIns="91425" bIns="91425" anchor="t" anchorCtr="0">
             <a:noAutofit/>
           </a:bodyPr>
           <a:lstStyle>
-            <a:lvl1pPr indent="-298450" lvl="0" marL="457200" marR="0" rtl="0" algn="l">
+            <a:lvl1pPr marL="457200" marR="0" lvl="0" indent="-298450" algn="l" rtl="0">
               <a:lnSpc>
                 <a:spcPct val="100000"/>
               </a:lnSpc>
@@ -378,7 +386,7 @@
               <a:buSzPts val="1100"/>
               <a:buFont typeface="Arial"/>
               <a:buChar char="●"/>
-              <a:defRPr b="0" i="0" sz="1100" u="none" cap="none" strike="noStrike">
+              <a:defRPr sz="1100" b="0" i="0" u="none" strike="noStrike" cap="none">
                 <a:solidFill>
                   <a:srgbClr val="000000"/>
                 </a:solidFill>
@@ -388,7 +396,7 @@
                 <a:sym typeface="Arial"/>
               </a:defRPr>
             </a:lvl1pPr>
-            <a:lvl2pPr indent="-298450" lvl="1" marL="914400" marR="0" rtl="0" algn="l">
+            <a:lvl2pPr marL="914400" marR="0" lvl="1" indent="-298450" algn="l" rtl="0">
               <a:lnSpc>
                 <a:spcPct val="100000"/>
               </a:lnSpc>
@@ -404,7 +412,7 @@
               <a:buSzPts val="1100"/>
               <a:buFont typeface="Arial"/>
               <a:buChar char="○"/>
-              <a:defRPr b="0" i="0" sz="1100" u="none" cap="none" strike="noStrike">
+              <a:defRPr sz="1100" b="0" i="0" u="none" strike="noStrike" cap="none">
                 <a:solidFill>
                   <a:srgbClr val="000000"/>
                 </a:solidFill>
@@ -414,7 +422,7 @@
                 <a:sym typeface="Arial"/>
               </a:defRPr>
             </a:lvl2pPr>
-            <a:lvl3pPr indent="-298450" lvl="2" marL="1371600" marR="0" rtl="0" algn="l">
+            <a:lvl3pPr marL="1371600" marR="0" lvl="2" indent="-298450" algn="l" rtl="0">
               <a:lnSpc>
                 <a:spcPct val="100000"/>
               </a:lnSpc>
@@ -430,7 +438,7 @@
               <a:buSzPts val="1100"/>
               <a:buFont typeface="Arial"/>
               <a:buChar char="■"/>
-              <a:defRPr b="0" i="0" sz="1100" u="none" cap="none" strike="noStrike">
+              <a:defRPr sz="1100" b="0" i="0" u="none" strike="noStrike" cap="none">
                 <a:solidFill>
                   <a:srgbClr val="000000"/>
                 </a:solidFill>
@@ -440,7 +448,7 @@
                 <a:sym typeface="Arial"/>
               </a:defRPr>
             </a:lvl3pPr>
-            <a:lvl4pPr indent="-298450" lvl="3" marL="1828800" marR="0" rtl="0" algn="l">
+            <a:lvl4pPr marL="1828800" marR="0" lvl="3" indent="-298450" algn="l" rtl="0">
               <a:lnSpc>
                 <a:spcPct val="100000"/>
               </a:lnSpc>
@@ -456,7 +464,7 @@
               <a:buSzPts val="1100"/>
               <a:buFont typeface="Arial"/>
               <a:buChar char="●"/>
-              <a:defRPr b="0" i="0" sz="1100" u="none" cap="none" strike="noStrike">
+              <a:defRPr sz="1100" b="0" i="0" u="none" strike="noStrike" cap="none">
                 <a:solidFill>
                   <a:srgbClr val="000000"/>
                 </a:solidFill>
@@ -466,7 +474,7 @@
                 <a:sym typeface="Arial"/>
               </a:defRPr>
             </a:lvl4pPr>
-            <a:lvl5pPr indent="-298450" lvl="4" marL="2286000" marR="0" rtl="0" algn="l">
+            <a:lvl5pPr marL="2286000" marR="0" lvl="4" indent="-298450" algn="l" rtl="0">
               <a:lnSpc>
                 <a:spcPct val="100000"/>
               </a:lnSpc>
@@ -482,7 +490,7 @@
               <a:buSzPts val="1100"/>
               <a:buFont typeface="Arial"/>
               <a:buChar char="○"/>
-              <a:defRPr b="0" i="0" sz="1100" u="none" cap="none" strike="noStrike">
+              <a:defRPr sz="1100" b="0" i="0" u="none" strike="noStrike" cap="none">
                 <a:solidFill>
                   <a:srgbClr val="000000"/>
                 </a:solidFill>
@@ -492,7 +500,7 @@
                 <a:sym typeface="Arial"/>
               </a:defRPr>
             </a:lvl5pPr>
-            <a:lvl6pPr indent="-298450" lvl="5" marL="2743200" marR="0" rtl="0" algn="l">
+            <a:lvl6pPr marL="2743200" marR="0" lvl="5" indent="-298450" algn="l" rtl="0">
               <a:lnSpc>
                 <a:spcPct val="100000"/>
               </a:lnSpc>
@@ -508,7 +516,7 @@
               <a:buSzPts val="1100"/>
               <a:buFont typeface="Arial"/>
               <a:buChar char="■"/>
-              <a:defRPr b="0" i="0" sz="1100" u="none" cap="none" strike="noStrike">
+              <a:defRPr sz="1100" b="0" i="0" u="none" strike="noStrike" cap="none">
                 <a:solidFill>
                   <a:srgbClr val="000000"/>
                 </a:solidFill>
@@ -518,7 +526,7 @@
                 <a:sym typeface="Arial"/>
               </a:defRPr>
             </a:lvl6pPr>
-            <a:lvl7pPr indent="-298450" lvl="6" marL="3200400" marR="0" rtl="0" algn="l">
+            <a:lvl7pPr marL="3200400" marR="0" lvl="6" indent="-298450" algn="l" rtl="0">
               <a:lnSpc>
                 <a:spcPct val="100000"/>
               </a:lnSpc>
@@ -534,7 +542,7 @@
               <a:buSzPts val="1100"/>
               <a:buFont typeface="Arial"/>
               <a:buChar char="●"/>
-              <a:defRPr b="0" i="0" sz="1100" u="none" cap="none" strike="noStrike">
+              <a:defRPr sz="1100" b="0" i="0" u="none" strike="noStrike" cap="none">
                 <a:solidFill>
                   <a:srgbClr val="000000"/>
                 </a:solidFill>
@@ -544,7 +552,7 @@
                 <a:sym typeface="Arial"/>
               </a:defRPr>
             </a:lvl7pPr>
-            <a:lvl8pPr indent="-298450" lvl="7" marL="3657600" marR="0" rtl="0" algn="l">
+            <a:lvl8pPr marL="3657600" marR="0" lvl="7" indent="-298450" algn="l" rtl="0">
               <a:lnSpc>
                 <a:spcPct val="100000"/>
               </a:lnSpc>
@@ -560,7 +568,7 @@
               <a:buSzPts val="1100"/>
               <a:buFont typeface="Arial"/>
               <a:buChar char="○"/>
-              <a:defRPr b="0" i="0" sz="1100" u="none" cap="none" strike="noStrike">
+              <a:defRPr sz="1100" b="0" i="0" u="none" strike="noStrike" cap="none">
                 <a:solidFill>
                   <a:srgbClr val="000000"/>
                 </a:solidFill>
@@ -570,7 +578,7 @@
                 <a:sym typeface="Arial"/>
               </a:defRPr>
             </a:lvl8pPr>
-            <a:lvl9pPr indent="-298450" lvl="8" marL="4114800" marR="0" rtl="0" algn="l">
+            <a:lvl9pPr marL="4114800" marR="0" lvl="8" indent="-298450" algn="l" rtl="0">
               <a:lnSpc>
                 <a:spcPct val="100000"/>
               </a:lnSpc>
@@ -586,7 +594,7 @@
               <a:buSzPts val="1100"/>
               <a:buFont typeface="Arial"/>
               <a:buChar char="■"/>
-              <a:defRPr b="0" i="0" sz="1100" u="none" cap="none" strike="noStrike">
+              <a:defRPr sz="1100" b="0" i="0" u="none" strike="noStrike" cap="none">
                 <a:solidFill>
                   <a:srgbClr val="000000"/>
                 </a:solidFill>
@@ -597,14 +605,16 @@
               </a:defRPr>
             </a:lvl9pPr>
           </a:lstStyle>
-          <a:p/>
+          <a:p>
+            <a:endParaRPr/>
+          </a:p>
         </p:txBody>
       </p:sp>
     </p:spTree>
   </p:cSld>
-  <p:clrMap accent1="accent1" accent2="accent2" accent3="accent3" accent4="accent4" accent5="accent5" accent6="accent6" bg1="lt1" bg2="dk2" tx1="dk1" tx2="lt2" folHlink="folHlink" hlink="hlink"/>
+  <p:clrMap bg1="lt1" tx1="dk1" bg2="dk2" tx2="lt2" accent1="accent1" accent2="accent2" accent3="accent3" accent4="accent4" accent5="accent5" accent6="accent6" hlink="hlink" folHlink="folHlink"/>
   <p:notesStyle>
-    <a:defPPr lvl="0" marR="0" rtl="0" algn="l">
+    <a:defPPr marR="0" lvl="0" algn="l" rtl="0">
       <a:lnSpc>
         <a:spcPct val="100000"/>
       </a:lnSpc>
@@ -615,7 +625,7 @@
         <a:spcPts val="0"/>
       </a:spcAft>
     </a:defPPr>
-    <a:lvl1pPr lvl="0" marR="0" rtl="0" algn="l">
+    <a:lvl1pPr marR="0" lvl="0" algn="l" rtl="0">
       <a:lnSpc>
         <a:spcPct val="100000"/>
       </a:lnSpc>
@@ -629,7 +639,7 @@
         <a:srgbClr val="000000"/>
       </a:buClr>
       <a:buFont typeface="Arial"/>
-      <a:defRPr b="0" i="0" sz="1400" u="none" cap="none" strike="noStrike">
+      <a:defRPr sz="1400" b="0" i="0" u="none" strike="noStrike" cap="none">
         <a:solidFill>
           <a:srgbClr val="000000"/>
         </a:solidFill>
@@ -639,7 +649,7 @@
         <a:sym typeface="Arial"/>
       </a:defRPr>
     </a:lvl1pPr>
-    <a:lvl2pPr lvl="1" marR="0" rtl="0" algn="l">
+    <a:lvl2pPr marR="0" lvl="1" algn="l" rtl="0">
       <a:lnSpc>
         <a:spcPct val="100000"/>
       </a:lnSpc>
@@ -653,7 +663,7 @@
         <a:srgbClr val="000000"/>
       </a:buClr>
       <a:buFont typeface="Arial"/>
-      <a:defRPr b="0" i="0" sz="1400" u="none" cap="none" strike="noStrike">
+      <a:defRPr sz="1400" b="0" i="0" u="none" strike="noStrike" cap="none">
         <a:solidFill>
           <a:srgbClr val="000000"/>
         </a:solidFill>
@@ -663,7 +673,7 @@
         <a:sym typeface="Arial"/>
       </a:defRPr>
     </a:lvl2pPr>
-    <a:lvl3pPr lvl="2" marR="0" rtl="0" algn="l">
+    <a:lvl3pPr marR="0" lvl="2" algn="l" rtl="0">
       <a:lnSpc>
         <a:spcPct val="100000"/>
       </a:lnSpc>
@@ -677,7 +687,7 @@
         <a:srgbClr val="000000"/>
       </a:buClr>
       <a:buFont typeface="Arial"/>
-      <a:defRPr b="0" i="0" sz="1400" u="none" cap="none" strike="noStrike">
+      <a:defRPr sz="1400" b="0" i="0" u="none" strike="noStrike" cap="none">
         <a:solidFill>
           <a:srgbClr val="000000"/>
         </a:solidFill>
@@ -687,7 +697,7 @@
         <a:sym typeface="Arial"/>
       </a:defRPr>
     </a:lvl3pPr>
-    <a:lvl4pPr lvl="3" marR="0" rtl="0" algn="l">
+    <a:lvl4pPr marR="0" lvl="3" algn="l" rtl="0">
       <a:lnSpc>
         <a:spcPct val="100000"/>
       </a:lnSpc>
@@ -701,7 +711,7 @@
         <a:srgbClr val="000000"/>
       </a:buClr>
       <a:buFont typeface="Arial"/>
-      <a:defRPr b="0" i="0" sz="1400" u="none" cap="none" strike="noStrike">
+      <a:defRPr sz="1400" b="0" i="0" u="none" strike="noStrike" cap="none">
         <a:solidFill>
           <a:srgbClr val="000000"/>
         </a:solidFill>
@@ -711,7 +721,7 @@
         <a:sym typeface="Arial"/>
       </a:defRPr>
     </a:lvl4pPr>
-    <a:lvl5pPr lvl="4" marR="0" rtl="0" algn="l">
+    <a:lvl5pPr marR="0" lvl="4" algn="l" rtl="0">
       <a:lnSpc>
         <a:spcPct val="100000"/>
       </a:lnSpc>
@@ -725,7 +735,7 @@
         <a:srgbClr val="000000"/>
       </a:buClr>
       <a:buFont typeface="Arial"/>
-      <a:defRPr b="0" i="0" sz="1400" u="none" cap="none" strike="noStrike">
+      <a:defRPr sz="1400" b="0" i="0" u="none" strike="noStrike" cap="none">
         <a:solidFill>
           <a:srgbClr val="000000"/>
         </a:solidFill>
@@ -735,7 +745,7 @@
         <a:sym typeface="Arial"/>
       </a:defRPr>
     </a:lvl5pPr>
-    <a:lvl6pPr lvl="5" marR="0" rtl="0" algn="l">
+    <a:lvl6pPr marR="0" lvl="5" algn="l" rtl="0">
       <a:lnSpc>
         <a:spcPct val="100000"/>
       </a:lnSpc>
@@ -749,7 +759,7 @@
         <a:srgbClr val="000000"/>
       </a:buClr>
       <a:buFont typeface="Arial"/>
-      <a:defRPr b="0" i="0" sz="1400" u="none" cap="none" strike="noStrike">
+      <a:defRPr sz="1400" b="0" i="0" u="none" strike="noStrike" cap="none">
         <a:solidFill>
           <a:srgbClr val="000000"/>
         </a:solidFill>
@@ -759,7 +769,7 @@
         <a:sym typeface="Arial"/>
       </a:defRPr>
     </a:lvl6pPr>
-    <a:lvl7pPr lvl="6" marR="0" rtl="0" algn="l">
+    <a:lvl7pPr marR="0" lvl="6" algn="l" rtl="0">
       <a:lnSpc>
         <a:spcPct val="100000"/>
       </a:lnSpc>
@@ -773,7 +783,7 @@
         <a:srgbClr val="000000"/>
       </a:buClr>
       <a:buFont typeface="Arial"/>
-      <a:defRPr b="0" i="0" sz="1400" u="none" cap="none" strike="noStrike">
+      <a:defRPr sz="1400" b="0" i="0" u="none" strike="noStrike" cap="none">
         <a:solidFill>
           <a:srgbClr val="000000"/>
         </a:solidFill>
@@ -783,7 +793,7 @@
         <a:sym typeface="Arial"/>
       </a:defRPr>
     </a:lvl7pPr>
-    <a:lvl8pPr lvl="7" marR="0" rtl="0" algn="l">
+    <a:lvl8pPr marR="0" lvl="7" algn="l" rtl="0">
       <a:lnSpc>
         <a:spcPct val="100000"/>
       </a:lnSpc>
@@ -797,7 +807,7 @@
         <a:srgbClr val="000000"/>
       </a:buClr>
       <a:buFont typeface="Arial"/>
-      <a:defRPr b="0" i="0" sz="1400" u="none" cap="none" strike="noStrike">
+      <a:defRPr sz="1400" b="0" i="0" u="none" strike="noStrike" cap="none">
         <a:solidFill>
           <a:srgbClr val="000000"/>
         </a:solidFill>
@@ -807,7 +817,7 @@
         <a:sym typeface="Arial"/>
       </a:defRPr>
     </a:lvl8pPr>
-    <a:lvl9pPr lvl="8" marR="0" rtl="0" algn="l">
+    <a:lvl9pPr marR="0" lvl="8" algn="l" rtl="0">
       <a:lnSpc>
         <a:spcPct val="100000"/>
       </a:lnSpc>
@@ -821,7 +831,7 @@
         <a:srgbClr val="000000"/>
       </a:buClr>
       <a:buFont typeface="Arial"/>
-      <a:defRPr b="0" i="0" sz="1400" u="none" cap="none" strike="noStrike">
+      <a:defRPr sz="1400" b="0" i="0" u="none" strike="noStrike" cap="none">
         <a:solidFill>
           <a:srgbClr val="000000"/>
         </a:solidFill>
@@ -836,11 +846,11 @@
 </file>
 
 <file path=ppt/notesSlides/notesSlide1.xml><?xml version="1.0" encoding="utf-8"?>
-<p:notes xmlns:a="http://schemas.openxmlformats.org/drawingml/2006/main" xmlns:r="http://schemas.openxmlformats.org/officeDocument/2006/relationships" xmlns:mc="http://schemas.openxmlformats.org/markup-compatibility/2006" xmlns:mv="urn:schemas-microsoft-com:mac:vml" xmlns:p="http://schemas.openxmlformats.org/presentationml/2006/main" xmlns:c="http://schemas.openxmlformats.org/drawingml/2006/chart" xmlns:dgm="http://schemas.openxmlformats.org/drawingml/2006/diagram" xmlns:o="urn:schemas-microsoft-com:office:office" xmlns:v="urn:schemas-microsoft-com:vml" xmlns:pvml="urn:schemas-microsoft-com:office:powerpoint" xmlns:com="http://schemas.openxmlformats.org/drawingml/2006/compatibility" xmlns:p14="http://schemas.microsoft.com/office/powerpoint/2010/main" xmlns:p15="http://schemas.microsoft.com/office/powerpoint/2012/main" xmlns:ahyp="http://schemas.microsoft.com/office/drawing/2018/hyperlinkcolor" showMasterPhAnim="0" showMasterSp="0">
+<p:notes xmlns:a="http://schemas.openxmlformats.org/drawingml/2006/main" xmlns:r="http://schemas.openxmlformats.org/officeDocument/2006/relationships" xmlns:p="http://schemas.openxmlformats.org/presentationml/2006/main" showMasterSp="0" showMasterPhAnim="0">
   <p:cSld>
     <p:spTree>
       <p:nvGrpSpPr>
-        <p:cNvPr id="77" name="Shape 77"/>
+        <p:cNvPr id="1" name="Shape 77"/>
         <p:cNvGrpSpPr/>
         <p:nvPr/>
       </p:nvGrpSpPr>
@@ -855,9 +865,11 @@
       <p:sp>
         <p:nvSpPr>
           <p:cNvPr id="78" name="Google Shape;78;p1:notes"/>
-          <p:cNvSpPr/>
+          <p:cNvSpPr>
+            <a:spLocks noGrp="1" noRot="1" noChangeAspect="1"/>
+          </p:cNvSpPr>
           <p:nvPr>
-            <p:ph idx="2" type="sldImg"/>
+            <p:ph type="sldImg" idx="2"/>
           </p:nvPr>
         </p:nvSpPr>
         <p:spPr>
@@ -866,9 +878,13 @@
             <a:ext cx="6096000" cy="3429000"/>
           </a:xfrm>
           <a:custGeom>
-            <a:rect b="b" l="l" r="r" t="t"/>
+            <a:avLst/>
+            <a:gdLst/>
+            <a:ahLst/>
+            <a:cxnLst/>
+            <a:rect l="l" t="t" r="r" b="b"/>
             <a:pathLst>
-              <a:path extrusionOk="0" h="120000" w="120000">
+              <a:path w="120000" h="120000" extrusionOk="0">
                 <a:moveTo>
                   <a:pt x="0" y="0"/>
                 </a:moveTo>
@@ -886,23 +902,25 @@
             </a:pathLst>
           </a:custGeom>
           <a:noFill/>
-          <a:ln cap="flat" cmpd="sng" w="9525">
+          <a:ln w="9525" cap="flat" cmpd="sng">
             <a:solidFill>
               <a:srgbClr val="000000"/>
             </a:solidFill>
             <a:prstDash val="solid"/>
             <a:round/>
-            <a:headEnd len="sm" w="sm" type="none"/>
-            <a:tailEnd len="sm" w="sm" type="none"/>
+            <a:headEnd type="none" w="sm" len="sm"/>
+            <a:tailEnd type="none" w="sm" len="sm"/>
           </a:ln>
         </p:spPr>
       </p:sp>
       <p:sp>
         <p:nvSpPr>
           <p:cNvPr id="79" name="Google Shape;79;p1:notes"/>
-          <p:cNvSpPr txBox="1"/>
+          <p:cNvSpPr txBox="1">
+            <a:spLocks noGrp="1"/>
+          </p:cNvSpPr>
           <p:nvPr>
-            <p:ph idx="1" type="body"/>
+            <p:ph type="body" idx="1"/>
           </p:nvPr>
         </p:nvSpPr>
         <p:spPr>
@@ -919,12 +937,12 @@
           </a:ln>
         </p:spPr>
         <p:txBody>
-          <a:bodyPr anchorCtr="0" anchor="t" bIns="91425" lIns="91425" spcFirstLastPara="1" rIns="91425" wrap="square" tIns="91425">
+          <a:bodyPr spcFirstLastPara="1" wrap="square" lIns="91425" tIns="91425" rIns="91425" bIns="91425" anchor="t" anchorCtr="0">
             <a:noAutofit/>
           </a:bodyPr>
           <a:lstStyle/>
           <a:p>
-            <a:pPr indent="0" lvl="0" marL="0" rtl="0" algn="l">
+            <a:pPr marL="0" lvl="0" indent="0" algn="l" rtl="0">
               <a:lnSpc>
                 <a:spcPct val="100000"/>
               </a:lnSpc>
@@ -937,9 +955,6 @@
               <a:buSzPts val="1100"/>
               <a:buNone/>
             </a:pPr>
-            <a:r>
-              <a:t/>
-            </a:r>
             <a:endParaRPr/>
           </a:p>
         </p:txBody>
@@ -953,11 +968,11 @@
 </file>
 
 <file path=ppt/notesSlides/notesSlide10.xml><?xml version="1.0" encoding="utf-8"?>
-<p:notes xmlns:a="http://schemas.openxmlformats.org/drawingml/2006/main" xmlns:r="http://schemas.openxmlformats.org/officeDocument/2006/relationships" xmlns:mc="http://schemas.openxmlformats.org/markup-compatibility/2006" xmlns:mv="urn:schemas-microsoft-com:mac:vml" xmlns:p="http://schemas.openxmlformats.org/presentationml/2006/main" xmlns:c="http://schemas.openxmlformats.org/drawingml/2006/chart" xmlns:dgm="http://schemas.openxmlformats.org/drawingml/2006/diagram" xmlns:o="urn:schemas-microsoft-com:office:office" xmlns:v="urn:schemas-microsoft-com:vml" xmlns:pvml="urn:schemas-microsoft-com:office:powerpoint" xmlns:com="http://schemas.openxmlformats.org/drawingml/2006/compatibility" xmlns:p14="http://schemas.microsoft.com/office/powerpoint/2010/main" xmlns:p15="http://schemas.microsoft.com/office/powerpoint/2012/main" xmlns:ahyp="http://schemas.microsoft.com/office/drawing/2018/hyperlinkcolor" showMasterPhAnim="0" showMasterSp="0">
+<p:notes xmlns:a="http://schemas.openxmlformats.org/drawingml/2006/main" xmlns:r="http://schemas.openxmlformats.org/officeDocument/2006/relationships" xmlns:p="http://schemas.openxmlformats.org/presentationml/2006/main" showMasterSp="0" showMasterPhAnim="0">
   <p:cSld>
     <p:spTree>
       <p:nvGrpSpPr>
-        <p:cNvPr id="145" name="Shape 145"/>
+        <p:cNvPr id="1" name="Shape 151"/>
         <p:cNvGrpSpPr/>
         <p:nvPr/>
       </p:nvGrpSpPr>
@@ -971,57 +986,12 @@
       </p:grpSpPr>
       <p:sp>
         <p:nvSpPr>
-          <p:cNvPr id="146" name="Google Shape;146;p10:notes"/>
-          <p:cNvSpPr txBox="1"/>
+          <p:cNvPr id="152" name="Google Shape;152;p11:notes"/>
+          <p:cNvSpPr>
+            <a:spLocks noGrp="1" noRot="1" noChangeAspect="1"/>
+          </p:cNvSpPr>
           <p:nvPr>
-            <p:ph idx="1" type="body"/>
-          </p:nvPr>
-        </p:nvSpPr>
-        <p:spPr>
-          <a:xfrm>
-            <a:off x="685800" y="4343400"/>
-            <a:ext cx="5486400" cy="4114800"/>
-          </a:xfrm>
-          <a:prstGeom prst="rect">
-            <a:avLst/>
-          </a:prstGeom>
-          <a:noFill/>
-          <a:ln>
-            <a:noFill/>
-          </a:ln>
-        </p:spPr>
-        <p:txBody>
-          <a:bodyPr anchorCtr="0" anchor="t" bIns="91425" lIns="91425" spcFirstLastPara="1" rIns="91425" wrap="square" tIns="91425">
-            <a:noAutofit/>
-          </a:bodyPr>
-          <a:lstStyle/>
-          <a:p>
-            <a:pPr indent="0" lvl="0" marL="0" rtl="0" algn="l">
-              <a:lnSpc>
-                <a:spcPct val="100000"/>
-              </a:lnSpc>
-              <a:spcBef>
-                <a:spcPts val="0"/>
-              </a:spcBef>
-              <a:spcAft>
-                <a:spcPts val="0"/>
-              </a:spcAft>
-              <a:buSzPts val="1100"/>
-              <a:buNone/>
-            </a:pPr>
-            <a:r>
-              <a:t/>
-            </a:r>
-            <a:endParaRPr/>
-          </a:p>
-        </p:txBody>
-      </p:sp>
-      <p:sp>
-        <p:nvSpPr>
-          <p:cNvPr id="147" name="Google Shape;147;p10:notes"/>
-          <p:cNvSpPr/>
-          <p:nvPr>
-            <p:ph idx="2" type="sldImg"/>
+            <p:ph type="sldImg" idx="2"/>
           </p:nvPr>
         </p:nvSpPr>
         <p:spPr>
@@ -1030,9 +1000,13 @@
             <a:ext cx="6096000" cy="3429000"/>
           </a:xfrm>
           <a:custGeom>
-            <a:rect b="b" l="l" r="r" t="t"/>
+            <a:avLst/>
+            <a:gdLst/>
+            <a:ahLst/>
+            <a:cxnLst/>
+            <a:rect l="l" t="t" r="r" b="b"/>
             <a:pathLst>
-              <a:path extrusionOk="0" h="120000" w="120000">
+              <a:path w="120000" h="120000" extrusionOk="0">
                 <a:moveTo>
                   <a:pt x="0" y="0"/>
                 </a:moveTo>
@@ -1050,16 +1024,62 @@
             </a:pathLst>
           </a:custGeom>
           <a:noFill/>
-          <a:ln cap="flat" cmpd="sng" w="9525">
+          <a:ln w="9525" cap="flat" cmpd="sng">
             <a:solidFill>
               <a:srgbClr val="000000"/>
             </a:solidFill>
             <a:prstDash val="solid"/>
             <a:round/>
-            <a:headEnd len="sm" w="sm" type="none"/>
-            <a:tailEnd len="sm" w="sm" type="none"/>
+            <a:headEnd type="none" w="sm" len="sm"/>
+            <a:tailEnd type="none" w="sm" len="sm"/>
           </a:ln>
         </p:spPr>
+      </p:sp>
+      <p:sp>
+        <p:nvSpPr>
+          <p:cNvPr id="153" name="Google Shape;153;p11:notes"/>
+          <p:cNvSpPr txBox="1">
+            <a:spLocks noGrp="1"/>
+          </p:cNvSpPr>
+          <p:nvPr>
+            <p:ph type="body" idx="1"/>
+          </p:nvPr>
+        </p:nvSpPr>
+        <p:spPr>
+          <a:xfrm>
+            <a:off x="685800" y="4343400"/>
+            <a:ext cx="5486400" cy="4114800"/>
+          </a:xfrm>
+          <a:prstGeom prst="rect">
+            <a:avLst/>
+          </a:prstGeom>
+          <a:noFill/>
+          <a:ln>
+            <a:noFill/>
+          </a:ln>
+        </p:spPr>
+        <p:txBody>
+          <a:bodyPr spcFirstLastPara="1" wrap="square" lIns="91425" tIns="91425" rIns="91425" bIns="91425" anchor="t" anchorCtr="0">
+            <a:noAutofit/>
+          </a:bodyPr>
+          <a:lstStyle/>
+          <a:p>
+            <a:pPr marL="0" lvl="0" indent="0" algn="l" rtl="0">
+              <a:lnSpc>
+                <a:spcPct val="100000"/>
+              </a:lnSpc>
+              <a:spcBef>
+                <a:spcPts val="0"/>
+              </a:spcBef>
+              <a:spcAft>
+                <a:spcPts val="0"/>
+              </a:spcAft>
+              <a:buSzPts val="1100"/>
+              <a:buNone/>
+            </a:pPr>
+            <a:endParaRPr/>
+          </a:p>
+        </p:txBody>
       </p:sp>
     </p:spTree>
   </p:cSld>
@@ -1069,12 +1089,12 @@
 </p:notes>
 </file>
 
-<file path=ppt/notesSlides/notesSlide11.xml><?xml version="1.0" encoding="utf-8"?>
-<p:notes xmlns:a="http://schemas.openxmlformats.org/drawingml/2006/main" xmlns:r="http://schemas.openxmlformats.org/officeDocument/2006/relationships" xmlns:mc="http://schemas.openxmlformats.org/markup-compatibility/2006" xmlns:mv="urn:schemas-microsoft-com:mac:vml" xmlns:p="http://schemas.openxmlformats.org/presentationml/2006/main" xmlns:c="http://schemas.openxmlformats.org/drawingml/2006/chart" xmlns:dgm="http://schemas.openxmlformats.org/drawingml/2006/diagram" xmlns:o="urn:schemas-microsoft-com:office:office" xmlns:v="urn:schemas-microsoft-com:vml" xmlns:pvml="urn:schemas-microsoft-com:office:powerpoint" xmlns:com="http://schemas.openxmlformats.org/drawingml/2006/compatibility" xmlns:p14="http://schemas.microsoft.com/office/powerpoint/2010/main" xmlns:p15="http://schemas.microsoft.com/office/powerpoint/2012/main" xmlns:ahyp="http://schemas.microsoft.com/office/drawing/2018/hyperlinkcolor" showMasterPhAnim="0" showMasterSp="0">
+<file path=ppt/notesSlides/notesSlide2.xml><?xml version="1.0" encoding="utf-8"?>
+<p:notes xmlns:a="http://schemas.openxmlformats.org/drawingml/2006/main" xmlns:r="http://schemas.openxmlformats.org/officeDocument/2006/relationships" xmlns:p="http://schemas.openxmlformats.org/presentationml/2006/main" showMasterSp="0" showMasterPhAnim="0">
   <p:cSld>
     <p:spTree>
       <p:nvGrpSpPr>
-        <p:cNvPr id="151" name="Shape 151"/>
+        <p:cNvPr id="1" name="Shape 84"/>
         <p:cNvGrpSpPr/>
         <p:nvPr/>
       </p:nvGrpSpPr>
@@ -1088,10 +1108,12 @@
       </p:grpSpPr>
       <p:sp>
         <p:nvSpPr>
-          <p:cNvPr id="152" name="Google Shape;152;p11:notes"/>
-          <p:cNvSpPr/>
+          <p:cNvPr id="85" name="Google Shape;85;p2:notes"/>
+          <p:cNvSpPr>
+            <a:spLocks noGrp="1" noRot="1" noChangeAspect="1"/>
+          </p:cNvSpPr>
           <p:nvPr>
-            <p:ph idx="2" type="sldImg"/>
+            <p:ph type="sldImg" idx="2"/>
           </p:nvPr>
         </p:nvSpPr>
         <p:spPr>
@@ -1100,9 +1122,13 @@
             <a:ext cx="6096000" cy="3429000"/>
           </a:xfrm>
           <a:custGeom>
-            <a:rect b="b" l="l" r="r" t="t"/>
+            <a:avLst/>
+            <a:gdLst/>
+            <a:ahLst/>
+            <a:cxnLst/>
+            <a:rect l="l" t="t" r="r" b="b"/>
             <a:pathLst>
-              <a:path extrusionOk="0" h="120000" w="120000">
+              <a:path w="120000" h="120000" extrusionOk="0">
                 <a:moveTo>
                   <a:pt x="0" y="0"/>
                 </a:moveTo>
@@ -1120,23 +1146,25 @@
             </a:pathLst>
           </a:custGeom>
           <a:noFill/>
-          <a:ln cap="flat" cmpd="sng" w="9525">
+          <a:ln w="9525" cap="flat" cmpd="sng">
             <a:solidFill>
               <a:srgbClr val="000000"/>
             </a:solidFill>
             <a:prstDash val="solid"/>
             <a:round/>
-            <a:headEnd len="sm" w="sm" type="none"/>
-            <a:tailEnd len="sm" w="sm" type="none"/>
+            <a:headEnd type="none" w="sm" len="sm"/>
+            <a:tailEnd type="none" w="sm" len="sm"/>
           </a:ln>
         </p:spPr>
       </p:sp>
       <p:sp>
         <p:nvSpPr>
-          <p:cNvPr id="153" name="Google Shape;153;p11:notes"/>
-          <p:cNvSpPr txBox="1"/>
+          <p:cNvPr id="86" name="Google Shape;86;p2:notes"/>
+          <p:cNvSpPr txBox="1">
+            <a:spLocks noGrp="1"/>
+          </p:cNvSpPr>
           <p:nvPr>
-            <p:ph idx="1" type="body"/>
+            <p:ph type="body" idx="1"/>
           </p:nvPr>
         </p:nvSpPr>
         <p:spPr>
@@ -1153,12 +1181,12 @@
           </a:ln>
         </p:spPr>
         <p:txBody>
-          <a:bodyPr anchorCtr="0" anchor="t" bIns="91425" lIns="91425" spcFirstLastPara="1" rIns="91425" wrap="square" tIns="91425">
+          <a:bodyPr spcFirstLastPara="1" wrap="square" lIns="91425" tIns="91425" rIns="91425" bIns="91425" anchor="t" anchorCtr="0">
             <a:noAutofit/>
           </a:bodyPr>
           <a:lstStyle/>
           <a:p>
-            <a:pPr indent="0" lvl="0" marL="0" rtl="0" algn="l">
+            <a:pPr marL="0" lvl="0" indent="0" algn="l" rtl="0">
               <a:lnSpc>
                 <a:spcPct val="100000"/>
               </a:lnSpc>
@@ -1171,9 +1199,6 @@
               <a:buSzPts val="1100"/>
               <a:buNone/>
             </a:pPr>
-            <a:r>
-              <a:t/>
-            </a:r>
             <a:endParaRPr/>
           </a:p>
         </p:txBody>
@@ -1186,12 +1211,12 @@
 </p:notes>
 </file>
 
-<file path=ppt/notesSlides/notesSlide2.xml><?xml version="1.0" encoding="utf-8"?>
-<p:notes xmlns:a="http://schemas.openxmlformats.org/drawingml/2006/main" xmlns:r="http://schemas.openxmlformats.org/officeDocument/2006/relationships" xmlns:mc="http://schemas.openxmlformats.org/markup-compatibility/2006" xmlns:mv="urn:schemas-microsoft-com:mac:vml" xmlns:p="http://schemas.openxmlformats.org/presentationml/2006/main" xmlns:c="http://schemas.openxmlformats.org/drawingml/2006/chart" xmlns:dgm="http://schemas.openxmlformats.org/drawingml/2006/diagram" xmlns:o="urn:schemas-microsoft-com:office:office" xmlns:v="urn:schemas-microsoft-com:vml" xmlns:pvml="urn:schemas-microsoft-com:office:powerpoint" xmlns:com="http://schemas.openxmlformats.org/drawingml/2006/compatibility" xmlns:p14="http://schemas.microsoft.com/office/powerpoint/2010/main" xmlns:p15="http://schemas.microsoft.com/office/powerpoint/2012/main" xmlns:ahyp="http://schemas.microsoft.com/office/drawing/2018/hyperlinkcolor" showMasterPhAnim="0" showMasterSp="0">
+<file path=ppt/notesSlides/notesSlide3.xml><?xml version="1.0" encoding="utf-8"?>
+<p:notes xmlns:a="http://schemas.openxmlformats.org/drawingml/2006/main" xmlns:r="http://schemas.openxmlformats.org/officeDocument/2006/relationships" xmlns:p="http://schemas.openxmlformats.org/presentationml/2006/main" showMasterSp="0" showMasterPhAnim="0">
   <p:cSld>
     <p:spTree>
       <p:nvGrpSpPr>
-        <p:cNvPr id="84" name="Shape 84"/>
+        <p:cNvPr id="1" name="Shape 96"/>
         <p:cNvGrpSpPr/>
         <p:nvPr/>
       </p:nvGrpSpPr>
@@ -1205,10 +1230,12 @@
       </p:grpSpPr>
       <p:sp>
         <p:nvSpPr>
-          <p:cNvPr id="85" name="Google Shape;85;p2:notes"/>
-          <p:cNvSpPr/>
+          <p:cNvPr id="97" name="Google Shape;97;p4:notes"/>
+          <p:cNvSpPr>
+            <a:spLocks noGrp="1" noRot="1" noChangeAspect="1"/>
+          </p:cNvSpPr>
           <p:nvPr>
-            <p:ph idx="2" type="sldImg"/>
+            <p:ph type="sldImg" idx="2"/>
           </p:nvPr>
         </p:nvSpPr>
         <p:spPr>
@@ -1217,9 +1244,13 @@
             <a:ext cx="6096000" cy="3429000"/>
           </a:xfrm>
           <a:custGeom>
-            <a:rect b="b" l="l" r="r" t="t"/>
+            <a:avLst/>
+            <a:gdLst/>
+            <a:ahLst/>
+            <a:cxnLst/>
+            <a:rect l="l" t="t" r="r" b="b"/>
             <a:pathLst>
-              <a:path extrusionOk="0" h="120000" w="120000">
+              <a:path w="120000" h="120000" extrusionOk="0">
                 <a:moveTo>
                   <a:pt x="0" y="0"/>
                 </a:moveTo>
@@ -1237,23 +1268,25 @@
             </a:pathLst>
           </a:custGeom>
           <a:noFill/>
-          <a:ln cap="flat" cmpd="sng" w="9525">
+          <a:ln w="9525" cap="flat" cmpd="sng">
             <a:solidFill>
               <a:srgbClr val="000000"/>
             </a:solidFill>
             <a:prstDash val="solid"/>
             <a:round/>
-            <a:headEnd len="sm" w="sm" type="none"/>
-            <a:tailEnd len="sm" w="sm" type="none"/>
+            <a:headEnd type="none" w="sm" len="sm"/>
+            <a:tailEnd type="none" w="sm" len="sm"/>
           </a:ln>
         </p:spPr>
       </p:sp>
       <p:sp>
         <p:nvSpPr>
-          <p:cNvPr id="86" name="Google Shape;86;p2:notes"/>
-          <p:cNvSpPr txBox="1"/>
+          <p:cNvPr id="98" name="Google Shape;98;p4:notes"/>
+          <p:cNvSpPr txBox="1">
+            <a:spLocks noGrp="1"/>
+          </p:cNvSpPr>
           <p:nvPr>
-            <p:ph idx="1" type="body"/>
+            <p:ph type="body" idx="1"/>
           </p:nvPr>
         </p:nvSpPr>
         <p:spPr>
@@ -1270,12 +1303,12 @@
           </a:ln>
         </p:spPr>
         <p:txBody>
-          <a:bodyPr anchorCtr="0" anchor="t" bIns="91425" lIns="91425" spcFirstLastPara="1" rIns="91425" wrap="square" tIns="91425">
+          <a:bodyPr spcFirstLastPara="1" wrap="square" lIns="91425" tIns="91425" rIns="91425" bIns="91425" anchor="t" anchorCtr="0">
             <a:noAutofit/>
           </a:bodyPr>
           <a:lstStyle/>
           <a:p>
-            <a:pPr indent="0" lvl="0" marL="0" rtl="0" algn="l">
+            <a:pPr marL="0" lvl="0" indent="0" algn="l" rtl="0">
               <a:lnSpc>
                 <a:spcPct val="100000"/>
               </a:lnSpc>
@@ -1288,9 +1321,6 @@
               <a:buSzPts val="1100"/>
               <a:buNone/>
             </a:pPr>
-            <a:r>
-              <a:t/>
-            </a:r>
             <a:endParaRPr/>
           </a:p>
         </p:txBody>
@@ -1303,12 +1333,12 @@
 </p:notes>
 </file>
 
-<file path=ppt/notesSlides/notesSlide3.xml><?xml version="1.0" encoding="utf-8"?>
-<p:notes xmlns:a="http://schemas.openxmlformats.org/drawingml/2006/main" xmlns:r="http://schemas.openxmlformats.org/officeDocument/2006/relationships" xmlns:mc="http://schemas.openxmlformats.org/markup-compatibility/2006" xmlns:mv="urn:schemas-microsoft-com:mac:vml" xmlns:p="http://schemas.openxmlformats.org/presentationml/2006/main" xmlns:c="http://schemas.openxmlformats.org/drawingml/2006/chart" xmlns:dgm="http://schemas.openxmlformats.org/drawingml/2006/diagram" xmlns:o="urn:schemas-microsoft-com:office:office" xmlns:v="urn:schemas-microsoft-com:vml" xmlns:pvml="urn:schemas-microsoft-com:office:powerpoint" xmlns:com="http://schemas.openxmlformats.org/drawingml/2006/compatibility" xmlns:p14="http://schemas.microsoft.com/office/powerpoint/2010/main" xmlns:p15="http://schemas.microsoft.com/office/powerpoint/2012/main" xmlns:ahyp="http://schemas.microsoft.com/office/drawing/2018/hyperlinkcolor" showMasterPhAnim="0" showMasterSp="0">
+<file path=ppt/notesSlides/notesSlide4.xml><?xml version="1.0" encoding="utf-8"?>
+<p:notes xmlns:a="http://schemas.openxmlformats.org/drawingml/2006/main" xmlns:r="http://schemas.openxmlformats.org/officeDocument/2006/relationships" xmlns:p="http://schemas.openxmlformats.org/presentationml/2006/main" showMasterSp="0" showMasterPhAnim="0">
   <p:cSld>
     <p:spTree>
       <p:nvGrpSpPr>
-        <p:cNvPr id="90" name="Shape 90"/>
+        <p:cNvPr id="1" name="Shape 106"/>
         <p:cNvGrpSpPr/>
         <p:nvPr/>
       </p:nvGrpSpPr>
@@ -1322,68 +1352,27 @@
       </p:grpSpPr>
       <p:sp>
         <p:nvSpPr>
-          <p:cNvPr id="91" name="Google Shape;91;p3:notes"/>
-          <p:cNvSpPr txBox="1"/>
+          <p:cNvPr id="107" name="Google Shape;107;p5:notes"/>
+          <p:cNvSpPr>
+            <a:spLocks noGrp="1" noRot="1" noChangeAspect="1"/>
+          </p:cNvSpPr>
           <p:nvPr>
-            <p:ph idx="1" type="body"/>
+            <p:ph type="sldImg" idx="2"/>
           </p:nvPr>
         </p:nvSpPr>
         <p:spPr>
           <a:xfrm>
-            <a:off x="685800" y="4343400"/>
-            <a:ext cx="5486400" cy="4114800"/>
-          </a:xfrm>
-          <a:prstGeom prst="rect">
-            <a:avLst/>
-          </a:prstGeom>
-          <a:noFill/>
-          <a:ln>
-            <a:noFill/>
-          </a:ln>
-        </p:spPr>
-        <p:txBody>
-          <a:bodyPr anchorCtr="0" anchor="t" bIns="91425" lIns="91425" spcFirstLastPara="1" rIns="91425" wrap="square" tIns="91425">
-            <a:noAutofit/>
-          </a:bodyPr>
-          <a:lstStyle/>
-          <a:p>
-            <a:pPr indent="0" lvl="0" marL="0" rtl="0" algn="l">
-              <a:lnSpc>
-                <a:spcPct val="100000"/>
-              </a:lnSpc>
-              <a:spcBef>
-                <a:spcPts val="0"/>
-              </a:spcBef>
-              <a:spcAft>
-                <a:spcPts val="0"/>
-              </a:spcAft>
-              <a:buSzPts val="1100"/>
-              <a:buNone/>
-            </a:pPr>
-            <a:r>
-              <a:t/>
-            </a:r>
-            <a:endParaRPr/>
-          </a:p>
-        </p:txBody>
-      </p:sp>
-      <p:sp>
-        <p:nvSpPr>
-          <p:cNvPr id="92" name="Google Shape;92;p3:notes"/>
-          <p:cNvSpPr/>
-          <p:nvPr>
-            <p:ph idx="2" type="sldImg"/>
-          </p:nvPr>
-        </p:nvSpPr>
-        <p:spPr>
-          <a:xfrm>
-            <a:off x="381300" y="685800"/>
-            <a:ext cx="6096075" cy="3429000"/>
+            <a:off x="381000" y="685800"/>
+            <a:ext cx="6096000" cy="3429000"/>
           </a:xfrm>
           <a:custGeom>
-            <a:rect b="b" l="l" r="r" t="t"/>
+            <a:avLst/>
+            <a:gdLst/>
+            <a:ahLst/>
+            <a:cxnLst/>
+            <a:rect l="l" t="t" r="r" b="b"/>
             <a:pathLst>
-              <a:path extrusionOk="0" h="120000" w="120000">
+              <a:path w="120000" h="120000" extrusionOk="0">
                 <a:moveTo>
                   <a:pt x="0" y="0"/>
                 </a:moveTo>
@@ -1401,16 +1390,62 @@
             </a:pathLst>
           </a:custGeom>
           <a:noFill/>
-          <a:ln cap="flat" cmpd="sng" w="9525">
+          <a:ln w="9525" cap="flat" cmpd="sng">
             <a:solidFill>
               <a:srgbClr val="000000"/>
             </a:solidFill>
             <a:prstDash val="solid"/>
             <a:round/>
-            <a:headEnd len="sm" w="sm" type="none"/>
-            <a:tailEnd len="sm" w="sm" type="none"/>
+            <a:headEnd type="none" w="sm" len="sm"/>
+            <a:tailEnd type="none" w="sm" len="sm"/>
           </a:ln>
         </p:spPr>
+      </p:sp>
+      <p:sp>
+        <p:nvSpPr>
+          <p:cNvPr id="108" name="Google Shape;108;p5:notes"/>
+          <p:cNvSpPr txBox="1">
+            <a:spLocks noGrp="1"/>
+          </p:cNvSpPr>
+          <p:nvPr>
+            <p:ph type="body" idx="1"/>
+          </p:nvPr>
+        </p:nvSpPr>
+        <p:spPr>
+          <a:xfrm>
+            <a:off x="685800" y="4343400"/>
+            <a:ext cx="5486400" cy="4114800"/>
+          </a:xfrm>
+          <a:prstGeom prst="rect">
+            <a:avLst/>
+          </a:prstGeom>
+          <a:noFill/>
+          <a:ln>
+            <a:noFill/>
+          </a:ln>
+        </p:spPr>
+        <p:txBody>
+          <a:bodyPr spcFirstLastPara="1" wrap="square" lIns="91425" tIns="91425" rIns="91425" bIns="91425" anchor="t" anchorCtr="0">
+            <a:noAutofit/>
+          </a:bodyPr>
+          <a:lstStyle/>
+          <a:p>
+            <a:pPr marL="0" lvl="0" indent="0" algn="l" rtl="0">
+              <a:lnSpc>
+                <a:spcPct val="100000"/>
+              </a:lnSpc>
+              <a:spcBef>
+                <a:spcPts val="0"/>
+              </a:spcBef>
+              <a:spcAft>
+                <a:spcPts val="0"/>
+              </a:spcAft>
+              <a:buSzPts val="1100"/>
+              <a:buNone/>
+            </a:pPr>
+            <a:endParaRPr/>
+          </a:p>
+        </p:txBody>
       </p:sp>
     </p:spTree>
   </p:cSld>
@@ -1420,12 +1455,12 @@
 </p:notes>
 </file>
 
-<file path=ppt/notesSlides/notesSlide4.xml><?xml version="1.0" encoding="utf-8"?>
-<p:notes xmlns:a="http://schemas.openxmlformats.org/drawingml/2006/main" xmlns:r="http://schemas.openxmlformats.org/officeDocument/2006/relationships" xmlns:mc="http://schemas.openxmlformats.org/markup-compatibility/2006" xmlns:mv="urn:schemas-microsoft-com:mac:vml" xmlns:p="http://schemas.openxmlformats.org/presentationml/2006/main" xmlns:c="http://schemas.openxmlformats.org/drawingml/2006/chart" xmlns:dgm="http://schemas.openxmlformats.org/drawingml/2006/diagram" xmlns:o="urn:schemas-microsoft-com:office:office" xmlns:v="urn:schemas-microsoft-com:vml" xmlns:pvml="urn:schemas-microsoft-com:office:powerpoint" xmlns:com="http://schemas.openxmlformats.org/drawingml/2006/compatibility" xmlns:p14="http://schemas.microsoft.com/office/powerpoint/2010/main" xmlns:p15="http://schemas.microsoft.com/office/powerpoint/2012/main" xmlns:ahyp="http://schemas.microsoft.com/office/drawing/2018/hyperlinkcolor" showMasterPhAnim="0" showMasterSp="0">
+<file path=ppt/notesSlides/notesSlide5.xml><?xml version="1.0" encoding="utf-8"?>
+<p:notes xmlns:a="http://schemas.openxmlformats.org/drawingml/2006/main" xmlns:r="http://schemas.openxmlformats.org/officeDocument/2006/relationships" xmlns:p="http://schemas.openxmlformats.org/presentationml/2006/main" showMasterSp="0" showMasterPhAnim="0">
   <p:cSld>
     <p:spTree>
       <p:nvGrpSpPr>
-        <p:cNvPr id="96" name="Shape 96"/>
+        <p:cNvPr id="1" name="Shape 116"/>
         <p:cNvGrpSpPr/>
         <p:nvPr/>
       </p:nvGrpSpPr>
@@ -1439,10 +1474,12 @@
       </p:grpSpPr>
       <p:sp>
         <p:nvSpPr>
-          <p:cNvPr id="97" name="Google Shape;97;p4:notes"/>
-          <p:cNvSpPr/>
+          <p:cNvPr id="117" name="Google Shape;117;p6:notes"/>
+          <p:cNvSpPr>
+            <a:spLocks noGrp="1" noRot="1" noChangeAspect="1"/>
+          </p:cNvSpPr>
           <p:nvPr>
-            <p:ph idx="2" type="sldImg"/>
+            <p:ph type="sldImg" idx="2"/>
           </p:nvPr>
         </p:nvSpPr>
         <p:spPr>
@@ -1451,9 +1488,13 @@
             <a:ext cx="6096000" cy="3429000"/>
           </a:xfrm>
           <a:custGeom>
-            <a:rect b="b" l="l" r="r" t="t"/>
+            <a:avLst/>
+            <a:gdLst/>
+            <a:ahLst/>
+            <a:cxnLst/>
+            <a:rect l="l" t="t" r="r" b="b"/>
             <a:pathLst>
-              <a:path extrusionOk="0" h="120000" w="120000">
+              <a:path w="120000" h="120000" extrusionOk="0">
                 <a:moveTo>
                   <a:pt x="0" y="0"/>
                 </a:moveTo>
@@ -1471,23 +1512,25 @@
             </a:pathLst>
           </a:custGeom>
           <a:noFill/>
-          <a:ln cap="flat" cmpd="sng" w="9525">
+          <a:ln w="9525" cap="flat" cmpd="sng">
             <a:solidFill>
               <a:srgbClr val="000000"/>
             </a:solidFill>
             <a:prstDash val="solid"/>
             <a:round/>
-            <a:headEnd len="sm" w="sm" type="none"/>
-            <a:tailEnd len="sm" w="sm" type="none"/>
+            <a:headEnd type="none" w="sm" len="sm"/>
+            <a:tailEnd type="none" w="sm" len="sm"/>
           </a:ln>
         </p:spPr>
       </p:sp>
       <p:sp>
         <p:nvSpPr>
-          <p:cNvPr id="98" name="Google Shape;98;p4:notes"/>
-          <p:cNvSpPr txBox="1"/>
+          <p:cNvPr id="118" name="Google Shape;118;p6:notes"/>
+          <p:cNvSpPr txBox="1">
+            <a:spLocks noGrp="1"/>
+          </p:cNvSpPr>
           <p:nvPr>
-            <p:ph idx="1" type="body"/>
+            <p:ph type="body" idx="1"/>
           </p:nvPr>
         </p:nvSpPr>
         <p:spPr>
@@ -1504,12 +1547,12 @@
           </a:ln>
         </p:spPr>
         <p:txBody>
-          <a:bodyPr anchorCtr="0" anchor="t" bIns="91425" lIns="91425" spcFirstLastPara="1" rIns="91425" wrap="square" tIns="91425">
+          <a:bodyPr spcFirstLastPara="1" wrap="square" lIns="91425" tIns="91425" rIns="91425" bIns="91425" anchor="t" anchorCtr="0">
             <a:noAutofit/>
           </a:bodyPr>
           <a:lstStyle/>
           <a:p>
-            <a:pPr indent="0" lvl="0" marL="0" rtl="0" algn="l">
+            <a:pPr marL="0" lvl="0" indent="0" algn="l" rtl="0">
               <a:lnSpc>
                 <a:spcPct val="100000"/>
               </a:lnSpc>
@@ -1522,9 +1565,6 @@
               <a:buSzPts val="1100"/>
               <a:buNone/>
             </a:pPr>
-            <a:r>
-              <a:t/>
-            </a:r>
             <a:endParaRPr/>
           </a:p>
         </p:txBody>
@@ -1537,12 +1577,12 @@
 </p:notes>
 </file>
 
-<file path=ppt/notesSlides/notesSlide5.xml><?xml version="1.0" encoding="utf-8"?>
-<p:notes xmlns:a="http://schemas.openxmlformats.org/drawingml/2006/main" xmlns:r="http://schemas.openxmlformats.org/officeDocument/2006/relationships" xmlns:mc="http://schemas.openxmlformats.org/markup-compatibility/2006" xmlns:mv="urn:schemas-microsoft-com:mac:vml" xmlns:p="http://schemas.openxmlformats.org/presentationml/2006/main" xmlns:c="http://schemas.openxmlformats.org/drawingml/2006/chart" xmlns:dgm="http://schemas.openxmlformats.org/drawingml/2006/diagram" xmlns:o="urn:schemas-microsoft-com:office:office" xmlns:v="urn:schemas-microsoft-com:vml" xmlns:pvml="urn:schemas-microsoft-com:office:powerpoint" xmlns:com="http://schemas.openxmlformats.org/drawingml/2006/compatibility" xmlns:p14="http://schemas.microsoft.com/office/powerpoint/2010/main" xmlns:p15="http://schemas.microsoft.com/office/powerpoint/2012/main" xmlns:ahyp="http://schemas.microsoft.com/office/drawing/2018/hyperlinkcolor" showMasterPhAnim="0" showMasterSp="0">
+<file path=ppt/notesSlides/notesSlide6.xml><?xml version="1.0" encoding="utf-8"?>
+<p:notes xmlns:a="http://schemas.openxmlformats.org/drawingml/2006/main" xmlns:r="http://schemas.openxmlformats.org/officeDocument/2006/relationships" xmlns:p="http://schemas.openxmlformats.org/presentationml/2006/main" showMasterSp="0" showMasterPhAnim="0">
   <p:cSld>
     <p:spTree>
       <p:nvGrpSpPr>
-        <p:cNvPr id="106" name="Shape 106"/>
+        <p:cNvPr id="1" name="Shape 126"/>
         <p:cNvGrpSpPr/>
         <p:nvPr/>
       </p:nvGrpSpPr>
@@ -1556,21 +1596,73 @@
       </p:grpSpPr>
       <p:sp>
         <p:nvSpPr>
-          <p:cNvPr id="107" name="Google Shape;107;p5:notes"/>
-          <p:cNvSpPr/>
+          <p:cNvPr id="127" name="Google Shape;127;p7:notes"/>
+          <p:cNvSpPr txBox="1">
+            <a:spLocks noGrp="1"/>
+          </p:cNvSpPr>
           <p:nvPr>
-            <p:ph idx="2" type="sldImg"/>
+            <p:ph type="body" idx="1"/>
           </p:nvPr>
         </p:nvSpPr>
         <p:spPr>
           <a:xfrm>
-            <a:off x="381000" y="685800"/>
-            <a:ext cx="6096000" cy="3429000"/>
+            <a:off x="685800" y="4343400"/>
+            <a:ext cx="5486400" cy="4114800"/>
+          </a:xfrm>
+          <a:prstGeom prst="rect">
+            <a:avLst/>
+          </a:prstGeom>
+          <a:noFill/>
+          <a:ln>
+            <a:noFill/>
+          </a:ln>
+        </p:spPr>
+        <p:txBody>
+          <a:bodyPr spcFirstLastPara="1" wrap="square" lIns="91425" tIns="91425" rIns="91425" bIns="91425" anchor="t" anchorCtr="0">
+            <a:noAutofit/>
+          </a:bodyPr>
+          <a:lstStyle/>
+          <a:p>
+            <a:pPr marL="0" lvl="0" indent="0" algn="l" rtl="0">
+              <a:lnSpc>
+                <a:spcPct val="100000"/>
+              </a:lnSpc>
+              <a:spcBef>
+                <a:spcPts val="0"/>
+              </a:spcBef>
+              <a:spcAft>
+                <a:spcPts val="0"/>
+              </a:spcAft>
+              <a:buSzPts val="1100"/>
+              <a:buNone/>
+            </a:pPr>
+            <a:endParaRPr/>
+          </a:p>
+        </p:txBody>
+      </p:sp>
+      <p:sp>
+        <p:nvSpPr>
+          <p:cNvPr id="128" name="Google Shape;128;p7:notes"/>
+          <p:cNvSpPr>
+            <a:spLocks noGrp="1" noRot="1" noChangeAspect="1"/>
+          </p:cNvSpPr>
+          <p:nvPr>
+            <p:ph type="sldImg" idx="2"/>
+          </p:nvPr>
+        </p:nvSpPr>
+        <p:spPr>
+          <a:xfrm>
+            <a:off x="381300" y="685800"/>
+            <a:ext cx="6096075" cy="3429000"/>
           </a:xfrm>
           <a:custGeom>
-            <a:rect b="b" l="l" r="r" t="t"/>
+            <a:avLst/>
+            <a:gdLst/>
+            <a:ahLst/>
+            <a:cxnLst/>
+            <a:rect l="l" t="t" r="r" b="b"/>
             <a:pathLst>
-              <a:path extrusionOk="0" h="120000" w="120000">
+              <a:path w="120000" h="120000" extrusionOk="0">
                 <a:moveTo>
                   <a:pt x="0" y="0"/>
                 </a:moveTo>
@@ -1588,23 +1680,50 @@
             </a:pathLst>
           </a:custGeom>
           <a:noFill/>
-          <a:ln cap="flat" cmpd="sng" w="9525">
+          <a:ln w="9525" cap="flat" cmpd="sng">
             <a:solidFill>
               <a:srgbClr val="000000"/>
             </a:solidFill>
             <a:prstDash val="solid"/>
             <a:round/>
-            <a:headEnd len="sm" w="sm" type="none"/>
-            <a:tailEnd len="sm" w="sm" type="none"/>
+            <a:headEnd type="none" w="sm" len="sm"/>
+            <a:tailEnd type="none" w="sm" len="sm"/>
           </a:ln>
         </p:spPr>
       </p:sp>
+    </p:spTree>
+  </p:cSld>
+  <p:clrMapOvr>
+    <a:masterClrMapping/>
+  </p:clrMapOvr>
+</p:notes>
+</file>
+
+<file path=ppt/notesSlides/notesSlide7.xml><?xml version="1.0" encoding="utf-8"?>
+<p:notes xmlns:a="http://schemas.openxmlformats.org/drawingml/2006/main" xmlns:r="http://schemas.openxmlformats.org/officeDocument/2006/relationships" xmlns:p="http://schemas.openxmlformats.org/presentationml/2006/main" showMasterSp="0" showMasterPhAnim="0">
+  <p:cSld>
+    <p:spTree>
+      <p:nvGrpSpPr>
+        <p:cNvPr id="1" name="Shape 133"/>
+        <p:cNvGrpSpPr/>
+        <p:nvPr/>
+      </p:nvGrpSpPr>
+      <p:grpSpPr>
+        <a:xfrm>
+          <a:off x="0" y="0"/>
+          <a:ext cx="0" cy="0"/>
+          <a:chOff x="0" y="0"/>
+          <a:chExt cx="0" cy="0"/>
+        </a:xfrm>
+      </p:grpSpPr>
       <p:sp>
         <p:nvSpPr>
-          <p:cNvPr id="108" name="Google Shape;108;p5:notes"/>
-          <p:cNvSpPr txBox="1"/>
+          <p:cNvPr id="134" name="Google Shape;134;p8:notes"/>
+          <p:cNvSpPr txBox="1">
+            <a:spLocks noGrp="1"/>
+          </p:cNvSpPr>
           <p:nvPr>
-            <p:ph idx="1" type="body"/>
+            <p:ph type="body" idx="1"/>
           </p:nvPr>
         </p:nvSpPr>
         <p:spPr>
@@ -1621,12 +1740,12 @@
           </a:ln>
         </p:spPr>
         <p:txBody>
-          <a:bodyPr anchorCtr="0" anchor="t" bIns="91425" lIns="91425" spcFirstLastPara="1" rIns="91425" wrap="square" tIns="91425">
+          <a:bodyPr spcFirstLastPara="1" wrap="square" lIns="91425" tIns="91425" rIns="91425" bIns="91425" anchor="t" anchorCtr="0">
             <a:noAutofit/>
           </a:bodyPr>
           <a:lstStyle/>
           <a:p>
-            <a:pPr indent="0" lvl="0" marL="0" rtl="0" algn="l">
+            <a:pPr marL="0" lvl="0" indent="0" algn="l" rtl="0">
               <a:lnSpc>
                 <a:spcPct val="100000"/>
               </a:lnSpc>
@@ -1639,55 +1758,33 @@
               <a:buSzPts val="1100"/>
               <a:buNone/>
             </a:pPr>
-            <a:r>
-              <a:t/>
-            </a:r>
             <a:endParaRPr/>
           </a:p>
         </p:txBody>
       </p:sp>
-    </p:spTree>
-  </p:cSld>
-  <p:clrMapOvr>
-    <a:masterClrMapping/>
-  </p:clrMapOvr>
-</p:notes>
-</file>
-
-<file path=ppt/notesSlides/notesSlide6.xml><?xml version="1.0" encoding="utf-8"?>
-<p:notes xmlns:a="http://schemas.openxmlformats.org/drawingml/2006/main" xmlns:r="http://schemas.openxmlformats.org/officeDocument/2006/relationships" xmlns:mc="http://schemas.openxmlformats.org/markup-compatibility/2006" xmlns:mv="urn:schemas-microsoft-com:mac:vml" xmlns:p="http://schemas.openxmlformats.org/presentationml/2006/main" xmlns:c="http://schemas.openxmlformats.org/drawingml/2006/chart" xmlns:dgm="http://schemas.openxmlformats.org/drawingml/2006/diagram" xmlns:o="urn:schemas-microsoft-com:office:office" xmlns:v="urn:schemas-microsoft-com:vml" xmlns:pvml="urn:schemas-microsoft-com:office:powerpoint" xmlns:com="http://schemas.openxmlformats.org/drawingml/2006/compatibility" xmlns:p14="http://schemas.microsoft.com/office/powerpoint/2010/main" xmlns:p15="http://schemas.microsoft.com/office/powerpoint/2012/main" xmlns:ahyp="http://schemas.microsoft.com/office/drawing/2018/hyperlinkcolor" showMasterPhAnim="0" showMasterSp="0">
-  <p:cSld>
-    <p:spTree>
-      <p:nvGrpSpPr>
-        <p:cNvPr id="116" name="Shape 116"/>
-        <p:cNvGrpSpPr/>
-        <p:nvPr/>
-      </p:nvGrpSpPr>
-      <p:grpSpPr>
-        <a:xfrm>
-          <a:off x="0" y="0"/>
-          <a:ext cx="0" cy="0"/>
-          <a:chOff x="0" y="0"/>
-          <a:chExt cx="0" cy="0"/>
-        </a:xfrm>
-      </p:grpSpPr>
       <p:sp>
         <p:nvSpPr>
-          <p:cNvPr id="117" name="Google Shape;117;p6:notes"/>
-          <p:cNvSpPr/>
+          <p:cNvPr id="135" name="Google Shape;135;p8:notes"/>
+          <p:cNvSpPr>
+            <a:spLocks noGrp="1" noRot="1" noChangeAspect="1"/>
+          </p:cNvSpPr>
           <p:nvPr>
-            <p:ph idx="2" type="sldImg"/>
+            <p:ph type="sldImg" idx="2"/>
           </p:nvPr>
         </p:nvSpPr>
         <p:spPr>
           <a:xfrm>
-            <a:off x="381000" y="685800"/>
-            <a:ext cx="6096000" cy="3429000"/>
+            <a:off x="381300" y="685800"/>
+            <a:ext cx="6096075" cy="3429000"/>
           </a:xfrm>
           <a:custGeom>
-            <a:rect b="b" l="l" r="r" t="t"/>
+            <a:avLst/>
+            <a:gdLst/>
+            <a:ahLst/>
+            <a:cxnLst/>
+            <a:rect l="l" t="t" r="r" b="b"/>
             <a:pathLst>
-              <a:path extrusionOk="0" h="120000" w="120000">
+              <a:path w="120000" h="120000" extrusionOk="0">
                 <a:moveTo>
                   <a:pt x="0" y="0"/>
                 </a:moveTo>
@@ -1705,63 +1802,16 @@
             </a:pathLst>
           </a:custGeom>
           <a:noFill/>
-          <a:ln cap="flat" cmpd="sng" w="9525">
+          <a:ln w="9525" cap="flat" cmpd="sng">
             <a:solidFill>
               <a:srgbClr val="000000"/>
             </a:solidFill>
             <a:prstDash val="solid"/>
             <a:round/>
-            <a:headEnd len="sm" w="sm" type="none"/>
-            <a:tailEnd len="sm" w="sm" type="none"/>
+            <a:headEnd type="none" w="sm" len="sm"/>
+            <a:tailEnd type="none" w="sm" len="sm"/>
           </a:ln>
         </p:spPr>
-      </p:sp>
-      <p:sp>
-        <p:nvSpPr>
-          <p:cNvPr id="118" name="Google Shape;118;p6:notes"/>
-          <p:cNvSpPr txBox="1"/>
-          <p:nvPr>
-            <p:ph idx="1" type="body"/>
-          </p:nvPr>
-        </p:nvSpPr>
-        <p:spPr>
-          <a:xfrm>
-            <a:off x="685800" y="4343400"/>
-            <a:ext cx="5486400" cy="4114800"/>
-          </a:xfrm>
-          <a:prstGeom prst="rect">
-            <a:avLst/>
-          </a:prstGeom>
-          <a:noFill/>
-          <a:ln>
-            <a:noFill/>
-          </a:ln>
-        </p:spPr>
-        <p:txBody>
-          <a:bodyPr anchorCtr="0" anchor="t" bIns="91425" lIns="91425" spcFirstLastPara="1" rIns="91425" wrap="square" tIns="91425">
-            <a:noAutofit/>
-          </a:bodyPr>
-          <a:lstStyle/>
-          <a:p>
-            <a:pPr indent="0" lvl="0" marL="0" rtl="0" algn="l">
-              <a:lnSpc>
-                <a:spcPct val="100000"/>
-              </a:lnSpc>
-              <a:spcBef>
-                <a:spcPts val="0"/>
-              </a:spcBef>
-              <a:spcAft>
-                <a:spcPts val="0"/>
-              </a:spcAft>
-              <a:buSzPts val="1100"/>
-              <a:buNone/>
-            </a:pPr>
-            <a:r>
-              <a:t/>
-            </a:r>
-            <a:endParaRPr/>
-          </a:p>
-        </p:txBody>
       </p:sp>
     </p:spTree>
   </p:cSld>
@@ -1771,12 +1821,12 @@
 </p:notes>
 </file>
 
-<file path=ppt/notesSlides/notesSlide7.xml><?xml version="1.0" encoding="utf-8"?>
-<p:notes xmlns:a="http://schemas.openxmlformats.org/drawingml/2006/main" xmlns:r="http://schemas.openxmlformats.org/officeDocument/2006/relationships" xmlns:mc="http://schemas.openxmlformats.org/markup-compatibility/2006" xmlns:mv="urn:schemas-microsoft-com:mac:vml" xmlns:p="http://schemas.openxmlformats.org/presentationml/2006/main" xmlns:c="http://schemas.openxmlformats.org/drawingml/2006/chart" xmlns:dgm="http://schemas.openxmlformats.org/drawingml/2006/diagram" xmlns:o="urn:schemas-microsoft-com:office:office" xmlns:v="urn:schemas-microsoft-com:vml" xmlns:pvml="urn:schemas-microsoft-com:office:powerpoint" xmlns:com="http://schemas.openxmlformats.org/drawingml/2006/compatibility" xmlns:p14="http://schemas.microsoft.com/office/powerpoint/2010/main" xmlns:p15="http://schemas.microsoft.com/office/powerpoint/2012/main" xmlns:ahyp="http://schemas.microsoft.com/office/drawing/2018/hyperlinkcolor" showMasterPhAnim="0" showMasterSp="0">
+<file path=ppt/notesSlides/notesSlide8.xml><?xml version="1.0" encoding="utf-8"?>
+<p:notes xmlns:a="http://schemas.openxmlformats.org/drawingml/2006/main" xmlns:r="http://schemas.openxmlformats.org/officeDocument/2006/relationships" xmlns:p="http://schemas.openxmlformats.org/presentationml/2006/main" showMasterSp="0" showMasterPhAnim="0">
   <p:cSld>
     <p:spTree>
       <p:nvGrpSpPr>
-        <p:cNvPr id="126" name="Shape 126"/>
+        <p:cNvPr id="1" name="Shape 139"/>
         <p:cNvGrpSpPr/>
         <p:nvPr/>
       </p:nvGrpSpPr>
@@ -1790,68 +1840,27 @@
       </p:grpSpPr>
       <p:sp>
         <p:nvSpPr>
-          <p:cNvPr id="127" name="Google Shape;127;p7:notes"/>
-          <p:cNvSpPr txBox="1"/>
+          <p:cNvPr id="140" name="Google Shape;140;p9:notes"/>
+          <p:cNvSpPr>
+            <a:spLocks noGrp="1" noRot="1" noChangeAspect="1"/>
+          </p:cNvSpPr>
           <p:nvPr>
-            <p:ph idx="1" type="body"/>
-          </p:nvPr>
-        </p:nvSpPr>
-        <p:spPr>
-          <a:xfrm>
-            <a:off x="685800" y="4343400"/>
-            <a:ext cx="5486400" cy="4114800"/>
-          </a:xfrm>
-          <a:prstGeom prst="rect">
-            <a:avLst/>
-          </a:prstGeom>
-          <a:noFill/>
-          <a:ln>
-            <a:noFill/>
-          </a:ln>
-        </p:spPr>
-        <p:txBody>
-          <a:bodyPr anchorCtr="0" anchor="t" bIns="91425" lIns="91425" spcFirstLastPara="1" rIns="91425" wrap="square" tIns="91425">
-            <a:noAutofit/>
-          </a:bodyPr>
-          <a:lstStyle/>
-          <a:p>
-            <a:pPr indent="0" lvl="0" marL="0" rtl="0" algn="l">
-              <a:lnSpc>
-                <a:spcPct val="100000"/>
-              </a:lnSpc>
-              <a:spcBef>
-                <a:spcPts val="0"/>
-              </a:spcBef>
-              <a:spcAft>
-                <a:spcPts val="0"/>
-              </a:spcAft>
-              <a:buSzPts val="1100"/>
-              <a:buNone/>
-            </a:pPr>
-            <a:r>
-              <a:t/>
-            </a:r>
-            <a:endParaRPr/>
-          </a:p>
-        </p:txBody>
-      </p:sp>
-      <p:sp>
-        <p:nvSpPr>
-          <p:cNvPr id="128" name="Google Shape;128;p7:notes"/>
-          <p:cNvSpPr/>
-          <p:nvPr>
-            <p:ph idx="2" type="sldImg"/>
+            <p:ph type="sldImg" idx="2"/>
           </p:nvPr>
         </p:nvSpPr>
         <p:spPr>
           <a:xfrm>
             <a:off x="381300" y="685800"/>
-            <a:ext cx="6096075" cy="3429000"/>
+            <a:ext cx="6096000" cy="3429000"/>
           </a:xfrm>
           <a:custGeom>
-            <a:rect b="b" l="l" r="r" t="t"/>
+            <a:avLst/>
+            <a:gdLst/>
+            <a:ahLst/>
+            <a:cxnLst/>
+            <a:rect l="l" t="t" r="r" b="b"/>
             <a:pathLst>
-              <a:path extrusionOk="0" h="120000" w="120000">
+              <a:path w="120000" h="120000" extrusionOk="0">
                 <a:moveTo>
                   <a:pt x="0" y="0"/>
                 </a:moveTo>
@@ -1869,48 +1878,25 @@
             </a:pathLst>
           </a:custGeom>
           <a:noFill/>
-          <a:ln cap="flat" cmpd="sng" w="9525">
+          <a:ln w="9525" cap="flat" cmpd="sng">
             <a:solidFill>
               <a:srgbClr val="000000"/>
             </a:solidFill>
             <a:prstDash val="solid"/>
             <a:round/>
-            <a:headEnd len="sm" w="sm" type="none"/>
-            <a:tailEnd len="sm" w="sm" type="none"/>
+            <a:headEnd type="none" w="sm" len="sm"/>
+            <a:tailEnd type="none" w="sm" len="sm"/>
           </a:ln>
         </p:spPr>
       </p:sp>
-    </p:spTree>
-  </p:cSld>
-  <p:clrMapOvr>
-    <a:masterClrMapping/>
-  </p:clrMapOvr>
-</p:notes>
-</file>
-
-<file path=ppt/notesSlides/notesSlide8.xml><?xml version="1.0" encoding="utf-8"?>
-<p:notes xmlns:a="http://schemas.openxmlformats.org/drawingml/2006/main" xmlns:r="http://schemas.openxmlformats.org/officeDocument/2006/relationships" xmlns:mc="http://schemas.openxmlformats.org/markup-compatibility/2006" xmlns:mv="urn:schemas-microsoft-com:mac:vml" xmlns:p="http://schemas.openxmlformats.org/presentationml/2006/main" xmlns:c="http://schemas.openxmlformats.org/drawingml/2006/chart" xmlns:dgm="http://schemas.openxmlformats.org/drawingml/2006/diagram" xmlns:o="urn:schemas-microsoft-com:office:office" xmlns:v="urn:schemas-microsoft-com:vml" xmlns:pvml="urn:schemas-microsoft-com:office:powerpoint" xmlns:com="http://schemas.openxmlformats.org/drawingml/2006/compatibility" xmlns:p14="http://schemas.microsoft.com/office/powerpoint/2010/main" xmlns:p15="http://schemas.microsoft.com/office/powerpoint/2012/main" xmlns:ahyp="http://schemas.microsoft.com/office/drawing/2018/hyperlinkcolor" showMasterPhAnim="0" showMasterSp="0">
-  <p:cSld>
-    <p:spTree>
-      <p:nvGrpSpPr>
-        <p:cNvPr id="133" name="Shape 133"/>
-        <p:cNvGrpSpPr/>
-        <p:nvPr/>
-      </p:nvGrpSpPr>
-      <p:grpSpPr>
-        <a:xfrm>
-          <a:off x="0" y="0"/>
-          <a:ext cx="0" cy="0"/>
-          <a:chOff x="0" y="0"/>
-          <a:chExt cx="0" cy="0"/>
-        </a:xfrm>
-      </p:grpSpPr>
       <p:sp>
         <p:nvSpPr>
-          <p:cNvPr id="134" name="Google Shape;134;p8:notes"/>
-          <p:cNvSpPr txBox="1"/>
+          <p:cNvPr id="141" name="Google Shape;141;p9:notes"/>
+          <p:cNvSpPr txBox="1">
+            <a:spLocks noGrp="1"/>
+          </p:cNvSpPr>
           <p:nvPr>
-            <p:ph idx="1" type="body"/>
+            <p:ph type="body" idx="1"/>
           </p:nvPr>
         </p:nvSpPr>
         <p:spPr>
@@ -1927,12 +1913,12 @@
           </a:ln>
         </p:spPr>
         <p:txBody>
-          <a:bodyPr anchorCtr="0" anchor="t" bIns="91425" lIns="91425" spcFirstLastPara="1" rIns="91425" wrap="square" tIns="91425">
+          <a:bodyPr spcFirstLastPara="1" wrap="square" lIns="91425" tIns="91425" rIns="91425" bIns="91425" anchor="t" anchorCtr="0">
             <a:noAutofit/>
           </a:bodyPr>
           <a:lstStyle/>
           <a:p>
-            <a:pPr indent="0" lvl="0" marL="0" rtl="0" algn="l">
+            <a:pPr marL="0" lvl="0" indent="0" algn="l" rtl="0">
               <a:lnSpc>
                 <a:spcPct val="100000"/>
               </a:lnSpc>
@@ -1945,30 +1931,104 @@
               <a:buSzPts val="1100"/>
               <a:buNone/>
             </a:pPr>
-            <a:r>
-              <a:t/>
-            </a:r>
+            <a:endParaRPr/>
+          </a:p>
+        </p:txBody>
+      </p:sp>
+    </p:spTree>
+  </p:cSld>
+  <p:clrMapOvr>
+    <a:masterClrMapping/>
+  </p:clrMapOvr>
+</p:notes>
+</file>
+
+<file path=ppt/notesSlides/notesSlide9.xml><?xml version="1.0" encoding="utf-8"?>
+<p:notes xmlns:a="http://schemas.openxmlformats.org/drawingml/2006/main" xmlns:r="http://schemas.openxmlformats.org/officeDocument/2006/relationships" xmlns:p="http://schemas.openxmlformats.org/presentationml/2006/main" showMasterSp="0" showMasterPhAnim="0">
+  <p:cSld>
+    <p:spTree>
+      <p:nvGrpSpPr>
+        <p:cNvPr id="1" name="Shape 145"/>
+        <p:cNvGrpSpPr/>
+        <p:nvPr/>
+      </p:nvGrpSpPr>
+      <p:grpSpPr>
+        <a:xfrm>
+          <a:off x="0" y="0"/>
+          <a:ext cx="0" cy="0"/>
+          <a:chOff x="0" y="0"/>
+          <a:chExt cx="0" cy="0"/>
+        </a:xfrm>
+      </p:grpSpPr>
+      <p:sp>
+        <p:nvSpPr>
+          <p:cNvPr id="146" name="Google Shape;146;p10:notes"/>
+          <p:cNvSpPr txBox="1">
+            <a:spLocks noGrp="1"/>
+          </p:cNvSpPr>
+          <p:nvPr>
+            <p:ph type="body" idx="1"/>
+          </p:nvPr>
+        </p:nvSpPr>
+        <p:spPr>
+          <a:xfrm>
+            <a:off x="685800" y="4343400"/>
+            <a:ext cx="5486400" cy="4114800"/>
+          </a:xfrm>
+          <a:prstGeom prst="rect">
+            <a:avLst/>
+          </a:prstGeom>
+          <a:noFill/>
+          <a:ln>
+            <a:noFill/>
+          </a:ln>
+        </p:spPr>
+        <p:txBody>
+          <a:bodyPr spcFirstLastPara="1" wrap="square" lIns="91425" tIns="91425" rIns="91425" bIns="91425" anchor="t" anchorCtr="0">
+            <a:noAutofit/>
+          </a:bodyPr>
+          <a:lstStyle/>
+          <a:p>
+            <a:pPr marL="0" lvl="0" indent="0" algn="l" rtl="0">
+              <a:lnSpc>
+                <a:spcPct val="100000"/>
+              </a:lnSpc>
+              <a:spcBef>
+                <a:spcPts val="0"/>
+              </a:spcBef>
+              <a:spcAft>
+                <a:spcPts val="0"/>
+              </a:spcAft>
+              <a:buSzPts val="1100"/>
+              <a:buNone/>
+            </a:pPr>
             <a:endParaRPr/>
           </a:p>
         </p:txBody>
       </p:sp>
       <p:sp>
         <p:nvSpPr>
-          <p:cNvPr id="135" name="Google Shape;135;p8:notes"/>
-          <p:cNvSpPr/>
+          <p:cNvPr id="147" name="Google Shape;147;p10:notes"/>
+          <p:cNvSpPr>
+            <a:spLocks noGrp="1" noRot="1" noChangeAspect="1"/>
+          </p:cNvSpPr>
           <p:nvPr>
-            <p:ph idx="2" type="sldImg"/>
+            <p:ph type="sldImg" idx="2"/>
           </p:nvPr>
         </p:nvSpPr>
         <p:spPr>
           <a:xfrm>
-            <a:off x="381300" y="685800"/>
-            <a:ext cx="6096075" cy="3429000"/>
+            <a:off x="381000" y="685800"/>
+            <a:ext cx="6096000" cy="3429000"/>
           </a:xfrm>
           <a:custGeom>
-            <a:rect b="b" l="l" r="r" t="t"/>
+            <a:avLst/>
+            <a:gdLst/>
+            <a:ahLst/>
+            <a:cxnLst/>
+            <a:rect l="l" t="t" r="r" b="b"/>
             <a:pathLst>
-              <a:path extrusionOk="0" h="120000" w="120000">
+              <a:path w="120000" h="120000" extrusionOk="0">
                 <a:moveTo>
                   <a:pt x="0" y="0"/>
                 </a:moveTo>
@@ -1986,14 +2046,14 @@
             </a:pathLst>
           </a:custGeom>
           <a:noFill/>
-          <a:ln cap="flat" cmpd="sng" w="9525">
+          <a:ln w="9525" cap="flat" cmpd="sng">
             <a:solidFill>
               <a:srgbClr val="000000"/>
             </a:solidFill>
             <a:prstDash val="solid"/>
             <a:round/>
-            <a:headEnd len="sm" w="sm" type="none"/>
-            <a:tailEnd len="sm" w="sm" type="none"/>
+            <a:headEnd type="none" w="sm" len="sm"/>
+            <a:tailEnd type="none" w="sm" len="sm"/>
           </a:ln>
         </p:spPr>
       </p:sp>
@@ -2005,129 +2065,12 @@
 </p:notes>
 </file>
 
-<file path=ppt/notesSlides/notesSlide9.xml><?xml version="1.0" encoding="utf-8"?>
-<p:notes xmlns:a="http://schemas.openxmlformats.org/drawingml/2006/main" xmlns:r="http://schemas.openxmlformats.org/officeDocument/2006/relationships" xmlns:mc="http://schemas.openxmlformats.org/markup-compatibility/2006" xmlns:mv="urn:schemas-microsoft-com:mac:vml" xmlns:p="http://schemas.openxmlformats.org/presentationml/2006/main" xmlns:c="http://schemas.openxmlformats.org/drawingml/2006/chart" xmlns:dgm="http://schemas.openxmlformats.org/drawingml/2006/diagram" xmlns:o="urn:schemas-microsoft-com:office:office" xmlns:v="urn:schemas-microsoft-com:vml" xmlns:pvml="urn:schemas-microsoft-com:office:powerpoint" xmlns:com="http://schemas.openxmlformats.org/drawingml/2006/compatibility" xmlns:p14="http://schemas.microsoft.com/office/powerpoint/2010/main" xmlns:p15="http://schemas.microsoft.com/office/powerpoint/2012/main" xmlns:ahyp="http://schemas.microsoft.com/office/drawing/2018/hyperlinkcolor" showMasterPhAnim="0" showMasterSp="0">
-  <p:cSld>
-    <p:spTree>
-      <p:nvGrpSpPr>
-        <p:cNvPr id="139" name="Shape 139"/>
-        <p:cNvGrpSpPr/>
-        <p:nvPr/>
-      </p:nvGrpSpPr>
-      <p:grpSpPr>
-        <a:xfrm>
-          <a:off x="0" y="0"/>
-          <a:ext cx="0" cy="0"/>
-          <a:chOff x="0" y="0"/>
-          <a:chExt cx="0" cy="0"/>
-        </a:xfrm>
-      </p:grpSpPr>
-      <p:sp>
-        <p:nvSpPr>
-          <p:cNvPr id="140" name="Google Shape;140;p9:notes"/>
-          <p:cNvSpPr/>
-          <p:nvPr>
-            <p:ph idx="2" type="sldImg"/>
-          </p:nvPr>
-        </p:nvSpPr>
-        <p:spPr>
-          <a:xfrm>
-            <a:off x="381300" y="685800"/>
-            <a:ext cx="6096000" cy="3429000"/>
-          </a:xfrm>
-          <a:custGeom>
-            <a:rect b="b" l="l" r="r" t="t"/>
-            <a:pathLst>
-              <a:path extrusionOk="0" h="120000" w="120000">
-                <a:moveTo>
-                  <a:pt x="0" y="0"/>
-                </a:moveTo>
-                <a:lnTo>
-                  <a:pt x="120000" y="0"/>
-                </a:lnTo>
-                <a:lnTo>
-                  <a:pt x="120000" y="120000"/>
-                </a:lnTo>
-                <a:lnTo>
-                  <a:pt x="0" y="120000"/>
-                </a:lnTo>
-                <a:close/>
-              </a:path>
-            </a:pathLst>
-          </a:custGeom>
-          <a:noFill/>
-          <a:ln cap="flat" cmpd="sng" w="9525">
-            <a:solidFill>
-              <a:srgbClr val="000000"/>
-            </a:solidFill>
-            <a:prstDash val="solid"/>
-            <a:round/>
-            <a:headEnd len="sm" w="sm" type="none"/>
-            <a:tailEnd len="sm" w="sm" type="none"/>
-          </a:ln>
-        </p:spPr>
-      </p:sp>
-      <p:sp>
-        <p:nvSpPr>
-          <p:cNvPr id="141" name="Google Shape;141;p9:notes"/>
-          <p:cNvSpPr txBox="1"/>
-          <p:nvPr>
-            <p:ph idx="1" type="body"/>
-          </p:nvPr>
-        </p:nvSpPr>
-        <p:spPr>
-          <a:xfrm>
-            <a:off x="685800" y="4343400"/>
-            <a:ext cx="5486400" cy="4114800"/>
-          </a:xfrm>
-          <a:prstGeom prst="rect">
-            <a:avLst/>
-          </a:prstGeom>
-          <a:noFill/>
-          <a:ln>
-            <a:noFill/>
-          </a:ln>
-        </p:spPr>
-        <p:txBody>
-          <a:bodyPr anchorCtr="0" anchor="t" bIns="91425" lIns="91425" spcFirstLastPara="1" rIns="91425" wrap="square" tIns="91425">
-            <a:noAutofit/>
-          </a:bodyPr>
-          <a:lstStyle/>
-          <a:p>
-            <a:pPr indent="0" lvl="0" marL="0" rtl="0" algn="l">
-              <a:lnSpc>
-                <a:spcPct val="100000"/>
-              </a:lnSpc>
-              <a:spcBef>
-                <a:spcPts val="0"/>
-              </a:spcBef>
-              <a:spcAft>
-                <a:spcPts val="0"/>
-              </a:spcAft>
-              <a:buSzPts val="1100"/>
-              <a:buNone/>
-            </a:pPr>
-            <a:r>
-              <a:t/>
-            </a:r>
-            <a:endParaRPr/>
-          </a:p>
-        </p:txBody>
-      </p:sp>
-    </p:spTree>
-  </p:cSld>
-  <p:clrMapOvr>
-    <a:masterClrMapping/>
-  </p:clrMapOvr>
-</p:notes>
-</file>
-
 <file path=ppt/slideLayouts/slideLayout1.xml><?xml version="1.0" encoding="utf-8"?>
-<p:sldLayout xmlns:a="http://schemas.openxmlformats.org/drawingml/2006/main" xmlns:r="http://schemas.openxmlformats.org/officeDocument/2006/relationships" xmlns:mc="http://schemas.openxmlformats.org/markup-compatibility/2006" xmlns:mv="urn:schemas-microsoft-com:mac:vml" xmlns:p="http://schemas.openxmlformats.org/presentationml/2006/main" xmlns:c="http://schemas.openxmlformats.org/drawingml/2006/chart" xmlns:dgm="http://schemas.openxmlformats.org/drawingml/2006/diagram" xmlns:o="urn:schemas-microsoft-com:office:office" xmlns:v="urn:schemas-microsoft-com:vml" xmlns:pvml="urn:schemas-microsoft-com:office:powerpoint" xmlns:com="http://schemas.openxmlformats.org/drawingml/2006/compatibility" xmlns:p14="http://schemas.microsoft.com/office/powerpoint/2010/main" xmlns:p15="http://schemas.microsoft.com/office/powerpoint/2012/main" xmlns:ahyp="http://schemas.microsoft.com/office/drawing/2018/hyperlinkcolor" matchingName="Title slide" type="title">
+<p:sldLayout xmlns:a="http://schemas.openxmlformats.org/drawingml/2006/main" xmlns:r="http://schemas.openxmlformats.org/officeDocument/2006/relationships" xmlns:p="http://schemas.openxmlformats.org/presentationml/2006/main" matchingName="Title slide" type="title">
   <p:cSld name="TITLE">
     <p:spTree>
       <p:nvGrpSpPr>
-        <p:cNvPr id="8" name="Shape 8"/>
+        <p:cNvPr id="1" name="Shape 8"/>
         <p:cNvGrpSpPr/>
         <p:nvPr/>
       </p:nvGrpSpPr>
@@ -2163,7 +2106,7 @@
             <a:blip r:embed="rId2">
               <a:alphaModFix/>
             </a:blip>
-            <a:srcRect b="0" l="0" r="0" t="0"/>
+            <a:srcRect/>
             <a:stretch/>
           </p:blipFill>
           <p:spPr>
@@ -2190,7 +2133,7 @@
             <a:blip r:embed="rId3">
               <a:alphaModFix/>
             </a:blip>
-            <a:srcRect b="0" l="0" r="0" t="0"/>
+            <a:srcRect/>
             <a:stretch/>
           </p:blipFill>
           <p:spPr>
@@ -2211,9 +2154,11 @@
       <p:sp>
         <p:nvSpPr>
           <p:cNvPr id="12" name="Google Shape;12;p2"/>
-          <p:cNvSpPr/>
+          <p:cNvSpPr>
+            <a:spLocks noGrp="1"/>
+          </p:cNvSpPr>
           <p:nvPr>
-            <p:ph idx="2" type="pic"/>
+            <p:ph type="pic" idx="2"/>
           </p:nvPr>
         </p:nvSpPr>
         <p:spPr>
@@ -2225,21 +2170,23 @@
             <a:avLst/>
           </a:prstGeom>
           <a:noFill/>
-          <a:ln cap="flat" cmpd="sng" w="19050">
+          <a:ln w="19050" cap="flat" cmpd="sng">
             <a:solidFill>
               <a:schemeClr val="dk2"/>
             </a:solidFill>
             <a:prstDash val="solid"/>
             <a:round/>
-            <a:headEnd len="sm" w="sm" type="none"/>
-            <a:tailEnd len="sm" w="sm" type="none"/>
+            <a:headEnd type="none" w="sm" len="sm"/>
+            <a:tailEnd type="none" w="sm" len="sm"/>
           </a:ln>
         </p:spPr>
       </p:sp>
       <p:sp>
         <p:nvSpPr>
           <p:cNvPr id="13" name="Google Shape;13;p2"/>
-          <p:cNvSpPr txBox="1"/>
+          <p:cNvSpPr txBox="1">
+            <a:spLocks noGrp="1"/>
+          </p:cNvSpPr>
           <p:nvPr>
             <p:ph type="ctrTitle"/>
           </p:nvPr>
@@ -2258,7 +2205,7 @@
           </a:ln>
         </p:spPr>
         <p:txBody>
-          <a:bodyPr anchorCtr="0" anchor="t" bIns="91425" lIns="91425" spcFirstLastPara="1" rIns="91425" wrap="square" tIns="91425">
+          <a:bodyPr spcFirstLastPara="1" wrap="square" lIns="91425" tIns="91425" rIns="91425" bIns="91425" anchor="t" anchorCtr="0">
             <a:noAutofit/>
           </a:bodyPr>
           <a:lstStyle>
@@ -2448,15 +2395,19 @@
               </a:defRPr>
             </a:lvl9pPr>
           </a:lstStyle>
-          <a:p/>
+          <a:p>
+            <a:endParaRPr/>
+          </a:p>
         </p:txBody>
       </p:sp>
       <p:sp>
         <p:nvSpPr>
           <p:cNvPr id="14" name="Google Shape;14;p2"/>
-          <p:cNvSpPr txBox="1"/>
+          <p:cNvSpPr txBox="1">
+            <a:spLocks noGrp="1"/>
+          </p:cNvSpPr>
           <p:nvPr>
-            <p:ph idx="1" type="subTitle"/>
+            <p:ph type="subTitle" idx="1"/>
           </p:nvPr>
         </p:nvSpPr>
         <p:spPr>
@@ -2473,7 +2424,7 @@
           </a:ln>
         </p:spPr>
         <p:txBody>
-          <a:bodyPr anchorCtr="0" anchor="t" bIns="91425" lIns="91425" spcFirstLastPara="1" rIns="91425" wrap="square" tIns="91425">
+          <a:bodyPr spcFirstLastPara="1" wrap="square" lIns="91425" tIns="91425" rIns="91425" bIns="91425" anchor="t" anchorCtr="0">
             <a:noAutofit/>
           </a:bodyPr>
           <a:lstStyle>
@@ -2604,7 +2555,9 @@
               <a:defRPr sz="1800"/>
             </a:lvl9pPr>
           </a:lstStyle>
-          <a:p/>
+          <a:p>
+            <a:endParaRPr/>
+          </a:p>
         </p:txBody>
       </p:sp>
       <p:pic>
@@ -2617,7 +2570,7 @@
           <a:blip r:embed="rId3">
             <a:alphaModFix/>
           </a:blip>
-          <a:srcRect b="0" l="61982" r="0" t="0"/>
+          <a:srcRect l="61982"/>
           <a:stretch/>
         </p:blipFill>
         <p:spPr>
@@ -2629,14 +2582,14 @@
             <a:avLst/>
           </a:prstGeom>
           <a:noFill/>
-          <a:ln cap="flat" cmpd="sng" w="9525">
+          <a:ln w="9525" cap="flat" cmpd="sng">
             <a:solidFill>
               <a:schemeClr val="dk2"/>
             </a:solidFill>
             <a:prstDash val="solid"/>
             <a:round/>
-            <a:headEnd len="sm" w="sm" type="none"/>
-            <a:tailEnd len="sm" w="sm" type="none"/>
+            <a:headEnd type="none" w="sm" len="sm"/>
+            <a:tailEnd type="none" w="sm" len="sm"/>
           </a:ln>
         </p:spPr>
       </p:pic>
@@ -2649,16 +2602,17 @@
 </file>
 
 <file path=ppt/slideLayouts/slideLayout10.xml><?xml version="1.0" encoding="utf-8"?>
-<p:sldLayout xmlns:a="http://schemas.openxmlformats.org/drawingml/2006/main" xmlns:r="http://schemas.openxmlformats.org/officeDocument/2006/relationships" xmlns:mc="http://schemas.openxmlformats.org/markup-compatibility/2006" xmlns:mv="urn:schemas-microsoft-com:mac:vml" xmlns:p="http://schemas.openxmlformats.org/presentationml/2006/main" xmlns:c="http://schemas.openxmlformats.org/drawingml/2006/chart" xmlns:dgm="http://schemas.openxmlformats.org/drawingml/2006/diagram" xmlns:o="urn:schemas-microsoft-com:office:office" xmlns:v="urn:schemas-microsoft-com:vml" xmlns:pvml="urn:schemas-microsoft-com:office:powerpoint" xmlns:com="http://schemas.openxmlformats.org/drawingml/2006/compatibility" xmlns:p14="http://schemas.microsoft.com/office/powerpoint/2010/main" xmlns:p15="http://schemas.microsoft.com/office/powerpoint/2012/main" xmlns:ahyp="http://schemas.microsoft.com/office/drawing/2018/hyperlinkcolor" matchingName="Blank" type="blank">
+<p:sldLayout xmlns:a="http://schemas.openxmlformats.org/drawingml/2006/main" xmlns:r="http://schemas.openxmlformats.org/officeDocument/2006/relationships" xmlns:p="http://schemas.openxmlformats.org/presentationml/2006/main" matchingName="Blank" type="blank">
   <p:cSld name="BLANK">
     <p:bg>
       <p:bgPr>
         <a:noFill/>
+        <a:effectLst/>
       </p:bgPr>
     </p:bg>
     <p:spTree>
       <p:nvGrpSpPr>
-        <p:cNvPr id="66" name="Shape 66"/>
+        <p:cNvPr id="1" name="Shape 66"/>
         <p:cNvGrpSpPr/>
         <p:nvPr/>
       </p:nvGrpSpPr>
@@ -2679,11 +2633,11 @@
 </file>
 
 <file path=ppt/slideLayouts/slideLayout11.xml><?xml version="1.0" encoding="utf-8"?>
-<p:sldLayout xmlns:a="http://schemas.openxmlformats.org/drawingml/2006/main" xmlns:r="http://schemas.openxmlformats.org/officeDocument/2006/relationships" xmlns:mc="http://schemas.openxmlformats.org/markup-compatibility/2006" xmlns:mv="urn:schemas-microsoft-com:mac:vml" xmlns:p="http://schemas.openxmlformats.org/presentationml/2006/main" xmlns:c="http://schemas.openxmlformats.org/drawingml/2006/chart" xmlns:dgm="http://schemas.openxmlformats.org/drawingml/2006/diagram" xmlns:o="urn:schemas-microsoft-com:office:office" xmlns:v="urn:schemas-microsoft-com:vml" xmlns:pvml="urn:schemas-microsoft-com:office:powerpoint" xmlns:com="http://schemas.openxmlformats.org/drawingml/2006/compatibility" xmlns:p14="http://schemas.microsoft.com/office/powerpoint/2010/main" xmlns:p15="http://schemas.microsoft.com/office/powerpoint/2012/main" xmlns:ahyp="http://schemas.microsoft.com/office/drawing/2018/hyperlinkcolor" matchingName="Title only 2">
+<p:sldLayout xmlns:a="http://schemas.openxmlformats.org/drawingml/2006/main" xmlns:r="http://schemas.openxmlformats.org/officeDocument/2006/relationships" xmlns:p="http://schemas.openxmlformats.org/presentationml/2006/main" matchingName="Title only 2">
   <p:cSld name="TITLE_ONLY_2">
     <p:spTree>
       <p:nvGrpSpPr>
-        <p:cNvPr id="67" name="Shape 67"/>
+        <p:cNvPr id="1" name="Shape 67"/>
         <p:cNvGrpSpPr/>
         <p:nvPr/>
       </p:nvGrpSpPr>
@@ -2719,7 +2673,7 @@
             <a:blip r:embed="rId2">
               <a:alphaModFix/>
             </a:blip>
-            <a:srcRect b="0" l="0" r="0" t="0"/>
+            <a:srcRect/>
             <a:stretch/>
           </p:blipFill>
           <p:spPr>
@@ -2746,7 +2700,7 @@
             <a:blip r:embed="rId3">
               <a:alphaModFix/>
             </a:blip>
-            <a:srcRect b="0" l="0" r="0" t="0"/>
+            <a:srcRect/>
             <a:stretch/>
           </p:blipFill>
           <p:spPr>
@@ -2767,7 +2721,9 @@
       <p:sp>
         <p:nvSpPr>
           <p:cNvPr id="71" name="Google Shape;71;p12"/>
-          <p:cNvSpPr txBox="1"/>
+          <p:cNvSpPr txBox="1">
+            <a:spLocks noGrp="1"/>
+          </p:cNvSpPr>
           <p:nvPr>
             <p:ph type="title"/>
           </p:nvPr>
@@ -2786,7 +2742,7 @@
           </a:ln>
         </p:spPr>
         <p:txBody>
-          <a:bodyPr anchorCtr="0" anchor="t" bIns="91425" lIns="91425" spcFirstLastPara="1" rIns="91425" wrap="square" tIns="91425">
+          <a:bodyPr spcFirstLastPara="1" wrap="square" lIns="91425" tIns="91425" rIns="91425" bIns="91425" anchor="t" anchorCtr="0">
             <a:noAutofit/>
           </a:bodyPr>
           <a:lstStyle>
@@ -2917,7 +2873,9 @@
               <a:defRPr/>
             </a:lvl9pPr>
           </a:lstStyle>
-          <a:p/>
+          <a:p>
+            <a:endParaRPr/>
+          </a:p>
         </p:txBody>
       </p:sp>
     </p:spTree>
@@ -2929,11 +2887,11 @@
 </file>
 
 <file path=ppt/slideLayouts/slideLayout12.xml><?xml version="1.0" encoding="utf-8"?>
-<p:sldLayout xmlns:a="http://schemas.openxmlformats.org/drawingml/2006/main" xmlns:r="http://schemas.openxmlformats.org/officeDocument/2006/relationships" xmlns:mc="http://schemas.openxmlformats.org/markup-compatibility/2006" xmlns:mv="urn:schemas-microsoft-com:mac:vml" xmlns:p="http://schemas.openxmlformats.org/presentationml/2006/main" xmlns:c="http://schemas.openxmlformats.org/drawingml/2006/chart" xmlns:dgm="http://schemas.openxmlformats.org/drawingml/2006/diagram" xmlns:o="urn:schemas-microsoft-com:office:office" xmlns:v="urn:schemas-microsoft-com:vml" xmlns:pvml="urn:schemas-microsoft-com:office:powerpoint" xmlns:com="http://schemas.openxmlformats.org/drawingml/2006/compatibility" xmlns:p14="http://schemas.microsoft.com/office/powerpoint/2010/main" xmlns:p15="http://schemas.microsoft.com/office/powerpoint/2012/main" xmlns:ahyp="http://schemas.microsoft.com/office/drawing/2018/hyperlinkcolor" matchingName="Background">
+<p:sldLayout xmlns:a="http://schemas.openxmlformats.org/drawingml/2006/main" xmlns:r="http://schemas.openxmlformats.org/officeDocument/2006/relationships" xmlns:p="http://schemas.openxmlformats.org/presentationml/2006/main" matchingName="Background">
   <p:cSld name="BLANK_1_1_1_1_1_1_1">
     <p:spTree>
       <p:nvGrpSpPr>
-        <p:cNvPr id="72" name="Shape 72"/>
+        <p:cNvPr id="1" name="Shape 72"/>
         <p:cNvGrpSpPr/>
         <p:nvPr/>
       </p:nvGrpSpPr>
@@ -2969,7 +2927,7 @@
             <a:blip r:embed="rId2">
               <a:alphaModFix/>
             </a:blip>
-            <a:srcRect b="0" l="0" r="0" t="0"/>
+            <a:srcRect/>
             <a:stretch/>
           </p:blipFill>
           <p:spPr>
@@ -2996,7 +2954,7 @@
             <a:blip r:embed="rId3">
               <a:alphaModFix/>
             </a:blip>
-            <a:srcRect b="0" l="0" r="0" t="0"/>
+            <a:srcRect/>
             <a:stretch/>
           </p:blipFill>
           <p:spPr>
@@ -3023,11 +2981,11 @@
 </file>
 
 <file path=ppt/slideLayouts/slideLayout13.xml><?xml version="1.0" encoding="utf-8"?>
-<p:sldLayout xmlns:a="http://schemas.openxmlformats.org/drawingml/2006/main" xmlns:r="http://schemas.openxmlformats.org/officeDocument/2006/relationships" xmlns:mc="http://schemas.openxmlformats.org/markup-compatibility/2006" xmlns:mv="urn:schemas-microsoft-com:mac:vml" xmlns:p="http://schemas.openxmlformats.org/presentationml/2006/main" xmlns:c="http://schemas.openxmlformats.org/drawingml/2006/chart" xmlns:dgm="http://schemas.openxmlformats.org/drawingml/2006/diagram" xmlns:o="urn:schemas-microsoft-com:office:office" xmlns:v="urn:schemas-microsoft-com:vml" xmlns:pvml="urn:schemas-microsoft-com:office:powerpoint" xmlns:com="http://schemas.openxmlformats.org/drawingml/2006/compatibility" xmlns:p14="http://schemas.microsoft.com/office/powerpoint/2010/main" xmlns:p15="http://schemas.microsoft.com/office/powerpoint/2012/main" xmlns:ahyp="http://schemas.microsoft.com/office/drawing/2018/hyperlinkcolor" matchingName="Background 1">
+<p:sldLayout xmlns:a="http://schemas.openxmlformats.org/drawingml/2006/main" xmlns:r="http://schemas.openxmlformats.org/officeDocument/2006/relationships" xmlns:p="http://schemas.openxmlformats.org/presentationml/2006/main" matchingName="Background 1">
   <p:cSld name="BLANK_1_1_1_1_1_1_1_1">
     <p:spTree>
       <p:nvGrpSpPr>
-        <p:cNvPr id="76" name="Shape 76"/>
+        <p:cNvPr id="1" name="Shape 76"/>
         <p:cNvGrpSpPr/>
         <p:nvPr/>
       </p:nvGrpSpPr>
@@ -3048,11 +3006,11 @@
 </file>
 
 <file path=ppt/slideLayouts/slideLayout2.xml><?xml version="1.0" encoding="utf-8"?>
-<p:sldLayout xmlns:a="http://schemas.openxmlformats.org/drawingml/2006/main" xmlns:r="http://schemas.openxmlformats.org/officeDocument/2006/relationships" xmlns:mc="http://schemas.openxmlformats.org/markup-compatibility/2006" xmlns:mv="urn:schemas-microsoft-com:mac:vml" xmlns:p="http://schemas.openxmlformats.org/presentationml/2006/main" xmlns:c="http://schemas.openxmlformats.org/drawingml/2006/chart" xmlns:dgm="http://schemas.openxmlformats.org/drawingml/2006/diagram" xmlns:o="urn:schemas-microsoft-com:office:office" xmlns:v="urn:schemas-microsoft-com:vml" xmlns:pvml="urn:schemas-microsoft-com:office:powerpoint" xmlns:com="http://schemas.openxmlformats.org/drawingml/2006/compatibility" xmlns:p14="http://schemas.microsoft.com/office/powerpoint/2010/main" xmlns:p15="http://schemas.microsoft.com/office/powerpoint/2012/main" xmlns:ahyp="http://schemas.microsoft.com/office/drawing/2018/hyperlinkcolor" matchingName="Title and text">
+<p:sldLayout xmlns:a="http://schemas.openxmlformats.org/drawingml/2006/main" xmlns:r="http://schemas.openxmlformats.org/officeDocument/2006/relationships" xmlns:p="http://schemas.openxmlformats.org/presentationml/2006/main" matchingName="Title and text">
   <p:cSld name="CUSTOM">
     <p:spTree>
       <p:nvGrpSpPr>
-        <p:cNvPr id="16" name="Shape 16"/>
+        <p:cNvPr id="1" name="Shape 16"/>
         <p:cNvGrpSpPr/>
         <p:nvPr/>
       </p:nvGrpSpPr>
@@ -3074,7 +3032,7 @@
           <a:blip r:embed="rId2">
             <a:alphaModFix/>
           </a:blip>
-          <a:srcRect b="0" l="0" r="0" t="0"/>
+          <a:srcRect/>
           <a:stretch/>
         </p:blipFill>
         <p:spPr>
@@ -3094,7 +3052,9 @@
       <p:sp>
         <p:nvSpPr>
           <p:cNvPr id="18" name="Google Shape;18;p3"/>
-          <p:cNvSpPr txBox="1"/>
+          <p:cNvSpPr txBox="1">
+            <a:spLocks noGrp="1"/>
+          </p:cNvSpPr>
           <p:nvPr>
             <p:ph type="title"/>
           </p:nvPr>
@@ -3113,7 +3073,7 @@
           </a:ln>
         </p:spPr>
         <p:txBody>
-          <a:bodyPr anchorCtr="0" anchor="t" bIns="91425" lIns="91425" spcFirstLastPara="1" rIns="91425" wrap="square" tIns="91425">
+          <a:bodyPr spcFirstLastPara="1" wrap="square" lIns="91425" tIns="91425" rIns="91425" bIns="91425" anchor="t" anchorCtr="0">
             <a:noAutofit/>
           </a:bodyPr>
           <a:lstStyle>
@@ -3244,15 +3204,19 @@
               <a:defRPr/>
             </a:lvl9pPr>
           </a:lstStyle>
-          <a:p/>
+          <a:p>
+            <a:endParaRPr/>
+          </a:p>
         </p:txBody>
       </p:sp>
       <p:sp>
         <p:nvSpPr>
           <p:cNvPr id="19" name="Google Shape;19;p3"/>
-          <p:cNvSpPr txBox="1"/>
+          <p:cNvSpPr txBox="1">
+            <a:spLocks noGrp="1"/>
+          </p:cNvSpPr>
           <p:nvPr>
-            <p:ph idx="1" type="subTitle"/>
+            <p:ph type="subTitle" idx="1"/>
           </p:nvPr>
         </p:nvSpPr>
         <p:spPr>
@@ -3269,7 +3233,7 @@
           </a:ln>
         </p:spPr>
         <p:txBody>
-          <a:bodyPr anchorCtr="0" anchor="t" bIns="91425" lIns="91425" spcFirstLastPara="1" rIns="91425" wrap="square" tIns="91425">
+          <a:bodyPr spcFirstLastPara="1" wrap="square" lIns="91425" tIns="91425" rIns="91425" bIns="91425" anchor="t" anchorCtr="0">
             <a:noAutofit/>
           </a:bodyPr>
           <a:lstStyle>
@@ -3400,7 +3364,9 @@
               <a:defRPr/>
             </a:lvl9pPr>
           </a:lstStyle>
-          <a:p/>
+          <a:p>
+            <a:endParaRPr/>
+          </a:p>
         </p:txBody>
       </p:sp>
       <p:pic>
@@ -3413,7 +3379,7 @@
           <a:blip r:embed="rId3">
             <a:alphaModFix/>
           </a:blip>
-          <a:srcRect b="0" l="0" r="0" t="0"/>
+          <a:srcRect/>
           <a:stretch/>
         </p:blipFill>
         <p:spPr>
@@ -3439,11 +3405,11 @@
 </file>
 
 <file path=ppt/slideLayouts/slideLayout3.xml><?xml version="1.0" encoding="utf-8"?>
-<p:sldLayout xmlns:a="http://schemas.openxmlformats.org/drawingml/2006/main" xmlns:r="http://schemas.openxmlformats.org/officeDocument/2006/relationships" xmlns:mc="http://schemas.openxmlformats.org/markup-compatibility/2006" xmlns:mv="urn:schemas-microsoft-com:mac:vml" xmlns:p="http://schemas.openxmlformats.org/presentationml/2006/main" xmlns:c="http://schemas.openxmlformats.org/drawingml/2006/chart" xmlns:dgm="http://schemas.openxmlformats.org/drawingml/2006/diagram" xmlns:o="urn:schemas-microsoft-com:office:office" xmlns:v="urn:schemas-microsoft-com:vml" xmlns:pvml="urn:schemas-microsoft-com:office:powerpoint" xmlns:com="http://schemas.openxmlformats.org/drawingml/2006/compatibility" xmlns:p14="http://schemas.microsoft.com/office/powerpoint/2010/main" xmlns:p15="http://schemas.microsoft.com/office/powerpoint/2012/main" xmlns:ahyp="http://schemas.microsoft.com/office/drawing/2018/hyperlinkcolor" matchingName="Title and text 1">
+<p:sldLayout xmlns:a="http://schemas.openxmlformats.org/drawingml/2006/main" xmlns:r="http://schemas.openxmlformats.org/officeDocument/2006/relationships" xmlns:p="http://schemas.openxmlformats.org/presentationml/2006/main" matchingName="Title and text 1">
   <p:cSld name="ONE_COLUMN_TEXT_1">
     <p:spTree>
       <p:nvGrpSpPr>
-        <p:cNvPr id="21" name="Shape 21"/>
+        <p:cNvPr id="1" name="Shape 21"/>
         <p:cNvGrpSpPr/>
         <p:nvPr/>
       </p:nvGrpSpPr>
@@ -3465,7 +3431,7 @@
           <a:blip r:embed="rId2">
             <a:alphaModFix/>
           </a:blip>
-          <a:srcRect b="0" l="0" r="0" t="0"/>
+          <a:srcRect/>
           <a:stretch/>
         </p:blipFill>
         <p:spPr>
@@ -3485,7 +3451,9 @@
       <p:sp>
         <p:nvSpPr>
           <p:cNvPr id="23" name="Google Shape;23;p4"/>
-          <p:cNvSpPr txBox="1"/>
+          <p:cNvSpPr txBox="1">
+            <a:spLocks noGrp="1"/>
+          </p:cNvSpPr>
           <p:nvPr>
             <p:ph type="title"/>
           </p:nvPr>
@@ -3504,7 +3472,7 @@
           </a:ln>
         </p:spPr>
         <p:txBody>
-          <a:bodyPr anchorCtr="0" anchor="t" bIns="91425" lIns="91425" spcFirstLastPara="1" rIns="91425" wrap="square" tIns="91425">
+          <a:bodyPr spcFirstLastPara="1" wrap="square" lIns="91425" tIns="91425" rIns="91425" bIns="91425" anchor="t" anchorCtr="0">
             <a:noAutofit/>
           </a:bodyPr>
           <a:lstStyle>
@@ -3635,15 +3603,19 @@
               <a:defRPr/>
             </a:lvl9pPr>
           </a:lstStyle>
-          <a:p/>
+          <a:p>
+            <a:endParaRPr/>
+          </a:p>
         </p:txBody>
       </p:sp>
       <p:sp>
         <p:nvSpPr>
           <p:cNvPr id="24" name="Google Shape;24;p4"/>
-          <p:cNvSpPr txBox="1"/>
+          <p:cNvSpPr txBox="1">
+            <a:spLocks noGrp="1"/>
+          </p:cNvSpPr>
           <p:nvPr>
-            <p:ph idx="1" type="body"/>
+            <p:ph type="body" idx="1"/>
           </p:nvPr>
         </p:nvSpPr>
         <p:spPr>
@@ -3660,11 +3632,11 @@
           </a:ln>
         </p:spPr>
         <p:txBody>
-          <a:bodyPr anchorCtr="0" anchor="t" bIns="91425" lIns="91425" spcFirstLastPara="1" rIns="91425" wrap="square" tIns="91425">
+          <a:bodyPr spcFirstLastPara="1" wrap="square" lIns="91425" tIns="91425" rIns="91425" bIns="91425" anchor="t" anchorCtr="0">
             <a:noAutofit/>
           </a:bodyPr>
           <a:lstStyle>
-            <a:lvl1pPr indent="-317500" lvl="0" marL="457200" algn="l">
+            <a:lvl1pPr marL="457200" lvl="0" indent="-317500" algn="l">
               <a:lnSpc>
                 <a:spcPct val="100000"/>
               </a:lnSpc>
@@ -3678,7 +3650,7 @@
               <a:buChar char="●"/>
               <a:defRPr sz="1400"/>
             </a:lvl1pPr>
-            <a:lvl2pPr indent="-317500" lvl="1" marL="914400" algn="l">
+            <a:lvl2pPr marL="914400" lvl="1" indent="-317500" algn="l">
               <a:lnSpc>
                 <a:spcPct val="115000"/>
               </a:lnSpc>
@@ -3692,7 +3664,7 @@
               <a:buChar char="○"/>
               <a:defRPr/>
             </a:lvl2pPr>
-            <a:lvl3pPr indent="-317500" lvl="2" marL="1371600" algn="l">
+            <a:lvl3pPr marL="1371600" lvl="2" indent="-317500" algn="l">
               <a:lnSpc>
                 <a:spcPct val="115000"/>
               </a:lnSpc>
@@ -3706,7 +3678,7 @@
               <a:buChar char="■"/>
               <a:defRPr/>
             </a:lvl3pPr>
-            <a:lvl4pPr indent="-317500" lvl="3" marL="1828800" algn="l">
+            <a:lvl4pPr marL="1828800" lvl="3" indent="-317500" algn="l">
               <a:lnSpc>
                 <a:spcPct val="115000"/>
               </a:lnSpc>
@@ -3720,7 +3692,7 @@
               <a:buChar char="●"/>
               <a:defRPr/>
             </a:lvl4pPr>
-            <a:lvl5pPr indent="-317500" lvl="4" marL="2286000" algn="l">
+            <a:lvl5pPr marL="2286000" lvl="4" indent="-317500" algn="l">
               <a:lnSpc>
                 <a:spcPct val="115000"/>
               </a:lnSpc>
@@ -3734,7 +3706,7 @@
               <a:buChar char="○"/>
               <a:defRPr/>
             </a:lvl5pPr>
-            <a:lvl6pPr indent="-317500" lvl="5" marL="2743200" algn="l">
+            <a:lvl6pPr marL="2743200" lvl="5" indent="-317500" algn="l">
               <a:lnSpc>
                 <a:spcPct val="115000"/>
               </a:lnSpc>
@@ -3748,7 +3720,7 @@
               <a:buChar char="■"/>
               <a:defRPr/>
             </a:lvl6pPr>
-            <a:lvl7pPr indent="-317500" lvl="6" marL="3200400" algn="l">
+            <a:lvl7pPr marL="3200400" lvl="6" indent="-317500" algn="l">
               <a:lnSpc>
                 <a:spcPct val="115000"/>
               </a:lnSpc>
@@ -3762,7 +3734,7 @@
               <a:buChar char="●"/>
               <a:defRPr/>
             </a:lvl7pPr>
-            <a:lvl8pPr indent="-317500" lvl="7" marL="3657600" algn="l">
+            <a:lvl8pPr marL="3657600" lvl="7" indent="-317500" algn="l">
               <a:lnSpc>
                 <a:spcPct val="115000"/>
               </a:lnSpc>
@@ -3776,7 +3748,7 @@
               <a:buChar char="○"/>
               <a:defRPr/>
             </a:lvl8pPr>
-            <a:lvl9pPr indent="-317500" lvl="8" marL="4114800" algn="l">
+            <a:lvl9pPr marL="4114800" lvl="8" indent="-317500" algn="l">
               <a:lnSpc>
                 <a:spcPct val="115000"/>
               </a:lnSpc>
@@ -3791,15 +3763,19 @@
               <a:defRPr/>
             </a:lvl9pPr>
           </a:lstStyle>
-          <a:p/>
+          <a:p>
+            <a:endParaRPr/>
+          </a:p>
         </p:txBody>
       </p:sp>
       <p:sp>
         <p:nvSpPr>
           <p:cNvPr id="25" name="Google Shape;25;p4"/>
-          <p:cNvSpPr/>
+          <p:cNvSpPr>
+            <a:spLocks noGrp="1"/>
+          </p:cNvSpPr>
           <p:nvPr>
-            <p:ph idx="2" type="pic"/>
+            <p:ph type="pic" idx="2"/>
           </p:nvPr>
         </p:nvSpPr>
         <p:spPr>
@@ -3811,14 +3787,14 @@
             <a:avLst/>
           </a:prstGeom>
           <a:noFill/>
-          <a:ln cap="flat" cmpd="sng" w="9525">
+          <a:ln w="9525" cap="flat" cmpd="sng">
             <a:solidFill>
               <a:schemeClr val="dk2"/>
             </a:solidFill>
             <a:prstDash val="solid"/>
             <a:round/>
-            <a:headEnd len="sm" w="sm" type="none"/>
-            <a:tailEnd len="sm" w="sm" type="none"/>
+            <a:headEnd type="none" w="sm" len="sm"/>
+            <a:tailEnd type="none" w="sm" len="sm"/>
           </a:ln>
         </p:spPr>
       </p:sp>
@@ -3832,7 +3808,7 @@
           <a:blip r:embed="rId3">
             <a:alphaModFix/>
           </a:blip>
-          <a:srcRect b="0" l="0" r="0" t="0"/>
+          <a:srcRect/>
           <a:stretch/>
         </p:blipFill>
         <p:spPr>
@@ -3858,11 +3834,11 @@
 </file>
 
 <file path=ppt/slideLayouts/slideLayout4.xml><?xml version="1.0" encoding="utf-8"?>
-<p:sldLayout xmlns:a="http://schemas.openxmlformats.org/drawingml/2006/main" xmlns:r="http://schemas.openxmlformats.org/officeDocument/2006/relationships" xmlns:mc="http://schemas.openxmlformats.org/markup-compatibility/2006" xmlns:mv="urn:schemas-microsoft-com:mac:vml" xmlns:p="http://schemas.openxmlformats.org/presentationml/2006/main" xmlns:c="http://schemas.openxmlformats.org/drawingml/2006/chart" xmlns:dgm="http://schemas.openxmlformats.org/drawingml/2006/diagram" xmlns:o="urn:schemas-microsoft-com:office:office" xmlns:v="urn:schemas-microsoft-com:vml" xmlns:pvml="urn:schemas-microsoft-com:office:powerpoint" xmlns:com="http://schemas.openxmlformats.org/drawingml/2006/compatibility" xmlns:p14="http://schemas.microsoft.com/office/powerpoint/2010/main" xmlns:p15="http://schemas.microsoft.com/office/powerpoint/2012/main" xmlns:ahyp="http://schemas.microsoft.com/office/drawing/2018/hyperlinkcolor" matchingName="Thanks">
+<p:sldLayout xmlns:a="http://schemas.openxmlformats.org/drawingml/2006/main" xmlns:r="http://schemas.openxmlformats.org/officeDocument/2006/relationships" xmlns:p="http://schemas.openxmlformats.org/presentationml/2006/main" matchingName="Thanks">
   <p:cSld name="CUSTOM_3_1">
     <p:spTree>
       <p:nvGrpSpPr>
-        <p:cNvPr id="27" name="Shape 27"/>
+        <p:cNvPr id="1" name="Shape 27"/>
         <p:cNvGrpSpPr/>
         <p:nvPr/>
       </p:nvGrpSpPr>
@@ -3898,7 +3874,7 @@
             <a:blip r:embed="rId2">
               <a:alphaModFix/>
             </a:blip>
-            <a:srcRect b="0" l="0" r="0" t="0"/>
+            <a:srcRect/>
             <a:stretch/>
           </p:blipFill>
           <p:spPr>
@@ -3925,7 +3901,7 @@
             <a:blip r:embed="rId3">
               <a:alphaModFix/>
             </a:blip>
-            <a:srcRect b="0" l="0" r="0" t="0"/>
+            <a:srcRect/>
             <a:stretch/>
           </p:blipFill>
           <p:spPr>
@@ -3946,7 +3922,9 @@
       <p:sp>
         <p:nvSpPr>
           <p:cNvPr id="31" name="Google Shape;31;p5"/>
-          <p:cNvSpPr txBox="1"/>
+          <p:cNvSpPr txBox="1">
+            <a:spLocks noGrp="1"/>
+          </p:cNvSpPr>
           <p:nvPr>
             <p:ph type="title"/>
           </p:nvPr>
@@ -3965,7 +3943,7 @@
           </a:ln>
         </p:spPr>
         <p:txBody>
-          <a:bodyPr anchorCtr="0" anchor="ctr" bIns="91425" lIns="91425" spcFirstLastPara="1" rIns="91425" wrap="square" tIns="91425">
+          <a:bodyPr spcFirstLastPara="1" wrap="square" lIns="91425" tIns="91425" rIns="91425" bIns="91425" anchor="ctr" anchorCtr="0">
             <a:noAutofit/>
           </a:bodyPr>
           <a:lstStyle>
@@ -4096,15 +4074,19 @@
               <a:defRPr sz="5000"/>
             </a:lvl9pPr>
           </a:lstStyle>
-          <a:p/>
+          <a:p>
+            <a:endParaRPr/>
+          </a:p>
         </p:txBody>
       </p:sp>
       <p:sp>
         <p:nvSpPr>
           <p:cNvPr id="32" name="Google Shape;32;p5"/>
-          <p:cNvSpPr txBox="1"/>
+          <p:cNvSpPr txBox="1">
+            <a:spLocks noGrp="1"/>
+          </p:cNvSpPr>
           <p:nvPr>
-            <p:ph idx="1" type="subTitle"/>
+            <p:ph type="subTitle" idx="1"/>
           </p:nvPr>
         </p:nvSpPr>
         <p:spPr>
@@ -4121,7 +4103,7 @@
           </a:ln>
         </p:spPr>
         <p:txBody>
-          <a:bodyPr anchorCtr="0" anchor="t" bIns="91425" lIns="91425" spcFirstLastPara="1" rIns="91425" wrap="square" tIns="91425">
+          <a:bodyPr spcFirstLastPara="1" wrap="square" lIns="91425" tIns="91425" rIns="91425" bIns="91425" anchor="t" anchorCtr="0">
             <a:noAutofit/>
           </a:bodyPr>
           <a:lstStyle>
@@ -4252,7 +4234,9 @@
               <a:defRPr/>
             </a:lvl9pPr>
           </a:lstStyle>
-          <a:p/>
+          <a:p>
+            <a:endParaRPr/>
+          </a:p>
         </p:txBody>
       </p:sp>
       <p:pic>
@@ -4265,7 +4249,7 @@
           <a:blip r:embed="rId4">
             <a:alphaModFix/>
           </a:blip>
-          <a:srcRect b="47106" l="19762" r="19445" t="14675"/>
+          <a:srcRect l="19762" t="14675" r="19445" b="47106"/>
           <a:stretch/>
         </p:blipFill>
         <p:spPr>
@@ -4302,12 +4286,12 @@
           </a:ln>
         </p:spPr>
         <p:txBody>
-          <a:bodyPr anchorCtr="0" anchor="t" bIns="91425" lIns="91425" spcFirstLastPara="1" rIns="91425" wrap="square" tIns="91425">
+          <a:bodyPr spcFirstLastPara="1" wrap="square" lIns="91425" tIns="91425" rIns="91425" bIns="91425" anchor="t" anchorCtr="0">
             <a:noAutofit/>
           </a:bodyPr>
           <a:lstStyle/>
           <a:p>
-            <a:pPr indent="0" lvl="0" marL="0" marR="0" rtl="0" algn="l">
+            <a:pPr marL="0" marR="0" lvl="0" indent="0" algn="l" rtl="0">
               <a:lnSpc>
                 <a:spcPct val="100000"/>
               </a:lnSpc>
@@ -4325,7 +4309,7 @@
               <a:buNone/>
             </a:pPr>
             <a:r>
-              <a:rPr b="1" i="0" lang="en-US" sz="1000" u="none" cap="none" strike="noStrike">
+              <a:rPr lang="en-US" sz="1000" b="1" i="0" u="none" strike="noStrike" cap="none">
                 <a:solidFill>
                   <a:schemeClr val="dk1"/>
                 </a:solidFill>
@@ -4337,7 +4321,7 @@
               <a:t>CREDITS:</a:t>
             </a:r>
             <a:r>
-              <a:rPr b="0" i="0" lang="en-US" sz="1000" u="none" cap="none" strike="noStrike">
+              <a:rPr lang="en-US" sz="1000" b="0" i="0" u="none" strike="noStrike" cap="none">
                 <a:solidFill>
                   <a:schemeClr val="dk1"/>
                 </a:solidFill>
@@ -4349,7 +4333,7 @@
               <a:t> This presentation template was created by </a:t>
             </a:r>
             <a:r>
-              <a:rPr b="1" i="0" lang="en-US" sz="1000" u="none" cap="none" strike="noStrike">
+              <a:rPr lang="en-US" sz="1000" b="1" i="0" u="none" strike="noStrike" cap="none">
                 <a:solidFill>
                   <a:schemeClr val="hlink"/>
                 </a:solidFill>
@@ -4365,7 +4349,7 @@
               <a:t>Slidesgo</a:t>
             </a:r>
             <a:r>
-              <a:rPr b="0" i="0" lang="en-US" sz="1000" u="none" cap="none" strike="noStrike">
+              <a:rPr lang="en-US" sz="1000" b="0" i="0" u="none" strike="noStrike" cap="none">
                 <a:solidFill>
                   <a:schemeClr val="dk1"/>
                 </a:solidFill>
@@ -4377,7 +4361,7 @@
               <a:t>, and includes icons, infographics &amp; images by </a:t>
             </a:r>
             <a:r>
-              <a:rPr b="1" i="0" lang="en-US" sz="1000" u="none" cap="none" strike="noStrike">
+              <a:rPr lang="en-US" sz="1000" b="1" i="0" u="none" strike="noStrike" cap="none">
                 <a:solidFill>
                   <a:schemeClr val="hlink"/>
                 </a:solidFill>
@@ -4393,7 +4377,7 @@
               <a:t>Freepik</a:t>
             </a:r>
             <a:r>
-              <a:rPr b="0" i="0" lang="en-US" sz="1000" u="none" cap="none" strike="noStrike">
+              <a:rPr lang="en-US" sz="1000" b="0" i="0" u="none" strike="noStrike" cap="none">
                 <a:solidFill>
                   <a:schemeClr val="dk1"/>
                 </a:solidFill>
@@ -4404,7 +4388,7 @@
               </a:rPr>
               <a:t> </a:t>
             </a:r>
-            <a:endParaRPr b="1" i="0" sz="1000" u="sng" cap="none" strike="noStrike">
+            <a:endParaRPr sz="1000" b="1" i="0" u="sng" strike="noStrike" cap="none">
               <a:solidFill>
                 <a:schemeClr val="dk1"/>
               </a:solidFill>
@@ -4425,11 +4409,11 @@
 </file>
 
 <file path=ppt/slideLayouts/slideLayout5.xml><?xml version="1.0" encoding="utf-8"?>
-<p:sldLayout xmlns:a="http://schemas.openxmlformats.org/drawingml/2006/main" xmlns:r="http://schemas.openxmlformats.org/officeDocument/2006/relationships" xmlns:mc="http://schemas.openxmlformats.org/markup-compatibility/2006" xmlns:mv="urn:schemas-microsoft-com:mac:vml" xmlns:p="http://schemas.openxmlformats.org/presentationml/2006/main" xmlns:c="http://schemas.openxmlformats.org/drawingml/2006/chart" xmlns:dgm="http://schemas.openxmlformats.org/drawingml/2006/diagram" xmlns:o="urn:schemas-microsoft-com:office:office" xmlns:v="urn:schemas-microsoft-com:vml" xmlns:pvml="urn:schemas-microsoft-com:office:powerpoint" xmlns:com="http://schemas.openxmlformats.org/drawingml/2006/compatibility" xmlns:p14="http://schemas.microsoft.com/office/powerpoint/2010/main" xmlns:p15="http://schemas.microsoft.com/office/powerpoint/2012/main" xmlns:ahyp="http://schemas.microsoft.com/office/drawing/2018/hyperlinkcolor" matchingName="Title and body" type="tx">
+<p:sldLayout xmlns:a="http://schemas.openxmlformats.org/drawingml/2006/main" xmlns:r="http://schemas.openxmlformats.org/officeDocument/2006/relationships" xmlns:p="http://schemas.openxmlformats.org/presentationml/2006/main" matchingName="Title and body" type="tx">
   <p:cSld name="TITLE_AND_BODY">
     <p:spTree>
       <p:nvGrpSpPr>
-        <p:cNvPr id="35" name="Shape 35"/>
+        <p:cNvPr id="1" name="Shape 35"/>
         <p:cNvGrpSpPr/>
         <p:nvPr/>
       </p:nvGrpSpPr>
@@ -4465,7 +4449,7 @@
             <a:blip r:embed="rId2">
               <a:alphaModFix/>
             </a:blip>
-            <a:srcRect b="0" l="0" r="0" t="0"/>
+            <a:srcRect/>
             <a:stretch/>
           </p:blipFill>
           <p:spPr>
@@ -4492,7 +4476,7 @@
             <a:blip r:embed="rId3">
               <a:alphaModFix/>
             </a:blip>
-            <a:srcRect b="0" l="0" r="0" t="0"/>
+            <a:srcRect/>
             <a:stretch/>
           </p:blipFill>
           <p:spPr>
@@ -4513,7 +4497,9 @@
       <p:sp>
         <p:nvSpPr>
           <p:cNvPr id="39" name="Google Shape;39;p6"/>
-          <p:cNvSpPr txBox="1"/>
+          <p:cNvSpPr txBox="1">
+            <a:spLocks noGrp="1"/>
+          </p:cNvSpPr>
           <p:nvPr>
             <p:ph type="title"/>
           </p:nvPr>
@@ -4532,7 +4518,7 @@
           </a:ln>
         </p:spPr>
         <p:txBody>
-          <a:bodyPr anchorCtr="0" anchor="t" bIns="91425" lIns="91425" spcFirstLastPara="1" rIns="91425" wrap="square" tIns="91425">
+          <a:bodyPr spcFirstLastPara="1" wrap="square" lIns="91425" tIns="91425" rIns="91425" bIns="91425" anchor="t" anchorCtr="0">
             <a:noAutofit/>
           </a:bodyPr>
           <a:lstStyle>
@@ -4663,15 +4649,19 @@
               <a:defRPr sz="2600"/>
             </a:lvl9pPr>
           </a:lstStyle>
-          <a:p/>
+          <a:p>
+            <a:endParaRPr/>
+          </a:p>
         </p:txBody>
       </p:sp>
       <p:sp>
         <p:nvSpPr>
           <p:cNvPr id="40" name="Google Shape;40;p6"/>
-          <p:cNvSpPr txBox="1"/>
+          <p:cNvSpPr txBox="1">
+            <a:spLocks noGrp="1"/>
+          </p:cNvSpPr>
           <p:nvPr>
-            <p:ph idx="1" type="body"/>
+            <p:ph type="body" idx="1"/>
           </p:nvPr>
         </p:nvSpPr>
         <p:spPr>
@@ -4688,11 +4678,11 @@
           </a:ln>
         </p:spPr>
         <p:txBody>
-          <a:bodyPr anchorCtr="0" anchor="t" bIns="91425" lIns="91425" spcFirstLastPara="1" rIns="91425" wrap="square" tIns="91425">
+          <a:bodyPr spcFirstLastPara="1" wrap="square" lIns="91425" tIns="91425" rIns="91425" bIns="91425" anchor="t" anchorCtr="0">
             <a:noAutofit/>
           </a:bodyPr>
           <a:lstStyle>
-            <a:lvl1pPr indent="-342900" lvl="0" marL="457200" algn="l">
+            <a:lvl1pPr marL="457200" lvl="0" indent="-342900" algn="l">
               <a:lnSpc>
                 <a:spcPct val="115000"/>
               </a:lnSpc>
@@ -4714,7 +4704,7 @@
                 </a:solidFill>
               </a:defRPr>
             </a:lvl1pPr>
-            <a:lvl2pPr indent="-317500" lvl="1" marL="914400" algn="l">
+            <a:lvl2pPr marL="914400" lvl="1" indent="-317500" algn="l">
               <a:lnSpc>
                 <a:spcPct val="115000"/>
               </a:lnSpc>
@@ -4736,7 +4726,7 @@
                 </a:solidFill>
               </a:defRPr>
             </a:lvl2pPr>
-            <a:lvl3pPr indent="-317500" lvl="2" marL="1371600" algn="l">
+            <a:lvl3pPr marL="1371600" lvl="2" indent="-317500" algn="l">
               <a:lnSpc>
                 <a:spcPct val="115000"/>
               </a:lnSpc>
@@ -4758,7 +4748,7 @@
                 </a:solidFill>
               </a:defRPr>
             </a:lvl3pPr>
-            <a:lvl4pPr indent="-317500" lvl="3" marL="1828800" algn="l">
+            <a:lvl4pPr marL="1828800" lvl="3" indent="-317500" algn="l">
               <a:lnSpc>
                 <a:spcPct val="115000"/>
               </a:lnSpc>
@@ -4780,7 +4770,7 @@
                 </a:solidFill>
               </a:defRPr>
             </a:lvl4pPr>
-            <a:lvl5pPr indent="-317500" lvl="4" marL="2286000" algn="l">
+            <a:lvl5pPr marL="2286000" lvl="4" indent="-317500" algn="l">
               <a:lnSpc>
                 <a:spcPct val="115000"/>
               </a:lnSpc>
@@ -4802,7 +4792,7 @@
                 </a:solidFill>
               </a:defRPr>
             </a:lvl5pPr>
-            <a:lvl6pPr indent="-317500" lvl="5" marL="2743200" algn="l">
+            <a:lvl6pPr marL="2743200" lvl="5" indent="-317500" algn="l">
               <a:lnSpc>
                 <a:spcPct val="115000"/>
               </a:lnSpc>
@@ -4824,7 +4814,7 @@
                 </a:solidFill>
               </a:defRPr>
             </a:lvl6pPr>
-            <a:lvl7pPr indent="-317500" lvl="6" marL="3200400" algn="l">
+            <a:lvl7pPr marL="3200400" lvl="6" indent="-317500" algn="l">
               <a:lnSpc>
                 <a:spcPct val="115000"/>
               </a:lnSpc>
@@ -4846,7 +4836,7 @@
                 </a:solidFill>
               </a:defRPr>
             </a:lvl7pPr>
-            <a:lvl8pPr indent="-317500" lvl="7" marL="3657600" algn="l">
+            <a:lvl8pPr marL="3657600" lvl="7" indent="-317500" algn="l">
               <a:lnSpc>
                 <a:spcPct val="115000"/>
               </a:lnSpc>
@@ -4868,7 +4858,7 @@
                 </a:solidFill>
               </a:defRPr>
             </a:lvl8pPr>
-            <a:lvl9pPr indent="-317500" lvl="8" marL="4114800" algn="l">
+            <a:lvl9pPr marL="4114800" lvl="8" indent="-317500" algn="l">
               <a:lnSpc>
                 <a:spcPct val="115000"/>
               </a:lnSpc>
@@ -4891,7 +4881,9 @@
               </a:defRPr>
             </a:lvl9pPr>
           </a:lstStyle>
-          <a:p/>
+          <a:p>
+            <a:endParaRPr/>
+          </a:p>
         </p:txBody>
       </p:sp>
     </p:spTree>
@@ -4903,11 +4895,11 @@
 </file>
 
 <file path=ppt/slideLayouts/slideLayout6.xml><?xml version="1.0" encoding="utf-8"?>
-<p:sldLayout xmlns:a="http://schemas.openxmlformats.org/drawingml/2006/main" xmlns:r="http://schemas.openxmlformats.org/officeDocument/2006/relationships" xmlns:mc="http://schemas.openxmlformats.org/markup-compatibility/2006" xmlns:mv="urn:schemas-microsoft-com:mac:vml" xmlns:p="http://schemas.openxmlformats.org/presentationml/2006/main" xmlns:c="http://schemas.openxmlformats.org/drawingml/2006/chart" xmlns:dgm="http://schemas.openxmlformats.org/drawingml/2006/diagram" xmlns:o="urn:schemas-microsoft-com:office:office" xmlns:v="urn:schemas-microsoft-com:vml" xmlns:pvml="urn:schemas-microsoft-com:office:powerpoint" xmlns:com="http://schemas.openxmlformats.org/drawingml/2006/compatibility" xmlns:p14="http://schemas.microsoft.com/office/powerpoint/2010/main" xmlns:p15="http://schemas.microsoft.com/office/powerpoint/2012/main" xmlns:ahyp="http://schemas.microsoft.com/office/drawing/2018/hyperlinkcolor" matchingName="One column text">
+<p:sldLayout xmlns:a="http://schemas.openxmlformats.org/drawingml/2006/main" xmlns:r="http://schemas.openxmlformats.org/officeDocument/2006/relationships" xmlns:p="http://schemas.openxmlformats.org/presentationml/2006/main" matchingName="One column text">
   <p:cSld name="ONE_COLUMN_TEXT">
     <p:spTree>
       <p:nvGrpSpPr>
-        <p:cNvPr id="41" name="Shape 41"/>
+        <p:cNvPr id="1" name="Shape 41"/>
         <p:cNvGrpSpPr/>
         <p:nvPr/>
       </p:nvGrpSpPr>
@@ -4943,7 +4935,7 @@
             <a:blip r:embed="rId2">
               <a:alphaModFix/>
             </a:blip>
-            <a:srcRect b="0" l="0" r="0" t="0"/>
+            <a:srcRect/>
             <a:stretch/>
           </p:blipFill>
           <p:spPr>
@@ -4970,7 +4962,7 @@
             <a:blip r:embed="rId3">
               <a:alphaModFix/>
             </a:blip>
-            <a:srcRect b="0" l="0" r="0" t="0"/>
+            <a:srcRect/>
             <a:stretch/>
           </p:blipFill>
           <p:spPr>
@@ -4991,7 +4983,9 @@
       <p:sp>
         <p:nvSpPr>
           <p:cNvPr id="45" name="Google Shape;45;p7"/>
-          <p:cNvSpPr txBox="1"/>
+          <p:cNvSpPr txBox="1">
+            <a:spLocks noGrp="1"/>
+          </p:cNvSpPr>
           <p:nvPr>
             <p:ph type="title"/>
           </p:nvPr>
@@ -5010,7 +5004,7 @@
           </a:ln>
         </p:spPr>
         <p:txBody>
-          <a:bodyPr anchorCtr="0" anchor="t" bIns="91425" lIns="91425" spcFirstLastPara="1" rIns="91425" wrap="square" tIns="91425">
+          <a:bodyPr spcFirstLastPara="1" wrap="square" lIns="91425" tIns="91425" rIns="91425" bIns="91425" anchor="t" anchorCtr="0">
             <a:noAutofit/>
           </a:bodyPr>
           <a:lstStyle>
@@ -5141,15 +5135,19 @@
               <a:defRPr/>
             </a:lvl9pPr>
           </a:lstStyle>
-          <a:p/>
+          <a:p>
+            <a:endParaRPr/>
+          </a:p>
         </p:txBody>
       </p:sp>
       <p:sp>
         <p:nvSpPr>
           <p:cNvPr id="46" name="Google Shape;46;p7"/>
-          <p:cNvSpPr txBox="1"/>
+          <p:cNvSpPr txBox="1">
+            <a:spLocks noGrp="1"/>
+          </p:cNvSpPr>
           <p:nvPr>
-            <p:ph idx="1" type="body"/>
+            <p:ph type="body" idx="1"/>
           </p:nvPr>
         </p:nvSpPr>
         <p:spPr>
@@ -5166,11 +5164,11 @@
           </a:ln>
         </p:spPr>
         <p:txBody>
-          <a:bodyPr anchorCtr="0" anchor="t" bIns="91425" lIns="91425" spcFirstLastPara="1" rIns="91425" wrap="square" tIns="91425">
+          <a:bodyPr spcFirstLastPara="1" wrap="square" lIns="91425" tIns="91425" rIns="91425" bIns="91425" anchor="t" anchorCtr="0">
             <a:noAutofit/>
           </a:bodyPr>
           <a:lstStyle>
-            <a:lvl1pPr indent="-317500" lvl="0" marL="457200" algn="l">
+            <a:lvl1pPr marL="457200" lvl="0" indent="-317500" algn="l">
               <a:lnSpc>
                 <a:spcPct val="100000"/>
               </a:lnSpc>
@@ -5184,7 +5182,7 @@
               <a:buChar char="●"/>
               <a:defRPr sz="1400"/>
             </a:lvl1pPr>
-            <a:lvl2pPr indent="-317500" lvl="1" marL="914400" algn="l">
+            <a:lvl2pPr marL="914400" lvl="1" indent="-317500" algn="l">
               <a:lnSpc>
                 <a:spcPct val="115000"/>
               </a:lnSpc>
@@ -5198,7 +5196,7 @@
               <a:buChar char="○"/>
               <a:defRPr/>
             </a:lvl2pPr>
-            <a:lvl3pPr indent="-317500" lvl="2" marL="1371600" algn="l">
+            <a:lvl3pPr marL="1371600" lvl="2" indent="-317500" algn="l">
               <a:lnSpc>
                 <a:spcPct val="115000"/>
               </a:lnSpc>
@@ -5212,7 +5210,7 @@
               <a:buChar char="■"/>
               <a:defRPr/>
             </a:lvl3pPr>
-            <a:lvl4pPr indent="-317500" lvl="3" marL="1828800" algn="l">
+            <a:lvl4pPr marL="1828800" lvl="3" indent="-317500" algn="l">
               <a:lnSpc>
                 <a:spcPct val="115000"/>
               </a:lnSpc>
@@ -5226,7 +5224,7 @@
               <a:buChar char="●"/>
               <a:defRPr/>
             </a:lvl4pPr>
-            <a:lvl5pPr indent="-317500" lvl="4" marL="2286000" algn="l">
+            <a:lvl5pPr marL="2286000" lvl="4" indent="-317500" algn="l">
               <a:lnSpc>
                 <a:spcPct val="115000"/>
               </a:lnSpc>
@@ -5240,7 +5238,7 @@
               <a:buChar char="○"/>
               <a:defRPr/>
             </a:lvl5pPr>
-            <a:lvl6pPr indent="-317500" lvl="5" marL="2743200" algn="l">
+            <a:lvl6pPr marL="2743200" lvl="5" indent="-317500" algn="l">
               <a:lnSpc>
                 <a:spcPct val="115000"/>
               </a:lnSpc>
@@ -5254,7 +5252,7 @@
               <a:buChar char="■"/>
               <a:defRPr/>
             </a:lvl6pPr>
-            <a:lvl7pPr indent="-317500" lvl="6" marL="3200400" algn="l">
+            <a:lvl7pPr marL="3200400" lvl="6" indent="-317500" algn="l">
               <a:lnSpc>
                 <a:spcPct val="115000"/>
               </a:lnSpc>
@@ -5268,7 +5266,7 @@
               <a:buChar char="●"/>
               <a:defRPr/>
             </a:lvl7pPr>
-            <a:lvl8pPr indent="-317500" lvl="7" marL="3657600" algn="l">
+            <a:lvl8pPr marL="3657600" lvl="7" indent="-317500" algn="l">
               <a:lnSpc>
                 <a:spcPct val="115000"/>
               </a:lnSpc>
@@ -5282,7 +5280,7 @@
               <a:buChar char="○"/>
               <a:defRPr/>
             </a:lvl8pPr>
-            <a:lvl9pPr indent="-317500" lvl="8" marL="4114800" algn="l">
+            <a:lvl9pPr marL="4114800" lvl="8" indent="-317500" algn="l">
               <a:lnSpc>
                 <a:spcPct val="115000"/>
               </a:lnSpc>
@@ -5297,15 +5295,19 @@
               <a:defRPr/>
             </a:lvl9pPr>
           </a:lstStyle>
-          <a:p/>
+          <a:p>
+            <a:endParaRPr/>
+          </a:p>
         </p:txBody>
       </p:sp>
       <p:sp>
         <p:nvSpPr>
           <p:cNvPr id="47" name="Google Shape;47;p7"/>
-          <p:cNvSpPr/>
+          <p:cNvSpPr>
+            <a:spLocks noGrp="1"/>
+          </p:cNvSpPr>
           <p:nvPr>
-            <p:ph idx="2" type="pic"/>
+            <p:ph type="pic" idx="2"/>
           </p:nvPr>
         </p:nvSpPr>
         <p:spPr>
@@ -5331,11 +5333,11 @@
 </file>
 
 <file path=ppt/slideLayouts/slideLayout7.xml><?xml version="1.0" encoding="utf-8"?>
-<p:sldLayout xmlns:a="http://schemas.openxmlformats.org/drawingml/2006/main" xmlns:r="http://schemas.openxmlformats.org/officeDocument/2006/relationships" xmlns:mc="http://schemas.openxmlformats.org/markup-compatibility/2006" xmlns:mv="urn:schemas-microsoft-com:mac:vml" xmlns:p="http://schemas.openxmlformats.org/presentationml/2006/main" xmlns:c="http://schemas.openxmlformats.org/drawingml/2006/chart" xmlns:dgm="http://schemas.openxmlformats.org/drawingml/2006/diagram" xmlns:o="urn:schemas-microsoft-com:office:office" xmlns:v="urn:schemas-microsoft-com:vml" xmlns:pvml="urn:schemas-microsoft-com:office:powerpoint" xmlns:com="http://schemas.openxmlformats.org/drawingml/2006/compatibility" xmlns:p14="http://schemas.microsoft.com/office/powerpoint/2010/main" xmlns:p15="http://schemas.microsoft.com/office/powerpoint/2012/main" xmlns:ahyp="http://schemas.microsoft.com/office/drawing/2018/hyperlinkcolor" matchingName="Main point">
+<p:sldLayout xmlns:a="http://schemas.openxmlformats.org/drawingml/2006/main" xmlns:r="http://schemas.openxmlformats.org/officeDocument/2006/relationships" xmlns:p="http://schemas.openxmlformats.org/presentationml/2006/main" matchingName="Main point">
   <p:cSld name="MAIN_POINT">
     <p:spTree>
       <p:nvGrpSpPr>
-        <p:cNvPr id="48" name="Shape 48"/>
+        <p:cNvPr id="1" name="Shape 48"/>
         <p:cNvGrpSpPr/>
         <p:nvPr/>
       </p:nvGrpSpPr>
@@ -5371,7 +5373,7 @@
             <a:blip r:embed="rId2">
               <a:alphaModFix/>
             </a:blip>
-            <a:srcRect b="0" l="0" r="0" t="0"/>
+            <a:srcRect/>
             <a:stretch/>
           </p:blipFill>
           <p:spPr>
@@ -5398,7 +5400,7 @@
             <a:blip r:embed="rId3">
               <a:alphaModFix/>
             </a:blip>
-            <a:srcRect b="0" l="0" r="0" t="0"/>
+            <a:srcRect/>
             <a:stretch/>
           </p:blipFill>
           <p:spPr>
@@ -5419,7 +5421,9 @@
       <p:sp>
         <p:nvSpPr>
           <p:cNvPr id="52" name="Google Shape;52;p8"/>
-          <p:cNvSpPr txBox="1"/>
+          <p:cNvSpPr txBox="1">
+            <a:spLocks noGrp="1"/>
+          </p:cNvSpPr>
           <p:nvPr>
             <p:ph type="title"/>
           </p:nvPr>
@@ -5438,7 +5442,7 @@
           </a:ln>
         </p:spPr>
         <p:txBody>
-          <a:bodyPr anchorCtr="0" anchor="ctr" bIns="91425" lIns="91425" spcFirstLastPara="1" rIns="91425" wrap="square" tIns="91425">
+          <a:bodyPr spcFirstLastPara="1" wrap="square" lIns="91425" tIns="91425" rIns="91425" bIns="91425" anchor="ctr" anchorCtr="0">
             <a:noAutofit/>
           </a:bodyPr>
           <a:lstStyle>
@@ -5569,7 +5573,9 @@
               <a:defRPr sz="6000"/>
             </a:lvl9pPr>
           </a:lstStyle>
-          <a:p/>
+          <a:p>
+            <a:endParaRPr/>
+          </a:p>
         </p:txBody>
       </p:sp>
     </p:spTree>
@@ -5581,11 +5587,11 @@
 </file>
 
 <file path=ppt/slideLayouts/slideLayout8.xml><?xml version="1.0" encoding="utf-8"?>
-<p:sldLayout xmlns:a="http://schemas.openxmlformats.org/drawingml/2006/main" xmlns:r="http://schemas.openxmlformats.org/officeDocument/2006/relationships" xmlns:mc="http://schemas.openxmlformats.org/markup-compatibility/2006" xmlns:mv="urn:schemas-microsoft-com:mac:vml" xmlns:p="http://schemas.openxmlformats.org/presentationml/2006/main" xmlns:c="http://schemas.openxmlformats.org/drawingml/2006/chart" xmlns:dgm="http://schemas.openxmlformats.org/drawingml/2006/diagram" xmlns:o="urn:schemas-microsoft-com:office:office" xmlns:v="urn:schemas-microsoft-com:vml" xmlns:pvml="urn:schemas-microsoft-com:office:powerpoint" xmlns:com="http://schemas.openxmlformats.org/drawingml/2006/compatibility" xmlns:p14="http://schemas.microsoft.com/office/powerpoint/2010/main" xmlns:p15="http://schemas.microsoft.com/office/powerpoint/2012/main" xmlns:ahyp="http://schemas.microsoft.com/office/drawing/2018/hyperlinkcolor" matchingName="Section title and description">
+<p:sldLayout xmlns:a="http://schemas.openxmlformats.org/drawingml/2006/main" xmlns:r="http://schemas.openxmlformats.org/officeDocument/2006/relationships" xmlns:p="http://schemas.openxmlformats.org/presentationml/2006/main" matchingName="Section title and description">
   <p:cSld name="SECTION_TITLE_AND_DESCRIPTION">
     <p:spTree>
       <p:nvGrpSpPr>
-        <p:cNvPr id="53" name="Shape 53"/>
+        <p:cNvPr id="1" name="Shape 53"/>
         <p:cNvGrpSpPr/>
         <p:nvPr/>
       </p:nvGrpSpPr>
@@ -5621,7 +5627,7 @@
             <a:blip r:embed="rId2">
               <a:alphaModFix/>
             </a:blip>
-            <a:srcRect b="0" l="0" r="0" t="0"/>
+            <a:srcRect/>
             <a:stretch/>
           </p:blipFill>
           <p:spPr>
@@ -5648,7 +5654,7 @@
             <a:blip r:embed="rId3">
               <a:alphaModFix/>
             </a:blip>
-            <a:srcRect b="0" l="0" r="0" t="0"/>
+            <a:srcRect/>
             <a:stretch/>
           </p:blipFill>
           <p:spPr>
@@ -5669,9 +5675,11 @@
       <p:sp>
         <p:nvSpPr>
           <p:cNvPr id="57" name="Google Shape;57;p9"/>
-          <p:cNvSpPr txBox="1"/>
+          <p:cNvSpPr txBox="1">
+            <a:spLocks noGrp="1"/>
+          </p:cNvSpPr>
           <p:nvPr>
-            <p:ph idx="1" type="subTitle"/>
+            <p:ph type="subTitle" idx="1"/>
           </p:nvPr>
         </p:nvSpPr>
         <p:spPr>
@@ -5688,7 +5696,7 @@
           </a:ln>
         </p:spPr>
         <p:txBody>
-          <a:bodyPr anchorCtr="0" anchor="t" bIns="91425" lIns="91425" spcFirstLastPara="1" rIns="91425" wrap="square" tIns="91425">
+          <a:bodyPr spcFirstLastPara="1" wrap="square" lIns="91425" tIns="91425" rIns="91425" bIns="91425" anchor="t" anchorCtr="0">
             <a:noAutofit/>
           </a:bodyPr>
           <a:lstStyle>
@@ -5819,13 +5827,17 @@
               <a:defRPr/>
             </a:lvl9pPr>
           </a:lstStyle>
-          <a:p/>
+          <a:p>
+            <a:endParaRPr/>
+          </a:p>
         </p:txBody>
       </p:sp>
       <p:sp>
         <p:nvSpPr>
           <p:cNvPr id="58" name="Google Shape;58;p9"/>
-          <p:cNvSpPr txBox="1"/>
+          <p:cNvSpPr txBox="1">
+            <a:spLocks noGrp="1"/>
+          </p:cNvSpPr>
           <p:nvPr>
             <p:ph type="title"/>
           </p:nvPr>
@@ -5844,7 +5856,7 @@
           </a:ln>
         </p:spPr>
         <p:txBody>
-          <a:bodyPr anchorCtr="0" anchor="t" bIns="91425" lIns="91425" spcFirstLastPara="1" rIns="91425" wrap="square" tIns="91425">
+          <a:bodyPr spcFirstLastPara="1" wrap="square" lIns="91425" tIns="91425" rIns="91425" bIns="91425" anchor="t" anchorCtr="0">
             <a:noAutofit/>
           </a:bodyPr>
           <a:lstStyle>
@@ -5975,15 +5987,19 @@
               <a:defRPr/>
             </a:lvl9pPr>
           </a:lstStyle>
-          <a:p/>
+          <a:p>
+            <a:endParaRPr/>
+          </a:p>
         </p:txBody>
       </p:sp>
       <p:sp>
         <p:nvSpPr>
           <p:cNvPr id="59" name="Google Shape;59;p9"/>
-          <p:cNvSpPr txBox="1"/>
+          <p:cNvSpPr txBox="1">
+            <a:spLocks noGrp="1"/>
+          </p:cNvSpPr>
           <p:nvPr>
-            <p:ph idx="2" type="subTitle"/>
+            <p:ph type="subTitle" idx="2"/>
           </p:nvPr>
         </p:nvSpPr>
         <p:spPr>
@@ -6000,7 +6016,7 @@
           </a:ln>
         </p:spPr>
         <p:txBody>
-          <a:bodyPr anchorCtr="0" anchor="t" bIns="91425" lIns="91425" spcFirstLastPara="1" rIns="91425" wrap="square" tIns="91425">
+          <a:bodyPr spcFirstLastPara="1" wrap="square" lIns="91425" tIns="91425" rIns="91425" bIns="91425" anchor="t" anchorCtr="0">
             <a:noAutofit/>
           </a:bodyPr>
           <a:lstStyle>
@@ -6131,7 +6147,9 @@
               <a:defRPr/>
             </a:lvl9pPr>
           </a:lstStyle>
-          <a:p/>
+          <a:p>
+            <a:endParaRPr/>
+          </a:p>
         </p:txBody>
       </p:sp>
     </p:spTree>
@@ -6143,11 +6161,11 @@
 </file>
 
 <file path=ppt/slideLayouts/slideLayout9.xml><?xml version="1.0" encoding="utf-8"?>
-<p:sldLayout xmlns:a="http://schemas.openxmlformats.org/drawingml/2006/main" xmlns:r="http://schemas.openxmlformats.org/officeDocument/2006/relationships" xmlns:mc="http://schemas.openxmlformats.org/markup-compatibility/2006" xmlns:mv="urn:schemas-microsoft-com:mac:vml" xmlns:p="http://schemas.openxmlformats.org/presentationml/2006/main" xmlns:c="http://schemas.openxmlformats.org/drawingml/2006/chart" xmlns:dgm="http://schemas.openxmlformats.org/drawingml/2006/diagram" xmlns:o="urn:schemas-microsoft-com:office:office" xmlns:v="urn:schemas-microsoft-com:vml" xmlns:pvml="urn:schemas-microsoft-com:office:powerpoint" xmlns:com="http://schemas.openxmlformats.org/drawingml/2006/compatibility" xmlns:p14="http://schemas.microsoft.com/office/powerpoint/2010/main" xmlns:p15="http://schemas.microsoft.com/office/powerpoint/2012/main" xmlns:ahyp="http://schemas.microsoft.com/office/drawing/2018/hyperlinkcolor" matchingName="Big number">
+<p:sldLayout xmlns:a="http://schemas.openxmlformats.org/drawingml/2006/main" xmlns:r="http://schemas.openxmlformats.org/officeDocument/2006/relationships" xmlns:p="http://schemas.openxmlformats.org/presentationml/2006/main" matchingName="Big number">
   <p:cSld name="BIG_NUMBER">
     <p:spTree>
       <p:nvGrpSpPr>
-        <p:cNvPr id="60" name="Shape 60"/>
+        <p:cNvPr id="1" name="Shape 60"/>
         <p:cNvGrpSpPr/>
         <p:nvPr/>
       </p:nvGrpSpPr>
@@ -6183,7 +6201,7 @@
             <a:blip r:embed="rId2">
               <a:alphaModFix/>
             </a:blip>
-            <a:srcRect b="0" l="0" r="0" t="0"/>
+            <a:srcRect/>
             <a:stretch/>
           </p:blipFill>
           <p:spPr>
@@ -6210,7 +6228,7 @@
             <a:blip r:embed="rId3">
               <a:alphaModFix/>
             </a:blip>
-            <a:srcRect b="0" l="0" r="0" t="0"/>
+            <a:srcRect/>
             <a:stretch/>
           </p:blipFill>
           <p:spPr>
@@ -6231,9 +6249,11 @@
       <p:sp>
         <p:nvSpPr>
           <p:cNvPr id="64" name="Google Shape;64;p10"/>
-          <p:cNvSpPr txBox="1"/>
+          <p:cNvSpPr txBox="1">
+            <a:spLocks noGrp="1"/>
+          </p:cNvSpPr>
           <p:nvPr>
-            <p:ph hasCustomPrompt="1" type="title"/>
+            <p:ph type="title" hasCustomPrompt="1"/>
           </p:nvPr>
         </p:nvSpPr>
         <p:spPr>
@@ -6250,7 +6270,7 @@
           </a:ln>
         </p:spPr>
         <p:txBody>
-          <a:bodyPr anchorCtr="0" anchor="b" bIns="91425" lIns="91425" spcFirstLastPara="1" rIns="91425" wrap="square" tIns="91425">
+          <a:bodyPr spcFirstLastPara="1" wrap="square" lIns="91425" tIns="91425" rIns="91425" bIns="91425" anchor="b" anchorCtr="0">
             <a:noAutofit/>
           </a:bodyPr>
           <a:lstStyle>
@@ -6395,9 +6415,11 @@
       <p:sp>
         <p:nvSpPr>
           <p:cNvPr id="65" name="Google Shape;65;p10"/>
-          <p:cNvSpPr txBox="1"/>
+          <p:cNvSpPr txBox="1">
+            <a:spLocks noGrp="1"/>
+          </p:cNvSpPr>
           <p:nvPr>
-            <p:ph idx="1" type="subTitle"/>
+            <p:ph type="subTitle" idx="1"/>
           </p:nvPr>
         </p:nvSpPr>
         <p:spPr>
@@ -6414,7 +6436,7 @@
           </a:ln>
         </p:spPr>
         <p:txBody>
-          <a:bodyPr anchorCtr="0" anchor="t" bIns="91425" lIns="91425" spcFirstLastPara="1" rIns="91425" wrap="square" tIns="91425">
+          <a:bodyPr spcFirstLastPara="1" wrap="square" lIns="91425" tIns="91425" rIns="91425" bIns="91425" anchor="t" anchorCtr="0">
             <a:noAutofit/>
           </a:bodyPr>
           <a:lstStyle>
@@ -6545,7 +6567,9 @@
               <a:defRPr sz="1600"/>
             </a:lvl9pPr>
           </a:lstStyle>
-          <a:p/>
+          <a:p>
+            <a:endParaRPr/>
+          </a:p>
         </p:txBody>
       </p:sp>
     </p:spTree>
@@ -6557,18 +6581,19 @@
 </file>
 
 <file path=ppt/slideMasters/slideMaster1.xml><?xml version="1.0" encoding="utf-8"?>
-<p:sldMaster xmlns:a="http://schemas.openxmlformats.org/drawingml/2006/main" xmlns:r="http://schemas.openxmlformats.org/officeDocument/2006/relationships" xmlns:mc="http://schemas.openxmlformats.org/markup-compatibility/2006" xmlns:mv="urn:schemas-microsoft-com:mac:vml" xmlns:p="http://schemas.openxmlformats.org/presentationml/2006/main" xmlns:c="http://schemas.openxmlformats.org/drawingml/2006/chart" xmlns:dgm="http://schemas.openxmlformats.org/drawingml/2006/diagram" xmlns:o="urn:schemas-microsoft-com:office:office" xmlns:v="urn:schemas-microsoft-com:vml" xmlns:pvml="urn:schemas-microsoft-com:office:powerpoint" xmlns:com="http://schemas.openxmlformats.org/drawingml/2006/compatibility" xmlns:p14="http://schemas.microsoft.com/office/powerpoint/2010/main" xmlns:p15="http://schemas.microsoft.com/office/powerpoint/2012/main" xmlns:ahyp="http://schemas.microsoft.com/office/drawing/2018/hyperlinkcolor">
+<p:sldMaster xmlns:a="http://schemas.openxmlformats.org/drawingml/2006/main" xmlns:r="http://schemas.openxmlformats.org/officeDocument/2006/relationships" xmlns:p="http://schemas.openxmlformats.org/presentationml/2006/main">
   <p:cSld name="simple-light-2">
     <p:bg>
       <p:bgPr>
         <a:solidFill>
           <a:schemeClr val="lt1"/>
         </a:solidFill>
+        <a:effectLst/>
       </p:bgPr>
     </p:bg>
     <p:spTree>
       <p:nvGrpSpPr>
-        <p:cNvPr id="5" name="Shape 5"/>
+        <p:cNvPr id="1" name="Shape 5"/>
         <p:cNvGrpSpPr/>
         <p:nvPr/>
       </p:nvGrpSpPr>
@@ -6583,7 +6608,9 @@
       <p:sp>
         <p:nvSpPr>
           <p:cNvPr id="6" name="Google Shape;6;p1"/>
-          <p:cNvSpPr txBox="1"/>
+          <p:cNvSpPr txBox="1">
+            <a:spLocks noGrp="1"/>
+          </p:cNvSpPr>
           <p:nvPr>
             <p:ph type="title"/>
           </p:nvPr>
@@ -6602,11 +6629,11 @@
           </a:ln>
         </p:spPr>
         <p:txBody>
-          <a:bodyPr anchorCtr="0" anchor="t" bIns="91425" lIns="91425" spcFirstLastPara="1" rIns="91425" wrap="square" tIns="91425">
+          <a:bodyPr spcFirstLastPara="1" wrap="square" lIns="91425" tIns="91425" rIns="91425" bIns="91425" anchor="t" anchorCtr="0">
             <a:noAutofit/>
           </a:bodyPr>
           <a:lstStyle>
-            <a:lvl1pPr lvl="0" marR="0" rtl="0" algn="l">
+            <a:lvl1pPr marR="0" lvl="0" algn="l" rtl="0">
               <a:lnSpc>
                 <a:spcPct val="100000"/>
               </a:lnSpc>
@@ -6622,7 +6649,7 @@
               <a:buSzPts val="3200"/>
               <a:buFont typeface="VT323"/>
               <a:buNone/>
-              <a:defRPr b="0" i="0" sz="3200" u="none" cap="none" strike="noStrike">
+              <a:defRPr sz="3200" b="0" i="0" u="none" strike="noStrike" cap="none">
                 <a:solidFill>
                   <a:schemeClr val="dk1"/>
                 </a:solidFill>
@@ -6632,7 +6659,7 @@
                 <a:sym typeface="VT323"/>
               </a:defRPr>
             </a:lvl1pPr>
-            <a:lvl2pPr lvl="1" marR="0" rtl="0" algn="l">
+            <a:lvl2pPr marR="0" lvl="1" algn="l" rtl="0">
               <a:lnSpc>
                 <a:spcPct val="100000"/>
               </a:lnSpc>
@@ -6648,7 +6675,7 @@
               <a:buSzPts val="3200"/>
               <a:buFont typeface="VT323"/>
               <a:buNone/>
-              <a:defRPr b="0" i="0" sz="3200" u="none" cap="none" strike="noStrike">
+              <a:defRPr sz="3200" b="0" i="0" u="none" strike="noStrike" cap="none">
                 <a:solidFill>
                   <a:schemeClr val="dk1"/>
                 </a:solidFill>
@@ -6658,7 +6685,7 @@
                 <a:sym typeface="VT323"/>
               </a:defRPr>
             </a:lvl2pPr>
-            <a:lvl3pPr lvl="2" marR="0" rtl="0" algn="l">
+            <a:lvl3pPr marR="0" lvl="2" algn="l" rtl="0">
               <a:lnSpc>
                 <a:spcPct val="100000"/>
               </a:lnSpc>
@@ -6674,7 +6701,7 @@
               <a:buSzPts val="3200"/>
               <a:buFont typeface="VT323"/>
               <a:buNone/>
-              <a:defRPr b="0" i="0" sz="3200" u="none" cap="none" strike="noStrike">
+              <a:defRPr sz="3200" b="0" i="0" u="none" strike="noStrike" cap="none">
                 <a:solidFill>
                   <a:schemeClr val="dk1"/>
                 </a:solidFill>
@@ -6684,7 +6711,7 @@
                 <a:sym typeface="VT323"/>
               </a:defRPr>
             </a:lvl3pPr>
-            <a:lvl4pPr lvl="3" marR="0" rtl="0" algn="l">
+            <a:lvl4pPr marR="0" lvl="3" algn="l" rtl="0">
               <a:lnSpc>
                 <a:spcPct val="100000"/>
               </a:lnSpc>
@@ -6700,7 +6727,7 @@
               <a:buSzPts val="3200"/>
               <a:buFont typeface="VT323"/>
               <a:buNone/>
-              <a:defRPr b="0" i="0" sz="3200" u="none" cap="none" strike="noStrike">
+              <a:defRPr sz="3200" b="0" i="0" u="none" strike="noStrike" cap="none">
                 <a:solidFill>
                   <a:schemeClr val="dk1"/>
                 </a:solidFill>
@@ -6710,7 +6737,7 @@
                 <a:sym typeface="VT323"/>
               </a:defRPr>
             </a:lvl4pPr>
-            <a:lvl5pPr lvl="4" marR="0" rtl="0" algn="l">
+            <a:lvl5pPr marR="0" lvl="4" algn="l" rtl="0">
               <a:lnSpc>
                 <a:spcPct val="100000"/>
               </a:lnSpc>
@@ -6726,7 +6753,7 @@
               <a:buSzPts val="3200"/>
               <a:buFont typeface="VT323"/>
               <a:buNone/>
-              <a:defRPr b="0" i="0" sz="3200" u="none" cap="none" strike="noStrike">
+              <a:defRPr sz="3200" b="0" i="0" u="none" strike="noStrike" cap="none">
                 <a:solidFill>
                   <a:schemeClr val="dk1"/>
                 </a:solidFill>
@@ -6736,7 +6763,7 @@
                 <a:sym typeface="VT323"/>
               </a:defRPr>
             </a:lvl5pPr>
-            <a:lvl6pPr lvl="5" marR="0" rtl="0" algn="l">
+            <a:lvl6pPr marR="0" lvl="5" algn="l" rtl="0">
               <a:lnSpc>
                 <a:spcPct val="100000"/>
               </a:lnSpc>
@@ -6752,7 +6779,7 @@
               <a:buSzPts val="3200"/>
               <a:buFont typeface="VT323"/>
               <a:buNone/>
-              <a:defRPr b="0" i="0" sz="3200" u="none" cap="none" strike="noStrike">
+              <a:defRPr sz="3200" b="0" i="0" u="none" strike="noStrike" cap="none">
                 <a:solidFill>
                   <a:schemeClr val="dk1"/>
                 </a:solidFill>
@@ -6762,7 +6789,7 @@
                 <a:sym typeface="VT323"/>
               </a:defRPr>
             </a:lvl6pPr>
-            <a:lvl7pPr lvl="6" marR="0" rtl="0" algn="l">
+            <a:lvl7pPr marR="0" lvl="6" algn="l" rtl="0">
               <a:lnSpc>
                 <a:spcPct val="100000"/>
               </a:lnSpc>
@@ -6778,7 +6805,7 @@
               <a:buSzPts val="3200"/>
               <a:buFont typeface="VT323"/>
               <a:buNone/>
-              <a:defRPr b="0" i="0" sz="3200" u="none" cap="none" strike="noStrike">
+              <a:defRPr sz="3200" b="0" i="0" u="none" strike="noStrike" cap="none">
                 <a:solidFill>
                   <a:schemeClr val="dk1"/>
                 </a:solidFill>
@@ -6788,7 +6815,7 @@
                 <a:sym typeface="VT323"/>
               </a:defRPr>
             </a:lvl7pPr>
-            <a:lvl8pPr lvl="7" marR="0" rtl="0" algn="l">
+            <a:lvl8pPr marR="0" lvl="7" algn="l" rtl="0">
               <a:lnSpc>
                 <a:spcPct val="100000"/>
               </a:lnSpc>
@@ -6804,7 +6831,7 @@
               <a:buSzPts val="3200"/>
               <a:buFont typeface="VT323"/>
               <a:buNone/>
-              <a:defRPr b="0" i="0" sz="3200" u="none" cap="none" strike="noStrike">
+              <a:defRPr sz="3200" b="0" i="0" u="none" strike="noStrike" cap="none">
                 <a:solidFill>
                   <a:schemeClr val="dk1"/>
                 </a:solidFill>
@@ -6814,7 +6841,7 @@
                 <a:sym typeface="VT323"/>
               </a:defRPr>
             </a:lvl8pPr>
-            <a:lvl9pPr lvl="8" marR="0" rtl="0" algn="l">
+            <a:lvl9pPr marR="0" lvl="8" algn="l" rtl="0">
               <a:lnSpc>
                 <a:spcPct val="100000"/>
               </a:lnSpc>
@@ -6830,7 +6857,7 @@
               <a:buSzPts val="3200"/>
               <a:buFont typeface="VT323"/>
               <a:buNone/>
-              <a:defRPr b="0" i="0" sz="3200" u="none" cap="none" strike="noStrike">
+              <a:defRPr sz="3200" b="0" i="0" u="none" strike="noStrike" cap="none">
                 <a:solidFill>
                   <a:schemeClr val="dk1"/>
                 </a:solidFill>
@@ -6841,15 +6868,19 @@
               </a:defRPr>
             </a:lvl9pPr>
           </a:lstStyle>
-          <a:p/>
+          <a:p>
+            <a:endParaRPr/>
+          </a:p>
         </p:txBody>
       </p:sp>
       <p:sp>
         <p:nvSpPr>
           <p:cNvPr id="7" name="Google Shape;7;p1"/>
-          <p:cNvSpPr txBox="1"/>
+          <p:cNvSpPr txBox="1">
+            <a:spLocks noGrp="1"/>
+          </p:cNvSpPr>
           <p:nvPr>
-            <p:ph idx="1" type="body"/>
+            <p:ph type="body" idx="1"/>
           </p:nvPr>
         </p:nvSpPr>
         <p:spPr>
@@ -6866,11 +6897,11 @@
           </a:ln>
         </p:spPr>
         <p:txBody>
-          <a:bodyPr anchorCtr="0" anchor="t" bIns="91425" lIns="91425" spcFirstLastPara="1" rIns="91425" wrap="square" tIns="91425">
+          <a:bodyPr spcFirstLastPara="1" wrap="square" lIns="91425" tIns="91425" rIns="91425" bIns="91425" anchor="t" anchorCtr="0">
             <a:noAutofit/>
           </a:bodyPr>
           <a:lstStyle>
-            <a:lvl1pPr indent="-317500" lvl="0" marL="457200" marR="0" rtl="0" algn="l">
+            <a:lvl1pPr marL="457200" marR="0" lvl="0" indent="-317500" algn="l" rtl="0">
               <a:lnSpc>
                 <a:spcPct val="100000"/>
               </a:lnSpc>
@@ -6886,7 +6917,7 @@
               <a:buSzPts val="1400"/>
               <a:buFont typeface="Roboto Mono"/>
               <a:buChar char="●"/>
-              <a:defRPr b="0" i="0" sz="1400" u="none" cap="none" strike="noStrike">
+              <a:defRPr sz="1400" b="0" i="0" u="none" strike="noStrike" cap="none">
                 <a:solidFill>
                   <a:schemeClr val="dk1"/>
                 </a:solidFill>
@@ -6896,7 +6927,7 @@
                 <a:sym typeface="Roboto Mono"/>
               </a:defRPr>
             </a:lvl1pPr>
-            <a:lvl2pPr indent="-317500" lvl="1" marL="914400" marR="0" rtl="0" algn="l">
+            <a:lvl2pPr marL="914400" marR="0" lvl="1" indent="-317500" algn="l" rtl="0">
               <a:lnSpc>
                 <a:spcPct val="100000"/>
               </a:lnSpc>
@@ -6912,7 +6943,7 @@
               <a:buSzPts val="1400"/>
               <a:buFont typeface="Roboto Mono"/>
               <a:buChar char="○"/>
-              <a:defRPr b="0" i="0" sz="1400" u="none" cap="none" strike="noStrike">
+              <a:defRPr sz="1400" b="0" i="0" u="none" strike="noStrike" cap="none">
                 <a:solidFill>
                   <a:schemeClr val="dk1"/>
                 </a:solidFill>
@@ -6922,7 +6953,7 @@
                 <a:sym typeface="Roboto Mono"/>
               </a:defRPr>
             </a:lvl2pPr>
-            <a:lvl3pPr indent="-317500" lvl="2" marL="1371600" marR="0" rtl="0" algn="l">
+            <a:lvl3pPr marL="1371600" marR="0" lvl="2" indent="-317500" algn="l" rtl="0">
               <a:lnSpc>
                 <a:spcPct val="100000"/>
               </a:lnSpc>
@@ -6938,7 +6969,7 @@
               <a:buSzPts val="1400"/>
               <a:buFont typeface="Roboto Mono"/>
               <a:buChar char="■"/>
-              <a:defRPr b="0" i="0" sz="1400" u="none" cap="none" strike="noStrike">
+              <a:defRPr sz="1400" b="0" i="0" u="none" strike="noStrike" cap="none">
                 <a:solidFill>
                   <a:schemeClr val="dk1"/>
                 </a:solidFill>
@@ -6948,7 +6979,7 @@
                 <a:sym typeface="Roboto Mono"/>
               </a:defRPr>
             </a:lvl3pPr>
-            <a:lvl4pPr indent="-317500" lvl="3" marL="1828800" marR="0" rtl="0" algn="l">
+            <a:lvl4pPr marL="1828800" marR="0" lvl="3" indent="-317500" algn="l" rtl="0">
               <a:lnSpc>
                 <a:spcPct val="100000"/>
               </a:lnSpc>
@@ -6964,7 +6995,7 @@
               <a:buSzPts val="1400"/>
               <a:buFont typeface="Roboto Mono"/>
               <a:buChar char="●"/>
-              <a:defRPr b="0" i="0" sz="1400" u="none" cap="none" strike="noStrike">
+              <a:defRPr sz="1400" b="0" i="0" u="none" strike="noStrike" cap="none">
                 <a:solidFill>
                   <a:schemeClr val="dk1"/>
                 </a:solidFill>
@@ -6974,7 +7005,7 @@
                 <a:sym typeface="Roboto Mono"/>
               </a:defRPr>
             </a:lvl4pPr>
-            <a:lvl5pPr indent="-317500" lvl="4" marL="2286000" marR="0" rtl="0" algn="l">
+            <a:lvl5pPr marL="2286000" marR="0" lvl="4" indent="-317500" algn="l" rtl="0">
               <a:lnSpc>
                 <a:spcPct val="100000"/>
               </a:lnSpc>
@@ -6990,7 +7021,7 @@
               <a:buSzPts val="1400"/>
               <a:buFont typeface="Roboto Mono"/>
               <a:buChar char="○"/>
-              <a:defRPr b="0" i="0" sz="1400" u="none" cap="none" strike="noStrike">
+              <a:defRPr sz="1400" b="0" i="0" u="none" strike="noStrike" cap="none">
                 <a:solidFill>
                   <a:schemeClr val="dk1"/>
                 </a:solidFill>
@@ -7000,7 +7031,7 @@
                 <a:sym typeface="Roboto Mono"/>
               </a:defRPr>
             </a:lvl5pPr>
-            <a:lvl6pPr indent="-317500" lvl="5" marL="2743200" marR="0" rtl="0" algn="l">
+            <a:lvl6pPr marL="2743200" marR="0" lvl="5" indent="-317500" algn="l" rtl="0">
               <a:lnSpc>
                 <a:spcPct val="100000"/>
               </a:lnSpc>
@@ -7016,7 +7047,7 @@
               <a:buSzPts val="1400"/>
               <a:buFont typeface="Roboto Mono"/>
               <a:buChar char="■"/>
-              <a:defRPr b="0" i="0" sz="1400" u="none" cap="none" strike="noStrike">
+              <a:defRPr sz="1400" b="0" i="0" u="none" strike="noStrike" cap="none">
                 <a:solidFill>
                   <a:schemeClr val="dk1"/>
                 </a:solidFill>
@@ -7026,7 +7057,7 @@
                 <a:sym typeface="Roboto Mono"/>
               </a:defRPr>
             </a:lvl6pPr>
-            <a:lvl7pPr indent="-317500" lvl="6" marL="3200400" marR="0" rtl="0" algn="l">
+            <a:lvl7pPr marL="3200400" marR="0" lvl="6" indent="-317500" algn="l" rtl="0">
               <a:lnSpc>
                 <a:spcPct val="100000"/>
               </a:lnSpc>
@@ -7042,7 +7073,7 @@
               <a:buSzPts val="1400"/>
               <a:buFont typeface="Roboto Mono"/>
               <a:buChar char="●"/>
-              <a:defRPr b="0" i="0" sz="1400" u="none" cap="none" strike="noStrike">
+              <a:defRPr sz="1400" b="0" i="0" u="none" strike="noStrike" cap="none">
                 <a:solidFill>
                   <a:schemeClr val="dk1"/>
                 </a:solidFill>
@@ -7052,7 +7083,7 @@
                 <a:sym typeface="Roboto Mono"/>
               </a:defRPr>
             </a:lvl7pPr>
-            <a:lvl8pPr indent="-317500" lvl="7" marL="3657600" marR="0" rtl="0" algn="l">
+            <a:lvl8pPr marL="3657600" marR="0" lvl="7" indent="-317500" algn="l" rtl="0">
               <a:lnSpc>
                 <a:spcPct val="100000"/>
               </a:lnSpc>
@@ -7068,7 +7099,7 @@
               <a:buSzPts val="1400"/>
               <a:buFont typeface="Roboto Mono"/>
               <a:buChar char="○"/>
-              <a:defRPr b="0" i="0" sz="1400" u="none" cap="none" strike="noStrike">
+              <a:defRPr sz="1400" b="0" i="0" u="none" strike="noStrike" cap="none">
                 <a:solidFill>
                   <a:schemeClr val="dk1"/>
                 </a:solidFill>
@@ -7078,7 +7109,7 @@
                 <a:sym typeface="Roboto Mono"/>
               </a:defRPr>
             </a:lvl8pPr>
-            <a:lvl9pPr indent="-317500" lvl="8" marL="4114800" marR="0" rtl="0" algn="l">
+            <a:lvl9pPr marL="4114800" marR="0" lvl="8" indent="-317500" algn="l" rtl="0">
               <a:lnSpc>
                 <a:spcPct val="100000"/>
               </a:lnSpc>
@@ -7094,7 +7125,7 @@
               <a:buSzPts val="1400"/>
               <a:buFont typeface="Roboto Mono"/>
               <a:buChar char="■"/>
-              <a:defRPr b="0" i="0" sz="1400" u="none" cap="none" strike="noStrike">
+              <a:defRPr sz="1400" b="0" i="0" u="none" strike="noStrike" cap="none">
                 <a:solidFill>
                   <a:schemeClr val="dk1"/>
                 </a:solidFill>
@@ -7105,12 +7136,14 @@
               </a:defRPr>
             </a:lvl9pPr>
           </a:lstStyle>
-          <a:p/>
+          <a:p>
+            <a:endParaRPr/>
+          </a:p>
         </p:txBody>
       </p:sp>
     </p:spTree>
   </p:cSld>
-  <p:clrMap accent1="accent1" accent2="accent2" accent3="accent3" accent4="accent4" accent5="accent5" accent6="accent6" bg1="lt1" bg2="dk2" tx1="dk1" tx2="lt2" folHlink="folHlink" hlink="hlink"/>
+  <p:clrMap bg1="lt1" tx1="dk1" bg2="dk2" tx2="lt2" accent1="accent1" accent2="accent2" accent3="accent3" accent4="accent4" accent5="accent5" accent6="accent6" hlink="hlink" folHlink="folHlink"/>
   <p:sldLayoutIdLst>
     <p:sldLayoutId id="2147483648" r:id="rId1"/>
     <p:sldLayoutId id="2147483649" r:id="rId2"/>
@@ -7126,10 +7159,10 @@
     <p:sldLayoutId id="2147483659" r:id="rId12"/>
     <p:sldLayoutId id="2147483660" r:id="rId13"/>
   </p:sldLayoutIdLst>
-  <p:hf dt="0" ftr="0" hdr="0"/>
+  <p:hf hdr="0" ftr="0" dt="0"/>
   <p:txStyles>
     <p:titleStyle>
-      <a:defPPr lvl="0" marR="0" rtl="0" algn="l">
+      <a:defPPr marR="0" lvl="0" algn="l" rtl="0">
         <a:lnSpc>
           <a:spcPct val="100000"/>
         </a:lnSpc>
@@ -7140,7 +7173,7 @@
           <a:spcPts val="0"/>
         </a:spcAft>
       </a:defPPr>
-      <a:lvl1pPr lvl="0" marR="0" rtl="0" algn="l">
+      <a:lvl1pPr marR="0" lvl="0" algn="l" rtl="0">
         <a:lnSpc>
           <a:spcPct val="100000"/>
         </a:lnSpc>
@@ -7154,7 +7187,7 @@
           <a:srgbClr val="000000"/>
         </a:buClr>
         <a:buFont typeface="Arial"/>
-        <a:defRPr b="0" i="0" sz="1400" u="none" cap="none" strike="noStrike">
+        <a:defRPr sz="1400" b="0" i="0" u="none" strike="noStrike" cap="none">
           <a:solidFill>
             <a:srgbClr val="000000"/>
           </a:solidFill>
@@ -7164,7 +7197,7 @@
           <a:sym typeface="Arial"/>
         </a:defRPr>
       </a:lvl1pPr>
-      <a:lvl2pPr lvl="1" marR="0" rtl="0" algn="l">
+      <a:lvl2pPr marR="0" lvl="1" algn="l" rtl="0">
         <a:lnSpc>
           <a:spcPct val="100000"/>
         </a:lnSpc>
@@ -7178,7 +7211,7 @@
           <a:srgbClr val="000000"/>
         </a:buClr>
         <a:buFont typeface="Arial"/>
-        <a:defRPr b="0" i="0" sz="1400" u="none" cap="none" strike="noStrike">
+        <a:defRPr sz="1400" b="0" i="0" u="none" strike="noStrike" cap="none">
           <a:solidFill>
             <a:srgbClr val="000000"/>
           </a:solidFill>
@@ -7188,7 +7221,7 @@
           <a:sym typeface="Arial"/>
         </a:defRPr>
       </a:lvl2pPr>
-      <a:lvl3pPr lvl="2" marR="0" rtl="0" algn="l">
+      <a:lvl3pPr marR="0" lvl="2" algn="l" rtl="0">
         <a:lnSpc>
           <a:spcPct val="100000"/>
         </a:lnSpc>
@@ -7202,7 +7235,7 @@
           <a:srgbClr val="000000"/>
         </a:buClr>
         <a:buFont typeface="Arial"/>
-        <a:defRPr b="0" i="0" sz="1400" u="none" cap="none" strike="noStrike">
+        <a:defRPr sz="1400" b="0" i="0" u="none" strike="noStrike" cap="none">
           <a:solidFill>
             <a:srgbClr val="000000"/>
           </a:solidFill>
@@ -7212,7 +7245,7 @@
           <a:sym typeface="Arial"/>
         </a:defRPr>
       </a:lvl3pPr>
-      <a:lvl4pPr lvl="3" marR="0" rtl="0" algn="l">
+      <a:lvl4pPr marR="0" lvl="3" algn="l" rtl="0">
         <a:lnSpc>
           <a:spcPct val="100000"/>
         </a:lnSpc>
@@ -7226,7 +7259,7 @@
           <a:srgbClr val="000000"/>
         </a:buClr>
         <a:buFont typeface="Arial"/>
-        <a:defRPr b="0" i="0" sz="1400" u="none" cap="none" strike="noStrike">
+        <a:defRPr sz="1400" b="0" i="0" u="none" strike="noStrike" cap="none">
           <a:solidFill>
             <a:srgbClr val="000000"/>
           </a:solidFill>
@@ -7236,7 +7269,7 @@
           <a:sym typeface="Arial"/>
         </a:defRPr>
       </a:lvl4pPr>
-      <a:lvl5pPr lvl="4" marR="0" rtl="0" algn="l">
+      <a:lvl5pPr marR="0" lvl="4" algn="l" rtl="0">
         <a:lnSpc>
           <a:spcPct val="100000"/>
         </a:lnSpc>
@@ -7250,7 +7283,7 @@
           <a:srgbClr val="000000"/>
         </a:buClr>
         <a:buFont typeface="Arial"/>
-        <a:defRPr b="0" i="0" sz="1400" u="none" cap="none" strike="noStrike">
+        <a:defRPr sz="1400" b="0" i="0" u="none" strike="noStrike" cap="none">
           <a:solidFill>
             <a:srgbClr val="000000"/>
           </a:solidFill>
@@ -7260,7 +7293,7 @@
           <a:sym typeface="Arial"/>
         </a:defRPr>
       </a:lvl5pPr>
-      <a:lvl6pPr lvl="5" marR="0" rtl="0" algn="l">
+      <a:lvl6pPr marR="0" lvl="5" algn="l" rtl="0">
         <a:lnSpc>
           <a:spcPct val="100000"/>
         </a:lnSpc>
@@ -7274,7 +7307,7 @@
           <a:srgbClr val="000000"/>
         </a:buClr>
         <a:buFont typeface="Arial"/>
-        <a:defRPr b="0" i="0" sz="1400" u="none" cap="none" strike="noStrike">
+        <a:defRPr sz="1400" b="0" i="0" u="none" strike="noStrike" cap="none">
           <a:solidFill>
             <a:srgbClr val="000000"/>
           </a:solidFill>
@@ -7284,7 +7317,7 @@
           <a:sym typeface="Arial"/>
         </a:defRPr>
       </a:lvl6pPr>
-      <a:lvl7pPr lvl="6" marR="0" rtl="0" algn="l">
+      <a:lvl7pPr marR="0" lvl="6" algn="l" rtl="0">
         <a:lnSpc>
           <a:spcPct val="100000"/>
         </a:lnSpc>
@@ -7298,7 +7331,7 @@
           <a:srgbClr val="000000"/>
         </a:buClr>
         <a:buFont typeface="Arial"/>
-        <a:defRPr b="0" i="0" sz="1400" u="none" cap="none" strike="noStrike">
+        <a:defRPr sz="1400" b="0" i="0" u="none" strike="noStrike" cap="none">
           <a:solidFill>
             <a:srgbClr val="000000"/>
           </a:solidFill>
@@ -7308,7 +7341,7 @@
           <a:sym typeface="Arial"/>
         </a:defRPr>
       </a:lvl7pPr>
-      <a:lvl8pPr lvl="7" marR="0" rtl="0" algn="l">
+      <a:lvl8pPr marR="0" lvl="7" algn="l" rtl="0">
         <a:lnSpc>
           <a:spcPct val="100000"/>
         </a:lnSpc>
@@ -7322,7 +7355,7 @@
           <a:srgbClr val="000000"/>
         </a:buClr>
         <a:buFont typeface="Arial"/>
-        <a:defRPr b="0" i="0" sz="1400" u="none" cap="none" strike="noStrike">
+        <a:defRPr sz="1400" b="0" i="0" u="none" strike="noStrike" cap="none">
           <a:solidFill>
             <a:srgbClr val="000000"/>
           </a:solidFill>
@@ -7332,7 +7365,7 @@
           <a:sym typeface="Arial"/>
         </a:defRPr>
       </a:lvl8pPr>
-      <a:lvl9pPr lvl="8" marR="0" rtl="0" algn="l">
+      <a:lvl9pPr marR="0" lvl="8" algn="l" rtl="0">
         <a:lnSpc>
           <a:spcPct val="100000"/>
         </a:lnSpc>
@@ -7346,7 +7379,7 @@
           <a:srgbClr val="000000"/>
         </a:buClr>
         <a:buFont typeface="Arial"/>
-        <a:defRPr b="0" i="0" sz="1400" u="none" cap="none" strike="noStrike">
+        <a:defRPr sz="1400" b="0" i="0" u="none" strike="noStrike" cap="none">
           <a:solidFill>
             <a:srgbClr val="000000"/>
           </a:solidFill>
@@ -7358,7 +7391,7 @@
       </a:lvl9pPr>
     </p:titleStyle>
     <p:bodyStyle>
-      <a:defPPr lvl="0" marR="0" rtl="0" algn="l">
+      <a:defPPr marR="0" lvl="0" algn="l" rtl="0">
         <a:lnSpc>
           <a:spcPct val="100000"/>
         </a:lnSpc>
@@ -7369,7 +7402,7 @@
           <a:spcPts val="0"/>
         </a:spcAft>
       </a:defPPr>
-      <a:lvl1pPr lvl="0" marR="0" rtl="0" algn="l">
+      <a:lvl1pPr marR="0" lvl="0" algn="l" rtl="0">
         <a:lnSpc>
           <a:spcPct val="100000"/>
         </a:lnSpc>
@@ -7383,7 +7416,7 @@
           <a:srgbClr val="000000"/>
         </a:buClr>
         <a:buFont typeface="Arial"/>
-        <a:defRPr b="0" i="0" sz="1400" u="none" cap="none" strike="noStrike">
+        <a:defRPr sz="1400" b="0" i="0" u="none" strike="noStrike" cap="none">
           <a:solidFill>
             <a:srgbClr val="000000"/>
           </a:solidFill>
@@ -7393,7 +7426,7 @@
           <a:sym typeface="Arial"/>
         </a:defRPr>
       </a:lvl1pPr>
-      <a:lvl2pPr lvl="1" marR="0" rtl="0" algn="l">
+      <a:lvl2pPr marR="0" lvl="1" algn="l" rtl="0">
         <a:lnSpc>
           <a:spcPct val="100000"/>
         </a:lnSpc>
@@ -7407,7 +7440,7 @@
           <a:srgbClr val="000000"/>
         </a:buClr>
         <a:buFont typeface="Arial"/>
-        <a:defRPr b="0" i="0" sz="1400" u="none" cap="none" strike="noStrike">
+        <a:defRPr sz="1400" b="0" i="0" u="none" strike="noStrike" cap="none">
           <a:solidFill>
             <a:srgbClr val="000000"/>
           </a:solidFill>
@@ -7417,7 +7450,7 @@
           <a:sym typeface="Arial"/>
         </a:defRPr>
       </a:lvl2pPr>
-      <a:lvl3pPr lvl="2" marR="0" rtl="0" algn="l">
+      <a:lvl3pPr marR="0" lvl="2" algn="l" rtl="0">
         <a:lnSpc>
           <a:spcPct val="100000"/>
         </a:lnSpc>
@@ -7431,7 +7464,7 @@
           <a:srgbClr val="000000"/>
         </a:buClr>
         <a:buFont typeface="Arial"/>
-        <a:defRPr b="0" i="0" sz="1400" u="none" cap="none" strike="noStrike">
+        <a:defRPr sz="1400" b="0" i="0" u="none" strike="noStrike" cap="none">
           <a:solidFill>
             <a:srgbClr val="000000"/>
           </a:solidFill>
@@ -7441,7 +7474,7 @@
           <a:sym typeface="Arial"/>
         </a:defRPr>
       </a:lvl3pPr>
-      <a:lvl4pPr lvl="3" marR="0" rtl="0" algn="l">
+      <a:lvl4pPr marR="0" lvl="3" algn="l" rtl="0">
         <a:lnSpc>
           <a:spcPct val="100000"/>
         </a:lnSpc>
@@ -7455,7 +7488,7 @@
           <a:srgbClr val="000000"/>
         </a:buClr>
         <a:buFont typeface="Arial"/>
-        <a:defRPr b="0" i="0" sz="1400" u="none" cap="none" strike="noStrike">
+        <a:defRPr sz="1400" b="0" i="0" u="none" strike="noStrike" cap="none">
           <a:solidFill>
             <a:srgbClr val="000000"/>
           </a:solidFill>
@@ -7465,7 +7498,7 @@
           <a:sym typeface="Arial"/>
         </a:defRPr>
       </a:lvl4pPr>
-      <a:lvl5pPr lvl="4" marR="0" rtl="0" algn="l">
+      <a:lvl5pPr marR="0" lvl="4" algn="l" rtl="0">
         <a:lnSpc>
           <a:spcPct val="100000"/>
         </a:lnSpc>
@@ -7479,7 +7512,7 @@
           <a:srgbClr val="000000"/>
         </a:buClr>
         <a:buFont typeface="Arial"/>
-        <a:defRPr b="0" i="0" sz="1400" u="none" cap="none" strike="noStrike">
+        <a:defRPr sz="1400" b="0" i="0" u="none" strike="noStrike" cap="none">
           <a:solidFill>
             <a:srgbClr val="000000"/>
           </a:solidFill>
@@ -7489,7 +7522,7 @@
           <a:sym typeface="Arial"/>
         </a:defRPr>
       </a:lvl5pPr>
-      <a:lvl6pPr lvl="5" marR="0" rtl="0" algn="l">
+      <a:lvl6pPr marR="0" lvl="5" algn="l" rtl="0">
         <a:lnSpc>
           <a:spcPct val="100000"/>
         </a:lnSpc>
@@ -7503,7 +7536,7 @@
           <a:srgbClr val="000000"/>
         </a:buClr>
         <a:buFont typeface="Arial"/>
-        <a:defRPr b="0" i="0" sz="1400" u="none" cap="none" strike="noStrike">
+        <a:defRPr sz="1400" b="0" i="0" u="none" strike="noStrike" cap="none">
           <a:solidFill>
             <a:srgbClr val="000000"/>
           </a:solidFill>
@@ -7513,7 +7546,7 @@
           <a:sym typeface="Arial"/>
         </a:defRPr>
       </a:lvl6pPr>
-      <a:lvl7pPr lvl="6" marR="0" rtl="0" algn="l">
+      <a:lvl7pPr marR="0" lvl="6" algn="l" rtl="0">
         <a:lnSpc>
           <a:spcPct val="100000"/>
         </a:lnSpc>
@@ -7527,7 +7560,7 @@
           <a:srgbClr val="000000"/>
         </a:buClr>
         <a:buFont typeface="Arial"/>
-        <a:defRPr b="0" i="0" sz="1400" u="none" cap="none" strike="noStrike">
+        <a:defRPr sz="1400" b="0" i="0" u="none" strike="noStrike" cap="none">
           <a:solidFill>
             <a:srgbClr val="000000"/>
           </a:solidFill>
@@ -7537,7 +7570,7 @@
           <a:sym typeface="Arial"/>
         </a:defRPr>
       </a:lvl7pPr>
-      <a:lvl8pPr lvl="7" marR="0" rtl="0" algn="l">
+      <a:lvl8pPr marR="0" lvl="7" algn="l" rtl="0">
         <a:lnSpc>
           <a:spcPct val="100000"/>
         </a:lnSpc>
@@ -7551,7 +7584,7 @@
           <a:srgbClr val="000000"/>
         </a:buClr>
         <a:buFont typeface="Arial"/>
-        <a:defRPr b="0" i="0" sz="1400" u="none" cap="none" strike="noStrike">
+        <a:defRPr sz="1400" b="0" i="0" u="none" strike="noStrike" cap="none">
           <a:solidFill>
             <a:srgbClr val="000000"/>
           </a:solidFill>
@@ -7561,7 +7594,7 @@
           <a:sym typeface="Arial"/>
         </a:defRPr>
       </a:lvl8pPr>
-      <a:lvl9pPr lvl="8" marR="0" rtl="0" algn="l">
+      <a:lvl9pPr marR="0" lvl="8" algn="l" rtl="0">
         <a:lnSpc>
           <a:spcPct val="100000"/>
         </a:lnSpc>
@@ -7575,7 +7608,7 @@
           <a:srgbClr val="000000"/>
         </a:buClr>
         <a:buFont typeface="Arial"/>
-        <a:defRPr b="0" i="0" sz="1400" u="none" cap="none" strike="noStrike">
+        <a:defRPr sz="1400" b="0" i="0" u="none" strike="noStrike" cap="none">
           <a:solidFill>
             <a:srgbClr val="000000"/>
           </a:solidFill>
@@ -7587,7 +7620,7 @@
       </a:lvl9pPr>
     </p:bodyStyle>
     <p:otherStyle>
-      <a:defPPr lvl="0" marR="0" rtl="0" algn="l">
+      <a:defPPr marR="0" lvl="0" algn="l" rtl="0">
         <a:lnSpc>
           <a:spcPct val="100000"/>
         </a:lnSpc>
@@ -7598,7 +7631,7 @@
           <a:spcPts val="0"/>
         </a:spcAft>
       </a:defPPr>
-      <a:lvl1pPr lvl="0" marR="0" rtl="0" algn="l">
+      <a:lvl1pPr marR="0" lvl="0" algn="l" rtl="0">
         <a:lnSpc>
           <a:spcPct val="100000"/>
         </a:lnSpc>
@@ -7612,7 +7645,7 @@
           <a:srgbClr val="000000"/>
         </a:buClr>
         <a:buFont typeface="Arial"/>
-        <a:defRPr b="0" i="0" sz="1400" u="none" cap="none" strike="noStrike">
+        <a:defRPr sz="1400" b="0" i="0" u="none" strike="noStrike" cap="none">
           <a:solidFill>
             <a:srgbClr val="000000"/>
           </a:solidFill>
@@ -7622,7 +7655,7 @@
           <a:sym typeface="Arial"/>
         </a:defRPr>
       </a:lvl1pPr>
-      <a:lvl2pPr lvl="1" marR="0" rtl="0" algn="l">
+      <a:lvl2pPr marR="0" lvl="1" algn="l" rtl="0">
         <a:lnSpc>
           <a:spcPct val="100000"/>
         </a:lnSpc>
@@ -7636,7 +7669,7 @@
           <a:srgbClr val="000000"/>
         </a:buClr>
         <a:buFont typeface="Arial"/>
-        <a:defRPr b="0" i="0" sz="1400" u="none" cap="none" strike="noStrike">
+        <a:defRPr sz="1400" b="0" i="0" u="none" strike="noStrike" cap="none">
           <a:solidFill>
             <a:srgbClr val="000000"/>
           </a:solidFill>
@@ -7646,7 +7679,7 @@
           <a:sym typeface="Arial"/>
         </a:defRPr>
       </a:lvl2pPr>
-      <a:lvl3pPr lvl="2" marR="0" rtl="0" algn="l">
+      <a:lvl3pPr marR="0" lvl="2" algn="l" rtl="0">
         <a:lnSpc>
           <a:spcPct val="100000"/>
         </a:lnSpc>
@@ -7660,7 +7693,7 @@
           <a:srgbClr val="000000"/>
         </a:buClr>
         <a:buFont typeface="Arial"/>
-        <a:defRPr b="0" i="0" sz="1400" u="none" cap="none" strike="noStrike">
+        <a:defRPr sz="1400" b="0" i="0" u="none" strike="noStrike" cap="none">
           <a:solidFill>
             <a:srgbClr val="000000"/>
           </a:solidFill>
@@ -7670,7 +7703,7 @@
           <a:sym typeface="Arial"/>
         </a:defRPr>
       </a:lvl3pPr>
-      <a:lvl4pPr lvl="3" marR="0" rtl="0" algn="l">
+      <a:lvl4pPr marR="0" lvl="3" algn="l" rtl="0">
         <a:lnSpc>
           <a:spcPct val="100000"/>
         </a:lnSpc>
@@ -7684,7 +7717,7 @@
           <a:srgbClr val="000000"/>
         </a:buClr>
         <a:buFont typeface="Arial"/>
-        <a:defRPr b="0" i="0" sz="1400" u="none" cap="none" strike="noStrike">
+        <a:defRPr sz="1400" b="0" i="0" u="none" strike="noStrike" cap="none">
           <a:solidFill>
             <a:srgbClr val="000000"/>
           </a:solidFill>
@@ -7694,7 +7727,7 @@
           <a:sym typeface="Arial"/>
         </a:defRPr>
       </a:lvl4pPr>
-      <a:lvl5pPr lvl="4" marR="0" rtl="0" algn="l">
+      <a:lvl5pPr marR="0" lvl="4" algn="l" rtl="0">
         <a:lnSpc>
           <a:spcPct val="100000"/>
         </a:lnSpc>
@@ -7708,7 +7741,7 @@
           <a:srgbClr val="000000"/>
         </a:buClr>
         <a:buFont typeface="Arial"/>
-        <a:defRPr b="0" i="0" sz="1400" u="none" cap="none" strike="noStrike">
+        <a:defRPr sz="1400" b="0" i="0" u="none" strike="noStrike" cap="none">
           <a:solidFill>
             <a:srgbClr val="000000"/>
           </a:solidFill>
@@ -7718,7 +7751,7 @@
           <a:sym typeface="Arial"/>
         </a:defRPr>
       </a:lvl5pPr>
-      <a:lvl6pPr lvl="5" marR="0" rtl="0" algn="l">
+      <a:lvl6pPr marR="0" lvl="5" algn="l" rtl="0">
         <a:lnSpc>
           <a:spcPct val="100000"/>
         </a:lnSpc>
@@ -7732,7 +7765,7 @@
           <a:srgbClr val="000000"/>
         </a:buClr>
         <a:buFont typeface="Arial"/>
-        <a:defRPr b="0" i="0" sz="1400" u="none" cap="none" strike="noStrike">
+        <a:defRPr sz="1400" b="0" i="0" u="none" strike="noStrike" cap="none">
           <a:solidFill>
             <a:srgbClr val="000000"/>
           </a:solidFill>
@@ -7742,7 +7775,7 @@
           <a:sym typeface="Arial"/>
         </a:defRPr>
       </a:lvl6pPr>
-      <a:lvl7pPr lvl="6" marR="0" rtl="0" algn="l">
+      <a:lvl7pPr marR="0" lvl="6" algn="l" rtl="0">
         <a:lnSpc>
           <a:spcPct val="100000"/>
         </a:lnSpc>
@@ -7756,7 +7789,7 @@
           <a:srgbClr val="000000"/>
         </a:buClr>
         <a:buFont typeface="Arial"/>
-        <a:defRPr b="0" i="0" sz="1400" u="none" cap="none" strike="noStrike">
+        <a:defRPr sz="1400" b="0" i="0" u="none" strike="noStrike" cap="none">
           <a:solidFill>
             <a:srgbClr val="000000"/>
           </a:solidFill>
@@ -7766,7 +7799,7 @@
           <a:sym typeface="Arial"/>
         </a:defRPr>
       </a:lvl7pPr>
-      <a:lvl8pPr lvl="7" marR="0" rtl="0" algn="l">
+      <a:lvl8pPr marR="0" lvl="7" algn="l" rtl="0">
         <a:lnSpc>
           <a:spcPct val="100000"/>
         </a:lnSpc>
@@ -7780,7 +7813,7 @@
           <a:srgbClr val="000000"/>
         </a:buClr>
         <a:buFont typeface="Arial"/>
-        <a:defRPr b="0" i="0" sz="1400" u="none" cap="none" strike="noStrike">
+        <a:defRPr sz="1400" b="0" i="0" u="none" strike="noStrike" cap="none">
           <a:solidFill>
             <a:srgbClr val="000000"/>
           </a:solidFill>
@@ -7790,7 +7823,7 @@
           <a:sym typeface="Arial"/>
         </a:defRPr>
       </a:lvl8pPr>
-      <a:lvl9pPr lvl="8" marR="0" rtl="0" algn="l">
+      <a:lvl9pPr marR="0" lvl="8" algn="l" rtl="0">
         <a:lnSpc>
           <a:spcPct val="100000"/>
         </a:lnSpc>
@@ -7804,7 +7837,7 @@
           <a:srgbClr val="000000"/>
         </a:buClr>
         <a:buFont typeface="Arial"/>
-        <a:defRPr b="0" i="0" sz="1400" u="none" cap="none" strike="noStrike">
+        <a:defRPr sz="1400" b="0" i="0" u="none" strike="noStrike" cap="none">
           <a:solidFill>
             <a:srgbClr val="000000"/>
           </a:solidFill>
@@ -7820,11 +7853,11 @@
 </file>
 
 <file path=ppt/slides/slide1.xml><?xml version="1.0" encoding="utf-8"?>
-<p:sld xmlns:a="http://schemas.openxmlformats.org/drawingml/2006/main" xmlns:r="http://schemas.openxmlformats.org/officeDocument/2006/relationships" xmlns:mc="http://schemas.openxmlformats.org/markup-compatibility/2006" xmlns:mv="urn:schemas-microsoft-com:mac:vml" xmlns:p="http://schemas.openxmlformats.org/presentationml/2006/main" xmlns:c="http://schemas.openxmlformats.org/drawingml/2006/chart" xmlns:dgm="http://schemas.openxmlformats.org/drawingml/2006/diagram" xmlns:o="urn:schemas-microsoft-com:office:office" xmlns:v="urn:schemas-microsoft-com:vml" xmlns:pvml="urn:schemas-microsoft-com:office:powerpoint" xmlns:com="http://schemas.openxmlformats.org/drawingml/2006/compatibility" xmlns:p14="http://schemas.microsoft.com/office/powerpoint/2010/main" xmlns:p15="http://schemas.microsoft.com/office/powerpoint/2012/main" xmlns:ahyp="http://schemas.microsoft.com/office/drawing/2018/hyperlinkcolor">
+<p:sld xmlns:a="http://schemas.openxmlformats.org/drawingml/2006/main" xmlns:r="http://schemas.openxmlformats.org/officeDocument/2006/relationships" xmlns:p="http://schemas.openxmlformats.org/presentationml/2006/main">
   <p:cSld>
     <p:spTree>
       <p:nvGrpSpPr>
-        <p:cNvPr id="80" name="Shape 80"/>
+        <p:cNvPr id="1" name="Shape 80"/>
         <p:cNvGrpSpPr/>
         <p:nvPr/>
       </p:nvGrpSpPr>
@@ -7839,16 +7872,18 @@
       <p:pic>
         <p:nvPicPr>
           <p:cNvPr id="81" name="Google Shape;81;p15"/>
-          <p:cNvPicPr preferRelativeResize="0"/>
+          <p:cNvPicPr preferRelativeResize="0">
+            <a:picLocks noGrp="1"/>
+          </p:cNvPicPr>
           <p:nvPr>
-            <p:ph idx="2" type="pic"/>
+            <p:ph type="pic" idx="2"/>
           </p:nvPr>
         </p:nvPicPr>
         <p:blipFill rotWithShape="1">
           <a:blip r:embed="rId3">
             <a:alphaModFix/>
           </a:blip>
-          <a:srcRect b="0" l="0" r="0" t="0"/>
+          <a:srcRect/>
           <a:stretch/>
         </p:blipFill>
         <p:spPr>
@@ -7860,21 +7895,23 @@
             <a:avLst/>
           </a:prstGeom>
           <a:noFill/>
-          <a:ln cap="flat" cmpd="sng" w="19050">
+          <a:ln w="19050" cap="flat" cmpd="sng">
             <a:solidFill>
               <a:schemeClr val="dk2"/>
             </a:solidFill>
             <a:prstDash val="solid"/>
             <a:round/>
-            <a:headEnd len="sm" w="sm" type="none"/>
-            <a:tailEnd len="sm" w="sm" type="none"/>
+            <a:headEnd type="none" w="sm" len="sm"/>
+            <a:tailEnd type="none" w="sm" len="sm"/>
           </a:ln>
         </p:spPr>
       </p:pic>
       <p:sp>
         <p:nvSpPr>
           <p:cNvPr id="82" name="Google Shape;82;p15"/>
-          <p:cNvSpPr txBox="1"/>
+          <p:cNvSpPr txBox="1">
+            <a:spLocks noGrp="1"/>
+          </p:cNvSpPr>
           <p:nvPr>
             <p:ph type="ctrTitle"/>
           </p:nvPr>
@@ -7893,12 +7930,12 @@
           </a:ln>
         </p:spPr>
         <p:txBody>
-          <a:bodyPr anchorCtr="0" anchor="t" bIns="91425" lIns="91425" spcFirstLastPara="1" rIns="91425" wrap="square" tIns="91425">
+          <a:bodyPr spcFirstLastPara="1" wrap="square" lIns="91425" tIns="91425" rIns="91425" bIns="91425" anchor="t" anchorCtr="0">
             <a:noAutofit/>
           </a:bodyPr>
           <a:lstStyle/>
           <a:p>
-            <a:pPr indent="0" lvl="0" marL="0" rtl="0" algn="l">
+            <a:pPr marL="0" lvl="0" indent="0" algn="l" rtl="0">
               <a:lnSpc>
                 <a:spcPct val="80000"/>
               </a:lnSpc>
@@ -7939,12 +7976,12 @@
           </a:ln>
         </p:spPr>
         <p:txBody>
-          <a:bodyPr anchorCtr="0" anchor="ctr" bIns="0" lIns="0" spcFirstLastPara="1" rIns="0" wrap="square" tIns="0">
+          <a:bodyPr spcFirstLastPara="1" wrap="square" lIns="0" tIns="0" rIns="0" bIns="0" anchor="ctr" anchorCtr="0">
             <a:noAutofit/>
           </a:bodyPr>
           <a:lstStyle/>
           <a:p>
-            <a:pPr indent="0" lvl="0" marL="0" marR="0" rtl="0" algn="l">
+            <a:pPr marL="0" marR="0" lvl="0" indent="0" algn="l" rtl="0">
               <a:lnSpc>
                 <a:spcPct val="100000"/>
               </a:lnSpc>
@@ -7962,7 +7999,7 @@
               <a:buNone/>
             </a:pPr>
             <a:r>
-              <a:rPr b="0" i="0" lang="en-US" sz="1600" u="none" cap="none" strike="noStrike">
+              <a:rPr lang="en-US" sz="1600" b="0" i="0" u="none" strike="noStrike" cap="none">
                 <a:solidFill>
                   <a:schemeClr val="dk1"/>
                 </a:solidFill>
@@ -7973,7 +8010,7 @@
               </a:rPr>
               <a:t>Bakos Rózsa Ajándék, Kálmán Előd Arto, Németh Bence Máté, Nyerges Bálint</a:t>
             </a:r>
-            <a:endParaRPr b="0" i="0" sz="1600" u="none" cap="none" strike="noStrike">
+            <a:endParaRPr sz="1600" b="0" i="0" u="none" strike="noStrike" cap="none">
               <a:solidFill>
                 <a:schemeClr val="dk1"/>
               </a:solidFill>
@@ -7994,519 +8031,11 @@
 </file>
 
 <file path=ppt/slides/slide10.xml><?xml version="1.0" encoding="utf-8"?>
-<p:sld xmlns:a="http://schemas.openxmlformats.org/drawingml/2006/main" xmlns:r="http://schemas.openxmlformats.org/officeDocument/2006/relationships" xmlns:mc="http://schemas.openxmlformats.org/markup-compatibility/2006" xmlns:mv="urn:schemas-microsoft-com:mac:vml" xmlns:p="http://schemas.openxmlformats.org/presentationml/2006/main" xmlns:c="http://schemas.openxmlformats.org/drawingml/2006/chart" xmlns:dgm="http://schemas.openxmlformats.org/drawingml/2006/diagram" xmlns:o="urn:schemas-microsoft-com:office:office" xmlns:v="urn:schemas-microsoft-com:vml" xmlns:pvml="urn:schemas-microsoft-com:office:powerpoint" xmlns:com="http://schemas.openxmlformats.org/drawingml/2006/compatibility" xmlns:p14="http://schemas.microsoft.com/office/powerpoint/2010/main" xmlns:p15="http://schemas.microsoft.com/office/powerpoint/2012/main" xmlns:ahyp="http://schemas.microsoft.com/office/drawing/2018/hyperlinkcolor">
+<p:sld xmlns:a="http://schemas.openxmlformats.org/drawingml/2006/main" xmlns:r="http://schemas.openxmlformats.org/officeDocument/2006/relationships" xmlns:p="http://schemas.openxmlformats.org/presentationml/2006/main">
   <p:cSld>
     <p:spTree>
       <p:nvGrpSpPr>
-        <p:cNvPr id="148" name="Shape 148"/>
-        <p:cNvGrpSpPr/>
-        <p:nvPr/>
-      </p:nvGrpSpPr>
-      <p:grpSpPr>
-        <a:xfrm>
-          <a:off x="0" y="0"/>
-          <a:ext cx="0" cy="0"/>
-          <a:chOff x="0" y="0"/>
-          <a:chExt cx="0" cy="0"/>
-        </a:xfrm>
-      </p:grpSpPr>
-      <p:sp>
-        <p:nvSpPr>
-          <p:cNvPr id="149" name="Google Shape;149;p24"/>
-          <p:cNvSpPr txBox="1"/>
-          <p:nvPr>
-            <p:ph type="title"/>
-          </p:nvPr>
-        </p:nvSpPr>
-        <p:spPr>
-          <a:xfrm>
-            <a:off x="192150" y="696150"/>
-            <a:ext cx="8759700" cy="698400"/>
-          </a:xfrm>
-          <a:prstGeom prst="rect">
-            <a:avLst/>
-          </a:prstGeom>
-          <a:noFill/>
-          <a:ln>
-            <a:noFill/>
-          </a:ln>
-        </p:spPr>
-        <p:txBody>
-          <a:bodyPr anchorCtr="0" anchor="t" bIns="91425" lIns="91425" spcFirstLastPara="1" rIns="91425" wrap="square" tIns="91425">
-            <a:noAutofit/>
-          </a:bodyPr>
-          <a:lstStyle/>
-          <a:p>
-            <a:pPr indent="0" lvl="0" marL="0" rtl="0" algn="ctr">
-              <a:lnSpc>
-                <a:spcPct val="100000"/>
-              </a:lnSpc>
-              <a:spcBef>
-                <a:spcPts val="0"/>
-              </a:spcBef>
-              <a:spcAft>
-                <a:spcPts val="0"/>
-              </a:spcAft>
-              <a:buSzPts val="3200"/>
-              <a:buNone/>
-            </a:pPr>
-            <a:r>
-              <a:rPr lang="en-US"/>
-              <a:t>Eredményeké és összehasonlítás</a:t>
-            </a:r>
-            <a:endParaRPr/>
-          </a:p>
-        </p:txBody>
-      </p:sp>
-      <p:graphicFrame>
-        <p:nvGraphicFramePr>
-          <p:cNvPr id="150" name="Google Shape;150;p24"/>
-          <p:cNvGraphicFramePr/>
-          <p:nvPr/>
-        </p:nvGraphicFramePr>
-        <p:xfrm>
-          <a:off x="638700" y="1493075"/>
-          <a:ext cx="3000000" cy="3000000"/>
-        </p:xfrm>
-        <a:graphic>
-          <a:graphicData uri="http://schemas.openxmlformats.org/drawingml/2006/table">
-            <a:tbl>
-              <a:tblPr>
-                <a:noFill/>
-                <a:tableStyleId>{3479EEE4-8326-451E-9463-3B67C47A2025}</a:tableStyleId>
-              </a:tblPr>
-              <a:tblGrid>
-                <a:gridCol w="3933300"/>
-                <a:gridCol w="3933300"/>
-              </a:tblGrid>
-              <a:tr h="1456625">
-                <a:tc>
-                  <a:txBody>
-                    <a:bodyPr/>
-                    <a:lstStyle/>
-                    <a:p>
-                      <a:pPr indent="0" lvl="0" marL="0" marR="0" rtl="0" algn="l">
-                        <a:lnSpc>
-                          <a:spcPct val="100000"/>
-                        </a:lnSpc>
-                        <a:spcBef>
-                          <a:spcPts val="0"/>
-                        </a:spcBef>
-                        <a:spcAft>
-                          <a:spcPts val="0"/>
-                        </a:spcAft>
-                        <a:buClr>
-                          <a:srgbClr val="000000"/>
-                        </a:buClr>
-                        <a:buSzPts val="1400"/>
-                        <a:buFont typeface="Arial"/>
-                        <a:buNone/>
-                      </a:pPr>
-                      <a:r>
-                        <a:rPr lang="en-US" sz="1400" u="none" cap="none" strike="noStrike"/>
-                        <a:t>YuNet (A leghatékonyabb):</a:t>
-                      </a:r>
-                      <a:endParaRPr sz="1400" u="none" cap="none" strike="noStrike"/>
-                    </a:p>
-                    <a:p>
-                      <a:pPr indent="0" lvl="0" marL="0" marR="0" rtl="0" algn="l">
-                        <a:lnSpc>
-                          <a:spcPct val="100000"/>
-                        </a:lnSpc>
-                        <a:spcBef>
-                          <a:spcPts val="0"/>
-                        </a:spcBef>
-                        <a:spcAft>
-                          <a:spcPts val="0"/>
-                        </a:spcAft>
-                        <a:buClr>
-                          <a:srgbClr val="000000"/>
-                        </a:buClr>
-                        <a:buSzPts val="1400"/>
-                        <a:buFont typeface="Arial"/>
-                        <a:buNone/>
-                      </a:pPr>
-                      <a:r>
-                        <a:t/>
-                      </a:r>
-                      <a:endParaRPr sz="1400" u="none" cap="none" strike="noStrike"/>
-                    </a:p>
-                    <a:p>
-                      <a:pPr indent="0" lvl="0" marL="0" marR="0" rtl="0" algn="l">
-                        <a:lnSpc>
-                          <a:spcPct val="100000"/>
-                        </a:lnSpc>
-                        <a:spcBef>
-                          <a:spcPts val="0"/>
-                        </a:spcBef>
-                        <a:spcAft>
-                          <a:spcPts val="0"/>
-                        </a:spcAft>
-                        <a:buClr>
-                          <a:srgbClr val="000000"/>
-                        </a:buClr>
-                        <a:buSzPts val="1400"/>
-                        <a:buFont typeface="Arial"/>
-                        <a:buNone/>
-                      </a:pPr>
-                      <a:r>
-                        <a:rPr lang="en-US" sz="1400" u="none" cap="none" strike="noStrike"/>
-                        <a:t>Legpontosabb: 71,34% (Arclétszám) és 88,42% (Bounding Box).</a:t>
-                      </a:r>
-                      <a:endParaRPr sz="1400" u="none" cap="none" strike="noStrike"/>
-                    </a:p>
-                    <a:p>
-                      <a:pPr indent="0" lvl="0" marL="0" marR="0" rtl="0" algn="l">
-                        <a:lnSpc>
-                          <a:spcPct val="100000"/>
-                        </a:lnSpc>
-                        <a:spcBef>
-                          <a:spcPts val="0"/>
-                        </a:spcBef>
-                        <a:spcAft>
-                          <a:spcPts val="0"/>
-                        </a:spcAft>
-                        <a:buClr>
-                          <a:srgbClr val="000000"/>
-                        </a:buClr>
-                        <a:buSzPts val="1400"/>
-                        <a:buFont typeface="Arial"/>
-                        <a:buNone/>
-                      </a:pPr>
-                      <a:r>
-                        <a:t/>
-                      </a:r>
-                      <a:endParaRPr sz="1400" u="none" cap="none" strike="noStrike"/>
-                    </a:p>
-                    <a:p>
-                      <a:pPr indent="0" lvl="0" marL="0" marR="0" rtl="0" algn="l">
-                        <a:lnSpc>
-                          <a:spcPct val="100000"/>
-                        </a:lnSpc>
-                        <a:spcBef>
-                          <a:spcPts val="0"/>
-                        </a:spcBef>
-                        <a:spcAft>
-                          <a:spcPts val="0"/>
-                        </a:spcAft>
-                        <a:buClr>
-                          <a:srgbClr val="000000"/>
-                        </a:buClr>
-                        <a:buSzPts val="1400"/>
-                        <a:buFont typeface="Arial"/>
-                        <a:buNone/>
-                      </a:pPr>
-                      <a:r>
-                        <a:rPr lang="en-US" sz="1400" u="none" cap="none" strike="noStrike"/>
-                        <a:t>Legtöbb találat: 24 461 detektált arc.</a:t>
-                      </a:r>
-                      <a:endParaRPr sz="1400" u="none" cap="none" strike="noStrike"/>
-                    </a:p>
-                  </a:txBody>
-                  <a:tcPr marT="91425" marB="91425" marR="91425" marL="91425"/>
-                </a:tc>
-                <a:tc>
-                  <a:txBody>
-                    <a:bodyPr/>
-                    <a:lstStyle/>
-                    <a:p>
-                      <a:pPr indent="0" lvl="0" marL="0" marR="0" rtl="0" algn="l">
-                        <a:lnSpc>
-                          <a:spcPct val="100000"/>
-                        </a:lnSpc>
-                        <a:spcBef>
-                          <a:spcPts val="0"/>
-                        </a:spcBef>
-                        <a:spcAft>
-                          <a:spcPts val="0"/>
-                        </a:spcAft>
-                        <a:buClr>
-                          <a:srgbClr val="000000"/>
-                        </a:buClr>
-                        <a:buSzPts val="1400"/>
-                        <a:buFont typeface="Arial"/>
-                        <a:buNone/>
-                      </a:pPr>
-                      <a:r>
-                        <a:rPr lang="en-US" sz="1400" u="none" cap="none" strike="noStrike"/>
-                        <a:t>DNN (A legmegbízhatóbb):</a:t>
-                      </a:r>
-                      <a:endParaRPr sz="1400" u="none" cap="none" strike="noStrike"/>
-                    </a:p>
-                    <a:p>
-                      <a:pPr indent="0" lvl="0" marL="0" marR="0" rtl="0" algn="l">
-                        <a:lnSpc>
-                          <a:spcPct val="100000"/>
-                        </a:lnSpc>
-                        <a:spcBef>
-                          <a:spcPts val="0"/>
-                        </a:spcBef>
-                        <a:spcAft>
-                          <a:spcPts val="0"/>
-                        </a:spcAft>
-                        <a:buClr>
-                          <a:srgbClr val="000000"/>
-                        </a:buClr>
-                        <a:buSzPts val="1400"/>
-                        <a:buFont typeface="Arial"/>
-                        <a:buNone/>
-                      </a:pPr>
-                      <a:r>
-                        <a:t/>
-                      </a:r>
-                      <a:endParaRPr sz="1400" u="none" cap="none" strike="noStrike"/>
-                    </a:p>
-                    <a:p>
-                      <a:pPr indent="0" lvl="0" marL="0" marR="0" rtl="0" algn="l">
-                        <a:lnSpc>
-                          <a:spcPct val="100000"/>
-                        </a:lnSpc>
-                        <a:spcBef>
-                          <a:spcPts val="0"/>
-                        </a:spcBef>
-                        <a:spcAft>
-                          <a:spcPts val="0"/>
-                        </a:spcAft>
-                        <a:buClr>
-                          <a:srgbClr val="000000"/>
-                        </a:buClr>
-                        <a:buSzPts val="1400"/>
-                        <a:buFont typeface="Arial"/>
-                        <a:buNone/>
-                      </a:pPr>
-                      <a:r>
-                        <a:rPr lang="en-US" sz="1400" u="none" cap="none" strike="noStrike"/>
-                        <a:t>Minimális hiba: Mindössze 26 db téves ("túl sok") detektálás, ami kiemelkedően tiszta működést jelent.</a:t>
-                      </a:r>
-                      <a:endParaRPr sz="1400" u="none" cap="none" strike="noStrike"/>
-                    </a:p>
-                  </a:txBody>
-                  <a:tcPr marT="91425" marB="91425" marR="91425" marL="91425"/>
-                </a:tc>
-              </a:tr>
-              <a:tr h="557900">
-                <a:tc>
-                  <a:txBody>
-                    <a:bodyPr/>
-                    <a:lstStyle/>
-                    <a:p>
-                      <a:pPr indent="0" lvl="0" marL="0" marR="0" rtl="0" algn="l">
-                        <a:lnSpc>
-                          <a:spcPct val="100000"/>
-                        </a:lnSpc>
-                        <a:spcBef>
-                          <a:spcPts val="0"/>
-                        </a:spcBef>
-                        <a:spcAft>
-                          <a:spcPts val="0"/>
-                        </a:spcAft>
-                        <a:buClr>
-                          <a:srgbClr val="000000"/>
-                        </a:buClr>
-                        <a:buSzPts val="1400"/>
-                        <a:buFont typeface="Arial"/>
-                        <a:buNone/>
-                      </a:pPr>
-                      <a:r>
-                        <a:rPr lang="en-US" sz="1400" u="none" cap="none" strike="noStrike"/>
-                        <a:t>Saját CNN:</a:t>
-                      </a:r>
-                      <a:endParaRPr sz="1400" u="none" cap="none" strike="noStrike"/>
-                    </a:p>
-                    <a:p>
-                      <a:pPr indent="0" lvl="0" marL="0" marR="0" rtl="0" algn="l">
-                        <a:lnSpc>
-                          <a:spcPct val="100000"/>
-                        </a:lnSpc>
-                        <a:spcBef>
-                          <a:spcPts val="0"/>
-                        </a:spcBef>
-                        <a:spcAft>
-                          <a:spcPts val="0"/>
-                        </a:spcAft>
-                        <a:buClr>
-                          <a:srgbClr val="000000"/>
-                        </a:buClr>
-                        <a:buSzPts val="1400"/>
-                        <a:buFont typeface="Arial"/>
-                        <a:buNone/>
-                      </a:pPr>
-                      <a:r>
-                        <a:t/>
-                      </a:r>
-                      <a:endParaRPr sz="1400" u="none" cap="none" strike="noStrike"/>
-                    </a:p>
-                    <a:p>
-                      <a:pPr indent="0" lvl="0" marL="0" marR="0" rtl="0" algn="l">
-                        <a:lnSpc>
-                          <a:spcPct val="100000"/>
-                        </a:lnSpc>
-                        <a:spcBef>
-                          <a:spcPts val="0"/>
-                        </a:spcBef>
-                        <a:spcAft>
-                          <a:spcPts val="0"/>
-                        </a:spcAft>
-                        <a:buClr>
-                          <a:srgbClr val="000000"/>
-                        </a:buClr>
-                        <a:buSzPts val="1400"/>
-                        <a:buFont typeface="Arial"/>
-                        <a:buNone/>
-                      </a:pPr>
-                      <a:r>
-                        <a:rPr lang="en-US" sz="1400" u="none" cap="none" strike="noStrike"/>
-                        <a:t>Magas érzékenység (23 242 találat), de alacsony pontosság (11,59% BBox).</a:t>
-                      </a:r>
-                      <a:endParaRPr sz="1400" u="none" cap="none" strike="noStrike"/>
-                    </a:p>
-                    <a:p>
-                      <a:pPr indent="0" lvl="0" marL="0" marR="0" rtl="0" algn="l">
-                        <a:lnSpc>
-                          <a:spcPct val="100000"/>
-                        </a:lnSpc>
-                        <a:spcBef>
-                          <a:spcPts val="0"/>
-                        </a:spcBef>
-                        <a:spcAft>
-                          <a:spcPts val="0"/>
-                        </a:spcAft>
-                        <a:buClr>
-                          <a:srgbClr val="000000"/>
-                        </a:buClr>
-                        <a:buSzPts val="1400"/>
-                        <a:buFont typeface="Arial"/>
-                        <a:buNone/>
-                      </a:pPr>
-                      <a:r>
-                        <a:t/>
-                      </a:r>
-                      <a:endParaRPr sz="1400" u="none" cap="none" strike="noStrike"/>
-                    </a:p>
-                    <a:p>
-                      <a:pPr indent="0" lvl="0" marL="0" marR="0" rtl="0" algn="l">
-                        <a:lnSpc>
-                          <a:spcPct val="100000"/>
-                        </a:lnSpc>
-                        <a:spcBef>
-                          <a:spcPts val="0"/>
-                        </a:spcBef>
-                        <a:spcAft>
-                          <a:spcPts val="0"/>
-                        </a:spcAft>
-                        <a:buClr>
-                          <a:srgbClr val="000000"/>
-                        </a:buClr>
-                        <a:buSzPts val="1400"/>
-                        <a:buFont typeface="Arial"/>
-                        <a:buNone/>
-                      </a:pPr>
-                      <a:r>
-                        <a:rPr lang="en-US" sz="1400" u="none" cap="none" strike="noStrike"/>
-                        <a:t>Sok a téves riasztás (2359 db "túl sok" hiba), így a modell még finomhangolásra szorul.</a:t>
-                      </a:r>
-                      <a:endParaRPr sz="1400" u="none" cap="none" strike="noStrike"/>
-                    </a:p>
-                  </a:txBody>
-                  <a:tcPr marT="91425" marB="91425" marR="91425" marL="91425"/>
-                </a:tc>
-                <a:tc>
-                  <a:txBody>
-                    <a:bodyPr/>
-                    <a:lstStyle/>
-                    <a:p>
-                      <a:pPr indent="0" lvl="0" marL="0" marR="0" rtl="0" algn="l">
-                        <a:lnSpc>
-                          <a:spcPct val="100000"/>
-                        </a:lnSpc>
-                        <a:spcBef>
-                          <a:spcPts val="0"/>
-                        </a:spcBef>
-                        <a:spcAft>
-                          <a:spcPts val="0"/>
-                        </a:spcAft>
-                        <a:buClr>
-                          <a:srgbClr val="000000"/>
-                        </a:buClr>
-                        <a:buSzPts val="1400"/>
-                        <a:buFont typeface="Arial"/>
-                        <a:buNone/>
-                      </a:pPr>
-                      <a:r>
-                        <a:rPr lang="en-US" sz="1400" u="none" cap="none" strike="noStrike"/>
-                        <a:t>Haar Cascade:</a:t>
-                      </a:r>
-                      <a:endParaRPr sz="1400" u="none" cap="none" strike="noStrike"/>
-                    </a:p>
-                    <a:p>
-                      <a:pPr indent="0" lvl="0" marL="0" marR="0" rtl="0" algn="l">
-                        <a:lnSpc>
-                          <a:spcPct val="100000"/>
-                        </a:lnSpc>
-                        <a:spcBef>
-                          <a:spcPts val="0"/>
-                        </a:spcBef>
-                        <a:spcAft>
-                          <a:spcPts val="0"/>
-                        </a:spcAft>
-                        <a:buClr>
-                          <a:srgbClr val="000000"/>
-                        </a:buClr>
-                        <a:buSzPts val="1400"/>
-                        <a:buFont typeface="Arial"/>
-                        <a:buNone/>
-                      </a:pPr>
-                      <a:r>
-                        <a:t/>
-                      </a:r>
-                      <a:endParaRPr sz="1400" u="none" cap="none" strike="noStrike"/>
-                    </a:p>
-                    <a:p>
-                      <a:pPr indent="0" lvl="0" marL="0" marR="0" rtl="0" algn="l">
-                        <a:lnSpc>
-                          <a:spcPct val="100000"/>
-                        </a:lnSpc>
-                        <a:spcBef>
-                          <a:spcPts val="0"/>
-                        </a:spcBef>
-                        <a:spcAft>
-                          <a:spcPts val="0"/>
-                        </a:spcAft>
-                        <a:buClr>
-                          <a:srgbClr val="000000"/>
-                        </a:buClr>
-                        <a:buSzPts val="1400"/>
-                        <a:buFont typeface="Arial"/>
-                        <a:buNone/>
-                      </a:pPr>
-                      <a:r>
-                        <a:rPr lang="en-US" sz="1400" u="none" cap="none" strike="noStrike"/>
-                        <a:t>Elavult technológia, alacsony hatékonysággal (19,07% pontosság).</a:t>
-                      </a:r>
-                      <a:endParaRPr sz="1400" u="none" cap="none" strike="noStrike"/>
-                    </a:p>
-                  </a:txBody>
-                  <a:tcPr marT="91425" marB="91425" marR="91425" marL="91425"/>
-                </a:tc>
-              </a:tr>
-            </a:tbl>
-          </a:graphicData>
-        </a:graphic>
-      </p:graphicFrame>
-    </p:spTree>
-  </p:cSld>
-  <p:clrMapOvr>
-    <a:masterClrMapping/>
-  </p:clrMapOvr>
-</p:sld>
-</file>
-
-<file path=ppt/slides/slide11.xml><?xml version="1.0" encoding="utf-8"?>
-<p:sld xmlns:a="http://schemas.openxmlformats.org/drawingml/2006/main" xmlns:r="http://schemas.openxmlformats.org/officeDocument/2006/relationships" xmlns:mc="http://schemas.openxmlformats.org/markup-compatibility/2006" xmlns:mv="urn:schemas-microsoft-com:mac:vml" xmlns:p="http://schemas.openxmlformats.org/presentationml/2006/main" xmlns:c="http://schemas.openxmlformats.org/drawingml/2006/chart" xmlns:dgm="http://schemas.openxmlformats.org/drawingml/2006/diagram" xmlns:o="urn:schemas-microsoft-com:office:office" xmlns:v="urn:schemas-microsoft-com:vml" xmlns:pvml="urn:schemas-microsoft-com:office:powerpoint" xmlns:com="http://schemas.openxmlformats.org/drawingml/2006/compatibility" xmlns:p14="http://schemas.microsoft.com/office/powerpoint/2010/main" xmlns:p15="http://schemas.microsoft.com/office/powerpoint/2012/main" xmlns:ahyp="http://schemas.microsoft.com/office/drawing/2018/hyperlinkcolor">
-  <p:cSld>
-    <p:spTree>
-      <p:nvGrpSpPr>
-        <p:cNvPr id="154" name="Shape 154"/>
+        <p:cNvPr id="1" name="Shape 154"/>
         <p:cNvGrpSpPr/>
         <p:nvPr/>
       </p:nvGrpSpPr>
@@ -8521,7 +8050,9 @@
       <p:sp>
         <p:nvSpPr>
           <p:cNvPr id="155" name="Google Shape;155;p25"/>
-          <p:cNvSpPr txBox="1"/>
+          <p:cNvSpPr txBox="1">
+            <a:spLocks noGrp="1"/>
+          </p:cNvSpPr>
           <p:nvPr>
             <p:ph type="title"/>
           </p:nvPr>
@@ -8540,12 +8071,12 @@
           </a:ln>
         </p:spPr>
         <p:txBody>
-          <a:bodyPr anchorCtr="0" anchor="ctr" bIns="91425" lIns="91425" spcFirstLastPara="1" rIns="91425" wrap="square" tIns="91425">
+          <a:bodyPr spcFirstLastPara="1" wrap="square" lIns="91425" tIns="91425" rIns="91425" bIns="91425" anchor="ctr" anchorCtr="0">
             <a:noAutofit/>
           </a:bodyPr>
           <a:lstStyle/>
           <a:p>
-            <a:pPr indent="0" lvl="0" marL="0" rtl="0" algn="l">
+            <a:pPr marL="0" lvl="0" indent="0" algn="l" rtl="0">
               <a:lnSpc>
                 <a:spcPct val="100000"/>
               </a:lnSpc>
@@ -8569,9 +8100,11 @@
       <p:sp>
         <p:nvSpPr>
           <p:cNvPr id="156" name="Google Shape;156;p25"/>
-          <p:cNvSpPr txBox="1"/>
+          <p:cNvSpPr txBox="1">
+            <a:spLocks noGrp="1"/>
+          </p:cNvSpPr>
           <p:nvPr>
-            <p:ph idx="1" type="subTitle"/>
+            <p:ph type="subTitle" idx="1"/>
           </p:nvPr>
         </p:nvSpPr>
         <p:spPr>
@@ -8588,12 +8121,12 @@
           </a:ln>
         </p:spPr>
         <p:txBody>
-          <a:bodyPr anchorCtr="0" anchor="t" bIns="91425" lIns="91425" spcFirstLastPara="1" rIns="91425" wrap="square" tIns="91425">
+          <a:bodyPr spcFirstLastPara="1" wrap="square" lIns="91425" tIns="91425" rIns="91425" bIns="91425" anchor="t" anchorCtr="0">
             <a:noAutofit/>
           </a:bodyPr>
           <a:lstStyle/>
           <a:p>
-            <a:pPr indent="0" lvl="0" marL="0" rtl="0" algn="l">
+            <a:pPr marL="0" lvl="0" indent="0" algn="l" rtl="0">
               <a:lnSpc>
                 <a:spcPct val="100000"/>
               </a:lnSpc>
@@ -8634,12 +8167,12 @@
           </a:ln>
         </p:spPr>
         <p:txBody>
-          <a:bodyPr anchorCtr="0" anchor="ctr" bIns="91425" lIns="91425" spcFirstLastPara="1" rIns="91425" wrap="square" tIns="91425">
+          <a:bodyPr spcFirstLastPara="1" wrap="square" lIns="91425" tIns="91425" rIns="91425" bIns="91425" anchor="ctr" anchorCtr="0">
             <a:noAutofit/>
           </a:bodyPr>
           <a:lstStyle/>
           <a:p>
-            <a:pPr indent="0" lvl="0" marL="0" marR="0" rtl="0" algn="l">
+            <a:pPr marL="0" marR="0" lvl="0" indent="0" algn="l" rtl="0">
               <a:lnSpc>
                 <a:spcPct val="100000"/>
               </a:lnSpc>
@@ -8657,7 +8190,7 @@
               <a:buNone/>
             </a:pPr>
             <a:r>
-              <a:rPr b="0" i="0" lang="en-US" sz="1600" u="none" cap="none" strike="noStrike">
+              <a:rPr lang="en-US" sz="1600" b="0" i="0" u="none" strike="noStrike" cap="none">
                 <a:solidFill>
                   <a:schemeClr val="dk1"/>
                 </a:solidFill>
@@ -8668,7 +8201,7 @@
               </a:rPr>
               <a:t>Bakos Rózsa Ajándék, Kálmán Előd Arto, Németh Bence Máté, Nyerges Bálint</a:t>
             </a:r>
-            <a:endParaRPr b="0" i="0" sz="1600" u="none" cap="none" strike="noStrike">
+            <a:endParaRPr sz="1600" b="0" i="0" u="none" strike="noStrike" cap="none">
               <a:solidFill>
                 <a:schemeClr val="dk1"/>
               </a:solidFill>
@@ -8689,11 +8222,11 @@
 </file>
 
 <file path=ppt/slides/slide2.xml><?xml version="1.0" encoding="utf-8"?>
-<p:sld xmlns:a="http://schemas.openxmlformats.org/drawingml/2006/main" xmlns:r="http://schemas.openxmlformats.org/officeDocument/2006/relationships" xmlns:mc="http://schemas.openxmlformats.org/markup-compatibility/2006" xmlns:mv="urn:schemas-microsoft-com:mac:vml" xmlns:p="http://schemas.openxmlformats.org/presentationml/2006/main" xmlns:c="http://schemas.openxmlformats.org/drawingml/2006/chart" xmlns:dgm="http://schemas.openxmlformats.org/drawingml/2006/diagram" xmlns:o="urn:schemas-microsoft-com:office:office" xmlns:v="urn:schemas-microsoft-com:vml" xmlns:pvml="urn:schemas-microsoft-com:office:powerpoint" xmlns:com="http://schemas.openxmlformats.org/drawingml/2006/compatibility" xmlns:p14="http://schemas.microsoft.com/office/powerpoint/2010/main" xmlns:p15="http://schemas.microsoft.com/office/powerpoint/2012/main" xmlns:ahyp="http://schemas.microsoft.com/office/drawing/2018/hyperlinkcolor">
+<p:sld xmlns:a="http://schemas.openxmlformats.org/drawingml/2006/main" xmlns:r="http://schemas.openxmlformats.org/officeDocument/2006/relationships" xmlns:p="http://schemas.openxmlformats.org/presentationml/2006/main">
   <p:cSld>
     <p:spTree>
       <p:nvGrpSpPr>
-        <p:cNvPr id="87" name="Shape 87"/>
+        <p:cNvPr id="1" name="Shape 87"/>
         <p:cNvGrpSpPr/>
         <p:nvPr/>
       </p:nvGrpSpPr>
@@ -8708,7 +8241,9 @@
       <p:sp>
         <p:nvSpPr>
           <p:cNvPr id="88" name="Google Shape;88;p16"/>
-          <p:cNvSpPr txBox="1"/>
+          <p:cNvSpPr txBox="1">
+            <a:spLocks noGrp="1"/>
+          </p:cNvSpPr>
           <p:nvPr>
             <p:ph type="title"/>
           </p:nvPr>
@@ -8727,12 +8262,12 @@
           </a:ln>
         </p:spPr>
         <p:txBody>
-          <a:bodyPr anchorCtr="0" anchor="t" bIns="91425" lIns="91425" spcFirstLastPara="1" rIns="91425" wrap="square" tIns="91425">
+          <a:bodyPr spcFirstLastPara="1" wrap="square" lIns="91425" tIns="91425" rIns="91425" bIns="91425" anchor="t" anchorCtr="0">
             <a:noAutofit/>
           </a:bodyPr>
           <a:lstStyle/>
           <a:p>
-            <a:pPr indent="0" lvl="0" marL="0" rtl="0" algn="l">
+            <a:pPr marL="0" lvl="0" indent="0" algn="l" rtl="0">
               <a:lnSpc>
                 <a:spcPct val="100000"/>
               </a:lnSpc>
@@ -8756,9 +8291,11 @@
       <p:sp>
         <p:nvSpPr>
           <p:cNvPr id="89" name="Google Shape;89;p16"/>
-          <p:cNvSpPr txBox="1"/>
+          <p:cNvSpPr txBox="1">
+            <a:spLocks noGrp="1"/>
+          </p:cNvSpPr>
           <p:nvPr>
-            <p:ph idx="1" type="subTitle"/>
+            <p:ph type="subTitle" idx="1"/>
           </p:nvPr>
         </p:nvSpPr>
         <p:spPr>
@@ -8775,12 +8312,12 @@
           </a:ln>
         </p:spPr>
         <p:txBody>
-          <a:bodyPr anchorCtr="0" anchor="t" bIns="91425" lIns="91425" spcFirstLastPara="1" rIns="91425" wrap="square" tIns="91425">
+          <a:bodyPr spcFirstLastPara="1" wrap="square" lIns="91425" tIns="91425" rIns="91425" bIns="91425" anchor="t" anchorCtr="0">
             <a:noAutofit/>
           </a:bodyPr>
           <a:lstStyle/>
           <a:p>
-            <a:pPr indent="-285750" lvl="0" marL="285750" rtl="0" algn="l">
+            <a:pPr marL="285750" lvl="0" indent="-285750" algn="l" rtl="0">
               <a:lnSpc>
                 <a:spcPct val="100000"/>
               </a:lnSpc>
@@ -8801,7 +8338,7 @@
             <a:endParaRPr/>
           </a:p>
           <a:p>
-            <a:pPr indent="-285750" lvl="1" marL="742950" rtl="0" algn="l">
+            <a:pPr marL="742950" lvl="1" indent="-285750" algn="l" rtl="0">
               <a:lnSpc>
                 <a:spcPct val="100000"/>
               </a:lnSpc>
@@ -8822,7 +8359,7 @@
             <a:endParaRPr sz="1600"/>
           </a:p>
           <a:p>
-            <a:pPr indent="-285750" lvl="1" marL="742950" rtl="0" algn="l">
+            <a:pPr marL="742950" lvl="1" indent="-285750" algn="l" rtl="0">
               <a:lnSpc>
                 <a:spcPct val="100000"/>
               </a:lnSpc>
@@ -8843,7 +8380,7 @@
             <a:endParaRPr/>
           </a:p>
           <a:p>
-            <a:pPr indent="-285750" lvl="0" marL="285750" rtl="0" algn="l">
+            <a:pPr marL="285750" lvl="0" indent="-285750" algn="l" rtl="0">
               <a:lnSpc>
                 <a:spcPct val="100000"/>
               </a:lnSpc>
@@ -8874,132 +8411,11 @@
 </file>
 
 <file path=ppt/slides/slide3.xml><?xml version="1.0" encoding="utf-8"?>
-<p:sld xmlns:a="http://schemas.openxmlformats.org/drawingml/2006/main" xmlns:r="http://schemas.openxmlformats.org/officeDocument/2006/relationships" xmlns:mc="http://schemas.openxmlformats.org/markup-compatibility/2006" xmlns:mv="urn:schemas-microsoft-com:mac:vml" xmlns:p="http://schemas.openxmlformats.org/presentationml/2006/main" xmlns:c="http://schemas.openxmlformats.org/drawingml/2006/chart" xmlns:dgm="http://schemas.openxmlformats.org/drawingml/2006/diagram" xmlns:o="urn:schemas-microsoft-com:office:office" xmlns:v="urn:schemas-microsoft-com:vml" xmlns:pvml="urn:schemas-microsoft-com:office:powerpoint" xmlns:com="http://schemas.openxmlformats.org/drawingml/2006/compatibility" xmlns:p14="http://schemas.microsoft.com/office/powerpoint/2010/main" xmlns:p15="http://schemas.microsoft.com/office/powerpoint/2012/main" xmlns:ahyp="http://schemas.microsoft.com/office/drawing/2018/hyperlinkcolor">
+<p:sld xmlns:a="http://schemas.openxmlformats.org/drawingml/2006/main" xmlns:r="http://schemas.openxmlformats.org/officeDocument/2006/relationships" xmlns:p="http://schemas.openxmlformats.org/presentationml/2006/main">
   <p:cSld>
     <p:spTree>
       <p:nvGrpSpPr>
-        <p:cNvPr id="93" name="Shape 93"/>
-        <p:cNvGrpSpPr/>
-        <p:nvPr/>
-      </p:nvGrpSpPr>
-      <p:grpSpPr>
-        <a:xfrm>
-          <a:off x="0" y="0"/>
-          <a:ext cx="0" cy="0"/>
-          <a:chOff x="0" y="0"/>
-          <a:chExt cx="0" cy="0"/>
-        </a:xfrm>
-      </p:grpSpPr>
-      <p:sp>
-        <p:nvSpPr>
-          <p:cNvPr id="94" name="Google Shape;94;p17"/>
-          <p:cNvSpPr txBox="1"/>
-          <p:nvPr>
-            <p:ph type="title"/>
-          </p:nvPr>
-        </p:nvSpPr>
-        <p:spPr>
-          <a:xfrm>
-            <a:off x="679225" y="794675"/>
-            <a:ext cx="7866600" cy="698400"/>
-          </a:xfrm>
-          <a:prstGeom prst="rect">
-            <a:avLst/>
-          </a:prstGeom>
-          <a:noFill/>
-          <a:ln>
-            <a:noFill/>
-          </a:ln>
-        </p:spPr>
-        <p:txBody>
-          <a:bodyPr anchorCtr="0" anchor="t" bIns="91425" lIns="91425" spcFirstLastPara="1" rIns="91425" wrap="square" tIns="91425">
-            <a:noAutofit/>
-          </a:bodyPr>
-          <a:lstStyle/>
-          <a:p>
-            <a:pPr indent="0" lvl="0" marL="0" rtl="0" algn="l">
-              <a:lnSpc>
-                <a:spcPct val="100000"/>
-              </a:lnSpc>
-              <a:spcBef>
-                <a:spcPts val="0"/>
-              </a:spcBef>
-              <a:spcAft>
-                <a:spcPts val="0"/>
-              </a:spcAft>
-              <a:buSzPts val="3200"/>
-              <a:buNone/>
-            </a:pPr>
-            <a:r>
-              <a:rPr lang="en-US"/>
-              <a:t>Feladat és eszközök</a:t>
-            </a:r>
-            <a:endParaRPr/>
-          </a:p>
-        </p:txBody>
-      </p:sp>
-      <p:sp>
-        <p:nvSpPr>
-          <p:cNvPr id="95" name="Google Shape;95;p17"/>
-          <p:cNvSpPr txBox="1"/>
-          <p:nvPr>
-            <p:ph idx="1" type="subTitle"/>
-          </p:nvPr>
-        </p:nvSpPr>
-        <p:spPr>
-          <a:xfrm>
-            <a:off x="1522850" y="1816950"/>
-            <a:ext cx="6918600" cy="2538900"/>
-          </a:xfrm>
-          <a:prstGeom prst="rect">
-            <a:avLst/>
-          </a:prstGeom>
-          <a:noFill/>
-          <a:ln>
-            <a:noFill/>
-          </a:ln>
-        </p:spPr>
-        <p:txBody>
-          <a:bodyPr anchorCtr="0" anchor="t" bIns="91425" lIns="91425" spcFirstLastPara="1" rIns="91425" wrap="square" tIns="91425">
-            <a:noAutofit/>
-          </a:bodyPr>
-          <a:lstStyle/>
-          <a:p>
-            <a:pPr indent="-228600" lvl="0" marL="457200" rtl="0" algn="l">
-              <a:lnSpc>
-                <a:spcPct val="100000"/>
-              </a:lnSpc>
-              <a:spcBef>
-                <a:spcPts val="0"/>
-              </a:spcBef>
-              <a:spcAft>
-                <a:spcPts val="0"/>
-              </a:spcAft>
-              <a:buSzPts val="1400"/>
-              <a:buFont typeface="Arial"/>
-              <a:buNone/>
-            </a:pPr>
-            <a:r>
-              <a:t/>
-            </a:r>
-            <a:endParaRPr/>
-          </a:p>
-        </p:txBody>
-      </p:sp>
-    </p:spTree>
-  </p:cSld>
-  <p:clrMapOvr>
-    <a:masterClrMapping/>
-  </p:clrMapOvr>
-</p:sld>
-</file>
-
-<file path=ppt/slides/slide4.xml><?xml version="1.0" encoding="utf-8"?>
-<p:sld xmlns:a="http://schemas.openxmlformats.org/drawingml/2006/main" xmlns:r="http://schemas.openxmlformats.org/officeDocument/2006/relationships" xmlns:mc="http://schemas.openxmlformats.org/markup-compatibility/2006" xmlns:mv="urn:schemas-microsoft-com:mac:vml" xmlns:p="http://schemas.openxmlformats.org/presentationml/2006/main" xmlns:c="http://schemas.openxmlformats.org/drawingml/2006/chart" xmlns:dgm="http://schemas.openxmlformats.org/drawingml/2006/diagram" xmlns:o="urn:schemas-microsoft-com:office:office" xmlns:v="urn:schemas-microsoft-com:vml" xmlns:pvml="urn:schemas-microsoft-com:office:powerpoint" xmlns:com="http://schemas.openxmlformats.org/drawingml/2006/compatibility" xmlns:p14="http://schemas.microsoft.com/office/powerpoint/2010/main" xmlns:p15="http://schemas.microsoft.com/office/powerpoint/2012/main" xmlns:ahyp="http://schemas.microsoft.com/office/drawing/2018/hyperlinkcolor">
-  <p:cSld>
-    <p:spTree>
-      <p:nvGrpSpPr>
-        <p:cNvPr id="99" name="Shape 99"/>
+        <p:cNvPr id="1" name="Shape 99"/>
         <p:cNvGrpSpPr/>
         <p:nvPr/>
       </p:nvGrpSpPr>
@@ -9014,16 +8430,18 @@
       <p:pic>
         <p:nvPicPr>
           <p:cNvPr id="100" name="Google Shape;100;p18"/>
-          <p:cNvPicPr preferRelativeResize="0"/>
+          <p:cNvPicPr preferRelativeResize="0">
+            <a:picLocks noGrp="1"/>
+          </p:cNvPicPr>
           <p:nvPr>
-            <p:ph idx="2" type="pic"/>
+            <p:ph type="pic" idx="2"/>
           </p:nvPr>
         </p:nvPicPr>
         <p:blipFill rotWithShape="1">
           <a:blip r:embed="rId3">
             <a:alphaModFix/>
           </a:blip>
-          <a:srcRect b="0" l="0" r="0" t="0"/>
+          <a:srcRect/>
           <a:stretch/>
         </p:blipFill>
         <p:spPr>
@@ -9035,21 +8453,23 @@
             <a:avLst/>
           </a:prstGeom>
           <a:noFill/>
-          <a:ln cap="flat" cmpd="sng" w="9525">
+          <a:ln w="9525" cap="flat" cmpd="sng">
             <a:solidFill>
               <a:schemeClr val="dk2"/>
             </a:solidFill>
             <a:prstDash val="solid"/>
             <a:round/>
-            <a:headEnd len="sm" w="sm" type="none"/>
-            <a:tailEnd len="sm" w="sm" type="none"/>
+            <a:headEnd type="none" w="sm" len="sm"/>
+            <a:tailEnd type="none" w="sm" len="sm"/>
           </a:ln>
         </p:spPr>
       </p:pic>
       <p:sp>
         <p:nvSpPr>
           <p:cNvPr id="101" name="Google Shape;101;p18"/>
-          <p:cNvSpPr txBox="1"/>
+          <p:cNvSpPr txBox="1">
+            <a:spLocks noGrp="1"/>
+          </p:cNvSpPr>
           <p:nvPr>
             <p:ph type="title"/>
           </p:nvPr>
@@ -9068,12 +8488,12 @@
           </a:ln>
         </p:spPr>
         <p:txBody>
-          <a:bodyPr anchorCtr="0" anchor="t" bIns="91425" lIns="91425" spcFirstLastPara="1" rIns="91425" wrap="square" tIns="91425">
+          <a:bodyPr spcFirstLastPara="1" wrap="square" lIns="91425" tIns="91425" rIns="91425" bIns="91425" anchor="t" anchorCtr="0">
             <a:noAutofit/>
           </a:bodyPr>
           <a:lstStyle/>
           <a:p>
-            <a:pPr indent="0" lvl="0" marL="0" rtl="0" algn="l">
+            <a:pPr marL="0" lvl="0" indent="0" algn="l" rtl="0">
               <a:lnSpc>
                 <a:spcPct val="80000"/>
               </a:lnSpc>
@@ -9097,9 +8517,11 @@
       <p:sp>
         <p:nvSpPr>
           <p:cNvPr id="102" name="Google Shape;102;p18"/>
-          <p:cNvSpPr txBox="1"/>
+          <p:cNvSpPr txBox="1">
+            <a:spLocks noGrp="1"/>
+          </p:cNvSpPr>
           <p:nvPr>
-            <p:ph idx="1" type="body"/>
+            <p:ph type="body" idx="1"/>
           </p:nvPr>
         </p:nvSpPr>
         <p:spPr>
@@ -9116,12 +8538,12 @@
           </a:ln>
         </p:spPr>
         <p:txBody>
-          <a:bodyPr anchorCtr="0" anchor="t" bIns="91425" lIns="91425" spcFirstLastPara="1" rIns="91425" wrap="square" tIns="91425">
+          <a:bodyPr spcFirstLastPara="1" wrap="square" lIns="91425" tIns="91425" rIns="91425" bIns="91425" anchor="t" anchorCtr="0">
             <a:noAutofit/>
           </a:bodyPr>
           <a:lstStyle/>
           <a:p>
-            <a:pPr indent="-285750" lvl="0" marL="285750" rtl="0" algn="l">
+            <a:pPr marL="285750" lvl="0" indent="-285750" algn="l" rtl="0">
               <a:lnSpc>
                 <a:spcPct val="100000"/>
               </a:lnSpc>
@@ -9142,7 +8564,7 @@
             <a:endParaRPr/>
           </a:p>
           <a:p>
-            <a:pPr indent="-285750" lvl="0" marL="285750" rtl="0" algn="l">
+            <a:pPr marL="285750" lvl="0" indent="-285750" algn="l" rtl="0">
               <a:lnSpc>
                 <a:spcPct val="100000"/>
               </a:lnSpc>
@@ -9163,7 +8585,7 @@
             <a:endParaRPr/>
           </a:p>
           <a:p>
-            <a:pPr indent="-285750" lvl="0" marL="285750" rtl="0" algn="l">
+            <a:pPr marL="285750" lvl="0" indent="-285750" algn="l" rtl="0">
               <a:lnSpc>
                 <a:spcPct val="100000"/>
               </a:lnSpc>
@@ -9184,7 +8606,7 @@
             <a:endParaRPr/>
           </a:p>
           <a:p>
-            <a:pPr indent="-285750" lvl="0" marL="285750" rtl="0" algn="l">
+            <a:pPr marL="285750" lvl="0" indent="-285750" algn="l" rtl="0">
               <a:lnSpc>
                 <a:spcPct val="100000"/>
               </a:lnSpc>
@@ -9230,7 +8652,7 @@
             <a:blip r:embed="rId4">
               <a:alphaModFix/>
             </a:blip>
-            <a:srcRect b="0" l="60127" r="0" t="0"/>
+            <a:srcRect l="60127"/>
             <a:stretch/>
           </p:blipFill>
           <p:spPr>
@@ -9257,7 +8679,7 @@
             <a:blip r:embed="rId4">
               <a:alphaModFix/>
             </a:blip>
-            <a:srcRect b="0" l="60127" r="0" t="0"/>
+            <a:srcRect l="60127"/>
             <a:stretch/>
           </p:blipFill>
           <p:spPr>
@@ -9283,12 +8705,12 @@
 </p:sld>
 </file>
 
-<file path=ppt/slides/slide5.xml><?xml version="1.0" encoding="utf-8"?>
-<p:sld xmlns:a="http://schemas.openxmlformats.org/drawingml/2006/main" xmlns:r="http://schemas.openxmlformats.org/officeDocument/2006/relationships" xmlns:mc="http://schemas.openxmlformats.org/markup-compatibility/2006" xmlns:mv="urn:schemas-microsoft-com:mac:vml" xmlns:p="http://schemas.openxmlformats.org/presentationml/2006/main" xmlns:c="http://schemas.openxmlformats.org/drawingml/2006/chart" xmlns:dgm="http://schemas.openxmlformats.org/drawingml/2006/diagram" xmlns:o="urn:schemas-microsoft-com:office:office" xmlns:v="urn:schemas-microsoft-com:vml" xmlns:pvml="urn:schemas-microsoft-com:office:powerpoint" xmlns:com="http://schemas.openxmlformats.org/drawingml/2006/compatibility" xmlns:p14="http://schemas.microsoft.com/office/powerpoint/2010/main" xmlns:p15="http://schemas.microsoft.com/office/powerpoint/2012/main" xmlns:ahyp="http://schemas.microsoft.com/office/drawing/2018/hyperlinkcolor">
+<file path=ppt/slides/slide4.xml><?xml version="1.0" encoding="utf-8"?>
+<p:sld xmlns:a="http://schemas.openxmlformats.org/drawingml/2006/main" xmlns:r="http://schemas.openxmlformats.org/officeDocument/2006/relationships" xmlns:p="http://schemas.openxmlformats.org/presentationml/2006/main">
   <p:cSld>
     <p:spTree>
       <p:nvGrpSpPr>
-        <p:cNvPr id="109" name="Shape 109"/>
+        <p:cNvPr id="1" name="Shape 109"/>
         <p:cNvGrpSpPr/>
         <p:nvPr/>
       </p:nvGrpSpPr>
@@ -9303,16 +8725,18 @@
       <p:pic>
         <p:nvPicPr>
           <p:cNvPr id="110" name="Google Shape;110;p19"/>
-          <p:cNvPicPr preferRelativeResize="0"/>
+          <p:cNvPicPr preferRelativeResize="0">
+            <a:picLocks noGrp="1"/>
+          </p:cNvPicPr>
           <p:nvPr>
-            <p:ph idx="2" type="pic"/>
+            <p:ph type="pic" idx="2"/>
           </p:nvPr>
         </p:nvPicPr>
         <p:blipFill rotWithShape="1">
           <a:blip r:embed="rId3">
             <a:alphaModFix/>
           </a:blip>
-          <a:srcRect b="0" l="0" r="0" t="0"/>
+          <a:srcRect/>
           <a:stretch/>
         </p:blipFill>
         <p:spPr>
@@ -9324,21 +8748,23 @@
             <a:avLst/>
           </a:prstGeom>
           <a:noFill/>
-          <a:ln cap="flat" cmpd="sng" w="9525">
+          <a:ln w="9525" cap="flat" cmpd="sng">
             <a:solidFill>
               <a:schemeClr val="dk2"/>
             </a:solidFill>
             <a:prstDash val="solid"/>
             <a:round/>
-            <a:headEnd len="sm" w="sm" type="none"/>
-            <a:tailEnd len="sm" w="sm" type="none"/>
+            <a:headEnd type="none" w="sm" len="sm"/>
+            <a:tailEnd type="none" w="sm" len="sm"/>
           </a:ln>
         </p:spPr>
       </p:pic>
       <p:sp>
         <p:nvSpPr>
           <p:cNvPr id="111" name="Google Shape;111;p19"/>
-          <p:cNvSpPr txBox="1"/>
+          <p:cNvSpPr txBox="1">
+            <a:spLocks noGrp="1"/>
+          </p:cNvSpPr>
           <p:nvPr>
             <p:ph type="title"/>
           </p:nvPr>
@@ -9357,12 +8783,12 @@
           </a:ln>
         </p:spPr>
         <p:txBody>
-          <a:bodyPr anchorCtr="0" anchor="t" bIns="91425" lIns="91425" spcFirstLastPara="1" rIns="91425" wrap="square" tIns="91425">
+          <a:bodyPr spcFirstLastPara="1" wrap="square" lIns="91425" tIns="91425" rIns="91425" bIns="91425" anchor="t" anchorCtr="0">
             <a:noAutofit/>
           </a:bodyPr>
           <a:lstStyle/>
           <a:p>
-            <a:pPr indent="0" lvl="0" marL="0" rtl="0" algn="l">
+            <a:pPr marL="0" lvl="0" indent="0" algn="l" rtl="0">
               <a:lnSpc>
                 <a:spcPct val="80000"/>
               </a:lnSpc>
@@ -9386,9 +8812,11 @@
       <p:sp>
         <p:nvSpPr>
           <p:cNvPr id="112" name="Google Shape;112;p19"/>
-          <p:cNvSpPr txBox="1"/>
+          <p:cNvSpPr txBox="1">
+            <a:spLocks noGrp="1"/>
+          </p:cNvSpPr>
           <p:nvPr>
-            <p:ph idx="1" type="body"/>
+            <p:ph type="body" idx="1"/>
           </p:nvPr>
         </p:nvSpPr>
         <p:spPr>
@@ -9405,12 +8833,12 @@
           </a:ln>
         </p:spPr>
         <p:txBody>
-          <a:bodyPr anchorCtr="0" anchor="t" bIns="91425" lIns="91425" spcFirstLastPara="1" rIns="91425" wrap="square" tIns="91425">
+          <a:bodyPr spcFirstLastPara="1" wrap="square" lIns="91425" tIns="91425" rIns="91425" bIns="91425" anchor="t" anchorCtr="0">
             <a:noAutofit/>
           </a:bodyPr>
           <a:lstStyle/>
           <a:p>
-            <a:pPr indent="-317500" lvl="0" marL="457200" rtl="0" algn="l">
+            <a:pPr marL="457200" lvl="0" indent="-317500" algn="l" rtl="0">
               <a:lnSpc>
                 <a:spcPct val="100000"/>
               </a:lnSpc>
@@ -9431,7 +8859,7 @@
             <a:endParaRPr/>
           </a:p>
           <a:p>
-            <a:pPr indent="-317500" lvl="0" marL="457200" rtl="0" algn="l">
+            <a:pPr marL="457200" lvl="0" indent="-317500" algn="l" rtl="0">
               <a:lnSpc>
                 <a:spcPct val="100000"/>
               </a:lnSpc>
@@ -9452,7 +8880,7 @@
             <a:endParaRPr/>
           </a:p>
           <a:p>
-            <a:pPr indent="-317500" lvl="1" marL="914400" rtl="0" algn="l">
+            <a:pPr marL="914400" lvl="1" indent="-317500" algn="l" rtl="0">
               <a:lnSpc>
                 <a:spcPct val="115000"/>
               </a:lnSpc>
@@ -9473,7 +8901,7 @@
             <a:endParaRPr/>
           </a:p>
           <a:p>
-            <a:pPr indent="-317500" lvl="1" marL="914400" rtl="0" algn="l">
+            <a:pPr marL="914400" lvl="1" indent="-317500" algn="l" rtl="0">
               <a:lnSpc>
                 <a:spcPct val="115000"/>
               </a:lnSpc>
@@ -9494,7 +8922,7 @@
             <a:endParaRPr/>
           </a:p>
           <a:p>
-            <a:pPr indent="-317500" lvl="1" marL="914400" rtl="0" algn="l">
+            <a:pPr marL="914400" lvl="1" indent="-317500" algn="l" rtl="0">
               <a:lnSpc>
                 <a:spcPct val="115000"/>
               </a:lnSpc>
@@ -9515,7 +8943,7 @@
             <a:endParaRPr/>
           </a:p>
           <a:p>
-            <a:pPr indent="-317500" lvl="1" marL="914400" rtl="0" algn="l">
+            <a:pPr marL="914400" lvl="1" indent="-317500" algn="l" rtl="0">
               <a:lnSpc>
                 <a:spcPct val="115000"/>
               </a:lnSpc>
@@ -9561,7 +8989,7 @@
             <a:blip r:embed="rId4">
               <a:alphaModFix/>
             </a:blip>
-            <a:srcRect b="0" l="60127" r="0" t="0"/>
+            <a:srcRect l="60127"/>
             <a:stretch/>
           </p:blipFill>
           <p:spPr>
@@ -9588,7 +9016,7 @@
             <a:blip r:embed="rId4">
               <a:alphaModFix/>
             </a:blip>
-            <a:srcRect b="0" l="60127" r="0" t="0"/>
+            <a:srcRect l="60127"/>
             <a:stretch/>
           </p:blipFill>
           <p:spPr>
@@ -9614,12 +9042,12 @@
 </p:sld>
 </file>
 
-<file path=ppt/slides/slide6.xml><?xml version="1.0" encoding="utf-8"?>
-<p:sld xmlns:a="http://schemas.openxmlformats.org/drawingml/2006/main" xmlns:r="http://schemas.openxmlformats.org/officeDocument/2006/relationships" xmlns:mc="http://schemas.openxmlformats.org/markup-compatibility/2006" xmlns:mv="urn:schemas-microsoft-com:mac:vml" xmlns:p="http://schemas.openxmlformats.org/presentationml/2006/main" xmlns:c="http://schemas.openxmlformats.org/drawingml/2006/chart" xmlns:dgm="http://schemas.openxmlformats.org/drawingml/2006/diagram" xmlns:o="urn:schemas-microsoft-com:office:office" xmlns:v="urn:schemas-microsoft-com:vml" xmlns:pvml="urn:schemas-microsoft-com:office:powerpoint" xmlns:com="http://schemas.openxmlformats.org/drawingml/2006/compatibility" xmlns:p14="http://schemas.microsoft.com/office/powerpoint/2010/main" xmlns:p15="http://schemas.microsoft.com/office/powerpoint/2012/main" xmlns:ahyp="http://schemas.microsoft.com/office/drawing/2018/hyperlinkcolor">
+<file path=ppt/slides/slide5.xml><?xml version="1.0" encoding="utf-8"?>
+<p:sld xmlns:a="http://schemas.openxmlformats.org/drawingml/2006/main" xmlns:r="http://schemas.openxmlformats.org/officeDocument/2006/relationships" xmlns:p="http://schemas.openxmlformats.org/presentationml/2006/main">
   <p:cSld>
     <p:spTree>
       <p:nvGrpSpPr>
-        <p:cNvPr id="119" name="Shape 119"/>
+        <p:cNvPr id="1" name="Shape 119"/>
         <p:cNvGrpSpPr/>
         <p:nvPr/>
       </p:nvGrpSpPr>
@@ -9634,16 +9062,18 @@
       <p:pic>
         <p:nvPicPr>
           <p:cNvPr id="120" name="Google Shape;120;p20"/>
-          <p:cNvPicPr preferRelativeResize="0"/>
+          <p:cNvPicPr preferRelativeResize="0">
+            <a:picLocks noGrp="1"/>
+          </p:cNvPicPr>
           <p:nvPr>
-            <p:ph idx="2" type="pic"/>
+            <p:ph type="pic" idx="2"/>
           </p:nvPr>
         </p:nvPicPr>
         <p:blipFill rotWithShape="1">
           <a:blip r:embed="rId3">
             <a:alphaModFix/>
           </a:blip>
-          <a:srcRect b="0" l="0" r="0" t="0"/>
+          <a:srcRect/>
           <a:stretch/>
         </p:blipFill>
         <p:spPr>
@@ -9655,21 +9085,23 @@
             <a:avLst/>
           </a:prstGeom>
           <a:noFill/>
-          <a:ln cap="flat" cmpd="sng" w="9525">
+          <a:ln w="9525" cap="flat" cmpd="sng">
             <a:solidFill>
               <a:schemeClr val="dk2"/>
             </a:solidFill>
             <a:prstDash val="solid"/>
             <a:round/>
-            <a:headEnd len="sm" w="sm" type="none"/>
-            <a:tailEnd len="sm" w="sm" type="none"/>
+            <a:headEnd type="none" w="sm" len="sm"/>
+            <a:tailEnd type="none" w="sm" len="sm"/>
           </a:ln>
         </p:spPr>
       </p:pic>
       <p:sp>
         <p:nvSpPr>
           <p:cNvPr id="121" name="Google Shape;121;p20"/>
-          <p:cNvSpPr txBox="1"/>
+          <p:cNvSpPr txBox="1">
+            <a:spLocks noGrp="1"/>
+          </p:cNvSpPr>
           <p:nvPr>
             <p:ph type="title"/>
           </p:nvPr>
@@ -9688,12 +9120,12 @@
           </a:ln>
         </p:spPr>
         <p:txBody>
-          <a:bodyPr anchorCtr="0" anchor="t" bIns="91425" lIns="91425" spcFirstLastPara="1" rIns="91425" wrap="square" tIns="91425">
+          <a:bodyPr spcFirstLastPara="1" wrap="square" lIns="91425" tIns="91425" rIns="91425" bIns="91425" anchor="t" anchorCtr="0">
             <a:noAutofit/>
           </a:bodyPr>
           <a:lstStyle/>
           <a:p>
-            <a:pPr indent="0" lvl="0" marL="0" rtl="0" algn="l">
+            <a:pPr marL="0" lvl="0" indent="0" algn="l" rtl="0">
               <a:lnSpc>
                 <a:spcPct val="80000"/>
               </a:lnSpc>
@@ -9717,9 +9149,11 @@
       <p:sp>
         <p:nvSpPr>
           <p:cNvPr id="122" name="Google Shape;122;p20"/>
-          <p:cNvSpPr txBox="1"/>
+          <p:cNvSpPr txBox="1">
+            <a:spLocks noGrp="1"/>
+          </p:cNvSpPr>
           <p:nvPr>
-            <p:ph idx="1" type="body"/>
+            <p:ph type="body" idx="1"/>
           </p:nvPr>
         </p:nvSpPr>
         <p:spPr>
@@ -9736,12 +9170,12 @@
           </a:ln>
         </p:spPr>
         <p:txBody>
-          <a:bodyPr anchorCtr="0" anchor="t" bIns="91425" lIns="91425" spcFirstLastPara="1" rIns="91425" wrap="square" tIns="91425">
+          <a:bodyPr spcFirstLastPara="1" wrap="square" lIns="91425" tIns="91425" rIns="91425" bIns="91425" anchor="t" anchorCtr="0">
             <a:noAutofit/>
           </a:bodyPr>
           <a:lstStyle/>
           <a:p>
-            <a:pPr indent="-317500" lvl="0" marL="457200" rtl="0" algn="l">
+            <a:pPr marL="457200" lvl="0" indent="-317500" algn="l" rtl="0">
               <a:lnSpc>
                 <a:spcPct val="100000"/>
               </a:lnSpc>
@@ -9762,7 +9196,7 @@
             <a:endParaRPr/>
           </a:p>
           <a:p>
-            <a:pPr indent="-317500" lvl="0" marL="457200" rtl="0" algn="l">
+            <a:pPr marL="457200" lvl="0" indent="-317500" algn="l" rtl="0">
               <a:lnSpc>
                 <a:spcPct val="100000"/>
               </a:lnSpc>
@@ -9783,7 +9217,7 @@
             <a:endParaRPr/>
           </a:p>
           <a:p>
-            <a:pPr indent="-317500" lvl="0" marL="457200" rtl="0" algn="l">
+            <a:pPr marL="457200" lvl="0" indent="-317500" algn="l" rtl="0">
               <a:lnSpc>
                 <a:spcPct val="100000"/>
               </a:lnSpc>
@@ -9804,7 +9238,7 @@
             <a:endParaRPr/>
           </a:p>
           <a:p>
-            <a:pPr indent="-317500" lvl="0" marL="457200" rtl="0" algn="l">
+            <a:pPr marL="457200" lvl="0" indent="-317500" algn="l" rtl="0">
               <a:lnSpc>
                 <a:spcPct val="100000"/>
               </a:lnSpc>
@@ -9850,7 +9284,7 @@
             <a:blip r:embed="rId4">
               <a:alphaModFix/>
             </a:blip>
-            <a:srcRect b="0" l="60127" r="0" t="0"/>
+            <a:srcRect l="60127"/>
             <a:stretch/>
           </p:blipFill>
           <p:spPr>
@@ -9877,7 +9311,7 @@
             <a:blip r:embed="rId4">
               <a:alphaModFix/>
             </a:blip>
-            <a:srcRect b="0" l="60127" r="0" t="0"/>
+            <a:srcRect l="60127"/>
             <a:stretch/>
           </p:blipFill>
           <p:spPr>
@@ -9903,12 +9337,12 @@
 </p:sld>
 </file>
 
-<file path=ppt/slides/slide7.xml><?xml version="1.0" encoding="utf-8"?>
-<p:sld xmlns:a="http://schemas.openxmlformats.org/drawingml/2006/main" xmlns:r="http://schemas.openxmlformats.org/officeDocument/2006/relationships" xmlns:mc="http://schemas.openxmlformats.org/markup-compatibility/2006" xmlns:mv="urn:schemas-microsoft-com:mac:vml" xmlns:p="http://schemas.openxmlformats.org/presentationml/2006/main" xmlns:c="http://schemas.openxmlformats.org/drawingml/2006/chart" xmlns:dgm="http://schemas.openxmlformats.org/drawingml/2006/diagram" xmlns:o="urn:schemas-microsoft-com:office:office" xmlns:v="urn:schemas-microsoft-com:vml" xmlns:pvml="urn:schemas-microsoft-com:office:powerpoint" xmlns:com="http://schemas.openxmlformats.org/drawingml/2006/compatibility" xmlns:p14="http://schemas.microsoft.com/office/powerpoint/2010/main" xmlns:p15="http://schemas.microsoft.com/office/powerpoint/2012/main" xmlns:ahyp="http://schemas.microsoft.com/office/drawing/2018/hyperlinkcolor">
+<file path=ppt/slides/slide6.xml><?xml version="1.0" encoding="utf-8"?>
+<p:sld xmlns:a="http://schemas.openxmlformats.org/drawingml/2006/main" xmlns:r="http://schemas.openxmlformats.org/officeDocument/2006/relationships" xmlns:p="http://schemas.openxmlformats.org/presentationml/2006/main">
   <p:cSld>
     <p:spTree>
       <p:nvGrpSpPr>
-        <p:cNvPr id="129" name="Shape 129"/>
+        <p:cNvPr id="1" name="Shape 129"/>
         <p:cNvGrpSpPr/>
         <p:nvPr/>
       </p:nvGrpSpPr>
@@ -9923,7 +9357,9 @@
       <p:sp>
         <p:nvSpPr>
           <p:cNvPr id="130" name="Google Shape;130;p21"/>
-          <p:cNvSpPr txBox="1"/>
+          <p:cNvSpPr txBox="1">
+            <a:spLocks noGrp="1"/>
+          </p:cNvSpPr>
           <p:nvPr>
             <p:ph type="title"/>
           </p:nvPr>
@@ -9942,12 +9378,12 @@
           </a:ln>
         </p:spPr>
         <p:txBody>
-          <a:bodyPr anchorCtr="0" anchor="t" bIns="91425" lIns="91425" spcFirstLastPara="1" rIns="91425" wrap="square" tIns="91425">
+          <a:bodyPr spcFirstLastPara="1" wrap="square" lIns="91425" tIns="91425" rIns="91425" bIns="91425" anchor="t" anchorCtr="0">
             <a:noAutofit/>
           </a:bodyPr>
           <a:lstStyle/>
           <a:p>
-            <a:pPr indent="0" lvl="0" marL="0" rtl="0" algn="l">
+            <a:pPr marL="0" lvl="0" indent="0" algn="l" rtl="0">
               <a:lnSpc>
                 <a:spcPct val="100000"/>
               </a:lnSpc>
@@ -9971,9 +9407,11 @@
       <p:sp>
         <p:nvSpPr>
           <p:cNvPr id="131" name="Google Shape;131;p21"/>
-          <p:cNvSpPr txBox="1"/>
+          <p:cNvSpPr txBox="1">
+            <a:spLocks noGrp="1"/>
+          </p:cNvSpPr>
           <p:nvPr>
-            <p:ph idx="1" type="subTitle"/>
+            <p:ph type="subTitle" idx="1"/>
           </p:nvPr>
         </p:nvSpPr>
         <p:spPr>
@@ -9990,12 +9428,12 @@
           </a:ln>
         </p:spPr>
         <p:txBody>
-          <a:bodyPr anchorCtr="0" anchor="t" bIns="91425" lIns="91425" spcFirstLastPara="1" rIns="91425" wrap="square" tIns="91425">
+          <a:bodyPr spcFirstLastPara="1" wrap="square" lIns="91425" tIns="91425" rIns="91425" bIns="91425" anchor="t" anchorCtr="0">
             <a:noAutofit/>
           </a:bodyPr>
           <a:lstStyle/>
           <a:p>
-            <a:pPr indent="-317500" lvl="0" marL="457200" rtl="0" algn="l">
+            <a:pPr marL="457200" lvl="0" indent="-317500" algn="l" rtl="0">
               <a:lnSpc>
                 <a:spcPct val="100000"/>
               </a:lnSpc>
@@ -10015,7 +9453,7 @@
             <a:endParaRPr/>
           </a:p>
           <a:p>
-            <a:pPr indent="-317500" lvl="0" marL="457200" rtl="0" algn="l">
+            <a:pPr marL="457200" lvl="0" indent="-317500" algn="l" rtl="0">
               <a:lnSpc>
                 <a:spcPct val="100000"/>
               </a:lnSpc>
@@ -10035,7 +9473,7 @@
             <a:endParaRPr/>
           </a:p>
           <a:p>
-            <a:pPr indent="-317500" lvl="0" marL="457200" rtl="0" algn="l">
+            <a:pPr marL="457200" lvl="0" indent="-317500" algn="l" rtl="0">
               <a:lnSpc>
                 <a:spcPct val="100000"/>
               </a:lnSpc>
@@ -10055,7 +9493,7 @@
             <a:endParaRPr/>
           </a:p>
           <a:p>
-            <a:pPr indent="-317500" lvl="1" marL="914400" rtl="0" algn="l">
+            <a:pPr marL="914400" lvl="1" indent="-317500" algn="l" rtl="0">
               <a:lnSpc>
                 <a:spcPct val="100000"/>
               </a:lnSpc>
@@ -10075,7 +9513,7 @@
             <a:endParaRPr/>
           </a:p>
           <a:p>
-            <a:pPr indent="-317500" lvl="1" marL="914400" rtl="0" algn="l">
+            <a:pPr marL="914400" lvl="1" indent="-317500" algn="l" rtl="0">
               <a:lnSpc>
                 <a:spcPct val="100000"/>
               </a:lnSpc>
@@ -10095,7 +9533,7 @@
             <a:endParaRPr/>
           </a:p>
           <a:p>
-            <a:pPr indent="-317500" lvl="1" marL="914400" rtl="0" algn="l">
+            <a:pPr marL="914400" lvl="1" indent="-317500" algn="l" rtl="0">
               <a:lnSpc>
                 <a:spcPct val="100000"/>
               </a:lnSpc>
@@ -10115,7 +9553,7 @@
             <a:endParaRPr/>
           </a:p>
           <a:p>
-            <a:pPr indent="-317500" lvl="0" marL="457200" rtl="0" algn="l">
+            <a:pPr marL="457200" lvl="0" indent="-317500" algn="l" rtl="0">
               <a:lnSpc>
                 <a:spcPct val="100000"/>
               </a:lnSpc>
@@ -10135,7 +9573,7 @@
             <a:endParaRPr/>
           </a:p>
           <a:p>
-            <a:pPr indent="-317500" lvl="1" marL="914400" rtl="0" algn="l">
+            <a:pPr marL="914400" lvl="1" indent="-317500" algn="l" rtl="0">
               <a:lnSpc>
                 <a:spcPct val="100000"/>
               </a:lnSpc>
@@ -10155,7 +9593,7 @@
             <a:endParaRPr/>
           </a:p>
           <a:p>
-            <a:pPr indent="-317500" lvl="0" marL="457200" rtl="0" algn="l">
+            <a:pPr marL="457200" lvl="0" indent="-317500" algn="l" rtl="0">
               <a:lnSpc>
                 <a:spcPct val="100000"/>
               </a:lnSpc>
@@ -10212,12 +9650,12 @@
 </p:sld>
 </file>
 
-<file path=ppt/slides/slide8.xml><?xml version="1.0" encoding="utf-8"?>
-<p:sld xmlns:a="http://schemas.openxmlformats.org/drawingml/2006/main" xmlns:r="http://schemas.openxmlformats.org/officeDocument/2006/relationships" xmlns:mc="http://schemas.openxmlformats.org/markup-compatibility/2006" xmlns:mv="urn:schemas-microsoft-com:mac:vml" xmlns:p="http://schemas.openxmlformats.org/presentationml/2006/main" xmlns:c="http://schemas.openxmlformats.org/drawingml/2006/chart" xmlns:dgm="http://schemas.openxmlformats.org/drawingml/2006/diagram" xmlns:o="urn:schemas-microsoft-com:office:office" xmlns:v="urn:schemas-microsoft-com:vml" xmlns:pvml="urn:schemas-microsoft-com:office:powerpoint" xmlns:com="http://schemas.openxmlformats.org/drawingml/2006/compatibility" xmlns:p14="http://schemas.microsoft.com/office/powerpoint/2010/main" xmlns:p15="http://schemas.microsoft.com/office/powerpoint/2012/main" xmlns:ahyp="http://schemas.microsoft.com/office/drawing/2018/hyperlinkcolor">
+<file path=ppt/slides/slide7.xml><?xml version="1.0" encoding="utf-8"?>
+<p:sld xmlns:a="http://schemas.openxmlformats.org/drawingml/2006/main" xmlns:r="http://schemas.openxmlformats.org/officeDocument/2006/relationships" xmlns:p="http://schemas.openxmlformats.org/presentationml/2006/main">
   <p:cSld>
     <p:spTree>
       <p:nvGrpSpPr>
-        <p:cNvPr id="136" name="Shape 136"/>
+        <p:cNvPr id="1" name="Shape 136"/>
         <p:cNvGrpSpPr/>
         <p:nvPr/>
       </p:nvGrpSpPr>
@@ -10232,7 +9670,9 @@
       <p:sp>
         <p:nvSpPr>
           <p:cNvPr id="137" name="Google Shape;137;p22"/>
-          <p:cNvSpPr txBox="1"/>
+          <p:cNvSpPr txBox="1">
+            <a:spLocks noGrp="1"/>
+          </p:cNvSpPr>
           <p:nvPr>
             <p:ph type="title"/>
           </p:nvPr>
@@ -10251,12 +9691,12 @@
           </a:ln>
         </p:spPr>
         <p:txBody>
-          <a:bodyPr anchorCtr="0" anchor="t" bIns="91425" lIns="91425" spcFirstLastPara="1" rIns="91425" wrap="square" tIns="91425">
+          <a:bodyPr spcFirstLastPara="1" wrap="square" lIns="91425" tIns="91425" rIns="91425" bIns="91425" anchor="t" anchorCtr="0">
             <a:noAutofit/>
           </a:bodyPr>
           <a:lstStyle/>
           <a:p>
-            <a:pPr indent="0" lvl="0" marL="0" rtl="0" algn="l">
+            <a:pPr marL="0" lvl="0" indent="0" algn="l" rtl="0">
               <a:lnSpc>
                 <a:spcPct val="100000"/>
               </a:lnSpc>
@@ -10287,7 +9727,7 @@
           <a:blip r:embed="rId3">
             <a:alphaModFix/>
           </a:blip>
-          <a:srcRect b="0" l="0" r="0" t="0"/>
+          <a:srcRect/>
           <a:stretch/>
         </p:blipFill>
         <p:spPr>
@@ -10312,12 +9752,12 @@
 </p:sld>
 </file>
 
-<file path=ppt/slides/slide9.xml><?xml version="1.0" encoding="utf-8"?>
-<p:sld xmlns:a="http://schemas.openxmlformats.org/drawingml/2006/main" xmlns:r="http://schemas.openxmlformats.org/officeDocument/2006/relationships" xmlns:mc="http://schemas.openxmlformats.org/markup-compatibility/2006" xmlns:mv="urn:schemas-microsoft-com:mac:vml" xmlns:p="http://schemas.openxmlformats.org/presentationml/2006/main" xmlns:c="http://schemas.openxmlformats.org/drawingml/2006/chart" xmlns:dgm="http://schemas.openxmlformats.org/drawingml/2006/diagram" xmlns:o="urn:schemas-microsoft-com:office:office" xmlns:v="urn:schemas-microsoft-com:vml" xmlns:pvml="urn:schemas-microsoft-com:office:powerpoint" xmlns:com="http://schemas.openxmlformats.org/drawingml/2006/compatibility" xmlns:p14="http://schemas.microsoft.com/office/powerpoint/2010/main" xmlns:p15="http://schemas.microsoft.com/office/powerpoint/2012/main" xmlns:ahyp="http://schemas.microsoft.com/office/drawing/2018/hyperlinkcolor">
+<file path=ppt/slides/slide8.xml><?xml version="1.0" encoding="utf-8"?>
+<p:sld xmlns:a="http://schemas.openxmlformats.org/drawingml/2006/main" xmlns:r="http://schemas.openxmlformats.org/officeDocument/2006/relationships" xmlns:p="http://schemas.openxmlformats.org/presentationml/2006/main">
   <p:cSld>
     <p:spTree>
       <p:nvGrpSpPr>
-        <p:cNvPr id="142" name="Shape 142"/>
+        <p:cNvPr id="1" name="Shape 142"/>
         <p:cNvGrpSpPr/>
         <p:nvPr/>
       </p:nvGrpSpPr>
@@ -10332,7 +9772,9 @@
       <p:sp>
         <p:nvSpPr>
           <p:cNvPr id="143" name="Google Shape;143;p23"/>
-          <p:cNvSpPr txBox="1"/>
+          <p:cNvSpPr txBox="1">
+            <a:spLocks noGrp="1"/>
+          </p:cNvSpPr>
           <p:nvPr>
             <p:ph type="title"/>
           </p:nvPr>
@@ -10351,12 +9793,12 @@
           </a:ln>
         </p:spPr>
         <p:txBody>
-          <a:bodyPr anchorCtr="0" anchor="t" bIns="91425" lIns="91425" spcFirstLastPara="1" rIns="91425" wrap="square" tIns="91425">
+          <a:bodyPr spcFirstLastPara="1" wrap="square" lIns="91425" tIns="91425" rIns="91425" bIns="91425" anchor="t" anchorCtr="0">
             <a:noAutofit/>
           </a:bodyPr>
           <a:lstStyle/>
           <a:p>
-            <a:pPr indent="0" lvl="0" marL="0" rtl="0" algn="ctr">
+            <a:pPr marL="0" lvl="0" indent="0" algn="ctr" rtl="0">
               <a:lnSpc>
                 <a:spcPct val="100000"/>
               </a:lnSpc>
@@ -10387,7 +9829,7 @@
           <a:blip r:embed="rId3">
             <a:alphaModFix/>
           </a:blip>
-          <a:srcRect b="0" l="0" r="0" t="0"/>
+          <a:srcRect/>
           <a:stretch/>
         </p:blipFill>
         <p:spPr>
@@ -10412,8 +9854,803 @@
 </p:sld>
 </file>
 
+<file path=ppt/slides/slide9.xml><?xml version="1.0" encoding="utf-8"?>
+<p:sld xmlns:a="http://schemas.openxmlformats.org/drawingml/2006/main" xmlns:r="http://schemas.openxmlformats.org/officeDocument/2006/relationships" xmlns:p="http://schemas.openxmlformats.org/presentationml/2006/main">
+  <p:cSld>
+    <p:spTree>
+      <p:nvGrpSpPr>
+        <p:cNvPr id="1" name="Shape 148"/>
+        <p:cNvGrpSpPr/>
+        <p:nvPr/>
+      </p:nvGrpSpPr>
+      <p:grpSpPr>
+        <a:xfrm>
+          <a:off x="0" y="0"/>
+          <a:ext cx="0" cy="0"/>
+          <a:chOff x="0" y="0"/>
+          <a:chExt cx="0" cy="0"/>
+        </a:xfrm>
+      </p:grpSpPr>
+      <p:sp>
+        <p:nvSpPr>
+          <p:cNvPr id="149" name="Google Shape;149;p24"/>
+          <p:cNvSpPr txBox="1">
+            <a:spLocks noGrp="1"/>
+          </p:cNvSpPr>
+          <p:nvPr>
+            <p:ph type="title"/>
+          </p:nvPr>
+        </p:nvSpPr>
+        <p:spPr>
+          <a:xfrm>
+            <a:off x="192150" y="696150"/>
+            <a:ext cx="8759700" cy="698400"/>
+          </a:xfrm>
+          <a:prstGeom prst="rect">
+            <a:avLst/>
+          </a:prstGeom>
+          <a:noFill/>
+          <a:ln>
+            <a:noFill/>
+          </a:ln>
+        </p:spPr>
+        <p:txBody>
+          <a:bodyPr spcFirstLastPara="1" wrap="square" lIns="91425" tIns="91425" rIns="91425" bIns="91425" anchor="t" anchorCtr="0">
+            <a:noAutofit/>
+          </a:bodyPr>
+          <a:lstStyle/>
+          <a:p>
+            <a:pPr marL="0" lvl="0" indent="0" algn="ctr" rtl="0">
+              <a:lnSpc>
+                <a:spcPct val="100000"/>
+              </a:lnSpc>
+              <a:spcBef>
+                <a:spcPts val="0"/>
+              </a:spcBef>
+              <a:spcAft>
+                <a:spcPts val="0"/>
+              </a:spcAft>
+              <a:buSzPts val="3200"/>
+              <a:buNone/>
+            </a:pPr>
+            <a:r>
+              <a:rPr lang="en-US"/>
+              <a:t>Eredményeké és összehasonlítás</a:t>
+            </a:r>
+            <a:endParaRPr/>
+          </a:p>
+        </p:txBody>
+      </p:sp>
+      <p:graphicFrame>
+        <p:nvGraphicFramePr>
+          <p:cNvPr id="150" name="Google Shape;150;p24"/>
+          <p:cNvGraphicFramePr/>
+          <p:nvPr/>
+        </p:nvGraphicFramePr>
+        <p:xfrm>
+          <a:off x="638700" y="1493075"/>
+          <a:ext cx="7866600" cy="3139380"/>
+        </p:xfrm>
+        <a:graphic>
+          <a:graphicData uri="http://schemas.openxmlformats.org/drawingml/2006/table">
+            <a:tbl>
+              <a:tblPr>
+                <a:noFill/>
+                <a:tableStyleId>{3479EEE4-8326-451E-9463-3B67C47A2025}</a:tableStyleId>
+              </a:tblPr>
+              <a:tblGrid>
+                <a:gridCol w="3933300">
+                  <a:extLst>
+                    <a:ext uri="{9D8B030D-6E8A-4147-A177-3AD203B41FA5}">
+                      <a16:colId xmlns:a16="http://schemas.microsoft.com/office/drawing/2014/main" val="20000"/>
+                    </a:ext>
+                  </a:extLst>
+                </a:gridCol>
+                <a:gridCol w="3933300">
+                  <a:extLst>
+                    <a:ext uri="{9D8B030D-6E8A-4147-A177-3AD203B41FA5}">
+                      <a16:colId xmlns:a16="http://schemas.microsoft.com/office/drawing/2014/main" val="20001"/>
+                    </a:ext>
+                  </a:extLst>
+                </a:gridCol>
+              </a:tblGrid>
+              <a:tr h="1456625">
+                <a:tc>
+                  <a:txBody>
+                    <a:bodyPr/>
+                    <a:lstStyle/>
+                    <a:p>
+                      <a:pPr marL="0" marR="0" lvl="0" indent="0" algn="l" rtl="0">
+                        <a:lnSpc>
+                          <a:spcPct val="100000"/>
+                        </a:lnSpc>
+                        <a:spcBef>
+                          <a:spcPts val="0"/>
+                        </a:spcBef>
+                        <a:spcAft>
+                          <a:spcPts val="0"/>
+                        </a:spcAft>
+                        <a:buClr>
+                          <a:srgbClr val="000000"/>
+                        </a:buClr>
+                        <a:buSzPts val="1400"/>
+                        <a:buFont typeface="Arial"/>
+                        <a:buNone/>
+                      </a:pPr>
+                      <a:r>
+                        <a:rPr lang="en-US" sz="1400" u="none" strike="noStrike" cap="none"/>
+                        <a:t>YuNet (A leghatékonyabb):</a:t>
+                      </a:r>
+                      <a:endParaRPr sz="1400" u="none" strike="noStrike" cap="none"/>
+                    </a:p>
+                    <a:p>
+                      <a:pPr marL="0" marR="0" lvl="0" indent="0" algn="l" rtl="0">
+                        <a:lnSpc>
+                          <a:spcPct val="100000"/>
+                        </a:lnSpc>
+                        <a:spcBef>
+                          <a:spcPts val="0"/>
+                        </a:spcBef>
+                        <a:spcAft>
+                          <a:spcPts val="0"/>
+                        </a:spcAft>
+                        <a:buClr>
+                          <a:srgbClr val="000000"/>
+                        </a:buClr>
+                        <a:buSzPts val="1400"/>
+                        <a:buFont typeface="Arial"/>
+                        <a:buNone/>
+                      </a:pPr>
+                      <a:endParaRPr sz="1400" u="none" strike="noStrike" cap="none"/>
+                    </a:p>
+                    <a:p>
+                      <a:pPr marL="0" marR="0" lvl="0" indent="0" algn="l" rtl="0">
+                        <a:lnSpc>
+                          <a:spcPct val="100000"/>
+                        </a:lnSpc>
+                        <a:spcBef>
+                          <a:spcPts val="0"/>
+                        </a:spcBef>
+                        <a:spcAft>
+                          <a:spcPts val="0"/>
+                        </a:spcAft>
+                        <a:buClr>
+                          <a:srgbClr val="000000"/>
+                        </a:buClr>
+                        <a:buSzPts val="1400"/>
+                        <a:buFont typeface="Arial"/>
+                        <a:buNone/>
+                      </a:pPr>
+                      <a:r>
+                        <a:rPr lang="en-US" sz="1400" u="none" strike="noStrike" cap="none"/>
+                        <a:t>Legpontosabb: 71,34% (Arclétszám) és 88,42% (Bounding Box).</a:t>
+                      </a:r>
+                      <a:endParaRPr sz="1400" u="none" strike="noStrike" cap="none"/>
+                    </a:p>
+                    <a:p>
+                      <a:pPr marL="0" marR="0" lvl="0" indent="0" algn="l" rtl="0">
+                        <a:lnSpc>
+                          <a:spcPct val="100000"/>
+                        </a:lnSpc>
+                        <a:spcBef>
+                          <a:spcPts val="0"/>
+                        </a:spcBef>
+                        <a:spcAft>
+                          <a:spcPts val="0"/>
+                        </a:spcAft>
+                        <a:buClr>
+                          <a:srgbClr val="000000"/>
+                        </a:buClr>
+                        <a:buSzPts val="1400"/>
+                        <a:buFont typeface="Arial"/>
+                        <a:buNone/>
+                      </a:pPr>
+                      <a:endParaRPr sz="1400" u="none" strike="noStrike" cap="none"/>
+                    </a:p>
+                    <a:p>
+                      <a:pPr marL="0" marR="0" lvl="0" indent="0" algn="l" rtl="0">
+                        <a:lnSpc>
+                          <a:spcPct val="100000"/>
+                        </a:lnSpc>
+                        <a:spcBef>
+                          <a:spcPts val="0"/>
+                        </a:spcBef>
+                        <a:spcAft>
+                          <a:spcPts val="0"/>
+                        </a:spcAft>
+                        <a:buClr>
+                          <a:srgbClr val="000000"/>
+                        </a:buClr>
+                        <a:buSzPts val="1400"/>
+                        <a:buFont typeface="Arial"/>
+                        <a:buNone/>
+                      </a:pPr>
+                      <a:r>
+                        <a:rPr lang="en-US" sz="1400" u="none" strike="noStrike" cap="none"/>
+                        <a:t>Legtöbb találat: 24 461 detektált arc.</a:t>
+                      </a:r>
+                      <a:endParaRPr sz="1400" u="none" strike="noStrike" cap="none"/>
+                    </a:p>
+                  </a:txBody>
+                  <a:tcPr marL="91425" marR="91425" marT="91425" marB="91425"/>
+                </a:tc>
+                <a:tc>
+                  <a:txBody>
+                    <a:bodyPr/>
+                    <a:lstStyle/>
+                    <a:p>
+                      <a:pPr marL="0" marR="0" lvl="0" indent="0" algn="l" rtl="0">
+                        <a:lnSpc>
+                          <a:spcPct val="100000"/>
+                        </a:lnSpc>
+                        <a:spcBef>
+                          <a:spcPts val="0"/>
+                        </a:spcBef>
+                        <a:spcAft>
+                          <a:spcPts val="0"/>
+                        </a:spcAft>
+                        <a:buClr>
+                          <a:srgbClr val="000000"/>
+                        </a:buClr>
+                        <a:buSzPts val="1400"/>
+                        <a:buFont typeface="Arial"/>
+                        <a:buNone/>
+                      </a:pPr>
+                      <a:r>
+                        <a:rPr lang="en-US" sz="1400" u="none" strike="noStrike" cap="none"/>
+                        <a:t>DNN (A legmegbízhatóbb):</a:t>
+                      </a:r>
+                      <a:endParaRPr sz="1400" u="none" strike="noStrike" cap="none"/>
+                    </a:p>
+                    <a:p>
+                      <a:pPr marL="0" marR="0" lvl="0" indent="0" algn="l" rtl="0">
+                        <a:lnSpc>
+                          <a:spcPct val="100000"/>
+                        </a:lnSpc>
+                        <a:spcBef>
+                          <a:spcPts val="0"/>
+                        </a:spcBef>
+                        <a:spcAft>
+                          <a:spcPts val="0"/>
+                        </a:spcAft>
+                        <a:buClr>
+                          <a:srgbClr val="000000"/>
+                        </a:buClr>
+                        <a:buSzPts val="1400"/>
+                        <a:buFont typeface="Arial"/>
+                        <a:buNone/>
+                      </a:pPr>
+                      <a:endParaRPr sz="1400" u="none" strike="noStrike" cap="none"/>
+                    </a:p>
+                    <a:p>
+                      <a:pPr marL="0" marR="0" lvl="0" indent="0" algn="l" rtl="0">
+                        <a:lnSpc>
+                          <a:spcPct val="100000"/>
+                        </a:lnSpc>
+                        <a:spcBef>
+                          <a:spcPts val="0"/>
+                        </a:spcBef>
+                        <a:spcAft>
+                          <a:spcPts val="0"/>
+                        </a:spcAft>
+                        <a:buClr>
+                          <a:srgbClr val="000000"/>
+                        </a:buClr>
+                        <a:buSzPts val="1400"/>
+                        <a:buFont typeface="Arial"/>
+                        <a:buNone/>
+                      </a:pPr>
+                      <a:r>
+                        <a:rPr lang="en-US" sz="1400" u="none" strike="noStrike" cap="none"/>
+                        <a:t>Minimális hiba: Mindössze 26 db téves ("túl sok") detektálás, ami kiemelkedően tiszta működést jelent.</a:t>
+                      </a:r>
+                      <a:endParaRPr sz="1400" u="none" strike="noStrike" cap="none"/>
+                    </a:p>
+                  </a:txBody>
+                  <a:tcPr marL="91425" marR="91425" marT="91425" marB="91425"/>
+                </a:tc>
+                <a:extLst>
+                  <a:ext uri="{0D108BD9-81ED-4DB2-BD59-A6C34878D82A}">
+                    <a16:rowId xmlns:a16="http://schemas.microsoft.com/office/drawing/2014/main" val="10000"/>
+                  </a:ext>
+                </a:extLst>
+              </a:tr>
+              <a:tr h="557900">
+                <a:tc>
+                  <a:txBody>
+                    <a:bodyPr/>
+                    <a:lstStyle/>
+                    <a:p>
+                      <a:pPr marL="0" marR="0" lvl="0" indent="0" algn="l" rtl="0">
+                        <a:lnSpc>
+                          <a:spcPct val="100000"/>
+                        </a:lnSpc>
+                        <a:spcBef>
+                          <a:spcPts val="0"/>
+                        </a:spcBef>
+                        <a:spcAft>
+                          <a:spcPts val="0"/>
+                        </a:spcAft>
+                        <a:buClr>
+                          <a:srgbClr val="000000"/>
+                        </a:buClr>
+                        <a:buSzPts val="1400"/>
+                        <a:buFont typeface="Arial"/>
+                        <a:buNone/>
+                      </a:pPr>
+                      <a:r>
+                        <a:rPr lang="en-US" sz="1400" u="none" strike="noStrike" cap="none"/>
+                        <a:t>Saját CNN:</a:t>
+                      </a:r>
+                      <a:endParaRPr sz="1400" u="none" strike="noStrike" cap="none"/>
+                    </a:p>
+                    <a:p>
+                      <a:pPr marL="0" marR="0" lvl="0" indent="0" algn="l" rtl="0">
+                        <a:lnSpc>
+                          <a:spcPct val="100000"/>
+                        </a:lnSpc>
+                        <a:spcBef>
+                          <a:spcPts val="0"/>
+                        </a:spcBef>
+                        <a:spcAft>
+                          <a:spcPts val="0"/>
+                        </a:spcAft>
+                        <a:buClr>
+                          <a:srgbClr val="000000"/>
+                        </a:buClr>
+                        <a:buSzPts val="1400"/>
+                        <a:buFont typeface="Arial"/>
+                        <a:buNone/>
+                      </a:pPr>
+                      <a:endParaRPr sz="1400" u="none" strike="noStrike" cap="none"/>
+                    </a:p>
+                    <a:p>
+                      <a:pPr marL="0" marR="0" lvl="0" indent="0" algn="l" rtl="0">
+                        <a:lnSpc>
+                          <a:spcPct val="100000"/>
+                        </a:lnSpc>
+                        <a:spcBef>
+                          <a:spcPts val="0"/>
+                        </a:spcBef>
+                        <a:spcAft>
+                          <a:spcPts val="0"/>
+                        </a:spcAft>
+                        <a:buClr>
+                          <a:srgbClr val="000000"/>
+                        </a:buClr>
+                        <a:buSzPts val="1400"/>
+                        <a:buFont typeface="Arial"/>
+                        <a:buNone/>
+                      </a:pPr>
+                      <a:r>
+                        <a:rPr lang="en-US" sz="1400" u="none" strike="noStrike" cap="none"/>
+                        <a:t>Magas érzékenység (23 242 találat), de alacsony pontosság (11,59% BBox).</a:t>
+                      </a:r>
+                      <a:endParaRPr sz="1400" u="none" strike="noStrike" cap="none"/>
+                    </a:p>
+                    <a:p>
+                      <a:pPr marL="0" marR="0" lvl="0" indent="0" algn="l" rtl="0">
+                        <a:lnSpc>
+                          <a:spcPct val="100000"/>
+                        </a:lnSpc>
+                        <a:spcBef>
+                          <a:spcPts val="0"/>
+                        </a:spcBef>
+                        <a:spcAft>
+                          <a:spcPts val="0"/>
+                        </a:spcAft>
+                        <a:buClr>
+                          <a:srgbClr val="000000"/>
+                        </a:buClr>
+                        <a:buSzPts val="1400"/>
+                        <a:buFont typeface="Arial"/>
+                        <a:buNone/>
+                      </a:pPr>
+                      <a:endParaRPr sz="1400" u="none" strike="noStrike" cap="none"/>
+                    </a:p>
+                    <a:p>
+                      <a:pPr marL="0" marR="0" lvl="0" indent="0" algn="l" rtl="0">
+                        <a:lnSpc>
+                          <a:spcPct val="100000"/>
+                        </a:lnSpc>
+                        <a:spcBef>
+                          <a:spcPts val="0"/>
+                        </a:spcBef>
+                        <a:spcAft>
+                          <a:spcPts val="0"/>
+                        </a:spcAft>
+                        <a:buClr>
+                          <a:srgbClr val="000000"/>
+                        </a:buClr>
+                        <a:buSzPts val="1400"/>
+                        <a:buFont typeface="Arial"/>
+                        <a:buNone/>
+                      </a:pPr>
+                      <a:r>
+                        <a:rPr lang="en-US" sz="1400" u="none" strike="noStrike" cap="none"/>
+                        <a:t>Sok a téves riasztás (2359 db "túl sok" hiba), így a modell még finomhangolásra szorul.</a:t>
+                      </a:r>
+                      <a:endParaRPr sz="1400" u="none" strike="noStrike" cap="none"/>
+                    </a:p>
+                  </a:txBody>
+                  <a:tcPr marL="91425" marR="91425" marT="91425" marB="91425"/>
+                </a:tc>
+                <a:tc>
+                  <a:txBody>
+                    <a:bodyPr/>
+                    <a:lstStyle/>
+                    <a:p>
+                      <a:pPr marL="0" marR="0" lvl="0" indent="0" algn="l" rtl="0">
+                        <a:lnSpc>
+                          <a:spcPct val="100000"/>
+                        </a:lnSpc>
+                        <a:spcBef>
+                          <a:spcPts val="0"/>
+                        </a:spcBef>
+                        <a:spcAft>
+                          <a:spcPts val="0"/>
+                        </a:spcAft>
+                        <a:buClr>
+                          <a:srgbClr val="000000"/>
+                        </a:buClr>
+                        <a:buSzPts val="1400"/>
+                        <a:buFont typeface="Arial"/>
+                        <a:buNone/>
+                      </a:pPr>
+                      <a:r>
+                        <a:rPr lang="en-US" sz="1400" u="none" strike="noStrike" cap="none"/>
+                        <a:t>Haar Cascade:</a:t>
+                      </a:r>
+                      <a:endParaRPr sz="1400" u="none" strike="noStrike" cap="none"/>
+                    </a:p>
+                    <a:p>
+                      <a:pPr marL="0" marR="0" lvl="0" indent="0" algn="l" rtl="0">
+                        <a:lnSpc>
+                          <a:spcPct val="100000"/>
+                        </a:lnSpc>
+                        <a:spcBef>
+                          <a:spcPts val="0"/>
+                        </a:spcBef>
+                        <a:spcAft>
+                          <a:spcPts val="0"/>
+                        </a:spcAft>
+                        <a:buClr>
+                          <a:srgbClr val="000000"/>
+                        </a:buClr>
+                        <a:buSzPts val="1400"/>
+                        <a:buFont typeface="Arial"/>
+                        <a:buNone/>
+                      </a:pPr>
+                      <a:endParaRPr sz="1400" u="none" strike="noStrike" cap="none"/>
+                    </a:p>
+                    <a:p>
+                      <a:pPr marL="0" marR="0" lvl="0" indent="0" algn="l" rtl="0">
+                        <a:lnSpc>
+                          <a:spcPct val="100000"/>
+                        </a:lnSpc>
+                        <a:spcBef>
+                          <a:spcPts val="0"/>
+                        </a:spcBef>
+                        <a:spcAft>
+                          <a:spcPts val="0"/>
+                        </a:spcAft>
+                        <a:buClr>
+                          <a:srgbClr val="000000"/>
+                        </a:buClr>
+                        <a:buSzPts val="1400"/>
+                        <a:buFont typeface="Arial"/>
+                        <a:buNone/>
+                      </a:pPr>
+                      <a:r>
+                        <a:rPr lang="en-US" sz="1400" u="none" strike="noStrike" cap="none"/>
+                        <a:t>Elavult technológia, alacsony hatékonysággal (19,07% pontosság).</a:t>
+                      </a:r>
+                      <a:endParaRPr sz="1400" u="none" strike="noStrike" cap="none"/>
+                    </a:p>
+                  </a:txBody>
+                  <a:tcPr marL="91425" marR="91425" marT="91425" marB="91425"/>
+                </a:tc>
+                <a:extLst>
+                  <a:ext uri="{0D108BD9-81ED-4DB2-BD59-A6C34878D82A}">
+                    <a16:rowId xmlns:a16="http://schemas.microsoft.com/office/drawing/2014/main" val="10001"/>
+                  </a:ext>
+                </a:extLst>
+              </a:tr>
+            </a:tbl>
+          </a:graphicData>
+        </a:graphic>
+      </p:graphicFrame>
+    </p:spTree>
+  </p:cSld>
+  <p:clrMapOvr>
+    <a:masterClrMapping/>
+  </p:clrMapOvr>
+</p:sld>
+</file>
+
 <file path=ppt/theme/theme1.xml><?xml version="1.0" encoding="utf-8"?>
-<a:theme xmlns:a="http://schemas.openxmlformats.org/drawingml/2006/main" xmlns:r="http://schemas.openxmlformats.org/officeDocument/2006/relationships">
+<a:theme xmlns:a="http://schemas.openxmlformats.org/drawingml/2006/main" name="My Presentation Template">
+  <a:themeElements>
+    <a:clrScheme name="Simple Light">
+      <a:dk1>
+        <a:srgbClr val="191919"/>
+      </a:dk1>
+      <a:lt1>
+        <a:srgbClr val="EFEFEF"/>
+      </a:lt1>
+      <a:dk2>
+        <a:srgbClr val="707070"/>
+      </a:dk2>
+      <a:lt2>
+        <a:srgbClr val="C1C1BF"/>
+      </a:lt2>
+      <a:accent1>
+        <a:srgbClr val="FFFFFF"/>
+      </a:accent1>
+      <a:accent2>
+        <a:srgbClr val="FFFFFF"/>
+      </a:accent2>
+      <a:accent3>
+        <a:srgbClr val="FFFFFF"/>
+      </a:accent3>
+      <a:accent4>
+        <a:srgbClr val="FFFFFF"/>
+      </a:accent4>
+      <a:accent5>
+        <a:srgbClr val="FFFFFF"/>
+      </a:accent5>
+      <a:accent6>
+        <a:srgbClr val="FFFFFF"/>
+      </a:accent6>
+      <a:hlink>
+        <a:srgbClr val="191919"/>
+      </a:hlink>
+      <a:folHlink>
+        <a:srgbClr val="0097A7"/>
+      </a:folHlink>
+    </a:clrScheme>
+    <a:fontScheme name="Office">
+      <a:majorFont>
+        <a:latin typeface="Arial"/>
+        <a:ea typeface=""/>
+        <a:cs typeface=""/>
+        <a:font script="Jpan" typeface="ＭＳ Ｐゴシック"/>
+        <a:font script="Hang" typeface="맑은 고딕"/>
+        <a:font script="Hans" typeface="宋体"/>
+        <a:font script="Hant" typeface="新細明體"/>
+        <a:font script="Arab" typeface="Times New Roman"/>
+        <a:font script="Hebr" typeface="Times New Roman"/>
+        <a:font script="Thai" typeface="Angsana New"/>
+        <a:font script="Ethi" typeface="Nyala"/>
+        <a:font script="Beng" typeface="Vrinda"/>
+        <a:font script="Gujr" typeface="Shruti"/>
+        <a:font script="Khmr" typeface="MoolBoran"/>
+        <a:font script="Knda" typeface="Tunga"/>
+        <a:font script="Guru" typeface="Raavi"/>
+        <a:font script="Cans" typeface="Euphemia"/>
+        <a:font script="Cher" typeface="Plantagenet Cherokee"/>
+        <a:font script="Yiii" typeface="Microsoft Yi Baiti"/>
+        <a:font script="Tibt" typeface="Microsoft Himalaya"/>
+        <a:font script="Thaa" typeface="MV Boli"/>
+        <a:font script="Deva" typeface="Mangal"/>
+        <a:font script="Telu" typeface="Gautami"/>
+        <a:font script="Taml" typeface="Latha"/>
+        <a:font script="Syrc" typeface="Estrangelo Edessa"/>
+        <a:font script="Orya" typeface="Kalinga"/>
+        <a:font script="Mlym" typeface="Kartika"/>
+        <a:font script="Laoo" typeface="DokChampa"/>
+        <a:font script="Sinh" typeface="Iskoola Pota"/>
+        <a:font script="Mong" typeface="Mongolian Baiti"/>
+        <a:font script="Viet" typeface="Times New Roman"/>
+        <a:font script="Uigh" typeface="Microsoft Uighur"/>
+        <a:font script="Geor" typeface="Sylfaen"/>
+      </a:majorFont>
+      <a:minorFont>
+        <a:latin typeface="Arial"/>
+        <a:ea typeface=""/>
+        <a:cs typeface=""/>
+        <a:font script="Jpan" typeface="ＭＳ Ｐゴシック"/>
+        <a:font script="Hang" typeface="맑은 고딕"/>
+        <a:font script="Hans" typeface="宋体"/>
+        <a:font script="Hant" typeface="新細明體"/>
+        <a:font script="Arab" typeface="Arial"/>
+        <a:font script="Hebr" typeface="Arial"/>
+        <a:font script="Thai" typeface="Cordia New"/>
+        <a:font script="Ethi" typeface="Nyala"/>
+        <a:font script="Beng" typeface="Vrinda"/>
+        <a:font script="Gujr" typeface="Shruti"/>
+        <a:font script="Khmr" typeface="DaunPenh"/>
+        <a:font script="Knda" typeface="Tunga"/>
+        <a:font script="Guru" typeface="Raavi"/>
+        <a:font script="Cans" typeface="Euphemia"/>
+        <a:font script="Cher" typeface="Plantagenet Cherokee"/>
+        <a:font script="Yiii" typeface="Microsoft Yi Baiti"/>
+        <a:font script="Tibt" typeface="Microsoft Himalaya"/>
+        <a:font script="Thaa" typeface="MV Boli"/>
+        <a:font script="Deva" typeface="Mangal"/>
+        <a:font script="Telu" typeface="Gautami"/>
+        <a:font script="Taml" typeface="Latha"/>
+        <a:font script="Syrc" typeface="Estrangelo Edessa"/>
+        <a:font script="Orya" typeface="Kalinga"/>
+        <a:font script="Mlym" typeface="Kartika"/>
+        <a:font script="Laoo" typeface="DokChampa"/>
+        <a:font script="Sinh" typeface="Iskoola Pota"/>
+        <a:font script="Mong" typeface="Mongolian Baiti"/>
+        <a:font script="Viet" typeface="Arial"/>
+        <a:font script="Uigh" typeface="Microsoft Uighur"/>
+        <a:font script="Geor" typeface="Sylfaen"/>
+      </a:minorFont>
+    </a:fontScheme>
+    <a:fmtScheme name="Office">
+      <a:fillStyleLst>
+        <a:solidFill>
+          <a:schemeClr val="phClr"/>
+        </a:solidFill>
+        <a:gradFill rotWithShape="1">
+          <a:gsLst>
+            <a:gs pos="0">
+              <a:schemeClr val="phClr">
+                <a:tint val="50000"/>
+                <a:satMod val="300000"/>
+              </a:schemeClr>
+            </a:gs>
+            <a:gs pos="35000">
+              <a:schemeClr val="phClr">
+                <a:tint val="37000"/>
+                <a:satMod val="300000"/>
+              </a:schemeClr>
+            </a:gs>
+            <a:gs pos="100000">
+              <a:schemeClr val="phClr">
+                <a:tint val="15000"/>
+                <a:satMod val="350000"/>
+              </a:schemeClr>
+            </a:gs>
+          </a:gsLst>
+          <a:lin ang="16200000" scaled="1"/>
+        </a:gradFill>
+        <a:gradFill rotWithShape="1">
+          <a:gsLst>
+            <a:gs pos="0">
+              <a:schemeClr val="phClr">
+                <a:tint val="100000"/>
+                <a:shade val="100000"/>
+                <a:satMod val="130000"/>
+              </a:schemeClr>
+            </a:gs>
+            <a:gs pos="100000">
+              <a:schemeClr val="phClr">
+                <a:tint val="50000"/>
+                <a:shade val="100000"/>
+                <a:satMod val="350000"/>
+              </a:schemeClr>
+            </a:gs>
+          </a:gsLst>
+          <a:lin ang="16200000" scaled="0"/>
+        </a:gradFill>
+      </a:fillStyleLst>
+      <a:lnStyleLst>
+        <a:ln w="9525" cap="flat" cmpd="sng" algn="ctr">
+          <a:solidFill>
+            <a:schemeClr val="phClr">
+              <a:shade val="95000"/>
+              <a:satMod val="105000"/>
+            </a:schemeClr>
+          </a:solidFill>
+          <a:prstDash val="solid"/>
+        </a:ln>
+        <a:ln w="25400" cap="flat" cmpd="sng" algn="ctr">
+          <a:solidFill>
+            <a:schemeClr val="phClr"/>
+          </a:solidFill>
+          <a:prstDash val="solid"/>
+        </a:ln>
+        <a:ln w="38100" cap="flat" cmpd="sng" algn="ctr">
+          <a:solidFill>
+            <a:schemeClr val="phClr"/>
+          </a:solidFill>
+          <a:prstDash val="solid"/>
+        </a:ln>
+      </a:lnStyleLst>
+      <a:effectStyleLst>
+        <a:effectStyle>
+          <a:effectLst>
+            <a:outerShdw blurRad="40000" dist="20000" dir="5400000" rotWithShape="0">
+              <a:srgbClr val="000000">
+                <a:alpha val="38000"/>
+              </a:srgbClr>
+            </a:outerShdw>
+          </a:effectLst>
+        </a:effectStyle>
+        <a:effectStyle>
+          <a:effectLst>
+            <a:outerShdw blurRad="40000" dist="23000" dir="5400000" rotWithShape="0">
+              <a:srgbClr val="000000">
+                <a:alpha val="35000"/>
+              </a:srgbClr>
+            </a:outerShdw>
+          </a:effectLst>
+        </a:effectStyle>
+        <a:effectStyle>
+          <a:effectLst>
+            <a:outerShdw blurRad="40000" dist="23000" dir="5400000" rotWithShape="0">
+              <a:srgbClr val="000000">
+                <a:alpha val="35000"/>
+              </a:srgbClr>
+            </a:outerShdw>
+          </a:effectLst>
+          <a:scene3d>
+            <a:camera prst="orthographicFront">
+              <a:rot lat="0" lon="0" rev="0"/>
+            </a:camera>
+            <a:lightRig rig="threePt" dir="t">
+              <a:rot lat="0" lon="0" rev="1200000"/>
+            </a:lightRig>
+          </a:scene3d>
+          <a:sp3d>
+            <a:bevelT w="63500" h="25400"/>
+          </a:sp3d>
+        </a:effectStyle>
+      </a:effectStyleLst>
+      <a:bgFillStyleLst>
+        <a:solidFill>
+          <a:schemeClr val="phClr"/>
+        </a:solidFill>
+        <a:gradFill rotWithShape="1">
+          <a:gsLst>
+            <a:gs pos="0">
+              <a:schemeClr val="phClr">
+                <a:tint val="40000"/>
+                <a:satMod val="350000"/>
+              </a:schemeClr>
+            </a:gs>
+            <a:gs pos="40000">
+              <a:schemeClr val="phClr">
+                <a:tint val="45000"/>
+                <a:shade val="99000"/>
+                <a:satMod val="350000"/>
+              </a:schemeClr>
+            </a:gs>
+            <a:gs pos="100000">
+              <a:schemeClr val="phClr">
+                <a:shade val="20000"/>
+                <a:satMod val="255000"/>
+              </a:schemeClr>
+            </a:gs>
+          </a:gsLst>
+          <a:path path="circle">
+            <a:fillToRect l="50000" t="-80000" r="50000" b="180000"/>
+          </a:path>
+        </a:gradFill>
+        <a:gradFill rotWithShape="1">
+          <a:gsLst>
+            <a:gs pos="0">
+              <a:schemeClr val="phClr">
+                <a:tint val="80000"/>
+                <a:satMod val="300000"/>
+              </a:schemeClr>
+            </a:gs>
+            <a:gs pos="100000">
+              <a:schemeClr val="phClr">
+                <a:shade val="30000"/>
+                <a:satMod val="200000"/>
+              </a:schemeClr>
+            </a:gs>
+          </a:gsLst>
+          <a:path path="circle">
+            <a:fillToRect l="50000" t="50000" r="50000" b="50000"/>
+          </a:path>
+        </a:gradFill>
+      </a:bgFillStyleLst>
+    </a:fmtScheme>
+  </a:themeElements>
+  <a:objectDefaults/>
+  <a:extraClrSchemeLst/>
+</a:theme>
+</file>
+
+<file path=ppt/theme/theme2.xml><?xml version="1.0" encoding="utf-8"?>
+<a:theme xmlns:a="http://schemas.openxmlformats.org/drawingml/2006/main">
   <a:themeElements>
     <a:clrScheme name="Default">
       <a:dk1>
@@ -10688,284 +10925,7 @@
       </a:bgFillStyleLst>
     </a:fmtScheme>
   </a:themeElements>
-</a:theme>
-</file>
-
-<file path=ppt/theme/theme2.xml><?xml version="1.0" encoding="utf-8"?>
-<a:theme xmlns:a="http://schemas.openxmlformats.org/drawingml/2006/main" xmlns:r="http://schemas.openxmlformats.org/officeDocument/2006/relationships" name="My Presentation Template">
-  <a:themeElements>
-    <a:clrScheme name="Simple Light">
-      <a:dk1>
-        <a:srgbClr val="191919"/>
-      </a:dk1>
-      <a:lt1>
-        <a:srgbClr val="EFEFEF"/>
-      </a:lt1>
-      <a:dk2>
-        <a:srgbClr val="707070"/>
-      </a:dk2>
-      <a:lt2>
-        <a:srgbClr val="C1C1BF"/>
-      </a:lt2>
-      <a:accent1>
-        <a:srgbClr val="FFFFFF"/>
-      </a:accent1>
-      <a:accent2>
-        <a:srgbClr val="FFFFFF"/>
-      </a:accent2>
-      <a:accent3>
-        <a:srgbClr val="FFFFFF"/>
-      </a:accent3>
-      <a:accent4>
-        <a:srgbClr val="FFFFFF"/>
-      </a:accent4>
-      <a:accent5>
-        <a:srgbClr val="FFFFFF"/>
-      </a:accent5>
-      <a:accent6>
-        <a:srgbClr val="FFFFFF"/>
-      </a:accent6>
-      <a:hlink>
-        <a:srgbClr val="191919"/>
-      </a:hlink>
-      <a:folHlink>
-        <a:srgbClr val="0097A7"/>
-      </a:folHlink>
-    </a:clrScheme>
-    <a:fontScheme name="Office">
-      <a:majorFont>
-        <a:latin typeface="Arial"/>
-        <a:ea typeface=""/>
-        <a:cs typeface=""/>
-        <a:font script="Jpan" typeface="ＭＳ Ｐゴシック"/>
-        <a:font script="Hang" typeface="맑은 고딕"/>
-        <a:font script="Hans" typeface="宋体"/>
-        <a:font script="Hant" typeface="新細明體"/>
-        <a:font script="Arab" typeface="Times New Roman"/>
-        <a:font script="Hebr" typeface="Times New Roman"/>
-        <a:font script="Thai" typeface="Angsana New"/>
-        <a:font script="Ethi" typeface="Nyala"/>
-        <a:font script="Beng" typeface="Vrinda"/>
-        <a:font script="Gujr" typeface="Shruti"/>
-        <a:font script="Khmr" typeface="MoolBoran"/>
-        <a:font script="Knda" typeface="Tunga"/>
-        <a:font script="Guru" typeface="Raavi"/>
-        <a:font script="Cans" typeface="Euphemia"/>
-        <a:font script="Cher" typeface="Plantagenet Cherokee"/>
-        <a:font script="Yiii" typeface="Microsoft Yi Baiti"/>
-        <a:font script="Tibt" typeface="Microsoft Himalaya"/>
-        <a:font script="Thaa" typeface="MV Boli"/>
-        <a:font script="Deva" typeface="Mangal"/>
-        <a:font script="Telu" typeface="Gautami"/>
-        <a:font script="Taml" typeface="Latha"/>
-        <a:font script="Syrc" typeface="Estrangelo Edessa"/>
-        <a:font script="Orya" typeface="Kalinga"/>
-        <a:font script="Mlym" typeface="Kartika"/>
-        <a:font script="Laoo" typeface="DokChampa"/>
-        <a:font script="Sinh" typeface="Iskoola Pota"/>
-        <a:font script="Mong" typeface="Mongolian Baiti"/>
-        <a:font script="Viet" typeface="Times New Roman"/>
-        <a:font script="Uigh" typeface="Microsoft Uighur"/>
-        <a:font script="Geor" typeface="Sylfaen"/>
-      </a:majorFont>
-      <a:minorFont>
-        <a:latin typeface="Arial"/>
-        <a:ea typeface=""/>
-        <a:cs typeface=""/>
-        <a:font script="Jpan" typeface="ＭＳ Ｐゴシック"/>
-        <a:font script="Hang" typeface="맑은 고딕"/>
-        <a:font script="Hans" typeface="宋体"/>
-        <a:font script="Hant" typeface="新細明體"/>
-        <a:font script="Arab" typeface="Arial"/>
-        <a:font script="Hebr" typeface="Arial"/>
-        <a:font script="Thai" typeface="Cordia New"/>
-        <a:font script="Ethi" typeface="Nyala"/>
-        <a:font script="Beng" typeface="Vrinda"/>
-        <a:font script="Gujr" typeface="Shruti"/>
-        <a:font script="Khmr" typeface="DaunPenh"/>
-        <a:font script="Knda" typeface="Tunga"/>
-        <a:font script="Guru" typeface="Raavi"/>
-        <a:font script="Cans" typeface="Euphemia"/>
-        <a:font script="Cher" typeface="Plantagenet Cherokee"/>
-        <a:font script="Yiii" typeface="Microsoft Yi Baiti"/>
-        <a:font script="Tibt" typeface="Microsoft Himalaya"/>
-        <a:font script="Thaa" typeface="MV Boli"/>
-        <a:font script="Deva" typeface="Mangal"/>
-        <a:font script="Telu" typeface="Gautami"/>
-        <a:font script="Taml" typeface="Latha"/>
-        <a:font script="Syrc" typeface="Estrangelo Edessa"/>
-        <a:font script="Orya" typeface="Kalinga"/>
-        <a:font script="Mlym" typeface="Kartika"/>
-        <a:font script="Laoo" typeface="DokChampa"/>
-        <a:font script="Sinh" typeface="Iskoola Pota"/>
-        <a:font script="Mong" typeface="Mongolian Baiti"/>
-        <a:font script="Viet" typeface="Arial"/>
-        <a:font script="Uigh" typeface="Microsoft Uighur"/>
-        <a:font script="Geor" typeface="Sylfaen"/>
-      </a:minorFont>
-    </a:fontScheme>
-    <a:fmtScheme name="Office">
-      <a:fillStyleLst>
-        <a:solidFill>
-          <a:schemeClr val="phClr"/>
-        </a:solidFill>
-        <a:gradFill rotWithShape="1">
-          <a:gsLst>
-            <a:gs pos="0">
-              <a:schemeClr val="phClr">
-                <a:tint val="50000"/>
-                <a:satMod val="300000"/>
-              </a:schemeClr>
-            </a:gs>
-            <a:gs pos="35000">
-              <a:schemeClr val="phClr">
-                <a:tint val="37000"/>
-                <a:satMod val="300000"/>
-              </a:schemeClr>
-            </a:gs>
-            <a:gs pos="100000">
-              <a:schemeClr val="phClr">
-                <a:tint val="15000"/>
-                <a:satMod val="350000"/>
-              </a:schemeClr>
-            </a:gs>
-          </a:gsLst>
-          <a:lin ang="16200000" scaled="1"/>
-        </a:gradFill>
-        <a:gradFill rotWithShape="1">
-          <a:gsLst>
-            <a:gs pos="0">
-              <a:schemeClr val="phClr">
-                <a:tint val="100000"/>
-                <a:shade val="100000"/>
-                <a:satMod val="130000"/>
-              </a:schemeClr>
-            </a:gs>
-            <a:gs pos="100000">
-              <a:schemeClr val="phClr">
-                <a:tint val="50000"/>
-                <a:shade val="100000"/>
-                <a:satMod val="350000"/>
-              </a:schemeClr>
-            </a:gs>
-          </a:gsLst>
-          <a:lin ang="16200000" scaled="0"/>
-        </a:gradFill>
-      </a:fillStyleLst>
-      <a:lnStyleLst>
-        <a:ln w="9525" cap="flat" cmpd="sng" algn="ctr">
-          <a:solidFill>
-            <a:schemeClr val="phClr">
-              <a:shade val="95000"/>
-              <a:satMod val="105000"/>
-            </a:schemeClr>
-          </a:solidFill>
-          <a:prstDash val="solid"/>
-        </a:ln>
-        <a:ln w="25400" cap="flat" cmpd="sng" algn="ctr">
-          <a:solidFill>
-            <a:schemeClr val="phClr"/>
-          </a:solidFill>
-          <a:prstDash val="solid"/>
-        </a:ln>
-        <a:ln w="38100" cap="flat" cmpd="sng" algn="ctr">
-          <a:solidFill>
-            <a:schemeClr val="phClr"/>
-          </a:solidFill>
-          <a:prstDash val="solid"/>
-        </a:ln>
-      </a:lnStyleLst>
-      <a:effectStyleLst>
-        <a:effectStyle>
-          <a:effectLst>
-            <a:outerShdw blurRad="40000" dist="20000" dir="5400000" rotWithShape="0">
-              <a:srgbClr val="000000">
-                <a:alpha val="38000"/>
-              </a:srgbClr>
-            </a:outerShdw>
-          </a:effectLst>
-        </a:effectStyle>
-        <a:effectStyle>
-          <a:effectLst>
-            <a:outerShdw blurRad="40000" dist="23000" dir="5400000" rotWithShape="0">
-              <a:srgbClr val="000000">
-                <a:alpha val="35000"/>
-              </a:srgbClr>
-            </a:outerShdw>
-          </a:effectLst>
-        </a:effectStyle>
-        <a:effectStyle>
-          <a:effectLst>
-            <a:outerShdw blurRad="40000" dist="23000" dir="5400000" rotWithShape="0">
-              <a:srgbClr val="000000">
-                <a:alpha val="35000"/>
-              </a:srgbClr>
-            </a:outerShdw>
-          </a:effectLst>
-          <a:scene3d>
-            <a:camera prst="orthographicFront">
-              <a:rot lat="0" lon="0" rev="0"/>
-            </a:camera>
-            <a:lightRig rig="threePt" dir="t">
-              <a:rot lat="0" lon="0" rev="1200000"/>
-            </a:lightRig>
-          </a:scene3d>
-          <a:sp3d>
-            <a:bevelT w="63500" h="25400"/>
-          </a:sp3d>
-        </a:effectStyle>
-      </a:effectStyleLst>
-      <a:bgFillStyleLst>
-        <a:solidFill>
-          <a:schemeClr val="phClr"/>
-        </a:solidFill>
-        <a:gradFill rotWithShape="1">
-          <a:gsLst>
-            <a:gs pos="0">
-              <a:schemeClr val="phClr">
-                <a:tint val="40000"/>
-                <a:satMod val="350000"/>
-              </a:schemeClr>
-            </a:gs>
-            <a:gs pos="40000">
-              <a:schemeClr val="phClr">
-                <a:tint val="45000"/>
-                <a:shade val="99000"/>
-                <a:satMod val="350000"/>
-              </a:schemeClr>
-            </a:gs>
-            <a:gs pos="100000">
-              <a:schemeClr val="phClr">
-                <a:shade val="20000"/>
-                <a:satMod val="255000"/>
-              </a:schemeClr>
-            </a:gs>
-          </a:gsLst>
-          <a:path path="circle">
-            <a:fillToRect l="50000" t="-80000" r="50000" b="180000"/>
-          </a:path>
-        </a:gradFill>
-        <a:gradFill rotWithShape="1">
-          <a:gsLst>
-            <a:gs pos="0">
-              <a:schemeClr val="phClr">
-                <a:tint val="80000"/>
-                <a:satMod val="300000"/>
-              </a:schemeClr>
-            </a:gs>
-            <a:gs pos="100000">
-              <a:schemeClr val="phClr">
-                <a:shade val="30000"/>
-                <a:satMod val="200000"/>
-              </a:schemeClr>
-            </a:gs>
-          </a:gsLst>
-          <a:path path="circle">
-            <a:fillToRect l="50000" t="50000" r="50000" b="50000"/>
-          </a:path>
-        </a:gradFill>
-      </a:bgFillStyleLst>
-    </a:fmtScheme>
-  </a:themeElements>
+  <a:objectDefaults/>
+  <a:extraClrSchemeLst/>
 </a:theme>
 </file>